--- a/reports/ISAF_Recidivism_Presentation.pptx
+++ b/reports/ISAF_Recidivism_Presentation.pptx
@@ -17,6 +17,9 @@
     <p:sldId id="265" r:id="rId16"/>
     <p:sldId id="266" r:id="rId17"/>
     <p:sldId id="267" r:id="rId18"/>
+    <p:sldId id="268" r:id="rId19"/>
+    <p:sldId id="269" r:id="rId20"/>
+    <p:sldId id="270" r:id="rId21"/>
   </p:sldIdLst>
   <p:sldSz cx="12191695" cy="6858000" type="screen4x3"/>
   <p:notesSz cx="6858000" cy="9144000"/>
@@ -3116,7 +3119,7 @@
         <p:spPr>
           <a:xfrm>
             <a:off x="658368" y="530352"/>
-            <a:ext cx="5486400" cy="274320"/>
+            <a:ext cx="7315200" cy="274320"/>
           </a:xfrm>
           <a:prstGeom prst="rect">
             <a:avLst/>
@@ -3152,7 +3155,7 @@
         <p:spPr>
           <a:xfrm>
             <a:off x="658368" y="1298448"/>
-            <a:ext cx="6400800" cy="1508760"/>
+            <a:ext cx="7315200" cy="1508760"/>
           </a:xfrm>
           <a:prstGeom prst="rect">
             <a:avLst/>
@@ -3166,7 +3169,7 @@
           <a:lstStyle/>
           <a:p>
             <a:pPr algn="l">
-              <a:defRPr sz="3800" b="1">
+              <a:defRPr sz="3600" b="1">
                 <a:solidFill>
                   <a:srgbClr val="FFFFFF"/>
                 </a:solidFill>
@@ -3174,11 +3177,11 @@
               </a:defRPr>
             </a:pPr>
             <a:r>
-              <a:t>A useful score</a:t>
+              <a:t>Better than the tool</a:t>
             </a:r>
             <a:br/>
             <a:r>
-              <a:t>must earn trust</a:t>
+              <a:t>agencies already use</a:t>
             </a:r>
           </a:p>
         </p:txBody>
@@ -3192,7 +3195,7 @@
         <p:spPr>
           <a:xfrm>
             <a:off x="694944" y="3063240"/>
-            <a:ext cx="5852160" cy="1143000"/>
+            <a:ext cx="6035040" cy="1280160"/>
           </a:xfrm>
           <a:prstGeom prst="rect">
             <a:avLst/>
@@ -3206,7 +3209,7 @@
           <a:lstStyle/>
           <a:p>
             <a:pPr algn="l">
-              <a:defRPr sz="1800" b="0">
+              <a:defRPr sz="1700" b="0">
                 <a:solidFill>
                   <a:srgbClr val="F0F4F8"/>
                 </a:solidFill>
@@ -3214,7 +3217,7 @@
               </a:defRPr>
             </a:pPr>
             <a:r>
-              <a:t>Comparing logistic regression, XGBoost and TabICLv2 across performance, interpretability, stability and fairness</a:t>
+              <a:t>For a risk-assessment software vendor: which three-year re-arrest model to ship, judged on performance, interpretability, stability and fairness</a:t>
             </a:r>
           </a:p>
         </p:txBody>
@@ -3250,7 +3253,7 @@
               </a:defRPr>
             </a:pPr>
             <a:r>
-              <a:t>Ryan Balech and team · HEC Paris · Fall 2026</a:t>
+              <a:t>Team 11 · HEC Paris · Fall 2026</a:t>
             </a:r>
           </a:p>
         </p:txBody>
@@ -3331,7 +3334,7 @@
               </a:defRPr>
             </a:pPr>
             <a:r>
-              <a:t>25,835 PEOPLE</a:t>
+              <a:t>0.60 → 0.73</a:t>
             </a:r>
           </a:p>
         </p:txBody>
@@ -3367,7 +3370,7 @@
               </a:defRPr>
             </a:pPr>
             <a:r>
-              <a:t>Georgia parole cohort</a:t>
+              <a:t>Incumbent score vs our models (ROC AUC)</a:t>
             </a:r>
             <a:br/>
             <a:br/>
@@ -3439,7 +3442,7 @@
               </a:defRPr>
             </a:pPr>
             <a:r>
-              <a:t>09 · DECISION</a:t>
+              <a:t>09 · STABILITY</a:t>
             </a:r>
           </a:p>
         </p:txBody>
@@ -3467,7 +3470,7 @@
           <a:lstStyle/>
           <a:p>
             <a:pPr algn="l">
-              <a:defRPr sz="2700" b="1">
+              <a:defRPr sz="2600" b="1">
                 <a:solidFill>
                   <a:srgbClr val="FFFFFF"/>
                 </a:solidFill>
@@ -3475,7 +3478,7 @@
               </a:defRPr>
             </a:pPr>
             <a:r>
-              <a:t>Recommend XGBoost for a controlled pilot</a:t>
+              <a:t>Structural stability across refits on resampled data</a:t>
             </a:r>
           </a:p>
         </p:txBody>
@@ -3523,16 +3526,157 @@
           </a:p>
         </p:txBody>
       </p:sp>
-      <p:sp>
-        <p:nvSpPr>
-          <p:cNvPr id="5" name="Rounded Rectangle 4"/>
+      <p:pic>
+        <p:nvPicPr>
+          <p:cNvPr id="5" name="Picture 4" descr="structural_stability.png"/>
+          <p:cNvPicPr>
+            <a:picLocks noChangeAspect="1"/>
+          </p:cNvPicPr>
+          <p:nvPr/>
+        </p:nvPicPr>
+        <p:blipFill>
+          <a:blip r:embed="rId2"/>
+          <a:stretch>
+            <a:fillRect/>
+          </a:stretch>
+        </p:blipFill>
+        <p:spPr>
+          <a:xfrm>
+            <a:off x="457200" y="1600200"/>
+            <a:ext cx="7589520" cy="1992276"/>
+          </a:xfrm>
+          <a:prstGeom prst="rect">
+            <a:avLst/>
+          </a:prstGeom>
+        </p:spPr>
+      </p:pic>
+      <p:sp>
+        <p:nvSpPr>
+          <p:cNvPr id="6" name="Rounded Rectangle 5"/>
           <p:cNvSpPr/>
           <p:nvPr/>
         </p:nvSpPr>
         <p:spPr>
           <a:xfrm>
-            <a:off x="731520" y="1645920"/>
-            <a:ext cx="5257800" cy="4251960"/>
+            <a:off x="8549640" y="1737360"/>
+            <a:ext cx="2423160" cy="1261872"/>
+          </a:xfrm>
+          <a:prstGeom prst="roundRect">
+            <a:avLst/>
+          </a:prstGeom>
+          <a:solidFill>
+            <a:srgbClr val="143058"/>
+          </a:solidFill>
+          <a:ln>
+            <a:solidFill>
+              <a:srgbClr val="D64343"/>
+            </a:solidFill>
+          </a:ln>
+        </p:spPr>
+        <p:style>
+          <a:lnRef idx="1">
+            <a:schemeClr val="accent1"/>
+          </a:lnRef>
+          <a:fillRef idx="3">
+            <a:schemeClr val="accent1"/>
+          </a:fillRef>
+          <a:effectRef idx="2">
+            <a:schemeClr val="accent1"/>
+          </a:effectRef>
+          <a:fontRef idx="minor">
+            <a:schemeClr val="lt1"/>
+          </a:fontRef>
+        </p:style>
+        <p:txBody>
+          <a:bodyPr rtlCol="0" anchor="ctr"/>
+          <a:lstStyle/>
+          <a:p>
+            <a:pPr algn="ctr"/>
+          </a:p>
+        </p:txBody>
+      </p:sp>
+      <p:sp>
+        <p:nvSpPr>
+          <p:cNvPr id="7" name="TextBox 6"/>
+          <p:cNvSpPr txBox="1"/>
+          <p:nvPr/>
+        </p:nvSpPr>
+        <p:spPr>
+          <a:xfrm>
+            <a:off x="8659367" y="1874519"/>
+            <a:ext cx="2194560" cy="438912"/>
+          </a:xfrm>
+          <a:prstGeom prst="rect">
+            <a:avLst/>
+          </a:prstGeom>
+          <a:noFill/>
+        </p:spPr>
+        <p:txBody>
+          <a:bodyPr wrap="square" anchor="t">
+            <a:spAutoFit/>
+          </a:bodyPr>
+          <a:lstStyle/>
+          <a:p>
+            <a:pPr algn="ctr">
+              <a:defRPr sz="2400" b="1">
+                <a:solidFill>
+                  <a:srgbClr val="D64343"/>
+                </a:solidFill>
+                <a:latin typeface="Aptos"/>
+              </a:defRPr>
+            </a:pPr>
+            <a:r>
+              <a:t>0.045</a:t>
+            </a:r>
+          </a:p>
+        </p:txBody>
+      </p:sp>
+      <p:sp>
+        <p:nvSpPr>
+          <p:cNvPr id="8" name="TextBox 7"/>
+          <p:cNvSpPr txBox="1"/>
+          <p:nvPr/>
+        </p:nvSpPr>
+        <p:spPr>
+          <a:xfrm>
+            <a:off x="8659367" y="2395728"/>
+            <a:ext cx="2194560" cy="274320"/>
+          </a:xfrm>
+          <a:prstGeom prst="rect">
+            <a:avLst/>
+          </a:prstGeom>
+          <a:noFill/>
+        </p:spPr>
+        <p:txBody>
+          <a:bodyPr wrap="square" anchor="t">
+            <a:spAutoFit/>
+          </a:bodyPr>
+          <a:lstStyle/>
+          <a:p>
+            <a:pPr algn="ctr">
+              <a:defRPr sz="1100" b="1">
+                <a:solidFill>
+                  <a:srgbClr val="FFFFFF"/>
+                </a:solidFill>
+                <a:latin typeface="Aptos"/>
+              </a:defRPr>
+            </a:pPr>
+            <a:r>
+              <a:t>SCORE DRIFT · TABICL</a:t>
+            </a:r>
+          </a:p>
+        </p:txBody>
+      </p:sp>
+      <p:sp>
+        <p:nvSpPr>
+          <p:cNvPr id="9" name="Rounded Rectangle 8"/>
+          <p:cNvSpPr/>
+          <p:nvPr/>
+        </p:nvSpPr>
+        <p:spPr>
+          <a:xfrm>
+            <a:off x="8549640" y="3200400"/>
+            <a:ext cx="2423160" cy="1261872"/>
           </a:xfrm>
           <a:prstGeom prst="roundRect">
             <a:avLst/>
@@ -3570,14 +3714,14 @@
       </p:sp>
       <p:sp>
         <p:nvSpPr>
-          <p:cNvPr id="6" name="TextBox 5"/>
-          <p:cNvSpPr txBox="1"/>
-          <p:nvPr/>
-        </p:nvSpPr>
-        <p:spPr>
-          <a:xfrm>
-            <a:off x="960120" y="1920240"/>
-            <a:ext cx="4800600" cy="365760"/>
+          <p:cNvPr id="10" name="TextBox 9"/>
+          <p:cNvSpPr txBox="1"/>
+          <p:nvPr/>
+        </p:nvSpPr>
+        <p:spPr>
+          <a:xfrm>
+            <a:off x="8659367" y="3337560"/>
+            <a:ext cx="2194560" cy="438912"/>
           </a:xfrm>
           <a:prstGeom prst="rect">
             <a:avLst/>
@@ -3591,7 +3735,7 @@
           <a:lstStyle/>
           <a:p>
             <a:pPr algn="ctr">
-              <a:defRPr sz="2000" b="1">
+              <a:defRPr sz="2400" b="1">
                 <a:solidFill>
                   <a:srgbClr val="FB8500"/>
                 </a:solidFill>
@@ -3599,21 +3743,21 @@
               </a:defRPr>
             </a:pPr>
             <a:r>
-              <a:t>WHY</a:t>
-            </a:r>
-          </a:p>
-        </p:txBody>
-      </p:sp>
-      <p:sp>
-        <p:nvSpPr>
-          <p:cNvPr id="7" name="TextBox 6"/>
-          <p:cNvSpPr txBox="1"/>
-          <p:nvPr/>
-        </p:nvSpPr>
-        <p:spPr>
-          <a:xfrm>
-            <a:off x="1051560" y="2633472"/>
-            <a:ext cx="4617720" cy="3017520"/>
+              <a:t>73–77%</a:t>
+            </a:r>
+          </a:p>
+        </p:txBody>
+      </p:sp>
+      <p:sp>
+        <p:nvSpPr>
+          <p:cNvPr id="11" name="TextBox 10"/>
+          <p:cNvSpPr txBox="1"/>
+          <p:nvPr/>
+        </p:nvSpPr>
+        <p:spPr>
+          <a:xfrm>
+            <a:off x="8659367" y="3858768"/>
+            <a:ext cx="2194560" cy="274320"/>
           </a:xfrm>
           <a:prstGeom prst="rect">
             <a:avLst/>
@@ -3627,89 +3771,29 @@
           <a:lstStyle/>
           <a:p>
             <a:pPr algn="ctr">
-              <a:defRPr sz="1500" b="0">
-                <a:solidFill>
-                  <a:srgbClr val="F0F4F8"/>
-                </a:solidFill>
-                <a:latin typeface="Aptos"/>
-              </a:defRPr>
-            </a:pPr>
-            <a:r>
-              <a:t>Near-tied accuracy</a:t>
-            </a:r>
-            <a:br/>
-            <a:br/>
-            <a:r>
-              <a:t>Best calibration</a:t>
-            </a:r>
-            <a:br/>
-            <a:br/>
-            <a:r>
-              <a:t>Smallest observed race and gender FPR gaps</a:t>
-            </a:r>
-            <a:br/>
-            <a:br/>
-            <a:r>
-              <a:t>Fast operations</a:t>
-            </a:r>
-          </a:p>
-        </p:txBody>
-      </p:sp>
-      <p:sp>
-        <p:nvSpPr>
-          <p:cNvPr id="8" name="Rounded Rectangle 7"/>
-          <p:cNvSpPr/>
-          <p:nvPr/>
-        </p:nvSpPr>
-        <p:spPr>
-          <a:xfrm>
-            <a:off x="6217920" y="1645920"/>
-            <a:ext cx="5257800" cy="4251960"/>
-          </a:xfrm>
-          <a:prstGeom prst="roundRect">
-            <a:avLst/>
-          </a:prstGeom>
-          <a:solidFill>
-            <a:srgbClr val="143058"/>
-          </a:solidFill>
-          <a:ln>
-            <a:solidFill>
-              <a:srgbClr val="7B2CBF"/>
-            </a:solidFill>
-          </a:ln>
-        </p:spPr>
-        <p:style>
-          <a:lnRef idx="1">
-            <a:schemeClr val="accent1"/>
-          </a:lnRef>
-          <a:fillRef idx="3">
-            <a:schemeClr val="accent1"/>
-          </a:fillRef>
-          <a:effectRef idx="2">
-            <a:schemeClr val="accent1"/>
-          </a:effectRef>
-          <a:fontRef idx="minor">
-            <a:schemeClr val="lt1"/>
-          </a:fontRef>
-        </p:style>
-        <p:txBody>
-          <a:bodyPr rtlCol="0" anchor="ctr"/>
-          <a:lstStyle/>
-          <a:p>
-            <a:pPr algn="ctr"/>
-          </a:p>
-        </p:txBody>
-      </p:sp>
-      <p:sp>
-        <p:nvSpPr>
-          <p:cNvPr id="9" name="TextBox 8"/>
-          <p:cNvSpPr txBox="1"/>
-          <p:nvPr/>
-        </p:nvSpPr>
-        <p:spPr>
-          <a:xfrm>
-            <a:off x="6446520" y="1920240"/>
-            <a:ext cx="4800600" cy="365760"/>
+              <a:defRPr sz="1100" b="1">
+                <a:solidFill>
+                  <a:srgbClr val="FFFFFF"/>
+                </a:solidFill>
+                <a:latin typeface="Aptos"/>
+              </a:defRPr>
+            </a:pPr>
+            <a:r>
+              <a:t>TOP-20% OVERLAP</a:t>
+            </a:r>
+          </a:p>
+        </p:txBody>
+      </p:sp>
+      <p:sp>
+        <p:nvSpPr>
+          <p:cNvPr id="12" name="TextBox 11"/>
+          <p:cNvSpPr txBox="1"/>
+          <p:nvPr/>
+        </p:nvSpPr>
+        <p:spPr>
+          <a:xfrm>
+            <a:off x="914400" y="6172200"/>
+            <a:ext cx="10058400" cy="365760"/>
           </a:xfrm>
           <a:prstGeom prst="rect">
             <a:avLst/>
@@ -3723,73 +3807,22 @@
           <a:lstStyle/>
           <a:p>
             <a:pPr algn="ctr">
-              <a:defRPr sz="2000" b="1">
-                <a:solidFill>
-                  <a:srgbClr val="7B2CBF"/>
-                </a:solidFill>
-                <a:latin typeface="Aptos"/>
-              </a:defRPr>
-            </a:pPr>
-            <a:r>
-              <a:t>CONDITIONS</a:t>
-            </a:r>
-          </a:p>
-        </p:txBody>
-      </p:sp>
-      <p:sp>
-        <p:nvSpPr>
-          <p:cNvPr id="10" name="TextBox 9"/>
-          <p:cNvSpPr txBox="1"/>
-          <p:nvPr/>
-        </p:nvSpPr>
-        <p:spPr>
-          <a:xfrm>
-            <a:off x="6537959" y="2633472"/>
-            <a:ext cx="4617720" cy="3017520"/>
-          </a:xfrm>
-          <a:prstGeom prst="rect">
-            <a:avLst/>
-          </a:prstGeom>
-          <a:noFill/>
-        </p:spPr>
-        <p:txBody>
-          <a:bodyPr wrap="square" anchor="t">
-            <a:spAutoFit/>
-          </a:bodyPr>
-          <a:lstStyle/>
-          <a:p>
-            <a:pPr algn="ctr">
-              <a:defRPr sz="1500" b="0">
-                <a:solidFill>
-                  <a:srgbClr val="F0F4F8"/>
-                </a:solidFill>
-                <a:latin typeface="Aptos"/>
-              </a:defRPr>
-            </a:pPr>
-            <a:r>
-              <a:t>Benefit-only allocation</a:t>
-            </a:r>
-            <a:br/>
-            <a:br/>
-            <a:r>
-              <a:t>Logistic challenger</a:t>
-            </a:r>
-            <a:br/>
-            <a:br/>
-            <a:r>
-              <a:t>Prospective shadow validation</a:t>
-            </a:r>
-            <a:br/>
-            <a:br/>
-            <a:r>
-              <a:t>Appeal, override logs and stop rules</a:t>
-            </a:r>
-          </a:p>
-        </p:txBody>
-      </p:sp>
-      <p:sp>
-        <p:nvSpPr>
-          <p:cNvPr id="11" name="TextBox 10"/>
+              <a:defRPr sz="1100" b="1">
+                <a:solidFill>
+                  <a:srgbClr val="828FA0"/>
+                </a:solidFill>
+                <a:latin typeface="Aptos"/>
+              </a:defRPr>
+            </a:pPr>
+            <a:r>
+              <a:t>~1 person in 4 changes priority status across refits — scores need governance. TabICLv2 is least stable (4 refits vs 8, a stated cost trade-off).</a:t>
+            </a:r>
+          </a:p>
+        </p:txBody>
+      </p:sp>
+      <p:sp>
+        <p:nvSpPr>
+          <p:cNvPr id="13" name="TextBox 12"/>
           <p:cNvSpPr txBox="1"/>
           <p:nvPr/>
         </p:nvSpPr>
@@ -3825,7 +3858,7 @@
       </p:sp>
       <p:sp>
         <p:nvSpPr>
-          <p:cNvPr id="12" name="TextBox 11"/>
+          <p:cNvPr id="14" name="TextBox 13"/>
           <p:cNvSpPr txBox="1"/>
           <p:nvPr/>
         </p:nvSpPr>
@@ -3916,7 +3949,7 @@
               </a:defRPr>
             </a:pPr>
             <a:r>
-              <a:t>10 · CLIENT EXPERIENCE</a:t>
+              <a:t>10 · SUBGROUP AUDIT</a:t>
             </a:r>
           </a:p>
         </p:txBody>
@@ -3944,7 +3977,7 @@
           <a:lstStyle/>
           <a:p>
             <a:pPr algn="l">
-              <a:defRPr sz="2700" b="1">
+              <a:defRPr sz="2600" b="1">
                 <a:solidFill>
                   <a:srgbClr val="FFFFFF"/>
                 </a:solidFill>
@@ -3952,7 +3985,7 @@
               </a:defRPr>
             </a:pPr>
             <a:r>
-              <a:t>The application makes trade-offs testable</a:t>
+              <a:t>Fairness, audited where we actually deploy</a:t>
             </a:r>
           </a:p>
         </p:txBody>
@@ -4000,16 +4033,274 @@
           </a:p>
         </p:txBody>
       </p:sp>
-      <p:sp>
-        <p:nvSpPr>
-          <p:cNvPr id="5" name="Rounded Rectangle 4"/>
+      <p:pic>
+        <p:nvPicPr>
+          <p:cNvPr id="5" name="Picture 4" descr="fairness_operating_point.png"/>
+          <p:cNvPicPr>
+            <a:picLocks noChangeAspect="1"/>
+          </p:cNvPicPr>
+          <p:nvPr/>
+        </p:nvPicPr>
+        <p:blipFill>
+          <a:blip r:embed="rId2"/>
+          <a:stretch>
+            <a:fillRect/>
+          </a:stretch>
+        </p:blipFill>
+        <p:spPr>
+          <a:xfrm>
+            <a:off x="365760" y="1554480"/>
+            <a:ext cx="7772400" cy="2809534"/>
+          </a:xfrm>
+          <a:prstGeom prst="rect">
+            <a:avLst/>
+          </a:prstGeom>
+        </p:spPr>
+      </p:pic>
+      <p:sp>
+        <p:nvSpPr>
+          <p:cNvPr id="6" name="Rounded Rectangle 5"/>
           <p:cNvSpPr/>
           <p:nvPr/>
         </p:nvSpPr>
         <p:spPr>
           <a:xfrm>
-            <a:off x="685800" y="1600200"/>
-            <a:ext cx="5212080" cy="1572768"/>
+            <a:off x="8549640" y="1737360"/>
+            <a:ext cx="2423160" cy="1261872"/>
+          </a:xfrm>
+          <a:prstGeom prst="roundRect">
+            <a:avLst/>
+          </a:prstGeom>
+          <a:solidFill>
+            <a:srgbClr val="143058"/>
+          </a:solidFill>
+          <a:ln>
+            <a:solidFill>
+              <a:srgbClr val="00B4B4"/>
+            </a:solidFill>
+          </a:ln>
+        </p:spPr>
+        <p:style>
+          <a:lnRef idx="1">
+            <a:schemeClr val="accent1"/>
+          </a:lnRef>
+          <a:fillRef idx="3">
+            <a:schemeClr val="accent1"/>
+          </a:fillRef>
+          <a:effectRef idx="2">
+            <a:schemeClr val="accent1"/>
+          </a:effectRef>
+          <a:fontRef idx="minor">
+            <a:schemeClr val="lt1"/>
+          </a:fontRef>
+        </p:style>
+        <p:txBody>
+          <a:bodyPr rtlCol="0" anchor="ctr"/>
+          <a:lstStyle/>
+          <a:p>
+            <a:pPr algn="ctr"/>
+          </a:p>
+        </p:txBody>
+      </p:sp>
+      <p:sp>
+        <p:nvSpPr>
+          <p:cNvPr id="7" name="TextBox 6"/>
+          <p:cNvSpPr txBox="1"/>
+          <p:nvPr/>
+        </p:nvSpPr>
+        <p:spPr>
+          <a:xfrm>
+            <a:off x="8659367" y="1874519"/>
+            <a:ext cx="2194560" cy="438912"/>
+          </a:xfrm>
+          <a:prstGeom prst="rect">
+            <a:avLst/>
+          </a:prstGeom>
+          <a:noFill/>
+        </p:spPr>
+        <p:txBody>
+          <a:bodyPr wrap="square" anchor="t">
+            <a:spAutoFit/>
+          </a:bodyPr>
+          <a:lstStyle/>
+          <a:p>
+            <a:pPr algn="ctr">
+              <a:defRPr sz="2400" b="1">
+                <a:solidFill>
+                  <a:srgbClr val="00B4B4"/>
+                </a:solidFill>
+                <a:latin typeface="Aptos"/>
+              </a:defRPr>
+            </a:pPr>
+            <a:r>
+              <a:t>0.036</a:t>
+            </a:r>
+          </a:p>
+        </p:txBody>
+      </p:sp>
+      <p:sp>
+        <p:nvSpPr>
+          <p:cNvPr id="8" name="TextBox 7"/>
+          <p:cNvSpPr txBox="1"/>
+          <p:nvPr/>
+        </p:nvSpPr>
+        <p:spPr>
+          <a:xfrm>
+            <a:off x="8659367" y="2395728"/>
+            <a:ext cx="2194560" cy="274320"/>
+          </a:xfrm>
+          <a:prstGeom prst="rect">
+            <a:avLst/>
+          </a:prstGeom>
+          <a:noFill/>
+        </p:spPr>
+        <p:txBody>
+          <a:bodyPr wrap="square" anchor="t">
+            <a:spAutoFit/>
+          </a:bodyPr>
+          <a:lstStyle/>
+          <a:p>
+            <a:pPr algn="ctr">
+              <a:defRPr sz="1100" b="1">
+                <a:solidFill>
+                  <a:srgbClr val="FFFFFF"/>
+                </a:solidFill>
+                <a:latin typeface="Aptos"/>
+              </a:defRPr>
+            </a:pPr>
+            <a:r>
+              <a:t>GENDER FPR · XGB</a:t>
+            </a:r>
+          </a:p>
+        </p:txBody>
+      </p:sp>
+      <p:sp>
+        <p:nvSpPr>
+          <p:cNvPr id="9" name="Rounded Rectangle 8"/>
+          <p:cNvSpPr/>
+          <p:nvPr/>
+        </p:nvSpPr>
+        <p:spPr>
+          <a:xfrm>
+            <a:off x="8549640" y="3200400"/>
+            <a:ext cx="2423160" cy="1261872"/>
+          </a:xfrm>
+          <a:prstGeom prst="roundRect">
+            <a:avLst/>
+          </a:prstGeom>
+          <a:solidFill>
+            <a:srgbClr val="143058"/>
+          </a:solidFill>
+          <a:ln>
+            <a:solidFill>
+              <a:srgbClr val="D64343"/>
+            </a:solidFill>
+          </a:ln>
+        </p:spPr>
+        <p:style>
+          <a:lnRef idx="1">
+            <a:schemeClr val="accent1"/>
+          </a:lnRef>
+          <a:fillRef idx="3">
+            <a:schemeClr val="accent1"/>
+          </a:fillRef>
+          <a:effectRef idx="2">
+            <a:schemeClr val="accent1"/>
+          </a:effectRef>
+          <a:fontRef idx="minor">
+            <a:schemeClr val="lt1"/>
+          </a:fontRef>
+        </p:style>
+        <p:txBody>
+          <a:bodyPr rtlCol="0" anchor="ctr"/>
+          <a:lstStyle/>
+          <a:p>
+            <a:pPr algn="ctr"/>
+          </a:p>
+        </p:txBody>
+      </p:sp>
+      <p:sp>
+        <p:nvSpPr>
+          <p:cNvPr id="10" name="TextBox 9"/>
+          <p:cNvSpPr txBox="1"/>
+          <p:nvPr/>
+        </p:nvSpPr>
+        <p:spPr>
+          <a:xfrm>
+            <a:off x="8659367" y="3337560"/>
+            <a:ext cx="2194560" cy="438912"/>
+          </a:xfrm>
+          <a:prstGeom prst="rect">
+            <a:avLst/>
+          </a:prstGeom>
+          <a:noFill/>
+        </p:spPr>
+        <p:txBody>
+          <a:bodyPr wrap="square" anchor="t">
+            <a:spAutoFit/>
+          </a:bodyPr>
+          <a:lstStyle/>
+          <a:p>
+            <a:pPr algn="ctr">
+              <a:defRPr sz="2400" b="1">
+                <a:solidFill>
+                  <a:srgbClr val="D64343"/>
+                </a:solidFill>
+                <a:latin typeface="Aptos"/>
+              </a:defRPr>
+            </a:pPr>
+            <a:r>
+              <a:t>0.072</a:t>
+            </a:r>
+          </a:p>
+        </p:txBody>
+      </p:sp>
+      <p:sp>
+        <p:nvSpPr>
+          <p:cNvPr id="11" name="TextBox 10"/>
+          <p:cNvSpPr txBox="1"/>
+          <p:nvPr/>
+        </p:nvSpPr>
+        <p:spPr>
+          <a:xfrm>
+            <a:off x="8659367" y="3858768"/>
+            <a:ext cx="2194560" cy="274320"/>
+          </a:xfrm>
+          <a:prstGeom prst="rect">
+            <a:avLst/>
+          </a:prstGeom>
+          <a:noFill/>
+        </p:spPr>
+        <p:txBody>
+          <a:bodyPr wrap="square" anchor="t">
+            <a:spAutoFit/>
+          </a:bodyPr>
+          <a:lstStyle/>
+          <a:p>
+            <a:pPr algn="ctr">
+              <a:defRPr sz="1100" b="1">
+                <a:solidFill>
+                  <a:srgbClr val="FFFFFF"/>
+                </a:solidFill>
+                <a:latin typeface="Aptos"/>
+              </a:defRPr>
+            </a:pPr>
+            <a:r>
+              <a:t>GENDER FPR · TABICL</a:t>
+            </a:r>
+          </a:p>
+        </p:txBody>
+      </p:sp>
+      <p:sp>
+        <p:nvSpPr>
+          <p:cNvPr id="12" name="Rounded Rectangle 11"/>
+          <p:cNvSpPr/>
+          <p:nvPr/>
+        </p:nvSpPr>
+        <p:spPr>
+          <a:xfrm>
+            <a:off x="8549640" y="4663440"/>
+            <a:ext cx="2423160" cy="1261872"/>
           </a:xfrm>
           <a:prstGeom prst="roundRect">
             <a:avLst/>
@@ -4047,14 +4338,14 @@
       </p:sp>
       <p:sp>
         <p:nvSpPr>
-          <p:cNvPr id="6" name="TextBox 5"/>
-          <p:cNvSpPr txBox="1"/>
-          <p:nvPr/>
-        </p:nvSpPr>
-        <p:spPr>
-          <a:xfrm>
-            <a:off x="914400" y="1874519"/>
-            <a:ext cx="4754880" cy="365760"/>
+          <p:cNvPr id="13" name="TextBox 12"/>
+          <p:cNvSpPr txBox="1"/>
+          <p:nvPr/>
+        </p:nvSpPr>
+        <p:spPr>
+          <a:xfrm>
+            <a:off x="8659367" y="4800600"/>
+            <a:ext cx="2194560" cy="438912"/>
           </a:xfrm>
           <a:prstGeom prst="rect">
             <a:avLst/>
@@ -4068,7 +4359,7 @@
           <a:lstStyle/>
           <a:p>
             <a:pPr algn="ctr">
-              <a:defRPr sz="2000" b="1">
+              <a:defRPr sz="2400" b="1">
                 <a:solidFill>
                   <a:srgbClr val="FB8500"/>
                 </a:solidFill>
@@ -4076,21 +4367,21 @@
               </a:defRPr>
             </a:pPr>
             <a:r>
-              <a:t>COMPARE</a:t>
-            </a:r>
-          </a:p>
-        </p:txBody>
-      </p:sp>
-      <p:sp>
-        <p:nvSpPr>
-          <p:cNvPr id="7" name="TextBox 6"/>
-          <p:cNvSpPr txBox="1"/>
-          <p:nvPr/>
-        </p:nvSpPr>
-        <p:spPr>
-          <a:xfrm>
-            <a:off x="1005840" y="2587752"/>
-            <a:ext cx="4572000" cy="338327"/>
+              <a:t>0.020</a:t>
+            </a:r>
+          </a:p>
+        </p:txBody>
+      </p:sp>
+      <p:sp>
+        <p:nvSpPr>
+          <p:cNvPr id="14" name="TextBox 13"/>
+          <p:cNvSpPr txBox="1"/>
+          <p:nvPr/>
+        </p:nvSpPr>
+        <p:spPr>
+          <a:xfrm>
+            <a:off x="8659367" y="5321807"/>
+            <a:ext cx="2194560" cy="274320"/>
           </a:xfrm>
           <a:prstGeom prst="rect">
             <a:avLst/>
@@ -4104,74 +4395,29 @@
           <a:lstStyle/>
           <a:p>
             <a:pPr algn="ctr">
-              <a:defRPr sz="1500" b="0">
-                <a:solidFill>
-                  <a:srgbClr val="F0F4F8"/>
-                </a:solidFill>
-                <a:latin typeface="Aptos"/>
-              </a:defRPr>
-            </a:pPr>
-            <a:r>
-              <a:t>Performance and calibration</a:t>
-            </a:r>
-          </a:p>
-        </p:txBody>
-      </p:sp>
-      <p:sp>
-        <p:nvSpPr>
-          <p:cNvPr id="8" name="Rounded Rectangle 7"/>
-          <p:cNvSpPr/>
-          <p:nvPr/>
-        </p:nvSpPr>
-        <p:spPr>
-          <a:xfrm>
-            <a:off x="6263640" y="1600200"/>
-            <a:ext cx="5212080" cy="1572768"/>
-          </a:xfrm>
-          <a:prstGeom prst="roundRect">
-            <a:avLst/>
-          </a:prstGeom>
-          <a:solidFill>
-            <a:srgbClr val="143058"/>
-          </a:solidFill>
-          <a:ln>
-            <a:solidFill>
-              <a:srgbClr val="7B2CBF"/>
-            </a:solidFill>
-          </a:ln>
-        </p:spPr>
-        <p:style>
-          <a:lnRef idx="1">
-            <a:schemeClr val="accent1"/>
-          </a:lnRef>
-          <a:fillRef idx="3">
-            <a:schemeClr val="accent1"/>
-          </a:fillRef>
-          <a:effectRef idx="2">
-            <a:schemeClr val="accent1"/>
-          </a:effectRef>
-          <a:fontRef idx="minor">
-            <a:schemeClr val="lt1"/>
-          </a:fontRef>
-        </p:style>
-        <p:txBody>
-          <a:bodyPr rtlCol="0" anchor="ctr"/>
-          <a:lstStyle/>
-          <a:p>
-            <a:pPr algn="ctr"/>
-          </a:p>
-        </p:txBody>
-      </p:sp>
-      <p:sp>
-        <p:nvSpPr>
-          <p:cNvPr id="9" name="TextBox 8"/>
-          <p:cNvSpPr txBox="1"/>
-          <p:nvPr/>
-        </p:nvSpPr>
-        <p:spPr>
-          <a:xfrm>
-            <a:off x="6492240" y="1874519"/>
-            <a:ext cx="4754880" cy="365760"/>
+              <a:defRPr sz="1100" b="1">
+                <a:solidFill>
+                  <a:srgbClr val="FFFFFF"/>
+                </a:solidFill>
+                <a:latin typeface="Aptos"/>
+              </a:defRPr>
+            </a:pPr>
+            <a:r>
+              <a:t>RACE FPR · XGB</a:t>
+            </a:r>
+          </a:p>
+        </p:txBody>
+      </p:sp>
+      <p:sp>
+        <p:nvSpPr>
+          <p:cNvPr id="15" name="TextBox 14"/>
+          <p:cNvSpPr txBox="1"/>
+          <p:nvPr/>
+        </p:nvSpPr>
+        <p:spPr>
+          <a:xfrm>
+            <a:off x="914400" y="6217920"/>
+            <a:ext cx="10058400" cy="274320"/>
           </a:xfrm>
           <a:prstGeom prst="rect">
             <a:avLst/>
@@ -4185,124 +4431,7 @@
           <a:lstStyle/>
           <a:p>
             <a:pPr algn="ctr">
-              <a:defRPr sz="2000" b="1">
-                <a:solidFill>
-                  <a:srgbClr val="7B2CBF"/>
-                </a:solidFill>
-                <a:latin typeface="Aptos"/>
-              </a:defRPr>
-            </a:pPr>
-            <a:r>
-              <a:t>AUDIT</a:t>
-            </a:r>
-          </a:p>
-        </p:txBody>
-      </p:sp>
-      <p:sp>
-        <p:nvSpPr>
-          <p:cNvPr id="10" name="TextBox 9"/>
-          <p:cNvSpPr txBox="1"/>
-          <p:nvPr/>
-        </p:nvSpPr>
-        <p:spPr>
-          <a:xfrm>
-            <a:off x="6583679" y="2587752"/>
-            <a:ext cx="4572000" cy="338327"/>
-          </a:xfrm>
-          <a:prstGeom prst="rect">
-            <a:avLst/>
-          </a:prstGeom>
-          <a:noFill/>
-        </p:spPr>
-        <p:txBody>
-          <a:bodyPr wrap="square" anchor="t">
-            <a:spAutoFit/>
-          </a:bodyPr>
-          <a:lstStyle/>
-          <a:p>
-            <a:pPr algn="ctr">
-              <a:defRPr sz="1500" b="0">
-                <a:solidFill>
-                  <a:srgbClr val="F0F4F8"/>
-                </a:solidFill>
-                <a:latin typeface="Aptos"/>
-              </a:defRPr>
-            </a:pPr>
-            <a:r>
-              <a:t>Race and gender metrics</a:t>
-            </a:r>
-          </a:p>
-        </p:txBody>
-      </p:sp>
-      <p:sp>
-        <p:nvSpPr>
-          <p:cNvPr id="11" name="Rounded Rectangle 10"/>
-          <p:cNvSpPr/>
-          <p:nvPr/>
-        </p:nvSpPr>
-        <p:spPr>
-          <a:xfrm>
-            <a:off x="685800" y="3474720"/>
-            <a:ext cx="5212080" cy="1572768"/>
-          </a:xfrm>
-          <a:prstGeom prst="roundRect">
-            <a:avLst/>
-          </a:prstGeom>
-          <a:solidFill>
-            <a:srgbClr val="143058"/>
-          </a:solidFill>
-          <a:ln>
-            <a:solidFill>
-              <a:srgbClr val="FB8500"/>
-            </a:solidFill>
-          </a:ln>
-        </p:spPr>
-        <p:style>
-          <a:lnRef idx="1">
-            <a:schemeClr val="accent1"/>
-          </a:lnRef>
-          <a:fillRef idx="3">
-            <a:schemeClr val="accent1"/>
-          </a:fillRef>
-          <a:effectRef idx="2">
-            <a:schemeClr val="accent1"/>
-          </a:effectRef>
-          <a:fontRef idx="minor">
-            <a:schemeClr val="lt1"/>
-          </a:fontRef>
-        </p:style>
-        <p:txBody>
-          <a:bodyPr rtlCol="0" anchor="ctr"/>
-          <a:lstStyle/>
-          <a:p>
-            <a:pPr algn="ctr"/>
-          </a:p>
-        </p:txBody>
-      </p:sp>
-      <p:sp>
-        <p:nvSpPr>
-          <p:cNvPr id="12" name="TextBox 11"/>
-          <p:cNvSpPr txBox="1"/>
-          <p:nvPr/>
-        </p:nvSpPr>
-        <p:spPr>
-          <a:xfrm>
-            <a:off x="914400" y="3749039"/>
-            <a:ext cx="4754880" cy="365760"/>
-          </a:xfrm>
-          <a:prstGeom prst="rect">
-            <a:avLst/>
-          </a:prstGeom>
-          <a:noFill/>
-        </p:spPr>
-        <p:txBody>
-          <a:bodyPr wrap="square" anchor="t">
-            <a:spAutoFit/>
-          </a:bodyPr>
-          <a:lstStyle/>
-          <a:p>
-            <a:pPr algn="ctr">
-              <a:defRPr sz="2000" b="1">
+              <a:defRPr sz="1100" b="1">
                 <a:solidFill>
                   <a:srgbClr val="FB8500"/>
                 </a:solidFill>
@@ -4310,124 +4439,7 @@
               </a:defRPr>
             </a:pPr>
             <a:r>
-              <a:t>SIMULATE</a:t>
-            </a:r>
-          </a:p>
-        </p:txBody>
-      </p:sp>
-      <p:sp>
-        <p:nvSpPr>
-          <p:cNvPr id="13" name="TextBox 12"/>
-          <p:cNvSpPr txBox="1"/>
-          <p:nvPr/>
-        </p:nvSpPr>
-        <p:spPr>
-          <a:xfrm>
-            <a:off x="1005840" y="4462272"/>
-            <a:ext cx="4572000" cy="338327"/>
-          </a:xfrm>
-          <a:prstGeom prst="rect">
-            <a:avLst/>
-          </a:prstGeom>
-          <a:noFill/>
-        </p:spPr>
-        <p:txBody>
-          <a:bodyPr wrap="square" anchor="t">
-            <a:spAutoFit/>
-          </a:bodyPr>
-          <a:lstStyle/>
-          <a:p>
-            <a:pPr algn="ctr">
-              <a:defRPr sz="1500" b="0">
-                <a:solidFill>
-                  <a:srgbClr val="F0F4F8"/>
-                </a:solidFill>
-                <a:latin typeface="Aptos"/>
-              </a:defRPr>
-            </a:pPr>
-            <a:r>
-              <a:t>Costs, capacity and benefit</a:t>
-            </a:r>
-          </a:p>
-        </p:txBody>
-      </p:sp>
-      <p:sp>
-        <p:nvSpPr>
-          <p:cNvPr id="14" name="Rounded Rectangle 13"/>
-          <p:cNvSpPr/>
-          <p:nvPr/>
-        </p:nvSpPr>
-        <p:spPr>
-          <a:xfrm>
-            <a:off x="6263640" y="3474720"/>
-            <a:ext cx="5212080" cy="1572768"/>
-          </a:xfrm>
-          <a:prstGeom prst="roundRect">
-            <a:avLst/>
-          </a:prstGeom>
-          <a:solidFill>
-            <a:srgbClr val="143058"/>
-          </a:solidFill>
-          <a:ln>
-            <a:solidFill>
-              <a:srgbClr val="7B2CBF"/>
-            </a:solidFill>
-          </a:ln>
-        </p:spPr>
-        <p:style>
-          <a:lnRef idx="1">
-            <a:schemeClr val="accent1"/>
-          </a:lnRef>
-          <a:fillRef idx="3">
-            <a:schemeClr val="accent1"/>
-          </a:fillRef>
-          <a:effectRef idx="2">
-            <a:schemeClr val="accent1"/>
-          </a:effectRef>
-          <a:fontRef idx="minor">
-            <a:schemeClr val="lt1"/>
-          </a:fontRef>
-        </p:style>
-        <p:txBody>
-          <a:bodyPr rtlCol="0" anchor="ctr"/>
-          <a:lstStyle/>
-          <a:p>
-            <a:pPr algn="ctr"/>
-          </a:p>
-        </p:txBody>
-      </p:sp>
-      <p:sp>
-        <p:nvSpPr>
-          <p:cNvPr id="15" name="TextBox 14"/>
-          <p:cNvSpPr txBox="1"/>
-          <p:nvPr/>
-        </p:nvSpPr>
-        <p:spPr>
-          <a:xfrm>
-            <a:off x="6492240" y="3749039"/>
-            <a:ext cx="4754880" cy="365760"/>
-          </a:xfrm>
-          <a:prstGeom prst="rect">
-            <a:avLst/>
-          </a:prstGeom>
-          <a:noFill/>
-        </p:spPr>
-        <p:txBody>
-          <a:bodyPr wrap="square" anchor="t">
-            <a:spAutoFit/>
-          </a:bodyPr>
-          <a:lstStyle/>
-          <a:p>
-            <a:pPr algn="ctr">
-              <a:defRPr sz="2000" b="1">
-                <a:solidFill>
-                  <a:srgbClr val="7B2CBF"/>
-                </a:solidFill>
-                <a:latin typeface="Aptos"/>
-              </a:defRPr>
-            </a:pPr>
-            <a:r>
-              <a:t>TEST</a:t>
+              <a:t>At the top-20% deployment point, gaps are 2–4× smaller than at 0.5 — audit the point you ship.</a:t>
             </a:r>
           </a:p>
         </p:txBody>
@@ -4435,78 +4447,6 @@
       <p:sp>
         <p:nvSpPr>
           <p:cNvPr id="16" name="TextBox 15"/>
-          <p:cNvSpPr txBox="1"/>
-          <p:nvPr/>
-        </p:nvSpPr>
-        <p:spPr>
-          <a:xfrm>
-            <a:off x="6583679" y="4462272"/>
-            <a:ext cx="4572000" cy="338327"/>
-          </a:xfrm>
-          <a:prstGeom prst="rect">
-            <a:avLst/>
-          </a:prstGeom>
-          <a:noFill/>
-        </p:spPr>
-        <p:txBody>
-          <a:bodyPr wrap="square" anchor="t">
-            <a:spAutoFit/>
-          </a:bodyPr>
-          <a:lstStyle/>
-          <a:p>
-            <a:pPr algn="ctr">
-              <a:defRPr sz="1500" b="0">
-                <a:solidFill>
-                  <a:srgbClr val="F0F4F8"/>
-                </a:solidFill>
-                <a:latin typeface="Aptos"/>
-              </a:defRPr>
-            </a:pPr>
-            <a:r>
-              <a:t>Held-out people and scenarios</a:t>
-            </a:r>
-          </a:p>
-        </p:txBody>
-      </p:sp>
-      <p:sp>
-        <p:nvSpPr>
-          <p:cNvPr id="17" name="TextBox 16"/>
-          <p:cNvSpPr txBox="1"/>
-          <p:nvPr/>
-        </p:nvSpPr>
-        <p:spPr>
-          <a:xfrm>
-            <a:off x="4023360" y="5715000"/>
-            <a:ext cx="4114800" cy="365760"/>
-          </a:xfrm>
-          <a:prstGeom prst="rect">
-            <a:avLst/>
-          </a:prstGeom>
-          <a:noFill/>
-        </p:spPr>
-        <p:txBody>
-          <a:bodyPr wrap="square" anchor="t">
-            <a:spAutoFit/>
-          </a:bodyPr>
-          <a:lstStyle/>
-          <a:p>
-            <a:pPr algn="ctr">
-              <a:defRPr sz="1700" b="1">
-                <a:solidFill>
-                  <a:srgbClr val="F0F4F8"/>
-                </a:solidFill>
-                <a:latin typeface="Consolas"/>
-              </a:defRPr>
-            </a:pPr>
-            <a:r>
-              <a:t>streamlit run app.py</a:t>
-            </a:r>
-          </a:p>
-        </p:txBody>
-      </p:sp>
-      <p:sp>
-        <p:nvSpPr>
-          <p:cNvPr id="18" name="TextBox 17"/>
           <p:cNvSpPr txBox="1"/>
           <p:nvPr/>
         </p:nvSpPr>
@@ -4542,7 +4482,7 @@
       </p:sp>
       <p:sp>
         <p:nvSpPr>
-          <p:cNvPr id="19" name="TextBox 18"/>
+          <p:cNvPr id="17" name="TextBox 16"/>
           <p:cNvSpPr txBox="1"/>
           <p:nvPr/>
         </p:nvSpPr>
@@ -4633,7 +4573,7 @@
               </a:defRPr>
             </a:pPr>
             <a:r>
-              <a:t>11 · ROADMAP</a:t>
+              <a:t>11 · FAIRNESS, SHARPENED</a:t>
             </a:r>
           </a:p>
         </p:txBody>
@@ -4661,7 +4601,7 @@
           <a:lstStyle/>
           <a:p>
             <a:pPr algn="l">
-              <a:defRPr sz="2700" b="1">
+              <a:defRPr sz="2600" b="1">
                 <a:solidFill>
                   <a:srgbClr val="FFFFFF"/>
                 </a:solidFill>
@@ -4669,7 +4609,7 @@
               </a:defRPr>
             </a:pPr>
             <a:r>
-              <a:t>Deployment is a staged evidence program</a:t>
+              <a:t>Our data shows both sides of the impossibility theorem</a:t>
             </a:r>
           </a:p>
         </p:txBody>
@@ -4719,14 +4659,59 @@
       </p:sp>
       <p:sp>
         <p:nvSpPr>
-          <p:cNvPr id="5" name="TextBox 4"/>
-          <p:cNvSpPr txBox="1"/>
-          <p:nvPr/>
-        </p:nvSpPr>
-        <p:spPr>
-          <a:xfrm>
-            <a:off x="658368" y="1874519"/>
-            <a:ext cx="594360" cy="594360"/>
+          <p:cNvPr id="5" name="Rounded Rectangle 4"/>
+          <p:cNvSpPr/>
+          <p:nvPr/>
+        </p:nvSpPr>
+        <p:spPr>
+          <a:xfrm>
+            <a:off x="640080" y="1691640"/>
+            <a:ext cx="5257800" cy="4297680"/>
+          </a:xfrm>
+          <a:prstGeom prst="roundRect">
+            <a:avLst/>
+          </a:prstGeom>
+          <a:solidFill>
+            <a:srgbClr val="143058"/>
+          </a:solidFill>
+          <a:ln>
+            <a:solidFill>
+              <a:srgbClr val="00B4B4"/>
+            </a:solidFill>
+          </a:ln>
+        </p:spPr>
+        <p:style>
+          <a:lnRef idx="1">
+            <a:schemeClr val="accent1"/>
+          </a:lnRef>
+          <a:fillRef idx="3">
+            <a:schemeClr val="accent1"/>
+          </a:fillRef>
+          <a:effectRef idx="2">
+            <a:schemeClr val="accent1"/>
+          </a:effectRef>
+          <a:fontRef idx="minor">
+            <a:schemeClr val="lt1"/>
+          </a:fontRef>
+        </p:style>
+        <p:txBody>
+          <a:bodyPr rtlCol="0" anchor="ctr"/>
+          <a:lstStyle/>
+          <a:p>
+            <a:pPr algn="ctr"/>
+          </a:p>
+        </p:txBody>
+      </p:sp>
+      <p:sp>
+        <p:nvSpPr>
+          <p:cNvPr id="6" name="TextBox 5"/>
+          <p:cNvSpPr txBox="1"/>
+          <p:nvPr/>
+        </p:nvSpPr>
+        <p:spPr>
+          <a:xfrm>
+            <a:off x="868680" y="1965960"/>
+            <a:ext cx="4800600" cy="365760"/>
           </a:xfrm>
           <a:prstGeom prst="rect">
             <a:avLst/>
@@ -4740,51 +4725,15 @@
           <a:lstStyle/>
           <a:p>
             <a:pPr algn="ctr">
-              <a:defRPr sz="2800" b="1">
-                <a:solidFill>
-                  <a:srgbClr val="FB8500"/>
-                </a:solidFill>
-                <a:latin typeface="Aptos"/>
-              </a:defRPr>
-            </a:pPr>
-            <a:r>
-              <a:t>1</a:t>
-            </a:r>
-          </a:p>
-        </p:txBody>
-      </p:sp>
-      <p:sp>
-        <p:nvSpPr>
-          <p:cNvPr id="6" name="TextBox 5"/>
-          <p:cNvSpPr txBox="1"/>
-          <p:nvPr/>
-        </p:nvSpPr>
-        <p:spPr>
-          <a:xfrm>
-            <a:off x="1344168" y="1901952"/>
-            <a:ext cx="1920240" cy="292608"/>
-          </a:xfrm>
-          <a:prstGeom prst="rect">
-            <a:avLst/>
-          </a:prstGeom>
-          <a:noFill/>
-        </p:spPr>
-        <p:txBody>
-          <a:bodyPr wrap="square" anchor="t">
-            <a:spAutoFit/>
-          </a:bodyPr>
-          <a:lstStyle/>
-          <a:p>
-            <a:pPr algn="l">
-              <a:defRPr sz="1500" b="1">
-                <a:solidFill>
-                  <a:srgbClr val="FFFFFF"/>
-                </a:solidFill>
-                <a:latin typeface="Aptos"/>
-              </a:defRPr>
-            </a:pPr>
-            <a:r>
-              <a:t>SHADOW</a:t>
+              <a:defRPr sz="2000" b="1">
+                <a:solidFill>
+                  <a:srgbClr val="00B4B4"/>
+                </a:solidFill>
+                <a:latin typeface="Aptos"/>
+              </a:defRPr>
+            </a:pPr>
+            <a:r>
+              <a:t>RACE — FIXABLE</a:t>
             </a:r>
           </a:p>
         </p:txBody>
@@ -4797,22 +4746,22 @@
         </p:nvSpPr>
         <p:spPr>
           <a:xfrm>
-            <a:off x="1344168" y="2313432"/>
-            <a:ext cx="1920240" cy="502920"/>
-          </a:xfrm>
-          <a:prstGeom prst="rect">
-            <a:avLst/>
-          </a:prstGeom>
-          <a:noFill/>
-        </p:spPr>
-        <p:txBody>
-          <a:bodyPr wrap="square" anchor="t">
-            <a:spAutoFit/>
-          </a:bodyPr>
-          <a:lstStyle/>
-          <a:p>
-            <a:pPr algn="l">
-              <a:defRPr sz="1300" b="0">
+            <a:off x="960119" y="2679192"/>
+            <a:ext cx="4617720" cy="3063240"/>
+          </a:xfrm>
+          <a:prstGeom prst="rect">
+            <a:avLst/>
+          </a:prstGeom>
+          <a:noFill/>
+        </p:spPr>
+        <p:txBody>
+          <a:bodyPr wrap="square" anchor="t">
+            <a:spAutoFit/>
+          </a:bodyPr>
+          <a:lstStyle/>
+          <a:p>
+            <a:pPr algn="ctr">
+              <a:defRPr sz="1500" b="0">
                 <a:solidFill>
                   <a:srgbClr val="F0F4F8"/>
                 </a:solidFill>
@@ -4820,44 +4769,67 @@
               </a:defRPr>
             </a:pPr>
             <a:r>
-              <a:t>Later cohort</a:t>
-            </a:r>
-          </a:p>
-        </p:txBody>
-      </p:sp>
-      <p:sp>
-        <p:nvSpPr>
-          <p:cNvPr id="8" name="TextBox 7"/>
-          <p:cNvSpPr txBox="1"/>
-          <p:nvPr/>
-        </p:nvSpPr>
-        <p:spPr>
-          <a:xfrm>
-            <a:off x="3200400" y="1965960"/>
-            <a:ext cx="365760" cy="365760"/>
-          </a:xfrm>
-          <a:prstGeom prst="rect">
-            <a:avLst/>
-          </a:prstGeom>
-          <a:noFill/>
-        </p:spPr>
-        <p:txBody>
-          <a:bodyPr wrap="square" anchor="t">
-            <a:spAutoFit/>
-          </a:bodyPr>
-          <a:lstStyle/>
-          <a:p>
-            <a:pPr algn="l">
-              <a:defRPr sz="2200" b="1">
-                <a:solidFill>
-                  <a:srgbClr val="828FA0"/>
-                </a:solidFill>
-                <a:latin typeface="Aptos"/>
-              </a:defRPr>
-            </a:pPr>
-            <a:r>
-              <a:t>→</a:t>
-            </a:r>
+              <a:t>Base rates near-equal</a:t>
+            </a:r>
+            <a:br/>
+            <a:r>
+              <a:t>(0.582 vs 0.564)</a:t>
+            </a:r>
+            <a:br/>
+            <a:br/>
+            <a:r>
+              <a:t>Calibration + equal error jointly achievable</a:t>
+            </a:r>
+            <a:br/>
+            <a:br/>
+            <a:r>
+              <a:t>FPR gap is a model property → group thresholds drive it to ~0</a:t>
+            </a:r>
+          </a:p>
+        </p:txBody>
+      </p:sp>
+      <p:sp>
+        <p:nvSpPr>
+          <p:cNvPr id="8" name="Rounded Rectangle 7"/>
+          <p:cNvSpPr/>
+          <p:nvPr/>
+        </p:nvSpPr>
+        <p:spPr>
+          <a:xfrm>
+            <a:off x="6263640" y="1691640"/>
+            <a:ext cx="5257800" cy="4297680"/>
+          </a:xfrm>
+          <a:prstGeom prst="roundRect">
+            <a:avLst/>
+          </a:prstGeom>
+          <a:solidFill>
+            <a:srgbClr val="143058"/>
+          </a:solidFill>
+          <a:ln>
+            <a:solidFill>
+              <a:srgbClr val="D64343"/>
+            </a:solidFill>
+          </a:ln>
+        </p:spPr>
+        <p:style>
+          <a:lnRef idx="1">
+            <a:schemeClr val="accent1"/>
+          </a:lnRef>
+          <a:fillRef idx="3">
+            <a:schemeClr val="accent1"/>
+          </a:fillRef>
+          <a:effectRef idx="2">
+            <a:schemeClr val="accent1"/>
+          </a:effectRef>
+          <a:fontRef idx="minor">
+            <a:schemeClr val="lt1"/>
+          </a:fontRef>
+        </p:style>
+        <p:txBody>
+          <a:bodyPr rtlCol="0" anchor="ctr"/>
+          <a:lstStyle/>
+          <a:p>
+            <a:pPr algn="ctr"/>
           </a:p>
         </p:txBody>
       </p:sp>
@@ -4869,8 +4841,8 @@
         </p:nvSpPr>
         <p:spPr>
           <a:xfrm>
-            <a:off x="3511296" y="1874519"/>
-            <a:ext cx="594360" cy="594360"/>
+            <a:off x="6492240" y="1965960"/>
+            <a:ext cx="4800600" cy="365760"/>
           </a:xfrm>
           <a:prstGeom prst="rect">
             <a:avLst/>
@@ -4884,15 +4856,15 @@
           <a:lstStyle/>
           <a:p>
             <a:pPr algn="ctr">
-              <a:defRPr sz="2800" b="1">
-                <a:solidFill>
-                  <a:srgbClr val="FB8500"/>
-                </a:solidFill>
-                <a:latin typeface="Aptos"/>
-              </a:defRPr>
-            </a:pPr>
-            <a:r>
-              <a:t>2</a:t>
+              <a:defRPr sz="2000" b="1">
+                <a:solidFill>
+                  <a:srgbClr val="D64343"/>
+                </a:solidFill>
+                <a:latin typeface="Aptos"/>
+              </a:defRPr>
+            </a:pPr>
+            <a:r>
+              <a:t>GENDER — BINDS</a:t>
             </a:r>
           </a:p>
         </p:txBody>
@@ -4905,30 +4877,44 @@
         </p:nvSpPr>
         <p:spPr>
           <a:xfrm>
-            <a:off x="4197096" y="1901952"/>
-            <a:ext cx="1920240" cy="292608"/>
-          </a:xfrm>
-          <a:prstGeom prst="rect">
-            <a:avLst/>
-          </a:prstGeom>
-          <a:noFill/>
-        </p:spPr>
-        <p:txBody>
-          <a:bodyPr wrap="square" anchor="t">
-            <a:spAutoFit/>
-          </a:bodyPr>
-          <a:lstStyle/>
-          <a:p>
-            <a:pPr algn="l">
-              <a:defRPr sz="1500" b="1">
-                <a:solidFill>
-                  <a:srgbClr val="FFFFFF"/>
-                </a:solidFill>
-                <a:latin typeface="Aptos"/>
-              </a:defRPr>
-            </a:pPr>
-            <a:r>
-              <a:t>VALIDATE</a:t>
+            <a:off x="6583679" y="2679192"/>
+            <a:ext cx="4617720" cy="3063240"/>
+          </a:xfrm>
+          <a:prstGeom prst="rect">
+            <a:avLst/>
+          </a:prstGeom>
+          <a:noFill/>
+        </p:spPr>
+        <p:txBody>
+          <a:bodyPr wrap="square" anchor="t">
+            <a:spAutoFit/>
+          </a:bodyPr>
+          <a:lstStyle/>
+          <a:p>
+            <a:pPr algn="ctr">
+              <a:defRPr sz="1500" b="0">
+                <a:solidFill>
+                  <a:srgbClr val="F0F4F8"/>
+                </a:solidFill>
+                <a:latin typeface="Aptos"/>
+              </a:defRPr>
+            </a:pPr>
+            <a:r>
+              <a:t>Base rates differ 13.7 pts</a:t>
+            </a:r>
+            <a:br/>
+            <a:r>
+              <a:t>(0.591 vs 0.454)</a:t>
+            </a:r>
+            <a:br/>
+            <a:br/>
+            <a:r>
+              <a:t>Theorem binds: cannot equalize both</a:t>
+            </a:r>
+            <a:br/>
+            <a:br/>
+            <a:r>
+              <a:t>Equalizing gender FPR decalibrates women — a choice we surface, not hide</a:t>
             </a:r>
           </a:p>
         </p:txBody>
@@ -4936,402 +4922,6 @@
       <p:sp>
         <p:nvSpPr>
           <p:cNvPr id="11" name="TextBox 10"/>
-          <p:cNvSpPr txBox="1"/>
-          <p:nvPr/>
-        </p:nvSpPr>
-        <p:spPr>
-          <a:xfrm>
-            <a:off x="4197096" y="2313432"/>
-            <a:ext cx="1920240" cy="502920"/>
-          </a:xfrm>
-          <a:prstGeom prst="rect">
-            <a:avLst/>
-          </a:prstGeom>
-          <a:noFill/>
-        </p:spPr>
-        <p:txBody>
-          <a:bodyPr wrap="square" anchor="t">
-            <a:spAutoFit/>
-          </a:bodyPr>
-          <a:lstStyle/>
-          <a:p>
-            <a:pPr algn="l">
-              <a:defRPr sz="1300" b="0">
-                <a:solidFill>
-                  <a:srgbClr val="F0F4F8"/>
-                </a:solidFill>
-                <a:latin typeface="Aptos"/>
-              </a:defRPr>
-            </a:pPr>
-            <a:r>
-              <a:t>Impact + fairness</a:t>
-            </a:r>
-          </a:p>
-        </p:txBody>
-      </p:sp>
-      <p:sp>
-        <p:nvSpPr>
-          <p:cNvPr id="12" name="TextBox 11"/>
-          <p:cNvSpPr txBox="1"/>
-          <p:nvPr/>
-        </p:nvSpPr>
-        <p:spPr>
-          <a:xfrm>
-            <a:off x="6053327" y="1965960"/>
-            <a:ext cx="365760" cy="365760"/>
-          </a:xfrm>
-          <a:prstGeom prst="rect">
-            <a:avLst/>
-          </a:prstGeom>
-          <a:noFill/>
-        </p:spPr>
-        <p:txBody>
-          <a:bodyPr wrap="square" anchor="t">
-            <a:spAutoFit/>
-          </a:bodyPr>
-          <a:lstStyle/>
-          <a:p>
-            <a:pPr algn="l">
-              <a:defRPr sz="2200" b="1">
-                <a:solidFill>
-                  <a:srgbClr val="828FA0"/>
-                </a:solidFill>
-                <a:latin typeface="Aptos"/>
-              </a:defRPr>
-            </a:pPr>
-            <a:r>
-              <a:t>→</a:t>
-            </a:r>
-          </a:p>
-        </p:txBody>
-      </p:sp>
-      <p:sp>
-        <p:nvSpPr>
-          <p:cNvPr id="13" name="TextBox 12"/>
-          <p:cNvSpPr txBox="1"/>
-          <p:nvPr/>
-        </p:nvSpPr>
-        <p:spPr>
-          <a:xfrm>
-            <a:off x="6364224" y="1874519"/>
-            <a:ext cx="594360" cy="594360"/>
-          </a:xfrm>
-          <a:prstGeom prst="rect">
-            <a:avLst/>
-          </a:prstGeom>
-          <a:noFill/>
-        </p:spPr>
-        <p:txBody>
-          <a:bodyPr wrap="square" anchor="t">
-            <a:spAutoFit/>
-          </a:bodyPr>
-          <a:lstStyle/>
-          <a:p>
-            <a:pPr algn="ctr">
-              <a:defRPr sz="2800" b="1">
-                <a:solidFill>
-                  <a:srgbClr val="7B2CBF"/>
-                </a:solidFill>
-                <a:latin typeface="Aptos"/>
-              </a:defRPr>
-            </a:pPr>
-            <a:r>
-              <a:t>3</a:t>
-            </a:r>
-          </a:p>
-        </p:txBody>
-      </p:sp>
-      <p:sp>
-        <p:nvSpPr>
-          <p:cNvPr id="14" name="TextBox 13"/>
-          <p:cNvSpPr txBox="1"/>
-          <p:nvPr/>
-        </p:nvSpPr>
-        <p:spPr>
-          <a:xfrm>
-            <a:off x="7050024" y="1901952"/>
-            <a:ext cx="1920240" cy="292608"/>
-          </a:xfrm>
-          <a:prstGeom prst="rect">
-            <a:avLst/>
-          </a:prstGeom>
-          <a:noFill/>
-        </p:spPr>
-        <p:txBody>
-          <a:bodyPr wrap="square" anchor="t">
-            <a:spAutoFit/>
-          </a:bodyPr>
-          <a:lstStyle/>
-          <a:p>
-            <a:pPr algn="l">
-              <a:defRPr sz="1500" b="1">
-                <a:solidFill>
-                  <a:srgbClr val="FFFFFF"/>
-                </a:solidFill>
-                <a:latin typeface="Aptos"/>
-              </a:defRPr>
-            </a:pPr>
-            <a:r>
-              <a:t>LAUNCH</a:t>
-            </a:r>
-          </a:p>
-        </p:txBody>
-      </p:sp>
-      <p:sp>
-        <p:nvSpPr>
-          <p:cNvPr id="15" name="TextBox 14"/>
-          <p:cNvSpPr txBox="1"/>
-          <p:nvPr/>
-        </p:nvSpPr>
-        <p:spPr>
-          <a:xfrm>
-            <a:off x="7050024" y="2313432"/>
-            <a:ext cx="1920240" cy="502920"/>
-          </a:xfrm>
-          <a:prstGeom prst="rect">
-            <a:avLst/>
-          </a:prstGeom>
-          <a:noFill/>
-        </p:spPr>
-        <p:txBody>
-          <a:bodyPr wrap="square" anchor="t">
-            <a:spAutoFit/>
-          </a:bodyPr>
-          <a:lstStyle/>
-          <a:p>
-            <a:pPr algn="l">
-              <a:defRPr sz="1300" b="0">
-                <a:solidFill>
-                  <a:srgbClr val="F0F4F8"/>
-                </a:solidFill>
-                <a:latin typeface="Aptos"/>
-              </a:defRPr>
-            </a:pPr>
-            <a:r>
-              <a:t>Narrow benefit use</a:t>
-            </a:r>
-          </a:p>
-        </p:txBody>
-      </p:sp>
-      <p:sp>
-        <p:nvSpPr>
-          <p:cNvPr id="16" name="TextBox 15"/>
-          <p:cNvSpPr txBox="1"/>
-          <p:nvPr/>
-        </p:nvSpPr>
-        <p:spPr>
-          <a:xfrm>
-            <a:off x="8906256" y="1965960"/>
-            <a:ext cx="365760" cy="365760"/>
-          </a:xfrm>
-          <a:prstGeom prst="rect">
-            <a:avLst/>
-          </a:prstGeom>
-          <a:noFill/>
-        </p:spPr>
-        <p:txBody>
-          <a:bodyPr wrap="square" anchor="t">
-            <a:spAutoFit/>
-          </a:bodyPr>
-          <a:lstStyle/>
-          <a:p>
-            <a:pPr algn="l">
-              <a:defRPr sz="2200" b="1">
-                <a:solidFill>
-                  <a:srgbClr val="828FA0"/>
-                </a:solidFill>
-                <a:latin typeface="Aptos"/>
-              </a:defRPr>
-            </a:pPr>
-            <a:r>
-              <a:t>→</a:t>
-            </a:r>
-          </a:p>
-        </p:txBody>
-      </p:sp>
-      <p:sp>
-        <p:nvSpPr>
-          <p:cNvPr id="17" name="TextBox 16"/>
-          <p:cNvSpPr txBox="1"/>
-          <p:nvPr/>
-        </p:nvSpPr>
-        <p:spPr>
-          <a:xfrm>
-            <a:off x="9217152" y="1874519"/>
-            <a:ext cx="594360" cy="594360"/>
-          </a:xfrm>
-          <a:prstGeom prst="rect">
-            <a:avLst/>
-          </a:prstGeom>
-          <a:noFill/>
-        </p:spPr>
-        <p:txBody>
-          <a:bodyPr wrap="square" anchor="t">
-            <a:spAutoFit/>
-          </a:bodyPr>
-          <a:lstStyle/>
-          <a:p>
-            <a:pPr algn="ctr">
-              <a:defRPr sz="2800" b="1">
-                <a:solidFill>
-                  <a:srgbClr val="7B2CBF"/>
-                </a:solidFill>
-                <a:latin typeface="Aptos"/>
-              </a:defRPr>
-            </a:pPr>
-            <a:r>
-              <a:t>4</a:t>
-            </a:r>
-          </a:p>
-        </p:txBody>
-      </p:sp>
-      <p:sp>
-        <p:nvSpPr>
-          <p:cNvPr id="18" name="TextBox 17"/>
-          <p:cNvSpPr txBox="1"/>
-          <p:nvPr/>
-        </p:nvSpPr>
-        <p:spPr>
-          <a:xfrm>
-            <a:off x="9902952" y="1901952"/>
-            <a:ext cx="1920240" cy="292608"/>
-          </a:xfrm>
-          <a:prstGeom prst="rect">
-            <a:avLst/>
-          </a:prstGeom>
-          <a:noFill/>
-        </p:spPr>
-        <p:txBody>
-          <a:bodyPr wrap="square" anchor="t">
-            <a:spAutoFit/>
-          </a:bodyPr>
-          <a:lstStyle/>
-          <a:p>
-            <a:pPr algn="l">
-              <a:defRPr sz="1500" b="1">
-                <a:solidFill>
-                  <a:srgbClr val="FFFFFF"/>
-                </a:solidFill>
-                <a:latin typeface="Aptos"/>
-              </a:defRPr>
-            </a:pPr>
-            <a:r>
-              <a:t>MONITOR</a:t>
-            </a:r>
-          </a:p>
-        </p:txBody>
-      </p:sp>
-      <p:sp>
-        <p:nvSpPr>
-          <p:cNvPr id="19" name="TextBox 18"/>
-          <p:cNvSpPr txBox="1"/>
-          <p:nvPr/>
-        </p:nvSpPr>
-        <p:spPr>
-          <a:xfrm>
-            <a:off x="9902952" y="2313432"/>
-            <a:ext cx="1920240" cy="502920"/>
-          </a:xfrm>
-          <a:prstGeom prst="rect">
-            <a:avLst/>
-          </a:prstGeom>
-          <a:noFill/>
-        </p:spPr>
-        <p:txBody>
-          <a:bodyPr wrap="square" anchor="t">
-            <a:spAutoFit/>
-          </a:bodyPr>
-          <a:lstStyle/>
-          <a:p>
-            <a:pPr algn="l">
-              <a:defRPr sz="1300" b="0">
-                <a:solidFill>
-                  <a:srgbClr val="F0F4F8"/>
-                </a:solidFill>
-                <a:latin typeface="Aptos"/>
-              </a:defRPr>
-            </a:pPr>
-            <a:r>
-              <a:t>Quarterly + stop rules</a:t>
-            </a:r>
-          </a:p>
-        </p:txBody>
-      </p:sp>
-      <p:sp>
-        <p:nvSpPr>
-          <p:cNvPr id="20" name="TextBox 19"/>
-          <p:cNvSpPr txBox="1"/>
-          <p:nvPr/>
-        </p:nvSpPr>
-        <p:spPr>
-          <a:xfrm>
-            <a:off x="1234440" y="4114800"/>
-            <a:ext cx="9692640" cy="1005840"/>
-          </a:xfrm>
-          <a:prstGeom prst="rect">
-            <a:avLst/>
-          </a:prstGeom>
-          <a:noFill/>
-        </p:spPr>
-        <p:txBody>
-          <a:bodyPr wrap="square" anchor="ctr">
-            <a:spAutoFit/>
-          </a:bodyPr>
-          <a:lstStyle/>
-          <a:p>
-            <a:pPr algn="ctr">
-              <a:defRPr sz="2500" b="1">
-                <a:solidFill>
-                  <a:srgbClr val="FFFFFF"/>
-                </a:solidFill>
-                <a:latin typeface="Aptos"/>
-              </a:defRPr>
-            </a:pPr>
-            <a:r>
-              <a:t>Launch only if the score demonstrates benefit without unacceptable subgroup harm.</a:t>
-            </a:r>
-          </a:p>
-        </p:txBody>
-      </p:sp>
-      <p:sp>
-        <p:nvSpPr>
-          <p:cNvPr id="21" name="TextBox 20"/>
-          <p:cNvSpPr txBox="1"/>
-          <p:nvPr/>
-        </p:nvSpPr>
-        <p:spPr>
-          <a:xfrm>
-            <a:off x="1097280" y="5989320"/>
-            <a:ext cx="9966960" cy="274320"/>
-          </a:xfrm>
-          <a:prstGeom prst="rect">
-            <a:avLst/>
-          </a:prstGeom>
-          <a:noFill/>
-        </p:spPr>
-        <p:txBody>
-          <a:bodyPr wrap="square" anchor="t">
-            <a:spAutoFit/>
-          </a:bodyPr>
-          <a:lstStyle/>
-          <a:p>
-            <a:pPr algn="ctr">
-              <a:defRPr sz="900" b="0">
-                <a:solidFill>
-                  <a:srgbClr val="828FA0"/>
-                </a:solidFill>
-                <a:latin typeface="Aptos"/>
-              </a:defRPr>
-            </a:pPr>
-            <a:r>
-              <a:t>Sources: NIJ challenge brief and data; TabICLv2 model card and papers. Full methodology in the repository.</a:t>
-            </a:r>
-          </a:p>
-        </p:txBody>
-      </p:sp>
-      <p:sp>
-        <p:nvSpPr>
-          <p:cNvPr id="22" name="TextBox 21"/>
           <p:cNvSpPr txBox="1"/>
           <p:nvPr/>
         </p:nvSpPr>
@@ -5367,7 +4957,7 @@
       </p:sp>
       <p:sp>
         <p:nvSpPr>
-          <p:cNvPr id="23" name="TextBox 22"/>
+          <p:cNvPr id="12" name="TextBox 11"/>
           <p:cNvSpPr txBox="1"/>
           <p:nvPr/>
         </p:nvSpPr>
@@ -5397,6 +4987,1437 @@
             </a:pPr>
             <a:r>
               <a:t>12</a:t>
+            </a:r>
+          </a:p>
+        </p:txBody>
+      </p:sp>
+    </p:spTree>
+  </p:cSld>
+  <p:clrMapOvr>
+    <a:masterClrMapping/>
+  </p:clrMapOvr>
+</p:sld>
+</file>
+
+<file path=ppt/slides/slide13.xml><?xml version="1.0" encoding="utf-8"?>
+<p:sld xmlns:a="http://schemas.openxmlformats.org/drawingml/2006/main" xmlns:p="http://schemas.openxmlformats.org/presentationml/2006/main" xmlns:r="http://schemas.openxmlformats.org/officeDocument/2006/relationships">
+  <p:cSld>
+    <p:bg>
+      <p:bgPr>
+        <a:solidFill>
+          <a:srgbClr val="0A1F44"/>
+        </a:solidFill>
+        <a:effectLst/>
+      </p:bgPr>
+    </p:bg>
+    <p:spTree>
+      <p:nvGrpSpPr>
+        <p:cNvPr id="1" name=""/>
+        <p:cNvGrpSpPr/>
+        <p:nvPr/>
+      </p:nvGrpSpPr>
+      <p:grpSpPr/>
+      <p:sp>
+        <p:nvSpPr>
+          <p:cNvPr id="2" name="TextBox 1"/>
+          <p:cNvSpPr txBox="1"/>
+          <p:nvPr/>
+        </p:nvSpPr>
+        <p:spPr>
+          <a:xfrm>
+            <a:off x="594360" y="256032"/>
+            <a:ext cx="10972800" cy="274320"/>
+          </a:xfrm>
+          <a:prstGeom prst="rect">
+            <a:avLst/>
+          </a:prstGeom>
+          <a:noFill/>
+        </p:spPr>
+        <p:txBody>
+          <a:bodyPr wrap="square" anchor="t">
+            <a:spAutoFit/>
+          </a:bodyPr>
+          <a:lstStyle/>
+          <a:p>
+            <a:pPr algn="l">
+              <a:defRPr sz="1000" b="1">
+                <a:solidFill>
+                  <a:srgbClr val="FB8500"/>
+                </a:solidFill>
+                <a:latin typeface="Aptos"/>
+              </a:defRPr>
+            </a:pPr>
+            <a:r>
+              <a:t>12 · TRADE-OFFS ACROSS FOUR DIMENSIONS</a:t>
+            </a:r>
+          </a:p>
+        </p:txBody>
+      </p:sp>
+      <p:sp>
+        <p:nvSpPr>
+          <p:cNvPr id="3" name="TextBox 2"/>
+          <p:cNvSpPr txBox="1"/>
+          <p:nvPr/>
+        </p:nvSpPr>
+        <p:spPr>
+          <a:xfrm>
+            <a:off x="594360" y="621792"/>
+            <a:ext cx="10972800" cy="594360"/>
+          </a:xfrm>
+          <a:prstGeom prst="rect">
+            <a:avLst/>
+          </a:prstGeom>
+          <a:noFill/>
+        </p:spPr>
+        <p:txBody>
+          <a:bodyPr wrap="square" anchor="t">
+            <a:spAutoFit/>
+          </a:bodyPr>
+          <a:lstStyle/>
+          <a:p>
+            <a:pPr algn="l">
+              <a:defRPr sz="2600" b="1">
+                <a:solidFill>
+                  <a:srgbClr val="FFFFFF"/>
+                </a:solidFill>
+                <a:latin typeface="Aptos"/>
+              </a:defRPr>
+            </a:pPr>
+            <a:r>
+              <a:t>Which model should the client deploy?</a:t>
+            </a:r>
+          </a:p>
+        </p:txBody>
+      </p:sp>
+      <p:sp>
+        <p:nvSpPr>
+          <p:cNvPr id="4" name="Rectangle 3"/>
+          <p:cNvSpPr/>
+          <p:nvPr/>
+        </p:nvSpPr>
+        <p:spPr>
+          <a:xfrm>
+            <a:off x="594360" y="1298448"/>
+            <a:ext cx="1005840" cy="50292"/>
+          </a:xfrm>
+          <a:prstGeom prst="rect">
+            <a:avLst/>
+          </a:prstGeom>
+          <a:solidFill>
+            <a:srgbClr val="FB8500"/>
+          </a:solidFill>
+          <a:ln>
+            <a:noFill/>
+          </a:ln>
+        </p:spPr>
+        <p:style>
+          <a:lnRef idx="1">
+            <a:schemeClr val="accent1"/>
+          </a:lnRef>
+          <a:fillRef idx="3">
+            <a:schemeClr val="accent1"/>
+          </a:fillRef>
+          <a:effectRef idx="2">
+            <a:schemeClr val="accent1"/>
+          </a:effectRef>
+          <a:fontRef idx="minor">
+            <a:schemeClr val="lt1"/>
+          </a:fontRef>
+        </p:style>
+        <p:txBody>
+          <a:bodyPr rtlCol="0" anchor="ctr"/>
+          <a:lstStyle/>
+          <a:p>
+            <a:pPr algn="ctr"/>
+          </a:p>
+        </p:txBody>
+      </p:sp>
+      <p:pic>
+        <p:nvPicPr>
+          <p:cNvPr id="5" name="Picture 4" descr="tradeoff_matrix.png"/>
+          <p:cNvPicPr>
+            <a:picLocks noChangeAspect="1"/>
+          </p:cNvPicPr>
+          <p:nvPr/>
+        </p:nvPicPr>
+        <p:blipFill>
+          <a:blip r:embed="rId2"/>
+          <a:stretch>
+            <a:fillRect/>
+          </a:stretch>
+        </p:blipFill>
+        <p:spPr>
+          <a:xfrm>
+            <a:off x="2011680" y="1481328"/>
+            <a:ext cx="8138160" cy="6081764"/>
+          </a:xfrm>
+          <a:prstGeom prst="rect">
+            <a:avLst/>
+          </a:prstGeom>
+        </p:spPr>
+      </p:pic>
+      <p:sp>
+        <p:nvSpPr>
+          <p:cNvPr id="6" name="TextBox 5"/>
+          <p:cNvSpPr txBox="1"/>
+          <p:nvPr/>
+        </p:nvSpPr>
+        <p:spPr>
+          <a:xfrm>
+            <a:off x="594360" y="6510528"/>
+            <a:ext cx="3657600" cy="164592"/>
+          </a:xfrm>
+          <a:prstGeom prst="rect">
+            <a:avLst/>
+          </a:prstGeom>
+          <a:noFill/>
+        </p:spPr>
+        <p:txBody>
+          <a:bodyPr wrap="square" anchor="t">
+            <a:spAutoFit/>
+          </a:bodyPr>
+          <a:lstStyle/>
+          <a:p>
+            <a:pPr algn="l">
+              <a:defRPr sz="800" b="0">
+                <a:solidFill>
+                  <a:srgbClr val="828FA0"/>
+                </a:solidFill>
+                <a:latin typeface="Aptos"/>
+              </a:defRPr>
+            </a:pPr>
+            <a:r>
+              <a:t>HEC Paris · ISAF · 2026</a:t>
+            </a:r>
+          </a:p>
+        </p:txBody>
+      </p:sp>
+      <p:sp>
+        <p:nvSpPr>
+          <p:cNvPr id="7" name="TextBox 6"/>
+          <p:cNvSpPr txBox="1"/>
+          <p:nvPr/>
+        </p:nvSpPr>
+        <p:spPr>
+          <a:xfrm>
+            <a:off x="11109960" y="6492240"/>
+            <a:ext cx="411480" cy="164592"/>
+          </a:xfrm>
+          <a:prstGeom prst="rect">
+            <a:avLst/>
+          </a:prstGeom>
+          <a:noFill/>
+        </p:spPr>
+        <p:txBody>
+          <a:bodyPr wrap="square" anchor="t">
+            <a:spAutoFit/>
+          </a:bodyPr>
+          <a:lstStyle/>
+          <a:p>
+            <a:pPr algn="r">
+              <a:defRPr sz="800" b="0">
+                <a:solidFill>
+                  <a:srgbClr val="828FA0"/>
+                </a:solidFill>
+                <a:latin typeface="Aptos"/>
+              </a:defRPr>
+            </a:pPr>
+            <a:r>
+              <a:t>13</a:t>
+            </a:r>
+          </a:p>
+        </p:txBody>
+      </p:sp>
+    </p:spTree>
+  </p:cSld>
+  <p:clrMapOvr>
+    <a:masterClrMapping/>
+  </p:clrMapOvr>
+</p:sld>
+</file>
+
+<file path=ppt/slides/slide14.xml><?xml version="1.0" encoding="utf-8"?>
+<p:sld xmlns:a="http://schemas.openxmlformats.org/drawingml/2006/main" xmlns:p="http://schemas.openxmlformats.org/presentationml/2006/main" xmlns:r="http://schemas.openxmlformats.org/officeDocument/2006/relationships">
+  <p:cSld>
+    <p:bg>
+      <p:bgPr>
+        <a:solidFill>
+          <a:srgbClr val="0A1F44"/>
+        </a:solidFill>
+        <a:effectLst/>
+      </p:bgPr>
+    </p:bg>
+    <p:spTree>
+      <p:nvGrpSpPr>
+        <p:cNvPr id="1" name=""/>
+        <p:cNvGrpSpPr/>
+        <p:nvPr/>
+      </p:nvGrpSpPr>
+      <p:grpSpPr/>
+      <p:sp>
+        <p:nvSpPr>
+          <p:cNvPr id="2" name="TextBox 1"/>
+          <p:cNvSpPr txBox="1"/>
+          <p:nvPr/>
+        </p:nvSpPr>
+        <p:spPr>
+          <a:xfrm>
+            <a:off x="594360" y="256032"/>
+            <a:ext cx="10972800" cy="274320"/>
+          </a:xfrm>
+          <a:prstGeom prst="rect">
+            <a:avLst/>
+          </a:prstGeom>
+          <a:noFill/>
+        </p:spPr>
+        <p:txBody>
+          <a:bodyPr wrap="square" anchor="t">
+            <a:spAutoFit/>
+          </a:bodyPr>
+          <a:lstStyle/>
+          <a:p>
+            <a:pPr algn="l">
+              <a:defRPr sz="1000" b="1">
+                <a:solidFill>
+                  <a:srgbClr val="FB8500"/>
+                </a:solidFill>
+                <a:latin typeface="Aptos"/>
+              </a:defRPr>
+            </a:pPr>
+            <a:r>
+              <a:t>13 · RECOMMENDATION</a:t>
+            </a:r>
+          </a:p>
+        </p:txBody>
+      </p:sp>
+      <p:sp>
+        <p:nvSpPr>
+          <p:cNvPr id="3" name="TextBox 2"/>
+          <p:cNvSpPr txBox="1"/>
+          <p:nvPr/>
+        </p:nvSpPr>
+        <p:spPr>
+          <a:xfrm>
+            <a:off x="594360" y="621792"/>
+            <a:ext cx="10972800" cy="594360"/>
+          </a:xfrm>
+          <a:prstGeom prst="rect">
+            <a:avLst/>
+          </a:prstGeom>
+          <a:noFill/>
+        </p:spPr>
+        <p:txBody>
+          <a:bodyPr wrap="square" anchor="t">
+            <a:spAutoFit/>
+          </a:bodyPr>
+          <a:lstStyle/>
+          <a:p>
+            <a:pPr algn="l">
+              <a:defRPr sz="2600" b="1">
+                <a:solidFill>
+                  <a:srgbClr val="FFFFFF"/>
+                </a:solidFill>
+                <a:latin typeface="Aptos"/>
+              </a:defRPr>
+            </a:pPr>
+            <a:r>
+              <a:t>Deploy XGBoost; challenger logistic; TabICL for small agencies</a:t>
+            </a:r>
+          </a:p>
+        </p:txBody>
+      </p:sp>
+      <p:sp>
+        <p:nvSpPr>
+          <p:cNvPr id="4" name="Rectangle 3"/>
+          <p:cNvSpPr/>
+          <p:nvPr/>
+        </p:nvSpPr>
+        <p:spPr>
+          <a:xfrm>
+            <a:off x="594360" y="1298448"/>
+            <a:ext cx="1005840" cy="50292"/>
+          </a:xfrm>
+          <a:prstGeom prst="rect">
+            <a:avLst/>
+          </a:prstGeom>
+          <a:solidFill>
+            <a:srgbClr val="FB8500"/>
+          </a:solidFill>
+          <a:ln>
+            <a:noFill/>
+          </a:ln>
+        </p:spPr>
+        <p:style>
+          <a:lnRef idx="1">
+            <a:schemeClr val="accent1"/>
+          </a:lnRef>
+          <a:fillRef idx="3">
+            <a:schemeClr val="accent1"/>
+          </a:fillRef>
+          <a:effectRef idx="2">
+            <a:schemeClr val="accent1"/>
+          </a:effectRef>
+          <a:fontRef idx="minor">
+            <a:schemeClr val="lt1"/>
+          </a:fontRef>
+        </p:style>
+        <p:txBody>
+          <a:bodyPr rtlCol="0" anchor="ctr"/>
+          <a:lstStyle/>
+          <a:p>
+            <a:pPr algn="ctr"/>
+          </a:p>
+        </p:txBody>
+      </p:sp>
+      <p:sp>
+        <p:nvSpPr>
+          <p:cNvPr id="5" name="Rounded Rectangle 4"/>
+          <p:cNvSpPr/>
+          <p:nvPr/>
+        </p:nvSpPr>
+        <p:spPr>
+          <a:xfrm>
+            <a:off x="731520" y="1645920"/>
+            <a:ext cx="5257800" cy="4251960"/>
+          </a:xfrm>
+          <a:prstGeom prst="roundRect">
+            <a:avLst/>
+          </a:prstGeom>
+          <a:solidFill>
+            <a:srgbClr val="143058"/>
+          </a:solidFill>
+          <a:ln>
+            <a:solidFill>
+              <a:srgbClr val="00B4B4"/>
+            </a:solidFill>
+          </a:ln>
+        </p:spPr>
+        <p:style>
+          <a:lnRef idx="1">
+            <a:schemeClr val="accent1"/>
+          </a:lnRef>
+          <a:fillRef idx="3">
+            <a:schemeClr val="accent1"/>
+          </a:fillRef>
+          <a:effectRef idx="2">
+            <a:schemeClr val="accent1"/>
+          </a:effectRef>
+          <a:fontRef idx="minor">
+            <a:schemeClr val="lt1"/>
+          </a:fontRef>
+        </p:style>
+        <p:txBody>
+          <a:bodyPr rtlCol="0" anchor="ctr"/>
+          <a:lstStyle/>
+          <a:p>
+            <a:pPr algn="ctr"/>
+          </a:p>
+        </p:txBody>
+      </p:sp>
+      <p:sp>
+        <p:nvSpPr>
+          <p:cNvPr id="6" name="TextBox 5"/>
+          <p:cNvSpPr txBox="1"/>
+          <p:nvPr/>
+        </p:nvSpPr>
+        <p:spPr>
+          <a:xfrm>
+            <a:off x="960120" y="1920240"/>
+            <a:ext cx="4800600" cy="365760"/>
+          </a:xfrm>
+          <a:prstGeom prst="rect">
+            <a:avLst/>
+          </a:prstGeom>
+          <a:noFill/>
+        </p:spPr>
+        <p:txBody>
+          <a:bodyPr wrap="square" anchor="t">
+            <a:spAutoFit/>
+          </a:bodyPr>
+          <a:lstStyle/>
+          <a:p>
+            <a:pPr algn="ctr">
+              <a:defRPr sz="2000" b="1">
+                <a:solidFill>
+                  <a:srgbClr val="00B4B4"/>
+                </a:solidFill>
+                <a:latin typeface="Aptos"/>
+              </a:defRPr>
+            </a:pPr>
+            <a:r>
+              <a:t>WHY XGBOOST</a:t>
+            </a:r>
+          </a:p>
+        </p:txBody>
+      </p:sp>
+      <p:sp>
+        <p:nvSpPr>
+          <p:cNvPr id="7" name="TextBox 6"/>
+          <p:cNvSpPr txBox="1"/>
+          <p:nvPr/>
+        </p:nvSpPr>
+        <p:spPr>
+          <a:xfrm>
+            <a:off x="1051560" y="2633472"/>
+            <a:ext cx="4617720" cy="3017520"/>
+          </a:xfrm>
+          <a:prstGeom prst="rect">
+            <a:avLst/>
+          </a:prstGeom>
+          <a:noFill/>
+        </p:spPr>
+        <p:txBody>
+          <a:bodyPr wrap="square" anchor="t">
+            <a:spAutoFit/>
+          </a:bodyPr>
+          <a:lstStyle/>
+          <a:p>
+            <a:pPr algn="ctr">
+              <a:defRPr sz="1500" b="0">
+                <a:solidFill>
+                  <a:srgbClr val="F0F4F8"/>
+                </a:solidFill>
+                <a:latin typeface="Aptos"/>
+              </a:defRPr>
+            </a:pPr>
+            <a:r>
+              <a:t>Best calibration + net value</a:t>
+            </a:r>
+            <a:br/>
+            <a:br/>
+            <a:r>
+              <a:t>Smallest gender FPR gap</a:t>
+            </a:r>
+            <a:br/>
+            <a:br/>
+            <a:r>
+              <a:t>SHAP-explainable</a:t>
+            </a:r>
+            <a:br/>
+            <a:br/>
+            <a:r>
+              <a:t>35× faster than the TFM</a:t>
+            </a:r>
+          </a:p>
+        </p:txBody>
+      </p:sp>
+      <p:sp>
+        <p:nvSpPr>
+          <p:cNvPr id="8" name="Rounded Rectangle 7"/>
+          <p:cNvSpPr/>
+          <p:nvPr/>
+        </p:nvSpPr>
+        <p:spPr>
+          <a:xfrm>
+            <a:off x="6217920" y="1645920"/>
+            <a:ext cx="5257800" cy="4251960"/>
+          </a:xfrm>
+          <a:prstGeom prst="roundRect">
+            <a:avLst/>
+          </a:prstGeom>
+          <a:solidFill>
+            <a:srgbClr val="143058"/>
+          </a:solidFill>
+          <a:ln>
+            <a:solidFill>
+              <a:srgbClr val="7B2CBF"/>
+            </a:solidFill>
+          </a:ln>
+        </p:spPr>
+        <p:style>
+          <a:lnRef idx="1">
+            <a:schemeClr val="accent1"/>
+          </a:lnRef>
+          <a:fillRef idx="3">
+            <a:schemeClr val="accent1"/>
+          </a:fillRef>
+          <a:effectRef idx="2">
+            <a:schemeClr val="accent1"/>
+          </a:effectRef>
+          <a:fontRef idx="minor">
+            <a:schemeClr val="lt1"/>
+          </a:fontRef>
+        </p:style>
+        <p:txBody>
+          <a:bodyPr rtlCol="0" anchor="ctr"/>
+          <a:lstStyle/>
+          <a:p>
+            <a:pPr algn="ctr"/>
+          </a:p>
+        </p:txBody>
+      </p:sp>
+      <p:sp>
+        <p:nvSpPr>
+          <p:cNvPr id="9" name="TextBox 8"/>
+          <p:cNvSpPr txBox="1"/>
+          <p:nvPr/>
+        </p:nvSpPr>
+        <p:spPr>
+          <a:xfrm>
+            <a:off x="6446520" y="1920240"/>
+            <a:ext cx="4800600" cy="365760"/>
+          </a:xfrm>
+          <a:prstGeom prst="rect">
+            <a:avLst/>
+          </a:prstGeom>
+          <a:noFill/>
+        </p:spPr>
+        <p:txBody>
+          <a:bodyPr wrap="square" anchor="t">
+            <a:spAutoFit/>
+          </a:bodyPr>
+          <a:lstStyle/>
+          <a:p>
+            <a:pPr algn="ctr">
+              <a:defRPr sz="2000" b="1">
+                <a:solidFill>
+                  <a:srgbClr val="7B2CBF"/>
+                </a:solidFill>
+                <a:latin typeface="Aptos"/>
+              </a:defRPr>
+            </a:pPr>
+            <a:r>
+              <a:t>CONDITIONS</a:t>
+            </a:r>
+          </a:p>
+        </p:txBody>
+      </p:sp>
+      <p:sp>
+        <p:nvSpPr>
+          <p:cNvPr id="10" name="TextBox 9"/>
+          <p:cNvSpPr txBox="1"/>
+          <p:nvPr/>
+        </p:nvSpPr>
+        <p:spPr>
+          <a:xfrm>
+            <a:off x="6537959" y="2633472"/>
+            <a:ext cx="4617720" cy="3017520"/>
+          </a:xfrm>
+          <a:prstGeom prst="rect">
+            <a:avLst/>
+          </a:prstGeom>
+          <a:noFill/>
+        </p:spPr>
+        <p:txBody>
+          <a:bodyPr wrap="square" anchor="t">
+            <a:spAutoFit/>
+          </a:bodyPr>
+          <a:lstStyle/>
+          <a:p>
+            <a:pPr algn="ctr">
+              <a:defRPr sz="1500" b="0">
+                <a:solidFill>
+                  <a:srgbClr val="F0F4F8"/>
+                </a:solidFill>
+                <a:latin typeface="Aptos"/>
+              </a:defRPr>
+            </a:pPr>
+            <a:r>
+              <a:t>Benefit-only allocation</a:t>
+            </a:r>
+            <a:br/>
+            <a:br/>
+            <a:r>
+              <a:t>Logistic as transparent challenger</a:t>
+            </a:r>
+            <a:br/>
+            <a:br/>
+            <a:r>
+              <a:t>Prospective shadow validation</a:t>
+            </a:r>
+            <a:br/>
+            <a:br/>
+            <a:r>
+              <a:t>Appeal route, logs, quarterly audits, stop rules</a:t>
+            </a:r>
+          </a:p>
+        </p:txBody>
+      </p:sp>
+      <p:sp>
+        <p:nvSpPr>
+          <p:cNvPr id="11" name="TextBox 10"/>
+          <p:cNvSpPr txBox="1"/>
+          <p:nvPr/>
+        </p:nvSpPr>
+        <p:spPr>
+          <a:xfrm>
+            <a:off x="594360" y="6510528"/>
+            <a:ext cx="3657600" cy="164592"/>
+          </a:xfrm>
+          <a:prstGeom prst="rect">
+            <a:avLst/>
+          </a:prstGeom>
+          <a:noFill/>
+        </p:spPr>
+        <p:txBody>
+          <a:bodyPr wrap="square" anchor="t">
+            <a:spAutoFit/>
+          </a:bodyPr>
+          <a:lstStyle/>
+          <a:p>
+            <a:pPr algn="l">
+              <a:defRPr sz="800" b="0">
+                <a:solidFill>
+                  <a:srgbClr val="828FA0"/>
+                </a:solidFill>
+                <a:latin typeface="Aptos"/>
+              </a:defRPr>
+            </a:pPr>
+            <a:r>
+              <a:t>HEC Paris · ISAF · 2026</a:t>
+            </a:r>
+          </a:p>
+        </p:txBody>
+      </p:sp>
+      <p:sp>
+        <p:nvSpPr>
+          <p:cNvPr id="12" name="TextBox 11"/>
+          <p:cNvSpPr txBox="1"/>
+          <p:nvPr/>
+        </p:nvSpPr>
+        <p:spPr>
+          <a:xfrm>
+            <a:off x="11109960" y="6492240"/>
+            <a:ext cx="411480" cy="164592"/>
+          </a:xfrm>
+          <a:prstGeom prst="rect">
+            <a:avLst/>
+          </a:prstGeom>
+          <a:noFill/>
+        </p:spPr>
+        <p:txBody>
+          <a:bodyPr wrap="square" anchor="t">
+            <a:spAutoFit/>
+          </a:bodyPr>
+          <a:lstStyle/>
+          <a:p>
+            <a:pPr algn="r">
+              <a:defRPr sz="800" b="0">
+                <a:solidFill>
+                  <a:srgbClr val="828FA0"/>
+                </a:solidFill>
+                <a:latin typeface="Aptos"/>
+              </a:defRPr>
+            </a:pPr>
+            <a:r>
+              <a:t>14</a:t>
+            </a:r>
+          </a:p>
+        </p:txBody>
+      </p:sp>
+    </p:spTree>
+  </p:cSld>
+  <p:clrMapOvr>
+    <a:masterClrMapping/>
+  </p:clrMapOvr>
+</p:sld>
+</file>
+
+<file path=ppt/slides/slide15.xml><?xml version="1.0" encoding="utf-8"?>
+<p:sld xmlns:a="http://schemas.openxmlformats.org/drawingml/2006/main" xmlns:p="http://schemas.openxmlformats.org/presentationml/2006/main" xmlns:r="http://schemas.openxmlformats.org/officeDocument/2006/relationships">
+  <p:cSld>
+    <p:bg>
+      <p:bgPr>
+        <a:solidFill>
+          <a:srgbClr val="0A1F44"/>
+        </a:solidFill>
+        <a:effectLst/>
+      </p:bgPr>
+    </p:bg>
+    <p:spTree>
+      <p:nvGrpSpPr>
+        <p:cNvPr id="1" name=""/>
+        <p:cNvGrpSpPr/>
+        <p:nvPr/>
+      </p:nvGrpSpPr>
+      <p:grpSpPr/>
+      <p:sp>
+        <p:nvSpPr>
+          <p:cNvPr id="2" name="TextBox 1"/>
+          <p:cNvSpPr txBox="1"/>
+          <p:nvPr/>
+        </p:nvSpPr>
+        <p:spPr>
+          <a:xfrm>
+            <a:off x="594360" y="256032"/>
+            <a:ext cx="10972800" cy="274320"/>
+          </a:xfrm>
+          <a:prstGeom prst="rect">
+            <a:avLst/>
+          </a:prstGeom>
+          <a:noFill/>
+        </p:spPr>
+        <p:txBody>
+          <a:bodyPr wrap="square" anchor="t">
+            <a:spAutoFit/>
+          </a:bodyPr>
+          <a:lstStyle/>
+          <a:p>
+            <a:pPr algn="l">
+              <a:defRPr sz="1000" b="1">
+                <a:solidFill>
+                  <a:srgbClr val="FB8500"/>
+                </a:solidFill>
+                <a:latin typeface="Aptos"/>
+              </a:defRPr>
+            </a:pPr>
+            <a:r>
+              <a:t>14 · CLIENT EXPERIENCE</a:t>
+            </a:r>
+          </a:p>
+        </p:txBody>
+      </p:sp>
+      <p:sp>
+        <p:nvSpPr>
+          <p:cNvPr id="3" name="TextBox 2"/>
+          <p:cNvSpPr txBox="1"/>
+          <p:nvPr/>
+        </p:nvSpPr>
+        <p:spPr>
+          <a:xfrm>
+            <a:off x="594360" y="621792"/>
+            <a:ext cx="10972800" cy="594360"/>
+          </a:xfrm>
+          <a:prstGeom prst="rect">
+            <a:avLst/>
+          </a:prstGeom>
+          <a:noFill/>
+        </p:spPr>
+        <p:txBody>
+          <a:bodyPr wrap="square" anchor="t">
+            <a:spAutoFit/>
+          </a:bodyPr>
+          <a:lstStyle/>
+          <a:p>
+            <a:pPr algn="l">
+              <a:defRPr sz="2600" b="1">
+                <a:solidFill>
+                  <a:srgbClr val="FFFFFF"/>
+                </a:solidFill>
+                <a:latin typeface="Aptos"/>
+              </a:defRPr>
+            </a:pPr>
+            <a:r>
+              <a:t>The application makes every trade-off testable</a:t>
+            </a:r>
+          </a:p>
+        </p:txBody>
+      </p:sp>
+      <p:sp>
+        <p:nvSpPr>
+          <p:cNvPr id="4" name="Rectangle 3"/>
+          <p:cNvSpPr/>
+          <p:nvPr/>
+        </p:nvSpPr>
+        <p:spPr>
+          <a:xfrm>
+            <a:off x="594360" y="1298448"/>
+            <a:ext cx="1005840" cy="50292"/>
+          </a:xfrm>
+          <a:prstGeom prst="rect">
+            <a:avLst/>
+          </a:prstGeom>
+          <a:solidFill>
+            <a:srgbClr val="FB8500"/>
+          </a:solidFill>
+          <a:ln>
+            <a:noFill/>
+          </a:ln>
+        </p:spPr>
+        <p:style>
+          <a:lnRef idx="1">
+            <a:schemeClr val="accent1"/>
+          </a:lnRef>
+          <a:fillRef idx="3">
+            <a:schemeClr val="accent1"/>
+          </a:fillRef>
+          <a:effectRef idx="2">
+            <a:schemeClr val="accent1"/>
+          </a:effectRef>
+          <a:fontRef idx="minor">
+            <a:schemeClr val="lt1"/>
+          </a:fontRef>
+        </p:style>
+        <p:txBody>
+          <a:bodyPr rtlCol="0" anchor="ctr"/>
+          <a:lstStyle/>
+          <a:p>
+            <a:pPr algn="ctr"/>
+          </a:p>
+        </p:txBody>
+      </p:sp>
+      <p:sp>
+        <p:nvSpPr>
+          <p:cNvPr id="5" name="Rounded Rectangle 4"/>
+          <p:cNvSpPr/>
+          <p:nvPr/>
+        </p:nvSpPr>
+        <p:spPr>
+          <a:xfrm>
+            <a:off x="685800" y="1600200"/>
+            <a:ext cx="5212080" cy="1572768"/>
+          </a:xfrm>
+          <a:prstGeom prst="roundRect">
+            <a:avLst/>
+          </a:prstGeom>
+          <a:solidFill>
+            <a:srgbClr val="143058"/>
+          </a:solidFill>
+          <a:ln>
+            <a:solidFill>
+              <a:srgbClr val="FB8500"/>
+            </a:solidFill>
+          </a:ln>
+        </p:spPr>
+        <p:style>
+          <a:lnRef idx="1">
+            <a:schemeClr val="accent1"/>
+          </a:lnRef>
+          <a:fillRef idx="3">
+            <a:schemeClr val="accent1"/>
+          </a:fillRef>
+          <a:effectRef idx="2">
+            <a:schemeClr val="accent1"/>
+          </a:effectRef>
+          <a:fontRef idx="minor">
+            <a:schemeClr val="lt1"/>
+          </a:fontRef>
+        </p:style>
+        <p:txBody>
+          <a:bodyPr rtlCol="0" anchor="ctr"/>
+          <a:lstStyle/>
+          <a:p>
+            <a:pPr algn="ctr"/>
+          </a:p>
+        </p:txBody>
+      </p:sp>
+      <p:sp>
+        <p:nvSpPr>
+          <p:cNvPr id="6" name="TextBox 5"/>
+          <p:cNvSpPr txBox="1"/>
+          <p:nvPr/>
+        </p:nvSpPr>
+        <p:spPr>
+          <a:xfrm>
+            <a:off x="914400" y="1874519"/>
+            <a:ext cx="4754880" cy="365760"/>
+          </a:xfrm>
+          <a:prstGeom prst="rect">
+            <a:avLst/>
+          </a:prstGeom>
+          <a:noFill/>
+        </p:spPr>
+        <p:txBody>
+          <a:bodyPr wrap="square" anchor="t">
+            <a:spAutoFit/>
+          </a:bodyPr>
+          <a:lstStyle/>
+          <a:p>
+            <a:pPr algn="ctr">
+              <a:defRPr sz="2000" b="1">
+                <a:solidFill>
+                  <a:srgbClr val="FB8500"/>
+                </a:solidFill>
+                <a:latin typeface="Aptos"/>
+              </a:defRPr>
+            </a:pPr>
+            <a:r>
+              <a:t>ASSESS</a:t>
+            </a:r>
+          </a:p>
+        </p:txBody>
+      </p:sp>
+      <p:sp>
+        <p:nvSpPr>
+          <p:cNvPr id="7" name="TextBox 6"/>
+          <p:cNvSpPr txBox="1"/>
+          <p:nvPr/>
+        </p:nvSpPr>
+        <p:spPr>
+          <a:xfrm>
+            <a:off x="1005840" y="2587752"/>
+            <a:ext cx="4572000" cy="338327"/>
+          </a:xfrm>
+          <a:prstGeom prst="rect">
+            <a:avLst/>
+          </a:prstGeom>
+          <a:noFill/>
+        </p:spPr>
+        <p:txBody>
+          <a:bodyPr wrap="square" anchor="t">
+            <a:spAutoFit/>
+          </a:bodyPr>
+          <a:lstStyle/>
+          <a:p>
+            <a:pPr algn="ctr">
+              <a:defRPr sz="1500" b="0">
+                <a:solidFill>
+                  <a:srgbClr val="F0F4F8"/>
+                </a:solidFill>
+                <a:latin typeface="Aptos"/>
+              </a:defRPr>
+            </a:pPr>
+            <a:r>
+              <a:t>Score one person, all 3 models + SHAP</a:t>
+            </a:r>
+          </a:p>
+        </p:txBody>
+      </p:sp>
+      <p:sp>
+        <p:nvSpPr>
+          <p:cNvPr id="8" name="Rounded Rectangle 7"/>
+          <p:cNvSpPr/>
+          <p:nvPr/>
+        </p:nvSpPr>
+        <p:spPr>
+          <a:xfrm>
+            <a:off x="6263640" y="1600200"/>
+            <a:ext cx="5212080" cy="1572768"/>
+          </a:xfrm>
+          <a:prstGeom prst="roundRect">
+            <a:avLst/>
+          </a:prstGeom>
+          <a:solidFill>
+            <a:srgbClr val="143058"/>
+          </a:solidFill>
+          <a:ln>
+            <a:solidFill>
+              <a:srgbClr val="7B2CBF"/>
+            </a:solidFill>
+          </a:ln>
+        </p:spPr>
+        <p:style>
+          <a:lnRef idx="1">
+            <a:schemeClr val="accent1"/>
+          </a:lnRef>
+          <a:fillRef idx="3">
+            <a:schemeClr val="accent1"/>
+          </a:fillRef>
+          <a:effectRef idx="2">
+            <a:schemeClr val="accent1"/>
+          </a:effectRef>
+          <a:fontRef idx="minor">
+            <a:schemeClr val="lt1"/>
+          </a:fontRef>
+        </p:style>
+        <p:txBody>
+          <a:bodyPr rtlCol="0" anchor="ctr"/>
+          <a:lstStyle/>
+          <a:p>
+            <a:pPr algn="ctr"/>
+          </a:p>
+        </p:txBody>
+      </p:sp>
+      <p:sp>
+        <p:nvSpPr>
+          <p:cNvPr id="9" name="TextBox 8"/>
+          <p:cNvSpPr txBox="1"/>
+          <p:nvPr/>
+        </p:nvSpPr>
+        <p:spPr>
+          <a:xfrm>
+            <a:off x="6492240" y="1874519"/>
+            <a:ext cx="4754880" cy="365760"/>
+          </a:xfrm>
+          <a:prstGeom prst="rect">
+            <a:avLst/>
+          </a:prstGeom>
+          <a:noFill/>
+        </p:spPr>
+        <p:txBody>
+          <a:bodyPr wrap="square" anchor="t">
+            <a:spAutoFit/>
+          </a:bodyPr>
+          <a:lstStyle/>
+          <a:p>
+            <a:pPr algn="ctr">
+              <a:defRPr sz="2000" b="1">
+                <a:solidFill>
+                  <a:srgbClr val="7B2CBF"/>
+                </a:solidFill>
+                <a:latin typeface="Aptos"/>
+              </a:defRPr>
+            </a:pPr>
+            <a:r>
+              <a:t>AUDIT</a:t>
+            </a:r>
+          </a:p>
+        </p:txBody>
+      </p:sp>
+      <p:sp>
+        <p:nvSpPr>
+          <p:cNvPr id="10" name="TextBox 9"/>
+          <p:cNvSpPr txBox="1"/>
+          <p:nvPr/>
+        </p:nvSpPr>
+        <p:spPr>
+          <a:xfrm>
+            <a:off x="6583679" y="2587752"/>
+            <a:ext cx="4572000" cy="338327"/>
+          </a:xfrm>
+          <a:prstGeom prst="rect">
+            <a:avLst/>
+          </a:prstGeom>
+          <a:noFill/>
+        </p:spPr>
+        <p:txBody>
+          <a:bodyPr wrap="square" anchor="t">
+            <a:spAutoFit/>
+          </a:bodyPr>
+          <a:lstStyle/>
+          <a:p>
+            <a:pPr algn="ctr">
+              <a:defRPr sz="1500" b="0">
+                <a:solidFill>
+                  <a:srgbClr val="F0F4F8"/>
+                </a:solidFill>
+                <a:latin typeface="Aptos"/>
+              </a:defRPr>
+            </a:pPr>
+            <a:r>
+              <a:t>Race + gender, at the deployed point</a:t>
+            </a:r>
+          </a:p>
+        </p:txBody>
+      </p:sp>
+      <p:sp>
+        <p:nvSpPr>
+          <p:cNvPr id="11" name="Rounded Rectangle 10"/>
+          <p:cNvSpPr/>
+          <p:nvPr/>
+        </p:nvSpPr>
+        <p:spPr>
+          <a:xfrm>
+            <a:off x="685800" y="3474720"/>
+            <a:ext cx="5212080" cy="1572768"/>
+          </a:xfrm>
+          <a:prstGeom prst="roundRect">
+            <a:avLst/>
+          </a:prstGeom>
+          <a:solidFill>
+            <a:srgbClr val="143058"/>
+          </a:solidFill>
+          <a:ln>
+            <a:solidFill>
+              <a:srgbClr val="FB8500"/>
+            </a:solidFill>
+          </a:ln>
+        </p:spPr>
+        <p:style>
+          <a:lnRef idx="1">
+            <a:schemeClr val="accent1"/>
+          </a:lnRef>
+          <a:fillRef idx="3">
+            <a:schemeClr val="accent1"/>
+          </a:fillRef>
+          <a:effectRef idx="2">
+            <a:schemeClr val="accent1"/>
+          </a:effectRef>
+          <a:fontRef idx="minor">
+            <a:schemeClr val="lt1"/>
+          </a:fontRef>
+        </p:style>
+        <p:txBody>
+          <a:bodyPr rtlCol="0" anchor="ctr"/>
+          <a:lstStyle/>
+          <a:p>
+            <a:pPr algn="ctr"/>
+          </a:p>
+        </p:txBody>
+      </p:sp>
+      <p:sp>
+        <p:nvSpPr>
+          <p:cNvPr id="12" name="TextBox 11"/>
+          <p:cNvSpPr txBox="1"/>
+          <p:nvPr/>
+        </p:nvSpPr>
+        <p:spPr>
+          <a:xfrm>
+            <a:off x="914400" y="3749039"/>
+            <a:ext cx="4754880" cy="365760"/>
+          </a:xfrm>
+          <a:prstGeom prst="rect">
+            <a:avLst/>
+          </a:prstGeom>
+          <a:noFill/>
+        </p:spPr>
+        <p:txBody>
+          <a:bodyPr wrap="square" anchor="t">
+            <a:spAutoFit/>
+          </a:bodyPr>
+          <a:lstStyle/>
+          <a:p>
+            <a:pPr algn="ctr">
+              <a:defRPr sz="2000" b="1">
+                <a:solidFill>
+                  <a:srgbClr val="FB8500"/>
+                </a:solidFill>
+                <a:latin typeface="Aptos"/>
+              </a:defRPr>
+            </a:pPr>
+            <a:r>
+              <a:t>COMPARE</a:t>
+            </a:r>
+          </a:p>
+        </p:txBody>
+      </p:sp>
+      <p:sp>
+        <p:nvSpPr>
+          <p:cNvPr id="13" name="TextBox 12"/>
+          <p:cNvSpPr txBox="1"/>
+          <p:nvPr/>
+        </p:nvSpPr>
+        <p:spPr>
+          <a:xfrm>
+            <a:off x="1005840" y="4462272"/>
+            <a:ext cx="4572000" cy="338327"/>
+          </a:xfrm>
+          <a:prstGeom prst="rect">
+            <a:avLst/>
+          </a:prstGeom>
+          <a:noFill/>
+        </p:spPr>
+        <p:txBody>
+          <a:bodyPr wrap="square" anchor="t">
+            <a:spAutoFit/>
+          </a:bodyPr>
+          <a:lstStyle/>
+          <a:p>
+            <a:pPr algn="ctr">
+              <a:defRPr sz="1500" b="0">
+                <a:solidFill>
+                  <a:srgbClr val="F0F4F8"/>
+                </a:solidFill>
+                <a:latin typeface="Aptos"/>
+              </a:defRPr>
+            </a:pPr>
+            <a:r>
+              <a:t>Incumbent, learning curve, matrix</a:t>
+            </a:r>
+          </a:p>
+        </p:txBody>
+      </p:sp>
+      <p:sp>
+        <p:nvSpPr>
+          <p:cNvPr id="14" name="Rounded Rectangle 13"/>
+          <p:cNvSpPr/>
+          <p:nvPr/>
+        </p:nvSpPr>
+        <p:spPr>
+          <a:xfrm>
+            <a:off x="6263640" y="3474720"/>
+            <a:ext cx="5212080" cy="1572768"/>
+          </a:xfrm>
+          <a:prstGeom prst="roundRect">
+            <a:avLst/>
+          </a:prstGeom>
+          <a:solidFill>
+            <a:srgbClr val="143058"/>
+          </a:solidFill>
+          <a:ln>
+            <a:solidFill>
+              <a:srgbClr val="7B2CBF"/>
+            </a:solidFill>
+          </a:ln>
+        </p:spPr>
+        <p:style>
+          <a:lnRef idx="1">
+            <a:schemeClr val="accent1"/>
+          </a:lnRef>
+          <a:fillRef idx="3">
+            <a:schemeClr val="accent1"/>
+          </a:fillRef>
+          <a:effectRef idx="2">
+            <a:schemeClr val="accent1"/>
+          </a:effectRef>
+          <a:fontRef idx="minor">
+            <a:schemeClr val="lt1"/>
+          </a:fontRef>
+        </p:style>
+        <p:txBody>
+          <a:bodyPr rtlCol="0" anchor="ctr"/>
+          <a:lstStyle/>
+          <a:p>
+            <a:pPr algn="ctr"/>
+          </a:p>
+        </p:txBody>
+      </p:sp>
+      <p:sp>
+        <p:nvSpPr>
+          <p:cNvPr id="15" name="TextBox 14"/>
+          <p:cNvSpPr txBox="1"/>
+          <p:nvPr/>
+        </p:nvSpPr>
+        <p:spPr>
+          <a:xfrm>
+            <a:off x="6492240" y="3749039"/>
+            <a:ext cx="4754880" cy="365760"/>
+          </a:xfrm>
+          <a:prstGeom prst="rect">
+            <a:avLst/>
+          </a:prstGeom>
+          <a:noFill/>
+        </p:spPr>
+        <p:txBody>
+          <a:bodyPr wrap="square" anchor="t">
+            <a:spAutoFit/>
+          </a:bodyPr>
+          <a:lstStyle/>
+          <a:p>
+            <a:pPr algn="ctr">
+              <a:defRPr sz="2000" b="1">
+                <a:solidFill>
+                  <a:srgbClr val="7B2CBF"/>
+                </a:solidFill>
+                <a:latin typeface="Aptos"/>
+              </a:defRPr>
+            </a:pPr>
+            <a:r>
+              <a:t>SIMULATE</a:t>
+            </a:r>
+          </a:p>
+        </p:txBody>
+      </p:sp>
+      <p:sp>
+        <p:nvSpPr>
+          <p:cNvPr id="16" name="TextBox 15"/>
+          <p:cNvSpPr txBox="1"/>
+          <p:nvPr/>
+        </p:nvSpPr>
+        <p:spPr>
+          <a:xfrm>
+            <a:off x="6583679" y="4462272"/>
+            <a:ext cx="4572000" cy="338327"/>
+          </a:xfrm>
+          <a:prstGeom prst="rect">
+            <a:avLst/>
+          </a:prstGeom>
+          <a:noFill/>
+        </p:spPr>
+        <p:txBody>
+          <a:bodyPr wrap="square" anchor="t">
+            <a:spAutoFit/>
+          </a:bodyPr>
+          <a:lstStyle/>
+          <a:p>
+            <a:pPr algn="ctr">
+              <a:defRPr sz="1500" b="0">
+                <a:solidFill>
+                  <a:srgbClr val="F0F4F8"/>
+                </a:solidFill>
+                <a:latin typeface="Aptos"/>
+              </a:defRPr>
+            </a:pPr>
+            <a:r>
+              <a:t>Costs, capacity, sensitivity</a:t>
+            </a:r>
+          </a:p>
+        </p:txBody>
+      </p:sp>
+      <p:sp>
+        <p:nvSpPr>
+          <p:cNvPr id="17" name="TextBox 16"/>
+          <p:cNvSpPr txBox="1"/>
+          <p:nvPr/>
+        </p:nvSpPr>
+        <p:spPr>
+          <a:xfrm>
+            <a:off x="4023360" y="5715000"/>
+            <a:ext cx="4114800" cy="365760"/>
+          </a:xfrm>
+          <a:prstGeom prst="rect">
+            <a:avLst/>
+          </a:prstGeom>
+          <a:noFill/>
+        </p:spPr>
+        <p:txBody>
+          <a:bodyPr wrap="square" anchor="t">
+            <a:spAutoFit/>
+          </a:bodyPr>
+          <a:lstStyle/>
+          <a:p>
+            <a:pPr algn="ctr">
+              <a:defRPr sz="1700" b="1">
+                <a:solidFill>
+                  <a:srgbClr val="F0F4F8"/>
+                </a:solidFill>
+                <a:latin typeface="Consolas"/>
+              </a:defRPr>
+            </a:pPr>
+            <a:r>
+              <a:t>streamlit run app.py</a:t>
+            </a:r>
+          </a:p>
+        </p:txBody>
+      </p:sp>
+      <p:sp>
+        <p:nvSpPr>
+          <p:cNvPr id="18" name="TextBox 17"/>
+          <p:cNvSpPr txBox="1"/>
+          <p:nvPr/>
+        </p:nvSpPr>
+        <p:spPr>
+          <a:xfrm>
+            <a:off x="594360" y="6510528"/>
+            <a:ext cx="3657600" cy="164592"/>
+          </a:xfrm>
+          <a:prstGeom prst="rect">
+            <a:avLst/>
+          </a:prstGeom>
+          <a:noFill/>
+        </p:spPr>
+        <p:txBody>
+          <a:bodyPr wrap="square" anchor="t">
+            <a:spAutoFit/>
+          </a:bodyPr>
+          <a:lstStyle/>
+          <a:p>
+            <a:pPr algn="l">
+              <a:defRPr sz="800" b="0">
+                <a:solidFill>
+                  <a:srgbClr val="828FA0"/>
+                </a:solidFill>
+                <a:latin typeface="Aptos"/>
+              </a:defRPr>
+            </a:pPr>
+            <a:r>
+              <a:t>HEC Paris · ISAF · 2026</a:t>
+            </a:r>
+          </a:p>
+        </p:txBody>
+      </p:sp>
+      <p:sp>
+        <p:nvSpPr>
+          <p:cNvPr id="19" name="TextBox 18"/>
+          <p:cNvSpPr txBox="1"/>
+          <p:nvPr/>
+        </p:nvSpPr>
+        <p:spPr>
+          <a:xfrm>
+            <a:off x="11109960" y="6492240"/>
+            <a:ext cx="411480" cy="164592"/>
+          </a:xfrm>
+          <a:prstGeom prst="rect">
+            <a:avLst/>
+          </a:prstGeom>
+          <a:noFill/>
+        </p:spPr>
+        <p:txBody>
+          <a:bodyPr wrap="square" anchor="t">
+            <a:spAutoFit/>
+          </a:bodyPr>
+          <a:lstStyle/>
+          <a:p>
+            <a:pPr algn="r">
+              <a:defRPr sz="800" b="0">
+                <a:solidFill>
+                  <a:srgbClr val="828FA0"/>
+                </a:solidFill>
+                <a:latin typeface="Aptos"/>
+              </a:defRPr>
+            </a:pPr>
+            <a:r>
+              <a:t>15</a:t>
             </a:r>
           </a:p>
         </p:txBody>
@@ -5458,7 +6479,7 @@
               </a:defRPr>
             </a:pPr>
             <a:r>
-              <a:t>01 · CLIENT NEED</a:t>
+              <a:t>01 · ENGAGEMENT</a:t>
             </a:r>
           </a:p>
         </p:txBody>
@@ -5486,7 +6507,7 @@
           <a:lstStyle/>
           <a:p>
             <a:pPr algn="l">
-              <a:defRPr sz="2700" b="1">
+              <a:defRPr sz="2600" b="1">
                 <a:solidFill>
                   <a:srgbClr val="FFFFFF"/>
                 </a:solidFill>
@@ -5494,7 +6515,7 @@
               </a:defRPr>
             </a:pPr>
             <a:r>
-              <a:t>Start with the decision, not the algorithm</a:t>
+              <a:t>Our client, and the decision they sell</a:t>
             </a:r>
           </a:p>
         </p:txBody>
@@ -5566,9 +6587,9 @@
           <a:p>
             <a:pPr>
               <a:spcAft>
-                <a:spcPts val="1400"/>
+                <a:spcPts val="1200"/>
               </a:spcAft>
-              <a:defRPr sz="2300">
+              <a:defRPr sz="2200">
                 <a:solidFill>
                   <a:srgbClr val="FFFFFF"/>
                 </a:solidFill>
@@ -5576,15 +6597,15 @@
               </a:defRPr>
             </a:pPr>
             <a:r>
-              <a:t>•  Prioritize limited, voluntary re-entry support at supervision start</a:t>
+              <a:t>•  Client: a vendor selling risk-assessment tools to US state community-supervision agencies</a:t>
             </a:r>
           </a:p>
           <a:p>
             <a:pPr>
               <a:spcAft>
-                <a:spcPts val="1400"/>
+                <a:spcPts val="1200"/>
               </a:spcAft>
-              <a:defRPr sz="2300">
+              <a:defRPr sz="2200">
                 <a:solidFill>
                   <a:srgbClr val="FFFFFF"/>
                 </a:solidFill>
@@ -5592,15 +6613,15 @@
               </a:defRPr>
             </a:pPr>
             <a:r>
-              <a:t>•  Estimate a recorded three-year arrest outcome — not inherent criminality</a:t>
+              <a:t>•  Deliverable: a three-year re-arrest score to allocate limited, voluntary re-entry support</a:t>
             </a:r>
           </a:p>
           <a:p>
             <a:pPr>
               <a:spcAft>
-                <a:spcPts val="1400"/>
+                <a:spcPts val="1200"/>
               </a:spcAft>
-              <a:defRPr sz="2300">
+              <a:defRPr sz="2200">
                 <a:solidFill>
                   <a:srgbClr val="FFFFFF"/>
                 </a:solidFill>
@@ -5608,15 +6629,15 @@
               </a:defRPr>
             </a:pPr>
             <a:r>
-              <a:t>•  Use only to expand help; never to justify sanctions, detention or surveillance</a:t>
+              <a:t>•  Used only to expand help — never sanctions, detention or surveillance</a:t>
             </a:r>
           </a:p>
           <a:p>
             <a:pPr>
               <a:spcAft>
-                <a:spcPts val="1400"/>
+                <a:spcPts val="1200"/>
               </a:spcAft>
-              <a:defRPr sz="2300">
+              <a:defRPr sz="2200">
                 <a:solidFill>
                   <a:srgbClr val="FFFFFF"/>
                 </a:solidFill>
@@ -5624,7 +6645,7 @@
               </a:defRPr>
             </a:pPr>
             <a:r>
-              <a:t>•  Success means useful allocation without unacceptable subgroup harm</a:t>
+              <a:t>•  Judged as a trustworthy AI system, not on accuracy alone</a:t>
             </a:r>
           </a:p>
         </p:txBody>
@@ -5786,7 +6807,7 @@
           <a:lstStyle/>
           <a:p>
             <a:pPr algn="l">
-              <a:defRPr sz="2700" b="1">
+              <a:defRPr sz="2600" b="1">
                 <a:solidFill>
                   <a:srgbClr val="FFFFFF"/>
                 </a:solidFill>
@@ -5910,7 +6931,7 @@
           <a:lstStyle/>
           <a:p>
             <a:pPr algn="ctr">
-              <a:defRPr sz="2500" b="1">
+              <a:defRPr sz="2400" b="1">
                 <a:solidFill>
                   <a:srgbClr val="FB8500"/>
                 </a:solidFill>
@@ -5931,7 +6952,7 @@
         </p:nvSpPr>
         <p:spPr>
           <a:xfrm>
-            <a:off x="841248" y="2377439"/>
+            <a:off x="841248" y="2395728"/>
             <a:ext cx="2194560" cy="274320"/>
           </a:xfrm>
           <a:prstGeom prst="rect">
@@ -6027,7 +7048,7 @@
           <a:lstStyle/>
           <a:p>
             <a:pPr algn="ctr">
-              <a:defRPr sz="2500" b="1">
+              <a:defRPr sz="2400" b="1">
                 <a:solidFill>
                   <a:srgbClr val="7B2CBF"/>
                 </a:solidFill>
@@ -6048,7 +7069,7 @@
         </p:nvSpPr>
         <p:spPr>
           <a:xfrm>
-            <a:off x="3538728" y="2377439"/>
+            <a:off x="3538728" y="2395728"/>
             <a:ext cx="2194560" cy="274320"/>
           </a:xfrm>
           <a:prstGeom prst="rect">
@@ -6144,7 +7165,7 @@
           <a:lstStyle/>
           <a:p>
             <a:pPr algn="ctr">
-              <a:defRPr sz="2500" b="1">
+              <a:defRPr sz="2400" b="1">
                 <a:solidFill>
                   <a:srgbClr val="FB8500"/>
                 </a:solidFill>
@@ -6165,7 +7186,7 @@
         </p:nvSpPr>
         <p:spPr>
           <a:xfrm>
-            <a:off x="6236208" y="2377439"/>
+            <a:off x="6236208" y="2395728"/>
             <a:ext cx="2194560" cy="274320"/>
           </a:xfrm>
           <a:prstGeom prst="rect">
@@ -6261,7 +7282,7 @@
           <a:lstStyle/>
           <a:p>
             <a:pPr algn="ctr">
-              <a:defRPr sz="2500" b="1">
+              <a:defRPr sz="2400" b="1">
                 <a:solidFill>
                   <a:srgbClr val="7B2CBF"/>
                 </a:solidFill>
@@ -6282,7 +7303,7 @@
         </p:nvSpPr>
         <p:spPr>
           <a:xfrm>
-            <a:off x="8933688" y="2377439"/>
+            <a:off x="8933688" y="2395728"/>
             <a:ext cx="2194560" cy="274320"/>
           </a:xfrm>
           <a:prstGeom prst="rect">
@@ -6334,7 +7355,7 @@
           <a:p>
             <a:pPr>
               <a:spcAft>
-                <a:spcPts val="1400"/>
+                <a:spcPts val="1200"/>
               </a:spcAft>
               <a:defRPr sz="2000">
                 <a:solidFill>
@@ -6344,13 +7365,13 @@
               </a:defRPr>
             </a:pPr>
             <a:r>
-              <a:t>•  Post-release violations, tests, programs and employment are excluded to prevent leakage</a:t>
+              <a:t>•  Post-release violations, tests, programs and employment excluded to prevent leakage</a:t>
             </a:r>
           </a:p>
           <a:p>
             <a:pPr>
               <a:spcAft>
-                <a:spcPts val="1400"/>
+                <a:spcPts val="1200"/>
               </a:spcAft>
               <a:defRPr sz="2000">
                 <a:solidFill>
@@ -6360,13 +7381,13 @@
               </a:defRPr>
             </a:pPr>
             <a:r>
-              <a:t>•  Race, gender and geography are excluded from scoring; race and gender remain in the audit layer</a:t>
+              <a:t>•  Race, gender and residence geography excluded from scoring; kept only in the audit layer</a:t>
             </a:r>
           </a:p>
           <a:p>
             <a:pPr>
               <a:spcAft>
-                <a:spcPts val="1400"/>
+                <a:spcPts val="1200"/>
               </a:spcAft>
               <a:defRPr sz="2000">
                 <a:solidFill>
@@ -6376,7 +7397,7 @@
               </a:defRPr>
             </a:pPr>
             <a:r>
-              <a:t>•  The official NIJ split preserves an honest final evaluation</a:t>
+              <a:t>•  Balanced outcome (57.8%), so no resampling; official NIJ split preserves an honest evaluation</a:t>
             </a:r>
           </a:p>
         </p:txBody>
@@ -6538,7 +7559,7 @@
           <a:lstStyle/>
           <a:p>
             <a:pPr algn="l">
-              <a:defRPr sz="2700" b="1">
+              <a:defRPr sz="2600" b="1">
                 <a:solidFill>
                   <a:srgbClr val="FFFFFF"/>
                 </a:solidFill>
@@ -6546,7 +7567,7 @@
               </a:defRPr>
             </a:pPr>
             <a:r>
-              <a:t>Three models expose different trade-offs</a:t>
+              <a:t>Three model families, one comparison</a:t>
             </a:r>
           </a:p>
         </p:txBody>
@@ -6838,7 +7859,7 @@
             <a:br/>
             <a:br/>
             <a:r>
-              <a:t>550 shallow trees</a:t>
+              <a:t>Ordinal counts + 5-fold CV tuning</a:t>
             </a:r>
             <a:br/>
             <a:br/>
@@ -6970,7 +7991,7 @@
             <a:br/>
             <a:br/>
             <a:r>
-              <a:t>Two ensemble views</a:t>
+              <a:t>No training, no native explanation</a:t>
             </a:r>
           </a:p>
         </p:txBody>
@@ -7140,7 +8161,7 @@
               </a:defRPr>
             </a:pPr>
             <a:r>
-              <a:t>04 · PREDICTIVE PERFORMANCE</a:t>
+              <a:t>04 · THE CLIENT'S REAL QUESTION</a:t>
             </a:r>
           </a:p>
         </p:txBody>
@@ -7168,7 +8189,7 @@
           <a:lstStyle/>
           <a:p>
             <a:pPr algn="l">
-              <a:defRPr sz="2700" b="1">
+              <a:defRPr sz="2600" b="1">
                 <a:solidFill>
                   <a:srgbClr val="FFFFFF"/>
                 </a:solidFill>
@@ -7176,7 +8197,7 @@
               </a:defRPr>
             </a:pPr>
             <a:r>
-              <a:t>TabICLv2 wins narrowly; XGBoost calibrates best</a:t>
+              <a:t>Is any of this better than today's tool?</a:t>
             </a:r>
           </a:p>
         </p:txBody>
@@ -7226,7 +8247,7 @@
       </p:sp>
       <p:pic>
         <p:nvPicPr>
-          <p:cNvPr id="5" name="Picture 4" descr="performance_calibration.png"/>
+          <p:cNvPr id="5" name="Picture 4" descr="incumbent_benchmark.png"/>
           <p:cNvPicPr>
             <a:picLocks noChangeAspect="1"/>
           </p:cNvPicPr>
@@ -7240,8 +8261,8 @@
         </p:blipFill>
         <p:spPr>
           <a:xfrm>
-            <a:off x="411480" y="1481328"/>
-            <a:ext cx="7360920" cy="2782056"/>
+            <a:off x="320040" y="1554480"/>
+            <a:ext cx="8321040" cy="2304867"/>
           </a:xfrm>
           <a:prstGeom prst="rect">
             <a:avLst/>
@@ -7256,7 +8277,7 @@
         </p:nvSpPr>
         <p:spPr>
           <a:xfrm>
-            <a:off x="8458200" y="1664208"/>
+            <a:off x="8915400" y="1737360"/>
             <a:ext cx="2423160" cy="1261872"/>
           </a:xfrm>
           <a:prstGeom prst="roundRect">
@@ -7267,7 +8288,7 @@
           </a:solidFill>
           <a:ln>
             <a:solidFill>
-              <a:srgbClr val="7B2CBF"/>
+              <a:srgbClr val="D64343"/>
             </a:solidFill>
           </a:ln>
         </p:spPr>
@@ -7301,7 +8322,7 @@
         </p:nvSpPr>
         <p:spPr>
           <a:xfrm>
-            <a:off x="8567928" y="1801368"/>
+            <a:off x="9025128" y="1874519"/>
             <a:ext cx="2194560" cy="438912"/>
           </a:xfrm>
           <a:prstGeom prst="rect">
@@ -7316,15 +8337,15 @@
           <a:lstStyle/>
           <a:p>
             <a:pPr algn="ctr">
-              <a:defRPr sz="2500" b="1">
-                <a:solidFill>
-                  <a:srgbClr val="7B2CBF"/>
-                </a:solidFill>
-                <a:latin typeface="Aptos"/>
-              </a:defRPr>
-            </a:pPr>
-            <a:r>
-              <a:t>0.2039</a:t>
+              <a:defRPr sz="2400" b="1">
+                <a:solidFill>
+                  <a:srgbClr val="D64343"/>
+                </a:solidFill>
+                <a:latin typeface="Aptos"/>
+              </a:defRPr>
+            </a:pPr>
+            <a:r>
+              <a:t>0.60</a:t>
             </a:r>
           </a:p>
         </p:txBody>
@@ -7337,7 +8358,7 @@
         </p:nvSpPr>
         <p:spPr>
           <a:xfrm>
-            <a:off x="8567928" y="2304288"/>
+            <a:off x="9025128" y="2395728"/>
             <a:ext cx="2194560" cy="274320"/>
           </a:xfrm>
           <a:prstGeom prst="rect">
@@ -7360,7 +8381,7 @@
               </a:defRPr>
             </a:pPr>
             <a:r>
-              <a:t>BEST BRIER · TABICL</a:t>
+              <a:t>INCUMBENT AUC</a:t>
             </a:r>
           </a:p>
         </p:txBody>
@@ -7373,7 +8394,7 @@
         </p:nvSpPr>
         <p:spPr>
           <a:xfrm>
-            <a:off x="8458200" y="3136392"/>
+            <a:off x="8915400" y="3200400"/>
             <a:ext cx="2423160" cy="1261872"/>
           </a:xfrm>
           <a:prstGeom prst="roundRect">
@@ -7384,7 +8405,7 @@
           </a:solidFill>
           <a:ln>
             <a:solidFill>
-              <a:srgbClr val="7B2CBF"/>
+              <a:srgbClr val="00B4B4"/>
             </a:solidFill>
           </a:ln>
         </p:spPr>
@@ -7418,7 +8439,7 @@
         </p:nvSpPr>
         <p:spPr>
           <a:xfrm>
-            <a:off x="8567928" y="3273552"/>
+            <a:off x="9025128" y="3337560"/>
             <a:ext cx="2194560" cy="438912"/>
           </a:xfrm>
           <a:prstGeom prst="rect">
@@ -7433,15 +8454,15 @@
           <a:lstStyle/>
           <a:p>
             <a:pPr algn="ctr">
-              <a:defRPr sz="2500" b="1">
-                <a:solidFill>
-                  <a:srgbClr val="7B2CBF"/>
-                </a:solidFill>
-                <a:latin typeface="Aptos"/>
-              </a:defRPr>
-            </a:pPr>
-            <a:r>
-              <a:t>0.7336</a:t>
+              <a:defRPr sz="2400" b="1">
+                <a:solidFill>
+                  <a:srgbClr val="00B4B4"/>
+                </a:solidFill>
+                <a:latin typeface="Aptos"/>
+              </a:defRPr>
+            </a:pPr>
+            <a:r>
+              <a:t>0.73</a:t>
             </a:r>
           </a:p>
         </p:txBody>
@@ -7454,7 +8475,7 @@
         </p:nvSpPr>
         <p:spPr>
           <a:xfrm>
-            <a:off x="8567928" y="3776472"/>
+            <a:off x="9025128" y="3858768"/>
             <a:ext cx="2194560" cy="274320"/>
           </a:xfrm>
           <a:prstGeom prst="rect">
@@ -7477,7 +8498,7 @@
               </a:defRPr>
             </a:pPr>
             <a:r>
-              <a:t>BEST AUC · TABICL</a:t>
+              <a:t>OUR MODELS AUC</a:t>
             </a:r>
           </a:p>
         </p:txBody>
@@ -7490,7 +8511,7 @@
         </p:nvSpPr>
         <p:spPr>
           <a:xfrm>
-            <a:off x="8458200" y="4608576"/>
+            <a:off x="8915400" y="4663440"/>
             <a:ext cx="2423160" cy="1261872"/>
           </a:xfrm>
           <a:prstGeom prst="roundRect">
@@ -7535,7 +8556,7 @@
         </p:nvSpPr>
         <p:spPr>
           <a:xfrm>
-            <a:off x="8567928" y="4745736"/>
+            <a:off x="9025128" y="4800600"/>
             <a:ext cx="2194560" cy="438912"/>
           </a:xfrm>
           <a:prstGeom prst="rect">
@@ -7550,7 +8571,7 @@
           <a:lstStyle/>
           <a:p>
             <a:pPr algn="ctr">
-              <a:defRPr sz="2500" b="1">
+              <a:defRPr sz="2400" b="1">
                 <a:solidFill>
                   <a:srgbClr val="FB8500"/>
                 </a:solidFill>
@@ -7558,7 +8579,7 @@
               </a:defRPr>
             </a:pPr>
             <a:r>
-              <a:t>0.0118</a:t>
+              <a:t>+$2.4M</a:t>
             </a:r>
           </a:p>
         </p:txBody>
@@ -7571,7 +8592,7 @@
         </p:nvSpPr>
         <p:spPr>
           <a:xfrm>
-            <a:off x="8567928" y="5248656"/>
+            <a:off x="9025128" y="5321807"/>
             <a:ext cx="2194560" cy="274320"/>
           </a:xfrm>
           <a:prstGeom prst="rect">
@@ -7594,7 +8615,7 @@
               </a:defRPr>
             </a:pPr>
             <a:r>
-              <a:t>BEST ECE · XGBOOST</a:t>
+              <a:t>NET VALUE GAIN</a:t>
             </a:r>
           </a:p>
         </p:txBody>
@@ -7602,6 +8623,42 @@
       <p:sp>
         <p:nvSpPr>
           <p:cNvPr id="15" name="TextBox 14"/>
+          <p:cNvSpPr txBox="1"/>
+          <p:nvPr/>
+        </p:nvSpPr>
+        <p:spPr>
+          <a:xfrm>
+            <a:off x="914400" y="6263640"/>
+            <a:ext cx="10058400" cy="274320"/>
+          </a:xfrm>
+          <a:prstGeom prst="rect">
+            <a:avLst/>
+          </a:prstGeom>
+          <a:noFill/>
+        </p:spPr>
+        <p:txBody>
+          <a:bodyPr wrap="square" anchor="t">
+            <a:spAutoFit/>
+          </a:bodyPr>
+          <a:lstStyle/>
+          <a:p>
+            <a:pPr algn="ctr">
+              <a:defRPr sz="1100" b="1">
+                <a:solidFill>
+                  <a:srgbClr val="FB8500"/>
+                </a:solidFill>
+                <a:latin typeface="Aptos"/>
+              </a:defRPr>
+            </a:pPr>
+            <a:r>
+              <a:t>The existing 1–10 actuarial score is barely better than a coin flip at ranking. Any model nearly doubles net value.</a:t>
+            </a:r>
+          </a:p>
+        </p:txBody>
+      </p:sp>
+      <p:sp>
+        <p:nvSpPr>
+          <p:cNvPr id="16" name="TextBox 15"/>
           <p:cNvSpPr txBox="1"/>
           <p:nvPr/>
         </p:nvSpPr>
@@ -7637,7 +8694,7 @@
       </p:sp>
       <p:sp>
         <p:nvSpPr>
-          <p:cNvPr id="16" name="TextBox 15"/>
+          <p:cNvPr id="17" name="TextBox 16"/>
           <p:cNvSpPr txBox="1"/>
           <p:nvPr/>
         </p:nvSpPr>
@@ -7728,7 +8785,7 @@
               </a:defRPr>
             </a:pPr>
             <a:r>
-              <a:t>05 · ECONOMIC PERFORMANCE</a:t>
+              <a:t>05 · PREDICTIVE PERFORMANCE</a:t>
             </a:r>
           </a:p>
         </p:txBody>
@@ -7756,7 +8813,7 @@
           <a:lstStyle/>
           <a:p>
             <a:pPr algn="l">
-              <a:defRPr sz="2700" b="1">
+              <a:defRPr sz="2600" b="1">
                 <a:solidFill>
                   <a:srgbClr val="FFFFFF"/>
                 </a:solidFill>
@@ -7764,7 +8821,7 @@
               </a:defRPr>
             </a:pPr>
             <a:r>
-              <a:t>Model value is a scenario, not a causal claim</a:t>
+              <a:t>Among the three: a near-tie, XGBoost calibrates best</a:t>
             </a:r>
           </a:p>
         </p:txBody>
@@ -7812,15 +8869,273 @@
           </a:p>
         </p:txBody>
       </p:sp>
-      <p:sp>
-        <p:nvSpPr>
-          <p:cNvPr id="5" name="Rounded Rectangle 4"/>
+      <p:pic>
+        <p:nvPicPr>
+          <p:cNvPr id="5" name="Picture 4" descr="performance_calibration.png"/>
+          <p:cNvPicPr>
+            <a:picLocks noChangeAspect="1"/>
+          </p:cNvPicPr>
+          <p:nvPr/>
+        </p:nvPicPr>
+        <p:blipFill>
+          <a:blip r:embed="rId2"/>
+          <a:stretch>
+            <a:fillRect/>
+          </a:stretch>
+        </p:blipFill>
+        <p:spPr>
+          <a:xfrm>
+            <a:off x="411480" y="1572768"/>
+            <a:ext cx="7360920" cy="2782056"/>
+          </a:xfrm>
+          <a:prstGeom prst="rect">
+            <a:avLst/>
+          </a:prstGeom>
+        </p:spPr>
+      </p:pic>
+      <p:sp>
+        <p:nvSpPr>
+          <p:cNvPr id="6" name="Rounded Rectangle 5"/>
           <p:cNvSpPr/>
           <p:nvPr/>
         </p:nvSpPr>
         <p:spPr>
           <a:xfrm>
-            <a:off x="731520" y="1691640"/>
+            <a:off x="8458200" y="1737360"/>
+            <a:ext cx="2423160" cy="1261872"/>
+          </a:xfrm>
+          <a:prstGeom prst="roundRect">
+            <a:avLst/>
+          </a:prstGeom>
+          <a:solidFill>
+            <a:srgbClr val="143058"/>
+          </a:solidFill>
+          <a:ln>
+            <a:solidFill>
+              <a:srgbClr val="7B2CBF"/>
+            </a:solidFill>
+          </a:ln>
+        </p:spPr>
+        <p:style>
+          <a:lnRef idx="1">
+            <a:schemeClr val="accent1"/>
+          </a:lnRef>
+          <a:fillRef idx="3">
+            <a:schemeClr val="accent1"/>
+          </a:fillRef>
+          <a:effectRef idx="2">
+            <a:schemeClr val="accent1"/>
+          </a:effectRef>
+          <a:fontRef idx="minor">
+            <a:schemeClr val="lt1"/>
+          </a:fontRef>
+        </p:style>
+        <p:txBody>
+          <a:bodyPr rtlCol="0" anchor="ctr"/>
+          <a:lstStyle/>
+          <a:p>
+            <a:pPr algn="ctr"/>
+          </a:p>
+        </p:txBody>
+      </p:sp>
+      <p:sp>
+        <p:nvSpPr>
+          <p:cNvPr id="7" name="TextBox 6"/>
+          <p:cNvSpPr txBox="1"/>
+          <p:nvPr/>
+        </p:nvSpPr>
+        <p:spPr>
+          <a:xfrm>
+            <a:off x="8567928" y="1874519"/>
+            <a:ext cx="2194560" cy="438912"/>
+          </a:xfrm>
+          <a:prstGeom prst="rect">
+            <a:avLst/>
+          </a:prstGeom>
+          <a:noFill/>
+        </p:spPr>
+        <p:txBody>
+          <a:bodyPr wrap="square" anchor="t">
+            <a:spAutoFit/>
+          </a:bodyPr>
+          <a:lstStyle/>
+          <a:p>
+            <a:pPr algn="ctr">
+              <a:defRPr sz="2400" b="1">
+                <a:solidFill>
+                  <a:srgbClr val="7B2CBF"/>
+                </a:solidFill>
+                <a:latin typeface="Aptos"/>
+              </a:defRPr>
+            </a:pPr>
+            <a:r>
+              <a:t>0.7338</a:t>
+            </a:r>
+          </a:p>
+        </p:txBody>
+      </p:sp>
+      <p:sp>
+        <p:nvSpPr>
+          <p:cNvPr id="8" name="TextBox 7"/>
+          <p:cNvSpPr txBox="1"/>
+          <p:nvPr/>
+        </p:nvSpPr>
+        <p:spPr>
+          <a:xfrm>
+            <a:off x="8567928" y="2395728"/>
+            <a:ext cx="2194560" cy="274320"/>
+          </a:xfrm>
+          <a:prstGeom prst="rect">
+            <a:avLst/>
+          </a:prstGeom>
+          <a:noFill/>
+        </p:spPr>
+        <p:txBody>
+          <a:bodyPr wrap="square" anchor="t">
+            <a:spAutoFit/>
+          </a:bodyPr>
+          <a:lstStyle/>
+          <a:p>
+            <a:pPr algn="ctr">
+              <a:defRPr sz="1100" b="1">
+                <a:solidFill>
+                  <a:srgbClr val="FFFFFF"/>
+                </a:solidFill>
+                <a:latin typeface="Aptos"/>
+              </a:defRPr>
+            </a:pPr>
+            <a:r>
+              <a:t>BEST AUC · TABICL</a:t>
+            </a:r>
+          </a:p>
+        </p:txBody>
+      </p:sp>
+      <p:sp>
+        <p:nvSpPr>
+          <p:cNvPr id="9" name="Rounded Rectangle 8"/>
+          <p:cNvSpPr/>
+          <p:nvPr/>
+        </p:nvSpPr>
+        <p:spPr>
+          <a:xfrm>
+            <a:off x="8458200" y="3200400"/>
+            <a:ext cx="2423160" cy="1261872"/>
+          </a:xfrm>
+          <a:prstGeom prst="roundRect">
+            <a:avLst/>
+          </a:prstGeom>
+          <a:solidFill>
+            <a:srgbClr val="143058"/>
+          </a:solidFill>
+          <a:ln>
+            <a:solidFill>
+              <a:srgbClr val="7B2CBF"/>
+            </a:solidFill>
+          </a:ln>
+        </p:spPr>
+        <p:style>
+          <a:lnRef idx="1">
+            <a:schemeClr val="accent1"/>
+          </a:lnRef>
+          <a:fillRef idx="3">
+            <a:schemeClr val="accent1"/>
+          </a:fillRef>
+          <a:effectRef idx="2">
+            <a:schemeClr val="accent1"/>
+          </a:effectRef>
+          <a:fontRef idx="minor">
+            <a:schemeClr val="lt1"/>
+          </a:fontRef>
+        </p:style>
+        <p:txBody>
+          <a:bodyPr rtlCol="0" anchor="ctr"/>
+          <a:lstStyle/>
+          <a:p>
+            <a:pPr algn="ctr"/>
+          </a:p>
+        </p:txBody>
+      </p:sp>
+      <p:sp>
+        <p:nvSpPr>
+          <p:cNvPr id="10" name="TextBox 9"/>
+          <p:cNvSpPr txBox="1"/>
+          <p:nvPr/>
+        </p:nvSpPr>
+        <p:spPr>
+          <a:xfrm>
+            <a:off x="8567928" y="3337560"/>
+            <a:ext cx="2194560" cy="438912"/>
+          </a:xfrm>
+          <a:prstGeom prst="rect">
+            <a:avLst/>
+          </a:prstGeom>
+          <a:noFill/>
+        </p:spPr>
+        <p:txBody>
+          <a:bodyPr wrap="square" anchor="t">
+            <a:spAutoFit/>
+          </a:bodyPr>
+          <a:lstStyle/>
+          <a:p>
+            <a:pPr algn="ctr">
+              <a:defRPr sz="2400" b="1">
+                <a:solidFill>
+                  <a:srgbClr val="7B2CBF"/>
+                </a:solidFill>
+                <a:latin typeface="Aptos"/>
+              </a:defRPr>
+            </a:pPr>
+            <a:r>
+              <a:t>0.2038</a:t>
+            </a:r>
+          </a:p>
+        </p:txBody>
+      </p:sp>
+      <p:sp>
+        <p:nvSpPr>
+          <p:cNvPr id="11" name="TextBox 10"/>
+          <p:cNvSpPr txBox="1"/>
+          <p:nvPr/>
+        </p:nvSpPr>
+        <p:spPr>
+          <a:xfrm>
+            <a:off x="8567928" y="3858768"/>
+            <a:ext cx="2194560" cy="274320"/>
+          </a:xfrm>
+          <a:prstGeom prst="rect">
+            <a:avLst/>
+          </a:prstGeom>
+          <a:noFill/>
+        </p:spPr>
+        <p:txBody>
+          <a:bodyPr wrap="square" anchor="t">
+            <a:spAutoFit/>
+          </a:bodyPr>
+          <a:lstStyle/>
+          <a:p>
+            <a:pPr algn="ctr">
+              <a:defRPr sz="1100" b="1">
+                <a:solidFill>
+                  <a:srgbClr val="FFFFFF"/>
+                </a:solidFill>
+                <a:latin typeface="Aptos"/>
+              </a:defRPr>
+            </a:pPr>
+            <a:r>
+              <a:t>BEST BRIER · TABICL</a:t>
+            </a:r>
+          </a:p>
+        </p:txBody>
+      </p:sp>
+      <p:sp>
+        <p:nvSpPr>
+          <p:cNvPr id="12" name="Rounded Rectangle 11"/>
+          <p:cNvSpPr/>
+          <p:nvPr/>
+        </p:nvSpPr>
+        <p:spPr>
+          <a:xfrm>
+            <a:off x="8458200" y="4663440"/>
             <a:ext cx="2423160" cy="1261872"/>
           </a:xfrm>
           <a:prstGeom prst="roundRect">
@@ -7859,13 +9174,13 @@
       </p:sp>
       <p:sp>
         <p:nvSpPr>
-          <p:cNvPr id="6" name="TextBox 5"/>
-          <p:cNvSpPr txBox="1"/>
-          <p:nvPr/>
-        </p:nvSpPr>
-        <p:spPr>
-          <a:xfrm>
-            <a:off x="841248" y="1828800"/>
+          <p:cNvPr id="13" name="TextBox 12"/>
+          <p:cNvSpPr txBox="1"/>
+          <p:nvPr/>
+        </p:nvSpPr>
+        <p:spPr>
+          <a:xfrm>
+            <a:off x="8567928" y="4800600"/>
             <a:ext cx="2194560" cy="438912"/>
           </a:xfrm>
           <a:prstGeom prst="rect">
@@ -7880,7 +9195,7 @@
           <a:lstStyle/>
           <a:p>
             <a:pPr algn="ctr">
-              <a:defRPr sz="2500" b="1">
+              <a:defRPr sz="2400" b="1">
                 <a:solidFill>
                   <a:srgbClr val="FB8500"/>
                 </a:solidFill>
@@ -7888,20 +9203,20 @@
               </a:defRPr>
             </a:pPr>
             <a:r>
-              <a:t>20%</a:t>
-            </a:r>
-          </a:p>
-        </p:txBody>
-      </p:sp>
-      <p:sp>
-        <p:nvSpPr>
-          <p:cNvPr id="7" name="TextBox 6"/>
-          <p:cNvSpPr txBox="1"/>
-          <p:nvPr/>
-        </p:nvSpPr>
-        <p:spPr>
-          <a:xfrm>
-            <a:off x="841248" y="2331720"/>
+              <a:t>0.0109</a:t>
+            </a:r>
+          </a:p>
+        </p:txBody>
+      </p:sp>
+      <p:sp>
+        <p:nvSpPr>
+          <p:cNvPr id="14" name="TextBox 13"/>
+          <p:cNvSpPr txBox="1"/>
+          <p:nvPr/>
+        </p:nvSpPr>
+        <p:spPr>
+          <a:xfrm>
+            <a:off x="8567928" y="5321807"/>
             <a:ext cx="2194560" cy="274320"/>
           </a:xfrm>
           <a:prstGeom prst="rect">
@@ -7924,102 +9239,21 @@
               </a:defRPr>
             </a:pPr>
             <a:r>
-              <a:t>SERVICE CAPACITY</a:t>
-            </a:r>
-          </a:p>
-        </p:txBody>
-      </p:sp>
-      <p:sp>
-        <p:nvSpPr>
-          <p:cNvPr id="8" name="Rounded Rectangle 7"/>
-          <p:cNvSpPr/>
-          <p:nvPr/>
-        </p:nvSpPr>
-        <p:spPr>
-          <a:xfrm>
-            <a:off x="3429000" y="1691640"/>
-            <a:ext cx="2423160" cy="1261872"/>
-          </a:xfrm>
-          <a:prstGeom prst="roundRect">
-            <a:avLst/>
-          </a:prstGeom>
-          <a:solidFill>
-            <a:srgbClr val="143058"/>
-          </a:solidFill>
-          <a:ln>
-            <a:solidFill>
-              <a:srgbClr val="7B2CBF"/>
-            </a:solidFill>
-          </a:ln>
-        </p:spPr>
-        <p:style>
-          <a:lnRef idx="1">
-            <a:schemeClr val="accent1"/>
-          </a:lnRef>
-          <a:fillRef idx="3">
-            <a:schemeClr val="accent1"/>
-          </a:fillRef>
-          <a:effectRef idx="2">
-            <a:schemeClr val="accent1"/>
-          </a:effectRef>
-          <a:fontRef idx="minor">
-            <a:schemeClr val="lt1"/>
-          </a:fontRef>
-        </p:style>
-        <p:txBody>
-          <a:bodyPr rtlCol="0" anchor="ctr"/>
-          <a:lstStyle/>
-          <a:p>
-            <a:pPr algn="ctr"/>
-          </a:p>
-        </p:txBody>
-      </p:sp>
-      <p:sp>
-        <p:nvSpPr>
-          <p:cNvPr id="9" name="TextBox 8"/>
-          <p:cNvSpPr txBox="1"/>
-          <p:nvPr/>
-        </p:nvSpPr>
-        <p:spPr>
-          <a:xfrm>
-            <a:off x="3538728" y="1828800"/>
-            <a:ext cx="2194560" cy="438912"/>
-          </a:xfrm>
-          <a:prstGeom prst="rect">
-            <a:avLst/>
-          </a:prstGeom>
-          <a:noFill/>
-        </p:spPr>
-        <p:txBody>
-          <a:bodyPr wrap="square" anchor="t">
-            <a:spAutoFit/>
-          </a:bodyPr>
-          <a:lstStyle/>
-          <a:p>
-            <a:pPr algn="ctr">
-              <a:defRPr sz="2500" b="1">
-                <a:solidFill>
-                  <a:srgbClr val="7B2CBF"/>
-                </a:solidFill>
-                <a:latin typeface="Aptos"/>
-              </a:defRPr>
-            </a:pPr>
-            <a:r>
-              <a:t>1,282–1,292</a:t>
-            </a:r>
-          </a:p>
-        </p:txBody>
-      </p:sp>
-      <p:sp>
-        <p:nvSpPr>
-          <p:cNvPr id="10" name="TextBox 9"/>
-          <p:cNvSpPr txBox="1"/>
-          <p:nvPr/>
-        </p:nvSpPr>
-        <p:spPr>
-          <a:xfrm>
-            <a:off x="3538728" y="2331720"/>
-            <a:ext cx="2194560" cy="274320"/>
+              <a:t>BEST ECE · XGBOOST</a:t>
+            </a:r>
+          </a:p>
+        </p:txBody>
+      </p:sp>
+      <p:sp>
+        <p:nvSpPr>
+          <p:cNvPr id="15" name="TextBox 14"/>
+          <p:cNvSpPr txBox="1"/>
+          <p:nvPr/>
+        </p:nvSpPr>
+        <p:spPr>
+          <a:xfrm>
+            <a:off x="914400" y="6263640"/>
+            <a:ext cx="10058400" cy="274320"/>
           </a:xfrm>
           <a:prstGeom prst="rect">
             <a:avLst/>
@@ -8035,211 +9269,13 @@
             <a:pPr algn="ctr">
               <a:defRPr sz="1100" b="1">
                 <a:solidFill>
-                  <a:srgbClr val="FFFFFF"/>
-                </a:solidFill>
-                <a:latin typeface="Aptos"/>
-              </a:defRPr>
-            </a:pPr>
-            <a:r>
-              <a:t>EVENTS CAPTURED</a:t>
-            </a:r>
-          </a:p>
-        </p:txBody>
-      </p:sp>
-      <p:sp>
-        <p:nvSpPr>
-          <p:cNvPr id="11" name="Rounded Rectangle 10"/>
-          <p:cNvSpPr/>
-          <p:nvPr/>
-        </p:nvSpPr>
-        <p:spPr>
-          <a:xfrm>
-            <a:off x="6126480" y="1691640"/>
-            <a:ext cx="2423160" cy="1261872"/>
-          </a:xfrm>
-          <a:prstGeom prst="roundRect">
-            <a:avLst/>
-          </a:prstGeom>
-          <a:solidFill>
-            <a:srgbClr val="143058"/>
-          </a:solidFill>
-          <a:ln>
-            <a:solidFill>
-              <a:srgbClr val="FB8500"/>
-            </a:solidFill>
-          </a:ln>
-        </p:spPr>
-        <p:style>
-          <a:lnRef idx="1">
-            <a:schemeClr val="accent1"/>
-          </a:lnRef>
-          <a:fillRef idx="3">
-            <a:schemeClr val="accent1"/>
-          </a:fillRef>
-          <a:effectRef idx="2">
-            <a:schemeClr val="accent1"/>
-          </a:effectRef>
-          <a:fontRef idx="minor">
-            <a:schemeClr val="lt1"/>
-          </a:fontRef>
-        </p:style>
-        <p:txBody>
-          <a:bodyPr rtlCol="0" anchor="ctr"/>
-          <a:lstStyle/>
-          <a:p>
-            <a:pPr algn="ctr"/>
-          </a:p>
-        </p:txBody>
-      </p:sp>
-      <p:sp>
-        <p:nvSpPr>
-          <p:cNvPr id="12" name="TextBox 11"/>
-          <p:cNvSpPr txBox="1"/>
-          <p:nvPr/>
-        </p:nvSpPr>
-        <p:spPr>
-          <a:xfrm>
-            <a:off x="6236208" y="1828800"/>
-            <a:ext cx="2194560" cy="438912"/>
-          </a:xfrm>
-          <a:prstGeom prst="rect">
-            <a:avLst/>
-          </a:prstGeom>
-          <a:noFill/>
-        </p:spPr>
-        <p:txBody>
-          <a:bodyPr wrap="square" anchor="t">
-            <a:spAutoFit/>
-          </a:bodyPr>
-          <a:lstStyle/>
-          <a:p>
-            <a:pPr algn="ctr">
-              <a:defRPr sz="2500" b="1">
-                <a:solidFill>
-                  <a:srgbClr val="FB8500"/>
-                </a:solidFill>
-                <a:latin typeface="Aptos"/>
-              </a:defRPr>
-            </a:pPr>
-            <a:r>
-              <a:t>≈ 28.7%</a:t>
-            </a:r>
-          </a:p>
-        </p:txBody>
-      </p:sp>
-      <p:sp>
-        <p:nvSpPr>
-          <p:cNvPr id="13" name="TextBox 12"/>
-          <p:cNvSpPr txBox="1"/>
-          <p:nvPr/>
-        </p:nvSpPr>
-        <p:spPr>
-          <a:xfrm>
-            <a:off x="6236208" y="2331720"/>
-            <a:ext cx="2194560" cy="274320"/>
-          </a:xfrm>
-          <a:prstGeom prst="rect">
-            <a:avLst/>
-          </a:prstGeom>
-          <a:noFill/>
-        </p:spPr>
-        <p:txBody>
-          <a:bodyPr wrap="square" anchor="t">
-            <a:spAutoFit/>
-          </a:bodyPr>
-          <a:lstStyle/>
-          <a:p>
-            <a:pPr algn="ctr">
-              <a:defRPr sz="1100" b="1">
-                <a:solidFill>
-                  <a:srgbClr val="FFFFFF"/>
-                </a:solidFill>
-                <a:latin typeface="Aptos"/>
-              </a:defRPr>
-            </a:pPr>
-            <a:r>
-              <a:t>RECALL</a:t>
-            </a:r>
-          </a:p>
-        </p:txBody>
-      </p:sp>
-      <p:sp>
-        <p:nvSpPr>
-          <p:cNvPr id="14" name="Rounded Rectangle 13"/>
-          <p:cNvSpPr/>
-          <p:nvPr/>
-        </p:nvSpPr>
-        <p:spPr>
-          <a:xfrm>
-            <a:off x="8823960" y="1691640"/>
-            <a:ext cx="2423160" cy="1261872"/>
-          </a:xfrm>
-          <a:prstGeom prst="roundRect">
-            <a:avLst/>
-          </a:prstGeom>
-          <a:solidFill>
-            <a:srgbClr val="143058"/>
-          </a:solidFill>
-          <a:ln>
-            <a:solidFill>
-              <a:srgbClr val="7B2CBF"/>
-            </a:solidFill>
-          </a:ln>
-        </p:spPr>
-        <p:style>
-          <a:lnRef idx="1">
-            <a:schemeClr val="accent1"/>
-          </a:lnRef>
-          <a:fillRef idx="3">
-            <a:schemeClr val="accent1"/>
-          </a:fillRef>
-          <a:effectRef idx="2">
-            <a:schemeClr val="accent1"/>
-          </a:effectRef>
-          <a:fontRef idx="minor">
-            <a:schemeClr val="lt1"/>
-          </a:fontRef>
-        </p:style>
-        <p:txBody>
-          <a:bodyPr rtlCol="0" anchor="ctr"/>
-          <a:lstStyle/>
-          <a:p>
-            <a:pPr algn="ctr"/>
-          </a:p>
-        </p:txBody>
-      </p:sp>
-      <p:sp>
-        <p:nvSpPr>
-          <p:cNvPr id="15" name="TextBox 14"/>
-          <p:cNvSpPr txBox="1"/>
-          <p:nvPr/>
-        </p:nvSpPr>
-        <p:spPr>
-          <a:xfrm>
-            <a:off x="8933688" y="1828800"/>
-            <a:ext cx="2194560" cy="438912"/>
-          </a:xfrm>
-          <a:prstGeom prst="rect">
-            <a:avLst/>
-          </a:prstGeom>
-          <a:noFill/>
-        </p:spPr>
-        <p:txBody>
-          <a:bodyPr wrap="square" anchor="t">
-            <a:spAutoFit/>
-          </a:bodyPr>
-          <a:lstStyle/>
-          <a:p>
-            <a:pPr algn="ctr">
-              <a:defRPr sz="2500" b="1">
-                <a:solidFill>
-                  <a:srgbClr val="7B2CBF"/>
-                </a:solidFill>
-                <a:latin typeface="Aptos"/>
-              </a:defRPr>
-            </a:pPr>
-            <a:r>
-              <a:t>$5.0–5.1M</a:t>
+                  <a:srgbClr val="828FA0"/>
+                </a:solidFill>
+                <a:latin typeface="Aptos"/>
+              </a:defRPr>
+            </a:pPr>
+            <a:r>
+              <a:t>Bootstrap 95% intervals overlap — the ranking among the three is not decisive.</a:t>
             </a:r>
           </a:p>
         </p:txBody>
@@ -8247,113 +9283,6 @@
       <p:sp>
         <p:nvSpPr>
           <p:cNvPr id="16" name="TextBox 15"/>
-          <p:cNvSpPr txBox="1"/>
-          <p:nvPr/>
-        </p:nvSpPr>
-        <p:spPr>
-          <a:xfrm>
-            <a:off x="8933688" y="2331720"/>
-            <a:ext cx="2194560" cy="274320"/>
-          </a:xfrm>
-          <a:prstGeom prst="rect">
-            <a:avLst/>
-          </a:prstGeom>
-          <a:noFill/>
-        </p:spPr>
-        <p:txBody>
-          <a:bodyPr wrap="square" anchor="t">
-            <a:spAutoFit/>
-          </a:bodyPr>
-          <a:lstStyle/>
-          <a:p>
-            <a:pPr algn="ctr">
-              <a:defRPr sz="1100" b="1">
-                <a:solidFill>
-                  <a:srgbClr val="FFFFFF"/>
-                </a:solidFill>
-                <a:latin typeface="Aptos"/>
-              </a:defRPr>
-            </a:pPr>
-            <a:r>
-              <a:t>ILLUSTRATIVE NET</a:t>
-            </a:r>
-          </a:p>
-        </p:txBody>
-      </p:sp>
-      <p:sp>
-        <p:nvSpPr>
-          <p:cNvPr id="17" name="TextBox 16"/>
-          <p:cNvSpPr txBox="1"/>
-          <p:nvPr/>
-        </p:nvSpPr>
-        <p:spPr>
-          <a:xfrm>
-            <a:off x="731520" y="3401568"/>
-            <a:ext cx="10698480" cy="4389120"/>
-          </a:xfrm>
-          <a:prstGeom prst="rect">
-            <a:avLst/>
-          </a:prstGeom>
-          <a:noFill/>
-        </p:spPr>
-        <p:txBody>
-          <a:bodyPr wrap="square">
-            <a:spAutoFit/>
-          </a:bodyPr>
-          <a:lstStyle/>
-          <a:p>
-            <a:pPr>
-              <a:spcAft>
-                <a:spcPts val="1400"/>
-              </a:spcAft>
-              <a:defRPr sz="2000">
-                <a:solidFill>
-                  <a:srgbClr val="FFFFFF"/>
-                </a:solidFill>
-                <a:latin typeface="Aptos"/>
-              </a:defRPr>
-            </a:pPr>
-            <a:r>
-              <a:t>•  $5,000 support cost · $50,000 event cost · 20% assumed effectiveness</a:t>
-            </a:r>
-          </a:p>
-          <a:p>
-            <a:pPr>
-              <a:spcAft>
-                <a:spcPts val="1400"/>
-              </a:spcAft>
-              <a:defRPr sz="2000">
-                <a:solidFill>
-                  <a:srgbClr val="FFFFFF"/>
-                </a:solidFill>
-                <a:latin typeface="Aptos"/>
-              </a:defRPr>
-            </a:pPr>
-            <a:r>
-              <a:t>•  Every assumption is editable in the client application</a:t>
-            </a:r>
-          </a:p>
-          <a:p>
-            <a:pPr>
-              <a:spcAft>
-                <a:spcPts val="1400"/>
-              </a:spcAft>
-              <a:defRPr sz="2000">
-                <a:solidFill>
-                  <a:srgbClr val="FFFFFF"/>
-                </a:solidFill>
-                <a:latin typeface="Aptos"/>
-              </a:defRPr>
-            </a:pPr>
-            <a:r>
-              <a:t>•  A randomized or strong quasi-experimental pilot must estimate actual intervention impact</a:t>
-            </a:r>
-          </a:p>
-        </p:txBody>
-      </p:sp>
-      <p:sp>
-        <p:nvSpPr>
-          <p:cNvPr id="18" name="TextBox 17"/>
           <p:cNvSpPr txBox="1"/>
           <p:nvPr/>
         </p:nvSpPr>
@@ -8389,7 +9318,7 @@
       </p:sp>
       <p:sp>
         <p:nvSpPr>
-          <p:cNvPr id="19" name="TextBox 18"/>
+          <p:cNvPr id="17" name="TextBox 16"/>
           <p:cNvSpPr txBox="1"/>
           <p:nvPr/>
         </p:nvSpPr>
@@ -8480,7 +9409,7 @@
               </a:defRPr>
             </a:pPr>
             <a:r>
-              <a:t>06 · INTERPRETABILITY</a:t>
+              <a:t>06 · LEARNING CURVE</a:t>
             </a:r>
           </a:p>
         </p:txBody>
@@ -8508,7 +9437,7 @@
           <a:lstStyle/>
           <a:p>
             <a:pPr algn="l">
-              <a:defRPr sz="2700" b="1">
+              <a:defRPr sz="2600" b="1">
                 <a:solidFill>
                   <a:srgbClr val="FFFFFF"/>
                 </a:solidFill>
@@ -8516,7 +9445,7 @@
               </a:defRPr>
             </a:pPr>
             <a:r>
-              <a:t>The main drivers recur across model families</a:t>
+              <a:t>Which model for which agency size?</a:t>
             </a:r>
           </a:p>
         </p:txBody>
@@ -8566,7 +9495,7 @@
       </p:sp>
       <p:pic>
         <p:nvPicPr>
-          <p:cNvPr id="5" name="Picture 4" descr="feature_importance.png"/>
+          <p:cNvPr id="5" name="Picture 4" descr="learning_curve.png"/>
           <p:cNvPicPr>
             <a:picLocks noChangeAspect="1"/>
           </p:cNvPicPr>
@@ -8580,8 +9509,8 @@
         </p:blipFill>
         <p:spPr>
           <a:xfrm>
-            <a:off x="320040" y="1463040"/>
-            <a:ext cx="11384280" cy="3652576"/>
+            <a:off x="731520" y="1645920"/>
+            <a:ext cx="10698480" cy="4022802"/>
           </a:xfrm>
           <a:prstGeom prst="rect">
             <a:avLst/>
@@ -8596,8 +9525,8 @@
         </p:nvSpPr>
         <p:spPr>
           <a:xfrm>
-            <a:off x="2834640" y="6181344"/>
-            <a:ext cx="6492240" cy="228600"/>
+            <a:off x="914400" y="6126480"/>
+            <a:ext cx="10058400" cy="457200"/>
           </a:xfrm>
           <a:prstGeom prst="rect">
             <a:avLst/>
@@ -8611,7 +9540,7 @@
           <a:lstStyle/>
           <a:p>
             <a:pPr algn="ctr">
-              <a:defRPr sz="1200" b="1">
+              <a:defRPr sz="1300" b="1">
                 <a:solidFill>
                   <a:srgbClr val="FB8500"/>
                 </a:solidFill>
@@ -8619,7 +9548,7 @@
               </a:defRPr>
             </a:pPr>
             <a:r>
-              <a:t>Permutation importance shows model reliance, not causal levers.</a:t>
+              <a:t>TabICLv2 leads on small data (small county); XGBoost catches up as data grows (large state). No crossover — but the gap closes to +0.004 at full data.</a:t>
             </a:r>
           </a:p>
         </p:txBody>
@@ -8753,7 +9682,7 @@
               </a:defRPr>
             </a:pPr>
             <a:r>
-              <a:t>07 · SUBGROUP AUDIT</a:t>
+              <a:t>07 · ECONOMIC PERFORMANCE</a:t>
             </a:r>
           </a:p>
         </p:txBody>
@@ -8781,7 +9710,7 @@
           <a:lstStyle/>
           <a:p>
             <a:pPr algn="l">
-              <a:defRPr sz="2700" b="1">
+              <a:defRPr sz="2600" b="1">
                 <a:solidFill>
                   <a:srgbClr val="FFFFFF"/>
                 </a:solidFill>
@@ -8789,7 +9718,7 @@
               </a:defRPr>
             </a:pPr>
             <a:r>
-              <a:t>Fairness changes the preferred model</a:t>
+              <a:t>Model value is a scenario, stress-tested</a:t>
             </a:r>
           </a:p>
         </p:txBody>
@@ -8837,39 +9766,15 @@
           </a:p>
         </p:txBody>
       </p:sp>
-      <p:pic>
-        <p:nvPicPr>
-          <p:cNvPr id="5" name="Picture 4" descr="race_fairness.png"/>
-          <p:cNvPicPr>
-            <a:picLocks noChangeAspect="1"/>
-          </p:cNvPicPr>
-          <p:nvPr/>
-        </p:nvPicPr>
-        <p:blipFill>
-          <a:blip r:embed="rId2"/>
-          <a:stretch>
-            <a:fillRect/>
-          </a:stretch>
-        </p:blipFill>
-        <p:spPr>
-          <a:xfrm>
-            <a:off x="320040" y="1481328"/>
-            <a:ext cx="7680960" cy="2906140"/>
-          </a:xfrm>
-          <a:prstGeom prst="rect">
-            <a:avLst/>
-          </a:prstGeom>
-        </p:spPr>
-      </p:pic>
-      <p:sp>
-        <p:nvSpPr>
-          <p:cNvPr id="6" name="Rounded Rectangle 5"/>
+      <p:sp>
+        <p:nvSpPr>
+          <p:cNvPr id="5" name="Rounded Rectangle 4"/>
           <p:cNvSpPr/>
           <p:nvPr/>
         </p:nvSpPr>
         <p:spPr>
           <a:xfrm>
-            <a:off x="8641080" y="1664208"/>
+            <a:off x="731520" y="1737360"/>
             <a:ext cx="2423160" cy="1261872"/>
           </a:xfrm>
           <a:prstGeom prst="roundRect">
@@ -8908,49 +9813,49 @@
       </p:sp>
       <p:sp>
         <p:nvSpPr>
+          <p:cNvPr id="6" name="TextBox 5"/>
+          <p:cNvSpPr txBox="1"/>
+          <p:nvPr/>
+        </p:nvSpPr>
+        <p:spPr>
+          <a:xfrm>
+            <a:off x="841248" y="1874519"/>
+            <a:ext cx="2194560" cy="438912"/>
+          </a:xfrm>
+          <a:prstGeom prst="rect">
+            <a:avLst/>
+          </a:prstGeom>
+          <a:noFill/>
+        </p:spPr>
+        <p:txBody>
+          <a:bodyPr wrap="square" anchor="t">
+            <a:spAutoFit/>
+          </a:bodyPr>
+          <a:lstStyle/>
+          <a:p>
+            <a:pPr algn="ctr">
+              <a:defRPr sz="2400" b="1">
+                <a:solidFill>
+                  <a:srgbClr val="FB8500"/>
+                </a:solidFill>
+                <a:latin typeface="Aptos"/>
+              </a:defRPr>
+            </a:pPr>
+            <a:r>
+              <a:t>20%</a:t>
+            </a:r>
+          </a:p>
+        </p:txBody>
+      </p:sp>
+      <p:sp>
+        <p:nvSpPr>
           <p:cNvPr id="7" name="TextBox 6"/>
           <p:cNvSpPr txBox="1"/>
           <p:nvPr/>
         </p:nvSpPr>
         <p:spPr>
           <a:xfrm>
-            <a:off x="8750807" y="1801368"/>
-            <a:ext cx="2194560" cy="438912"/>
-          </a:xfrm>
-          <a:prstGeom prst="rect">
-            <a:avLst/>
-          </a:prstGeom>
-          <a:noFill/>
-        </p:spPr>
-        <p:txBody>
-          <a:bodyPr wrap="square" anchor="t">
-            <a:spAutoFit/>
-          </a:bodyPr>
-          <a:lstStyle/>
-          <a:p>
-            <a:pPr algn="ctr">
-              <a:defRPr sz="2500" b="1">
-                <a:solidFill>
-                  <a:srgbClr val="FB8500"/>
-                </a:solidFill>
-                <a:latin typeface="Aptos"/>
-              </a:defRPr>
-            </a:pPr>
-            <a:r>
-              <a:t>0.042</a:t>
-            </a:r>
-          </a:p>
-        </p:txBody>
-      </p:sp>
-      <p:sp>
-        <p:nvSpPr>
-          <p:cNvPr id="8" name="TextBox 7"/>
-          <p:cNvSpPr txBox="1"/>
-          <p:nvPr/>
-        </p:nvSpPr>
-        <p:spPr>
-          <a:xfrm>
-            <a:off x="8750807" y="2304288"/>
+            <a:off x="841248" y="2395728"/>
             <a:ext cx="2194560" cy="274320"/>
           </a:xfrm>
           <a:prstGeom prst="rect">
@@ -8973,20 +9878,20 @@
               </a:defRPr>
             </a:pPr>
             <a:r>
-              <a:t>RACE FPR GAP · XGB</a:t>
-            </a:r>
-          </a:p>
-        </p:txBody>
-      </p:sp>
-      <p:sp>
-        <p:nvSpPr>
-          <p:cNvPr id="9" name="Rounded Rectangle 8"/>
+              <a:t>SERVICE CAPACITY</a:t>
+            </a:r>
+          </a:p>
+        </p:txBody>
+      </p:sp>
+      <p:sp>
+        <p:nvSpPr>
+          <p:cNvPr id="8" name="Rounded Rectangle 7"/>
           <p:cNvSpPr/>
           <p:nvPr/>
         </p:nvSpPr>
         <p:spPr>
           <a:xfrm>
-            <a:off x="8641080" y="3136392"/>
+            <a:off x="3429000" y="1737360"/>
             <a:ext cx="2423160" cy="1261872"/>
           </a:xfrm>
           <a:prstGeom prst="roundRect">
@@ -8997,7 +9902,7 @@
           </a:solidFill>
           <a:ln>
             <a:solidFill>
-              <a:srgbClr val="FB8500"/>
+              <a:srgbClr val="00B4B4"/>
             </a:solidFill>
           </a:ln>
         </p:spPr>
@@ -9025,49 +9930,49 @@
       </p:sp>
       <p:sp>
         <p:nvSpPr>
+          <p:cNvPr id="9" name="TextBox 8"/>
+          <p:cNvSpPr txBox="1"/>
+          <p:nvPr/>
+        </p:nvSpPr>
+        <p:spPr>
+          <a:xfrm>
+            <a:off x="3538728" y="1874519"/>
+            <a:ext cx="2194560" cy="438912"/>
+          </a:xfrm>
+          <a:prstGeom prst="rect">
+            <a:avLst/>
+          </a:prstGeom>
+          <a:noFill/>
+        </p:spPr>
+        <p:txBody>
+          <a:bodyPr wrap="square" anchor="t">
+            <a:spAutoFit/>
+          </a:bodyPr>
+          <a:lstStyle/>
+          <a:p>
+            <a:pPr algn="ctr">
+              <a:defRPr sz="2400" b="1">
+                <a:solidFill>
+                  <a:srgbClr val="00B4B4"/>
+                </a:solidFill>
+                <a:latin typeface="Aptos"/>
+              </a:defRPr>
+            </a:pPr>
+            <a:r>
+              <a:t>$5.12M</a:t>
+            </a:r>
+          </a:p>
+        </p:txBody>
+      </p:sp>
+      <p:sp>
+        <p:nvSpPr>
           <p:cNvPr id="10" name="TextBox 9"/>
           <p:cNvSpPr txBox="1"/>
           <p:nvPr/>
         </p:nvSpPr>
         <p:spPr>
           <a:xfrm>
-            <a:off x="8750807" y="3273552"/>
-            <a:ext cx="2194560" cy="438912"/>
-          </a:xfrm>
-          <a:prstGeom prst="rect">
-            <a:avLst/>
-          </a:prstGeom>
-          <a:noFill/>
-        </p:spPr>
-        <p:txBody>
-          <a:bodyPr wrap="square" anchor="t">
-            <a:spAutoFit/>
-          </a:bodyPr>
-          <a:lstStyle/>
-          <a:p>
-            <a:pPr algn="ctr">
-              <a:defRPr sz="2500" b="1">
-                <a:solidFill>
-                  <a:srgbClr val="FB8500"/>
-                </a:solidFill>
-                <a:latin typeface="Aptos"/>
-              </a:defRPr>
-            </a:pPr>
-            <a:r>
-              <a:t>0.107</a:t>
-            </a:r>
-          </a:p>
-        </p:txBody>
-      </p:sp>
-      <p:sp>
-        <p:nvSpPr>
-          <p:cNvPr id="11" name="TextBox 10"/>
-          <p:cNvSpPr txBox="1"/>
-          <p:nvPr/>
-        </p:nvSpPr>
-        <p:spPr>
-          <a:xfrm>
-            <a:off x="8750807" y="3776472"/>
+            <a:off x="3538728" y="2395728"/>
             <a:ext cx="2194560" cy="274320"/>
           </a:xfrm>
           <a:prstGeom prst="rect">
@@ -9090,8 +9995,53 @@
               </a:defRPr>
             </a:pPr>
             <a:r>
-              <a:t>GENDER FPR GAP · XGB</a:t>
-            </a:r>
+              <a:t>XGBOOST NET</a:t>
+            </a:r>
+          </a:p>
+        </p:txBody>
+      </p:sp>
+      <p:sp>
+        <p:nvSpPr>
+          <p:cNvPr id="11" name="Rounded Rectangle 10"/>
+          <p:cNvSpPr/>
+          <p:nvPr/>
+        </p:nvSpPr>
+        <p:spPr>
+          <a:xfrm>
+            <a:off x="6126480" y="1737360"/>
+            <a:ext cx="2423160" cy="1261872"/>
+          </a:xfrm>
+          <a:prstGeom prst="roundRect">
+            <a:avLst/>
+          </a:prstGeom>
+          <a:solidFill>
+            <a:srgbClr val="143058"/>
+          </a:solidFill>
+          <a:ln>
+            <a:solidFill>
+              <a:srgbClr val="D64343"/>
+            </a:solidFill>
+          </a:ln>
+        </p:spPr>
+        <p:style>
+          <a:lnRef idx="1">
+            <a:schemeClr val="accent1"/>
+          </a:lnRef>
+          <a:fillRef idx="3">
+            <a:schemeClr val="accent1"/>
+          </a:fillRef>
+          <a:effectRef idx="2">
+            <a:schemeClr val="accent1"/>
+          </a:effectRef>
+          <a:fontRef idx="minor">
+            <a:schemeClr val="lt1"/>
+          </a:fontRef>
+        </p:style>
+        <p:txBody>
+          <a:bodyPr rtlCol="0" anchor="ctr"/>
+          <a:lstStyle/>
+          <a:p>
+            <a:pPr algn="ctr"/>
           </a:p>
         </p:txBody>
       </p:sp>
@@ -9103,8 +10053,8 @@
         </p:nvSpPr>
         <p:spPr>
           <a:xfrm>
-            <a:off x="8458200" y="4800600"/>
-            <a:ext cx="2743200" cy="274320"/>
+            <a:off x="6236208" y="1874519"/>
+            <a:ext cx="2194560" cy="438912"/>
           </a:xfrm>
           <a:prstGeom prst="rect">
             <a:avLst/>
@@ -9118,15 +10068,15 @@
           <a:lstStyle/>
           <a:p>
             <a:pPr algn="ctr">
-              <a:defRPr sz="1100" b="0">
-                <a:solidFill>
-                  <a:srgbClr val="F0F4F8"/>
-                </a:solidFill>
-                <a:latin typeface="Aptos"/>
-              </a:defRPr>
-            </a:pPr>
-            <a:r>
-              <a:t>TabICLv2 gender FPR gap</a:t>
+              <a:defRPr sz="2400" b="1">
+                <a:solidFill>
+                  <a:srgbClr val="D64343"/>
+                </a:solidFill>
+                <a:latin typeface="Aptos"/>
+              </a:defRPr>
+            </a:pPr>
+            <a:r>
+              <a:t>$2.75M</a:t>
             </a:r>
           </a:p>
         </p:txBody>
@@ -9139,8 +10089,8 @@
         </p:nvSpPr>
         <p:spPr>
           <a:xfrm>
-            <a:off x="8458200" y="5175504"/>
-            <a:ext cx="2743200" cy="457200"/>
+            <a:off x="6236208" y="2395728"/>
+            <a:ext cx="2194560" cy="274320"/>
           </a:xfrm>
           <a:prstGeom prst="rect">
             <a:avLst/>
@@ -9154,22 +10104,210 @@
           <a:lstStyle/>
           <a:p>
             <a:pPr algn="ctr">
-              <a:defRPr sz="2700" b="1">
-                <a:solidFill>
-                  <a:srgbClr val="D64343"/>
-                </a:solidFill>
-                <a:latin typeface="Aptos"/>
-              </a:defRPr>
-            </a:pPr>
-            <a:r>
-              <a:t>0.273</a:t>
-            </a:r>
-          </a:p>
-        </p:txBody>
-      </p:sp>
-      <p:sp>
-        <p:nvSpPr>
-          <p:cNvPr id="14" name="TextBox 13"/>
+              <a:defRPr sz="1100" b="1">
+                <a:solidFill>
+                  <a:srgbClr val="FFFFFF"/>
+                </a:solidFill>
+                <a:latin typeface="Aptos"/>
+              </a:defRPr>
+            </a:pPr>
+            <a:r>
+              <a:t>INCUMBENT NET</a:t>
+            </a:r>
+          </a:p>
+        </p:txBody>
+      </p:sp>
+      <p:sp>
+        <p:nvSpPr>
+          <p:cNvPr id="14" name="Rounded Rectangle 13"/>
+          <p:cNvSpPr/>
+          <p:nvPr/>
+        </p:nvSpPr>
+        <p:spPr>
+          <a:xfrm>
+            <a:off x="8823960" y="1737360"/>
+            <a:ext cx="2423160" cy="1261872"/>
+          </a:xfrm>
+          <a:prstGeom prst="roundRect">
+            <a:avLst/>
+          </a:prstGeom>
+          <a:solidFill>
+            <a:srgbClr val="143058"/>
+          </a:solidFill>
+          <a:ln>
+            <a:solidFill>
+              <a:srgbClr val="828FA0"/>
+            </a:solidFill>
+          </a:ln>
+        </p:spPr>
+        <p:style>
+          <a:lnRef idx="1">
+            <a:schemeClr val="accent1"/>
+          </a:lnRef>
+          <a:fillRef idx="3">
+            <a:schemeClr val="accent1"/>
+          </a:fillRef>
+          <a:effectRef idx="2">
+            <a:schemeClr val="accent1"/>
+          </a:effectRef>
+          <a:fontRef idx="minor">
+            <a:schemeClr val="lt1"/>
+          </a:fontRef>
+        </p:style>
+        <p:txBody>
+          <a:bodyPr rtlCol="0" anchor="ctr"/>
+          <a:lstStyle/>
+          <a:p>
+            <a:pPr algn="ctr"/>
+          </a:p>
+        </p:txBody>
+      </p:sp>
+      <p:sp>
+        <p:nvSpPr>
+          <p:cNvPr id="15" name="TextBox 14"/>
+          <p:cNvSpPr txBox="1"/>
+          <p:nvPr/>
+        </p:nvSpPr>
+        <p:spPr>
+          <a:xfrm>
+            <a:off x="8933688" y="1874519"/>
+            <a:ext cx="2194560" cy="438912"/>
+          </a:xfrm>
+          <a:prstGeom prst="rect">
+            <a:avLst/>
+          </a:prstGeom>
+          <a:noFill/>
+        </p:spPr>
+        <p:txBody>
+          <a:bodyPr wrap="square" anchor="t">
+            <a:spAutoFit/>
+          </a:bodyPr>
+          <a:lstStyle/>
+          <a:p>
+            <a:pPr algn="ctr">
+              <a:defRPr sz="2400" b="1">
+                <a:solidFill>
+                  <a:srgbClr val="828FA0"/>
+                </a:solidFill>
+                <a:latin typeface="Aptos"/>
+              </a:defRPr>
+            </a:pPr>
+            <a:r>
+              <a:t>$1.46M</a:t>
+            </a:r>
+          </a:p>
+        </p:txBody>
+      </p:sp>
+      <p:sp>
+        <p:nvSpPr>
+          <p:cNvPr id="16" name="TextBox 15"/>
+          <p:cNvSpPr txBox="1"/>
+          <p:nvPr/>
+        </p:nvSpPr>
+        <p:spPr>
+          <a:xfrm>
+            <a:off x="8933688" y="2395728"/>
+            <a:ext cx="2194560" cy="274320"/>
+          </a:xfrm>
+          <a:prstGeom prst="rect">
+            <a:avLst/>
+          </a:prstGeom>
+          <a:noFill/>
+        </p:spPr>
+        <p:txBody>
+          <a:bodyPr wrap="square" anchor="t">
+            <a:spAutoFit/>
+          </a:bodyPr>
+          <a:lstStyle/>
+          <a:p>
+            <a:pPr algn="ctr">
+              <a:defRPr sz="1100" b="1">
+                <a:solidFill>
+                  <a:srgbClr val="FFFFFF"/>
+                </a:solidFill>
+                <a:latin typeface="Aptos"/>
+              </a:defRPr>
+            </a:pPr>
+            <a:r>
+              <a:t>RANDOM NET</a:t>
+            </a:r>
+          </a:p>
+        </p:txBody>
+      </p:sp>
+      <p:sp>
+        <p:nvSpPr>
+          <p:cNvPr id="17" name="TextBox 16"/>
+          <p:cNvSpPr txBox="1"/>
+          <p:nvPr/>
+        </p:nvSpPr>
+        <p:spPr>
+          <a:xfrm>
+            <a:off x="731520" y="3401568"/>
+            <a:ext cx="10698480" cy="4389120"/>
+          </a:xfrm>
+          <a:prstGeom prst="rect">
+            <a:avLst/>
+          </a:prstGeom>
+          <a:noFill/>
+        </p:spPr>
+        <p:txBody>
+          <a:bodyPr wrap="square">
+            <a:spAutoFit/>
+          </a:bodyPr>
+          <a:lstStyle/>
+          <a:p>
+            <a:pPr>
+              <a:spcAft>
+                <a:spcPts val="1200"/>
+              </a:spcAft>
+              <a:defRPr sz="2000">
+                <a:solidFill>
+                  <a:srgbClr val="FFFFFF"/>
+                </a:solidFill>
+                <a:latin typeface="Aptos"/>
+              </a:defRPr>
+            </a:pPr>
+            <a:r>
+              <a:t>•  $5,000 support cost · $50,000 event cost · 20% assumed effectiveness — all editable in the app</a:t>
+            </a:r>
+          </a:p>
+          <a:p>
+            <a:pPr>
+              <a:spcAft>
+                <a:spcPts val="1200"/>
+              </a:spcAft>
+              <a:defRPr sz="2000">
+                <a:solidFill>
+                  <a:srgbClr val="FFFFFF"/>
+                </a:solidFill>
+                <a:latin typeface="Aptos"/>
+              </a:defRPr>
+            </a:pPr>
+            <a:r>
+              <a:t>•  Models beat the incumbent at every capacity from 5% to 50% (sensitivity sweep)</a:t>
+            </a:r>
+          </a:p>
+          <a:p>
+            <a:pPr>
+              <a:spcAft>
+                <a:spcPts val="1200"/>
+              </a:spcAft>
+              <a:defRPr sz="2000">
+                <a:solidFill>
+                  <a:srgbClr val="FFFFFF"/>
+                </a:solidFill>
+                <a:latin typeface="Aptos"/>
+              </a:defRPr>
+            </a:pPr>
+            <a:r>
+              <a:t>•  A randomized or quasi-experimental pilot must estimate real intervention impact</a:t>
+            </a:r>
+          </a:p>
+        </p:txBody>
+      </p:sp>
+      <p:sp>
+        <p:nvSpPr>
+          <p:cNvPr id="18" name="TextBox 17"/>
           <p:cNvSpPr txBox="1"/>
           <p:nvPr/>
         </p:nvSpPr>
@@ -9205,7 +10343,7 @@
       </p:sp>
       <p:sp>
         <p:nvSpPr>
-          <p:cNvPr id="15" name="TextBox 14"/>
+          <p:cNvPr id="19" name="TextBox 18"/>
           <p:cNvSpPr txBox="1"/>
           <p:nvPr/>
         </p:nvSpPr>
@@ -9296,7 +10434,7 @@
               </a:defRPr>
             </a:pPr>
             <a:r>
-              <a:t>08 · STABILITY</a:t>
+              <a:t>08 · INTERPRETABILITY</a:t>
             </a:r>
           </a:p>
         </p:txBody>
@@ -9324,7 +10462,7 @@
           <a:lstStyle/>
           <a:p>
             <a:pPr algn="l">
-              <a:defRPr sz="2700" b="1">
+              <a:defRPr sz="2600" b="1">
                 <a:solidFill>
                   <a:srgbClr val="FFFFFF"/>
                 </a:solidFill>
@@ -9332,7 +10470,7 @@
               </a:defRPr>
             </a:pPr>
             <a:r>
-              <a:t>Sampling stability is similar; temporal stability is unknown</a:t>
+              <a:t>Every prediction, and the performance, explained</a:t>
             </a:r>
           </a:p>
         </p:txBody>
@@ -9380,133 +10518,40 @@
           </a:p>
         </p:txBody>
       </p:sp>
-      <p:sp>
-        <p:nvSpPr>
-          <p:cNvPr id="5" name="Rounded Rectangle 4"/>
+      <p:pic>
+        <p:nvPicPr>
+          <p:cNvPr id="5" name="Picture 4" descr="shap_individual.png"/>
+          <p:cNvPicPr>
+            <a:picLocks noChangeAspect="1"/>
+          </p:cNvPicPr>
+          <p:nvPr/>
+        </p:nvPicPr>
+        <p:blipFill>
+          <a:blip r:embed="rId2"/>
+          <a:stretch>
+            <a:fillRect/>
+          </a:stretch>
+        </p:blipFill>
+        <p:spPr>
+          <a:xfrm>
+            <a:off x="365760" y="1554480"/>
+            <a:ext cx="7589520" cy="2871452"/>
+          </a:xfrm>
+          <a:prstGeom prst="rect">
+            <a:avLst/>
+          </a:prstGeom>
+        </p:spPr>
+      </p:pic>
+      <p:sp>
+        <p:nvSpPr>
+          <p:cNvPr id="6" name="Rounded Rectangle 5"/>
           <p:cNvSpPr/>
           <p:nvPr/>
         </p:nvSpPr>
         <p:spPr>
           <a:xfrm>
-            <a:off x="822960" y="1828800"/>
-            <a:ext cx="2423160" cy="1261872"/>
-          </a:xfrm>
-          <a:prstGeom prst="roundRect">
-            <a:avLst/>
-          </a:prstGeom>
-          <a:solidFill>
-            <a:srgbClr val="143058"/>
-          </a:solidFill>
-          <a:ln>
-            <a:solidFill>
-              <a:srgbClr val="FB8500"/>
-            </a:solidFill>
-          </a:ln>
-        </p:spPr>
-        <p:style>
-          <a:lnRef idx="1">
-            <a:schemeClr val="accent1"/>
-          </a:lnRef>
-          <a:fillRef idx="3">
-            <a:schemeClr val="accent1"/>
-          </a:fillRef>
-          <a:effectRef idx="2">
-            <a:schemeClr val="accent1"/>
-          </a:effectRef>
-          <a:fontRef idx="minor">
-            <a:schemeClr val="lt1"/>
-          </a:fontRef>
-        </p:style>
-        <p:txBody>
-          <a:bodyPr rtlCol="0" anchor="ctr"/>
-          <a:lstStyle/>
-          <a:p>
-            <a:pPr algn="ctr"/>
-          </a:p>
-        </p:txBody>
-      </p:sp>
-      <p:sp>
-        <p:nvSpPr>
-          <p:cNvPr id="6" name="TextBox 5"/>
-          <p:cNvSpPr txBox="1"/>
-          <p:nvPr/>
-        </p:nvSpPr>
-        <p:spPr>
-          <a:xfrm>
-            <a:off x="932688" y="1965960"/>
-            <a:ext cx="2194560" cy="438912"/>
-          </a:xfrm>
-          <a:prstGeom prst="rect">
-            <a:avLst/>
-          </a:prstGeom>
-          <a:noFill/>
-        </p:spPr>
-        <p:txBody>
-          <a:bodyPr wrap="square" anchor="t">
-            <a:spAutoFit/>
-          </a:bodyPr>
-          <a:lstStyle/>
-          <a:p>
-            <a:pPr algn="ctr">
-              <a:defRPr sz="2500" b="1">
-                <a:solidFill>
-                  <a:srgbClr val="FB8500"/>
-                </a:solidFill>
-                <a:latin typeface="Aptos"/>
-              </a:defRPr>
-            </a:pPr>
-            <a:r>
-              <a:t>0.022–0.023</a:t>
-            </a:r>
-          </a:p>
-        </p:txBody>
-      </p:sp>
-      <p:sp>
-        <p:nvSpPr>
-          <p:cNvPr id="7" name="TextBox 6"/>
-          <p:cNvSpPr txBox="1"/>
-          <p:nvPr/>
-        </p:nvSpPr>
-        <p:spPr>
-          <a:xfrm>
-            <a:off x="932688" y="2468880"/>
-            <a:ext cx="2194560" cy="274320"/>
-          </a:xfrm>
-          <a:prstGeom prst="rect">
-            <a:avLst/>
-          </a:prstGeom>
-          <a:noFill/>
-        </p:spPr>
-        <p:txBody>
-          <a:bodyPr wrap="square" anchor="t">
-            <a:spAutoFit/>
-          </a:bodyPr>
-          <a:lstStyle/>
-          <a:p>
-            <a:pPr algn="ctr">
-              <a:defRPr sz="1100" b="1">
-                <a:solidFill>
-                  <a:srgbClr val="FFFFFF"/>
-                </a:solidFill>
-                <a:latin typeface="Aptos"/>
-              </a:defRPr>
-            </a:pPr>
-            <a:r>
-              <a:t>AUC CI WIDTH</a:t>
-            </a:r>
-          </a:p>
-        </p:txBody>
-      </p:sp>
-      <p:sp>
-        <p:nvSpPr>
-          <p:cNvPr id="8" name="Rounded Rectangle 7"/>
-          <p:cNvSpPr/>
-          <p:nvPr/>
-        </p:nvSpPr>
-        <p:spPr>
-          <a:xfrm>
-            <a:off x="3566160" y="1828800"/>
-            <a:ext cx="2423160" cy="1261872"/>
+            <a:off x="8229600" y="1554480"/>
+            <a:ext cx="3566160" cy="4480560"/>
           </a:xfrm>
           <a:prstGeom prst="roundRect">
             <a:avLst/>
@@ -9544,50 +10589,101 @@
       </p:sp>
       <p:sp>
         <p:nvSpPr>
+          <p:cNvPr id="7" name="TextBox 6"/>
+          <p:cNvSpPr txBox="1"/>
+          <p:nvPr/>
+        </p:nvSpPr>
+        <p:spPr>
+          <a:xfrm>
+            <a:off x="8458200" y="1828800"/>
+            <a:ext cx="3108960" cy="365760"/>
+          </a:xfrm>
+          <a:prstGeom prst="rect">
+            <a:avLst/>
+          </a:prstGeom>
+          <a:noFill/>
+        </p:spPr>
+        <p:txBody>
+          <a:bodyPr wrap="square" anchor="t">
+            <a:spAutoFit/>
+          </a:bodyPr>
+          <a:lstStyle/>
+          <a:p>
+            <a:pPr algn="ctr">
+              <a:defRPr sz="2000" b="1">
+                <a:solidFill>
+                  <a:srgbClr val="7B2CBF"/>
+                </a:solidFill>
+                <a:latin typeface="Aptos"/>
+              </a:defRPr>
+            </a:pPr>
+            <a:r>
+              <a:t>METHODS</a:t>
+            </a:r>
+          </a:p>
+        </p:txBody>
+      </p:sp>
+      <p:sp>
+        <p:nvSpPr>
+          <p:cNvPr id="8" name="TextBox 7"/>
+          <p:cNvSpPr txBox="1"/>
+          <p:nvPr/>
+        </p:nvSpPr>
+        <p:spPr>
+          <a:xfrm>
+            <a:off x="8549640" y="2542032"/>
+            <a:ext cx="2926080" cy="3246120"/>
+          </a:xfrm>
+          <a:prstGeom prst="rect">
+            <a:avLst/>
+          </a:prstGeom>
+          <a:noFill/>
+        </p:spPr>
+        <p:txBody>
+          <a:bodyPr wrap="square" anchor="t">
+            <a:spAutoFit/>
+          </a:bodyPr>
+          <a:lstStyle/>
+          <a:p>
+            <a:pPr algn="ctr">
+              <a:defRPr sz="1500" b="0">
+                <a:solidFill>
+                  <a:srgbClr val="F0F4F8"/>
+                </a:solidFill>
+                <a:latin typeface="Aptos"/>
+              </a:defRPr>
+            </a:pPr>
+            <a:r>
+              <a:t>SHAP + LIME (local)</a:t>
+            </a:r>
+            <a:br/>
+            <a:br/>
+            <a:r>
+              <a:t>XPER on AUC (Pérignon)</a:t>
+            </a:r>
+            <a:br/>
+            <a:br/>
+            <a:r>
+              <a:t>Global surrogate R²=0.61</a:t>
+            </a:r>
+            <a:br/>
+            <a:br/>
+            <a:r>
+              <a:t>PDP/ICE for all three</a:t>
+            </a:r>
+          </a:p>
+        </p:txBody>
+      </p:sp>
+      <p:sp>
+        <p:nvSpPr>
           <p:cNvPr id="9" name="TextBox 8"/>
           <p:cNvSpPr txBox="1"/>
           <p:nvPr/>
         </p:nvSpPr>
         <p:spPr>
           <a:xfrm>
-            <a:off x="3675887" y="1965960"/>
-            <a:ext cx="2194560" cy="438912"/>
-          </a:xfrm>
-          <a:prstGeom prst="rect">
-            <a:avLst/>
-          </a:prstGeom>
-          <a:noFill/>
-        </p:spPr>
-        <p:txBody>
-          <a:bodyPr wrap="square" anchor="t">
-            <a:spAutoFit/>
-          </a:bodyPr>
-          <a:lstStyle/>
-          <a:p>
-            <a:pPr algn="ctr">
-              <a:defRPr sz="2500" b="1">
-                <a:solidFill>
-                  <a:srgbClr val="7B2CBF"/>
-                </a:solidFill>
-                <a:latin typeface="Aptos"/>
-              </a:defRPr>
-            </a:pPr>
-            <a:r>
-              <a:t>0.0079–0.0088</a:t>
-            </a:r>
-          </a:p>
-        </p:txBody>
-      </p:sp>
-      <p:sp>
-        <p:nvSpPr>
-          <p:cNvPr id="10" name="TextBox 9"/>
-          <p:cNvSpPr txBox="1"/>
-          <p:nvPr/>
-        </p:nvSpPr>
-        <p:spPr>
-          <a:xfrm>
-            <a:off x="3675887" y="2468880"/>
-            <a:ext cx="2194560" cy="274320"/>
+            <a:off x="914400" y="6172200"/>
+            <a:ext cx="10058400" cy="274320"/>
           </a:xfrm>
           <a:prstGeom prst="rect">
             <a:avLst/>
@@ -9603,325 +10699,20 @@
             <a:pPr algn="ctr">
               <a:defRPr sz="1100" b="1">
                 <a:solidFill>
-                  <a:srgbClr val="FFFFFF"/>
-                </a:solidFill>
-                <a:latin typeface="Aptos"/>
-              </a:defRPr>
-            </a:pPr>
-            <a:r>
-              <a:t>BRIER CI WIDTH</a:t>
-            </a:r>
-          </a:p>
-        </p:txBody>
-      </p:sp>
-      <p:sp>
-        <p:nvSpPr>
-          <p:cNvPr id="11" name="Rounded Rectangle 10"/>
-          <p:cNvSpPr/>
-          <p:nvPr/>
-        </p:nvSpPr>
-        <p:spPr>
-          <a:xfrm>
-            <a:off x="6309360" y="1828800"/>
-            <a:ext cx="2423160" cy="1261872"/>
-          </a:xfrm>
-          <a:prstGeom prst="roundRect">
-            <a:avLst/>
-          </a:prstGeom>
-          <a:solidFill>
-            <a:srgbClr val="143058"/>
-          </a:solidFill>
-          <a:ln>
-            <a:solidFill>
-              <a:srgbClr val="FB8500"/>
-            </a:solidFill>
-          </a:ln>
-        </p:spPr>
-        <p:style>
-          <a:lnRef idx="1">
-            <a:schemeClr val="accent1"/>
-          </a:lnRef>
-          <a:fillRef idx="3">
-            <a:schemeClr val="accent1"/>
-          </a:fillRef>
-          <a:effectRef idx="2">
-            <a:schemeClr val="accent1"/>
-          </a:effectRef>
-          <a:fontRef idx="minor">
-            <a:schemeClr val="lt1"/>
-          </a:fontRef>
-        </p:style>
-        <p:txBody>
-          <a:bodyPr rtlCol="0" anchor="ctr"/>
-          <a:lstStyle/>
-          <a:p>
-            <a:pPr algn="ctr"/>
-          </a:p>
-        </p:txBody>
-      </p:sp>
-      <p:sp>
-        <p:nvSpPr>
-          <p:cNvPr id="12" name="TextBox 11"/>
-          <p:cNvSpPr txBox="1"/>
-          <p:nvPr/>
-        </p:nvSpPr>
-        <p:spPr>
-          <a:xfrm>
-            <a:off x="6419088" y="1965960"/>
-            <a:ext cx="2194560" cy="438912"/>
-          </a:xfrm>
-          <a:prstGeom prst="rect">
-            <a:avLst/>
-          </a:prstGeom>
-          <a:noFill/>
-        </p:spPr>
-        <p:txBody>
-          <a:bodyPr wrap="square" anchor="t">
-            <a:spAutoFit/>
-          </a:bodyPr>
-          <a:lstStyle/>
-          <a:p>
-            <a:pPr algn="ctr">
-              <a:defRPr sz="2500" b="1">
-                <a:solidFill>
-                  <a:srgbClr val="FB8500"/>
-                </a:solidFill>
-                <a:latin typeface="Aptos"/>
-              </a:defRPr>
-            </a:pPr>
-            <a:r>
-              <a:t>400</a:t>
-            </a:r>
-          </a:p>
-        </p:txBody>
-      </p:sp>
-      <p:sp>
-        <p:nvSpPr>
-          <p:cNvPr id="13" name="TextBox 12"/>
-          <p:cNvSpPr txBox="1"/>
-          <p:nvPr/>
-        </p:nvSpPr>
-        <p:spPr>
-          <a:xfrm>
-            <a:off x="6419088" y="2468880"/>
-            <a:ext cx="2194560" cy="274320"/>
-          </a:xfrm>
-          <a:prstGeom prst="rect">
-            <a:avLst/>
-          </a:prstGeom>
-          <a:noFill/>
-        </p:spPr>
-        <p:txBody>
-          <a:bodyPr wrap="square" anchor="t">
-            <a:spAutoFit/>
-          </a:bodyPr>
-          <a:lstStyle/>
-          <a:p>
-            <a:pPr algn="ctr">
-              <a:defRPr sz="1100" b="1">
-                <a:solidFill>
-                  <a:srgbClr val="FFFFFF"/>
-                </a:solidFill>
-                <a:latin typeface="Aptos"/>
-              </a:defRPr>
-            </a:pPr>
-            <a:r>
-              <a:t>BOOTSTRAPS</a:t>
-            </a:r>
-          </a:p>
-        </p:txBody>
-      </p:sp>
-      <p:sp>
-        <p:nvSpPr>
-          <p:cNvPr id="14" name="Rounded Rectangle 13"/>
-          <p:cNvSpPr/>
-          <p:nvPr/>
-        </p:nvSpPr>
-        <p:spPr>
-          <a:xfrm>
-            <a:off x="9052560" y="1828800"/>
-            <a:ext cx="2423160" cy="1261872"/>
-          </a:xfrm>
-          <a:prstGeom prst="roundRect">
-            <a:avLst/>
-          </a:prstGeom>
-          <a:solidFill>
-            <a:srgbClr val="143058"/>
-          </a:solidFill>
-          <a:ln>
-            <a:solidFill>
-              <a:srgbClr val="D64343"/>
-            </a:solidFill>
-          </a:ln>
-        </p:spPr>
-        <p:style>
-          <a:lnRef idx="1">
-            <a:schemeClr val="accent1"/>
-          </a:lnRef>
-          <a:fillRef idx="3">
-            <a:schemeClr val="accent1"/>
-          </a:fillRef>
-          <a:effectRef idx="2">
-            <a:schemeClr val="accent1"/>
-          </a:effectRef>
-          <a:fontRef idx="minor">
-            <a:schemeClr val="lt1"/>
-          </a:fontRef>
-        </p:style>
-        <p:txBody>
-          <a:bodyPr rtlCol="0" anchor="ctr"/>
-          <a:lstStyle/>
-          <a:p>
-            <a:pPr algn="ctr"/>
-          </a:p>
-        </p:txBody>
-      </p:sp>
-      <p:sp>
-        <p:nvSpPr>
-          <p:cNvPr id="15" name="TextBox 14"/>
-          <p:cNvSpPr txBox="1"/>
-          <p:nvPr/>
-        </p:nvSpPr>
-        <p:spPr>
-          <a:xfrm>
-            <a:off x="9162288" y="1965960"/>
-            <a:ext cx="2194560" cy="438912"/>
-          </a:xfrm>
-          <a:prstGeom prst="rect">
-            <a:avLst/>
-          </a:prstGeom>
-          <a:noFill/>
-        </p:spPr>
-        <p:txBody>
-          <a:bodyPr wrap="square" anchor="t">
-            <a:spAutoFit/>
-          </a:bodyPr>
-          <a:lstStyle/>
-          <a:p>
-            <a:pPr algn="ctr">
-              <a:defRPr sz="2500" b="1">
-                <a:solidFill>
                   <a:srgbClr val="D64343"/>
                 </a:solidFill>
                 <a:latin typeface="Aptos"/>
               </a:defRPr>
             </a:pPr>
             <a:r>
-              <a:t>Unavailable</a:t>
-            </a:r>
-          </a:p>
-        </p:txBody>
-      </p:sp>
-      <p:sp>
-        <p:nvSpPr>
-          <p:cNvPr id="16" name="TextBox 15"/>
-          <p:cNvSpPr txBox="1"/>
-          <p:nvPr/>
-        </p:nvSpPr>
-        <p:spPr>
-          <a:xfrm>
-            <a:off x="9162288" y="2468880"/>
-            <a:ext cx="2194560" cy="274320"/>
-          </a:xfrm>
-          <a:prstGeom prst="rect">
-            <a:avLst/>
-          </a:prstGeom>
-          <a:noFill/>
-        </p:spPr>
-        <p:txBody>
-          <a:bodyPr wrap="square" anchor="t">
-            <a:spAutoFit/>
-          </a:bodyPr>
-          <a:lstStyle/>
-          <a:p>
-            <a:pPr algn="ctr">
-              <a:defRPr sz="1100" b="1">
-                <a:solidFill>
-                  <a:srgbClr val="FFFFFF"/>
-                </a:solidFill>
-                <a:latin typeface="Aptos"/>
-              </a:defRPr>
-            </a:pPr>
-            <a:r>
-              <a:t>TIME SPLIT</a:t>
-            </a:r>
-          </a:p>
-        </p:txBody>
-      </p:sp>
-      <p:sp>
-        <p:nvSpPr>
-          <p:cNvPr id="17" name="TextBox 16"/>
-          <p:cNvSpPr txBox="1"/>
-          <p:nvPr/>
-        </p:nvSpPr>
-        <p:spPr>
-          <a:xfrm>
-            <a:off x="731520" y="3675887"/>
-            <a:ext cx="10698480" cy="4389120"/>
-          </a:xfrm>
-          <a:prstGeom prst="rect">
-            <a:avLst/>
-          </a:prstGeom>
-          <a:noFill/>
-        </p:spPr>
-        <p:txBody>
-          <a:bodyPr wrap="square">
-            <a:spAutoFit/>
-          </a:bodyPr>
-          <a:lstStyle/>
-          <a:p>
-            <a:pPr>
-              <a:spcAft>
-                <a:spcPts val="1400"/>
-              </a:spcAft>
-              <a:defRPr sz="2000">
-                <a:solidFill>
-                  <a:srgbClr val="FFFFFF"/>
-                </a:solidFill>
-                <a:latin typeface="Aptos"/>
-              </a:defRPr>
-            </a:pPr>
-            <a:r>
-              <a:t>•  Feature-destruction stress tests confirm material input reliance</a:t>
-            </a:r>
-          </a:p>
-          <a:p>
-            <a:pPr>
-              <a:spcAft>
-                <a:spcPts val="1400"/>
-              </a:spcAft>
-              <a:defRPr sz="2000">
-                <a:solidFill>
-                  <a:srgbClr val="FFFFFF"/>
-                </a:solidFill>
-                <a:latin typeface="Aptos"/>
-              </a:defRPr>
-            </a:pPr>
-            <a:r>
-              <a:t>•  A later release cohort is a hard gate before operational launch</a:t>
-            </a:r>
-          </a:p>
-          <a:p>
-            <a:pPr>
-              <a:spcAft>
-                <a:spcPts val="1400"/>
-              </a:spcAft>
-              <a:defRPr sz="2000">
-                <a:solidFill>
-                  <a:srgbClr val="FFFFFF"/>
-                </a:solidFill>
-                <a:latin typeface="Aptos"/>
-              </a:defRPr>
-            </a:pPr>
-            <a:r>
-              <a:t>•  Monitor calibration, input drift and subgroup gaps every quarter</a:t>
-            </a:r>
-          </a:p>
-        </p:txBody>
-      </p:sp>
-      <p:sp>
-        <p:nvSpPr>
-          <p:cNvPr id="18" name="TextBox 17"/>
+              <a:t>TabICLv2 has no native explanation path — a real deployment cost, covered only by model-agnostic PDP/ICE.</a:t>
+            </a:r>
+          </a:p>
+        </p:txBody>
+      </p:sp>
+      <p:sp>
+        <p:nvSpPr>
+          <p:cNvPr id="10" name="TextBox 9"/>
           <p:cNvSpPr txBox="1"/>
           <p:nvPr/>
         </p:nvSpPr>
@@ -9957,7 +10748,7 @@
       </p:sp>
       <p:sp>
         <p:nvSpPr>
-          <p:cNvPr id="19" name="TextBox 18"/>
+          <p:cNvPr id="11" name="TextBox 10"/>
           <p:cNvSpPr txBox="1"/>
           <p:nvPr/>
         </p:nvSpPr>

--- a/reports/ISAF_Recidivism_Presentation.pptx
+++ b/reports/ISAF_Recidivism_Presentation.pptx
@@ -20,6 +20,7 @@
     <p:sldId id="268" r:id="rId19"/>
     <p:sldId id="269" r:id="rId20"/>
     <p:sldId id="270" r:id="rId21"/>
+    <p:sldId id="271" r:id="rId22"/>
   </p:sldIdLst>
   <p:sldSz cx="12191695" cy="6858000" type="screen4x3"/>
   <p:notesSz cx="6858000" cy="9144000"/>
@@ -5048,7 +5049,7 @@
               </a:defRPr>
             </a:pPr>
             <a:r>
-              <a:t>12 · TRADE-OFFS ACROSS FOUR DIMENSIONS</a:t>
+              <a:t>12 · PROCESS</a:t>
             </a:r>
           </a:p>
         </p:txBody>
@@ -5084,7 +5085,7 @@
               </a:defRPr>
             </a:pPr>
             <a:r>
-              <a:t>Which model should the client deploy?</a:t>
+              <a:t>How we got here: what we tried, where we landed</a:t>
             </a:r>
           </a:p>
         </p:txBody>
@@ -5134,7 +5135,7 @@
       </p:sp>
       <p:pic>
         <p:nvPicPr>
-          <p:cNvPr id="5" name="Picture 4" descr="tradeoff_matrix.png"/>
+          <p:cNvPr id="5" name="Picture 4" descr="improvement_journey.png"/>
           <p:cNvPicPr>
             <a:picLocks noChangeAspect="1"/>
           </p:cNvPicPr>
@@ -5148,8 +5149,8 @@
         </p:blipFill>
         <p:spPr>
           <a:xfrm>
-            <a:off x="2011680" y="1481328"/>
-            <a:ext cx="8138160" cy="6081764"/>
+            <a:off x="502920" y="1600200"/>
+            <a:ext cx="11155680" cy="4049941"/>
           </a:xfrm>
           <a:prstGeom prst="rect">
             <a:avLst/>
@@ -5159,6 +5160,42 @@
       <p:sp>
         <p:nvSpPr>
           <p:cNvPr id="6" name="TextBox 5"/>
+          <p:cNvSpPr txBox="1"/>
+          <p:nvPr/>
+        </p:nvSpPr>
+        <p:spPr>
+          <a:xfrm>
+            <a:off x="914400" y="6236208"/>
+            <a:ext cx="10058400" cy="274320"/>
+          </a:xfrm>
+          <a:prstGeom prst="rect">
+            <a:avLst/>
+          </a:prstGeom>
+          <a:noFill/>
+        </p:spPr>
+        <p:txBody>
+          <a:bodyPr wrap="square" anchor="t">
+            <a:spAutoFit/>
+          </a:bodyPr>
+          <a:lstStyle/>
+          <a:p>
+            <a:pPr algn="ctr">
+              <a:defRPr sz="1100" b="1">
+                <a:solidFill>
+                  <a:srgbClr val="FB8500"/>
+                </a:solidFill>
+                <a:latin typeface="Aptos"/>
+              </a:defRPr>
+            </a:pPr>
+            <a:r>
+              <a:t>Full log in JOURNEY.md — every step measured, including the attempts we rejected.</a:t>
+            </a:r>
+          </a:p>
+        </p:txBody>
+      </p:sp>
+      <p:sp>
+        <p:nvSpPr>
+          <p:cNvPr id="7" name="TextBox 6"/>
           <p:cNvSpPr txBox="1"/>
           <p:nvPr/>
         </p:nvSpPr>
@@ -5194,7 +5231,7 @@
       </p:sp>
       <p:sp>
         <p:nvSpPr>
-          <p:cNvPr id="7" name="TextBox 6"/>
+          <p:cNvPr id="8" name="TextBox 7"/>
           <p:cNvSpPr txBox="1"/>
           <p:nvPr/>
         </p:nvSpPr>
@@ -5285,7 +5322,7 @@
               </a:defRPr>
             </a:pPr>
             <a:r>
-              <a:t>13 · RECOMMENDATION</a:t>
+              <a:t>13 · TRADE-OFFS ACROSS FOUR DIMENSIONS</a:t>
             </a:r>
           </a:p>
         </p:txBody>
@@ -5321,7 +5358,7 @@
               </a:defRPr>
             </a:pPr>
             <a:r>
-              <a:t>Deploy XGBoost; challenger logistic; TabICL for small agencies</a:t>
+              <a:t>Which model should the client deploy?</a:t>
             </a:r>
           </a:p>
         </p:txBody>
@@ -5369,273 +5406,33 @@
           </a:p>
         </p:txBody>
       </p:sp>
-      <p:sp>
-        <p:nvSpPr>
-          <p:cNvPr id="5" name="Rounded Rectangle 4"/>
-          <p:cNvSpPr/>
-          <p:nvPr/>
-        </p:nvSpPr>
-        <p:spPr>
-          <a:xfrm>
-            <a:off x="731520" y="1645920"/>
-            <a:ext cx="5257800" cy="4251960"/>
-          </a:xfrm>
-          <a:prstGeom prst="roundRect">
-            <a:avLst/>
-          </a:prstGeom>
-          <a:solidFill>
-            <a:srgbClr val="143058"/>
-          </a:solidFill>
-          <a:ln>
-            <a:solidFill>
-              <a:srgbClr val="00B4B4"/>
-            </a:solidFill>
-          </a:ln>
-        </p:spPr>
-        <p:style>
-          <a:lnRef idx="1">
-            <a:schemeClr val="accent1"/>
-          </a:lnRef>
-          <a:fillRef idx="3">
-            <a:schemeClr val="accent1"/>
-          </a:fillRef>
-          <a:effectRef idx="2">
-            <a:schemeClr val="accent1"/>
-          </a:effectRef>
-          <a:fontRef idx="minor">
-            <a:schemeClr val="lt1"/>
-          </a:fontRef>
-        </p:style>
-        <p:txBody>
-          <a:bodyPr rtlCol="0" anchor="ctr"/>
-          <a:lstStyle/>
-          <a:p>
-            <a:pPr algn="ctr"/>
-          </a:p>
-        </p:txBody>
-      </p:sp>
+      <p:pic>
+        <p:nvPicPr>
+          <p:cNvPr id="5" name="Picture 4" descr="tradeoff_matrix.png"/>
+          <p:cNvPicPr>
+            <a:picLocks noChangeAspect="1"/>
+          </p:cNvPicPr>
+          <p:nvPr/>
+        </p:nvPicPr>
+        <p:blipFill>
+          <a:blip r:embed="rId2"/>
+          <a:stretch>
+            <a:fillRect/>
+          </a:stretch>
+        </p:blipFill>
+        <p:spPr>
+          <a:xfrm>
+            <a:off x="2011680" y="1481328"/>
+            <a:ext cx="8138160" cy="6081764"/>
+          </a:xfrm>
+          <a:prstGeom prst="rect">
+            <a:avLst/>
+          </a:prstGeom>
+        </p:spPr>
+      </p:pic>
       <p:sp>
         <p:nvSpPr>
           <p:cNvPr id="6" name="TextBox 5"/>
-          <p:cNvSpPr txBox="1"/>
-          <p:nvPr/>
-        </p:nvSpPr>
-        <p:spPr>
-          <a:xfrm>
-            <a:off x="960120" y="1920240"/>
-            <a:ext cx="4800600" cy="365760"/>
-          </a:xfrm>
-          <a:prstGeom prst="rect">
-            <a:avLst/>
-          </a:prstGeom>
-          <a:noFill/>
-        </p:spPr>
-        <p:txBody>
-          <a:bodyPr wrap="square" anchor="t">
-            <a:spAutoFit/>
-          </a:bodyPr>
-          <a:lstStyle/>
-          <a:p>
-            <a:pPr algn="ctr">
-              <a:defRPr sz="2000" b="1">
-                <a:solidFill>
-                  <a:srgbClr val="00B4B4"/>
-                </a:solidFill>
-                <a:latin typeface="Aptos"/>
-              </a:defRPr>
-            </a:pPr>
-            <a:r>
-              <a:t>WHY XGBOOST</a:t>
-            </a:r>
-          </a:p>
-        </p:txBody>
-      </p:sp>
-      <p:sp>
-        <p:nvSpPr>
-          <p:cNvPr id="7" name="TextBox 6"/>
-          <p:cNvSpPr txBox="1"/>
-          <p:nvPr/>
-        </p:nvSpPr>
-        <p:spPr>
-          <a:xfrm>
-            <a:off x="1051560" y="2633472"/>
-            <a:ext cx="4617720" cy="3017520"/>
-          </a:xfrm>
-          <a:prstGeom prst="rect">
-            <a:avLst/>
-          </a:prstGeom>
-          <a:noFill/>
-        </p:spPr>
-        <p:txBody>
-          <a:bodyPr wrap="square" anchor="t">
-            <a:spAutoFit/>
-          </a:bodyPr>
-          <a:lstStyle/>
-          <a:p>
-            <a:pPr algn="ctr">
-              <a:defRPr sz="1500" b="0">
-                <a:solidFill>
-                  <a:srgbClr val="F0F4F8"/>
-                </a:solidFill>
-                <a:latin typeface="Aptos"/>
-              </a:defRPr>
-            </a:pPr>
-            <a:r>
-              <a:t>Best calibration + net value</a:t>
-            </a:r>
-            <a:br/>
-            <a:br/>
-            <a:r>
-              <a:t>Smallest gender FPR gap</a:t>
-            </a:r>
-            <a:br/>
-            <a:br/>
-            <a:r>
-              <a:t>SHAP-explainable</a:t>
-            </a:r>
-            <a:br/>
-            <a:br/>
-            <a:r>
-              <a:t>35× faster than the TFM</a:t>
-            </a:r>
-          </a:p>
-        </p:txBody>
-      </p:sp>
-      <p:sp>
-        <p:nvSpPr>
-          <p:cNvPr id="8" name="Rounded Rectangle 7"/>
-          <p:cNvSpPr/>
-          <p:nvPr/>
-        </p:nvSpPr>
-        <p:spPr>
-          <a:xfrm>
-            <a:off x="6217920" y="1645920"/>
-            <a:ext cx="5257800" cy="4251960"/>
-          </a:xfrm>
-          <a:prstGeom prst="roundRect">
-            <a:avLst/>
-          </a:prstGeom>
-          <a:solidFill>
-            <a:srgbClr val="143058"/>
-          </a:solidFill>
-          <a:ln>
-            <a:solidFill>
-              <a:srgbClr val="7B2CBF"/>
-            </a:solidFill>
-          </a:ln>
-        </p:spPr>
-        <p:style>
-          <a:lnRef idx="1">
-            <a:schemeClr val="accent1"/>
-          </a:lnRef>
-          <a:fillRef idx="3">
-            <a:schemeClr val="accent1"/>
-          </a:fillRef>
-          <a:effectRef idx="2">
-            <a:schemeClr val="accent1"/>
-          </a:effectRef>
-          <a:fontRef idx="minor">
-            <a:schemeClr val="lt1"/>
-          </a:fontRef>
-        </p:style>
-        <p:txBody>
-          <a:bodyPr rtlCol="0" anchor="ctr"/>
-          <a:lstStyle/>
-          <a:p>
-            <a:pPr algn="ctr"/>
-          </a:p>
-        </p:txBody>
-      </p:sp>
-      <p:sp>
-        <p:nvSpPr>
-          <p:cNvPr id="9" name="TextBox 8"/>
-          <p:cNvSpPr txBox="1"/>
-          <p:nvPr/>
-        </p:nvSpPr>
-        <p:spPr>
-          <a:xfrm>
-            <a:off x="6446520" y="1920240"/>
-            <a:ext cx="4800600" cy="365760"/>
-          </a:xfrm>
-          <a:prstGeom prst="rect">
-            <a:avLst/>
-          </a:prstGeom>
-          <a:noFill/>
-        </p:spPr>
-        <p:txBody>
-          <a:bodyPr wrap="square" anchor="t">
-            <a:spAutoFit/>
-          </a:bodyPr>
-          <a:lstStyle/>
-          <a:p>
-            <a:pPr algn="ctr">
-              <a:defRPr sz="2000" b="1">
-                <a:solidFill>
-                  <a:srgbClr val="7B2CBF"/>
-                </a:solidFill>
-                <a:latin typeface="Aptos"/>
-              </a:defRPr>
-            </a:pPr>
-            <a:r>
-              <a:t>CONDITIONS</a:t>
-            </a:r>
-          </a:p>
-        </p:txBody>
-      </p:sp>
-      <p:sp>
-        <p:nvSpPr>
-          <p:cNvPr id="10" name="TextBox 9"/>
-          <p:cNvSpPr txBox="1"/>
-          <p:nvPr/>
-        </p:nvSpPr>
-        <p:spPr>
-          <a:xfrm>
-            <a:off x="6537959" y="2633472"/>
-            <a:ext cx="4617720" cy="3017520"/>
-          </a:xfrm>
-          <a:prstGeom prst="rect">
-            <a:avLst/>
-          </a:prstGeom>
-          <a:noFill/>
-        </p:spPr>
-        <p:txBody>
-          <a:bodyPr wrap="square" anchor="t">
-            <a:spAutoFit/>
-          </a:bodyPr>
-          <a:lstStyle/>
-          <a:p>
-            <a:pPr algn="ctr">
-              <a:defRPr sz="1500" b="0">
-                <a:solidFill>
-                  <a:srgbClr val="F0F4F8"/>
-                </a:solidFill>
-                <a:latin typeface="Aptos"/>
-              </a:defRPr>
-            </a:pPr>
-            <a:r>
-              <a:t>Benefit-only allocation</a:t>
-            </a:r>
-            <a:br/>
-            <a:br/>
-            <a:r>
-              <a:t>Logistic as transparent challenger</a:t>
-            </a:r>
-            <a:br/>
-            <a:br/>
-            <a:r>
-              <a:t>Prospective shadow validation</a:t>
-            </a:r>
-            <a:br/>
-            <a:br/>
-            <a:r>
-              <a:t>Appeal route, logs, quarterly audits, stop rules</a:t>
-            </a:r>
-          </a:p>
-        </p:txBody>
-      </p:sp>
-      <p:sp>
-        <p:nvSpPr>
-          <p:cNvPr id="11" name="TextBox 10"/>
           <p:cNvSpPr txBox="1"/>
           <p:nvPr/>
         </p:nvSpPr>
@@ -5671,7 +5468,7 @@
       </p:sp>
       <p:sp>
         <p:nvSpPr>
-          <p:cNvPr id="12" name="TextBox 11"/>
+          <p:cNvPr id="7" name="TextBox 6"/>
           <p:cNvSpPr txBox="1"/>
           <p:nvPr/>
         </p:nvSpPr>
@@ -5762,7 +5559,484 @@
               </a:defRPr>
             </a:pPr>
             <a:r>
-              <a:t>14 · CLIENT EXPERIENCE</a:t>
+              <a:t>14 · RECOMMENDATION</a:t>
+            </a:r>
+          </a:p>
+        </p:txBody>
+      </p:sp>
+      <p:sp>
+        <p:nvSpPr>
+          <p:cNvPr id="3" name="TextBox 2"/>
+          <p:cNvSpPr txBox="1"/>
+          <p:nvPr/>
+        </p:nvSpPr>
+        <p:spPr>
+          <a:xfrm>
+            <a:off x="594360" y="621792"/>
+            <a:ext cx="10972800" cy="594360"/>
+          </a:xfrm>
+          <a:prstGeom prst="rect">
+            <a:avLst/>
+          </a:prstGeom>
+          <a:noFill/>
+        </p:spPr>
+        <p:txBody>
+          <a:bodyPr wrap="square" anchor="t">
+            <a:spAutoFit/>
+          </a:bodyPr>
+          <a:lstStyle/>
+          <a:p>
+            <a:pPr algn="l">
+              <a:defRPr sz="2600" b="1">
+                <a:solidFill>
+                  <a:srgbClr val="FFFFFF"/>
+                </a:solidFill>
+                <a:latin typeface="Aptos"/>
+              </a:defRPr>
+            </a:pPr>
+            <a:r>
+              <a:t>Deploy XGBoost; challenger logistic; TabICL for small agencies</a:t>
+            </a:r>
+          </a:p>
+        </p:txBody>
+      </p:sp>
+      <p:sp>
+        <p:nvSpPr>
+          <p:cNvPr id="4" name="Rectangle 3"/>
+          <p:cNvSpPr/>
+          <p:nvPr/>
+        </p:nvSpPr>
+        <p:spPr>
+          <a:xfrm>
+            <a:off x="594360" y="1298448"/>
+            <a:ext cx="1005840" cy="50292"/>
+          </a:xfrm>
+          <a:prstGeom prst="rect">
+            <a:avLst/>
+          </a:prstGeom>
+          <a:solidFill>
+            <a:srgbClr val="FB8500"/>
+          </a:solidFill>
+          <a:ln>
+            <a:noFill/>
+          </a:ln>
+        </p:spPr>
+        <p:style>
+          <a:lnRef idx="1">
+            <a:schemeClr val="accent1"/>
+          </a:lnRef>
+          <a:fillRef idx="3">
+            <a:schemeClr val="accent1"/>
+          </a:fillRef>
+          <a:effectRef idx="2">
+            <a:schemeClr val="accent1"/>
+          </a:effectRef>
+          <a:fontRef idx="minor">
+            <a:schemeClr val="lt1"/>
+          </a:fontRef>
+        </p:style>
+        <p:txBody>
+          <a:bodyPr rtlCol="0" anchor="ctr"/>
+          <a:lstStyle/>
+          <a:p>
+            <a:pPr algn="ctr"/>
+          </a:p>
+        </p:txBody>
+      </p:sp>
+      <p:sp>
+        <p:nvSpPr>
+          <p:cNvPr id="5" name="Rounded Rectangle 4"/>
+          <p:cNvSpPr/>
+          <p:nvPr/>
+        </p:nvSpPr>
+        <p:spPr>
+          <a:xfrm>
+            <a:off x="731520" y="1645920"/>
+            <a:ext cx="5257800" cy="4251960"/>
+          </a:xfrm>
+          <a:prstGeom prst="roundRect">
+            <a:avLst/>
+          </a:prstGeom>
+          <a:solidFill>
+            <a:srgbClr val="143058"/>
+          </a:solidFill>
+          <a:ln>
+            <a:solidFill>
+              <a:srgbClr val="00B4B4"/>
+            </a:solidFill>
+          </a:ln>
+        </p:spPr>
+        <p:style>
+          <a:lnRef idx="1">
+            <a:schemeClr val="accent1"/>
+          </a:lnRef>
+          <a:fillRef idx="3">
+            <a:schemeClr val="accent1"/>
+          </a:fillRef>
+          <a:effectRef idx="2">
+            <a:schemeClr val="accent1"/>
+          </a:effectRef>
+          <a:fontRef idx="minor">
+            <a:schemeClr val="lt1"/>
+          </a:fontRef>
+        </p:style>
+        <p:txBody>
+          <a:bodyPr rtlCol="0" anchor="ctr"/>
+          <a:lstStyle/>
+          <a:p>
+            <a:pPr algn="ctr"/>
+          </a:p>
+        </p:txBody>
+      </p:sp>
+      <p:sp>
+        <p:nvSpPr>
+          <p:cNvPr id="6" name="TextBox 5"/>
+          <p:cNvSpPr txBox="1"/>
+          <p:nvPr/>
+        </p:nvSpPr>
+        <p:spPr>
+          <a:xfrm>
+            <a:off x="960120" y="1920240"/>
+            <a:ext cx="4800600" cy="365760"/>
+          </a:xfrm>
+          <a:prstGeom prst="rect">
+            <a:avLst/>
+          </a:prstGeom>
+          <a:noFill/>
+        </p:spPr>
+        <p:txBody>
+          <a:bodyPr wrap="square" anchor="t">
+            <a:spAutoFit/>
+          </a:bodyPr>
+          <a:lstStyle/>
+          <a:p>
+            <a:pPr algn="ctr">
+              <a:defRPr sz="2000" b="1">
+                <a:solidFill>
+                  <a:srgbClr val="00B4B4"/>
+                </a:solidFill>
+                <a:latin typeface="Aptos"/>
+              </a:defRPr>
+            </a:pPr>
+            <a:r>
+              <a:t>WHY XGBOOST</a:t>
+            </a:r>
+          </a:p>
+        </p:txBody>
+      </p:sp>
+      <p:sp>
+        <p:nvSpPr>
+          <p:cNvPr id="7" name="TextBox 6"/>
+          <p:cNvSpPr txBox="1"/>
+          <p:nvPr/>
+        </p:nvSpPr>
+        <p:spPr>
+          <a:xfrm>
+            <a:off x="1051560" y="2633472"/>
+            <a:ext cx="4617720" cy="3017520"/>
+          </a:xfrm>
+          <a:prstGeom prst="rect">
+            <a:avLst/>
+          </a:prstGeom>
+          <a:noFill/>
+        </p:spPr>
+        <p:txBody>
+          <a:bodyPr wrap="square" anchor="t">
+            <a:spAutoFit/>
+          </a:bodyPr>
+          <a:lstStyle/>
+          <a:p>
+            <a:pPr algn="ctr">
+              <a:defRPr sz="1500" b="0">
+                <a:solidFill>
+                  <a:srgbClr val="F0F4F8"/>
+                </a:solidFill>
+                <a:latin typeface="Aptos"/>
+              </a:defRPr>
+            </a:pPr>
+            <a:r>
+              <a:t>Best calibration + net value</a:t>
+            </a:r>
+            <a:br/>
+            <a:br/>
+            <a:r>
+              <a:t>Smallest gender FPR gap</a:t>
+            </a:r>
+            <a:br/>
+            <a:br/>
+            <a:r>
+              <a:t>SHAP-explainable</a:t>
+            </a:r>
+            <a:br/>
+            <a:br/>
+            <a:r>
+              <a:t>35× faster than the TFM</a:t>
+            </a:r>
+          </a:p>
+        </p:txBody>
+      </p:sp>
+      <p:sp>
+        <p:nvSpPr>
+          <p:cNvPr id="8" name="Rounded Rectangle 7"/>
+          <p:cNvSpPr/>
+          <p:nvPr/>
+        </p:nvSpPr>
+        <p:spPr>
+          <a:xfrm>
+            <a:off x="6217920" y="1645920"/>
+            <a:ext cx="5257800" cy="4251960"/>
+          </a:xfrm>
+          <a:prstGeom prst="roundRect">
+            <a:avLst/>
+          </a:prstGeom>
+          <a:solidFill>
+            <a:srgbClr val="143058"/>
+          </a:solidFill>
+          <a:ln>
+            <a:solidFill>
+              <a:srgbClr val="7B2CBF"/>
+            </a:solidFill>
+          </a:ln>
+        </p:spPr>
+        <p:style>
+          <a:lnRef idx="1">
+            <a:schemeClr val="accent1"/>
+          </a:lnRef>
+          <a:fillRef idx="3">
+            <a:schemeClr val="accent1"/>
+          </a:fillRef>
+          <a:effectRef idx="2">
+            <a:schemeClr val="accent1"/>
+          </a:effectRef>
+          <a:fontRef idx="minor">
+            <a:schemeClr val="lt1"/>
+          </a:fontRef>
+        </p:style>
+        <p:txBody>
+          <a:bodyPr rtlCol="0" anchor="ctr"/>
+          <a:lstStyle/>
+          <a:p>
+            <a:pPr algn="ctr"/>
+          </a:p>
+        </p:txBody>
+      </p:sp>
+      <p:sp>
+        <p:nvSpPr>
+          <p:cNvPr id="9" name="TextBox 8"/>
+          <p:cNvSpPr txBox="1"/>
+          <p:nvPr/>
+        </p:nvSpPr>
+        <p:spPr>
+          <a:xfrm>
+            <a:off x="6446520" y="1920240"/>
+            <a:ext cx="4800600" cy="365760"/>
+          </a:xfrm>
+          <a:prstGeom prst="rect">
+            <a:avLst/>
+          </a:prstGeom>
+          <a:noFill/>
+        </p:spPr>
+        <p:txBody>
+          <a:bodyPr wrap="square" anchor="t">
+            <a:spAutoFit/>
+          </a:bodyPr>
+          <a:lstStyle/>
+          <a:p>
+            <a:pPr algn="ctr">
+              <a:defRPr sz="2000" b="1">
+                <a:solidFill>
+                  <a:srgbClr val="7B2CBF"/>
+                </a:solidFill>
+                <a:latin typeface="Aptos"/>
+              </a:defRPr>
+            </a:pPr>
+            <a:r>
+              <a:t>CONDITIONS</a:t>
+            </a:r>
+          </a:p>
+        </p:txBody>
+      </p:sp>
+      <p:sp>
+        <p:nvSpPr>
+          <p:cNvPr id="10" name="TextBox 9"/>
+          <p:cNvSpPr txBox="1"/>
+          <p:nvPr/>
+        </p:nvSpPr>
+        <p:spPr>
+          <a:xfrm>
+            <a:off x="6537959" y="2633472"/>
+            <a:ext cx="4617720" cy="3017520"/>
+          </a:xfrm>
+          <a:prstGeom prst="rect">
+            <a:avLst/>
+          </a:prstGeom>
+          <a:noFill/>
+        </p:spPr>
+        <p:txBody>
+          <a:bodyPr wrap="square" anchor="t">
+            <a:spAutoFit/>
+          </a:bodyPr>
+          <a:lstStyle/>
+          <a:p>
+            <a:pPr algn="ctr">
+              <a:defRPr sz="1500" b="0">
+                <a:solidFill>
+                  <a:srgbClr val="F0F4F8"/>
+                </a:solidFill>
+                <a:latin typeface="Aptos"/>
+              </a:defRPr>
+            </a:pPr>
+            <a:r>
+              <a:t>Benefit-only allocation</a:t>
+            </a:r>
+            <a:br/>
+            <a:br/>
+            <a:r>
+              <a:t>Logistic as transparent challenger</a:t>
+            </a:r>
+            <a:br/>
+            <a:br/>
+            <a:r>
+              <a:t>Prospective shadow validation</a:t>
+            </a:r>
+            <a:br/>
+            <a:br/>
+            <a:r>
+              <a:t>Appeal route, logs, quarterly audits, stop rules</a:t>
+            </a:r>
+          </a:p>
+        </p:txBody>
+      </p:sp>
+      <p:sp>
+        <p:nvSpPr>
+          <p:cNvPr id="11" name="TextBox 10"/>
+          <p:cNvSpPr txBox="1"/>
+          <p:nvPr/>
+        </p:nvSpPr>
+        <p:spPr>
+          <a:xfrm>
+            <a:off x="594360" y="6510528"/>
+            <a:ext cx="3657600" cy="164592"/>
+          </a:xfrm>
+          <a:prstGeom prst="rect">
+            <a:avLst/>
+          </a:prstGeom>
+          <a:noFill/>
+        </p:spPr>
+        <p:txBody>
+          <a:bodyPr wrap="square" anchor="t">
+            <a:spAutoFit/>
+          </a:bodyPr>
+          <a:lstStyle/>
+          <a:p>
+            <a:pPr algn="l">
+              <a:defRPr sz="800" b="0">
+                <a:solidFill>
+                  <a:srgbClr val="828FA0"/>
+                </a:solidFill>
+                <a:latin typeface="Aptos"/>
+              </a:defRPr>
+            </a:pPr>
+            <a:r>
+              <a:t>HEC Paris · ISAF · 2026</a:t>
+            </a:r>
+          </a:p>
+        </p:txBody>
+      </p:sp>
+      <p:sp>
+        <p:nvSpPr>
+          <p:cNvPr id="12" name="TextBox 11"/>
+          <p:cNvSpPr txBox="1"/>
+          <p:nvPr/>
+        </p:nvSpPr>
+        <p:spPr>
+          <a:xfrm>
+            <a:off x="11109960" y="6492240"/>
+            <a:ext cx="411480" cy="164592"/>
+          </a:xfrm>
+          <a:prstGeom prst="rect">
+            <a:avLst/>
+          </a:prstGeom>
+          <a:noFill/>
+        </p:spPr>
+        <p:txBody>
+          <a:bodyPr wrap="square" anchor="t">
+            <a:spAutoFit/>
+          </a:bodyPr>
+          <a:lstStyle/>
+          <a:p>
+            <a:pPr algn="r">
+              <a:defRPr sz="800" b="0">
+                <a:solidFill>
+                  <a:srgbClr val="828FA0"/>
+                </a:solidFill>
+                <a:latin typeface="Aptos"/>
+              </a:defRPr>
+            </a:pPr>
+            <a:r>
+              <a:t>15</a:t>
+            </a:r>
+          </a:p>
+        </p:txBody>
+      </p:sp>
+    </p:spTree>
+  </p:cSld>
+  <p:clrMapOvr>
+    <a:masterClrMapping/>
+  </p:clrMapOvr>
+</p:sld>
+</file>
+
+<file path=ppt/slides/slide16.xml><?xml version="1.0" encoding="utf-8"?>
+<p:sld xmlns:a="http://schemas.openxmlformats.org/drawingml/2006/main" xmlns:p="http://schemas.openxmlformats.org/presentationml/2006/main" xmlns:r="http://schemas.openxmlformats.org/officeDocument/2006/relationships">
+  <p:cSld>
+    <p:bg>
+      <p:bgPr>
+        <a:solidFill>
+          <a:srgbClr val="0A1F44"/>
+        </a:solidFill>
+        <a:effectLst/>
+      </p:bgPr>
+    </p:bg>
+    <p:spTree>
+      <p:nvGrpSpPr>
+        <p:cNvPr id="1" name=""/>
+        <p:cNvGrpSpPr/>
+        <p:nvPr/>
+      </p:nvGrpSpPr>
+      <p:grpSpPr/>
+      <p:sp>
+        <p:nvSpPr>
+          <p:cNvPr id="2" name="TextBox 1"/>
+          <p:cNvSpPr txBox="1"/>
+          <p:nvPr/>
+        </p:nvSpPr>
+        <p:spPr>
+          <a:xfrm>
+            <a:off x="594360" y="256032"/>
+            <a:ext cx="10972800" cy="274320"/>
+          </a:xfrm>
+          <a:prstGeom prst="rect">
+            <a:avLst/>
+          </a:prstGeom>
+          <a:noFill/>
+        </p:spPr>
+        <p:txBody>
+          <a:bodyPr wrap="square" anchor="t">
+            <a:spAutoFit/>
+          </a:bodyPr>
+          <a:lstStyle/>
+          <a:p>
+            <a:pPr algn="l">
+              <a:defRPr sz="1000" b="1">
+                <a:solidFill>
+                  <a:srgbClr val="FB8500"/>
+                </a:solidFill>
+                <a:latin typeface="Aptos"/>
+              </a:defRPr>
+            </a:pPr>
+            <a:r>
+              <a:t>15 · CLIENT EXPERIENCE</a:t>
             </a:r>
           </a:p>
         </p:txBody>
@@ -6417,7 +6691,7 @@
               </a:defRPr>
             </a:pPr>
             <a:r>
-              <a:t>15</a:t>
+              <a:t>16</a:t>
             </a:r>
           </a:p>
         </p:txBody>

--- a/reports/ISAF_Recidivism_Presentation.pptx
+++ b/reports/ISAF_Recidivism_Presentation.pptx
@@ -3570,7 +3570,7 @@
           </a:solidFill>
           <a:ln>
             <a:solidFill>
-              <a:srgbClr val="D64343"/>
+              <a:srgbClr val="00B4B4"/>
             </a:solidFill>
           </a:ln>
         </p:spPr>
@@ -3621,13 +3621,13 @@
             <a:pPr algn="ctr">
               <a:defRPr sz="2400" b="1">
                 <a:solidFill>
-                  <a:srgbClr val="D64343"/>
-                </a:solidFill>
-                <a:latin typeface="Aptos"/>
-              </a:defRPr>
-            </a:pPr>
-            <a:r>
-              <a:t>0.045</a:t>
+                  <a:srgbClr val="00B4B4"/>
+                </a:solidFill>
+                <a:latin typeface="Aptos"/>
+              </a:defRPr>
+            </a:pPr>
+            <a:r>
+              <a:t>~0.035</a:t>
             </a:r>
           </a:p>
         </p:txBody>
@@ -3663,7 +3663,7 @@
               </a:defRPr>
             </a:pPr>
             <a:r>
-              <a:t>SCORE DRIFT · TABICL</a:t>
+              <a:t>SCORE DRIFT (ALL)</a:t>
             </a:r>
           </a:p>
         </p:txBody>
@@ -3744,7 +3744,7 @@
               </a:defRPr>
             </a:pPr>
             <a:r>
-              <a:t>73–77%</a:t>
+              <a:t>76–77%</a:t>
             </a:r>
           </a:p>
         </p:txBody>
@@ -3816,7 +3816,7 @@
               </a:defRPr>
             </a:pPr>
             <a:r>
-              <a:t>~1 person in 4 changes priority status across refits — scores need governance. TabICLv2 is least stable (4 refits vs 8, a stated cost trade-off).</a:t>
+              <a:t>All three comparably stable (8 refits each). But ~1 person in 4 changes priority status across refits — scores need governance and monitoring.</a:t>
             </a:r>
           </a:p>
         </p:txBody>
@@ -4251,7 +4251,7 @@
               </a:defRPr>
             </a:pPr>
             <a:r>
-              <a:t>0.072</a:t>
+              <a:t>0.041</a:t>
             </a:r>
           </a:p>
         </p:txBody>
@@ -7613,8 +7613,8 @@
         </p:nvSpPr>
         <p:spPr>
           <a:xfrm>
-            <a:off x="731520" y="3401568"/>
-            <a:ext cx="10698480" cy="2194560"/>
+            <a:off x="731520" y="3246120"/>
+            <a:ext cx="10698480" cy="2468880"/>
           </a:xfrm>
           <a:prstGeom prst="rect">
             <a:avLst/>
@@ -7631,7 +7631,7 @@
               <a:spcAft>
                 <a:spcPts val="1200"/>
               </a:spcAft>
-              <a:defRPr sz="2000">
+              <a:defRPr sz="1800">
                 <a:solidFill>
                   <a:srgbClr val="FFFFFF"/>
                 </a:solidFill>
@@ -7647,7 +7647,7 @@
               <a:spcAft>
                 <a:spcPts val="1200"/>
               </a:spcAft>
-              <a:defRPr sz="2000">
+              <a:defRPr sz="1800">
                 <a:solidFill>
                   <a:srgbClr val="FFFFFF"/>
                 </a:solidFill>
@@ -7663,7 +7663,23 @@
               <a:spcAft>
                 <a:spcPts val="1200"/>
               </a:spcAft>
-              <a:defRPr sz="2000">
+              <a:defRPr sz="1800">
+                <a:solidFill>
+                  <a:srgbClr val="FFFFFF"/>
+                </a:solidFill>
+                <a:latin typeface="Aptos"/>
+              </a:defRPr>
+            </a:pPr>
+            <a:r>
+              <a:t>•  Found + fixed a subtle leak: Gang_Affiliated is missing for exactly the women — the foundation model read that missingness as gender (now mode-filled, regression-tested, audit script)</a:t>
+            </a:r>
+          </a:p>
+          <a:p>
+            <a:pPr>
+              <a:spcAft>
+                <a:spcPts val="1200"/>
+              </a:spcAft>
+              <a:defRPr sz="1800">
                 <a:solidFill>
                   <a:srgbClr val="FFFFFF"/>
                 </a:solidFill>
@@ -8853,7 +8869,7 @@
               </a:defRPr>
             </a:pPr>
             <a:r>
-              <a:t>+$2.4M</a:t>
+              <a:t>+$2.5M</a:t>
             </a:r>
           </a:p>
         </p:txBody>
@@ -9243,7 +9259,7 @@
               </a:defRPr>
             </a:pPr>
             <a:r>
-              <a:t>0.7338</a:t>
+              <a:t>0.7328</a:t>
             </a:r>
           </a:p>
         </p:txBody>
@@ -9360,7 +9376,7 @@
               </a:defRPr>
             </a:pPr>
             <a:r>
-              <a:t>0.2038</a:t>
+              <a:t>0.2044</a:t>
             </a:r>
           </a:p>
         </p:txBody>
@@ -10233,7 +10249,7 @@
               </a:defRPr>
             </a:pPr>
             <a:r>
-              <a:t>$5.12M</a:t>
+              <a:t>$5.26M</a:t>
             </a:r>
           </a:p>
         </p:txBody>
@@ -10350,7 +10366,7 @@
               </a:defRPr>
             </a:pPr>
             <a:r>
-              <a:t>$2.75M</a:t>
+              <a:t>$2.79M</a:t>
             </a:r>
           </a:p>
         </p:txBody>

--- a/reports/ISAF_Recidivism_Presentation.pptx
+++ b/reports/ISAF_Recidivism_Presentation.pptx
@@ -3178,11 +3178,11 @@
               </a:defRPr>
             </a:pPr>
             <a:r>
-              <a:t>Better than the tool</a:t>
+              <a:t>Forecasting risk,</a:t>
             </a:r>
             <a:br/>
             <a:r>
-              <a:t>agencies already use</a:t>
+              <a:t>examining trade-offs</a:t>
             </a:r>
           </a:p>
         </p:txBody>
@@ -3570,7 +3570,7 @@
           </a:solidFill>
           <a:ln>
             <a:solidFill>
-              <a:srgbClr val="00B4B4"/>
+              <a:srgbClr val="D64343"/>
             </a:solidFill>
           </a:ln>
         </p:spPr>
@@ -3621,13 +3621,13 @@
             <a:pPr algn="ctr">
               <a:defRPr sz="2400" b="1">
                 <a:solidFill>
-                  <a:srgbClr val="00B4B4"/>
-                </a:solidFill>
-                <a:latin typeface="Aptos"/>
-              </a:defRPr>
-            </a:pPr>
-            <a:r>
-              <a:t>~0.035</a:t>
+                  <a:srgbClr val="D64343"/>
+                </a:solidFill>
+                <a:latin typeface="Aptos"/>
+              </a:defRPr>
+            </a:pPr>
+            <a:r>
+              <a:t>0.036</a:t>
             </a:r>
           </a:p>
         </p:txBody>
@@ -3663,7 +3663,7 @@
               </a:defRPr>
             </a:pPr>
             <a:r>
-              <a:t>SCORE DRIFT (ALL)</a:t>
+              <a:t>SCORE DRIFT · TABICL</a:t>
             </a:r>
           </a:p>
         </p:txBody>
@@ -3744,7 +3744,7 @@
               </a:defRPr>
             </a:pPr>
             <a:r>
-              <a:t>76–77%</a:t>
+              <a:t>77.0%</a:t>
             </a:r>
           </a:p>
         </p:txBody>
@@ -3780,7 +3780,7 @@
               </a:defRPr>
             </a:pPr>
             <a:r>
-              <a:t>TOP-20% OVERLAP</a:t>
+              <a:t>TABICL JACCARD</a:t>
             </a:r>
           </a:p>
         </p:txBody>
@@ -3816,7 +3816,7 @@
               </a:defRPr>
             </a:pPr>
             <a:r>
-              <a:t>All three comparably stable (8 refits each). But ~1 person in 4 changes priority status across refits — scores need governance and monitoring.</a:t>
+              <a:t>Jaccard is intersection / union, not the share of people switching. Refit sensitivity is not temporal validation.</a:t>
             </a:r>
           </a:p>
         </p:txBody>
@@ -3986,7 +3986,7 @@
               </a:defRPr>
             </a:pPr>
             <a:r>
-              <a:t>Fairness, audited where we actually deploy</a:t>
+              <a:t>Fairness at the proposed allocation rule</a:t>
             </a:r>
           </a:p>
         </p:txBody>
@@ -4036,7 +4036,7 @@
       </p:sp>
       <p:pic>
         <p:nvPicPr>
-          <p:cNvPr id="5" name="Picture 4" descr="fairness_operating_point.png"/>
+          <p:cNvPr id="5" name="Picture 4" descr="fairness_support_access.png"/>
           <p:cNvPicPr>
             <a:picLocks noChangeAspect="1"/>
           </p:cNvPicPr>
@@ -4134,7 +4134,7 @@
               </a:defRPr>
             </a:pPr>
             <a:r>
-              <a:t>0.036</a:t>
+              <a:t>0.039</a:t>
             </a:r>
           </a:p>
         </p:txBody>
@@ -4368,7 +4368,7 @@
               </a:defRPr>
             </a:pPr>
             <a:r>
-              <a:t>0.020</a:t>
+              <a:t>0.023</a:t>
             </a:r>
           </a:p>
         </p:txBody>
@@ -4440,7 +4440,7 @@
               </a:defRPr>
             </a:pPr>
             <a:r>
-              <a:t>At the top-20% deployment point, gaps are 2–4× smaller than at 0.5 — audit the point you ship.</a:t>
+              <a:t>Different operating points produce different allocations and errors. Audit the proposed policy.</a:t>
             </a:r>
           </a:p>
         </p:txBody>
@@ -4610,7 +4610,7 @@
               </a:defRPr>
             </a:pPr>
             <a:r>
-              <a:t>Our data shows both sides of the impossibility theorem</a:t>
+              <a:t>Fairness: probability scores and allocation rules</a:t>
             </a:r>
           </a:p>
         </p:txBody>
@@ -4734,7 +4734,7 @@
               </a:defRPr>
             </a:pPr>
             <a:r>
-              <a:t>RACE — FIXABLE</a:t>
+              <a:t>SCORE CALIBRATION</a:t>
             </a:r>
           </a:p>
         </p:txBody>
@@ -4770,21 +4770,17 @@
               </a:defRPr>
             </a:pPr>
             <a:r>
-              <a:t>Base rates near-equal</a:t>
-            </a:r>
-            <a:br/>
-            <a:r>
-              <a:t>(0.582 vs 0.564)</a:t>
+              <a:t>Do probabilities match observed rates?</a:t>
             </a:r>
             <a:br/>
             <a:br/>
             <a:r>
-              <a:t>Calibration + equal error jointly achievable</a:t>
+              <a:t>Report group calibration and uncertainty</a:t>
             </a:r>
             <a:br/>
             <a:br/>
             <a:r>
-              <a:t>FPR gap is a model property → group thresholds drive it to ~0</a:t>
+              <a:t>Changing decision thresholds leaves probabilities unchanged</a:t>
             </a:r>
           </a:p>
         </p:txBody>
@@ -4865,7 +4861,7 @@
               </a:defRPr>
             </a:pPr>
             <a:r>
-              <a:t>GENDER — BINDS</a:t>
+              <a:t>ALLOCATION ERRORS</a:t>
             </a:r>
           </a:p>
         </p:txBody>
@@ -4901,21 +4897,17 @@
               </a:defRPr>
             </a:pPr>
             <a:r>
-              <a:t>Base rates differ 13.7 pts</a:t>
-            </a:r>
-            <a:br/>
-            <a:r>
-              <a:t>(0.591 vs 0.454)</a:t>
+              <a:t>FPR, TPR and selection rates depend on policy</a:t>
             </a:r>
             <a:br/>
             <a:br/>
             <a:r>
-              <a:t>Theorem binds: cannot equalize both</a:t>
+              <a:t>Equal FPR alone is not equalized odds</a:t>
             </a:r>
             <a:br/>
             <a:br/>
             <a:r>
-              <a:t>Equalizing gender FPR decalibrates women — a choice we surface, not hide</a:t>
+              <a:t>Our threshold frontier uses evaluation labels: illustrative, not validated</a:t>
             </a:r>
           </a:p>
         </p:txBody>
@@ -5150,7 +5142,7 @@
         <p:spPr>
           <a:xfrm>
             <a:off x="502920" y="1600200"/>
-            <a:ext cx="11155680" cy="4049941"/>
+            <a:ext cx="11155680" cy="4030062"/>
           </a:xfrm>
           <a:prstGeom prst="rect">
             <a:avLst/>
@@ -5422,8 +5414,8 @@
         </p:blipFill>
         <p:spPr>
           <a:xfrm>
-            <a:off x="2011680" y="1481328"/>
-            <a:ext cx="8138160" cy="6081764"/>
+            <a:off x="2881094" y="1481328"/>
+            <a:ext cx="6399331" cy="4782312"/>
           </a:xfrm>
           <a:prstGeom prst="rect">
             <a:avLst/>
@@ -5595,7 +5587,7 @@
               </a:defRPr>
             </a:pPr>
             <a:r>
-              <a:t>Deploy XGBoost; challenger logistic; TabICL for small agencies</a:t>
+              <a:t>Pilot XGBoost; retain logistic as a transparent challenger</a:t>
             </a:r>
           </a:p>
         </p:txBody>
@@ -5755,22 +5747,22 @@
               </a:defRPr>
             </a:pPr>
             <a:r>
-              <a:t>Best calibration + net value</a:t>
+              <a:t>Competitive probability loss</a:t>
             </a:r>
             <a:br/>
             <a:br/>
             <a:r>
-              <a:t>Smallest gender FPR gap</a:t>
+              <a:t>Audit subgroup errors</a:t>
             </a:r>
             <a:br/>
             <a:br/>
             <a:r>
-              <a:t>SHAP-explainable</a:t>
+              <a:t>SHAP explanations available</a:t>
             </a:r>
             <a:br/>
             <a:br/>
             <a:r>
-              <a:t>35× faster than the TFM</a:t>
+              <a:t>Low inference cost</a:t>
             </a:r>
           </a:p>
         </p:txBody>
@@ -7089,7 +7081,7 @@
               </a:defRPr>
             </a:pPr>
             <a:r>
-              <a:t>A clean test set and a strict time boundary</a:t>
+              <a:t>Original split, with explicit validation limits</a:t>
             </a:r>
           </a:p>
         </p:txBody>
@@ -7366,7 +7358,7 @@
               </a:defRPr>
             </a:pPr>
             <a:r>
-              <a:t>UNTOUCHED TEST</a:t>
+              <a:t>EVALUATION</a:t>
             </a:r>
           </a:p>
         </p:txBody>
@@ -7613,8 +7605,8 @@
         </p:nvSpPr>
         <p:spPr>
           <a:xfrm>
-            <a:off x="731520" y="3246120"/>
-            <a:ext cx="10698480" cy="2468880"/>
+            <a:off x="731520" y="3310128"/>
+            <a:ext cx="10698480" cy="2423160"/>
           </a:xfrm>
           <a:prstGeom prst="rect">
             <a:avLst/>
@@ -7639,7 +7631,7 @@
               </a:defRPr>
             </a:pPr>
             <a:r>
-              <a:t>•  Post-release violations, tests, programs and employment excluded to prevent leakage</a:t>
+              <a:t>•  Post-release variables excluded; race, gender and geography retained only for audit</a:t>
             </a:r>
           </a:p>
           <a:p>
@@ -7655,7 +7647,7 @@
               </a:defRPr>
             </a:pPr>
             <a:r>
-              <a:t>•  Race, gender and residence geography excluded from scoring; kept only in the audit layer</a:t>
+              <a:t>•  Found and fixed a representation leak: missing gang affiliation exactly marked women; mode-fill plus a regression audit now blocks it</a:t>
             </a:r>
           </a:p>
           <a:p>
@@ -7671,23 +7663,7 @@
               </a:defRPr>
             </a:pPr>
             <a:r>
-              <a:t>•  Found + fixed a subtle leak: Gang_Affiliated is missing for exactly the women — the foundation model read that missingness as gender (now mode-filled, regression-tested, audit script)</a:t>
-            </a:r>
-          </a:p>
-          <a:p>
-            <a:pPr>
-              <a:spcAft>
-                <a:spcPts val="1200"/>
-              </a:spcAft>
-              <a:defRPr sz="1800">
-                <a:solidFill>
-                  <a:srgbClr val="FFFFFF"/>
-                </a:solidFill>
-                <a:latin typeface="Aptos"/>
-              </a:defRPr>
-            </a:pPr>
-            <a:r>
-              <a:t>•  Balanced outcome (57.8%), so no resampling; official NIJ split preserves an honest evaluation</a:t>
+              <a:t>•  Evaluation data were repeatedly inspected during development; fresh validation is still needed</a:t>
             </a:r>
           </a:p>
         </p:txBody>
@@ -8022,7 +7998,7 @@
             <a:br/>
             <a:br/>
             <a:r>
-              <a:t>Regularized linear score</a:t>
+              <a:t>CV-tuned L1, C=0.2154</a:t>
             </a:r>
             <a:br/>
             <a:br/>
@@ -8276,12 +8252,12 @@
             <a:br/>
             <a:br/>
             <a:r>
-              <a:t>Pretrained in-context transformer</a:t>
+              <a:t>16-member GPU ensemble</a:t>
             </a:r>
             <a:br/>
             <a:br/>
             <a:r>
-              <a:t>No training, no native explanation</a:t>
+              <a:t>Training-only size sweep; no native attribution implemented</a:t>
             </a:r>
           </a:p>
         </p:txBody>
@@ -8487,7 +8463,7 @@
               </a:defRPr>
             </a:pPr>
             <a:r>
-              <a:t>Is any of this better than today's tool?</a:t>
+              <a:t>Comparison with the historical recorded score</a:t>
             </a:r>
           </a:p>
         </p:txBody>
@@ -8869,7 +8845,7 @@
               </a:defRPr>
             </a:pPr>
             <a:r>
-              <a:t>+$2.5M</a:t>
+              <a:t>+$2.4M</a:t>
             </a:r>
           </a:p>
         </p:txBody>
@@ -8941,7 +8917,7 @@
               </a:defRPr>
             </a:pPr>
             <a:r>
-              <a:t>The existing 1–10 actuarial score is barely better than a coin flip at ranking. Any model nearly doubles net value.</a:t>
+              <a:t>This historical comparison does not establish superiority to current agency products. Dollar gains are scenarios.</a:t>
             </a:r>
           </a:p>
         </p:txBody>
@@ -9111,7 +9087,7 @@
               </a:defRPr>
             </a:pPr>
             <a:r>
-              <a:t>Among the three: a near-tie, XGBoost calibrates best</a:t>
+              <a:t>Compare ranking, probability loss and calibration</a:t>
             </a:r>
           </a:p>
         </p:txBody>
@@ -9295,7 +9271,7 @@
               </a:defRPr>
             </a:pPr>
             <a:r>
-              <a:t>BEST AUC · TABICL</a:t>
+              <a:t>AUC · TABICL</a:t>
             </a:r>
           </a:p>
         </p:txBody>
@@ -9412,7 +9388,7 @@
               </a:defRPr>
             </a:pPr>
             <a:r>
-              <a:t>BEST BRIER · TABICL</a:t>
+              <a:t>BRIER · TABICL</a:t>
             </a:r>
           </a:p>
         </p:txBody>
@@ -9493,7 +9469,7 @@
               </a:defRPr>
             </a:pPr>
             <a:r>
-              <a:t>0.0109</a:t>
+              <a:t>0.0112</a:t>
             </a:r>
           </a:p>
         </p:txBody>
@@ -9529,7 +9505,7 @@
               </a:defRPr>
             </a:pPr>
             <a:r>
-              <a:t>BEST ECE · XGBOOST</a:t>
+              <a:t>ECE · XGBOOST</a:t>
             </a:r>
           </a:p>
         </p:txBody>
@@ -9565,7 +9541,7 @@
               </a:defRPr>
             </a:pPr>
             <a:r>
-              <a:t>Bootstrap 95% intervals overlap — the ranking among the three is not decisive.</a:t>
+              <a:t>Paired bootstrap compares differences directly; see paired_comparisons.csv. Results remain exploratory.</a:t>
             </a:r>
           </a:p>
         </p:txBody>
@@ -9838,7 +9814,7 @@
               </a:defRPr>
             </a:pPr>
             <a:r>
-              <a:t>TabICLv2 leads on small data (small county); XGBoost catches up as data grows (large state). No crossover — but the gap closes to +0.004 at full data.</a:t>
+              <a:t>Subsamples of one Georgia cohort test sample-size sensitivity; they do not validate transfer to other agencies.</a:t>
             </a:r>
           </a:p>
         </p:txBody>
@@ -10249,7 +10225,7 @@
               </a:defRPr>
             </a:pPr>
             <a:r>
-              <a:t>$5.26M</a:t>
+              <a:t>$5.17M</a:t>
             </a:r>
           </a:p>
         </p:txBody>
@@ -10366,7 +10342,7 @@
               </a:defRPr>
             </a:pPr>
             <a:r>
-              <a:t>$2.79M</a:t>
+              <a:t>$2.73M</a:t>
             </a:r>
           </a:p>
         </p:txBody>
@@ -10760,7 +10736,7 @@
               </a:defRPr>
             </a:pPr>
             <a:r>
-              <a:t>Every prediction, and the performance, explained</a:t>
+              <a:t>Prediction explanations and their limits</a:t>
             </a:r>
           </a:p>
         </p:txBody>
@@ -10825,7 +10801,7 @@
         <p:spPr>
           <a:xfrm>
             <a:off x="365760" y="1554480"/>
-            <a:ext cx="7589520" cy="2871452"/>
+            <a:ext cx="7589520" cy="2869645"/>
           </a:xfrm>
           <a:prstGeom prst="rect">
             <a:avLst/>
@@ -10954,7 +10930,7 @@
             <a:br/>
             <a:br/>
             <a:r>
-              <a:t>Global surrogate R²=0.61</a:t>
+              <a:t>Global surrogate: imperfect fidelity</a:t>
             </a:r>
             <a:br/>
             <a:br/>

--- a/reports/ISAF_Recidivism_Presentation.pptx
+++ b/reports/ISAF_Recidivism_Presentation.pptx
@@ -4051,7 +4051,7 @@
         <p:spPr>
           <a:xfrm>
             <a:off x="365760" y="1554480"/>
-            <a:ext cx="7772400" cy="2809534"/>
+            <a:ext cx="7772400" cy="4216673"/>
           </a:xfrm>
           <a:prstGeom prst="rect">
             <a:avLst/>
@@ -5414,8 +5414,8 @@
         </p:blipFill>
         <p:spPr>
           <a:xfrm>
-            <a:off x="2881094" y="1481328"/>
-            <a:ext cx="6399331" cy="4782312"/>
+            <a:off x="2883596" y="1481328"/>
+            <a:ext cx="6394327" cy="4782312"/>
           </a:xfrm>
           <a:prstGeom prst="rect">
             <a:avLst/>

--- a/reports/ISAF_Recidivism_Presentation.pptx
+++ b/reports/ISAF_Recidivism_Presentation.pptx
@@ -21,6 +21,7 @@
     <p:sldId id="269" r:id="rId20"/>
     <p:sldId id="270" r:id="rId21"/>
     <p:sldId id="271" r:id="rId22"/>
+    <p:sldId id="272" r:id="rId23"/>
   </p:sldIdLst>
   <p:sldSz cx="12191695" cy="6858000" type="screen4x3"/>
   <p:notesSz cx="6858000" cy="9144000"/>
@@ -4077,7 +4078,7 @@
           </a:solidFill>
           <a:ln>
             <a:solidFill>
-              <a:srgbClr val="00B4B4"/>
+              <a:srgbClr val="D64343"/>
             </a:solidFill>
           </a:ln>
         </p:spPr>
@@ -4128,13 +4129,13 @@
             <a:pPr algn="ctr">
               <a:defRPr sz="2400" b="1">
                 <a:solidFill>
-                  <a:srgbClr val="00B4B4"/>
-                </a:solidFill>
-                <a:latin typeface="Aptos"/>
-              </a:defRPr>
-            </a:pPr>
-            <a:r>
-              <a:t>0.039</a:t>
+                  <a:srgbClr val="D64343"/>
+                </a:solidFill>
+                <a:latin typeface="Aptos"/>
+              </a:defRPr>
+            </a:pPr>
+            <a:r>
+              <a:t>-0.10 to -0.12</a:t>
             </a:r>
           </a:p>
         </p:txBody>
@@ -4170,14 +4171,50 @@
               </a:defRPr>
             </a:pPr>
             <a:r>
-              <a:t>GENDER FPR · XGB</a:t>
-            </a:r>
-          </a:p>
-        </p:txBody>
-      </p:sp>
-      <p:sp>
-        <p:nvSpPr>
-          <p:cNvPr id="9" name="Rounded Rectangle 8"/>
+              <a:t>GENDER FNR GAP (M − F)</a:t>
+            </a:r>
+          </a:p>
+        </p:txBody>
+      </p:sp>
+      <p:sp>
+        <p:nvSpPr>
+          <p:cNvPr id="9" name="TextBox 8"/>
+          <p:cNvSpPr txBox="1"/>
+          <p:nvPr/>
+        </p:nvSpPr>
+        <p:spPr>
+          <a:xfrm>
+            <a:off x="8659367" y="2706624"/>
+            <a:ext cx="2194560" cy="164592"/>
+          </a:xfrm>
+          <a:prstGeom prst="rect">
+            <a:avLst/>
+          </a:prstGeom>
+          <a:noFill/>
+        </p:spPr>
+        <p:txBody>
+          <a:bodyPr wrap="square" anchor="t">
+            <a:spAutoFit/>
+          </a:bodyPr>
+          <a:lstStyle/>
+          <a:p>
+            <a:pPr algn="ctr">
+              <a:defRPr sz="800" b="0">
+                <a:solidFill>
+                  <a:srgbClr val="F0F4F8"/>
+                </a:solidFill>
+                <a:latin typeface="Aptos"/>
+              </a:defRPr>
+            </a:pPr>
+            <a:r>
+              <a:t>women miss support more · all significant</a:t>
+            </a:r>
+          </a:p>
+        </p:txBody>
+      </p:sp>
+      <p:sp>
+        <p:nvSpPr>
+          <p:cNvPr id="10" name="Rounded Rectangle 9"/>
           <p:cNvSpPr/>
           <p:nvPr/>
         </p:nvSpPr>
@@ -4194,7 +4231,7 @@
           </a:solidFill>
           <a:ln>
             <a:solidFill>
-              <a:srgbClr val="D64343"/>
+              <a:srgbClr val="00B4B4"/>
             </a:solidFill>
           </a:ln>
         </p:spPr>
@@ -4222,7 +4259,7 @@
       </p:sp>
       <p:sp>
         <p:nvSpPr>
-          <p:cNvPr id="10" name="TextBox 9"/>
+          <p:cNvPr id="11" name="TextBox 10"/>
           <p:cNvSpPr txBox="1"/>
           <p:nvPr/>
         </p:nvSpPr>
@@ -4245,20 +4282,20 @@
             <a:pPr algn="ctr">
               <a:defRPr sz="2400" b="1">
                 <a:solidFill>
-                  <a:srgbClr val="D64343"/>
-                </a:solidFill>
-                <a:latin typeface="Aptos"/>
-              </a:defRPr>
-            </a:pPr>
-            <a:r>
-              <a:t>0.041</a:t>
-            </a:r>
-          </a:p>
-        </p:txBody>
-      </p:sp>
-      <p:sp>
-        <p:nvSpPr>
-          <p:cNvPr id="11" name="TextBox 10"/>
+                  <a:srgbClr val="00B4B4"/>
+                </a:solidFill>
+                <a:latin typeface="Aptos"/>
+              </a:defRPr>
+            </a:pPr>
+            <a:r>
+              <a:t>3 / 3 models</a:t>
+            </a:r>
+          </a:p>
+        </p:txBody>
+      </p:sp>
+      <p:sp>
+        <p:nvSpPr>
+          <p:cNvPr id="12" name="TextBox 11"/>
           <p:cNvSpPr txBox="1"/>
           <p:nvPr/>
         </p:nvSpPr>
@@ -4287,14 +4324,50 @@
               </a:defRPr>
             </a:pPr>
             <a:r>
-              <a:t>GENDER FPR · TABICL</a:t>
-            </a:r>
-          </a:p>
-        </p:txBody>
-      </p:sp>
-      <p:sp>
-        <p:nvSpPr>
-          <p:cNvPr id="12" name="Rounded Rectangle 11"/>
+              <a:t>RACE: EQUIVALENT ±5 PTS</a:t>
+            </a:r>
+          </a:p>
+        </p:txBody>
+      </p:sp>
+      <p:sp>
+        <p:nvSpPr>
+          <p:cNvPr id="13" name="TextBox 12"/>
+          <p:cNvSpPr txBox="1"/>
+          <p:nvPr/>
+        </p:nvSpPr>
+        <p:spPr>
+          <a:xfrm>
+            <a:off x="8659367" y="4169664"/>
+            <a:ext cx="2194560" cy="164592"/>
+          </a:xfrm>
+          <a:prstGeom prst="rect">
+            <a:avLst/>
+          </a:prstGeom>
+          <a:noFill/>
+        </p:spPr>
+        <p:txBody>
+          <a:bodyPr wrap="square" anchor="t">
+            <a:spAutoFit/>
+          </a:bodyPr>
+          <a:lstStyle/>
+          <a:p>
+            <a:pPr algn="ctr">
+              <a:defRPr sz="800" b="0">
+                <a:solidFill>
+                  <a:srgbClr val="F0F4F8"/>
+                </a:solidFill>
+                <a:latin typeface="Aptos"/>
+              </a:defRPr>
+            </a:pPr>
+            <a:r>
+              <a:t>TOST on selection, FNR, FPR</a:t>
+            </a:r>
+          </a:p>
+        </p:txBody>
+      </p:sp>
+      <p:sp>
+        <p:nvSpPr>
+          <p:cNvPr id="14" name="Rounded Rectangle 13"/>
           <p:cNvSpPr/>
           <p:nvPr/>
         </p:nvSpPr>
@@ -4339,7 +4412,7 @@
       </p:sp>
       <p:sp>
         <p:nvSpPr>
-          <p:cNvPr id="13" name="TextBox 12"/>
+          <p:cNvPr id="15" name="TextBox 14"/>
           <p:cNvSpPr txBox="1"/>
           <p:nvPr/>
         </p:nvSpPr>
@@ -4368,14 +4441,14 @@
               </a:defRPr>
             </a:pPr>
             <a:r>
-              <a:t>0.023</a:t>
-            </a:r>
-          </a:p>
-        </p:txBody>
-      </p:sp>
-      <p:sp>
-        <p:nvSpPr>
-          <p:cNvPr id="14" name="TextBox 13"/>
+              <a:t>-0.23 to -0.24</a:t>
+            </a:r>
+          </a:p>
+        </p:txBody>
+      </p:sp>
+      <p:sp>
+        <p:nvSpPr>
+          <p:cNvPr id="16" name="TextBox 15"/>
           <p:cNvSpPr txBox="1"/>
           <p:nvPr/>
         </p:nvSpPr>
@@ -4404,14 +4477,50 @@
               </a:defRPr>
             </a:pPr>
             <a:r>
-              <a:t>RACE FPR · XGB</a:t>
-            </a:r>
-          </a:p>
-        </p:txBody>
-      </p:sp>
-      <p:sp>
-        <p:nvSpPr>
-          <p:cNvPr id="15" name="TextBox 14"/>
+              <a:t>AGE FNR GAP (&lt;33 − 33+)</a:t>
+            </a:r>
+          </a:p>
+        </p:txBody>
+      </p:sp>
+      <p:sp>
+        <p:nvSpPr>
+          <p:cNvPr id="17" name="TextBox 16"/>
+          <p:cNvSpPr txBox="1"/>
+          <p:nvPr/>
+        </p:nvSpPr>
+        <p:spPr>
+          <a:xfrm>
+            <a:off x="8659367" y="5632704"/>
+            <a:ext cx="2194560" cy="164592"/>
+          </a:xfrm>
+          <a:prstGeom prst="rect">
+            <a:avLst/>
+          </a:prstGeom>
+          <a:noFill/>
+        </p:spPr>
+        <p:txBody>
+          <a:bodyPr wrap="square" anchor="t">
+            <a:spAutoFit/>
+          </a:bodyPr>
+          <a:lstStyle/>
+          <a:p>
+            <a:pPr algn="ctr">
+              <a:defRPr sz="800" b="0">
+                <a:solidFill>
+                  <a:srgbClr val="F0F4F8"/>
+                </a:solidFill>
+                <a:latin typeface="Aptos"/>
+              </a:defRPr>
+            </a:pPr>
+            <a:r>
+              <a:t>age is an input: needs a stated justification</a:t>
+            </a:r>
+          </a:p>
+        </p:txBody>
+      </p:sp>
+      <p:sp>
+        <p:nvSpPr>
+          <p:cNvPr id="18" name="TextBox 17"/>
           <p:cNvSpPr txBox="1"/>
           <p:nvPr/>
         </p:nvSpPr>
@@ -4440,14 +4549,14 @@
               </a:defRPr>
             </a:pPr>
             <a:r>
-              <a:t>Different operating points produce different allocations and errors. Audit the proposed policy.</a:t>
-            </a:r>
-          </a:p>
-        </p:txBody>
-      </p:sp>
-      <p:sp>
-        <p:nvSpPr>
-          <p:cNvPr id="16" name="TextBox 15"/>
+              <a:t>Selection = support offered, so the harm is a missed offer: FNR is primary. Not significant ≠ fair; we test equivalence.</a:t>
+            </a:r>
+          </a:p>
+        </p:txBody>
+      </p:sp>
+      <p:sp>
+        <p:nvSpPr>
+          <p:cNvPr id="19" name="TextBox 18"/>
           <p:cNvSpPr txBox="1"/>
           <p:nvPr/>
         </p:nvSpPr>
@@ -4483,7 +4592,7 @@
       </p:sp>
       <p:sp>
         <p:nvSpPr>
-          <p:cNvPr id="17" name="TextBox 16"/>
+          <p:cNvPr id="20" name="TextBox 19"/>
           <p:cNvSpPr txBox="1"/>
           <p:nvPr/>
         </p:nvSpPr>
@@ -4770,12 +4879,12 @@
               </a:defRPr>
             </a:pPr>
             <a:r>
-              <a:t>Do probabilities match observed rates?</a:t>
+              <a:t>Women are over-predicted by every model: mean score 0.52 vs observed 0.45</a:t>
             </a:r>
             <a:br/>
             <a:br/>
             <a:r>
-              <a:t>Report group calibration and uncertainty</a:t>
+              <a:t>Yet they are selected less at the top 20%</a:t>
             </a:r>
             <a:br/>
             <a:br/>
@@ -5041,7 +5150,7 @@
               </a:defRPr>
             </a:pPr>
             <a:r>
-              <a:t>12 · PROCESS</a:t>
+              <a:t>12 · FAIRNESS INTERPRETABILITY (FPDP)</a:t>
             </a:r>
           </a:p>
         </p:txBody>
@@ -5077,7 +5186,7 @@
               </a:defRPr>
             </a:pPr>
             <a:r>
-              <a:t>How we got here: what we tried, where we landed</a:t>
+              <a:t>Where does the gender gap come from?</a:t>
             </a:r>
           </a:p>
         </p:txBody>
@@ -5127,7 +5236,7 @@
       </p:sp>
       <p:pic>
         <p:nvPicPr>
-          <p:cNvPr id="5" name="Picture 4" descr="improvement_journey.png"/>
+          <p:cNvPr id="5" name="Picture 4" descr="fpdp_gender.png"/>
           <p:cNvPicPr>
             <a:picLocks noChangeAspect="1"/>
           </p:cNvPicPr>
@@ -5141,8 +5250,8 @@
         </p:blipFill>
         <p:spPr>
           <a:xfrm>
-            <a:off x="502920" y="1600200"/>
-            <a:ext cx="11155680" cy="4030062"/>
+            <a:off x="320040" y="1508760"/>
+            <a:ext cx="7680960" cy="4743933"/>
           </a:xfrm>
           <a:prstGeom prst="rect">
             <a:avLst/>
@@ -5151,7 +5260,139 @@
       </p:pic>
       <p:sp>
         <p:nvSpPr>
-          <p:cNvPr id="6" name="TextBox 5"/>
+          <p:cNvPr id="6" name="Rounded Rectangle 5"/>
+          <p:cNvSpPr/>
+          <p:nvPr/>
+        </p:nvSpPr>
+        <p:spPr>
+          <a:xfrm>
+            <a:off x="8229600" y="1508760"/>
+            <a:ext cx="3611880" cy="4572000"/>
+          </a:xfrm>
+          <a:prstGeom prst="roundRect">
+            <a:avLst/>
+          </a:prstGeom>
+          <a:solidFill>
+            <a:srgbClr val="143058"/>
+          </a:solidFill>
+          <a:ln>
+            <a:solidFill>
+              <a:srgbClr val="D64343"/>
+            </a:solidFill>
+          </a:ln>
+        </p:spPr>
+        <p:style>
+          <a:lnRef idx="1">
+            <a:schemeClr val="accent1"/>
+          </a:lnRef>
+          <a:fillRef idx="3">
+            <a:schemeClr val="accent1"/>
+          </a:fillRef>
+          <a:effectRef idx="2">
+            <a:schemeClr val="accent1"/>
+          </a:effectRef>
+          <a:fontRef idx="minor">
+            <a:schemeClr val="lt1"/>
+          </a:fontRef>
+        </p:style>
+        <p:txBody>
+          <a:bodyPr rtlCol="0" anchor="ctr"/>
+          <a:lstStyle/>
+          <a:p>
+            <a:pPr algn="ctr"/>
+          </a:p>
+        </p:txBody>
+      </p:sp>
+      <p:sp>
+        <p:nvSpPr>
+          <p:cNvPr id="7" name="TextBox 6"/>
+          <p:cNvSpPr txBox="1"/>
+          <p:nvPr/>
+        </p:nvSpPr>
+        <p:spPr>
+          <a:xfrm>
+            <a:off x="8458200" y="1783080"/>
+            <a:ext cx="3154680" cy="365760"/>
+          </a:xfrm>
+          <a:prstGeom prst="rect">
+            <a:avLst/>
+          </a:prstGeom>
+          <a:noFill/>
+        </p:spPr>
+        <p:txBody>
+          <a:bodyPr wrap="square" anchor="t">
+            <a:spAutoFit/>
+          </a:bodyPr>
+          <a:lstStyle/>
+          <a:p>
+            <a:pPr algn="ctr">
+              <a:defRPr sz="2000" b="1">
+                <a:solidFill>
+                  <a:srgbClr val="D64343"/>
+                </a:solidFill>
+                <a:latin typeface="Aptos"/>
+              </a:defRPr>
+            </a:pPr>
+            <a:r>
+              <a:t>CANDIDATE: GANG</a:t>
+            </a:r>
+          </a:p>
+        </p:txBody>
+      </p:sp>
+      <p:sp>
+        <p:nvSpPr>
+          <p:cNvPr id="8" name="TextBox 7"/>
+          <p:cNvSpPr txBox="1"/>
+          <p:nvPr/>
+        </p:nvSpPr>
+        <p:spPr>
+          <a:xfrm>
+            <a:off x="8549640" y="2496312"/>
+            <a:ext cx="2971800" cy="3337560"/>
+          </a:xfrm>
+          <a:prstGeom prst="rect">
+            <a:avLst/>
+          </a:prstGeom>
+          <a:noFill/>
+        </p:spPr>
+        <p:txBody>
+          <a:bodyPr wrap="square" anchor="t">
+            <a:spAutoFit/>
+          </a:bodyPr>
+          <a:lstStyle/>
+          <a:p>
+            <a:pPr algn="ctr">
+              <a:defRPr sz="1500" b="0">
+                <a:solidFill>
+                  <a:srgbClr val="F0F4F8"/>
+                </a:solidFill>
+                <a:latin typeface="Aptos"/>
+              </a:defRPr>
+            </a:pPr>
+            <a:r>
+              <a:t>Never recorded for women; imputed as "No"</a:t>
+            </a:r>
+            <a:br/>
+            <a:br/>
+            <a:r>
+              <a:t>Drop + re-estimate: equal-opportunity p 0.000 → 0.995 (logistic)</a:t>
+            </a:r>
+            <a:br/>
+            <a:br/>
+            <a:r>
+              <a:t>AUC cost ≈ 0.014, ~6× the XGB − logistic gap</a:t>
+            </a:r>
+            <a:br/>
+            <a:br/>
+            <a:r>
+              <a:t>Statistical parity still rejected</a:t>
+            </a:r>
+          </a:p>
+        </p:txBody>
+      </p:sp>
+      <p:sp>
+        <p:nvSpPr>
+          <p:cNvPr id="9" name="TextBox 8"/>
           <p:cNvSpPr txBox="1"/>
           <p:nvPr/>
         </p:nvSpPr>
@@ -5180,14 +5421,14 @@
               </a:defRPr>
             </a:pPr>
             <a:r>
-              <a:t>Full log in JOURNEY.md — every step measured, including the attempts we rejected.</a:t>
-            </a:r>
-          </a:p>
-        </p:txBody>
-      </p:sp>
-      <p:sp>
-        <p:nvSpPr>
-          <p:cNvPr id="7" name="TextBox 6"/>
+              <a:t>FPDP identifies candidate variables (association, not causation). Mitigation is evaluated on the same labels: illustrative.</a:t>
+            </a:r>
+          </a:p>
+        </p:txBody>
+      </p:sp>
+      <p:sp>
+        <p:nvSpPr>
+          <p:cNvPr id="10" name="TextBox 9"/>
           <p:cNvSpPr txBox="1"/>
           <p:nvPr/>
         </p:nvSpPr>
@@ -5223,7 +5464,7 @@
       </p:sp>
       <p:sp>
         <p:nvSpPr>
-          <p:cNvPr id="8" name="TextBox 7"/>
+          <p:cNvPr id="11" name="TextBox 10"/>
           <p:cNvSpPr txBox="1"/>
           <p:nvPr/>
         </p:nvSpPr>
@@ -5314,7 +5555,7 @@
               </a:defRPr>
             </a:pPr>
             <a:r>
-              <a:t>13 · TRADE-OFFS ACROSS FOUR DIMENSIONS</a:t>
+              <a:t>13 · PROCESS</a:t>
             </a:r>
           </a:p>
         </p:txBody>
@@ -5350,7 +5591,7 @@
               </a:defRPr>
             </a:pPr>
             <a:r>
-              <a:t>Which model should the client deploy?</a:t>
+              <a:t>How we got here: what we tried, where we landed</a:t>
             </a:r>
           </a:p>
         </p:txBody>
@@ -5400,7 +5641,7 @@
       </p:sp>
       <p:pic>
         <p:nvPicPr>
-          <p:cNvPr id="5" name="Picture 4" descr="tradeoff_matrix.png"/>
+          <p:cNvPr id="5" name="Picture 4" descr="improvement_journey.png"/>
           <p:cNvPicPr>
             <a:picLocks noChangeAspect="1"/>
           </p:cNvPicPr>
@@ -5414,8 +5655,8 @@
         </p:blipFill>
         <p:spPr>
           <a:xfrm>
-            <a:off x="2883596" y="1481328"/>
-            <a:ext cx="6394327" cy="4782312"/>
+            <a:off x="502920" y="1600200"/>
+            <a:ext cx="11155680" cy="4030062"/>
           </a:xfrm>
           <a:prstGeom prst="rect">
             <a:avLst/>
@@ -5425,6 +5666,42 @@
       <p:sp>
         <p:nvSpPr>
           <p:cNvPr id="6" name="TextBox 5"/>
+          <p:cNvSpPr txBox="1"/>
+          <p:nvPr/>
+        </p:nvSpPr>
+        <p:spPr>
+          <a:xfrm>
+            <a:off x="914400" y="6236208"/>
+            <a:ext cx="10058400" cy="274320"/>
+          </a:xfrm>
+          <a:prstGeom prst="rect">
+            <a:avLst/>
+          </a:prstGeom>
+          <a:noFill/>
+        </p:spPr>
+        <p:txBody>
+          <a:bodyPr wrap="square" anchor="t">
+            <a:spAutoFit/>
+          </a:bodyPr>
+          <a:lstStyle/>
+          <a:p>
+            <a:pPr algn="ctr">
+              <a:defRPr sz="1100" b="1">
+                <a:solidFill>
+                  <a:srgbClr val="FB8500"/>
+                </a:solidFill>
+                <a:latin typeface="Aptos"/>
+              </a:defRPr>
+            </a:pPr>
+            <a:r>
+              <a:t>Full log in JOURNEY.md — every step measured, including the attempts we rejected.</a:t>
+            </a:r>
+          </a:p>
+        </p:txBody>
+      </p:sp>
+      <p:sp>
+        <p:nvSpPr>
+          <p:cNvPr id="7" name="TextBox 6"/>
           <p:cNvSpPr txBox="1"/>
           <p:nvPr/>
         </p:nvSpPr>
@@ -5460,7 +5737,7 @@
       </p:sp>
       <p:sp>
         <p:nvSpPr>
-          <p:cNvPr id="7" name="TextBox 6"/>
+          <p:cNvPr id="8" name="TextBox 7"/>
           <p:cNvSpPr txBox="1"/>
           <p:nvPr/>
         </p:nvSpPr>
@@ -5551,7 +5828,7 @@
               </a:defRPr>
             </a:pPr>
             <a:r>
-              <a:t>14 · RECOMMENDATION</a:t>
+              <a:t>14 · TRADE-OFFS ACROSS FOUR DIMENSIONS</a:t>
             </a:r>
           </a:p>
         </p:txBody>
@@ -5587,7 +5864,7 @@
               </a:defRPr>
             </a:pPr>
             <a:r>
-              <a:t>Pilot XGBoost; retain logistic as a transparent challenger</a:t>
+              <a:t>Which model should the client deploy?</a:t>
             </a:r>
           </a:p>
         </p:txBody>
@@ -5635,273 +5912,33 @@
           </a:p>
         </p:txBody>
       </p:sp>
-      <p:sp>
-        <p:nvSpPr>
-          <p:cNvPr id="5" name="Rounded Rectangle 4"/>
-          <p:cNvSpPr/>
-          <p:nvPr/>
-        </p:nvSpPr>
-        <p:spPr>
-          <a:xfrm>
-            <a:off x="731520" y="1645920"/>
-            <a:ext cx="5257800" cy="4251960"/>
-          </a:xfrm>
-          <a:prstGeom prst="roundRect">
-            <a:avLst/>
-          </a:prstGeom>
-          <a:solidFill>
-            <a:srgbClr val="143058"/>
-          </a:solidFill>
-          <a:ln>
-            <a:solidFill>
-              <a:srgbClr val="00B4B4"/>
-            </a:solidFill>
-          </a:ln>
-        </p:spPr>
-        <p:style>
-          <a:lnRef idx="1">
-            <a:schemeClr val="accent1"/>
-          </a:lnRef>
-          <a:fillRef idx="3">
-            <a:schemeClr val="accent1"/>
-          </a:fillRef>
-          <a:effectRef idx="2">
-            <a:schemeClr val="accent1"/>
-          </a:effectRef>
-          <a:fontRef idx="minor">
-            <a:schemeClr val="lt1"/>
-          </a:fontRef>
-        </p:style>
-        <p:txBody>
-          <a:bodyPr rtlCol="0" anchor="ctr"/>
-          <a:lstStyle/>
-          <a:p>
-            <a:pPr algn="ctr"/>
-          </a:p>
-        </p:txBody>
-      </p:sp>
+      <p:pic>
+        <p:nvPicPr>
+          <p:cNvPr id="5" name="Picture 4" descr="tradeoff_matrix.png"/>
+          <p:cNvPicPr>
+            <a:picLocks noChangeAspect="1"/>
+          </p:cNvPicPr>
+          <p:nvPr/>
+        </p:nvPicPr>
+        <p:blipFill>
+          <a:blip r:embed="rId2"/>
+          <a:stretch>
+            <a:fillRect/>
+          </a:stretch>
+        </p:blipFill>
+        <p:spPr>
+          <a:xfrm>
+            <a:off x="2883596" y="1481328"/>
+            <a:ext cx="6394327" cy="4782312"/>
+          </a:xfrm>
+          <a:prstGeom prst="rect">
+            <a:avLst/>
+          </a:prstGeom>
+        </p:spPr>
+      </p:pic>
       <p:sp>
         <p:nvSpPr>
           <p:cNvPr id="6" name="TextBox 5"/>
-          <p:cNvSpPr txBox="1"/>
-          <p:nvPr/>
-        </p:nvSpPr>
-        <p:spPr>
-          <a:xfrm>
-            <a:off x="960120" y="1920240"/>
-            <a:ext cx="4800600" cy="365760"/>
-          </a:xfrm>
-          <a:prstGeom prst="rect">
-            <a:avLst/>
-          </a:prstGeom>
-          <a:noFill/>
-        </p:spPr>
-        <p:txBody>
-          <a:bodyPr wrap="square" anchor="t">
-            <a:spAutoFit/>
-          </a:bodyPr>
-          <a:lstStyle/>
-          <a:p>
-            <a:pPr algn="ctr">
-              <a:defRPr sz="2000" b="1">
-                <a:solidFill>
-                  <a:srgbClr val="00B4B4"/>
-                </a:solidFill>
-                <a:latin typeface="Aptos"/>
-              </a:defRPr>
-            </a:pPr>
-            <a:r>
-              <a:t>WHY XGBOOST</a:t>
-            </a:r>
-          </a:p>
-        </p:txBody>
-      </p:sp>
-      <p:sp>
-        <p:nvSpPr>
-          <p:cNvPr id="7" name="TextBox 6"/>
-          <p:cNvSpPr txBox="1"/>
-          <p:nvPr/>
-        </p:nvSpPr>
-        <p:spPr>
-          <a:xfrm>
-            <a:off x="1051560" y="2633472"/>
-            <a:ext cx="4617720" cy="3017520"/>
-          </a:xfrm>
-          <a:prstGeom prst="rect">
-            <a:avLst/>
-          </a:prstGeom>
-          <a:noFill/>
-        </p:spPr>
-        <p:txBody>
-          <a:bodyPr wrap="square" anchor="t">
-            <a:spAutoFit/>
-          </a:bodyPr>
-          <a:lstStyle/>
-          <a:p>
-            <a:pPr algn="ctr">
-              <a:defRPr sz="1500" b="0">
-                <a:solidFill>
-                  <a:srgbClr val="F0F4F8"/>
-                </a:solidFill>
-                <a:latin typeface="Aptos"/>
-              </a:defRPr>
-            </a:pPr>
-            <a:r>
-              <a:t>Competitive probability loss</a:t>
-            </a:r>
-            <a:br/>
-            <a:br/>
-            <a:r>
-              <a:t>Audit subgroup errors</a:t>
-            </a:r>
-            <a:br/>
-            <a:br/>
-            <a:r>
-              <a:t>SHAP explanations available</a:t>
-            </a:r>
-            <a:br/>
-            <a:br/>
-            <a:r>
-              <a:t>Low inference cost</a:t>
-            </a:r>
-          </a:p>
-        </p:txBody>
-      </p:sp>
-      <p:sp>
-        <p:nvSpPr>
-          <p:cNvPr id="8" name="Rounded Rectangle 7"/>
-          <p:cNvSpPr/>
-          <p:nvPr/>
-        </p:nvSpPr>
-        <p:spPr>
-          <a:xfrm>
-            <a:off x="6217920" y="1645920"/>
-            <a:ext cx="5257800" cy="4251960"/>
-          </a:xfrm>
-          <a:prstGeom prst="roundRect">
-            <a:avLst/>
-          </a:prstGeom>
-          <a:solidFill>
-            <a:srgbClr val="143058"/>
-          </a:solidFill>
-          <a:ln>
-            <a:solidFill>
-              <a:srgbClr val="7B2CBF"/>
-            </a:solidFill>
-          </a:ln>
-        </p:spPr>
-        <p:style>
-          <a:lnRef idx="1">
-            <a:schemeClr val="accent1"/>
-          </a:lnRef>
-          <a:fillRef idx="3">
-            <a:schemeClr val="accent1"/>
-          </a:fillRef>
-          <a:effectRef idx="2">
-            <a:schemeClr val="accent1"/>
-          </a:effectRef>
-          <a:fontRef idx="minor">
-            <a:schemeClr val="lt1"/>
-          </a:fontRef>
-        </p:style>
-        <p:txBody>
-          <a:bodyPr rtlCol="0" anchor="ctr"/>
-          <a:lstStyle/>
-          <a:p>
-            <a:pPr algn="ctr"/>
-          </a:p>
-        </p:txBody>
-      </p:sp>
-      <p:sp>
-        <p:nvSpPr>
-          <p:cNvPr id="9" name="TextBox 8"/>
-          <p:cNvSpPr txBox="1"/>
-          <p:nvPr/>
-        </p:nvSpPr>
-        <p:spPr>
-          <a:xfrm>
-            <a:off x="6446520" y="1920240"/>
-            <a:ext cx="4800600" cy="365760"/>
-          </a:xfrm>
-          <a:prstGeom prst="rect">
-            <a:avLst/>
-          </a:prstGeom>
-          <a:noFill/>
-        </p:spPr>
-        <p:txBody>
-          <a:bodyPr wrap="square" anchor="t">
-            <a:spAutoFit/>
-          </a:bodyPr>
-          <a:lstStyle/>
-          <a:p>
-            <a:pPr algn="ctr">
-              <a:defRPr sz="2000" b="1">
-                <a:solidFill>
-                  <a:srgbClr val="7B2CBF"/>
-                </a:solidFill>
-                <a:latin typeface="Aptos"/>
-              </a:defRPr>
-            </a:pPr>
-            <a:r>
-              <a:t>CONDITIONS</a:t>
-            </a:r>
-          </a:p>
-        </p:txBody>
-      </p:sp>
-      <p:sp>
-        <p:nvSpPr>
-          <p:cNvPr id="10" name="TextBox 9"/>
-          <p:cNvSpPr txBox="1"/>
-          <p:nvPr/>
-        </p:nvSpPr>
-        <p:spPr>
-          <a:xfrm>
-            <a:off x="6537959" y="2633472"/>
-            <a:ext cx="4617720" cy="3017520"/>
-          </a:xfrm>
-          <a:prstGeom prst="rect">
-            <a:avLst/>
-          </a:prstGeom>
-          <a:noFill/>
-        </p:spPr>
-        <p:txBody>
-          <a:bodyPr wrap="square" anchor="t">
-            <a:spAutoFit/>
-          </a:bodyPr>
-          <a:lstStyle/>
-          <a:p>
-            <a:pPr algn="ctr">
-              <a:defRPr sz="1500" b="0">
-                <a:solidFill>
-                  <a:srgbClr val="F0F4F8"/>
-                </a:solidFill>
-                <a:latin typeface="Aptos"/>
-              </a:defRPr>
-            </a:pPr>
-            <a:r>
-              <a:t>Benefit-only allocation</a:t>
-            </a:r>
-            <a:br/>
-            <a:br/>
-            <a:r>
-              <a:t>Logistic as transparent challenger</a:t>
-            </a:r>
-            <a:br/>
-            <a:br/>
-            <a:r>
-              <a:t>Prospective shadow validation</a:t>
-            </a:r>
-            <a:br/>
-            <a:br/>
-            <a:r>
-              <a:t>Appeal route, logs, quarterly audits, stop rules</a:t>
-            </a:r>
-          </a:p>
-        </p:txBody>
-      </p:sp>
-      <p:sp>
-        <p:nvSpPr>
-          <p:cNvPr id="11" name="TextBox 10"/>
           <p:cNvSpPr txBox="1"/>
           <p:nvPr/>
         </p:nvSpPr>
@@ -5937,7 +5974,7 @@
       </p:sp>
       <p:sp>
         <p:nvSpPr>
-          <p:cNvPr id="12" name="TextBox 11"/>
+          <p:cNvPr id="7" name="TextBox 6"/>
           <p:cNvSpPr txBox="1"/>
           <p:nvPr/>
         </p:nvSpPr>
@@ -6028,7 +6065,484 @@
               </a:defRPr>
             </a:pPr>
             <a:r>
-              <a:t>15 · CLIENT EXPERIENCE</a:t>
+              <a:t>15 · RECOMMENDATION</a:t>
+            </a:r>
+          </a:p>
+        </p:txBody>
+      </p:sp>
+      <p:sp>
+        <p:nvSpPr>
+          <p:cNvPr id="3" name="TextBox 2"/>
+          <p:cNvSpPr txBox="1"/>
+          <p:nvPr/>
+        </p:nvSpPr>
+        <p:spPr>
+          <a:xfrm>
+            <a:off x="594360" y="621792"/>
+            <a:ext cx="10972800" cy="594360"/>
+          </a:xfrm>
+          <a:prstGeom prst="rect">
+            <a:avLst/>
+          </a:prstGeom>
+          <a:noFill/>
+        </p:spPr>
+        <p:txBody>
+          <a:bodyPr wrap="square" anchor="t">
+            <a:spAutoFit/>
+          </a:bodyPr>
+          <a:lstStyle/>
+          <a:p>
+            <a:pPr algn="l">
+              <a:defRPr sz="2600" b="1">
+                <a:solidFill>
+                  <a:srgbClr val="FFFFFF"/>
+                </a:solidFill>
+                <a:latin typeface="Aptos"/>
+              </a:defRPr>
+            </a:pPr>
+            <a:r>
+              <a:t>Pilot XGBoost; retain logistic as a transparent challenger</a:t>
+            </a:r>
+          </a:p>
+        </p:txBody>
+      </p:sp>
+      <p:sp>
+        <p:nvSpPr>
+          <p:cNvPr id="4" name="Rectangle 3"/>
+          <p:cNvSpPr/>
+          <p:nvPr/>
+        </p:nvSpPr>
+        <p:spPr>
+          <a:xfrm>
+            <a:off x="594360" y="1298448"/>
+            <a:ext cx="1005840" cy="50292"/>
+          </a:xfrm>
+          <a:prstGeom prst="rect">
+            <a:avLst/>
+          </a:prstGeom>
+          <a:solidFill>
+            <a:srgbClr val="FB8500"/>
+          </a:solidFill>
+          <a:ln>
+            <a:noFill/>
+          </a:ln>
+        </p:spPr>
+        <p:style>
+          <a:lnRef idx="1">
+            <a:schemeClr val="accent1"/>
+          </a:lnRef>
+          <a:fillRef idx="3">
+            <a:schemeClr val="accent1"/>
+          </a:fillRef>
+          <a:effectRef idx="2">
+            <a:schemeClr val="accent1"/>
+          </a:effectRef>
+          <a:fontRef idx="minor">
+            <a:schemeClr val="lt1"/>
+          </a:fontRef>
+        </p:style>
+        <p:txBody>
+          <a:bodyPr rtlCol="0" anchor="ctr"/>
+          <a:lstStyle/>
+          <a:p>
+            <a:pPr algn="ctr"/>
+          </a:p>
+        </p:txBody>
+      </p:sp>
+      <p:sp>
+        <p:nvSpPr>
+          <p:cNvPr id="5" name="Rounded Rectangle 4"/>
+          <p:cNvSpPr/>
+          <p:nvPr/>
+        </p:nvSpPr>
+        <p:spPr>
+          <a:xfrm>
+            <a:off x="731520" y="1645920"/>
+            <a:ext cx="5257800" cy="4251960"/>
+          </a:xfrm>
+          <a:prstGeom prst="roundRect">
+            <a:avLst/>
+          </a:prstGeom>
+          <a:solidFill>
+            <a:srgbClr val="143058"/>
+          </a:solidFill>
+          <a:ln>
+            <a:solidFill>
+              <a:srgbClr val="00B4B4"/>
+            </a:solidFill>
+          </a:ln>
+        </p:spPr>
+        <p:style>
+          <a:lnRef idx="1">
+            <a:schemeClr val="accent1"/>
+          </a:lnRef>
+          <a:fillRef idx="3">
+            <a:schemeClr val="accent1"/>
+          </a:fillRef>
+          <a:effectRef idx="2">
+            <a:schemeClr val="accent1"/>
+          </a:effectRef>
+          <a:fontRef idx="minor">
+            <a:schemeClr val="lt1"/>
+          </a:fontRef>
+        </p:style>
+        <p:txBody>
+          <a:bodyPr rtlCol="0" anchor="ctr"/>
+          <a:lstStyle/>
+          <a:p>
+            <a:pPr algn="ctr"/>
+          </a:p>
+        </p:txBody>
+      </p:sp>
+      <p:sp>
+        <p:nvSpPr>
+          <p:cNvPr id="6" name="TextBox 5"/>
+          <p:cNvSpPr txBox="1"/>
+          <p:nvPr/>
+        </p:nvSpPr>
+        <p:spPr>
+          <a:xfrm>
+            <a:off x="960120" y="1920240"/>
+            <a:ext cx="4800600" cy="365760"/>
+          </a:xfrm>
+          <a:prstGeom prst="rect">
+            <a:avLst/>
+          </a:prstGeom>
+          <a:noFill/>
+        </p:spPr>
+        <p:txBody>
+          <a:bodyPr wrap="square" anchor="t">
+            <a:spAutoFit/>
+          </a:bodyPr>
+          <a:lstStyle/>
+          <a:p>
+            <a:pPr algn="ctr">
+              <a:defRPr sz="2000" b="1">
+                <a:solidFill>
+                  <a:srgbClr val="00B4B4"/>
+                </a:solidFill>
+                <a:latin typeface="Aptos"/>
+              </a:defRPr>
+            </a:pPr>
+            <a:r>
+              <a:t>WHY XGBOOST</a:t>
+            </a:r>
+          </a:p>
+        </p:txBody>
+      </p:sp>
+      <p:sp>
+        <p:nvSpPr>
+          <p:cNvPr id="7" name="TextBox 6"/>
+          <p:cNvSpPr txBox="1"/>
+          <p:nvPr/>
+        </p:nvSpPr>
+        <p:spPr>
+          <a:xfrm>
+            <a:off x="1051560" y="2633472"/>
+            <a:ext cx="4617720" cy="3017520"/>
+          </a:xfrm>
+          <a:prstGeom prst="rect">
+            <a:avLst/>
+          </a:prstGeom>
+          <a:noFill/>
+        </p:spPr>
+        <p:txBody>
+          <a:bodyPr wrap="square" anchor="t">
+            <a:spAutoFit/>
+          </a:bodyPr>
+          <a:lstStyle/>
+          <a:p>
+            <a:pPr algn="ctr">
+              <a:defRPr sz="1500" b="0">
+                <a:solidFill>
+                  <a:srgbClr val="F0F4F8"/>
+                </a:solidFill>
+                <a:latin typeface="Aptos"/>
+              </a:defRPr>
+            </a:pPr>
+            <a:r>
+              <a:t>Competitive probability loss</a:t>
+            </a:r>
+            <a:br/>
+            <a:br/>
+            <a:r>
+              <a:t>Audit subgroup errors</a:t>
+            </a:r>
+            <a:br/>
+            <a:br/>
+            <a:r>
+              <a:t>SHAP explanations available</a:t>
+            </a:r>
+            <a:br/>
+            <a:br/>
+            <a:r>
+              <a:t>Low inference cost</a:t>
+            </a:r>
+          </a:p>
+        </p:txBody>
+      </p:sp>
+      <p:sp>
+        <p:nvSpPr>
+          <p:cNvPr id="8" name="Rounded Rectangle 7"/>
+          <p:cNvSpPr/>
+          <p:nvPr/>
+        </p:nvSpPr>
+        <p:spPr>
+          <a:xfrm>
+            <a:off x="6217920" y="1645920"/>
+            <a:ext cx="5257800" cy="4251960"/>
+          </a:xfrm>
+          <a:prstGeom prst="roundRect">
+            <a:avLst/>
+          </a:prstGeom>
+          <a:solidFill>
+            <a:srgbClr val="143058"/>
+          </a:solidFill>
+          <a:ln>
+            <a:solidFill>
+              <a:srgbClr val="7B2CBF"/>
+            </a:solidFill>
+          </a:ln>
+        </p:spPr>
+        <p:style>
+          <a:lnRef idx="1">
+            <a:schemeClr val="accent1"/>
+          </a:lnRef>
+          <a:fillRef idx="3">
+            <a:schemeClr val="accent1"/>
+          </a:fillRef>
+          <a:effectRef idx="2">
+            <a:schemeClr val="accent1"/>
+          </a:effectRef>
+          <a:fontRef idx="minor">
+            <a:schemeClr val="lt1"/>
+          </a:fontRef>
+        </p:style>
+        <p:txBody>
+          <a:bodyPr rtlCol="0" anchor="ctr"/>
+          <a:lstStyle/>
+          <a:p>
+            <a:pPr algn="ctr"/>
+          </a:p>
+        </p:txBody>
+      </p:sp>
+      <p:sp>
+        <p:nvSpPr>
+          <p:cNvPr id="9" name="TextBox 8"/>
+          <p:cNvSpPr txBox="1"/>
+          <p:nvPr/>
+        </p:nvSpPr>
+        <p:spPr>
+          <a:xfrm>
+            <a:off x="6446520" y="1920240"/>
+            <a:ext cx="4800600" cy="365760"/>
+          </a:xfrm>
+          <a:prstGeom prst="rect">
+            <a:avLst/>
+          </a:prstGeom>
+          <a:noFill/>
+        </p:spPr>
+        <p:txBody>
+          <a:bodyPr wrap="square" anchor="t">
+            <a:spAutoFit/>
+          </a:bodyPr>
+          <a:lstStyle/>
+          <a:p>
+            <a:pPr algn="ctr">
+              <a:defRPr sz="2000" b="1">
+                <a:solidFill>
+                  <a:srgbClr val="7B2CBF"/>
+                </a:solidFill>
+                <a:latin typeface="Aptos"/>
+              </a:defRPr>
+            </a:pPr>
+            <a:r>
+              <a:t>CONDITIONS</a:t>
+            </a:r>
+          </a:p>
+        </p:txBody>
+      </p:sp>
+      <p:sp>
+        <p:nvSpPr>
+          <p:cNvPr id="10" name="TextBox 9"/>
+          <p:cNvSpPr txBox="1"/>
+          <p:nvPr/>
+        </p:nvSpPr>
+        <p:spPr>
+          <a:xfrm>
+            <a:off x="6537959" y="2633472"/>
+            <a:ext cx="4617720" cy="3017520"/>
+          </a:xfrm>
+          <a:prstGeom prst="rect">
+            <a:avLst/>
+          </a:prstGeom>
+          <a:noFill/>
+        </p:spPr>
+        <p:txBody>
+          <a:bodyPr wrap="square" anchor="t">
+            <a:spAutoFit/>
+          </a:bodyPr>
+          <a:lstStyle/>
+          <a:p>
+            <a:pPr algn="ctr">
+              <a:defRPr sz="1500" b="0">
+                <a:solidFill>
+                  <a:srgbClr val="F0F4F8"/>
+                </a:solidFill>
+                <a:latin typeface="Aptos"/>
+              </a:defRPr>
+            </a:pPr>
+            <a:r>
+              <a:t>Benefit-only allocation</a:t>
+            </a:r>
+            <a:br/>
+            <a:br/>
+            <a:r>
+              <a:t>Logistic as transparent challenger</a:t>
+            </a:r>
+            <a:br/>
+            <a:br/>
+            <a:r>
+              <a:t>Prospective shadow validation</a:t>
+            </a:r>
+            <a:br/>
+            <a:br/>
+            <a:r>
+              <a:t>Appeal route, logs, quarterly audits, stop rules</a:t>
+            </a:r>
+          </a:p>
+        </p:txBody>
+      </p:sp>
+      <p:sp>
+        <p:nvSpPr>
+          <p:cNvPr id="11" name="TextBox 10"/>
+          <p:cNvSpPr txBox="1"/>
+          <p:nvPr/>
+        </p:nvSpPr>
+        <p:spPr>
+          <a:xfrm>
+            <a:off x="594360" y="6510528"/>
+            <a:ext cx="3657600" cy="164592"/>
+          </a:xfrm>
+          <a:prstGeom prst="rect">
+            <a:avLst/>
+          </a:prstGeom>
+          <a:noFill/>
+        </p:spPr>
+        <p:txBody>
+          <a:bodyPr wrap="square" anchor="t">
+            <a:spAutoFit/>
+          </a:bodyPr>
+          <a:lstStyle/>
+          <a:p>
+            <a:pPr algn="l">
+              <a:defRPr sz="800" b="0">
+                <a:solidFill>
+                  <a:srgbClr val="828FA0"/>
+                </a:solidFill>
+                <a:latin typeface="Aptos"/>
+              </a:defRPr>
+            </a:pPr>
+            <a:r>
+              <a:t>HEC Paris · ISAF · 2026</a:t>
+            </a:r>
+          </a:p>
+        </p:txBody>
+      </p:sp>
+      <p:sp>
+        <p:nvSpPr>
+          <p:cNvPr id="12" name="TextBox 11"/>
+          <p:cNvSpPr txBox="1"/>
+          <p:nvPr/>
+        </p:nvSpPr>
+        <p:spPr>
+          <a:xfrm>
+            <a:off x="11109960" y="6492240"/>
+            <a:ext cx="411480" cy="164592"/>
+          </a:xfrm>
+          <a:prstGeom prst="rect">
+            <a:avLst/>
+          </a:prstGeom>
+          <a:noFill/>
+        </p:spPr>
+        <p:txBody>
+          <a:bodyPr wrap="square" anchor="t">
+            <a:spAutoFit/>
+          </a:bodyPr>
+          <a:lstStyle/>
+          <a:p>
+            <a:pPr algn="r">
+              <a:defRPr sz="800" b="0">
+                <a:solidFill>
+                  <a:srgbClr val="828FA0"/>
+                </a:solidFill>
+                <a:latin typeface="Aptos"/>
+              </a:defRPr>
+            </a:pPr>
+            <a:r>
+              <a:t>16</a:t>
+            </a:r>
+          </a:p>
+        </p:txBody>
+      </p:sp>
+    </p:spTree>
+  </p:cSld>
+  <p:clrMapOvr>
+    <a:masterClrMapping/>
+  </p:clrMapOvr>
+</p:sld>
+</file>
+
+<file path=ppt/slides/slide17.xml><?xml version="1.0" encoding="utf-8"?>
+<p:sld xmlns:a="http://schemas.openxmlformats.org/drawingml/2006/main" xmlns:p="http://schemas.openxmlformats.org/presentationml/2006/main" xmlns:r="http://schemas.openxmlformats.org/officeDocument/2006/relationships">
+  <p:cSld>
+    <p:bg>
+      <p:bgPr>
+        <a:solidFill>
+          <a:srgbClr val="0A1F44"/>
+        </a:solidFill>
+        <a:effectLst/>
+      </p:bgPr>
+    </p:bg>
+    <p:spTree>
+      <p:nvGrpSpPr>
+        <p:cNvPr id="1" name=""/>
+        <p:cNvGrpSpPr/>
+        <p:nvPr/>
+      </p:nvGrpSpPr>
+      <p:grpSpPr/>
+      <p:sp>
+        <p:nvSpPr>
+          <p:cNvPr id="2" name="TextBox 1"/>
+          <p:cNvSpPr txBox="1"/>
+          <p:nvPr/>
+        </p:nvSpPr>
+        <p:spPr>
+          <a:xfrm>
+            <a:off x="594360" y="256032"/>
+            <a:ext cx="10972800" cy="274320"/>
+          </a:xfrm>
+          <a:prstGeom prst="rect">
+            <a:avLst/>
+          </a:prstGeom>
+          <a:noFill/>
+        </p:spPr>
+        <p:txBody>
+          <a:bodyPr wrap="square" anchor="t">
+            <a:spAutoFit/>
+          </a:bodyPr>
+          <a:lstStyle/>
+          <a:p>
+            <a:pPr algn="l">
+              <a:defRPr sz="1000" b="1">
+                <a:solidFill>
+                  <a:srgbClr val="FB8500"/>
+                </a:solidFill>
+                <a:latin typeface="Aptos"/>
+              </a:defRPr>
+            </a:pPr>
+            <a:r>
+              <a:t>16 · CLIENT EXPERIENCE</a:t>
             </a:r>
           </a:p>
         </p:txBody>
@@ -6341,7 +6855,7 @@
               </a:defRPr>
             </a:pPr>
             <a:r>
-              <a:t>Race + gender, at the deployed point</a:t>
+              <a:t>Race, gender, age at the deployed point + FPDP</a:t>
             </a:r>
           </a:p>
         </p:txBody>
@@ -6683,7 +7197,7 @@
               </a:defRPr>
             </a:pPr>
             <a:r>
-              <a:t>16</a:t>
+              <a:t>17</a:t>
             </a:r>
           </a:p>
         </p:txBody>
@@ -9469,7 +9983,7 @@
               </a:defRPr>
             </a:pPr>
             <a:r>
-              <a:t>0.0112</a:t>
+              <a:t>+0.0025</a:t>
             </a:r>
           </a:p>
         </p:txBody>
@@ -9505,7 +10019,7 @@
               </a:defRPr>
             </a:pPr>
             <a:r>
-              <a:t>ECE · XGBOOST</a:t>
+              <a:t>AUC GAP · XGB − LOGIT</a:t>
             </a:r>
           </a:p>
         </p:txBody>
@@ -9513,6 +10027,42 @@
       <p:sp>
         <p:nvSpPr>
           <p:cNvPr id="15" name="TextBox 14"/>
+          <p:cNvSpPr txBox="1"/>
+          <p:nvPr/>
+        </p:nvSpPr>
+        <p:spPr>
+          <a:xfrm>
+            <a:off x="8567928" y="5632704"/>
+            <a:ext cx="2194560" cy="164592"/>
+          </a:xfrm>
+          <a:prstGeom prst="rect">
+            <a:avLst/>
+          </a:prstGeom>
+          <a:noFill/>
+        </p:spPr>
+        <p:txBody>
+          <a:bodyPr wrap="square" anchor="t">
+            <a:spAutoFit/>
+          </a:bodyPr>
+          <a:lstStyle/>
+          <a:p>
+            <a:pPr algn="ctr">
+              <a:defRPr sz="800" b="0">
+                <a:solidFill>
+                  <a:srgbClr val="F0F4F8"/>
+                </a:solidFill>
+                <a:latin typeface="Aptos"/>
+              </a:defRPr>
+            </a:pPr>
+            <a:r>
+              <a:t>paired bootstrap: significant, small</a:t>
+            </a:r>
+          </a:p>
+        </p:txBody>
+      </p:sp>
+      <p:sp>
+        <p:nvSpPr>
+          <p:cNvPr id="16" name="TextBox 15"/>
           <p:cNvSpPr txBox="1"/>
           <p:nvPr/>
         </p:nvSpPr>
@@ -9541,14 +10091,14 @@
               </a:defRPr>
             </a:pPr>
             <a:r>
-              <a:t>Paired bootstrap compares differences directly; see paired_comparisons.csv. Results remain exploratory.</a:t>
-            </a:r>
-          </a:p>
-        </p:txBody>
-      </p:sp>
-      <p:sp>
-        <p:nvSpPr>
-          <p:cNvPr id="16" name="TextBox 15"/>
+              <a:t>All three models are within ~0.003 AUC; ECE differences are not significant. Performance alone cannot pick the model.</a:t>
+            </a:r>
+          </a:p>
+        </p:txBody>
+      </p:sp>
+      <p:sp>
+        <p:nvSpPr>
+          <p:cNvPr id="17" name="TextBox 16"/>
           <p:cNvSpPr txBox="1"/>
           <p:nvPr/>
         </p:nvSpPr>
@@ -9584,7 +10134,7 @@
       </p:sp>
       <p:sp>
         <p:nvSpPr>
-          <p:cNvPr id="17" name="TextBox 16"/>
+          <p:cNvPr id="18" name="TextBox 17"/>
           <p:cNvSpPr txBox="1"/>
           <p:nvPr/>
         </p:nvSpPr>

--- a/reports/ISAF_Recidivism_Presentation.pptx
+++ b/reports/ISAF_Recidivism_Presentation.pptx
@@ -3571,7 +3571,7 @@
           </a:solidFill>
           <a:ln>
             <a:solidFill>
-              <a:srgbClr val="D64343"/>
+              <a:srgbClr val="7B2CBF"/>
             </a:solidFill>
           </a:ln>
         </p:spPr>
@@ -3622,13 +3622,13 @@
             <a:pPr algn="ctr">
               <a:defRPr sz="2400" b="1">
                 <a:solidFill>
-                  <a:srgbClr val="D64343"/>
-                </a:solidFill>
-                <a:latin typeface="Aptos"/>
-              </a:defRPr>
-            </a:pPr>
-            <a:r>
-              <a:t>0.036</a:t>
+                  <a:srgbClr val="7B2CBF"/>
+                </a:solidFill>
+                <a:latin typeface="Aptos"/>
+              </a:defRPr>
+            </a:pPr>
+            <a:r>
+              <a:t>0.035</a:t>
             </a:r>
           </a:p>
         </p:txBody>
@@ -3688,7 +3688,7 @@
           </a:solidFill>
           <a:ln>
             <a:solidFill>
-              <a:srgbClr val="FB8500"/>
+              <a:srgbClr val="00B4B4"/>
             </a:solidFill>
           </a:ln>
         </p:spPr>
@@ -3739,13 +3739,13 @@
             <a:pPr algn="ctr">
               <a:defRPr sz="2400" b="1">
                 <a:solidFill>
-                  <a:srgbClr val="FB8500"/>
-                </a:solidFill>
-                <a:latin typeface="Aptos"/>
-              </a:defRPr>
-            </a:pPr>
-            <a:r>
-              <a:t>77.0%</a:t>
+                  <a:srgbClr val="00B4B4"/>
+                </a:solidFill>
+                <a:latin typeface="Aptos"/>
+              </a:defRPr>
+            </a:pPr>
+            <a:r>
+              <a:t>77.6%</a:t>
             </a:r>
           </a:p>
         </p:txBody>

--- a/reports/ISAF_Recidivism_Presentation.pptx
+++ b/reports/ISAF_Recidivism_Presentation.pptx
@@ -3571,7 +3571,7 @@
           </a:solidFill>
           <a:ln>
             <a:solidFill>
-              <a:srgbClr val="7B2CBF"/>
+              <a:srgbClr val="FB8500"/>
             </a:solidFill>
           </a:ln>
         </p:spPr>
@@ -3622,13 +3622,13 @@
             <a:pPr algn="ctr">
               <a:defRPr sz="2400" b="1">
                 <a:solidFill>
-                  <a:srgbClr val="7B2CBF"/>
-                </a:solidFill>
-                <a:latin typeface="Aptos"/>
-              </a:defRPr>
-            </a:pPr>
-            <a:r>
-              <a:t>0.035</a:t>
+                  <a:srgbClr val="FB8500"/>
+                </a:solidFill>
+                <a:latin typeface="Aptos"/>
+              </a:defRPr>
+            </a:pPr>
+            <a:r>
+              <a:t>0.032</a:t>
             </a:r>
           </a:p>
         </p:txBody>
@@ -3664,14 +3664,50 @@
               </a:defRPr>
             </a:pPr>
             <a:r>
-              <a:t>SCORE DRIFT · TABICL</a:t>
-            </a:r>
-          </a:p>
-        </p:txBody>
-      </p:sp>
-      <p:sp>
-        <p:nvSpPr>
-          <p:cNvPr id="9" name="Rounded Rectangle 8"/>
+              <a:t>SCORE DRIFT · LOGISTIC</a:t>
+            </a:r>
+          </a:p>
+        </p:txBody>
+      </p:sp>
+      <p:sp>
+        <p:nvSpPr>
+          <p:cNvPr id="9" name="TextBox 8"/>
+          <p:cNvSpPr txBox="1"/>
+          <p:nvPr/>
+        </p:nvSpPr>
+        <p:spPr>
+          <a:xfrm>
+            <a:off x="8659367" y="2706624"/>
+            <a:ext cx="2194560" cy="164592"/>
+          </a:xfrm>
+          <a:prstGeom prst="rect">
+            <a:avLst/>
+          </a:prstGeom>
+          <a:noFill/>
+        </p:spPr>
+        <p:txBody>
+          <a:bodyPr wrap="square" anchor="t">
+            <a:spAutoFit/>
+          </a:bodyPr>
+          <a:lstStyle/>
+          <a:p>
+            <a:pPr algn="ctr">
+              <a:defRPr sz="800" b="0">
+                <a:solidFill>
+                  <a:srgbClr val="F0F4F8"/>
+                </a:solidFill>
+                <a:latin typeface="Aptos"/>
+              </a:defRPr>
+            </a:pPr>
+            <a:r>
+              <a:t>lowest · XGB 0.035 · TabICL 0.035</a:t>
+            </a:r>
+          </a:p>
+        </p:txBody>
+      </p:sp>
+      <p:sp>
+        <p:nvSpPr>
+          <p:cNvPr id="10" name="Rounded Rectangle 9"/>
           <p:cNvSpPr/>
           <p:nvPr/>
         </p:nvSpPr>
@@ -3716,7 +3752,7 @@
       </p:sp>
       <p:sp>
         <p:nvSpPr>
-          <p:cNvPr id="10" name="TextBox 9"/>
+          <p:cNvPr id="11" name="TextBox 10"/>
           <p:cNvSpPr txBox="1"/>
           <p:nvPr/>
         </p:nvSpPr>
@@ -3745,14 +3781,14 @@
               </a:defRPr>
             </a:pPr>
             <a:r>
-              <a:t>77.6%</a:t>
-            </a:r>
-          </a:p>
-        </p:txBody>
-      </p:sp>
-      <p:sp>
-        <p:nvSpPr>
-          <p:cNvPr id="11" name="TextBox 10"/>
+              <a:t>75%–78%</a:t>
+            </a:r>
+          </a:p>
+        </p:txBody>
+      </p:sp>
+      <p:sp>
+        <p:nvSpPr>
+          <p:cNvPr id="12" name="TextBox 11"/>
           <p:cNvSpPr txBox="1"/>
           <p:nvPr/>
         </p:nvSpPr>
@@ -3781,14 +3817,50 @@
               </a:defRPr>
             </a:pPr>
             <a:r>
-              <a:t>TABICL JACCARD</a:t>
-            </a:r>
-          </a:p>
-        </p:txBody>
-      </p:sp>
-      <p:sp>
-        <p:nvSpPr>
-          <p:cNvPr id="12" name="TextBox 11"/>
+              <a:t>TOP-20% JACCARD</a:t>
+            </a:r>
+          </a:p>
+        </p:txBody>
+      </p:sp>
+      <p:sp>
+        <p:nvSpPr>
+          <p:cNvPr id="13" name="TextBox 12"/>
+          <p:cNvSpPr txBox="1"/>
+          <p:nvPr/>
+        </p:nvSpPr>
+        <p:spPr>
+          <a:xfrm>
+            <a:off x="8659367" y="4169664"/>
+            <a:ext cx="2194560" cy="164592"/>
+          </a:xfrm>
+          <a:prstGeom prst="rect">
+            <a:avLst/>
+          </a:prstGeom>
+          <a:noFill/>
+        </p:spPr>
+        <p:txBody>
+          <a:bodyPr wrap="square" anchor="t">
+            <a:spAutoFit/>
+          </a:bodyPr>
+          <a:lstStyle/>
+          <a:p>
+            <a:pPr algn="ctr">
+              <a:defRPr sz="800" b="0">
+                <a:solidFill>
+                  <a:srgbClr val="F0F4F8"/>
+                </a:solidFill>
+                <a:latin typeface="Aptos"/>
+              </a:defRPr>
+            </a:pPr>
+            <a:r>
+              <a:t>logit 0.772 · XGB 0.747 · TabICL 0.776</a:t>
+            </a:r>
+          </a:p>
+        </p:txBody>
+      </p:sp>
+      <p:sp>
+        <p:nvSpPr>
+          <p:cNvPr id="14" name="TextBox 13"/>
           <p:cNvSpPr txBox="1"/>
           <p:nvPr/>
         </p:nvSpPr>
@@ -3824,7 +3896,7 @@
       </p:sp>
       <p:sp>
         <p:nvSpPr>
-          <p:cNvPr id="13" name="TextBox 12"/>
+          <p:cNvPr id="15" name="TextBox 14"/>
           <p:cNvSpPr txBox="1"/>
           <p:nvPr/>
         </p:nvSpPr>
@@ -3860,7 +3932,7 @@
       </p:sp>
       <p:sp>
         <p:nvSpPr>
-          <p:cNvPr id="14" name="TextBox 13"/>
+          <p:cNvPr id="16" name="TextBox 15"/>
           <p:cNvSpPr txBox="1"/>
           <p:nvPr/>
         </p:nvSpPr>
@@ -4360,7 +4432,7 @@
               </a:defRPr>
             </a:pPr>
             <a:r>
-              <a:t>TOST on selection, FNR, FPR</a:t>
+              <a:t>TOST on errors · AUC Black 0.72 vs White 0.75</a:t>
             </a:r>
           </a:p>
         </p:txBody>
@@ -4513,7 +4585,7 @@
               </a:defRPr>
             </a:pPr>
             <a:r>
-              <a:t>age is an input: needs a stated justification</a:t>
+              <a:t>persists with age fixed: carried by prior record</a:t>
             </a:r>
           </a:p>
         </p:txBody>
@@ -4889,7 +4961,7 @@
             <a:br/>
             <a:br/>
             <a:r>
-              <a:t>Changing decision thresholds leaves probabilities unchanged</a:t>
+              <a:t>For support, over-prediction helps women: recalibrating would widen the FNR gap</a:t>
             </a:r>
           </a:p>
         </p:txBody>
@@ -5011,7 +5083,7 @@
             <a:br/>
             <a:br/>
             <a:r>
-              <a:t>Equal FPR alone is not equalized odds</a:t>
+              <a:t>Changing thresholds leaves probabilities unchanged</a:t>
             </a:r>
             <a:br/>
             <a:br/>
@@ -5375,17 +5447,17 @@
             <a:br/>
             <a:br/>
             <a:r>
-              <a:t>Drop + re-estimate: equal-opportunity p 0.000 → 0.995 (logistic)</a:t>
+              <a:t>Drop + re-estimate (logistic): FNR gap -0.096 → +0.000</a:t>
             </a:r>
             <a:br/>
             <a:br/>
             <a:r>
-              <a:t>AUC cost ≈ 0.014, ~6× the XGB − logistic gap</a:t>
+              <a:t>Women FNR 0.80 → 0.72; men 0.70 → 0.72</a:t>
             </a:r>
             <a:br/>
             <a:br/>
             <a:r>
-              <a:t>Statistical parity still rejected</a:t>
+              <a:t>AUC −0.014; 27 fewer re-arrests captured</a:t>
             </a:r>
           </a:p>
         </p:txBody>
@@ -5421,7 +5493,7 @@
               </a:defRPr>
             </a:pPr>
             <a:r>
-              <a:t>FPDP identifies candidate variables (association, not causation). Mitigation is evaluated on the same labels: illustrative.</a:t>
+              <a:t>Logistic FPDP is flat under a top-20% rule (a constant shifts every score equally). Evaluated on the same labels: illustrative.</a:t>
             </a:r>
           </a:p>
         </p:txBody>
@@ -6101,7 +6173,7 @@
               </a:defRPr>
             </a:pPr>
             <a:r>
-              <a:t>Pilot XGBoost; retain logistic as a transparent challenger</a:t>
+              <a:t>Pilot logistic regression; run XGBoost as the challenger</a:t>
             </a:r>
           </a:p>
         </p:txBody>
@@ -6225,7 +6297,7 @@
               </a:defRPr>
             </a:pPr>
             <a:r>
-              <a:t>WHY XGBOOST</a:t>
+              <a:t>WHY LOGISTIC</a:t>
             </a:r>
           </a:p>
         </p:txBody>
@@ -6261,22 +6333,22 @@
               </a:defRPr>
             </a:pPr>
             <a:r>
-              <a:t>Competitive probability loss</a:t>
+              <a:t>XGBoost gains only +0.0025 AUC</a:t>
             </a:r>
             <a:br/>
             <a:br/>
             <a:r>
-              <a:t>Audit subgroup errors</a:t>
+              <a:t>Native, coefficient-level explanations</a:t>
             </a:r>
             <a:br/>
             <a:br/>
             <a:r>
-              <a:t>SHAP explanations available</a:t>
+              <a:t>Lowest refit drift; smaller gender FNR gap (-0.096 vs -0.112)</a:t>
             </a:r>
             <a:br/>
             <a:br/>
             <a:r>
-              <a:t>Low inference cost</a:t>
+              <a:t>No significant race gap · fastest</a:t>
             </a:r>
           </a:p>
         </p:txBody>
@@ -6398,7 +6470,7 @@
             <a:br/>
             <a:br/>
             <a:r>
-              <a:t>Logistic as transparent challenger</a:t>
+              <a:t>XGBoost as shadow challenger</a:t>
             </a:r>
             <a:br/>
             <a:br/>
@@ -9359,7 +9431,7 @@
               </a:defRPr>
             </a:pPr>
             <a:r>
-              <a:t>+$2.4M</a:t>
+              <a:t>+$2.3M</a:t>
             </a:r>
           </a:p>
         </p:txBody>
@@ -9408,6 +9480,42 @@
         </p:nvSpPr>
         <p:spPr>
           <a:xfrm>
+            <a:off x="9025128" y="5632704"/>
+            <a:ext cx="2194560" cy="164592"/>
+          </a:xfrm>
+          <a:prstGeom prst="rect">
+            <a:avLst/>
+          </a:prstGeom>
+          <a:noFill/>
+        </p:spPr>
+        <p:txBody>
+          <a:bodyPr wrap="square" anchor="t">
+            <a:spAutoFit/>
+          </a:bodyPr>
+          <a:lstStyle/>
+          <a:p>
+            <a:pPr algn="ctr">
+              <a:defRPr sz="800" b="0">
+                <a:solidFill>
+                  <a:srgbClr val="F0F4F8"/>
+                </a:solidFill>
+                <a:latin typeface="Aptos"/>
+              </a:defRPr>
+            </a:pPr>
+            <a:r>
+              <a:t>recommended logistic model</a:t>
+            </a:r>
+          </a:p>
+        </p:txBody>
+      </p:sp>
+      <p:sp>
+        <p:nvSpPr>
+          <p:cNvPr id="16" name="TextBox 15"/>
+          <p:cNvSpPr txBox="1"/>
+          <p:nvPr/>
+        </p:nvSpPr>
+        <p:spPr>
+          <a:xfrm>
             <a:off x="914400" y="6263640"/>
             <a:ext cx="10058400" cy="274320"/>
           </a:xfrm>
@@ -9438,7 +9546,7 @@
       </p:sp>
       <p:sp>
         <p:nvSpPr>
-          <p:cNvPr id="16" name="TextBox 15"/>
+          <p:cNvPr id="17" name="TextBox 16"/>
           <p:cNvSpPr txBox="1"/>
           <p:nvPr/>
         </p:nvSpPr>
@@ -9474,7 +9582,7 @@
       </p:sp>
       <p:sp>
         <p:nvSpPr>
-          <p:cNvPr id="17" name="TextBox 16"/>
+          <p:cNvPr id="18" name="TextBox 17"/>
           <p:cNvSpPr txBox="1"/>
           <p:nvPr/>
         </p:nvSpPr>
@@ -10775,7 +10883,7 @@
               </a:defRPr>
             </a:pPr>
             <a:r>
-              <a:t>$5.17M</a:t>
+              <a:t>$5.04M</a:t>
             </a:r>
           </a:p>
         </p:txBody>
@@ -10811,14 +10919,50 @@
               </a:defRPr>
             </a:pPr>
             <a:r>
-              <a:t>XGBOOST NET</a:t>
-            </a:r>
-          </a:p>
-        </p:txBody>
-      </p:sp>
-      <p:sp>
-        <p:nvSpPr>
-          <p:cNvPr id="11" name="Rounded Rectangle 10"/>
+              <a:t>LOGISTIC NET</a:t>
+            </a:r>
+          </a:p>
+        </p:txBody>
+      </p:sp>
+      <p:sp>
+        <p:nvSpPr>
+          <p:cNvPr id="11" name="TextBox 10"/>
+          <p:cNvSpPr txBox="1"/>
+          <p:nvPr/>
+        </p:nvSpPr>
+        <p:spPr>
+          <a:xfrm>
+            <a:off x="3538728" y="2706624"/>
+            <a:ext cx="2194560" cy="164592"/>
+          </a:xfrm>
+          <a:prstGeom prst="rect">
+            <a:avLst/>
+          </a:prstGeom>
+          <a:noFill/>
+        </p:spPr>
+        <p:txBody>
+          <a:bodyPr wrap="square" anchor="t">
+            <a:spAutoFit/>
+          </a:bodyPr>
+          <a:lstStyle/>
+          <a:p>
+            <a:pPr algn="ctr">
+              <a:defRPr sz="800" b="0">
+                <a:solidFill>
+                  <a:srgbClr val="F0F4F8"/>
+                </a:solidFill>
+                <a:latin typeface="Aptos"/>
+              </a:defRPr>
+            </a:pPr>
+            <a:r>
+              <a:t>XGBoost $5.17M</a:t>
+            </a:r>
+          </a:p>
+        </p:txBody>
+      </p:sp>
+      <p:sp>
+        <p:nvSpPr>
+          <p:cNvPr id="12" name="Rounded Rectangle 11"/>
           <p:cNvSpPr/>
           <p:nvPr/>
         </p:nvSpPr>
@@ -10863,7 +11007,7 @@
       </p:sp>
       <p:sp>
         <p:nvSpPr>
-          <p:cNvPr id="12" name="TextBox 11"/>
+          <p:cNvPr id="13" name="TextBox 12"/>
           <p:cNvSpPr txBox="1"/>
           <p:nvPr/>
         </p:nvSpPr>
@@ -10899,7 +11043,7 @@
       </p:sp>
       <p:sp>
         <p:nvSpPr>
-          <p:cNvPr id="13" name="TextBox 12"/>
+          <p:cNvPr id="14" name="TextBox 13"/>
           <p:cNvSpPr txBox="1"/>
           <p:nvPr/>
         </p:nvSpPr>
@@ -10935,7 +11079,7 @@
       </p:sp>
       <p:sp>
         <p:nvSpPr>
-          <p:cNvPr id="14" name="Rounded Rectangle 13"/>
+          <p:cNvPr id="15" name="Rounded Rectangle 14"/>
           <p:cNvSpPr/>
           <p:nvPr/>
         </p:nvSpPr>
@@ -10980,7 +11124,7 @@
       </p:sp>
       <p:sp>
         <p:nvSpPr>
-          <p:cNvPr id="15" name="TextBox 14"/>
+          <p:cNvPr id="16" name="TextBox 15"/>
           <p:cNvSpPr txBox="1"/>
           <p:nvPr/>
         </p:nvSpPr>
@@ -11016,7 +11160,7 @@
       </p:sp>
       <p:sp>
         <p:nvSpPr>
-          <p:cNvPr id="16" name="TextBox 15"/>
+          <p:cNvPr id="17" name="TextBox 16"/>
           <p:cNvSpPr txBox="1"/>
           <p:nvPr/>
         </p:nvSpPr>
@@ -11052,7 +11196,7 @@
       </p:sp>
       <p:sp>
         <p:nvSpPr>
-          <p:cNvPr id="17" name="TextBox 16"/>
+          <p:cNvPr id="18" name="TextBox 17"/>
           <p:cNvSpPr txBox="1"/>
           <p:nvPr/>
         </p:nvSpPr>
@@ -11123,7 +11267,7 @@
       </p:sp>
       <p:sp>
         <p:nvSpPr>
-          <p:cNvPr id="18" name="TextBox 17"/>
+          <p:cNvPr id="19" name="TextBox 18"/>
           <p:cNvSpPr txBox="1"/>
           <p:nvPr/>
         </p:nvSpPr>
@@ -11159,7 +11303,7 @@
       </p:sp>
       <p:sp>
         <p:nvSpPr>
-          <p:cNvPr id="19" name="TextBox 18"/>
+          <p:cNvPr id="20" name="TextBox 19"/>
           <p:cNvSpPr txBox="1"/>
           <p:nvPr/>
         </p:nvSpPr>

--- a/reports/ISAF_Recidivism_Presentation.pptx
+++ b/reports/ISAF_Recidivism_Presentation.pptx
@@ -22,6 +22,10 @@
     <p:sldId id="270" r:id="rId21"/>
     <p:sldId id="271" r:id="rId22"/>
     <p:sldId id="272" r:id="rId23"/>
+    <p:sldId id="273" r:id="rId24"/>
+    <p:sldId id="274" r:id="rId25"/>
+    <p:sldId id="275" r:id="rId26"/>
+    <p:sldId id="276" r:id="rId27"/>
   </p:sldIdLst>
   <p:sldSz cx="12191695" cy="6858000" type="screen4x3"/>
   <p:notesSz cx="6858000" cy="9144000"/>
@@ -3444,7 +3448,7 @@
               </a:defRPr>
             </a:pPr>
             <a:r>
-              <a:t>09 · STABILITY</a:t>
+              <a:t>09 · MITIGATION, VALIDATED</a:t>
             </a:r>
           </a:p>
         </p:txBody>
@@ -3480,7 +3484,7 @@
               </a:defRPr>
             </a:pPr>
             <a:r>
-              <a:t>Structural stability across refits on resampled data</a:t>
+              <a:t>Selecting and testing the fix on different data</a:t>
             </a:r>
           </a:p>
         </p:txBody>
@@ -3528,40 +3532,16 @@
           </a:p>
         </p:txBody>
       </p:sp>
-      <p:pic>
-        <p:nvPicPr>
-          <p:cNvPr id="5" name="Picture 4" descr="structural_stability.png"/>
-          <p:cNvPicPr>
-            <a:picLocks noChangeAspect="1"/>
-          </p:cNvPicPr>
-          <p:nvPr/>
-        </p:nvPicPr>
-        <p:blipFill>
-          <a:blip r:embed="rId2"/>
-          <a:stretch>
-            <a:fillRect/>
-          </a:stretch>
-        </p:blipFill>
-        <p:spPr>
-          <a:xfrm>
-            <a:off x="457200" y="1600200"/>
-            <a:ext cx="7589520" cy="1992276"/>
-          </a:xfrm>
-          <a:prstGeom prst="rect">
-            <a:avLst/>
-          </a:prstGeom>
-        </p:spPr>
-      </p:pic>
-      <p:sp>
-        <p:nvSpPr>
-          <p:cNvPr id="6" name="Rounded Rectangle 5"/>
+      <p:sp>
+        <p:nvSpPr>
+          <p:cNvPr id="5" name="Rounded Rectangle 4"/>
           <p:cNvSpPr/>
           <p:nvPr/>
         </p:nvSpPr>
         <p:spPr>
           <a:xfrm>
-            <a:off x="8549640" y="1737360"/>
-            <a:ext cx="2423160" cy="1261872"/>
+            <a:off x="640080" y="1691640"/>
+            <a:ext cx="5257800" cy="4297680"/>
           </a:xfrm>
           <a:prstGeom prst="roundRect">
             <a:avLst/>
@@ -3571,7 +3551,7 @@
           </a:solidFill>
           <a:ln>
             <a:solidFill>
-              <a:srgbClr val="7B2CBF"/>
+              <a:srgbClr val="828FA0"/>
             </a:solidFill>
           </a:ln>
         </p:spPr>
@@ -3599,14 +3579,50 @@
       </p:sp>
       <p:sp>
         <p:nvSpPr>
+          <p:cNvPr id="6" name="TextBox 5"/>
+          <p:cNvSpPr txBox="1"/>
+          <p:nvPr/>
+        </p:nvSpPr>
+        <p:spPr>
+          <a:xfrm>
+            <a:off x="868680" y="1965960"/>
+            <a:ext cx="4800600" cy="365760"/>
+          </a:xfrm>
+          <a:prstGeom prst="rect">
+            <a:avLst/>
+          </a:prstGeom>
+          <a:noFill/>
+        </p:spPr>
+        <p:txBody>
+          <a:bodyPr wrap="square" anchor="t">
+            <a:spAutoFit/>
+          </a:bodyPr>
+          <a:lstStyle/>
+          <a:p>
+            <a:pPr algn="ctr">
+              <a:defRPr sz="2000" b="1">
+                <a:solidFill>
+                  <a:srgbClr val="828FA0"/>
+                </a:solidFill>
+                <a:latin typeface="Aptos"/>
+              </a:defRPr>
+            </a:pPr>
+            <a:r>
+              <a:t>IN-SAMPLE</a:t>
+            </a:r>
+          </a:p>
+        </p:txBody>
+      </p:sp>
+      <p:sp>
+        <p:nvSpPr>
           <p:cNvPr id="7" name="TextBox 6"/>
           <p:cNvSpPr txBox="1"/>
           <p:nvPr/>
         </p:nvSpPr>
         <p:spPr>
           <a:xfrm>
-            <a:off x="8659367" y="1874519"/>
-            <a:ext cx="2194560" cy="438912"/>
+            <a:off x="960119" y="2679192"/>
+            <a:ext cx="4617720" cy="3063240"/>
           </a:xfrm>
           <a:prstGeom prst="rect">
             <a:avLst/>
@@ -3620,65 +3636,39 @@
           <a:lstStyle/>
           <a:p>
             <a:pPr algn="ctr">
-              <a:defRPr sz="2400" b="1">
-                <a:solidFill>
-                  <a:srgbClr val="7B2CBF"/>
-                </a:solidFill>
-                <a:latin typeface="Aptos"/>
-              </a:defRPr>
-            </a:pPr>
-            <a:r>
-              <a:t>0.035</a:t>
-            </a:r>
-          </a:p>
-        </p:txBody>
-      </p:sp>
-      <p:sp>
-        <p:nvSpPr>
-          <p:cNvPr id="8" name="TextBox 7"/>
-          <p:cNvSpPr txBox="1"/>
-          <p:nvPr/>
-        </p:nvSpPr>
-        <p:spPr>
-          <a:xfrm>
-            <a:off x="8659367" y="2395728"/>
-            <a:ext cx="2194560" cy="274320"/>
-          </a:xfrm>
-          <a:prstGeom prst="rect">
-            <a:avLst/>
-          </a:prstGeom>
-          <a:noFill/>
-        </p:spPr>
-        <p:txBody>
-          <a:bodyPr wrap="square" anchor="t">
-            <a:spAutoFit/>
-          </a:bodyPr>
-          <a:lstStyle/>
-          <a:p>
-            <a:pPr algn="ctr">
-              <a:defRPr sz="1100" b="1">
-                <a:solidFill>
-                  <a:srgbClr val="FFFFFF"/>
-                </a:solidFill>
-                <a:latin typeface="Aptos"/>
-              </a:defRPr>
-            </a:pPr>
-            <a:r>
-              <a:t>SCORE DRIFT · TABICL</a:t>
-            </a:r>
-          </a:p>
-        </p:txBody>
-      </p:sp>
-      <p:sp>
-        <p:nvSpPr>
-          <p:cNvPr id="9" name="Rounded Rectangle 8"/>
+              <a:defRPr sz="1500" b="0">
+                <a:solidFill>
+                  <a:srgbClr val="F0F4F8"/>
+                </a:solidFill>
+                <a:latin typeface="Aptos"/>
+              </a:defRPr>
+            </a:pPr>
+            <a:r>
+              <a:t>Candidate chosen AND scored on the same cohort</a:t>
+            </a:r>
+            <a:br/>
+            <a:br/>
+            <a:r>
+              <a:t>Equal-opportunity p 0.000 → 1.00</a:t>
+            </a:r>
+            <a:br/>
+            <a:br/>
+            <a:r>
+              <a:t>An upper bound, not evidence of generalisation</a:t>
+            </a:r>
+          </a:p>
+        </p:txBody>
+      </p:sp>
+      <p:sp>
+        <p:nvSpPr>
+          <p:cNvPr id="8" name="Rounded Rectangle 7"/>
           <p:cNvSpPr/>
           <p:nvPr/>
         </p:nvSpPr>
         <p:spPr>
           <a:xfrm>
-            <a:off x="8549640" y="3200400"/>
-            <a:ext cx="2423160" cy="1261872"/>
+            <a:off x="6263640" y="1691640"/>
+            <a:ext cx="5257800" cy="4297680"/>
           </a:xfrm>
           <a:prstGeom prst="roundRect">
             <a:avLst/>
@@ -3716,14 +3706,50 @@
       </p:sp>
       <p:sp>
         <p:nvSpPr>
+          <p:cNvPr id="9" name="TextBox 8"/>
+          <p:cNvSpPr txBox="1"/>
+          <p:nvPr/>
+        </p:nvSpPr>
+        <p:spPr>
+          <a:xfrm>
+            <a:off x="6492240" y="1965960"/>
+            <a:ext cx="4800600" cy="365760"/>
+          </a:xfrm>
+          <a:prstGeom prst="rect">
+            <a:avLst/>
+          </a:prstGeom>
+          <a:noFill/>
+        </p:spPr>
+        <p:txBody>
+          <a:bodyPr wrap="square" anchor="t">
+            <a:spAutoFit/>
+          </a:bodyPr>
+          <a:lstStyle/>
+          <a:p>
+            <a:pPr algn="ctr">
+              <a:defRPr sz="2000" b="1">
+                <a:solidFill>
+                  <a:srgbClr val="00B4B4"/>
+                </a:solidFill>
+                <a:latin typeface="Aptos"/>
+              </a:defRPr>
+            </a:pPr>
+            <a:r>
+              <a:t>OUT-OF-FOLD</a:t>
+            </a:r>
+          </a:p>
+        </p:txBody>
+      </p:sp>
+      <p:sp>
+        <p:nvSpPr>
           <p:cNvPr id="10" name="TextBox 9"/>
           <p:cNvSpPr txBox="1"/>
           <p:nvPr/>
         </p:nvSpPr>
         <p:spPr>
           <a:xfrm>
-            <a:off x="8659367" y="3337560"/>
-            <a:ext cx="2194560" cy="438912"/>
+            <a:off x="6583679" y="2679192"/>
+            <a:ext cx="4617720" cy="3063240"/>
           </a:xfrm>
           <a:prstGeom prst="rect">
             <a:avLst/>
@@ -3737,15 +3763,25 @@
           <a:lstStyle/>
           <a:p>
             <a:pPr algn="ctr">
-              <a:defRPr sz="2400" b="1">
-                <a:solidFill>
-                  <a:srgbClr val="00B4B4"/>
-                </a:solidFill>
-                <a:latin typeface="Aptos"/>
-              </a:defRPr>
-            </a:pPr>
-            <a:r>
-              <a:t>77.6%</a:t>
+              <a:defRPr sz="1500" b="0">
+                <a:solidFill>
+                  <a:srgbClr val="F0F4F8"/>
+                </a:solidFill>
+                <a:latin typeface="Aptos"/>
+              </a:defRPr>
+            </a:pPr>
+            <a:r>
+              <a:t>Candidate re-selected inside each training fold, scored on held-out folds</a:t>
+            </a:r>
+            <a:br/>
+            <a:br/>
+            <a:r>
+              <a:t>Same variable selected in 100% of folds</a:t>
+            </a:r>
+            <a:br/>
+            <a:br/>
+            <a:r>
+              <a:t>Gender FNR gap -0.122 → -0.035  ·  AUC -0.010</a:t>
             </a:r>
           </a:p>
         </p:txBody>
@@ -3758,8 +3794,8 @@
         </p:nvSpPr>
         <p:spPr>
           <a:xfrm>
-            <a:off x="8659367" y="3858768"/>
-            <a:ext cx="2194560" cy="274320"/>
+            <a:off x="914400" y="6236208"/>
+            <a:ext cx="10058400" cy="274320"/>
           </a:xfrm>
           <a:prstGeom prst="rect">
             <a:avLst/>
@@ -3775,13 +3811,13 @@
             <a:pPr algn="ctr">
               <a:defRPr sz="1100" b="1">
                 <a:solidFill>
-                  <a:srgbClr val="FFFFFF"/>
-                </a:solidFill>
-                <a:latin typeface="Aptos"/>
-              </a:defRPr>
-            </a:pPr>
-            <a:r>
-              <a:t>TABICL JACCARD</a:t>
+                  <a:srgbClr val="FB8500"/>
+                </a:solidFill>
+                <a:latin typeface="Aptos"/>
+              </a:defRPr>
+            </a:pPr>
+            <a:r>
+              <a:t>The evaluation cohort is never touched. About 70% of the gap closes out of fold, for roughly one AUC point.</a:t>
             </a:r>
           </a:p>
         </p:txBody>
@@ -3789,42 +3825,6 @@
       <p:sp>
         <p:nvSpPr>
           <p:cNvPr id="12" name="TextBox 11"/>
-          <p:cNvSpPr txBox="1"/>
-          <p:nvPr/>
-        </p:nvSpPr>
-        <p:spPr>
-          <a:xfrm>
-            <a:off x="914400" y="6172200"/>
-            <a:ext cx="10058400" cy="365760"/>
-          </a:xfrm>
-          <a:prstGeom prst="rect">
-            <a:avLst/>
-          </a:prstGeom>
-          <a:noFill/>
-        </p:spPr>
-        <p:txBody>
-          <a:bodyPr wrap="square" anchor="t">
-            <a:spAutoFit/>
-          </a:bodyPr>
-          <a:lstStyle/>
-          <a:p>
-            <a:pPr algn="ctr">
-              <a:defRPr sz="1100" b="1">
-                <a:solidFill>
-                  <a:srgbClr val="828FA0"/>
-                </a:solidFill>
-                <a:latin typeface="Aptos"/>
-              </a:defRPr>
-            </a:pPr>
-            <a:r>
-              <a:t>Jaccard is intersection / union, not the share of people switching. Refit sensitivity is not temporal validation.</a:t>
-            </a:r>
-          </a:p>
-        </p:txBody>
-      </p:sp>
-      <p:sp>
-        <p:nvSpPr>
-          <p:cNvPr id="13" name="TextBox 12"/>
           <p:cNvSpPr txBox="1"/>
           <p:nvPr/>
         </p:nvSpPr>
@@ -3860,7 +3860,7 @@
       </p:sp>
       <p:sp>
         <p:nvSpPr>
-          <p:cNvPr id="14" name="TextBox 13"/>
+          <p:cNvPr id="13" name="TextBox 12"/>
           <p:cNvSpPr txBox="1"/>
           <p:nvPr/>
         </p:nvSpPr>
@@ -3951,7 +3951,7 @@
               </a:defRPr>
             </a:pPr>
             <a:r>
-              <a:t>10 · SUBGROUP AUDIT</a:t>
+              <a:t>10 · TRADE-OFFS ACROSS FOUR DIMENSIONS</a:t>
             </a:r>
           </a:p>
         </p:txBody>
@@ -3987,7 +3987,7 @@
               </a:defRPr>
             </a:pPr>
             <a:r>
-              <a:t>Fairness at the proposed allocation rule</a:t>
+              <a:t>Which model should the client deploy?</a:t>
             </a:r>
           </a:p>
         </p:txBody>
@@ -4037,7 +4037,7 @@
       </p:sp>
       <p:pic>
         <p:nvPicPr>
-          <p:cNvPr id="5" name="Picture 4" descr="fairness_support_access.png"/>
+          <p:cNvPr id="5" name="Picture 4" descr="tradeoff_matrix.png"/>
           <p:cNvPicPr>
             <a:picLocks noChangeAspect="1"/>
           </p:cNvPicPr>
@@ -4051,8 +4051,8 @@
         </p:blipFill>
         <p:spPr>
           <a:xfrm>
-            <a:off x="365760" y="1554480"/>
-            <a:ext cx="7772400" cy="4216673"/>
+            <a:off x="2881094" y="1481328"/>
+            <a:ext cx="6399331" cy="4782312"/>
           </a:xfrm>
           <a:prstGeom prst="rect">
             <a:avLst/>
@@ -4061,502 +4061,7 @@
       </p:pic>
       <p:sp>
         <p:nvSpPr>
-          <p:cNvPr id="6" name="Rounded Rectangle 5"/>
-          <p:cNvSpPr/>
-          <p:nvPr/>
-        </p:nvSpPr>
-        <p:spPr>
-          <a:xfrm>
-            <a:off x="8549640" y="1737360"/>
-            <a:ext cx="2423160" cy="1261872"/>
-          </a:xfrm>
-          <a:prstGeom prst="roundRect">
-            <a:avLst/>
-          </a:prstGeom>
-          <a:solidFill>
-            <a:srgbClr val="143058"/>
-          </a:solidFill>
-          <a:ln>
-            <a:solidFill>
-              <a:srgbClr val="D64343"/>
-            </a:solidFill>
-          </a:ln>
-        </p:spPr>
-        <p:style>
-          <a:lnRef idx="1">
-            <a:schemeClr val="accent1"/>
-          </a:lnRef>
-          <a:fillRef idx="3">
-            <a:schemeClr val="accent1"/>
-          </a:fillRef>
-          <a:effectRef idx="2">
-            <a:schemeClr val="accent1"/>
-          </a:effectRef>
-          <a:fontRef idx="minor">
-            <a:schemeClr val="lt1"/>
-          </a:fontRef>
-        </p:style>
-        <p:txBody>
-          <a:bodyPr rtlCol="0" anchor="ctr"/>
-          <a:lstStyle/>
-          <a:p>
-            <a:pPr algn="ctr"/>
-          </a:p>
-        </p:txBody>
-      </p:sp>
-      <p:sp>
-        <p:nvSpPr>
-          <p:cNvPr id="7" name="TextBox 6"/>
-          <p:cNvSpPr txBox="1"/>
-          <p:nvPr/>
-        </p:nvSpPr>
-        <p:spPr>
-          <a:xfrm>
-            <a:off x="8659367" y="1874519"/>
-            <a:ext cx="2194560" cy="438912"/>
-          </a:xfrm>
-          <a:prstGeom prst="rect">
-            <a:avLst/>
-          </a:prstGeom>
-          <a:noFill/>
-        </p:spPr>
-        <p:txBody>
-          <a:bodyPr wrap="square" anchor="t">
-            <a:spAutoFit/>
-          </a:bodyPr>
-          <a:lstStyle/>
-          <a:p>
-            <a:pPr algn="ctr">
-              <a:defRPr sz="2400" b="1">
-                <a:solidFill>
-                  <a:srgbClr val="D64343"/>
-                </a:solidFill>
-                <a:latin typeface="Aptos"/>
-              </a:defRPr>
-            </a:pPr>
-            <a:r>
-              <a:t>-0.10 to -0.12</a:t>
-            </a:r>
-          </a:p>
-        </p:txBody>
-      </p:sp>
-      <p:sp>
-        <p:nvSpPr>
-          <p:cNvPr id="8" name="TextBox 7"/>
-          <p:cNvSpPr txBox="1"/>
-          <p:nvPr/>
-        </p:nvSpPr>
-        <p:spPr>
-          <a:xfrm>
-            <a:off x="8659367" y="2395728"/>
-            <a:ext cx="2194560" cy="274320"/>
-          </a:xfrm>
-          <a:prstGeom prst="rect">
-            <a:avLst/>
-          </a:prstGeom>
-          <a:noFill/>
-        </p:spPr>
-        <p:txBody>
-          <a:bodyPr wrap="square" anchor="t">
-            <a:spAutoFit/>
-          </a:bodyPr>
-          <a:lstStyle/>
-          <a:p>
-            <a:pPr algn="ctr">
-              <a:defRPr sz="1100" b="1">
-                <a:solidFill>
-                  <a:srgbClr val="FFFFFF"/>
-                </a:solidFill>
-                <a:latin typeface="Aptos"/>
-              </a:defRPr>
-            </a:pPr>
-            <a:r>
-              <a:t>GENDER FNR GAP (M − F)</a:t>
-            </a:r>
-          </a:p>
-        </p:txBody>
-      </p:sp>
-      <p:sp>
-        <p:nvSpPr>
-          <p:cNvPr id="9" name="TextBox 8"/>
-          <p:cNvSpPr txBox="1"/>
-          <p:nvPr/>
-        </p:nvSpPr>
-        <p:spPr>
-          <a:xfrm>
-            <a:off x="8659367" y="2706624"/>
-            <a:ext cx="2194560" cy="164592"/>
-          </a:xfrm>
-          <a:prstGeom prst="rect">
-            <a:avLst/>
-          </a:prstGeom>
-          <a:noFill/>
-        </p:spPr>
-        <p:txBody>
-          <a:bodyPr wrap="square" anchor="t">
-            <a:spAutoFit/>
-          </a:bodyPr>
-          <a:lstStyle/>
-          <a:p>
-            <a:pPr algn="ctr">
-              <a:defRPr sz="800" b="0">
-                <a:solidFill>
-                  <a:srgbClr val="F0F4F8"/>
-                </a:solidFill>
-                <a:latin typeface="Aptos"/>
-              </a:defRPr>
-            </a:pPr>
-            <a:r>
-              <a:t>women miss support more · all significant</a:t>
-            </a:r>
-          </a:p>
-        </p:txBody>
-      </p:sp>
-      <p:sp>
-        <p:nvSpPr>
-          <p:cNvPr id="10" name="Rounded Rectangle 9"/>
-          <p:cNvSpPr/>
-          <p:nvPr/>
-        </p:nvSpPr>
-        <p:spPr>
-          <a:xfrm>
-            <a:off x="8549640" y="3200400"/>
-            <a:ext cx="2423160" cy="1261872"/>
-          </a:xfrm>
-          <a:prstGeom prst="roundRect">
-            <a:avLst/>
-          </a:prstGeom>
-          <a:solidFill>
-            <a:srgbClr val="143058"/>
-          </a:solidFill>
-          <a:ln>
-            <a:solidFill>
-              <a:srgbClr val="00B4B4"/>
-            </a:solidFill>
-          </a:ln>
-        </p:spPr>
-        <p:style>
-          <a:lnRef idx="1">
-            <a:schemeClr val="accent1"/>
-          </a:lnRef>
-          <a:fillRef idx="3">
-            <a:schemeClr val="accent1"/>
-          </a:fillRef>
-          <a:effectRef idx="2">
-            <a:schemeClr val="accent1"/>
-          </a:effectRef>
-          <a:fontRef idx="minor">
-            <a:schemeClr val="lt1"/>
-          </a:fontRef>
-        </p:style>
-        <p:txBody>
-          <a:bodyPr rtlCol="0" anchor="ctr"/>
-          <a:lstStyle/>
-          <a:p>
-            <a:pPr algn="ctr"/>
-          </a:p>
-        </p:txBody>
-      </p:sp>
-      <p:sp>
-        <p:nvSpPr>
-          <p:cNvPr id="11" name="TextBox 10"/>
-          <p:cNvSpPr txBox="1"/>
-          <p:nvPr/>
-        </p:nvSpPr>
-        <p:spPr>
-          <a:xfrm>
-            <a:off x="8659367" y="3337560"/>
-            <a:ext cx="2194560" cy="438912"/>
-          </a:xfrm>
-          <a:prstGeom prst="rect">
-            <a:avLst/>
-          </a:prstGeom>
-          <a:noFill/>
-        </p:spPr>
-        <p:txBody>
-          <a:bodyPr wrap="square" anchor="t">
-            <a:spAutoFit/>
-          </a:bodyPr>
-          <a:lstStyle/>
-          <a:p>
-            <a:pPr algn="ctr">
-              <a:defRPr sz="2400" b="1">
-                <a:solidFill>
-                  <a:srgbClr val="00B4B4"/>
-                </a:solidFill>
-                <a:latin typeface="Aptos"/>
-              </a:defRPr>
-            </a:pPr>
-            <a:r>
-              <a:t>3 / 3 models</a:t>
-            </a:r>
-          </a:p>
-        </p:txBody>
-      </p:sp>
-      <p:sp>
-        <p:nvSpPr>
-          <p:cNvPr id="12" name="TextBox 11"/>
-          <p:cNvSpPr txBox="1"/>
-          <p:nvPr/>
-        </p:nvSpPr>
-        <p:spPr>
-          <a:xfrm>
-            <a:off x="8659367" y="3858768"/>
-            <a:ext cx="2194560" cy="274320"/>
-          </a:xfrm>
-          <a:prstGeom prst="rect">
-            <a:avLst/>
-          </a:prstGeom>
-          <a:noFill/>
-        </p:spPr>
-        <p:txBody>
-          <a:bodyPr wrap="square" anchor="t">
-            <a:spAutoFit/>
-          </a:bodyPr>
-          <a:lstStyle/>
-          <a:p>
-            <a:pPr algn="ctr">
-              <a:defRPr sz="1100" b="1">
-                <a:solidFill>
-                  <a:srgbClr val="FFFFFF"/>
-                </a:solidFill>
-                <a:latin typeface="Aptos"/>
-              </a:defRPr>
-            </a:pPr>
-            <a:r>
-              <a:t>RACE: EQUIVALENT ±5 PTS</a:t>
-            </a:r>
-          </a:p>
-        </p:txBody>
-      </p:sp>
-      <p:sp>
-        <p:nvSpPr>
-          <p:cNvPr id="13" name="TextBox 12"/>
-          <p:cNvSpPr txBox="1"/>
-          <p:nvPr/>
-        </p:nvSpPr>
-        <p:spPr>
-          <a:xfrm>
-            <a:off x="8659367" y="4169664"/>
-            <a:ext cx="2194560" cy="164592"/>
-          </a:xfrm>
-          <a:prstGeom prst="rect">
-            <a:avLst/>
-          </a:prstGeom>
-          <a:noFill/>
-        </p:spPr>
-        <p:txBody>
-          <a:bodyPr wrap="square" anchor="t">
-            <a:spAutoFit/>
-          </a:bodyPr>
-          <a:lstStyle/>
-          <a:p>
-            <a:pPr algn="ctr">
-              <a:defRPr sz="800" b="0">
-                <a:solidFill>
-                  <a:srgbClr val="F0F4F8"/>
-                </a:solidFill>
-                <a:latin typeface="Aptos"/>
-              </a:defRPr>
-            </a:pPr>
-            <a:r>
-              <a:t>TOST on selection, FNR, FPR</a:t>
-            </a:r>
-          </a:p>
-        </p:txBody>
-      </p:sp>
-      <p:sp>
-        <p:nvSpPr>
-          <p:cNvPr id="14" name="Rounded Rectangle 13"/>
-          <p:cNvSpPr/>
-          <p:nvPr/>
-        </p:nvSpPr>
-        <p:spPr>
-          <a:xfrm>
-            <a:off x="8549640" y="4663440"/>
-            <a:ext cx="2423160" cy="1261872"/>
-          </a:xfrm>
-          <a:prstGeom prst="roundRect">
-            <a:avLst/>
-          </a:prstGeom>
-          <a:solidFill>
-            <a:srgbClr val="143058"/>
-          </a:solidFill>
-          <a:ln>
-            <a:solidFill>
-              <a:srgbClr val="FB8500"/>
-            </a:solidFill>
-          </a:ln>
-        </p:spPr>
-        <p:style>
-          <a:lnRef idx="1">
-            <a:schemeClr val="accent1"/>
-          </a:lnRef>
-          <a:fillRef idx="3">
-            <a:schemeClr val="accent1"/>
-          </a:fillRef>
-          <a:effectRef idx="2">
-            <a:schemeClr val="accent1"/>
-          </a:effectRef>
-          <a:fontRef idx="minor">
-            <a:schemeClr val="lt1"/>
-          </a:fontRef>
-        </p:style>
-        <p:txBody>
-          <a:bodyPr rtlCol="0" anchor="ctr"/>
-          <a:lstStyle/>
-          <a:p>
-            <a:pPr algn="ctr"/>
-          </a:p>
-        </p:txBody>
-      </p:sp>
-      <p:sp>
-        <p:nvSpPr>
-          <p:cNvPr id="15" name="TextBox 14"/>
-          <p:cNvSpPr txBox="1"/>
-          <p:nvPr/>
-        </p:nvSpPr>
-        <p:spPr>
-          <a:xfrm>
-            <a:off x="8659367" y="4800600"/>
-            <a:ext cx="2194560" cy="438912"/>
-          </a:xfrm>
-          <a:prstGeom prst="rect">
-            <a:avLst/>
-          </a:prstGeom>
-          <a:noFill/>
-        </p:spPr>
-        <p:txBody>
-          <a:bodyPr wrap="square" anchor="t">
-            <a:spAutoFit/>
-          </a:bodyPr>
-          <a:lstStyle/>
-          <a:p>
-            <a:pPr algn="ctr">
-              <a:defRPr sz="2400" b="1">
-                <a:solidFill>
-                  <a:srgbClr val="FB8500"/>
-                </a:solidFill>
-                <a:latin typeface="Aptos"/>
-              </a:defRPr>
-            </a:pPr>
-            <a:r>
-              <a:t>-0.23 to -0.24</a:t>
-            </a:r>
-          </a:p>
-        </p:txBody>
-      </p:sp>
-      <p:sp>
-        <p:nvSpPr>
-          <p:cNvPr id="16" name="TextBox 15"/>
-          <p:cNvSpPr txBox="1"/>
-          <p:nvPr/>
-        </p:nvSpPr>
-        <p:spPr>
-          <a:xfrm>
-            <a:off x="8659367" y="5321807"/>
-            <a:ext cx="2194560" cy="274320"/>
-          </a:xfrm>
-          <a:prstGeom prst="rect">
-            <a:avLst/>
-          </a:prstGeom>
-          <a:noFill/>
-        </p:spPr>
-        <p:txBody>
-          <a:bodyPr wrap="square" anchor="t">
-            <a:spAutoFit/>
-          </a:bodyPr>
-          <a:lstStyle/>
-          <a:p>
-            <a:pPr algn="ctr">
-              <a:defRPr sz="1100" b="1">
-                <a:solidFill>
-                  <a:srgbClr val="FFFFFF"/>
-                </a:solidFill>
-                <a:latin typeface="Aptos"/>
-              </a:defRPr>
-            </a:pPr>
-            <a:r>
-              <a:t>AGE FNR GAP (&lt;33 − 33+)</a:t>
-            </a:r>
-          </a:p>
-        </p:txBody>
-      </p:sp>
-      <p:sp>
-        <p:nvSpPr>
-          <p:cNvPr id="17" name="TextBox 16"/>
-          <p:cNvSpPr txBox="1"/>
-          <p:nvPr/>
-        </p:nvSpPr>
-        <p:spPr>
-          <a:xfrm>
-            <a:off x="8659367" y="5632704"/>
-            <a:ext cx="2194560" cy="164592"/>
-          </a:xfrm>
-          <a:prstGeom prst="rect">
-            <a:avLst/>
-          </a:prstGeom>
-          <a:noFill/>
-        </p:spPr>
-        <p:txBody>
-          <a:bodyPr wrap="square" anchor="t">
-            <a:spAutoFit/>
-          </a:bodyPr>
-          <a:lstStyle/>
-          <a:p>
-            <a:pPr algn="ctr">
-              <a:defRPr sz="800" b="0">
-                <a:solidFill>
-                  <a:srgbClr val="F0F4F8"/>
-                </a:solidFill>
-                <a:latin typeface="Aptos"/>
-              </a:defRPr>
-            </a:pPr>
-            <a:r>
-              <a:t>age is an input: needs a stated justification</a:t>
-            </a:r>
-          </a:p>
-        </p:txBody>
-      </p:sp>
-      <p:sp>
-        <p:nvSpPr>
-          <p:cNvPr id="18" name="TextBox 17"/>
-          <p:cNvSpPr txBox="1"/>
-          <p:nvPr/>
-        </p:nvSpPr>
-        <p:spPr>
-          <a:xfrm>
-            <a:off x="914400" y="6217920"/>
-            <a:ext cx="10058400" cy="274320"/>
-          </a:xfrm>
-          <a:prstGeom prst="rect">
-            <a:avLst/>
-          </a:prstGeom>
-          <a:noFill/>
-        </p:spPr>
-        <p:txBody>
-          <a:bodyPr wrap="square" anchor="t">
-            <a:spAutoFit/>
-          </a:bodyPr>
-          <a:lstStyle/>
-          <a:p>
-            <a:pPr algn="ctr">
-              <a:defRPr sz="1100" b="1">
-                <a:solidFill>
-                  <a:srgbClr val="FB8500"/>
-                </a:solidFill>
-                <a:latin typeface="Aptos"/>
-              </a:defRPr>
-            </a:pPr>
-            <a:r>
-              <a:t>Selection = support offered, so the harm is a missed offer: FNR is primary. Not significant ≠ fair; we test equivalence.</a:t>
-            </a:r>
-          </a:p>
-        </p:txBody>
-      </p:sp>
-      <p:sp>
-        <p:nvSpPr>
-          <p:cNvPr id="19" name="TextBox 18"/>
+          <p:cNvPr id="6" name="TextBox 5"/>
           <p:cNvSpPr txBox="1"/>
           <p:nvPr/>
         </p:nvSpPr>
@@ -4592,7 +4097,7 @@
       </p:sp>
       <p:sp>
         <p:nvSpPr>
-          <p:cNvPr id="20" name="TextBox 19"/>
+          <p:cNvPr id="7" name="TextBox 6"/>
           <p:cNvSpPr txBox="1"/>
           <p:nvPr/>
         </p:nvSpPr>
@@ -4683,7 +4188,7 @@
               </a:defRPr>
             </a:pPr>
             <a:r>
-              <a:t>11 · FAIRNESS, SHARPENED</a:t>
+              <a:t>11 · RECOMMENDATION</a:t>
             </a:r>
           </a:p>
         </p:txBody>
@@ -4719,7 +4224,7 @@
               </a:defRPr>
             </a:pPr>
             <a:r>
-              <a:t>Fairness: probability scores and allocation rules</a:t>
+              <a:t>Pilot XGBoost; retain logistic as a transparent challenger</a:t>
             </a:r>
           </a:p>
         </p:txBody>
@@ -4775,8 +4280,8 @@
         </p:nvSpPr>
         <p:spPr>
           <a:xfrm>
-            <a:off x="640080" y="1691640"/>
-            <a:ext cx="5257800" cy="4297680"/>
+            <a:off x="640080" y="1645920"/>
+            <a:ext cx="3520440" cy="4251960"/>
           </a:xfrm>
           <a:prstGeom prst="roundRect">
             <a:avLst/>
@@ -4820,8 +4325,8 @@
         </p:nvSpPr>
         <p:spPr>
           <a:xfrm>
-            <a:off x="868680" y="1965960"/>
-            <a:ext cx="4800600" cy="365760"/>
+            <a:off x="868680" y="1920240"/>
+            <a:ext cx="3063240" cy="365760"/>
           </a:xfrm>
           <a:prstGeom prst="rect">
             <a:avLst/>
@@ -4843,7 +4348,7 @@
               </a:defRPr>
             </a:pPr>
             <a:r>
-              <a:t>SCORE CALIBRATION</a:t>
+              <a:t>WHY XGBOOST</a:t>
             </a:r>
           </a:p>
         </p:txBody>
@@ -4856,8 +4361,8 @@
         </p:nvSpPr>
         <p:spPr>
           <a:xfrm>
-            <a:off x="960119" y="2679192"/>
-            <a:ext cx="4617720" cy="3063240"/>
+            <a:off x="960119" y="2633472"/>
+            <a:ext cx="2880360" cy="3017520"/>
           </a:xfrm>
           <a:prstGeom prst="rect">
             <a:avLst/>
@@ -4879,17 +4384,22 @@
               </a:defRPr>
             </a:pPr>
             <a:r>
-              <a:t>Women are over-predicted by every model: mean score 0.52 vs observed 0.45</a:t>
+              <a:t>Best calibrated (ECE 0.011)</a:t>
             </a:r>
             <a:br/>
             <a:br/>
             <a:r>
-              <a:t>Yet they are selected less at the top 20%</a:t>
+              <a:t>+12 events captured at 20% capacity</a:t>
             </a:r>
             <a:br/>
             <a:br/>
             <a:r>
-              <a:t>Changing decision thresholds leaves probabilities unchanged</a:t>
+              <a:t>AUC edge +0.0025, interval excludes 0</a:t>
+            </a:r>
+            <a:br/>
+            <a:br/>
+            <a:r>
+              <a:t>SHAP + surrogate available</a:t>
             </a:r>
           </a:p>
         </p:txBody>
@@ -4902,8 +4412,8 @@
         </p:nvSpPr>
         <p:spPr>
           <a:xfrm>
-            <a:off x="6263640" y="1691640"/>
-            <a:ext cx="5257800" cy="4297680"/>
+            <a:off x="4343400" y="1645920"/>
+            <a:ext cx="3520440" cy="4251960"/>
           </a:xfrm>
           <a:prstGeom prst="roundRect">
             <a:avLst/>
@@ -4947,8 +4457,8 @@
         </p:nvSpPr>
         <p:spPr>
           <a:xfrm>
-            <a:off x="6492240" y="1965960"/>
-            <a:ext cx="4800600" cy="365760"/>
+            <a:off x="4572000" y="1920240"/>
+            <a:ext cx="3063240" cy="365760"/>
           </a:xfrm>
           <a:prstGeom prst="rect">
             <a:avLst/>
@@ -4970,7 +4480,7 @@
               </a:defRPr>
             </a:pPr>
             <a:r>
-              <a:t>ALLOCATION ERRORS</a:t>
+              <a:t>WHAT IT COSTS</a:t>
             </a:r>
           </a:p>
         </p:txBody>
@@ -4983,8 +4493,8 @@
         </p:nvSpPr>
         <p:spPr>
           <a:xfrm>
-            <a:off x="6583679" y="2679192"/>
-            <a:ext cx="4617720" cy="3063240"/>
+            <a:off x="4663440" y="2633472"/>
+            <a:ext cx="2880360" cy="3017520"/>
           </a:xfrm>
           <a:prstGeom prst="rect">
             <a:avLst/>
@@ -5006,24 +4516,197 @@
               </a:defRPr>
             </a:pPr>
             <a:r>
-              <a:t>FPR, TPR and selection rates depend on policy</a:t>
+              <a:t>Wider gender FNR gap (−0.11 vs −0.10)</a:t>
             </a:r>
             <a:br/>
             <a:br/>
             <a:r>
-              <a:t>Equal FPR alone is not equalized odds</a:t>
+              <a:t>Least stable selected set (J 0.75)</a:t>
             </a:r>
             <a:br/>
             <a:br/>
             <a:r>
-              <a:t>Our threshold frontier uses evaluation labels: illustrative, not validated</a:t>
-            </a:r>
-          </a:p>
-        </p:txBody>
-      </p:sp>
-      <p:sp>
-        <p:nvSpPr>
-          <p:cNvPr id="11" name="TextBox 10"/>
+              <a:t>Needs a second tool to explain</a:t>
+            </a:r>
+            <a:br/>
+            <a:br/>
+            <a:r>
+              <a:t>~9× slower</a:t>
+            </a:r>
+          </a:p>
+        </p:txBody>
+      </p:sp>
+      <p:sp>
+        <p:nvSpPr>
+          <p:cNvPr id="11" name="Rounded Rectangle 10"/>
+          <p:cNvSpPr/>
+          <p:nvPr/>
+        </p:nvSpPr>
+        <p:spPr>
+          <a:xfrm>
+            <a:off x="8046720" y="1645920"/>
+            <a:ext cx="3520440" cy="4251960"/>
+          </a:xfrm>
+          <a:prstGeom prst="roundRect">
+            <a:avLst/>
+          </a:prstGeom>
+          <a:solidFill>
+            <a:srgbClr val="143058"/>
+          </a:solidFill>
+          <a:ln>
+            <a:solidFill>
+              <a:srgbClr val="7B2CBF"/>
+            </a:solidFill>
+          </a:ln>
+        </p:spPr>
+        <p:style>
+          <a:lnRef idx="1">
+            <a:schemeClr val="accent1"/>
+          </a:lnRef>
+          <a:fillRef idx="3">
+            <a:schemeClr val="accent1"/>
+          </a:fillRef>
+          <a:effectRef idx="2">
+            <a:schemeClr val="accent1"/>
+          </a:effectRef>
+          <a:fontRef idx="minor">
+            <a:schemeClr val="lt1"/>
+          </a:fontRef>
+        </p:style>
+        <p:txBody>
+          <a:bodyPr rtlCol="0" anchor="ctr"/>
+          <a:lstStyle/>
+          <a:p>
+            <a:pPr algn="ctr"/>
+          </a:p>
+        </p:txBody>
+      </p:sp>
+      <p:sp>
+        <p:nvSpPr>
+          <p:cNvPr id="12" name="TextBox 11"/>
+          <p:cNvSpPr txBox="1"/>
+          <p:nvPr/>
+        </p:nvSpPr>
+        <p:spPr>
+          <a:xfrm>
+            <a:off x="8275320" y="1920240"/>
+            <a:ext cx="3063240" cy="365760"/>
+          </a:xfrm>
+          <a:prstGeom prst="rect">
+            <a:avLst/>
+          </a:prstGeom>
+          <a:noFill/>
+        </p:spPr>
+        <p:txBody>
+          <a:bodyPr wrap="square" anchor="t">
+            <a:spAutoFit/>
+          </a:bodyPr>
+          <a:lstStyle/>
+          <a:p>
+            <a:pPr algn="ctr">
+              <a:defRPr sz="2000" b="1">
+                <a:solidFill>
+                  <a:srgbClr val="7B2CBF"/>
+                </a:solidFill>
+                <a:latin typeface="Aptos"/>
+              </a:defRPr>
+            </a:pPr>
+            <a:r>
+              <a:t>WHAT REVERSES IT</a:t>
+            </a:r>
+          </a:p>
+        </p:txBody>
+      </p:sp>
+      <p:sp>
+        <p:nvSpPr>
+          <p:cNvPr id="13" name="TextBox 12"/>
+          <p:cNvSpPr txBox="1"/>
+          <p:nvPr/>
+        </p:nvSpPr>
+        <p:spPr>
+          <a:xfrm>
+            <a:off x="8366760" y="2633472"/>
+            <a:ext cx="2880360" cy="3017520"/>
+          </a:xfrm>
+          <a:prstGeom prst="rect">
+            <a:avLst/>
+          </a:prstGeom>
+          <a:noFill/>
+        </p:spPr>
+        <p:txBody>
+          <a:bodyPr wrap="square" anchor="t">
+            <a:spAutoFit/>
+          </a:bodyPr>
+          <a:lstStyle/>
+          <a:p>
+            <a:pPr algn="ctr">
+              <a:defRPr sz="1500" b="0">
+                <a:solidFill>
+                  <a:srgbClr val="F0F4F8"/>
+                </a:solidFill>
+                <a:latin typeface="Aptos"/>
+              </a:defRPr>
+            </a:pPr>
+            <a:r>
+              <a:t>Audit requires a directly readable model</a:t>
+            </a:r>
+            <a:br/>
+            <a:br/>
+            <a:r>
+              <a:t>Agencies too small for SHAP infrastructure</a:t>
+            </a:r>
+            <a:br/>
+            <a:br/>
+            <a:r>
+              <a:t>Stability of the selected set is contractual</a:t>
+            </a:r>
+            <a:br/>
+            <a:br/>
+            <a:r>
+              <a:t>Then: ship logistic</a:t>
+            </a:r>
+          </a:p>
+        </p:txBody>
+      </p:sp>
+      <p:sp>
+        <p:nvSpPr>
+          <p:cNvPr id="14" name="TextBox 13"/>
+          <p:cNvSpPr txBox="1"/>
+          <p:nvPr/>
+        </p:nvSpPr>
+        <p:spPr>
+          <a:xfrm>
+            <a:off x="731520" y="6172200"/>
+            <a:ext cx="10698480" cy="365760"/>
+          </a:xfrm>
+          <a:prstGeom prst="rect">
+            <a:avLst/>
+          </a:prstGeom>
+          <a:noFill/>
+        </p:spPr>
+        <p:txBody>
+          <a:bodyPr wrap="square" anchor="t">
+            <a:spAutoFit/>
+          </a:bodyPr>
+          <a:lstStyle/>
+          <a:p>
+            <a:pPr algn="ctr">
+              <a:defRPr sz="1100" b="1">
+                <a:solidFill>
+                  <a:srgbClr val="FB8500"/>
+                </a:solidFill>
+                <a:latin typeface="Aptos"/>
+              </a:defRPr>
+            </a:pPr>
+            <a:r>
+              <a:t>The gap the mitigation closes (0.08) dwarfs the gap between the two models (0.016): disparity is a feature-set property, not an estimator choice.</a:t>
+            </a:r>
+          </a:p>
+        </p:txBody>
+      </p:sp>
+      <p:sp>
+        <p:nvSpPr>
+          <p:cNvPr id="15" name="TextBox 14"/>
           <p:cNvSpPr txBox="1"/>
           <p:nvPr/>
         </p:nvSpPr>
@@ -5059,7 +4742,7 @@
       </p:sp>
       <p:sp>
         <p:nvSpPr>
-          <p:cNvPr id="12" name="TextBox 11"/>
+          <p:cNvPr id="16" name="TextBox 15"/>
           <p:cNvSpPr txBox="1"/>
           <p:nvPr/>
         </p:nvSpPr>
@@ -5150,7 +4833,7 @@
               </a:defRPr>
             </a:pPr>
             <a:r>
-              <a:t>12 · FAIRNESS INTERPRETABILITY (FPDP)</a:t>
+              <a:t>12 · CLIENT EXPERIENCE</a:t>
             </a:r>
           </a:p>
         </p:txBody>
@@ -5186,7 +4869,7 @@
               </a:defRPr>
             </a:pPr>
             <a:r>
-              <a:t>Where does the gender gap come from?</a:t>
+              <a:t>The application makes every trade-off testable</a:t>
             </a:r>
           </a:p>
         </p:txBody>
@@ -5234,40 +4917,16 @@
           </a:p>
         </p:txBody>
       </p:sp>
-      <p:pic>
-        <p:nvPicPr>
-          <p:cNvPr id="5" name="Picture 4" descr="fpdp_gender.png"/>
-          <p:cNvPicPr>
-            <a:picLocks noChangeAspect="1"/>
-          </p:cNvPicPr>
-          <p:nvPr/>
-        </p:nvPicPr>
-        <p:blipFill>
-          <a:blip r:embed="rId2"/>
-          <a:stretch>
-            <a:fillRect/>
-          </a:stretch>
-        </p:blipFill>
-        <p:spPr>
-          <a:xfrm>
-            <a:off x="320040" y="1508760"/>
-            <a:ext cx="7680960" cy="4743933"/>
-          </a:xfrm>
-          <a:prstGeom prst="rect">
-            <a:avLst/>
-          </a:prstGeom>
-        </p:spPr>
-      </p:pic>
-      <p:sp>
-        <p:nvSpPr>
-          <p:cNvPr id="6" name="Rounded Rectangle 5"/>
+      <p:sp>
+        <p:nvSpPr>
+          <p:cNvPr id="5" name="Rounded Rectangle 4"/>
           <p:cNvSpPr/>
           <p:nvPr/>
         </p:nvSpPr>
         <p:spPr>
           <a:xfrm>
-            <a:off x="8229600" y="1508760"/>
-            <a:ext cx="3611880" cy="4572000"/>
+            <a:off x="685800" y="1600200"/>
+            <a:ext cx="5212080" cy="1572768"/>
           </a:xfrm>
           <a:prstGeom prst="roundRect">
             <a:avLst/>
@@ -5277,7 +4936,7 @@
           </a:solidFill>
           <a:ln>
             <a:solidFill>
-              <a:srgbClr val="D64343"/>
+              <a:srgbClr val="FB8500"/>
             </a:solidFill>
           </a:ln>
         </p:spPr>
@@ -5305,14 +4964,14 @@
       </p:sp>
       <p:sp>
         <p:nvSpPr>
-          <p:cNvPr id="7" name="TextBox 6"/>
-          <p:cNvSpPr txBox="1"/>
-          <p:nvPr/>
-        </p:nvSpPr>
-        <p:spPr>
-          <a:xfrm>
-            <a:off x="8458200" y="1783080"/>
-            <a:ext cx="3154680" cy="365760"/>
+          <p:cNvPr id="6" name="TextBox 5"/>
+          <p:cNvSpPr txBox="1"/>
+          <p:nvPr/>
+        </p:nvSpPr>
+        <p:spPr>
+          <a:xfrm>
+            <a:off x="914400" y="1874519"/>
+            <a:ext cx="4754880" cy="365760"/>
           </a:xfrm>
           <a:prstGeom prst="rect">
             <a:avLst/>
@@ -5328,27 +4987,27 @@
             <a:pPr algn="ctr">
               <a:defRPr sz="2000" b="1">
                 <a:solidFill>
-                  <a:srgbClr val="D64343"/>
-                </a:solidFill>
-                <a:latin typeface="Aptos"/>
-              </a:defRPr>
-            </a:pPr>
-            <a:r>
-              <a:t>CANDIDATE: GANG</a:t>
-            </a:r>
-          </a:p>
-        </p:txBody>
-      </p:sp>
-      <p:sp>
-        <p:nvSpPr>
-          <p:cNvPr id="8" name="TextBox 7"/>
-          <p:cNvSpPr txBox="1"/>
-          <p:nvPr/>
-        </p:nvSpPr>
-        <p:spPr>
-          <a:xfrm>
-            <a:off x="8549640" y="2496312"/>
-            <a:ext cx="2971800" cy="3337560"/>
+                  <a:srgbClr val="FB8500"/>
+                </a:solidFill>
+                <a:latin typeface="Aptos"/>
+              </a:defRPr>
+            </a:pPr>
+            <a:r>
+              <a:t>ASSESS</a:t>
+            </a:r>
+          </a:p>
+        </p:txBody>
+      </p:sp>
+      <p:sp>
+        <p:nvSpPr>
+          <p:cNvPr id="7" name="TextBox 6"/>
+          <p:cNvSpPr txBox="1"/>
+          <p:nvPr/>
+        </p:nvSpPr>
+        <p:spPr>
+          <a:xfrm>
+            <a:off x="1005840" y="2587752"/>
+            <a:ext cx="4572000" cy="338327"/>
           </a:xfrm>
           <a:prstGeom prst="rect">
             <a:avLst/>
@@ -5370,23 +5029,53 @@
               </a:defRPr>
             </a:pPr>
             <a:r>
-              <a:t>Never recorded for women; imputed as "No"</a:t>
-            </a:r>
-            <a:br/>
-            <a:br/>
-            <a:r>
-              <a:t>Drop + re-estimate: equal-opportunity p 0.000 → 0.995 (logistic)</a:t>
-            </a:r>
-            <a:br/>
-            <a:br/>
-            <a:r>
-              <a:t>AUC cost ≈ 0.014, ~6× the XGB − logistic gap</a:t>
-            </a:r>
-            <a:br/>
-            <a:br/>
-            <a:r>
-              <a:t>Statistical parity still rejected</a:t>
-            </a:r>
+              <a:t>Score one person, all 3 models + SHAP</a:t>
+            </a:r>
+          </a:p>
+        </p:txBody>
+      </p:sp>
+      <p:sp>
+        <p:nvSpPr>
+          <p:cNvPr id="8" name="Rounded Rectangle 7"/>
+          <p:cNvSpPr/>
+          <p:nvPr/>
+        </p:nvSpPr>
+        <p:spPr>
+          <a:xfrm>
+            <a:off x="6263640" y="1600200"/>
+            <a:ext cx="5212080" cy="1572768"/>
+          </a:xfrm>
+          <a:prstGeom prst="roundRect">
+            <a:avLst/>
+          </a:prstGeom>
+          <a:solidFill>
+            <a:srgbClr val="143058"/>
+          </a:solidFill>
+          <a:ln>
+            <a:solidFill>
+              <a:srgbClr val="7B2CBF"/>
+            </a:solidFill>
+          </a:ln>
+        </p:spPr>
+        <p:style>
+          <a:lnRef idx="1">
+            <a:schemeClr val="accent1"/>
+          </a:lnRef>
+          <a:fillRef idx="3">
+            <a:schemeClr val="accent1"/>
+          </a:fillRef>
+          <a:effectRef idx="2">
+            <a:schemeClr val="accent1"/>
+          </a:effectRef>
+          <a:fontRef idx="minor">
+            <a:schemeClr val="lt1"/>
+          </a:fontRef>
+        </p:style>
+        <p:txBody>
+          <a:bodyPr rtlCol="0" anchor="ctr"/>
+          <a:lstStyle/>
+          <a:p>
+            <a:pPr algn="ctr"/>
           </a:p>
         </p:txBody>
       </p:sp>
@@ -5398,8 +5087,8 @@
         </p:nvSpPr>
         <p:spPr>
           <a:xfrm>
-            <a:off x="914400" y="6236208"/>
-            <a:ext cx="10058400" cy="274320"/>
+            <a:off x="6492240" y="1874519"/>
+            <a:ext cx="4754880" cy="365760"/>
           </a:xfrm>
           <a:prstGeom prst="rect">
             <a:avLst/>
@@ -5413,7 +5102,124 @@
           <a:lstStyle/>
           <a:p>
             <a:pPr algn="ctr">
-              <a:defRPr sz="1100" b="1">
+              <a:defRPr sz="2000" b="1">
+                <a:solidFill>
+                  <a:srgbClr val="7B2CBF"/>
+                </a:solidFill>
+                <a:latin typeface="Aptos"/>
+              </a:defRPr>
+            </a:pPr>
+            <a:r>
+              <a:t>AUDIT</a:t>
+            </a:r>
+          </a:p>
+        </p:txBody>
+      </p:sp>
+      <p:sp>
+        <p:nvSpPr>
+          <p:cNvPr id="10" name="TextBox 9"/>
+          <p:cNvSpPr txBox="1"/>
+          <p:nvPr/>
+        </p:nvSpPr>
+        <p:spPr>
+          <a:xfrm>
+            <a:off x="6583679" y="2587752"/>
+            <a:ext cx="4572000" cy="338327"/>
+          </a:xfrm>
+          <a:prstGeom prst="rect">
+            <a:avLst/>
+          </a:prstGeom>
+          <a:noFill/>
+        </p:spPr>
+        <p:txBody>
+          <a:bodyPr wrap="square" anchor="t">
+            <a:spAutoFit/>
+          </a:bodyPr>
+          <a:lstStyle/>
+          <a:p>
+            <a:pPr algn="ctr">
+              <a:defRPr sz="1500" b="0">
+                <a:solidFill>
+                  <a:srgbClr val="F0F4F8"/>
+                </a:solidFill>
+                <a:latin typeface="Aptos"/>
+              </a:defRPr>
+            </a:pPr>
+            <a:r>
+              <a:t>Race, gender, age at the deployed point + FPDP</a:t>
+            </a:r>
+          </a:p>
+        </p:txBody>
+      </p:sp>
+      <p:sp>
+        <p:nvSpPr>
+          <p:cNvPr id="11" name="Rounded Rectangle 10"/>
+          <p:cNvSpPr/>
+          <p:nvPr/>
+        </p:nvSpPr>
+        <p:spPr>
+          <a:xfrm>
+            <a:off x="685800" y="3474720"/>
+            <a:ext cx="5212080" cy="1572768"/>
+          </a:xfrm>
+          <a:prstGeom prst="roundRect">
+            <a:avLst/>
+          </a:prstGeom>
+          <a:solidFill>
+            <a:srgbClr val="143058"/>
+          </a:solidFill>
+          <a:ln>
+            <a:solidFill>
+              <a:srgbClr val="FB8500"/>
+            </a:solidFill>
+          </a:ln>
+        </p:spPr>
+        <p:style>
+          <a:lnRef idx="1">
+            <a:schemeClr val="accent1"/>
+          </a:lnRef>
+          <a:fillRef idx="3">
+            <a:schemeClr val="accent1"/>
+          </a:fillRef>
+          <a:effectRef idx="2">
+            <a:schemeClr val="accent1"/>
+          </a:effectRef>
+          <a:fontRef idx="minor">
+            <a:schemeClr val="lt1"/>
+          </a:fontRef>
+        </p:style>
+        <p:txBody>
+          <a:bodyPr rtlCol="0" anchor="ctr"/>
+          <a:lstStyle/>
+          <a:p>
+            <a:pPr algn="ctr"/>
+          </a:p>
+        </p:txBody>
+      </p:sp>
+      <p:sp>
+        <p:nvSpPr>
+          <p:cNvPr id="12" name="TextBox 11"/>
+          <p:cNvSpPr txBox="1"/>
+          <p:nvPr/>
+        </p:nvSpPr>
+        <p:spPr>
+          <a:xfrm>
+            <a:off x="914400" y="3749039"/>
+            <a:ext cx="4754880" cy="365760"/>
+          </a:xfrm>
+          <a:prstGeom prst="rect">
+            <a:avLst/>
+          </a:prstGeom>
+          <a:noFill/>
+        </p:spPr>
+        <p:txBody>
+          <a:bodyPr wrap="square" anchor="t">
+            <a:spAutoFit/>
+          </a:bodyPr>
+          <a:lstStyle/>
+          <a:p>
+            <a:pPr algn="ctr">
+              <a:defRPr sz="2000" b="1">
                 <a:solidFill>
                   <a:srgbClr val="FB8500"/>
                 </a:solidFill>
@@ -5421,14 +5227,203 @@
               </a:defRPr>
             </a:pPr>
             <a:r>
-              <a:t>FPDP identifies candidate variables (association, not causation). Mitigation is evaluated on the same labels: illustrative.</a:t>
-            </a:r>
-          </a:p>
-        </p:txBody>
-      </p:sp>
-      <p:sp>
-        <p:nvSpPr>
-          <p:cNvPr id="10" name="TextBox 9"/>
+              <a:t>COMPARE</a:t>
+            </a:r>
+          </a:p>
+        </p:txBody>
+      </p:sp>
+      <p:sp>
+        <p:nvSpPr>
+          <p:cNvPr id="13" name="TextBox 12"/>
+          <p:cNvSpPr txBox="1"/>
+          <p:nvPr/>
+        </p:nvSpPr>
+        <p:spPr>
+          <a:xfrm>
+            <a:off x="1005840" y="4462272"/>
+            <a:ext cx="4572000" cy="338327"/>
+          </a:xfrm>
+          <a:prstGeom prst="rect">
+            <a:avLst/>
+          </a:prstGeom>
+          <a:noFill/>
+        </p:spPr>
+        <p:txBody>
+          <a:bodyPr wrap="square" anchor="t">
+            <a:spAutoFit/>
+          </a:bodyPr>
+          <a:lstStyle/>
+          <a:p>
+            <a:pPr algn="ctr">
+              <a:defRPr sz="1500" b="0">
+                <a:solidFill>
+                  <a:srgbClr val="F0F4F8"/>
+                </a:solidFill>
+                <a:latin typeface="Aptos"/>
+              </a:defRPr>
+            </a:pPr>
+            <a:r>
+              <a:t>Incumbent, learning curve, matrix</a:t>
+            </a:r>
+          </a:p>
+        </p:txBody>
+      </p:sp>
+      <p:sp>
+        <p:nvSpPr>
+          <p:cNvPr id="14" name="Rounded Rectangle 13"/>
+          <p:cNvSpPr/>
+          <p:nvPr/>
+        </p:nvSpPr>
+        <p:spPr>
+          <a:xfrm>
+            <a:off x="6263640" y="3474720"/>
+            <a:ext cx="5212080" cy="1572768"/>
+          </a:xfrm>
+          <a:prstGeom prst="roundRect">
+            <a:avLst/>
+          </a:prstGeom>
+          <a:solidFill>
+            <a:srgbClr val="143058"/>
+          </a:solidFill>
+          <a:ln>
+            <a:solidFill>
+              <a:srgbClr val="7B2CBF"/>
+            </a:solidFill>
+          </a:ln>
+        </p:spPr>
+        <p:style>
+          <a:lnRef idx="1">
+            <a:schemeClr val="accent1"/>
+          </a:lnRef>
+          <a:fillRef idx="3">
+            <a:schemeClr val="accent1"/>
+          </a:fillRef>
+          <a:effectRef idx="2">
+            <a:schemeClr val="accent1"/>
+          </a:effectRef>
+          <a:fontRef idx="minor">
+            <a:schemeClr val="lt1"/>
+          </a:fontRef>
+        </p:style>
+        <p:txBody>
+          <a:bodyPr rtlCol="0" anchor="ctr"/>
+          <a:lstStyle/>
+          <a:p>
+            <a:pPr algn="ctr"/>
+          </a:p>
+        </p:txBody>
+      </p:sp>
+      <p:sp>
+        <p:nvSpPr>
+          <p:cNvPr id="15" name="TextBox 14"/>
+          <p:cNvSpPr txBox="1"/>
+          <p:nvPr/>
+        </p:nvSpPr>
+        <p:spPr>
+          <a:xfrm>
+            <a:off x="6492240" y="3749039"/>
+            <a:ext cx="4754880" cy="365760"/>
+          </a:xfrm>
+          <a:prstGeom prst="rect">
+            <a:avLst/>
+          </a:prstGeom>
+          <a:noFill/>
+        </p:spPr>
+        <p:txBody>
+          <a:bodyPr wrap="square" anchor="t">
+            <a:spAutoFit/>
+          </a:bodyPr>
+          <a:lstStyle/>
+          <a:p>
+            <a:pPr algn="ctr">
+              <a:defRPr sz="2000" b="1">
+                <a:solidFill>
+                  <a:srgbClr val="7B2CBF"/>
+                </a:solidFill>
+                <a:latin typeface="Aptos"/>
+              </a:defRPr>
+            </a:pPr>
+            <a:r>
+              <a:t>SIMULATE</a:t>
+            </a:r>
+          </a:p>
+        </p:txBody>
+      </p:sp>
+      <p:sp>
+        <p:nvSpPr>
+          <p:cNvPr id="16" name="TextBox 15"/>
+          <p:cNvSpPr txBox="1"/>
+          <p:nvPr/>
+        </p:nvSpPr>
+        <p:spPr>
+          <a:xfrm>
+            <a:off x="6583679" y="4462272"/>
+            <a:ext cx="4572000" cy="338327"/>
+          </a:xfrm>
+          <a:prstGeom prst="rect">
+            <a:avLst/>
+          </a:prstGeom>
+          <a:noFill/>
+        </p:spPr>
+        <p:txBody>
+          <a:bodyPr wrap="square" anchor="t">
+            <a:spAutoFit/>
+          </a:bodyPr>
+          <a:lstStyle/>
+          <a:p>
+            <a:pPr algn="ctr">
+              <a:defRPr sz="1500" b="0">
+                <a:solidFill>
+                  <a:srgbClr val="F0F4F8"/>
+                </a:solidFill>
+                <a:latin typeface="Aptos"/>
+              </a:defRPr>
+            </a:pPr>
+            <a:r>
+              <a:t>Costs, capacity, sensitivity</a:t>
+            </a:r>
+          </a:p>
+        </p:txBody>
+      </p:sp>
+      <p:sp>
+        <p:nvSpPr>
+          <p:cNvPr id="17" name="TextBox 16"/>
+          <p:cNvSpPr txBox="1"/>
+          <p:nvPr/>
+        </p:nvSpPr>
+        <p:spPr>
+          <a:xfrm>
+            <a:off x="4023360" y="5715000"/>
+            <a:ext cx="4114800" cy="365760"/>
+          </a:xfrm>
+          <a:prstGeom prst="rect">
+            <a:avLst/>
+          </a:prstGeom>
+          <a:noFill/>
+        </p:spPr>
+        <p:txBody>
+          <a:bodyPr wrap="square" anchor="t">
+            <a:spAutoFit/>
+          </a:bodyPr>
+          <a:lstStyle/>
+          <a:p>
+            <a:pPr algn="ctr">
+              <a:defRPr sz="1700" b="1">
+                <a:solidFill>
+                  <a:srgbClr val="F0F4F8"/>
+                </a:solidFill>
+                <a:latin typeface="Consolas"/>
+              </a:defRPr>
+            </a:pPr>
+            <a:r>
+              <a:t>streamlit run app.py</a:t>
+            </a:r>
+          </a:p>
+        </p:txBody>
+      </p:sp>
+      <p:sp>
+        <p:nvSpPr>
+          <p:cNvPr id="18" name="TextBox 17"/>
           <p:cNvSpPr txBox="1"/>
           <p:nvPr/>
         </p:nvSpPr>
@@ -5464,7 +5459,7 @@
       </p:sp>
       <p:sp>
         <p:nvSpPr>
-          <p:cNvPr id="11" name="TextBox 10"/>
+          <p:cNvPr id="19" name="TextBox 18"/>
           <p:cNvSpPr txBox="1"/>
           <p:nvPr/>
         </p:nvSpPr>
@@ -5532,8 +5527,8 @@
         </p:nvSpPr>
         <p:spPr>
           <a:xfrm>
-            <a:off x="594360" y="256032"/>
-            <a:ext cx="10972800" cy="274320"/>
+            <a:off x="658368" y="2377440"/>
+            <a:ext cx="7315200" cy="457200"/>
           </a:xfrm>
           <a:prstGeom prst="rect">
             <a:avLst/>
@@ -5547,7 +5542,7 @@
           <a:lstStyle/>
           <a:p>
             <a:pPr algn="l">
-              <a:defRPr sz="1000" b="1">
+              <a:defRPr sz="1400" b="1">
                 <a:solidFill>
                   <a:srgbClr val="FB8500"/>
                 </a:solidFill>
@@ -5555,7 +5550,7 @@
               </a:defRPr>
             </a:pPr>
             <a:r>
-              <a:t>13 · PROCESS</a:t>
+              <a:t>APPENDIX</a:t>
             </a:r>
           </a:p>
         </p:txBody>
@@ -5568,8 +5563,8 @@
         </p:nvSpPr>
         <p:spPr>
           <a:xfrm>
-            <a:off x="594360" y="621792"/>
-            <a:ext cx="10972800" cy="594360"/>
+            <a:off x="658368" y="2880360"/>
+            <a:ext cx="8229600" cy="1371600"/>
           </a:xfrm>
           <a:prstGeom prst="rect">
             <a:avLst/>
@@ -5583,7 +5578,7 @@
           <a:lstStyle/>
           <a:p>
             <a:pPr algn="l">
-              <a:defRPr sz="2600" b="1">
+              <a:defRPr sz="3400" b="1">
                 <a:solidFill>
                   <a:srgbClr val="FFFFFF"/>
                 </a:solidFill>
@@ -5591,124 +5586,25 @@
               </a:defRPr>
             </a:pPr>
             <a:r>
-              <a:t>How we got here: what we tried, where we landed</a:t>
-            </a:r>
-          </a:p>
-        </p:txBody>
-      </p:sp>
-      <p:sp>
-        <p:nvSpPr>
-          <p:cNvPr id="4" name="Rectangle 3"/>
-          <p:cNvSpPr/>
-          <p:nvPr/>
-        </p:nvSpPr>
-        <p:spPr>
-          <a:xfrm>
-            <a:off x="594360" y="1298448"/>
-            <a:ext cx="1005840" cy="50292"/>
-          </a:xfrm>
-          <a:prstGeom prst="rect">
-            <a:avLst/>
-          </a:prstGeom>
-          <a:solidFill>
-            <a:srgbClr val="FB8500"/>
-          </a:solidFill>
-          <a:ln>
-            <a:noFill/>
-          </a:ln>
-        </p:spPr>
-        <p:style>
-          <a:lnRef idx="1">
-            <a:schemeClr val="accent1"/>
-          </a:lnRef>
-          <a:fillRef idx="3">
-            <a:schemeClr val="accent1"/>
-          </a:fillRef>
-          <a:effectRef idx="2">
-            <a:schemeClr val="accent1"/>
-          </a:effectRef>
-          <a:fontRef idx="minor">
-            <a:schemeClr val="lt1"/>
-          </a:fontRef>
-        </p:style>
-        <p:txBody>
-          <a:bodyPr rtlCol="0" anchor="ctr"/>
-          <a:lstStyle/>
-          <a:p>
-            <a:pPr algn="ctr"/>
-          </a:p>
-        </p:txBody>
-      </p:sp>
-      <p:pic>
-        <p:nvPicPr>
-          <p:cNvPr id="5" name="Picture 4" descr="improvement_journey.png"/>
-          <p:cNvPicPr>
-            <a:picLocks noChangeAspect="1"/>
-          </p:cNvPicPr>
-          <p:nvPr/>
-        </p:nvPicPr>
-        <p:blipFill>
-          <a:blip r:embed="rId2"/>
-          <a:stretch>
-            <a:fillRect/>
-          </a:stretch>
-        </p:blipFill>
-        <p:spPr>
-          <a:xfrm>
-            <a:off x="502920" y="1600200"/>
-            <a:ext cx="11155680" cy="4030062"/>
-          </a:xfrm>
-          <a:prstGeom prst="rect">
-            <a:avLst/>
-          </a:prstGeom>
-        </p:spPr>
-      </p:pic>
-      <p:sp>
-        <p:nvSpPr>
-          <p:cNvPr id="6" name="TextBox 5"/>
-          <p:cNvSpPr txBox="1"/>
-          <p:nvPr/>
-        </p:nvSpPr>
-        <p:spPr>
-          <a:xfrm>
-            <a:off x="914400" y="6236208"/>
-            <a:ext cx="10058400" cy="274320"/>
-          </a:xfrm>
-          <a:prstGeom prst="rect">
-            <a:avLst/>
-          </a:prstGeom>
-          <a:noFill/>
-        </p:spPr>
-        <p:txBody>
-          <a:bodyPr wrap="square" anchor="t">
-            <a:spAutoFit/>
-          </a:bodyPr>
-          <a:lstStyle/>
-          <a:p>
-            <a:pPr algn="ctr">
-              <a:defRPr sz="1100" b="1">
-                <a:solidFill>
-                  <a:srgbClr val="FB8500"/>
-                </a:solidFill>
-                <a:latin typeface="Aptos"/>
-              </a:defRPr>
-            </a:pPr>
-            <a:r>
-              <a:t>Full log in JOURNEY.md — every step measured, including the attempts we rejected.</a:t>
-            </a:r>
-          </a:p>
-        </p:txBody>
-      </p:sp>
-      <p:sp>
-        <p:nvSpPr>
-          <p:cNvPr id="7" name="TextBox 6"/>
-          <p:cNvSpPr txBox="1"/>
-          <p:nvPr/>
-        </p:nvSpPr>
-        <p:spPr>
-          <a:xfrm>
-            <a:off x="594360" y="6510528"/>
-            <a:ext cx="3657600" cy="164592"/>
+              <a:t>Supporting evidence</a:t>
+            </a:r>
+            <a:br/>
+            <a:r>
+              <a:t>for questions</a:t>
+            </a:r>
+          </a:p>
+        </p:txBody>
+      </p:sp>
+      <p:sp>
+        <p:nvSpPr>
+          <p:cNvPr id="4" name="TextBox 3"/>
+          <p:cNvSpPr txBox="1"/>
+          <p:nvPr/>
+        </p:nvSpPr>
+        <p:spPr>
+          <a:xfrm>
+            <a:off x="694944" y="4526280"/>
+            <a:ext cx="8686800" cy="822960"/>
           </a:xfrm>
           <a:prstGeom prst="rect">
             <a:avLst/>
@@ -5722,51 +5618,15 @@
           <a:lstStyle/>
           <a:p>
             <a:pPr algn="l">
-              <a:defRPr sz="800" b="0">
-                <a:solidFill>
-                  <a:srgbClr val="828FA0"/>
-                </a:solidFill>
-                <a:latin typeface="Aptos"/>
-              </a:defRPr>
-            </a:pPr>
-            <a:r>
-              <a:t>HEC Paris · ISAF · 2026</a:t>
-            </a:r>
-          </a:p>
-        </p:txBody>
-      </p:sp>
-      <p:sp>
-        <p:nvSpPr>
-          <p:cNvPr id="8" name="TextBox 7"/>
-          <p:cNvSpPr txBox="1"/>
-          <p:nvPr/>
-        </p:nvSpPr>
-        <p:spPr>
-          <a:xfrm>
-            <a:off x="11109960" y="6492240"/>
-            <a:ext cx="411480" cy="164592"/>
-          </a:xfrm>
-          <a:prstGeom prst="rect">
-            <a:avLst/>
-          </a:prstGeom>
-          <a:noFill/>
-        </p:spPr>
-        <p:txBody>
-          <a:bodyPr wrap="square" anchor="t">
-            <a:spAutoFit/>
-          </a:bodyPr>
-          <a:lstStyle/>
-          <a:p>
-            <a:pPr algn="r">
-              <a:defRPr sz="800" b="0">
-                <a:solidFill>
-                  <a:srgbClr val="828FA0"/>
-                </a:solidFill>
-                <a:latin typeface="Aptos"/>
-              </a:defRPr>
-            </a:pPr>
-            <a:r>
-              <a:t>14</a:t>
+              <a:defRPr sz="1500" b="0">
+                <a:solidFill>
+                  <a:srgbClr val="F0F4F8"/>
+                </a:solidFill>
+                <a:latin typeface="Aptos"/>
+              </a:defRPr>
+            </a:pPr>
+            <a:r>
+              <a:t>Learning curve · economic sensitivity · interpretability methods · explanation disagreement · LIME fidelity · stability · process log</a:t>
             </a:r>
           </a:p>
         </p:txBody>
@@ -5828,7 +5688,7 @@
               </a:defRPr>
             </a:pPr>
             <a:r>
-              <a:t>14 · TRADE-OFFS ACROSS FOUR DIMENSIONS</a:t>
+              <a:t>A1 · LEARNING CURVE</a:t>
             </a:r>
           </a:p>
         </p:txBody>
@@ -5864,7 +5724,7 @@
               </a:defRPr>
             </a:pPr>
             <a:r>
-              <a:t>Which model should the client deploy?</a:t>
+              <a:t>Which model for which agency size?</a:t>
             </a:r>
           </a:p>
         </p:txBody>
@@ -5914,7 +5774,7 @@
       </p:sp>
       <p:pic>
         <p:nvPicPr>
-          <p:cNvPr id="5" name="Picture 4" descr="tradeoff_matrix.png"/>
+          <p:cNvPr id="5" name="Picture 4" descr="learning_curve.png"/>
           <p:cNvPicPr>
             <a:picLocks noChangeAspect="1"/>
           </p:cNvPicPr>
@@ -5928,8 +5788,8 @@
         </p:blipFill>
         <p:spPr>
           <a:xfrm>
-            <a:off x="2881094" y="1481328"/>
-            <a:ext cx="6399331" cy="4782312"/>
+            <a:off x="731520" y="1645920"/>
+            <a:ext cx="10698480" cy="4022802"/>
           </a:xfrm>
           <a:prstGeom prst="rect">
             <a:avLst/>
@@ -5944,66 +5804,30 @@
         </p:nvSpPr>
         <p:spPr>
           <a:xfrm>
-            <a:off x="594360" y="6510528"/>
-            <a:ext cx="3657600" cy="164592"/>
-          </a:xfrm>
-          <a:prstGeom prst="rect">
-            <a:avLst/>
-          </a:prstGeom>
-          <a:noFill/>
-        </p:spPr>
-        <p:txBody>
-          <a:bodyPr wrap="square" anchor="t">
-            <a:spAutoFit/>
-          </a:bodyPr>
-          <a:lstStyle/>
-          <a:p>
-            <a:pPr algn="l">
-              <a:defRPr sz="800" b="0">
-                <a:solidFill>
-                  <a:srgbClr val="828FA0"/>
-                </a:solidFill>
-                <a:latin typeface="Aptos"/>
-              </a:defRPr>
-            </a:pPr>
-            <a:r>
-              <a:t>HEC Paris · ISAF · 2026</a:t>
-            </a:r>
-          </a:p>
-        </p:txBody>
-      </p:sp>
-      <p:sp>
-        <p:nvSpPr>
-          <p:cNvPr id="7" name="TextBox 6"/>
-          <p:cNvSpPr txBox="1"/>
-          <p:nvPr/>
-        </p:nvSpPr>
-        <p:spPr>
-          <a:xfrm>
-            <a:off x="11109960" y="6492240"/>
-            <a:ext cx="411480" cy="164592"/>
-          </a:xfrm>
-          <a:prstGeom prst="rect">
-            <a:avLst/>
-          </a:prstGeom>
-          <a:noFill/>
-        </p:spPr>
-        <p:txBody>
-          <a:bodyPr wrap="square" anchor="t">
-            <a:spAutoFit/>
-          </a:bodyPr>
-          <a:lstStyle/>
-          <a:p>
-            <a:pPr algn="r">
-              <a:defRPr sz="800" b="0">
-                <a:solidFill>
-                  <a:srgbClr val="828FA0"/>
-                </a:solidFill>
-                <a:latin typeface="Aptos"/>
-              </a:defRPr>
-            </a:pPr>
-            <a:r>
-              <a:t>15</a:t>
+            <a:off x="914400" y="6126480"/>
+            <a:ext cx="10058400" cy="457200"/>
+          </a:xfrm>
+          <a:prstGeom prst="rect">
+            <a:avLst/>
+          </a:prstGeom>
+          <a:noFill/>
+        </p:spPr>
+        <p:txBody>
+          <a:bodyPr wrap="square" anchor="t">
+            <a:spAutoFit/>
+          </a:bodyPr>
+          <a:lstStyle/>
+          <a:p>
+            <a:pPr algn="ctr">
+              <a:defRPr sz="1300" b="1">
+                <a:solidFill>
+                  <a:srgbClr val="FB8500"/>
+                </a:solidFill>
+                <a:latin typeface="Aptos"/>
+              </a:defRPr>
+            </a:pPr>
+            <a:r>
+              <a:t>Subsamples of one Georgia cohort test sample-size sensitivity; they do not validate transfer to other agencies.</a:t>
             </a:r>
           </a:p>
         </p:txBody>
@@ -6065,7 +5889,7 @@
               </a:defRPr>
             </a:pPr>
             <a:r>
-              <a:t>15 · RECOMMENDATION</a:t>
+              <a:t>A2 · ECONOMIC PERFORMANCE</a:t>
             </a:r>
           </a:p>
         </p:txBody>
@@ -6101,7 +5925,7 @@
               </a:defRPr>
             </a:pPr>
             <a:r>
-              <a:t>Pilot XGBoost; retain logistic as a transparent challenger</a:t>
+              <a:t>Model value is a scenario, stress-tested</a:t>
             </a:r>
           </a:p>
         </p:txBody>
@@ -6157,8 +5981,125 @@
         </p:nvSpPr>
         <p:spPr>
           <a:xfrm>
-            <a:off x="731520" y="1645920"/>
-            <a:ext cx="5257800" cy="4251960"/>
+            <a:off x="731520" y="1737360"/>
+            <a:ext cx="2423160" cy="1261872"/>
+          </a:xfrm>
+          <a:prstGeom prst="roundRect">
+            <a:avLst/>
+          </a:prstGeom>
+          <a:solidFill>
+            <a:srgbClr val="143058"/>
+          </a:solidFill>
+          <a:ln>
+            <a:solidFill>
+              <a:srgbClr val="FB8500"/>
+            </a:solidFill>
+          </a:ln>
+        </p:spPr>
+        <p:style>
+          <a:lnRef idx="1">
+            <a:schemeClr val="accent1"/>
+          </a:lnRef>
+          <a:fillRef idx="3">
+            <a:schemeClr val="accent1"/>
+          </a:fillRef>
+          <a:effectRef idx="2">
+            <a:schemeClr val="accent1"/>
+          </a:effectRef>
+          <a:fontRef idx="minor">
+            <a:schemeClr val="lt1"/>
+          </a:fontRef>
+        </p:style>
+        <p:txBody>
+          <a:bodyPr rtlCol="0" anchor="ctr"/>
+          <a:lstStyle/>
+          <a:p>
+            <a:pPr algn="ctr"/>
+          </a:p>
+        </p:txBody>
+      </p:sp>
+      <p:sp>
+        <p:nvSpPr>
+          <p:cNvPr id="6" name="TextBox 5"/>
+          <p:cNvSpPr txBox="1"/>
+          <p:nvPr/>
+        </p:nvSpPr>
+        <p:spPr>
+          <a:xfrm>
+            <a:off x="841248" y="1874519"/>
+            <a:ext cx="2194560" cy="438912"/>
+          </a:xfrm>
+          <a:prstGeom prst="rect">
+            <a:avLst/>
+          </a:prstGeom>
+          <a:noFill/>
+        </p:spPr>
+        <p:txBody>
+          <a:bodyPr wrap="square" anchor="t">
+            <a:spAutoFit/>
+          </a:bodyPr>
+          <a:lstStyle/>
+          <a:p>
+            <a:pPr algn="ctr">
+              <a:defRPr sz="2400" b="1">
+                <a:solidFill>
+                  <a:srgbClr val="FB8500"/>
+                </a:solidFill>
+                <a:latin typeface="Aptos"/>
+              </a:defRPr>
+            </a:pPr>
+            <a:r>
+              <a:t>20%</a:t>
+            </a:r>
+          </a:p>
+        </p:txBody>
+      </p:sp>
+      <p:sp>
+        <p:nvSpPr>
+          <p:cNvPr id="7" name="TextBox 6"/>
+          <p:cNvSpPr txBox="1"/>
+          <p:nvPr/>
+        </p:nvSpPr>
+        <p:spPr>
+          <a:xfrm>
+            <a:off x="841248" y="2395728"/>
+            <a:ext cx="2194560" cy="274320"/>
+          </a:xfrm>
+          <a:prstGeom prst="rect">
+            <a:avLst/>
+          </a:prstGeom>
+          <a:noFill/>
+        </p:spPr>
+        <p:txBody>
+          <a:bodyPr wrap="square" anchor="t">
+            <a:spAutoFit/>
+          </a:bodyPr>
+          <a:lstStyle/>
+          <a:p>
+            <a:pPr algn="ctr">
+              <a:defRPr sz="1100" b="1">
+                <a:solidFill>
+                  <a:srgbClr val="FFFFFF"/>
+                </a:solidFill>
+                <a:latin typeface="Aptos"/>
+              </a:defRPr>
+            </a:pPr>
+            <a:r>
+              <a:t>SERVICE CAPACITY</a:t>
+            </a:r>
+          </a:p>
+        </p:txBody>
+      </p:sp>
+      <p:sp>
+        <p:nvSpPr>
+          <p:cNvPr id="8" name="Rounded Rectangle 7"/>
+          <p:cNvSpPr/>
+          <p:nvPr/>
+        </p:nvSpPr>
+        <p:spPr>
+          <a:xfrm>
+            <a:off x="3429000" y="1737360"/>
+            <a:ext cx="2423160" cy="1261872"/>
           </a:xfrm>
           <a:prstGeom prst="roundRect">
             <a:avLst/>
@@ -6196,14 +6137,14 @@
       </p:sp>
       <p:sp>
         <p:nvSpPr>
-          <p:cNvPr id="6" name="TextBox 5"/>
-          <p:cNvSpPr txBox="1"/>
-          <p:nvPr/>
-        </p:nvSpPr>
-        <p:spPr>
-          <a:xfrm>
-            <a:off x="960120" y="1920240"/>
-            <a:ext cx="4800600" cy="365760"/>
+          <p:cNvPr id="9" name="TextBox 8"/>
+          <p:cNvSpPr txBox="1"/>
+          <p:nvPr/>
+        </p:nvSpPr>
+        <p:spPr>
+          <a:xfrm>
+            <a:off x="3538728" y="1874519"/>
+            <a:ext cx="2194560" cy="438912"/>
           </a:xfrm>
           <a:prstGeom prst="rect">
             <a:avLst/>
@@ -6217,7 +6158,7 @@
           <a:lstStyle/>
           <a:p>
             <a:pPr algn="ctr">
-              <a:defRPr sz="2000" b="1">
+              <a:defRPr sz="2400" b="1">
                 <a:solidFill>
                   <a:srgbClr val="00B4B4"/>
                 </a:solidFill>
@@ -6225,21 +6166,21 @@
               </a:defRPr>
             </a:pPr>
             <a:r>
-              <a:t>WHY XGBOOST</a:t>
-            </a:r>
-          </a:p>
-        </p:txBody>
-      </p:sp>
-      <p:sp>
-        <p:nvSpPr>
-          <p:cNvPr id="7" name="TextBox 6"/>
-          <p:cNvSpPr txBox="1"/>
-          <p:nvPr/>
-        </p:nvSpPr>
-        <p:spPr>
-          <a:xfrm>
-            <a:off x="1051560" y="2633472"/>
-            <a:ext cx="4617720" cy="3017520"/>
+              <a:t>$5.17M</a:t>
+            </a:r>
+          </a:p>
+        </p:txBody>
+      </p:sp>
+      <p:sp>
+        <p:nvSpPr>
+          <p:cNvPr id="10" name="TextBox 9"/>
+          <p:cNvSpPr txBox="1"/>
+          <p:nvPr/>
+        </p:nvSpPr>
+        <p:spPr>
+          <a:xfrm>
+            <a:off x="3538728" y="2395728"/>
+            <a:ext cx="2194560" cy="274320"/>
           </a:xfrm>
           <a:prstGeom prst="rect">
             <a:avLst/>
@@ -6253,44 +6194,29 @@
           <a:lstStyle/>
           <a:p>
             <a:pPr algn="ctr">
-              <a:defRPr sz="1500" b="0">
-                <a:solidFill>
-                  <a:srgbClr val="F0F4F8"/>
-                </a:solidFill>
-                <a:latin typeface="Aptos"/>
-              </a:defRPr>
-            </a:pPr>
-            <a:r>
-              <a:t>Competitive probability loss</a:t>
-            </a:r>
-            <a:br/>
-            <a:br/>
-            <a:r>
-              <a:t>Audit subgroup errors</a:t>
-            </a:r>
-            <a:br/>
-            <a:br/>
-            <a:r>
-              <a:t>SHAP explanations available</a:t>
-            </a:r>
-            <a:br/>
-            <a:br/>
-            <a:r>
-              <a:t>Low inference cost</a:t>
-            </a:r>
-          </a:p>
-        </p:txBody>
-      </p:sp>
-      <p:sp>
-        <p:nvSpPr>
-          <p:cNvPr id="8" name="Rounded Rectangle 7"/>
+              <a:defRPr sz="1100" b="1">
+                <a:solidFill>
+                  <a:srgbClr val="FFFFFF"/>
+                </a:solidFill>
+                <a:latin typeface="Aptos"/>
+              </a:defRPr>
+            </a:pPr>
+            <a:r>
+              <a:t>XGBOOST NET</a:t>
+            </a:r>
+          </a:p>
+        </p:txBody>
+      </p:sp>
+      <p:sp>
+        <p:nvSpPr>
+          <p:cNvPr id="11" name="Rounded Rectangle 10"/>
           <p:cNvSpPr/>
           <p:nvPr/>
         </p:nvSpPr>
         <p:spPr>
           <a:xfrm>
-            <a:off x="6217920" y="1645920"/>
-            <a:ext cx="5257800" cy="4251960"/>
+            <a:off x="6126480" y="1737360"/>
+            <a:ext cx="2423160" cy="1261872"/>
           </a:xfrm>
           <a:prstGeom prst="roundRect">
             <a:avLst/>
@@ -6300,7 +6226,7 @@
           </a:solidFill>
           <a:ln>
             <a:solidFill>
-              <a:srgbClr val="7B2CBF"/>
+              <a:srgbClr val="D64343"/>
             </a:solidFill>
           </a:ln>
         </p:spPr>
@@ -6328,14 +6254,14 @@
       </p:sp>
       <p:sp>
         <p:nvSpPr>
-          <p:cNvPr id="9" name="TextBox 8"/>
-          <p:cNvSpPr txBox="1"/>
-          <p:nvPr/>
-        </p:nvSpPr>
-        <p:spPr>
-          <a:xfrm>
-            <a:off x="6446520" y="1920240"/>
-            <a:ext cx="4800600" cy="365760"/>
+          <p:cNvPr id="12" name="TextBox 11"/>
+          <p:cNvSpPr txBox="1"/>
+          <p:nvPr/>
+        </p:nvSpPr>
+        <p:spPr>
+          <a:xfrm>
+            <a:off x="6236208" y="1874519"/>
+            <a:ext cx="2194560" cy="438912"/>
           </a:xfrm>
           <a:prstGeom prst="rect">
             <a:avLst/>
@@ -6349,29 +6275,29 @@
           <a:lstStyle/>
           <a:p>
             <a:pPr algn="ctr">
-              <a:defRPr sz="2000" b="1">
-                <a:solidFill>
-                  <a:srgbClr val="7B2CBF"/>
-                </a:solidFill>
-                <a:latin typeface="Aptos"/>
-              </a:defRPr>
-            </a:pPr>
-            <a:r>
-              <a:t>CONDITIONS</a:t>
-            </a:r>
-          </a:p>
-        </p:txBody>
-      </p:sp>
-      <p:sp>
-        <p:nvSpPr>
-          <p:cNvPr id="10" name="TextBox 9"/>
-          <p:cNvSpPr txBox="1"/>
-          <p:nvPr/>
-        </p:nvSpPr>
-        <p:spPr>
-          <a:xfrm>
-            <a:off x="6537959" y="2633472"/>
-            <a:ext cx="4617720" cy="3017520"/>
+              <a:defRPr sz="2400" b="1">
+                <a:solidFill>
+                  <a:srgbClr val="D64343"/>
+                </a:solidFill>
+                <a:latin typeface="Aptos"/>
+              </a:defRPr>
+            </a:pPr>
+            <a:r>
+              <a:t>$2.73M</a:t>
+            </a:r>
+          </a:p>
+        </p:txBody>
+      </p:sp>
+      <p:sp>
+        <p:nvSpPr>
+          <p:cNvPr id="13" name="TextBox 12"/>
+          <p:cNvSpPr txBox="1"/>
+          <p:nvPr/>
+        </p:nvSpPr>
+        <p:spPr>
+          <a:xfrm>
+            <a:off x="6236208" y="2395728"/>
+            <a:ext cx="2194560" cy="274320"/>
           </a:xfrm>
           <a:prstGeom prst="rect">
             <a:avLst/>
@@ -6385,58 +6311,88 @@
           <a:lstStyle/>
           <a:p>
             <a:pPr algn="ctr">
-              <a:defRPr sz="1500" b="0">
-                <a:solidFill>
-                  <a:srgbClr val="F0F4F8"/>
-                </a:solidFill>
-                <a:latin typeface="Aptos"/>
-              </a:defRPr>
-            </a:pPr>
-            <a:r>
-              <a:t>Benefit-only allocation</a:t>
-            </a:r>
-            <a:br/>
-            <a:br/>
-            <a:r>
-              <a:t>Logistic as transparent challenger</a:t>
-            </a:r>
-            <a:br/>
-            <a:br/>
-            <a:r>
-              <a:t>Prospective shadow validation</a:t>
-            </a:r>
-            <a:br/>
-            <a:br/>
-            <a:r>
-              <a:t>Appeal route, logs, quarterly audits, stop rules</a:t>
-            </a:r>
-          </a:p>
-        </p:txBody>
-      </p:sp>
-      <p:sp>
-        <p:nvSpPr>
-          <p:cNvPr id="11" name="TextBox 10"/>
-          <p:cNvSpPr txBox="1"/>
-          <p:nvPr/>
-        </p:nvSpPr>
-        <p:spPr>
-          <a:xfrm>
-            <a:off x="594360" y="6510528"/>
-            <a:ext cx="3657600" cy="164592"/>
-          </a:xfrm>
-          <a:prstGeom prst="rect">
-            <a:avLst/>
-          </a:prstGeom>
-          <a:noFill/>
-        </p:spPr>
-        <p:txBody>
-          <a:bodyPr wrap="square" anchor="t">
-            <a:spAutoFit/>
-          </a:bodyPr>
-          <a:lstStyle/>
-          <a:p>
-            <a:pPr algn="l">
-              <a:defRPr sz="800" b="0">
+              <a:defRPr sz="1100" b="1">
+                <a:solidFill>
+                  <a:srgbClr val="FFFFFF"/>
+                </a:solidFill>
+                <a:latin typeface="Aptos"/>
+              </a:defRPr>
+            </a:pPr>
+            <a:r>
+              <a:t>INCUMBENT NET</a:t>
+            </a:r>
+          </a:p>
+        </p:txBody>
+      </p:sp>
+      <p:sp>
+        <p:nvSpPr>
+          <p:cNvPr id="14" name="Rounded Rectangle 13"/>
+          <p:cNvSpPr/>
+          <p:nvPr/>
+        </p:nvSpPr>
+        <p:spPr>
+          <a:xfrm>
+            <a:off x="8823960" y="1737360"/>
+            <a:ext cx="2423160" cy="1261872"/>
+          </a:xfrm>
+          <a:prstGeom prst="roundRect">
+            <a:avLst/>
+          </a:prstGeom>
+          <a:solidFill>
+            <a:srgbClr val="143058"/>
+          </a:solidFill>
+          <a:ln>
+            <a:solidFill>
+              <a:srgbClr val="828FA0"/>
+            </a:solidFill>
+          </a:ln>
+        </p:spPr>
+        <p:style>
+          <a:lnRef idx="1">
+            <a:schemeClr val="accent1"/>
+          </a:lnRef>
+          <a:fillRef idx="3">
+            <a:schemeClr val="accent1"/>
+          </a:fillRef>
+          <a:effectRef idx="2">
+            <a:schemeClr val="accent1"/>
+          </a:effectRef>
+          <a:fontRef idx="minor">
+            <a:schemeClr val="lt1"/>
+          </a:fontRef>
+        </p:style>
+        <p:txBody>
+          <a:bodyPr rtlCol="0" anchor="ctr"/>
+          <a:lstStyle/>
+          <a:p>
+            <a:pPr algn="ctr"/>
+          </a:p>
+        </p:txBody>
+      </p:sp>
+      <p:sp>
+        <p:nvSpPr>
+          <p:cNvPr id="15" name="TextBox 14"/>
+          <p:cNvSpPr txBox="1"/>
+          <p:nvPr/>
+        </p:nvSpPr>
+        <p:spPr>
+          <a:xfrm>
+            <a:off x="8933688" y="1874519"/>
+            <a:ext cx="2194560" cy="438912"/>
+          </a:xfrm>
+          <a:prstGeom prst="rect">
+            <a:avLst/>
+          </a:prstGeom>
+          <a:noFill/>
+        </p:spPr>
+        <p:txBody>
+          <a:bodyPr wrap="square" anchor="t">
+            <a:spAutoFit/>
+          </a:bodyPr>
+          <a:lstStyle/>
+          <a:p>
+            <a:pPr algn="ctr">
+              <a:defRPr sz="2400" b="1">
                 <a:solidFill>
                   <a:srgbClr val="828FA0"/>
                 </a:solidFill>
@@ -6444,43 +6400,114 @@
               </a:defRPr>
             </a:pPr>
             <a:r>
-              <a:t>HEC Paris · ISAF · 2026</a:t>
-            </a:r>
-          </a:p>
-        </p:txBody>
-      </p:sp>
-      <p:sp>
-        <p:nvSpPr>
-          <p:cNvPr id="12" name="TextBox 11"/>
-          <p:cNvSpPr txBox="1"/>
-          <p:nvPr/>
-        </p:nvSpPr>
-        <p:spPr>
-          <a:xfrm>
-            <a:off x="11109960" y="6492240"/>
-            <a:ext cx="411480" cy="164592"/>
-          </a:xfrm>
-          <a:prstGeom prst="rect">
-            <a:avLst/>
-          </a:prstGeom>
-          <a:noFill/>
-        </p:spPr>
-        <p:txBody>
-          <a:bodyPr wrap="square" anchor="t">
-            <a:spAutoFit/>
-          </a:bodyPr>
-          <a:lstStyle/>
-          <a:p>
-            <a:pPr algn="r">
-              <a:defRPr sz="800" b="0">
-                <a:solidFill>
-                  <a:srgbClr val="828FA0"/>
-                </a:solidFill>
-                <a:latin typeface="Aptos"/>
-              </a:defRPr>
-            </a:pPr>
-            <a:r>
-              <a:t>16</a:t>
+              <a:t>$1.46M</a:t>
+            </a:r>
+          </a:p>
+        </p:txBody>
+      </p:sp>
+      <p:sp>
+        <p:nvSpPr>
+          <p:cNvPr id="16" name="TextBox 15"/>
+          <p:cNvSpPr txBox="1"/>
+          <p:nvPr/>
+        </p:nvSpPr>
+        <p:spPr>
+          <a:xfrm>
+            <a:off x="8933688" y="2395728"/>
+            <a:ext cx="2194560" cy="274320"/>
+          </a:xfrm>
+          <a:prstGeom prst="rect">
+            <a:avLst/>
+          </a:prstGeom>
+          <a:noFill/>
+        </p:spPr>
+        <p:txBody>
+          <a:bodyPr wrap="square" anchor="t">
+            <a:spAutoFit/>
+          </a:bodyPr>
+          <a:lstStyle/>
+          <a:p>
+            <a:pPr algn="ctr">
+              <a:defRPr sz="1100" b="1">
+                <a:solidFill>
+                  <a:srgbClr val="FFFFFF"/>
+                </a:solidFill>
+                <a:latin typeface="Aptos"/>
+              </a:defRPr>
+            </a:pPr>
+            <a:r>
+              <a:t>RANDOM NET</a:t>
+            </a:r>
+          </a:p>
+        </p:txBody>
+      </p:sp>
+      <p:sp>
+        <p:nvSpPr>
+          <p:cNvPr id="17" name="TextBox 16"/>
+          <p:cNvSpPr txBox="1"/>
+          <p:nvPr/>
+        </p:nvSpPr>
+        <p:spPr>
+          <a:xfrm>
+            <a:off x="731520" y="3401568"/>
+            <a:ext cx="10698480" cy="4389120"/>
+          </a:xfrm>
+          <a:prstGeom prst="rect">
+            <a:avLst/>
+          </a:prstGeom>
+          <a:noFill/>
+        </p:spPr>
+        <p:txBody>
+          <a:bodyPr wrap="square">
+            <a:spAutoFit/>
+          </a:bodyPr>
+          <a:lstStyle/>
+          <a:p>
+            <a:pPr>
+              <a:spcAft>
+                <a:spcPts val="1200"/>
+              </a:spcAft>
+              <a:defRPr sz="2000">
+                <a:solidFill>
+                  <a:srgbClr val="FFFFFF"/>
+                </a:solidFill>
+                <a:latin typeface="Aptos"/>
+              </a:defRPr>
+            </a:pPr>
+            <a:r>
+              <a:t>•  $5,000 support cost · $50,000 event cost · 20% assumed effectiveness — all editable in the app</a:t>
+            </a:r>
+          </a:p>
+          <a:p>
+            <a:pPr>
+              <a:spcAft>
+                <a:spcPts val="1200"/>
+              </a:spcAft>
+              <a:defRPr sz="2000">
+                <a:solidFill>
+                  <a:srgbClr val="FFFFFF"/>
+                </a:solidFill>
+                <a:latin typeface="Aptos"/>
+              </a:defRPr>
+            </a:pPr>
+            <a:r>
+              <a:t>•  Models beat the incumbent at every capacity from 5% to 50% (sensitivity sweep)</a:t>
+            </a:r>
+          </a:p>
+          <a:p>
+            <a:pPr>
+              <a:spcAft>
+                <a:spcPts val="1200"/>
+              </a:spcAft>
+              <a:defRPr sz="2000">
+                <a:solidFill>
+                  <a:srgbClr val="FFFFFF"/>
+                </a:solidFill>
+                <a:latin typeface="Aptos"/>
+              </a:defRPr>
+            </a:pPr>
+            <a:r>
+              <a:t>•  A randomized or quasi-experimental pilot must estimate real intervention impact</a:t>
             </a:r>
           </a:p>
         </p:txBody>
@@ -6542,7 +6569,7 @@
               </a:defRPr>
             </a:pPr>
             <a:r>
-              <a:t>16 · CLIENT EXPERIENCE</a:t>
+              <a:t>A3 · INTERPRETABILITY</a:t>
             </a:r>
           </a:p>
         </p:txBody>
@@ -6578,7 +6605,7 @@
               </a:defRPr>
             </a:pPr>
             <a:r>
-              <a:t>The application makes every trade-off testable</a:t>
+              <a:t>Prediction explanations and their limits</a:t>
             </a:r>
           </a:p>
         </p:txBody>
@@ -6626,133 +6653,40 @@
           </a:p>
         </p:txBody>
       </p:sp>
-      <p:sp>
-        <p:nvSpPr>
-          <p:cNvPr id="5" name="Rounded Rectangle 4"/>
+      <p:pic>
+        <p:nvPicPr>
+          <p:cNvPr id="5" name="Picture 4" descr="shap_individual.png"/>
+          <p:cNvPicPr>
+            <a:picLocks noChangeAspect="1"/>
+          </p:cNvPicPr>
+          <p:nvPr/>
+        </p:nvPicPr>
+        <p:blipFill>
+          <a:blip r:embed="rId2"/>
+          <a:stretch>
+            <a:fillRect/>
+          </a:stretch>
+        </p:blipFill>
+        <p:spPr>
+          <a:xfrm>
+            <a:off x="365760" y="1554480"/>
+            <a:ext cx="7589520" cy="2869645"/>
+          </a:xfrm>
+          <a:prstGeom prst="rect">
+            <a:avLst/>
+          </a:prstGeom>
+        </p:spPr>
+      </p:pic>
+      <p:sp>
+        <p:nvSpPr>
+          <p:cNvPr id="6" name="Rounded Rectangle 5"/>
           <p:cNvSpPr/>
           <p:nvPr/>
         </p:nvSpPr>
         <p:spPr>
           <a:xfrm>
-            <a:off x="685800" y="1600200"/>
-            <a:ext cx="5212080" cy="1572768"/>
-          </a:xfrm>
-          <a:prstGeom prst="roundRect">
-            <a:avLst/>
-          </a:prstGeom>
-          <a:solidFill>
-            <a:srgbClr val="143058"/>
-          </a:solidFill>
-          <a:ln>
-            <a:solidFill>
-              <a:srgbClr val="FB8500"/>
-            </a:solidFill>
-          </a:ln>
-        </p:spPr>
-        <p:style>
-          <a:lnRef idx="1">
-            <a:schemeClr val="accent1"/>
-          </a:lnRef>
-          <a:fillRef idx="3">
-            <a:schemeClr val="accent1"/>
-          </a:fillRef>
-          <a:effectRef idx="2">
-            <a:schemeClr val="accent1"/>
-          </a:effectRef>
-          <a:fontRef idx="minor">
-            <a:schemeClr val="lt1"/>
-          </a:fontRef>
-        </p:style>
-        <p:txBody>
-          <a:bodyPr rtlCol="0" anchor="ctr"/>
-          <a:lstStyle/>
-          <a:p>
-            <a:pPr algn="ctr"/>
-          </a:p>
-        </p:txBody>
-      </p:sp>
-      <p:sp>
-        <p:nvSpPr>
-          <p:cNvPr id="6" name="TextBox 5"/>
-          <p:cNvSpPr txBox="1"/>
-          <p:nvPr/>
-        </p:nvSpPr>
-        <p:spPr>
-          <a:xfrm>
-            <a:off x="914400" y="1874519"/>
-            <a:ext cx="4754880" cy="365760"/>
-          </a:xfrm>
-          <a:prstGeom prst="rect">
-            <a:avLst/>
-          </a:prstGeom>
-          <a:noFill/>
-        </p:spPr>
-        <p:txBody>
-          <a:bodyPr wrap="square" anchor="t">
-            <a:spAutoFit/>
-          </a:bodyPr>
-          <a:lstStyle/>
-          <a:p>
-            <a:pPr algn="ctr">
-              <a:defRPr sz="2000" b="1">
-                <a:solidFill>
-                  <a:srgbClr val="FB8500"/>
-                </a:solidFill>
-                <a:latin typeface="Aptos"/>
-              </a:defRPr>
-            </a:pPr>
-            <a:r>
-              <a:t>ASSESS</a:t>
-            </a:r>
-          </a:p>
-        </p:txBody>
-      </p:sp>
-      <p:sp>
-        <p:nvSpPr>
-          <p:cNvPr id="7" name="TextBox 6"/>
-          <p:cNvSpPr txBox="1"/>
-          <p:nvPr/>
-        </p:nvSpPr>
-        <p:spPr>
-          <a:xfrm>
-            <a:off x="1005840" y="2587752"/>
-            <a:ext cx="4572000" cy="338327"/>
-          </a:xfrm>
-          <a:prstGeom prst="rect">
-            <a:avLst/>
-          </a:prstGeom>
-          <a:noFill/>
-        </p:spPr>
-        <p:txBody>
-          <a:bodyPr wrap="square" anchor="t">
-            <a:spAutoFit/>
-          </a:bodyPr>
-          <a:lstStyle/>
-          <a:p>
-            <a:pPr algn="ctr">
-              <a:defRPr sz="1500" b="0">
-                <a:solidFill>
-                  <a:srgbClr val="F0F4F8"/>
-                </a:solidFill>
-                <a:latin typeface="Aptos"/>
-              </a:defRPr>
-            </a:pPr>
-            <a:r>
-              <a:t>Score one person, all 3 models + SHAP</a:t>
-            </a:r>
-          </a:p>
-        </p:txBody>
-      </p:sp>
-      <p:sp>
-        <p:nvSpPr>
-          <p:cNvPr id="8" name="Rounded Rectangle 7"/>
-          <p:cNvSpPr/>
-          <p:nvPr/>
-        </p:nvSpPr>
-        <p:spPr>
-          <a:xfrm>
-            <a:off x="6263640" y="1600200"/>
-            <a:ext cx="5212080" cy="1572768"/>
+            <a:off x="8229600" y="1554480"/>
+            <a:ext cx="3566160" cy="4480560"/>
           </a:xfrm>
           <a:prstGeom prst="roundRect">
             <a:avLst/>
@@ -6790,14 +6724,14 @@
       </p:sp>
       <p:sp>
         <p:nvSpPr>
-          <p:cNvPr id="9" name="TextBox 8"/>
-          <p:cNvSpPr txBox="1"/>
-          <p:nvPr/>
-        </p:nvSpPr>
-        <p:spPr>
-          <a:xfrm>
-            <a:off x="6492240" y="1874519"/>
-            <a:ext cx="4754880" cy="365760"/>
+          <p:cNvPr id="7" name="TextBox 6"/>
+          <p:cNvSpPr txBox="1"/>
+          <p:nvPr/>
+        </p:nvSpPr>
+        <p:spPr>
+          <a:xfrm>
+            <a:off x="8458200" y="1828800"/>
+            <a:ext cx="3108960" cy="365760"/>
           </a:xfrm>
           <a:prstGeom prst="rect">
             <a:avLst/>
@@ -6819,21 +6753,21 @@
               </a:defRPr>
             </a:pPr>
             <a:r>
-              <a:t>AUDIT</a:t>
-            </a:r>
-          </a:p>
-        </p:txBody>
-      </p:sp>
-      <p:sp>
-        <p:nvSpPr>
-          <p:cNvPr id="10" name="TextBox 9"/>
-          <p:cNvSpPr txBox="1"/>
-          <p:nvPr/>
-        </p:nvSpPr>
-        <p:spPr>
-          <a:xfrm>
-            <a:off x="6583679" y="2587752"/>
-            <a:ext cx="4572000" cy="338327"/>
+              <a:t>METHODS</a:t>
+            </a:r>
+          </a:p>
+        </p:txBody>
+      </p:sp>
+      <p:sp>
+        <p:nvSpPr>
+          <p:cNvPr id="8" name="TextBox 7"/>
+          <p:cNvSpPr txBox="1"/>
+          <p:nvPr/>
+        </p:nvSpPr>
+        <p:spPr>
+          <a:xfrm>
+            <a:off x="8549640" y="2542032"/>
+            <a:ext cx="2926080" cy="3246120"/>
           </a:xfrm>
           <a:prstGeom prst="rect">
             <a:avLst/>
@@ -6855,32 +6789,179 @@
               </a:defRPr>
             </a:pPr>
             <a:r>
-              <a:t>Race, gender, age at the deployed point + FPDP</a:t>
-            </a:r>
-          </a:p>
-        </p:txBody>
-      </p:sp>
-      <p:sp>
-        <p:nvSpPr>
-          <p:cNvPr id="11" name="Rounded Rectangle 10"/>
+              <a:t>SHAP + LIME (local)</a:t>
+            </a:r>
+            <a:br/>
+            <a:br/>
+            <a:r>
+              <a:t>XPER on AUC (Pérignon)</a:t>
+            </a:r>
+            <a:br/>
+            <a:br/>
+            <a:r>
+              <a:t>Global surrogate: imperfect fidelity</a:t>
+            </a:r>
+            <a:br/>
+            <a:br/>
+            <a:r>
+              <a:t>PDP/ICE for all three</a:t>
+            </a:r>
+          </a:p>
+        </p:txBody>
+      </p:sp>
+      <p:sp>
+        <p:nvSpPr>
+          <p:cNvPr id="9" name="TextBox 8"/>
+          <p:cNvSpPr txBox="1"/>
+          <p:nvPr/>
+        </p:nvSpPr>
+        <p:spPr>
+          <a:xfrm>
+            <a:off x="914400" y="6172200"/>
+            <a:ext cx="10058400" cy="274320"/>
+          </a:xfrm>
+          <a:prstGeom prst="rect">
+            <a:avLst/>
+          </a:prstGeom>
+          <a:noFill/>
+        </p:spPr>
+        <p:txBody>
+          <a:bodyPr wrap="square" anchor="t">
+            <a:spAutoFit/>
+          </a:bodyPr>
+          <a:lstStyle/>
+          <a:p>
+            <a:pPr algn="ctr">
+              <a:defRPr sz="1100" b="1">
+                <a:solidFill>
+                  <a:srgbClr val="D64343"/>
+                </a:solidFill>
+                <a:latin typeface="Aptos"/>
+              </a:defRPr>
+            </a:pPr>
+            <a:r>
+              <a:t>TabICLv2 has no native explanation path — a real deployment cost, covered only by model-agnostic PDP/ICE.</a:t>
+            </a:r>
+          </a:p>
+        </p:txBody>
+      </p:sp>
+    </p:spTree>
+  </p:cSld>
+  <p:clrMapOvr>
+    <a:masterClrMapping/>
+  </p:clrMapOvr>
+</p:sld>
+</file>
+
+<file path=ppt/slides/slide18.xml><?xml version="1.0" encoding="utf-8"?>
+<p:sld xmlns:a="http://schemas.openxmlformats.org/drawingml/2006/main" xmlns:p="http://schemas.openxmlformats.org/presentationml/2006/main" xmlns:r="http://schemas.openxmlformats.org/officeDocument/2006/relationships">
+  <p:cSld>
+    <p:bg>
+      <p:bgPr>
+        <a:solidFill>
+          <a:srgbClr val="0A1F44"/>
+        </a:solidFill>
+        <a:effectLst/>
+      </p:bgPr>
+    </p:bg>
+    <p:spTree>
+      <p:nvGrpSpPr>
+        <p:cNvPr id="1" name=""/>
+        <p:cNvGrpSpPr/>
+        <p:nvPr/>
+      </p:nvGrpSpPr>
+      <p:grpSpPr/>
+      <p:sp>
+        <p:nvSpPr>
+          <p:cNvPr id="2" name="TextBox 1"/>
+          <p:cNvSpPr txBox="1"/>
+          <p:nvPr/>
+        </p:nvSpPr>
+        <p:spPr>
+          <a:xfrm>
+            <a:off x="594360" y="256032"/>
+            <a:ext cx="10972800" cy="274320"/>
+          </a:xfrm>
+          <a:prstGeom prst="rect">
+            <a:avLst/>
+          </a:prstGeom>
+          <a:noFill/>
+        </p:spPr>
+        <p:txBody>
+          <a:bodyPr wrap="square" anchor="t">
+            <a:spAutoFit/>
+          </a:bodyPr>
+          <a:lstStyle/>
+          <a:p>
+            <a:pPr algn="l">
+              <a:defRPr sz="1000" b="1">
+                <a:solidFill>
+                  <a:srgbClr val="FB8500"/>
+                </a:solidFill>
+                <a:latin typeface="Aptos"/>
+              </a:defRPr>
+            </a:pPr>
+            <a:r>
+              <a:t>A4 · EXPLANATION DISAGREEMENT</a:t>
+            </a:r>
+          </a:p>
+        </p:txBody>
+      </p:sp>
+      <p:sp>
+        <p:nvSpPr>
+          <p:cNvPr id="3" name="TextBox 2"/>
+          <p:cNvSpPr txBox="1"/>
+          <p:nvPr/>
+        </p:nvSpPr>
+        <p:spPr>
+          <a:xfrm>
+            <a:off x="594360" y="621792"/>
+            <a:ext cx="10972800" cy="594360"/>
+          </a:xfrm>
+          <a:prstGeom prst="rect">
+            <a:avLst/>
+          </a:prstGeom>
+          <a:noFill/>
+        </p:spPr>
+        <p:txBody>
+          <a:bodyPr wrap="square" anchor="t">
+            <a:spAutoFit/>
+          </a:bodyPr>
+          <a:lstStyle/>
+          <a:p>
+            <a:pPr algn="l">
+              <a:defRPr sz="2600" b="1">
+                <a:solidFill>
+                  <a:srgbClr val="FFFFFF"/>
+                </a:solidFill>
+                <a:latin typeface="Aptos"/>
+              </a:defRPr>
+            </a:pPr>
+            <a:r>
+              <a:t>SHAP, permutation importance and XPER rank differently</a:t>
+            </a:r>
+          </a:p>
+        </p:txBody>
+      </p:sp>
+      <p:sp>
+        <p:nvSpPr>
+          <p:cNvPr id="4" name="Rectangle 3"/>
           <p:cNvSpPr/>
           <p:nvPr/>
         </p:nvSpPr>
         <p:spPr>
           <a:xfrm>
-            <a:off x="685800" y="3474720"/>
-            <a:ext cx="5212080" cy="1572768"/>
-          </a:xfrm>
-          <a:prstGeom prst="roundRect">
+            <a:off x="594360" y="1298448"/>
+            <a:ext cx="1005840" cy="50292"/>
+          </a:xfrm>
+          <a:prstGeom prst="rect">
             <a:avLst/>
           </a:prstGeom>
           <a:solidFill>
-            <a:srgbClr val="143058"/>
+            <a:srgbClr val="FB8500"/>
           </a:solidFill>
           <a:ln>
-            <a:solidFill>
-              <a:srgbClr val="FB8500"/>
-            </a:solidFill>
+            <a:noFill/>
           </a:ln>
         </p:spPr>
         <p:style>
@@ -6905,88 +6986,40 @@
           </a:p>
         </p:txBody>
       </p:sp>
-      <p:sp>
-        <p:nvSpPr>
-          <p:cNvPr id="12" name="TextBox 11"/>
-          <p:cNvSpPr txBox="1"/>
-          <p:nvPr/>
-        </p:nvSpPr>
-        <p:spPr>
-          <a:xfrm>
-            <a:off x="914400" y="3749039"/>
-            <a:ext cx="4754880" cy="365760"/>
-          </a:xfrm>
-          <a:prstGeom prst="rect">
-            <a:avLst/>
-          </a:prstGeom>
-          <a:noFill/>
-        </p:spPr>
-        <p:txBody>
-          <a:bodyPr wrap="square" anchor="t">
-            <a:spAutoFit/>
-          </a:bodyPr>
-          <a:lstStyle/>
-          <a:p>
-            <a:pPr algn="ctr">
-              <a:defRPr sz="2000" b="1">
-                <a:solidFill>
-                  <a:srgbClr val="FB8500"/>
-                </a:solidFill>
-                <a:latin typeface="Aptos"/>
-              </a:defRPr>
-            </a:pPr>
-            <a:r>
-              <a:t>COMPARE</a:t>
-            </a:r>
-          </a:p>
-        </p:txBody>
-      </p:sp>
-      <p:sp>
-        <p:nvSpPr>
-          <p:cNvPr id="13" name="TextBox 12"/>
-          <p:cNvSpPr txBox="1"/>
-          <p:nvPr/>
-        </p:nvSpPr>
-        <p:spPr>
-          <a:xfrm>
-            <a:off x="1005840" y="4462272"/>
-            <a:ext cx="4572000" cy="338327"/>
-          </a:xfrm>
-          <a:prstGeom prst="rect">
-            <a:avLst/>
-          </a:prstGeom>
-          <a:noFill/>
-        </p:spPr>
-        <p:txBody>
-          <a:bodyPr wrap="square" anchor="t">
-            <a:spAutoFit/>
-          </a:bodyPr>
-          <a:lstStyle/>
-          <a:p>
-            <a:pPr algn="ctr">
-              <a:defRPr sz="1500" b="0">
-                <a:solidFill>
-                  <a:srgbClr val="F0F4F8"/>
-                </a:solidFill>
-                <a:latin typeface="Aptos"/>
-              </a:defRPr>
-            </a:pPr>
-            <a:r>
-              <a:t>Incumbent, learning curve, matrix</a:t>
-            </a:r>
-          </a:p>
-        </p:txBody>
-      </p:sp>
-      <p:sp>
-        <p:nvSpPr>
-          <p:cNvPr id="14" name="Rounded Rectangle 13"/>
+      <p:pic>
+        <p:nvPicPr>
+          <p:cNvPr id="5" name="Picture 4" descr="explanation_agreement.png"/>
+          <p:cNvPicPr>
+            <a:picLocks noChangeAspect="1"/>
+          </p:cNvPicPr>
+          <p:nvPr/>
+        </p:nvPicPr>
+        <p:blipFill>
+          <a:blip r:embed="rId2"/>
+          <a:stretch>
+            <a:fillRect/>
+          </a:stretch>
+        </p:blipFill>
+        <p:spPr>
+          <a:xfrm>
+            <a:off x="457200" y="1554480"/>
+            <a:ext cx="7680960" cy="3846513"/>
+          </a:xfrm>
+          <a:prstGeom prst="rect">
+            <a:avLst/>
+          </a:prstGeom>
+        </p:spPr>
+      </p:pic>
+      <p:sp>
+        <p:nvSpPr>
+          <p:cNvPr id="6" name="Rounded Rectangle 5"/>
           <p:cNvSpPr/>
           <p:nvPr/>
         </p:nvSpPr>
         <p:spPr>
           <a:xfrm>
-            <a:off x="6263640" y="3474720"/>
-            <a:ext cx="5212080" cy="1572768"/>
+            <a:off x="8321040" y="1554480"/>
+            <a:ext cx="3474720" cy="4480560"/>
           </a:xfrm>
           <a:prstGeom prst="roundRect">
             <a:avLst/>
@@ -7024,14 +7057,14 @@
       </p:sp>
       <p:sp>
         <p:nvSpPr>
-          <p:cNvPr id="15" name="TextBox 14"/>
-          <p:cNvSpPr txBox="1"/>
-          <p:nvPr/>
-        </p:nvSpPr>
-        <p:spPr>
-          <a:xfrm>
-            <a:off x="6492240" y="3749039"/>
-            <a:ext cx="4754880" cy="365760"/>
+          <p:cNvPr id="7" name="TextBox 6"/>
+          <p:cNvSpPr txBox="1"/>
+          <p:nvPr/>
+        </p:nvSpPr>
+        <p:spPr>
+          <a:xfrm>
+            <a:off x="8549640" y="1828800"/>
+            <a:ext cx="3017520" cy="365760"/>
           </a:xfrm>
           <a:prstGeom prst="rect">
             <a:avLst/>
@@ -7053,21 +7086,21 @@
               </a:defRPr>
             </a:pPr>
             <a:r>
-              <a:t>SIMULATE</a:t>
-            </a:r>
-          </a:p>
-        </p:txBody>
-      </p:sp>
-      <p:sp>
-        <p:nvSpPr>
-          <p:cNvPr id="16" name="TextBox 15"/>
-          <p:cNvSpPr txBox="1"/>
-          <p:nvPr/>
-        </p:nvSpPr>
-        <p:spPr>
-          <a:xfrm>
-            <a:off x="6583679" y="4462272"/>
-            <a:ext cx="4572000" cy="338327"/>
+              <a:t>WHY</a:t>
+            </a:r>
+          </a:p>
+        </p:txBody>
+      </p:sp>
+      <p:sp>
+        <p:nvSpPr>
+          <p:cNvPr id="8" name="TextBox 7"/>
+          <p:cNvSpPr txBox="1"/>
+          <p:nvPr/>
+        </p:nvSpPr>
+        <p:spPr>
+          <a:xfrm>
+            <a:off x="8641080" y="2542032"/>
+            <a:ext cx="2834639" cy="3246120"/>
           </a:xfrm>
           <a:prstGeom prst="rect">
             <a:avLst/>
@@ -7089,21 +7122,36 @@
               </a:defRPr>
             </a:pPr>
             <a:r>
-              <a:t>Costs, capacity, sensitivity</a:t>
-            </a:r>
-          </a:p>
-        </p:txBody>
-      </p:sp>
-      <p:sp>
-        <p:nvSpPr>
-          <p:cNvPr id="17" name="TextBox 16"/>
-          <p:cNvSpPr txBox="1"/>
-          <p:nvPr/>
-        </p:nvSpPr>
-        <p:spPr>
-          <a:xfrm>
-            <a:off x="4023360" y="5715000"/>
-            <a:ext cx="4114800" cy="365760"/>
+              <a:t>SHAP explains the prediction</a:t>
+            </a:r>
+            <a:br/>
+            <a:br/>
+            <a:r>
+              <a:t>Permutation importance explains loss</a:t>
+            </a:r>
+            <a:br/>
+            <a:br/>
+            <a:r>
+              <a:t>XPER decomposes AUC</a:t>
+            </a:r>
+            <a:br/>
+            <a:br/>
+            <a:r>
+              <a:t>Different questions, so different rankings</a:t>
+            </a:r>
+          </a:p>
+        </p:txBody>
+      </p:sp>
+      <p:sp>
+        <p:nvSpPr>
+          <p:cNvPr id="9" name="TextBox 8"/>
+          <p:cNvSpPr txBox="1"/>
+          <p:nvPr/>
+        </p:nvSpPr>
+        <p:spPr>
+          <a:xfrm>
+            <a:off x="914400" y="6172200"/>
+            <a:ext cx="10058400" cy="274320"/>
           </a:xfrm>
           <a:prstGeom prst="rect">
             <a:avLst/>
@@ -7117,29 +7165,55 @@
           <a:lstStyle/>
           <a:p>
             <a:pPr algn="ctr">
-              <a:defRPr sz="1700" b="1">
-                <a:solidFill>
-                  <a:srgbClr val="F0F4F8"/>
-                </a:solidFill>
-                <a:latin typeface="Consolas"/>
-              </a:defRPr>
-            </a:pPr>
-            <a:r>
-              <a:t>streamlit run app.py</a:t>
-            </a:r>
-          </a:p>
-        </p:txBody>
-      </p:sp>
-      <p:sp>
-        <p:nvSpPr>
-          <p:cNvPr id="18" name="TextBox 17"/>
-          <p:cNvSpPr txBox="1"/>
-          <p:nvPr/>
-        </p:nvSpPr>
-        <p:spPr>
-          <a:xfrm>
-            <a:off x="594360" y="6510528"/>
-            <a:ext cx="3657600" cy="164592"/>
+              <a:defRPr sz="1100" b="1">
+                <a:solidFill>
+                  <a:srgbClr val="FB8500"/>
+                </a:solidFill>
+                <a:latin typeface="Aptos"/>
+              </a:defRPr>
+            </a:pPr>
+            <a:r>
+              <a:t>Top-10 sets largely coincide; ordering is method-dependent. Quote the set, not the rank.</a:t>
+            </a:r>
+          </a:p>
+        </p:txBody>
+      </p:sp>
+    </p:spTree>
+  </p:cSld>
+  <p:clrMapOvr>
+    <a:masterClrMapping/>
+  </p:clrMapOvr>
+</p:sld>
+</file>
+
+<file path=ppt/slides/slide19.xml><?xml version="1.0" encoding="utf-8"?>
+<p:sld xmlns:a="http://schemas.openxmlformats.org/drawingml/2006/main" xmlns:p="http://schemas.openxmlformats.org/presentationml/2006/main" xmlns:r="http://schemas.openxmlformats.org/officeDocument/2006/relationships">
+  <p:cSld>
+    <p:bg>
+      <p:bgPr>
+        <a:solidFill>
+          <a:srgbClr val="0A1F44"/>
+        </a:solidFill>
+        <a:effectLst/>
+      </p:bgPr>
+    </p:bg>
+    <p:spTree>
+      <p:nvGrpSpPr>
+        <p:cNvPr id="1" name=""/>
+        <p:cNvGrpSpPr/>
+        <p:nvPr/>
+      </p:nvGrpSpPr>
+      <p:grpSpPr/>
+      <p:sp>
+        <p:nvSpPr>
+          <p:cNvPr id="2" name="TextBox 1"/>
+          <p:cNvSpPr txBox="1"/>
+          <p:nvPr/>
+        </p:nvSpPr>
+        <p:spPr>
+          <a:xfrm>
+            <a:off x="594360" y="256032"/>
+            <a:ext cx="10972800" cy="274320"/>
           </a:xfrm>
           <a:prstGeom prst="rect">
             <a:avLst/>
@@ -7153,51 +7227,154 @@
           <a:lstStyle/>
           <a:p>
             <a:pPr algn="l">
-              <a:defRPr sz="800" b="0">
-                <a:solidFill>
-                  <a:srgbClr val="828FA0"/>
-                </a:solidFill>
-                <a:latin typeface="Aptos"/>
-              </a:defRPr>
-            </a:pPr>
-            <a:r>
-              <a:t>HEC Paris · ISAF · 2026</a:t>
-            </a:r>
-          </a:p>
-        </p:txBody>
-      </p:sp>
-      <p:sp>
-        <p:nvSpPr>
-          <p:cNvPr id="19" name="TextBox 18"/>
-          <p:cNvSpPr txBox="1"/>
-          <p:nvPr/>
-        </p:nvSpPr>
-        <p:spPr>
-          <a:xfrm>
-            <a:off x="11109960" y="6492240"/>
-            <a:ext cx="411480" cy="164592"/>
-          </a:xfrm>
-          <a:prstGeom prst="rect">
-            <a:avLst/>
-          </a:prstGeom>
-          <a:noFill/>
-        </p:spPr>
-        <p:txBody>
-          <a:bodyPr wrap="square" anchor="t">
-            <a:spAutoFit/>
-          </a:bodyPr>
-          <a:lstStyle/>
-          <a:p>
-            <a:pPr algn="r">
-              <a:defRPr sz="800" b="0">
-                <a:solidFill>
-                  <a:srgbClr val="828FA0"/>
-                </a:solidFill>
-                <a:latin typeface="Aptos"/>
-              </a:defRPr>
-            </a:pPr>
-            <a:r>
-              <a:t>17</a:t>
+              <a:defRPr sz="1000" b="1">
+                <a:solidFill>
+                  <a:srgbClr val="FB8500"/>
+                </a:solidFill>
+                <a:latin typeface="Aptos"/>
+              </a:defRPr>
+            </a:pPr>
+            <a:r>
+              <a:t>A5 · LIME FIDELITY</a:t>
+            </a:r>
+          </a:p>
+        </p:txBody>
+      </p:sp>
+      <p:sp>
+        <p:nvSpPr>
+          <p:cNvPr id="3" name="TextBox 2"/>
+          <p:cNvSpPr txBox="1"/>
+          <p:nvPr/>
+        </p:nvSpPr>
+        <p:spPr>
+          <a:xfrm>
+            <a:off x="594360" y="621792"/>
+            <a:ext cx="10972800" cy="594360"/>
+          </a:xfrm>
+          <a:prstGeom prst="rect">
+            <a:avLst/>
+          </a:prstGeom>
+          <a:noFill/>
+        </p:spPr>
+        <p:txBody>
+          <a:bodyPr wrap="square" anchor="t">
+            <a:spAutoFit/>
+          </a:bodyPr>
+          <a:lstStyle/>
+          <a:p>
+            <a:pPr algn="l">
+              <a:defRPr sz="2600" b="1">
+                <a:solidFill>
+                  <a:srgbClr val="FFFFFF"/>
+                </a:solidFill>
+                <a:latin typeface="Aptos"/>
+              </a:defRPr>
+            </a:pPr>
+            <a:r>
+              <a:t>Is the local explanation faithful?</a:t>
+            </a:r>
+          </a:p>
+        </p:txBody>
+      </p:sp>
+      <p:sp>
+        <p:nvSpPr>
+          <p:cNvPr id="4" name="Rectangle 3"/>
+          <p:cNvSpPr/>
+          <p:nvPr/>
+        </p:nvSpPr>
+        <p:spPr>
+          <a:xfrm>
+            <a:off x="594360" y="1298448"/>
+            <a:ext cx="1005840" cy="50292"/>
+          </a:xfrm>
+          <a:prstGeom prst="rect">
+            <a:avLst/>
+          </a:prstGeom>
+          <a:solidFill>
+            <a:srgbClr val="FB8500"/>
+          </a:solidFill>
+          <a:ln>
+            <a:noFill/>
+          </a:ln>
+        </p:spPr>
+        <p:style>
+          <a:lnRef idx="1">
+            <a:schemeClr val="accent1"/>
+          </a:lnRef>
+          <a:fillRef idx="3">
+            <a:schemeClr val="accent1"/>
+          </a:fillRef>
+          <a:effectRef idx="2">
+            <a:schemeClr val="accent1"/>
+          </a:effectRef>
+          <a:fontRef idx="minor">
+            <a:schemeClr val="lt1"/>
+          </a:fontRef>
+        </p:style>
+        <p:txBody>
+          <a:bodyPr rtlCol="0" anchor="ctr"/>
+          <a:lstStyle/>
+          <a:p>
+            <a:pPr algn="ctr"/>
+          </a:p>
+        </p:txBody>
+      </p:sp>
+      <p:pic>
+        <p:nvPicPr>
+          <p:cNvPr id="5" name="Picture 4" descr="lime_individual.png"/>
+          <p:cNvPicPr>
+            <a:picLocks noChangeAspect="1"/>
+          </p:cNvPicPr>
+          <p:nvPr/>
+        </p:nvPicPr>
+        <p:blipFill>
+          <a:blip r:embed="rId2"/>
+          <a:stretch>
+            <a:fillRect/>
+          </a:stretch>
+        </p:blipFill>
+        <p:spPr>
+          <a:xfrm>
+            <a:off x="365760" y="1600200"/>
+            <a:ext cx="11430000" cy="3780622"/>
+          </a:xfrm>
+          <a:prstGeom prst="rect">
+            <a:avLst/>
+          </a:prstGeom>
+        </p:spPr>
+      </p:pic>
+      <p:sp>
+        <p:nvSpPr>
+          <p:cNvPr id="6" name="TextBox 5"/>
+          <p:cNvSpPr txBox="1"/>
+          <p:nvPr/>
+        </p:nvSpPr>
+        <p:spPr>
+          <a:xfrm>
+            <a:off x="914400" y="6172200"/>
+            <a:ext cx="10058400" cy="365760"/>
+          </a:xfrm>
+          <a:prstGeom prst="rect">
+            <a:avLst/>
+          </a:prstGeom>
+          <a:noFill/>
+        </p:spPr>
+        <p:txBody>
+          <a:bodyPr wrap="square" anchor="t">
+            <a:spAutoFit/>
+          </a:bodyPr>
+          <a:lstStyle/>
+          <a:p>
+            <a:pPr algn="ctr">
+              <a:defRPr sz="1200" b="1">
+                <a:solidFill>
+                  <a:srgbClr val="FB8500"/>
+                </a:solidFill>
+                <a:latin typeface="Aptos"/>
+              </a:defRPr>
+            </a:pPr>
+            <a:r>
+              <a:t>Category-aware perturbation raised local fidelity from R² 0.25 to ≈0.41. Three fixed cases × three seeds; every condition keeps its sign.</a:t>
             </a:r>
           </a:p>
         </p:txBody>
@@ -7510,6 +7687,642 @@
 </p:sld>
 </file>
 
+<file path=ppt/slides/slide20.xml><?xml version="1.0" encoding="utf-8"?>
+<p:sld xmlns:a="http://schemas.openxmlformats.org/drawingml/2006/main" xmlns:p="http://schemas.openxmlformats.org/presentationml/2006/main" xmlns:r="http://schemas.openxmlformats.org/officeDocument/2006/relationships">
+  <p:cSld>
+    <p:bg>
+      <p:bgPr>
+        <a:solidFill>
+          <a:srgbClr val="0A1F44"/>
+        </a:solidFill>
+        <a:effectLst/>
+      </p:bgPr>
+    </p:bg>
+    <p:spTree>
+      <p:nvGrpSpPr>
+        <p:cNvPr id="1" name=""/>
+        <p:cNvGrpSpPr/>
+        <p:nvPr/>
+      </p:nvGrpSpPr>
+      <p:grpSpPr/>
+      <p:sp>
+        <p:nvSpPr>
+          <p:cNvPr id="2" name="TextBox 1"/>
+          <p:cNvSpPr txBox="1"/>
+          <p:nvPr/>
+        </p:nvSpPr>
+        <p:spPr>
+          <a:xfrm>
+            <a:off x="594360" y="256032"/>
+            <a:ext cx="10972800" cy="274320"/>
+          </a:xfrm>
+          <a:prstGeom prst="rect">
+            <a:avLst/>
+          </a:prstGeom>
+          <a:noFill/>
+        </p:spPr>
+        <p:txBody>
+          <a:bodyPr wrap="square" anchor="t">
+            <a:spAutoFit/>
+          </a:bodyPr>
+          <a:lstStyle/>
+          <a:p>
+            <a:pPr algn="l">
+              <a:defRPr sz="1000" b="1">
+                <a:solidFill>
+                  <a:srgbClr val="FB8500"/>
+                </a:solidFill>
+                <a:latin typeface="Aptos"/>
+              </a:defRPr>
+            </a:pPr>
+            <a:r>
+              <a:t>A6 · STABILITY</a:t>
+            </a:r>
+          </a:p>
+        </p:txBody>
+      </p:sp>
+      <p:sp>
+        <p:nvSpPr>
+          <p:cNvPr id="3" name="TextBox 2"/>
+          <p:cNvSpPr txBox="1"/>
+          <p:nvPr/>
+        </p:nvSpPr>
+        <p:spPr>
+          <a:xfrm>
+            <a:off x="594360" y="621792"/>
+            <a:ext cx="10972800" cy="594360"/>
+          </a:xfrm>
+          <a:prstGeom prst="rect">
+            <a:avLst/>
+          </a:prstGeom>
+          <a:noFill/>
+        </p:spPr>
+        <p:txBody>
+          <a:bodyPr wrap="square" anchor="t">
+            <a:spAutoFit/>
+          </a:bodyPr>
+          <a:lstStyle/>
+          <a:p>
+            <a:pPr algn="l">
+              <a:defRPr sz="2600" b="1">
+                <a:solidFill>
+                  <a:srgbClr val="FFFFFF"/>
+                </a:solidFill>
+                <a:latin typeface="Aptos"/>
+              </a:defRPr>
+            </a:pPr>
+            <a:r>
+              <a:t>Structural stability across refits on resampled data</a:t>
+            </a:r>
+          </a:p>
+        </p:txBody>
+      </p:sp>
+      <p:sp>
+        <p:nvSpPr>
+          <p:cNvPr id="4" name="Rectangle 3"/>
+          <p:cNvSpPr/>
+          <p:nvPr/>
+        </p:nvSpPr>
+        <p:spPr>
+          <a:xfrm>
+            <a:off x="594360" y="1298448"/>
+            <a:ext cx="1005840" cy="50292"/>
+          </a:xfrm>
+          <a:prstGeom prst="rect">
+            <a:avLst/>
+          </a:prstGeom>
+          <a:solidFill>
+            <a:srgbClr val="FB8500"/>
+          </a:solidFill>
+          <a:ln>
+            <a:noFill/>
+          </a:ln>
+        </p:spPr>
+        <p:style>
+          <a:lnRef idx="1">
+            <a:schemeClr val="accent1"/>
+          </a:lnRef>
+          <a:fillRef idx="3">
+            <a:schemeClr val="accent1"/>
+          </a:fillRef>
+          <a:effectRef idx="2">
+            <a:schemeClr val="accent1"/>
+          </a:effectRef>
+          <a:fontRef idx="minor">
+            <a:schemeClr val="lt1"/>
+          </a:fontRef>
+        </p:style>
+        <p:txBody>
+          <a:bodyPr rtlCol="0" anchor="ctr"/>
+          <a:lstStyle/>
+          <a:p>
+            <a:pPr algn="ctr"/>
+          </a:p>
+        </p:txBody>
+      </p:sp>
+      <p:pic>
+        <p:nvPicPr>
+          <p:cNvPr id="5" name="Picture 4" descr="structural_stability.png"/>
+          <p:cNvPicPr>
+            <a:picLocks noChangeAspect="1"/>
+          </p:cNvPicPr>
+          <p:nvPr/>
+        </p:nvPicPr>
+        <p:blipFill>
+          <a:blip r:embed="rId2"/>
+          <a:stretch>
+            <a:fillRect/>
+          </a:stretch>
+        </p:blipFill>
+        <p:spPr>
+          <a:xfrm>
+            <a:off x="457200" y="1600200"/>
+            <a:ext cx="7589520" cy="1992276"/>
+          </a:xfrm>
+          <a:prstGeom prst="rect">
+            <a:avLst/>
+          </a:prstGeom>
+        </p:spPr>
+      </p:pic>
+      <p:sp>
+        <p:nvSpPr>
+          <p:cNvPr id="6" name="Rounded Rectangle 5"/>
+          <p:cNvSpPr/>
+          <p:nvPr/>
+        </p:nvSpPr>
+        <p:spPr>
+          <a:xfrm>
+            <a:off x="8549640" y="1737360"/>
+            <a:ext cx="2423160" cy="1261872"/>
+          </a:xfrm>
+          <a:prstGeom prst="roundRect">
+            <a:avLst/>
+          </a:prstGeom>
+          <a:solidFill>
+            <a:srgbClr val="143058"/>
+          </a:solidFill>
+          <a:ln>
+            <a:solidFill>
+              <a:srgbClr val="7B2CBF"/>
+            </a:solidFill>
+          </a:ln>
+        </p:spPr>
+        <p:style>
+          <a:lnRef idx="1">
+            <a:schemeClr val="accent1"/>
+          </a:lnRef>
+          <a:fillRef idx="3">
+            <a:schemeClr val="accent1"/>
+          </a:fillRef>
+          <a:effectRef idx="2">
+            <a:schemeClr val="accent1"/>
+          </a:effectRef>
+          <a:fontRef idx="minor">
+            <a:schemeClr val="lt1"/>
+          </a:fontRef>
+        </p:style>
+        <p:txBody>
+          <a:bodyPr rtlCol="0" anchor="ctr"/>
+          <a:lstStyle/>
+          <a:p>
+            <a:pPr algn="ctr"/>
+          </a:p>
+        </p:txBody>
+      </p:sp>
+      <p:sp>
+        <p:nvSpPr>
+          <p:cNvPr id="7" name="TextBox 6"/>
+          <p:cNvSpPr txBox="1"/>
+          <p:nvPr/>
+        </p:nvSpPr>
+        <p:spPr>
+          <a:xfrm>
+            <a:off x="8659367" y="1874519"/>
+            <a:ext cx="2194560" cy="438912"/>
+          </a:xfrm>
+          <a:prstGeom prst="rect">
+            <a:avLst/>
+          </a:prstGeom>
+          <a:noFill/>
+        </p:spPr>
+        <p:txBody>
+          <a:bodyPr wrap="square" anchor="t">
+            <a:spAutoFit/>
+          </a:bodyPr>
+          <a:lstStyle/>
+          <a:p>
+            <a:pPr algn="ctr">
+              <a:defRPr sz="2400" b="1">
+                <a:solidFill>
+                  <a:srgbClr val="7B2CBF"/>
+                </a:solidFill>
+                <a:latin typeface="Aptos"/>
+              </a:defRPr>
+            </a:pPr>
+            <a:r>
+              <a:t>0.035</a:t>
+            </a:r>
+          </a:p>
+        </p:txBody>
+      </p:sp>
+      <p:sp>
+        <p:nvSpPr>
+          <p:cNvPr id="8" name="TextBox 7"/>
+          <p:cNvSpPr txBox="1"/>
+          <p:nvPr/>
+        </p:nvSpPr>
+        <p:spPr>
+          <a:xfrm>
+            <a:off x="8659367" y="2395728"/>
+            <a:ext cx="2194560" cy="274320"/>
+          </a:xfrm>
+          <a:prstGeom prst="rect">
+            <a:avLst/>
+          </a:prstGeom>
+          <a:noFill/>
+        </p:spPr>
+        <p:txBody>
+          <a:bodyPr wrap="square" anchor="t">
+            <a:spAutoFit/>
+          </a:bodyPr>
+          <a:lstStyle/>
+          <a:p>
+            <a:pPr algn="ctr">
+              <a:defRPr sz="1100" b="1">
+                <a:solidFill>
+                  <a:srgbClr val="FFFFFF"/>
+                </a:solidFill>
+                <a:latin typeface="Aptos"/>
+              </a:defRPr>
+            </a:pPr>
+            <a:r>
+              <a:t>SCORE DRIFT · TABICL</a:t>
+            </a:r>
+          </a:p>
+        </p:txBody>
+      </p:sp>
+      <p:sp>
+        <p:nvSpPr>
+          <p:cNvPr id="9" name="Rounded Rectangle 8"/>
+          <p:cNvSpPr/>
+          <p:nvPr/>
+        </p:nvSpPr>
+        <p:spPr>
+          <a:xfrm>
+            <a:off x="8549640" y="3200400"/>
+            <a:ext cx="2423160" cy="1261872"/>
+          </a:xfrm>
+          <a:prstGeom prst="roundRect">
+            <a:avLst/>
+          </a:prstGeom>
+          <a:solidFill>
+            <a:srgbClr val="143058"/>
+          </a:solidFill>
+          <a:ln>
+            <a:solidFill>
+              <a:srgbClr val="00B4B4"/>
+            </a:solidFill>
+          </a:ln>
+        </p:spPr>
+        <p:style>
+          <a:lnRef idx="1">
+            <a:schemeClr val="accent1"/>
+          </a:lnRef>
+          <a:fillRef idx="3">
+            <a:schemeClr val="accent1"/>
+          </a:fillRef>
+          <a:effectRef idx="2">
+            <a:schemeClr val="accent1"/>
+          </a:effectRef>
+          <a:fontRef idx="minor">
+            <a:schemeClr val="lt1"/>
+          </a:fontRef>
+        </p:style>
+        <p:txBody>
+          <a:bodyPr rtlCol="0" anchor="ctr"/>
+          <a:lstStyle/>
+          <a:p>
+            <a:pPr algn="ctr"/>
+          </a:p>
+        </p:txBody>
+      </p:sp>
+      <p:sp>
+        <p:nvSpPr>
+          <p:cNvPr id="10" name="TextBox 9"/>
+          <p:cNvSpPr txBox="1"/>
+          <p:nvPr/>
+        </p:nvSpPr>
+        <p:spPr>
+          <a:xfrm>
+            <a:off x="8659367" y="3337560"/>
+            <a:ext cx="2194560" cy="438912"/>
+          </a:xfrm>
+          <a:prstGeom prst="rect">
+            <a:avLst/>
+          </a:prstGeom>
+          <a:noFill/>
+        </p:spPr>
+        <p:txBody>
+          <a:bodyPr wrap="square" anchor="t">
+            <a:spAutoFit/>
+          </a:bodyPr>
+          <a:lstStyle/>
+          <a:p>
+            <a:pPr algn="ctr">
+              <a:defRPr sz="2400" b="1">
+                <a:solidFill>
+                  <a:srgbClr val="00B4B4"/>
+                </a:solidFill>
+                <a:latin typeface="Aptos"/>
+              </a:defRPr>
+            </a:pPr>
+            <a:r>
+              <a:t>77.6%</a:t>
+            </a:r>
+          </a:p>
+        </p:txBody>
+      </p:sp>
+      <p:sp>
+        <p:nvSpPr>
+          <p:cNvPr id="11" name="TextBox 10"/>
+          <p:cNvSpPr txBox="1"/>
+          <p:nvPr/>
+        </p:nvSpPr>
+        <p:spPr>
+          <a:xfrm>
+            <a:off x="8659367" y="3858768"/>
+            <a:ext cx="2194560" cy="274320"/>
+          </a:xfrm>
+          <a:prstGeom prst="rect">
+            <a:avLst/>
+          </a:prstGeom>
+          <a:noFill/>
+        </p:spPr>
+        <p:txBody>
+          <a:bodyPr wrap="square" anchor="t">
+            <a:spAutoFit/>
+          </a:bodyPr>
+          <a:lstStyle/>
+          <a:p>
+            <a:pPr algn="ctr">
+              <a:defRPr sz="1100" b="1">
+                <a:solidFill>
+                  <a:srgbClr val="FFFFFF"/>
+                </a:solidFill>
+                <a:latin typeface="Aptos"/>
+              </a:defRPr>
+            </a:pPr>
+            <a:r>
+              <a:t>TABICL JACCARD</a:t>
+            </a:r>
+          </a:p>
+        </p:txBody>
+      </p:sp>
+      <p:sp>
+        <p:nvSpPr>
+          <p:cNvPr id="12" name="TextBox 11"/>
+          <p:cNvSpPr txBox="1"/>
+          <p:nvPr/>
+        </p:nvSpPr>
+        <p:spPr>
+          <a:xfrm>
+            <a:off x="914400" y="6172200"/>
+            <a:ext cx="10058400" cy="365760"/>
+          </a:xfrm>
+          <a:prstGeom prst="rect">
+            <a:avLst/>
+          </a:prstGeom>
+          <a:noFill/>
+        </p:spPr>
+        <p:txBody>
+          <a:bodyPr wrap="square" anchor="t">
+            <a:spAutoFit/>
+          </a:bodyPr>
+          <a:lstStyle/>
+          <a:p>
+            <a:pPr algn="ctr">
+              <a:defRPr sz="1100" b="1">
+                <a:solidFill>
+                  <a:srgbClr val="828FA0"/>
+                </a:solidFill>
+                <a:latin typeface="Aptos"/>
+              </a:defRPr>
+            </a:pPr>
+            <a:r>
+              <a:t>Jaccard is intersection / union, not the share of people switching. Refit sensitivity is not temporal validation.</a:t>
+            </a:r>
+          </a:p>
+        </p:txBody>
+      </p:sp>
+    </p:spTree>
+  </p:cSld>
+  <p:clrMapOvr>
+    <a:masterClrMapping/>
+  </p:clrMapOvr>
+</p:sld>
+</file>
+
+<file path=ppt/slides/slide21.xml><?xml version="1.0" encoding="utf-8"?>
+<p:sld xmlns:a="http://schemas.openxmlformats.org/drawingml/2006/main" xmlns:p="http://schemas.openxmlformats.org/presentationml/2006/main" xmlns:r="http://schemas.openxmlformats.org/officeDocument/2006/relationships">
+  <p:cSld>
+    <p:bg>
+      <p:bgPr>
+        <a:solidFill>
+          <a:srgbClr val="0A1F44"/>
+        </a:solidFill>
+        <a:effectLst/>
+      </p:bgPr>
+    </p:bg>
+    <p:spTree>
+      <p:nvGrpSpPr>
+        <p:cNvPr id="1" name=""/>
+        <p:cNvGrpSpPr/>
+        <p:nvPr/>
+      </p:nvGrpSpPr>
+      <p:grpSpPr/>
+      <p:sp>
+        <p:nvSpPr>
+          <p:cNvPr id="2" name="TextBox 1"/>
+          <p:cNvSpPr txBox="1"/>
+          <p:nvPr/>
+        </p:nvSpPr>
+        <p:spPr>
+          <a:xfrm>
+            <a:off x="594360" y="256032"/>
+            <a:ext cx="10972800" cy="274320"/>
+          </a:xfrm>
+          <a:prstGeom prst="rect">
+            <a:avLst/>
+          </a:prstGeom>
+          <a:noFill/>
+        </p:spPr>
+        <p:txBody>
+          <a:bodyPr wrap="square" anchor="t">
+            <a:spAutoFit/>
+          </a:bodyPr>
+          <a:lstStyle/>
+          <a:p>
+            <a:pPr algn="l">
+              <a:defRPr sz="1000" b="1">
+                <a:solidFill>
+                  <a:srgbClr val="FB8500"/>
+                </a:solidFill>
+                <a:latin typeface="Aptos"/>
+              </a:defRPr>
+            </a:pPr>
+            <a:r>
+              <a:t>A7 · PROCESS</a:t>
+            </a:r>
+          </a:p>
+        </p:txBody>
+      </p:sp>
+      <p:sp>
+        <p:nvSpPr>
+          <p:cNvPr id="3" name="TextBox 2"/>
+          <p:cNvSpPr txBox="1"/>
+          <p:nvPr/>
+        </p:nvSpPr>
+        <p:spPr>
+          <a:xfrm>
+            <a:off x="594360" y="621792"/>
+            <a:ext cx="10972800" cy="594360"/>
+          </a:xfrm>
+          <a:prstGeom prst="rect">
+            <a:avLst/>
+          </a:prstGeom>
+          <a:noFill/>
+        </p:spPr>
+        <p:txBody>
+          <a:bodyPr wrap="square" anchor="t">
+            <a:spAutoFit/>
+          </a:bodyPr>
+          <a:lstStyle/>
+          <a:p>
+            <a:pPr algn="l">
+              <a:defRPr sz="2600" b="1">
+                <a:solidFill>
+                  <a:srgbClr val="FFFFFF"/>
+                </a:solidFill>
+                <a:latin typeface="Aptos"/>
+              </a:defRPr>
+            </a:pPr>
+            <a:r>
+              <a:t>How we got here: what we tried, where we landed</a:t>
+            </a:r>
+          </a:p>
+        </p:txBody>
+      </p:sp>
+      <p:sp>
+        <p:nvSpPr>
+          <p:cNvPr id="4" name="Rectangle 3"/>
+          <p:cNvSpPr/>
+          <p:nvPr/>
+        </p:nvSpPr>
+        <p:spPr>
+          <a:xfrm>
+            <a:off x="594360" y="1298448"/>
+            <a:ext cx="1005840" cy="50292"/>
+          </a:xfrm>
+          <a:prstGeom prst="rect">
+            <a:avLst/>
+          </a:prstGeom>
+          <a:solidFill>
+            <a:srgbClr val="FB8500"/>
+          </a:solidFill>
+          <a:ln>
+            <a:noFill/>
+          </a:ln>
+        </p:spPr>
+        <p:style>
+          <a:lnRef idx="1">
+            <a:schemeClr val="accent1"/>
+          </a:lnRef>
+          <a:fillRef idx="3">
+            <a:schemeClr val="accent1"/>
+          </a:fillRef>
+          <a:effectRef idx="2">
+            <a:schemeClr val="accent1"/>
+          </a:effectRef>
+          <a:fontRef idx="minor">
+            <a:schemeClr val="lt1"/>
+          </a:fontRef>
+        </p:style>
+        <p:txBody>
+          <a:bodyPr rtlCol="0" anchor="ctr"/>
+          <a:lstStyle/>
+          <a:p>
+            <a:pPr algn="ctr"/>
+          </a:p>
+        </p:txBody>
+      </p:sp>
+      <p:pic>
+        <p:nvPicPr>
+          <p:cNvPr id="5" name="Picture 4" descr="improvement_journey.png"/>
+          <p:cNvPicPr>
+            <a:picLocks noChangeAspect="1"/>
+          </p:cNvPicPr>
+          <p:nvPr/>
+        </p:nvPicPr>
+        <p:blipFill>
+          <a:blip r:embed="rId2"/>
+          <a:stretch>
+            <a:fillRect/>
+          </a:stretch>
+        </p:blipFill>
+        <p:spPr>
+          <a:xfrm>
+            <a:off x="502920" y="1600200"/>
+            <a:ext cx="11155680" cy="4030062"/>
+          </a:xfrm>
+          <a:prstGeom prst="rect">
+            <a:avLst/>
+          </a:prstGeom>
+        </p:spPr>
+      </p:pic>
+      <p:sp>
+        <p:nvSpPr>
+          <p:cNvPr id="6" name="TextBox 5"/>
+          <p:cNvSpPr txBox="1"/>
+          <p:nvPr/>
+        </p:nvSpPr>
+        <p:spPr>
+          <a:xfrm>
+            <a:off x="914400" y="6236208"/>
+            <a:ext cx="10058400" cy="274320"/>
+          </a:xfrm>
+          <a:prstGeom prst="rect">
+            <a:avLst/>
+          </a:prstGeom>
+          <a:noFill/>
+        </p:spPr>
+        <p:txBody>
+          <a:bodyPr wrap="square" anchor="t">
+            <a:spAutoFit/>
+          </a:bodyPr>
+          <a:lstStyle/>
+          <a:p>
+            <a:pPr algn="ctr">
+              <a:defRPr sz="1100" b="1">
+                <a:solidFill>
+                  <a:srgbClr val="FB8500"/>
+                </a:solidFill>
+                <a:latin typeface="Aptos"/>
+              </a:defRPr>
+            </a:pPr>
+            <a:r>
+              <a:t>Full log in JOURNEY.md — every step measured, including the attempts we rejected.</a:t>
+            </a:r>
+          </a:p>
+        </p:txBody>
+      </p:sp>
+    </p:spTree>
+  </p:cSld>
+  <p:clrMapOvr>
+    <a:masterClrMapping/>
+  </p:clrMapOvr>
+</p:sld>
+</file>
+
 <file path=ppt/slides/slide3.xml><?xml version="1.0" encoding="utf-8"?>
 <p:sld xmlns:a="http://schemas.openxmlformats.org/drawingml/2006/main" xmlns:p="http://schemas.openxmlformats.org/presentationml/2006/main" xmlns:r="http://schemas.openxmlformats.org/officeDocument/2006/relationships">
   <p:cSld>
@@ -10225,7 +11038,7 @@
               </a:defRPr>
             </a:pPr>
             <a:r>
-              <a:t>06 · LEARNING CURVE</a:t>
+              <a:t>06 · SUBGROUP AUDIT</a:t>
             </a:r>
           </a:p>
         </p:txBody>
@@ -10261,7 +11074,7 @@
               </a:defRPr>
             </a:pPr>
             <a:r>
-              <a:t>Which model for which agency size?</a:t>
+              <a:t>Fairness at the proposed allocation rule</a:t>
             </a:r>
           </a:p>
         </p:txBody>
@@ -10311,7 +11124,7 @@
       </p:sp>
       <p:pic>
         <p:nvPicPr>
-          <p:cNvPr id="5" name="Picture 4" descr="learning_curve.png"/>
+          <p:cNvPr id="5" name="Picture 4" descr="fairness_support_access.png"/>
           <p:cNvPicPr>
             <a:picLocks noChangeAspect="1"/>
           </p:cNvPicPr>
@@ -10325,8 +11138,8 @@
         </p:blipFill>
         <p:spPr>
           <a:xfrm>
-            <a:off x="731520" y="1645920"/>
-            <a:ext cx="10698480" cy="4022802"/>
+            <a:off x="365760" y="1554480"/>
+            <a:ext cx="7772400" cy="4216673"/>
           </a:xfrm>
           <a:prstGeom prst="rect">
             <a:avLst/>
@@ -10335,14 +11148,59 @@
       </p:pic>
       <p:sp>
         <p:nvSpPr>
-          <p:cNvPr id="6" name="TextBox 5"/>
-          <p:cNvSpPr txBox="1"/>
-          <p:nvPr/>
-        </p:nvSpPr>
-        <p:spPr>
-          <a:xfrm>
-            <a:off x="914400" y="6126480"/>
-            <a:ext cx="10058400" cy="457200"/>
+          <p:cNvPr id="6" name="Rounded Rectangle 5"/>
+          <p:cNvSpPr/>
+          <p:nvPr/>
+        </p:nvSpPr>
+        <p:spPr>
+          <a:xfrm>
+            <a:off x="8549640" y="1737360"/>
+            <a:ext cx="2423160" cy="1261872"/>
+          </a:xfrm>
+          <a:prstGeom prst="roundRect">
+            <a:avLst/>
+          </a:prstGeom>
+          <a:solidFill>
+            <a:srgbClr val="143058"/>
+          </a:solidFill>
+          <a:ln>
+            <a:solidFill>
+              <a:srgbClr val="D64343"/>
+            </a:solidFill>
+          </a:ln>
+        </p:spPr>
+        <p:style>
+          <a:lnRef idx="1">
+            <a:schemeClr val="accent1"/>
+          </a:lnRef>
+          <a:fillRef idx="3">
+            <a:schemeClr val="accent1"/>
+          </a:fillRef>
+          <a:effectRef idx="2">
+            <a:schemeClr val="accent1"/>
+          </a:effectRef>
+          <a:fontRef idx="minor">
+            <a:schemeClr val="lt1"/>
+          </a:fontRef>
+        </p:style>
+        <p:txBody>
+          <a:bodyPr rtlCol="0" anchor="ctr"/>
+          <a:lstStyle/>
+          <a:p>
+            <a:pPr algn="ctr"/>
+          </a:p>
+        </p:txBody>
+      </p:sp>
+      <p:sp>
+        <p:nvSpPr>
+          <p:cNvPr id="7" name="TextBox 6"/>
+          <p:cNvSpPr txBox="1"/>
+          <p:nvPr/>
+        </p:nvSpPr>
+        <p:spPr>
+          <a:xfrm>
+            <a:off x="8659367" y="1874519"/>
+            <a:ext cx="2194560" cy="438912"/>
           </a:xfrm>
           <a:prstGeom prst="rect">
             <a:avLst/>
@@ -10356,7 +11214,313 @@
           <a:lstStyle/>
           <a:p>
             <a:pPr algn="ctr">
-              <a:defRPr sz="1300" b="1">
+              <a:defRPr sz="2400" b="1">
+                <a:solidFill>
+                  <a:srgbClr val="D64343"/>
+                </a:solidFill>
+                <a:latin typeface="Aptos"/>
+              </a:defRPr>
+            </a:pPr>
+            <a:r>
+              <a:t>-0.10 to -0.12</a:t>
+            </a:r>
+          </a:p>
+        </p:txBody>
+      </p:sp>
+      <p:sp>
+        <p:nvSpPr>
+          <p:cNvPr id="8" name="TextBox 7"/>
+          <p:cNvSpPr txBox="1"/>
+          <p:nvPr/>
+        </p:nvSpPr>
+        <p:spPr>
+          <a:xfrm>
+            <a:off x="8659367" y="2395728"/>
+            <a:ext cx="2194560" cy="274320"/>
+          </a:xfrm>
+          <a:prstGeom prst="rect">
+            <a:avLst/>
+          </a:prstGeom>
+          <a:noFill/>
+        </p:spPr>
+        <p:txBody>
+          <a:bodyPr wrap="square" anchor="t">
+            <a:spAutoFit/>
+          </a:bodyPr>
+          <a:lstStyle/>
+          <a:p>
+            <a:pPr algn="ctr">
+              <a:defRPr sz="1100" b="1">
+                <a:solidFill>
+                  <a:srgbClr val="FFFFFF"/>
+                </a:solidFill>
+                <a:latin typeface="Aptos"/>
+              </a:defRPr>
+            </a:pPr>
+            <a:r>
+              <a:t>GENDER FNR GAP (M − F)</a:t>
+            </a:r>
+          </a:p>
+        </p:txBody>
+      </p:sp>
+      <p:sp>
+        <p:nvSpPr>
+          <p:cNvPr id="9" name="TextBox 8"/>
+          <p:cNvSpPr txBox="1"/>
+          <p:nvPr/>
+        </p:nvSpPr>
+        <p:spPr>
+          <a:xfrm>
+            <a:off x="8659367" y="2706624"/>
+            <a:ext cx="2194560" cy="164592"/>
+          </a:xfrm>
+          <a:prstGeom prst="rect">
+            <a:avLst/>
+          </a:prstGeom>
+          <a:noFill/>
+        </p:spPr>
+        <p:txBody>
+          <a:bodyPr wrap="square" anchor="t">
+            <a:spAutoFit/>
+          </a:bodyPr>
+          <a:lstStyle/>
+          <a:p>
+            <a:pPr algn="ctr">
+              <a:defRPr sz="800" b="0">
+                <a:solidFill>
+                  <a:srgbClr val="F0F4F8"/>
+                </a:solidFill>
+                <a:latin typeface="Aptos"/>
+              </a:defRPr>
+            </a:pPr>
+            <a:r>
+              <a:t>women miss support more · all significant</a:t>
+            </a:r>
+          </a:p>
+        </p:txBody>
+      </p:sp>
+      <p:sp>
+        <p:nvSpPr>
+          <p:cNvPr id="10" name="Rounded Rectangle 9"/>
+          <p:cNvSpPr/>
+          <p:nvPr/>
+        </p:nvSpPr>
+        <p:spPr>
+          <a:xfrm>
+            <a:off x="8549640" y="3200400"/>
+            <a:ext cx="2423160" cy="1261872"/>
+          </a:xfrm>
+          <a:prstGeom prst="roundRect">
+            <a:avLst/>
+          </a:prstGeom>
+          <a:solidFill>
+            <a:srgbClr val="143058"/>
+          </a:solidFill>
+          <a:ln>
+            <a:solidFill>
+              <a:srgbClr val="00B4B4"/>
+            </a:solidFill>
+          </a:ln>
+        </p:spPr>
+        <p:style>
+          <a:lnRef idx="1">
+            <a:schemeClr val="accent1"/>
+          </a:lnRef>
+          <a:fillRef idx="3">
+            <a:schemeClr val="accent1"/>
+          </a:fillRef>
+          <a:effectRef idx="2">
+            <a:schemeClr val="accent1"/>
+          </a:effectRef>
+          <a:fontRef idx="minor">
+            <a:schemeClr val="lt1"/>
+          </a:fontRef>
+        </p:style>
+        <p:txBody>
+          <a:bodyPr rtlCol="0" anchor="ctr"/>
+          <a:lstStyle/>
+          <a:p>
+            <a:pPr algn="ctr"/>
+          </a:p>
+        </p:txBody>
+      </p:sp>
+      <p:sp>
+        <p:nvSpPr>
+          <p:cNvPr id="11" name="TextBox 10"/>
+          <p:cNvSpPr txBox="1"/>
+          <p:nvPr/>
+        </p:nvSpPr>
+        <p:spPr>
+          <a:xfrm>
+            <a:off x="8659367" y="3337560"/>
+            <a:ext cx="2194560" cy="438912"/>
+          </a:xfrm>
+          <a:prstGeom prst="rect">
+            <a:avLst/>
+          </a:prstGeom>
+          <a:noFill/>
+        </p:spPr>
+        <p:txBody>
+          <a:bodyPr wrap="square" anchor="t">
+            <a:spAutoFit/>
+          </a:bodyPr>
+          <a:lstStyle/>
+          <a:p>
+            <a:pPr algn="ctr">
+              <a:defRPr sz="2400" b="1">
+                <a:solidFill>
+                  <a:srgbClr val="00B4B4"/>
+                </a:solidFill>
+                <a:latin typeface="Aptos"/>
+              </a:defRPr>
+            </a:pPr>
+            <a:r>
+              <a:t>3 / 3 models</a:t>
+            </a:r>
+          </a:p>
+        </p:txBody>
+      </p:sp>
+      <p:sp>
+        <p:nvSpPr>
+          <p:cNvPr id="12" name="TextBox 11"/>
+          <p:cNvSpPr txBox="1"/>
+          <p:nvPr/>
+        </p:nvSpPr>
+        <p:spPr>
+          <a:xfrm>
+            <a:off x="8659367" y="3858768"/>
+            <a:ext cx="2194560" cy="274320"/>
+          </a:xfrm>
+          <a:prstGeom prst="rect">
+            <a:avLst/>
+          </a:prstGeom>
+          <a:noFill/>
+        </p:spPr>
+        <p:txBody>
+          <a:bodyPr wrap="square" anchor="t">
+            <a:spAutoFit/>
+          </a:bodyPr>
+          <a:lstStyle/>
+          <a:p>
+            <a:pPr algn="ctr">
+              <a:defRPr sz="1100" b="1">
+                <a:solidFill>
+                  <a:srgbClr val="FFFFFF"/>
+                </a:solidFill>
+                <a:latin typeface="Aptos"/>
+              </a:defRPr>
+            </a:pPr>
+            <a:r>
+              <a:t>RACE: EQUIVALENT ±5 PTS</a:t>
+            </a:r>
+          </a:p>
+        </p:txBody>
+      </p:sp>
+      <p:sp>
+        <p:nvSpPr>
+          <p:cNvPr id="13" name="TextBox 12"/>
+          <p:cNvSpPr txBox="1"/>
+          <p:nvPr/>
+        </p:nvSpPr>
+        <p:spPr>
+          <a:xfrm>
+            <a:off x="8659367" y="4169664"/>
+            <a:ext cx="2194560" cy="164592"/>
+          </a:xfrm>
+          <a:prstGeom prst="rect">
+            <a:avLst/>
+          </a:prstGeom>
+          <a:noFill/>
+        </p:spPr>
+        <p:txBody>
+          <a:bodyPr wrap="square" anchor="t">
+            <a:spAutoFit/>
+          </a:bodyPr>
+          <a:lstStyle/>
+          <a:p>
+            <a:pPr algn="ctr">
+              <a:defRPr sz="800" b="0">
+                <a:solidFill>
+                  <a:srgbClr val="F0F4F8"/>
+                </a:solidFill>
+                <a:latin typeface="Aptos"/>
+              </a:defRPr>
+            </a:pPr>
+            <a:r>
+              <a:t>TOST on selection, FNR, FPR</a:t>
+            </a:r>
+          </a:p>
+        </p:txBody>
+      </p:sp>
+      <p:sp>
+        <p:nvSpPr>
+          <p:cNvPr id="14" name="Rounded Rectangle 13"/>
+          <p:cNvSpPr/>
+          <p:nvPr/>
+        </p:nvSpPr>
+        <p:spPr>
+          <a:xfrm>
+            <a:off x="8549640" y="4663440"/>
+            <a:ext cx="2423160" cy="1261872"/>
+          </a:xfrm>
+          <a:prstGeom prst="roundRect">
+            <a:avLst/>
+          </a:prstGeom>
+          <a:solidFill>
+            <a:srgbClr val="143058"/>
+          </a:solidFill>
+          <a:ln>
+            <a:solidFill>
+              <a:srgbClr val="FB8500"/>
+            </a:solidFill>
+          </a:ln>
+        </p:spPr>
+        <p:style>
+          <a:lnRef idx="1">
+            <a:schemeClr val="accent1"/>
+          </a:lnRef>
+          <a:fillRef idx="3">
+            <a:schemeClr val="accent1"/>
+          </a:fillRef>
+          <a:effectRef idx="2">
+            <a:schemeClr val="accent1"/>
+          </a:effectRef>
+          <a:fontRef idx="minor">
+            <a:schemeClr val="lt1"/>
+          </a:fontRef>
+        </p:style>
+        <p:txBody>
+          <a:bodyPr rtlCol="0" anchor="ctr"/>
+          <a:lstStyle/>
+          <a:p>
+            <a:pPr algn="ctr"/>
+          </a:p>
+        </p:txBody>
+      </p:sp>
+      <p:sp>
+        <p:nvSpPr>
+          <p:cNvPr id="15" name="TextBox 14"/>
+          <p:cNvSpPr txBox="1"/>
+          <p:nvPr/>
+        </p:nvSpPr>
+        <p:spPr>
+          <a:xfrm>
+            <a:off x="8659367" y="4800600"/>
+            <a:ext cx="2194560" cy="438912"/>
+          </a:xfrm>
+          <a:prstGeom prst="rect">
+            <a:avLst/>
+          </a:prstGeom>
+          <a:noFill/>
+        </p:spPr>
+        <p:txBody>
+          <a:bodyPr wrap="square" anchor="t">
+            <a:spAutoFit/>
+          </a:bodyPr>
+          <a:lstStyle/>
+          <a:p>
+            <a:pPr algn="ctr">
+              <a:defRPr sz="2400" b="1">
                 <a:solidFill>
                   <a:srgbClr val="FB8500"/>
                 </a:solidFill>
@@ -10364,14 +11528,122 @@
               </a:defRPr>
             </a:pPr>
             <a:r>
-              <a:t>Subsamples of one Georgia cohort test sample-size sensitivity; they do not validate transfer to other agencies.</a:t>
-            </a:r>
-          </a:p>
-        </p:txBody>
-      </p:sp>
-      <p:sp>
-        <p:nvSpPr>
-          <p:cNvPr id="7" name="TextBox 6"/>
+              <a:t>-0.23 to -0.24</a:t>
+            </a:r>
+          </a:p>
+        </p:txBody>
+      </p:sp>
+      <p:sp>
+        <p:nvSpPr>
+          <p:cNvPr id="16" name="TextBox 15"/>
+          <p:cNvSpPr txBox="1"/>
+          <p:nvPr/>
+        </p:nvSpPr>
+        <p:spPr>
+          <a:xfrm>
+            <a:off x="8659367" y="5321807"/>
+            <a:ext cx="2194560" cy="274320"/>
+          </a:xfrm>
+          <a:prstGeom prst="rect">
+            <a:avLst/>
+          </a:prstGeom>
+          <a:noFill/>
+        </p:spPr>
+        <p:txBody>
+          <a:bodyPr wrap="square" anchor="t">
+            <a:spAutoFit/>
+          </a:bodyPr>
+          <a:lstStyle/>
+          <a:p>
+            <a:pPr algn="ctr">
+              <a:defRPr sz="1100" b="1">
+                <a:solidFill>
+                  <a:srgbClr val="FFFFFF"/>
+                </a:solidFill>
+                <a:latin typeface="Aptos"/>
+              </a:defRPr>
+            </a:pPr>
+            <a:r>
+              <a:t>AGE FNR GAP (&lt;33 − 33+)</a:t>
+            </a:r>
+          </a:p>
+        </p:txBody>
+      </p:sp>
+      <p:sp>
+        <p:nvSpPr>
+          <p:cNvPr id="17" name="TextBox 16"/>
+          <p:cNvSpPr txBox="1"/>
+          <p:nvPr/>
+        </p:nvSpPr>
+        <p:spPr>
+          <a:xfrm>
+            <a:off x="8659367" y="5632704"/>
+            <a:ext cx="2194560" cy="164592"/>
+          </a:xfrm>
+          <a:prstGeom prst="rect">
+            <a:avLst/>
+          </a:prstGeom>
+          <a:noFill/>
+        </p:spPr>
+        <p:txBody>
+          <a:bodyPr wrap="square" anchor="t">
+            <a:spAutoFit/>
+          </a:bodyPr>
+          <a:lstStyle/>
+          <a:p>
+            <a:pPr algn="ctr">
+              <a:defRPr sz="800" b="0">
+                <a:solidFill>
+                  <a:srgbClr val="F0F4F8"/>
+                </a:solidFill>
+                <a:latin typeface="Aptos"/>
+              </a:defRPr>
+            </a:pPr>
+            <a:r>
+              <a:t>age is an input: needs a stated justification</a:t>
+            </a:r>
+          </a:p>
+        </p:txBody>
+      </p:sp>
+      <p:sp>
+        <p:nvSpPr>
+          <p:cNvPr id="18" name="TextBox 17"/>
+          <p:cNvSpPr txBox="1"/>
+          <p:nvPr/>
+        </p:nvSpPr>
+        <p:spPr>
+          <a:xfrm>
+            <a:off x="914400" y="6217920"/>
+            <a:ext cx="10058400" cy="274320"/>
+          </a:xfrm>
+          <a:prstGeom prst="rect">
+            <a:avLst/>
+          </a:prstGeom>
+          <a:noFill/>
+        </p:spPr>
+        <p:txBody>
+          <a:bodyPr wrap="square" anchor="t">
+            <a:spAutoFit/>
+          </a:bodyPr>
+          <a:lstStyle/>
+          <a:p>
+            <a:pPr algn="ctr">
+              <a:defRPr sz="1100" b="1">
+                <a:solidFill>
+                  <a:srgbClr val="FB8500"/>
+                </a:solidFill>
+                <a:latin typeface="Aptos"/>
+              </a:defRPr>
+            </a:pPr>
+            <a:r>
+              <a:t>Selection = support offered, so the harm is a missed offer: FNR is primary. Not significant ≠ fair; we test equivalence.</a:t>
+            </a:r>
+          </a:p>
+        </p:txBody>
+      </p:sp>
+      <p:sp>
+        <p:nvSpPr>
+          <p:cNvPr id="19" name="TextBox 18"/>
           <p:cNvSpPr txBox="1"/>
           <p:nvPr/>
         </p:nvSpPr>
@@ -10407,7 +11679,7 @@
       </p:sp>
       <p:sp>
         <p:nvSpPr>
-          <p:cNvPr id="8" name="TextBox 7"/>
+          <p:cNvPr id="20" name="TextBox 19"/>
           <p:cNvSpPr txBox="1"/>
           <p:nvPr/>
         </p:nvSpPr>
@@ -10498,7 +11770,7 @@
               </a:defRPr>
             </a:pPr>
             <a:r>
-              <a:t>07 · ECONOMIC PERFORMANCE</a:t>
+              <a:t>07 · FAIRNESS, SHARPENED</a:t>
             </a:r>
           </a:p>
         </p:txBody>
@@ -10534,7 +11806,7 @@
               </a:defRPr>
             </a:pPr>
             <a:r>
-              <a:t>Model value is a scenario, stress-tested</a:t>
+              <a:t>Fairness: probability scores and allocation rules</a:t>
             </a:r>
           </a:p>
         </p:txBody>
@@ -10590,125 +11862,8 @@
         </p:nvSpPr>
         <p:spPr>
           <a:xfrm>
-            <a:off x="731520" y="1737360"/>
-            <a:ext cx="2423160" cy="1261872"/>
-          </a:xfrm>
-          <a:prstGeom prst="roundRect">
-            <a:avLst/>
-          </a:prstGeom>
-          <a:solidFill>
-            <a:srgbClr val="143058"/>
-          </a:solidFill>
-          <a:ln>
-            <a:solidFill>
-              <a:srgbClr val="FB8500"/>
-            </a:solidFill>
-          </a:ln>
-        </p:spPr>
-        <p:style>
-          <a:lnRef idx="1">
-            <a:schemeClr val="accent1"/>
-          </a:lnRef>
-          <a:fillRef idx="3">
-            <a:schemeClr val="accent1"/>
-          </a:fillRef>
-          <a:effectRef idx="2">
-            <a:schemeClr val="accent1"/>
-          </a:effectRef>
-          <a:fontRef idx="minor">
-            <a:schemeClr val="lt1"/>
-          </a:fontRef>
-        </p:style>
-        <p:txBody>
-          <a:bodyPr rtlCol="0" anchor="ctr"/>
-          <a:lstStyle/>
-          <a:p>
-            <a:pPr algn="ctr"/>
-          </a:p>
-        </p:txBody>
-      </p:sp>
-      <p:sp>
-        <p:nvSpPr>
-          <p:cNvPr id="6" name="TextBox 5"/>
-          <p:cNvSpPr txBox="1"/>
-          <p:nvPr/>
-        </p:nvSpPr>
-        <p:spPr>
-          <a:xfrm>
-            <a:off x="841248" y="1874519"/>
-            <a:ext cx="2194560" cy="438912"/>
-          </a:xfrm>
-          <a:prstGeom prst="rect">
-            <a:avLst/>
-          </a:prstGeom>
-          <a:noFill/>
-        </p:spPr>
-        <p:txBody>
-          <a:bodyPr wrap="square" anchor="t">
-            <a:spAutoFit/>
-          </a:bodyPr>
-          <a:lstStyle/>
-          <a:p>
-            <a:pPr algn="ctr">
-              <a:defRPr sz="2400" b="1">
-                <a:solidFill>
-                  <a:srgbClr val="FB8500"/>
-                </a:solidFill>
-                <a:latin typeface="Aptos"/>
-              </a:defRPr>
-            </a:pPr>
-            <a:r>
-              <a:t>20%</a:t>
-            </a:r>
-          </a:p>
-        </p:txBody>
-      </p:sp>
-      <p:sp>
-        <p:nvSpPr>
-          <p:cNvPr id="7" name="TextBox 6"/>
-          <p:cNvSpPr txBox="1"/>
-          <p:nvPr/>
-        </p:nvSpPr>
-        <p:spPr>
-          <a:xfrm>
-            <a:off x="841248" y="2395728"/>
-            <a:ext cx="2194560" cy="274320"/>
-          </a:xfrm>
-          <a:prstGeom prst="rect">
-            <a:avLst/>
-          </a:prstGeom>
-          <a:noFill/>
-        </p:spPr>
-        <p:txBody>
-          <a:bodyPr wrap="square" anchor="t">
-            <a:spAutoFit/>
-          </a:bodyPr>
-          <a:lstStyle/>
-          <a:p>
-            <a:pPr algn="ctr">
-              <a:defRPr sz="1100" b="1">
-                <a:solidFill>
-                  <a:srgbClr val="FFFFFF"/>
-                </a:solidFill>
-                <a:latin typeface="Aptos"/>
-              </a:defRPr>
-            </a:pPr>
-            <a:r>
-              <a:t>SERVICE CAPACITY</a:t>
-            </a:r>
-          </a:p>
-        </p:txBody>
-      </p:sp>
-      <p:sp>
-        <p:nvSpPr>
-          <p:cNvPr id="8" name="Rounded Rectangle 7"/>
-          <p:cNvSpPr/>
-          <p:nvPr/>
-        </p:nvSpPr>
-        <p:spPr>
-          <a:xfrm>
-            <a:off x="3429000" y="1737360"/>
-            <a:ext cx="2423160" cy="1261872"/>
+            <a:off x="640080" y="1691640"/>
+            <a:ext cx="5257800" cy="4297680"/>
           </a:xfrm>
           <a:prstGeom prst="roundRect">
             <a:avLst/>
@@ -10746,14 +11901,14 @@
       </p:sp>
       <p:sp>
         <p:nvSpPr>
-          <p:cNvPr id="9" name="TextBox 8"/>
-          <p:cNvSpPr txBox="1"/>
-          <p:nvPr/>
-        </p:nvSpPr>
-        <p:spPr>
-          <a:xfrm>
-            <a:off x="3538728" y="1874519"/>
-            <a:ext cx="2194560" cy="438912"/>
+          <p:cNvPr id="6" name="TextBox 5"/>
+          <p:cNvSpPr txBox="1"/>
+          <p:nvPr/>
+        </p:nvSpPr>
+        <p:spPr>
+          <a:xfrm>
+            <a:off x="868680" y="1965960"/>
+            <a:ext cx="4800600" cy="365760"/>
           </a:xfrm>
           <a:prstGeom prst="rect">
             <a:avLst/>
@@ -10767,7 +11922,7 @@
           <a:lstStyle/>
           <a:p>
             <a:pPr algn="ctr">
-              <a:defRPr sz="2400" b="1">
+              <a:defRPr sz="2000" b="1">
                 <a:solidFill>
                   <a:srgbClr val="00B4B4"/>
                 </a:solidFill>
@@ -10775,21 +11930,21 @@
               </a:defRPr>
             </a:pPr>
             <a:r>
-              <a:t>$5.17M</a:t>
-            </a:r>
-          </a:p>
-        </p:txBody>
-      </p:sp>
-      <p:sp>
-        <p:nvSpPr>
-          <p:cNvPr id="10" name="TextBox 9"/>
-          <p:cNvSpPr txBox="1"/>
-          <p:nvPr/>
-        </p:nvSpPr>
-        <p:spPr>
-          <a:xfrm>
-            <a:off x="3538728" y="2395728"/>
-            <a:ext cx="2194560" cy="274320"/>
+              <a:t>SCORE CALIBRATION</a:t>
+            </a:r>
+          </a:p>
+        </p:txBody>
+      </p:sp>
+      <p:sp>
+        <p:nvSpPr>
+          <p:cNvPr id="7" name="TextBox 6"/>
+          <p:cNvSpPr txBox="1"/>
+          <p:nvPr/>
+        </p:nvSpPr>
+        <p:spPr>
+          <a:xfrm>
+            <a:off x="960119" y="2679192"/>
+            <a:ext cx="4617720" cy="3063240"/>
           </a:xfrm>
           <a:prstGeom prst="rect">
             <a:avLst/>
@@ -10803,29 +11958,39 @@
           <a:lstStyle/>
           <a:p>
             <a:pPr algn="ctr">
-              <a:defRPr sz="1100" b="1">
-                <a:solidFill>
-                  <a:srgbClr val="FFFFFF"/>
-                </a:solidFill>
-                <a:latin typeface="Aptos"/>
-              </a:defRPr>
-            </a:pPr>
-            <a:r>
-              <a:t>XGBOOST NET</a:t>
-            </a:r>
-          </a:p>
-        </p:txBody>
-      </p:sp>
-      <p:sp>
-        <p:nvSpPr>
-          <p:cNvPr id="11" name="Rounded Rectangle 10"/>
+              <a:defRPr sz="1500" b="0">
+                <a:solidFill>
+                  <a:srgbClr val="F0F4F8"/>
+                </a:solidFill>
+                <a:latin typeface="Aptos"/>
+              </a:defRPr>
+            </a:pPr>
+            <a:r>
+              <a:t>Women are over-predicted by every model: mean score 0.52 vs observed 0.45</a:t>
+            </a:r>
+            <a:br/>
+            <a:br/>
+            <a:r>
+              <a:t>Yet they are selected less at the top 20%</a:t>
+            </a:r>
+            <a:br/>
+            <a:br/>
+            <a:r>
+              <a:t>Changing decision thresholds leaves probabilities unchanged</a:t>
+            </a:r>
+          </a:p>
+        </p:txBody>
+      </p:sp>
+      <p:sp>
+        <p:nvSpPr>
+          <p:cNvPr id="8" name="Rounded Rectangle 7"/>
           <p:cNvSpPr/>
           <p:nvPr/>
         </p:nvSpPr>
         <p:spPr>
           <a:xfrm>
-            <a:off x="6126480" y="1737360"/>
-            <a:ext cx="2423160" cy="1261872"/>
+            <a:off x="6263640" y="1691640"/>
+            <a:ext cx="5257800" cy="4297680"/>
           </a:xfrm>
           <a:prstGeom prst="roundRect">
             <a:avLst/>
@@ -10863,14 +12028,14 @@
       </p:sp>
       <p:sp>
         <p:nvSpPr>
-          <p:cNvPr id="12" name="TextBox 11"/>
-          <p:cNvSpPr txBox="1"/>
-          <p:nvPr/>
-        </p:nvSpPr>
-        <p:spPr>
-          <a:xfrm>
-            <a:off x="6236208" y="1874519"/>
-            <a:ext cx="2194560" cy="438912"/>
+          <p:cNvPr id="9" name="TextBox 8"/>
+          <p:cNvSpPr txBox="1"/>
+          <p:nvPr/>
+        </p:nvSpPr>
+        <p:spPr>
+          <a:xfrm>
+            <a:off x="6492240" y="1965960"/>
+            <a:ext cx="4800600" cy="365760"/>
           </a:xfrm>
           <a:prstGeom prst="rect">
             <a:avLst/>
@@ -10884,7 +12049,7 @@
           <a:lstStyle/>
           <a:p>
             <a:pPr algn="ctr">
-              <a:defRPr sz="2400" b="1">
+              <a:defRPr sz="2000" b="1">
                 <a:solidFill>
                   <a:srgbClr val="D64343"/>
                 </a:solidFill>
@@ -10892,21 +12057,21 @@
               </a:defRPr>
             </a:pPr>
             <a:r>
-              <a:t>$2.73M</a:t>
-            </a:r>
-          </a:p>
-        </p:txBody>
-      </p:sp>
-      <p:sp>
-        <p:nvSpPr>
-          <p:cNvPr id="13" name="TextBox 12"/>
-          <p:cNvSpPr txBox="1"/>
-          <p:nvPr/>
-        </p:nvSpPr>
-        <p:spPr>
-          <a:xfrm>
-            <a:off x="6236208" y="2395728"/>
-            <a:ext cx="2194560" cy="274320"/>
+              <a:t>ALLOCATION ERRORS</a:t>
+            </a:r>
+          </a:p>
+        </p:txBody>
+      </p:sp>
+      <p:sp>
+        <p:nvSpPr>
+          <p:cNvPr id="10" name="TextBox 9"/>
+          <p:cNvSpPr txBox="1"/>
+          <p:nvPr/>
+        </p:nvSpPr>
+        <p:spPr>
+          <a:xfrm>
+            <a:off x="6583679" y="2679192"/>
+            <a:ext cx="4617720" cy="3063240"/>
           </a:xfrm>
           <a:prstGeom prst="rect">
             <a:avLst/>
@@ -10920,210 +12085,32 @@
           <a:lstStyle/>
           <a:p>
             <a:pPr algn="ctr">
-              <a:defRPr sz="1100" b="1">
-                <a:solidFill>
-                  <a:srgbClr val="FFFFFF"/>
-                </a:solidFill>
-                <a:latin typeface="Aptos"/>
-              </a:defRPr>
-            </a:pPr>
-            <a:r>
-              <a:t>INCUMBENT NET</a:t>
-            </a:r>
-          </a:p>
-        </p:txBody>
-      </p:sp>
-      <p:sp>
-        <p:nvSpPr>
-          <p:cNvPr id="14" name="Rounded Rectangle 13"/>
-          <p:cNvSpPr/>
-          <p:nvPr/>
-        </p:nvSpPr>
-        <p:spPr>
-          <a:xfrm>
-            <a:off x="8823960" y="1737360"/>
-            <a:ext cx="2423160" cy="1261872"/>
-          </a:xfrm>
-          <a:prstGeom prst="roundRect">
-            <a:avLst/>
-          </a:prstGeom>
-          <a:solidFill>
-            <a:srgbClr val="143058"/>
-          </a:solidFill>
-          <a:ln>
-            <a:solidFill>
-              <a:srgbClr val="828FA0"/>
-            </a:solidFill>
-          </a:ln>
-        </p:spPr>
-        <p:style>
-          <a:lnRef idx="1">
-            <a:schemeClr val="accent1"/>
-          </a:lnRef>
-          <a:fillRef idx="3">
-            <a:schemeClr val="accent1"/>
-          </a:fillRef>
-          <a:effectRef idx="2">
-            <a:schemeClr val="accent1"/>
-          </a:effectRef>
-          <a:fontRef idx="minor">
-            <a:schemeClr val="lt1"/>
-          </a:fontRef>
-        </p:style>
-        <p:txBody>
-          <a:bodyPr rtlCol="0" anchor="ctr"/>
-          <a:lstStyle/>
-          <a:p>
-            <a:pPr algn="ctr"/>
-          </a:p>
-        </p:txBody>
-      </p:sp>
-      <p:sp>
-        <p:nvSpPr>
-          <p:cNvPr id="15" name="TextBox 14"/>
-          <p:cNvSpPr txBox="1"/>
-          <p:nvPr/>
-        </p:nvSpPr>
-        <p:spPr>
-          <a:xfrm>
-            <a:off x="8933688" y="1874519"/>
-            <a:ext cx="2194560" cy="438912"/>
-          </a:xfrm>
-          <a:prstGeom prst="rect">
-            <a:avLst/>
-          </a:prstGeom>
-          <a:noFill/>
-        </p:spPr>
-        <p:txBody>
-          <a:bodyPr wrap="square" anchor="t">
-            <a:spAutoFit/>
-          </a:bodyPr>
-          <a:lstStyle/>
-          <a:p>
-            <a:pPr algn="ctr">
-              <a:defRPr sz="2400" b="1">
-                <a:solidFill>
-                  <a:srgbClr val="828FA0"/>
-                </a:solidFill>
-                <a:latin typeface="Aptos"/>
-              </a:defRPr>
-            </a:pPr>
-            <a:r>
-              <a:t>$1.46M</a:t>
-            </a:r>
-          </a:p>
-        </p:txBody>
-      </p:sp>
-      <p:sp>
-        <p:nvSpPr>
-          <p:cNvPr id="16" name="TextBox 15"/>
-          <p:cNvSpPr txBox="1"/>
-          <p:nvPr/>
-        </p:nvSpPr>
-        <p:spPr>
-          <a:xfrm>
-            <a:off x="8933688" y="2395728"/>
-            <a:ext cx="2194560" cy="274320"/>
-          </a:xfrm>
-          <a:prstGeom prst="rect">
-            <a:avLst/>
-          </a:prstGeom>
-          <a:noFill/>
-        </p:spPr>
-        <p:txBody>
-          <a:bodyPr wrap="square" anchor="t">
-            <a:spAutoFit/>
-          </a:bodyPr>
-          <a:lstStyle/>
-          <a:p>
-            <a:pPr algn="ctr">
-              <a:defRPr sz="1100" b="1">
-                <a:solidFill>
-                  <a:srgbClr val="FFFFFF"/>
-                </a:solidFill>
-                <a:latin typeface="Aptos"/>
-              </a:defRPr>
-            </a:pPr>
-            <a:r>
-              <a:t>RANDOM NET</a:t>
-            </a:r>
-          </a:p>
-        </p:txBody>
-      </p:sp>
-      <p:sp>
-        <p:nvSpPr>
-          <p:cNvPr id="17" name="TextBox 16"/>
-          <p:cNvSpPr txBox="1"/>
-          <p:nvPr/>
-        </p:nvSpPr>
-        <p:spPr>
-          <a:xfrm>
-            <a:off x="731520" y="3401568"/>
-            <a:ext cx="10698480" cy="4389120"/>
-          </a:xfrm>
-          <a:prstGeom prst="rect">
-            <a:avLst/>
-          </a:prstGeom>
-          <a:noFill/>
-        </p:spPr>
-        <p:txBody>
-          <a:bodyPr wrap="square">
-            <a:spAutoFit/>
-          </a:bodyPr>
-          <a:lstStyle/>
-          <a:p>
-            <a:pPr>
-              <a:spcAft>
-                <a:spcPts val="1200"/>
-              </a:spcAft>
-              <a:defRPr sz="2000">
-                <a:solidFill>
-                  <a:srgbClr val="FFFFFF"/>
-                </a:solidFill>
-                <a:latin typeface="Aptos"/>
-              </a:defRPr>
-            </a:pPr>
-            <a:r>
-              <a:t>•  $5,000 support cost · $50,000 event cost · 20% assumed effectiveness — all editable in the app</a:t>
-            </a:r>
-          </a:p>
-          <a:p>
-            <a:pPr>
-              <a:spcAft>
-                <a:spcPts val="1200"/>
-              </a:spcAft>
-              <a:defRPr sz="2000">
-                <a:solidFill>
-                  <a:srgbClr val="FFFFFF"/>
-                </a:solidFill>
-                <a:latin typeface="Aptos"/>
-              </a:defRPr>
-            </a:pPr>
-            <a:r>
-              <a:t>•  Models beat the incumbent at every capacity from 5% to 50% (sensitivity sweep)</a:t>
-            </a:r>
-          </a:p>
-          <a:p>
-            <a:pPr>
-              <a:spcAft>
-                <a:spcPts val="1200"/>
-              </a:spcAft>
-              <a:defRPr sz="2000">
-                <a:solidFill>
-                  <a:srgbClr val="FFFFFF"/>
-                </a:solidFill>
-                <a:latin typeface="Aptos"/>
-              </a:defRPr>
-            </a:pPr>
-            <a:r>
-              <a:t>•  A randomized or quasi-experimental pilot must estimate real intervention impact</a:t>
-            </a:r>
-          </a:p>
-        </p:txBody>
-      </p:sp>
-      <p:sp>
-        <p:nvSpPr>
-          <p:cNvPr id="18" name="TextBox 17"/>
+              <a:defRPr sz="1500" b="0">
+                <a:solidFill>
+                  <a:srgbClr val="F0F4F8"/>
+                </a:solidFill>
+                <a:latin typeface="Aptos"/>
+              </a:defRPr>
+            </a:pPr>
+            <a:r>
+              <a:t>FPR, TPR and selection rates depend on policy</a:t>
+            </a:r>
+            <a:br/>
+            <a:br/>
+            <a:r>
+              <a:t>Equal FPR alone is not equalized odds</a:t>
+            </a:r>
+            <a:br/>
+            <a:br/>
+            <a:r>
+              <a:t>Our threshold frontier uses evaluation labels: illustrative, not validated</a:t>
+            </a:r>
+          </a:p>
+        </p:txBody>
+      </p:sp>
+      <p:sp>
+        <p:nvSpPr>
+          <p:cNvPr id="11" name="TextBox 10"/>
           <p:cNvSpPr txBox="1"/>
           <p:nvPr/>
         </p:nvSpPr>
@@ -11159,7 +12146,7 @@
       </p:sp>
       <p:sp>
         <p:nvSpPr>
-          <p:cNvPr id="19" name="TextBox 18"/>
+          <p:cNvPr id="12" name="TextBox 11"/>
           <p:cNvSpPr txBox="1"/>
           <p:nvPr/>
         </p:nvSpPr>
@@ -11250,7 +12237,7 @@
               </a:defRPr>
             </a:pPr>
             <a:r>
-              <a:t>08 · INTERPRETABILITY</a:t>
+              <a:t>08 · FAIRNESS INTERPRETABILITY (FPDP)</a:t>
             </a:r>
           </a:p>
         </p:txBody>
@@ -11286,7 +12273,7 @@
               </a:defRPr>
             </a:pPr>
             <a:r>
-              <a:t>Prediction explanations and their limits</a:t>
+              <a:t>Where does the gender gap come from?</a:t>
             </a:r>
           </a:p>
         </p:txBody>
@@ -11336,7 +12323,7 @@
       </p:sp>
       <p:pic>
         <p:nvPicPr>
-          <p:cNvPr id="5" name="Picture 4" descr="shap_individual.png"/>
+          <p:cNvPr id="5" name="Picture 4" descr="fpdp_gender.png"/>
           <p:cNvPicPr>
             <a:picLocks noChangeAspect="1"/>
           </p:cNvPicPr>
@@ -11350,8 +12337,8 @@
         </p:blipFill>
         <p:spPr>
           <a:xfrm>
-            <a:off x="365760" y="1554480"/>
-            <a:ext cx="7589520" cy="2869645"/>
+            <a:off x="320040" y="1508760"/>
+            <a:ext cx="7680960" cy="4743933"/>
           </a:xfrm>
           <a:prstGeom prst="rect">
             <a:avLst/>
@@ -11366,8 +12353,8 @@
         </p:nvSpPr>
         <p:spPr>
           <a:xfrm>
-            <a:off x="8229600" y="1554480"/>
-            <a:ext cx="3566160" cy="4480560"/>
+            <a:off x="8229600" y="1508760"/>
+            <a:ext cx="3611880" cy="4572000"/>
           </a:xfrm>
           <a:prstGeom prst="roundRect">
             <a:avLst/>
@@ -11377,7 +12364,7 @@
           </a:solidFill>
           <a:ln>
             <a:solidFill>
-              <a:srgbClr val="7B2CBF"/>
+              <a:srgbClr val="D64343"/>
             </a:solidFill>
           </a:ln>
         </p:spPr>
@@ -11411,8 +12398,8 @@
         </p:nvSpPr>
         <p:spPr>
           <a:xfrm>
-            <a:off x="8458200" y="1828800"/>
-            <a:ext cx="3108960" cy="365760"/>
+            <a:off x="8458200" y="1783080"/>
+            <a:ext cx="3154680" cy="365760"/>
           </a:xfrm>
           <a:prstGeom prst="rect">
             <a:avLst/>
@@ -11428,13 +12415,13 @@
             <a:pPr algn="ctr">
               <a:defRPr sz="2000" b="1">
                 <a:solidFill>
-                  <a:srgbClr val="7B2CBF"/>
-                </a:solidFill>
-                <a:latin typeface="Aptos"/>
-              </a:defRPr>
-            </a:pPr>
-            <a:r>
-              <a:t>METHODS</a:t>
+                  <a:srgbClr val="D64343"/>
+                </a:solidFill>
+                <a:latin typeface="Aptos"/>
+              </a:defRPr>
+            </a:pPr>
+            <a:r>
+              <a:t>CANDIDATE: GANG</a:t>
             </a:r>
           </a:p>
         </p:txBody>
@@ -11447,8 +12434,8 @@
         </p:nvSpPr>
         <p:spPr>
           <a:xfrm>
-            <a:off x="8549640" y="2542032"/>
-            <a:ext cx="2926080" cy="3246120"/>
+            <a:off x="8549640" y="2496312"/>
+            <a:ext cx="2971800" cy="3337560"/>
           </a:xfrm>
           <a:prstGeom prst="rect">
             <a:avLst/>
@@ -11470,22 +12457,22 @@
               </a:defRPr>
             </a:pPr>
             <a:r>
-              <a:t>SHAP + LIME (local)</a:t>
+              <a:t>Never recorded for women; imputed as "No"</a:t>
             </a:r>
             <a:br/>
             <a:br/>
             <a:r>
-              <a:t>XPER on AUC (Pérignon)</a:t>
+              <a:t>Drop + re-estimate: equal-opportunity p 0.000 → 0.995 (logistic)</a:t>
             </a:r>
             <a:br/>
             <a:br/>
             <a:r>
-              <a:t>Global surrogate: imperfect fidelity</a:t>
+              <a:t>AUC cost ≈ 0.014, ~6× the XGB − logistic gap</a:t>
             </a:r>
             <a:br/>
             <a:br/>
             <a:r>
-              <a:t>PDP/ICE for all three</a:t>
+              <a:t>Statistical parity still rejected</a:t>
             </a:r>
           </a:p>
         </p:txBody>
@@ -11498,7 +12485,7 @@
         </p:nvSpPr>
         <p:spPr>
           <a:xfrm>
-            <a:off x="914400" y="6172200"/>
+            <a:off x="914400" y="6236208"/>
             <a:ext cx="10058400" cy="274320"/>
           </a:xfrm>
           <a:prstGeom prst="rect">
@@ -11515,13 +12502,13 @@
             <a:pPr algn="ctr">
               <a:defRPr sz="1100" b="1">
                 <a:solidFill>
-                  <a:srgbClr val="D64343"/>
-                </a:solidFill>
-                <a:latin typeface="Aptos"/>
-              </a:defRPr>
-            </a:pPr>
-            <a:r>
-              <a:t>TabICLv2 has no native explanation path — a real deployment cost, covered only by model-agnostic PDP/ICE.</a:t>
+                  <a:srgbClr val="FB8500"/>
+                </a:solidFill>
+                <a:latin typeface="Aptos"/>
+              </a:defRPr>
+            </a:pPr>
+            <a:r>
+              <a:t>FPDP identifies candidate variables: association, not causation.</a:t>
             </a:r>
           </a:p>
         </p:txBody>

--- a/reports/ISAF_Recidivism_Presentation.pptx
+++ b/reports/ISAF_Recidivism_Presentation.pptx
@@ -4384,22 +4384,22 @@
               </a:defRPr>
             </a:pPr>
             <a:r>
-              <a:t>Native, coefficient-level explanations</a:t>
+              <a:t>Native, coefficient-level explanations — no second tool</a:t>
             </a:r>
             <a:br/>
             <a:br/>
             <a:r>
-              <a:t>Lowest refit drift</a:t>
+              <a:t>Lower refit drift on all 28 pairs (0.0322 vs 0.0351)</a:t>
             </a:r>
             <a:br/>
             <a:br/>
             <a:r>
-              <a:t>Smaller gender FNR gap (-0.096 vs -0.112)</a:t>
+              <a:t>More stable selected set (J 0.772 vs 0.747)</a:t>
             </a:r>
             <a:br/>
             <a:br/>
             <a:r>
-              <a:t>No significant race gap · fastest</a:t>
+              <a:t>~9× faster</a:t>
             </a:r>
           </a:p>
         </p:txBody>
@@ -4516,22 +4516,22 @@
               </a:defRPr>
             </a:pPr>
             <a:r>
-              <a:t>XGBoost AUC edge +0.0025</a:t>
+              <a:t>XGBoost AUC edge +0.0025 and Brier −0.0010</a:t>
             </a:r>
             <a:br/>
             <a:br/>
             <a:r>
-              <a:t>Best calibration (ECE 0.011 vs 0.013)</a:t>
+              <a:t>Calibration is a tie, not a loss: both indistinguishable from perfect</a:t>
             </a:r>
             <a:br/>
             <a:br/>
             <a:r>
-              <a:t>+12 captured re-arrests per 1,561 offers</a:t>
+              <a:t>Captured re-arrests: interval 29 to 0 includes 0</a:t>
             </a:r>
             <a:br/>
             <a:br/>
             <a:r>
-              <a:t>Detectable, operationally small</a:t>
+              <a:t>Significant, but not at the operating point</a:t>
             </a:r>
           </a:p>
         </p:txBody>
@@ -4699,7 +4699,7 @@
               </a:defRPr>
             </a:pPr>
             <a:r>
-              <a:t>The gap the mitigation closes (0.08) dwarfs the gap between the two models (0.016): disparity is a feature-set property, not an estimator choice.</a:t>
+              <a:t>Both models select 85% of the same people at the top-20% rule. Fairness and calibration differences between them are not significant.</a:t>
             </a:r>
           </a:p>
         </p:txBody>

--- a/reports/ISAF_Recidivism_Presentation.pptx
+++ b/reports/ISAF_Recidivism_Presentation.pptx
@@ -26,6 +26,8 @@
     <p:sldId id="274" r:id="rId25"/>
     <p:sldId id="275" r:id="rId26"/>
     <p:sldId id="276" r:id="rId27"/>
+    <p:sldId id="277" r:id="rId28"/>
+    <p:sldId id="278" r:id="rId29"/>
   </p:sldIdLst>
   <p:sldSz cx="12191695" cy="6858000" type="screen4x3"/>
   <p:notesSz cx="6858000" cy="9144000"/>
@@ -8431,6 +8433,540 @@
 </p:sld>
 </file>
 
+<file path=ppt/slides/slide22.xml><?xml version="1.0" encoding="utf-8"?>
+<p:sld xmlns:a="http://schemas.openxmlformats.org/drawingml/2006/main" xmlns:p="http://schemas.openxmlformats.org/presentationml/2006/main" xmlns:r="http://schemas.openxmlformats.org/officeDocument/2006/relationships">
+  <p:cSld>
+    <p:bg>
+      <p:bgPr>
+        <a:solidFill>
+          <a:srgbClr val="0A1F44"/>
+        </a:solidFill>
+        <a:effectLst/>
+      </p:bgPr>
+    </p:bg>
+    <p:spTree>
+      <p:nvGrpSpPr>
+        <p:cNvPr id="1" name=""/>
+        <p:cNvGrpSpPr/>
+        <p:nvPr/>
+      </p:nvGrpSpPr>
+      <p:grpSpPr/>
+      <p:sp>
+        <p:nvSpPr>
+          <p:cNvPr id="2" name="TextBox 1"/>
+          <p:cNvSpPr txBox="1"/>
+          <p:nvPr/>
+        </p:nvSpPr>
+        <p:spPr>
+          <a:xfrm>
+            <a:off x="594360" y="256032"/>
+            <a:ext cx="10972800" cy="274320"/>
+          </a:xfrm>
+          <a:prstGeom prst="rect">
+            <a:avLst/>
+          </a:prstGeom>
+          <a:noFill/>
+        </p:spPr>
+        <p:txBody>
+          <a:bodyPr wrap="square" anchor="t">
+            <a:spAutoFit/>
+          </a:bodyPr>
+          <a:lstStyle/>
+          <a:p>
+            <a:pPr algn="l">
+              <a:defRPr sz="1000" b="1">
+                <a:solidFill>
+                  <a:srgbClr val="FB8500"/>
+                </a:solidFill>
+                <a:latin typeface="Aptos"/>
+              </a:defRPr>
+            </a:pPr>
+            <a:r>
+              <a:t>A8 · PROXY RECOVERY</a:t>
+            </a:r>
+          </a:p>
+        </p:txBody>
+      </p:sp>
+      <p:sp>
+        <p:nvSpPr>
+          <p:cNvPr id="3" name="TextBox 2"/>
+          <p:cNvSpPr txBox="1"/>
+          <p:nvPr/>
+        </p:nvSpPr>
+        <p:spPr>
+          <a:xfrm>
+            <a:off x="594360" y="621792"/>
+            <a:ext cx="10972800" cy="594360"/>
+          </a:xfrm>
+          <a:prstGeom prst="rect">
+            <a:avLst/>
+          </a:prstGeom>
+          <a:noFill/>
+        </p:spPr>
+        <p:txBody>
+          <a:bodyPr wrap="square" anchor="t">
+            <a:spAutoFit/>
+          </a:bodyPr>
+          <a:lstStyle/>
+          <a:p>
+            <a:pPr algn="l">
+              <a:defRPr sz="2600" b="1">
+                <a:solidFill>
+                  <a:srgbClr val="FFFFFF"/>
+                </a:solidFill>
+                <a:latin typeface="Aptos"/>
+              </a:defRPr>
+            </a:pPr>
+            <a:r>
+              <a:t>Does excluding an attribute remove it?</a:t>
+            </a:r>
+          </a:p>
+        </p:txBody>
+      </p:sp>
+      <p:sp>
+        <p:nvSpPr>
+          <p:cNvPr id="4" name="Rectangle 3"/>
+          <p:cNvSpPr/>
+          <p:nvPr/>
+        </p:nvSpPr>
+        <p:spPr>
+          <a:xfrm>
+            <a:off x="594360" y="1298448"/>
+            <a:ext cx="1005840" cy="50292"/>
+          </a:xfrm>
+          <a:prstGeom prst="rect">
+            <a:avLst/>
+          </a:prstGeom>
+          <a:solidFill>
+            <a:srgbClr val="FB8500"/>
+          </a:solidFill>
+          <a:ln>
+            <a:noFill/>
+          </a:ln>
+        </p:spPr>
+        <p:style>
+          <a:lnRef idx="1">
+            <a:schemeClr val="accent1"/>
+          </a:lnRef>
+          <a:fillRef idx="3">
+            <a:schemeClr val="accent1"/>
+          </a:fillRef>
+          <a:effectRef idx="2">
+            <a:schemeClr val="accent1"/>
+          </a:effectRef>
+          <a:fontRef idx="minor">
+            <a:schemeClr val="lt1"/>
+          </a:fontRef>
+        </p:style>
+        <p:txBody>
+          <a:bodyPr rtlCol="0" anchor="ctr"/>
+          <a:lstStyle/>
+          <a:p>
+            <a:pPr algn="ctr"/>
+          </a:p>
+        </p:txBody>
+      </p:sp>
+      <p:pic>
+        <p:nvPicPr>
+          <p:cNvPr id="5" name="Picture 4" descr="proxy_recovery.png"/>
+          <p:cNvPicPr>
+            <a:picLocks noChangeAspect="1"/>
+          </p:cNvPicPr>
+          <p:nvPr/>
+        </p:nvPicPr>
+        <p:blipFill>
+          <a:blip r:embed="rId2"/>
+          <a:stretch>
+            <a:fillRect/>
+          </a:stretch>
+        </p:blipFill>
+        <p:spPr>
+          <a:xfrm>
+            <a:off x="365760" y="1554480"/>
+            <a:ext cx="7680960" cy="2746265"/>
+          </a:xfrm>
+          <a:prstGeom prst="rect">
+            <a:avLst/>
+          </a:prstGeom>
+        </p:spPr>
+      </p:pic>
+      <p:sp>
+        <p:nvSpPr>
+          <p:cNvPr id="6" name="Rounded Rectangle 5"/>
+          <p:cNvSpPr/>
+          <p:nvPr/>
+        </p:nvSpPr>
+        <p:spPr>
+          <a:xfrm>
+            <a:off x="8321040" y="1554480"/>
+            <a:ext cx="3474720" cy="4480560"/>
+          </a:xfrm>
+          <a:prstGeom prst="roundRect">
+            <a:avLst/>
+          </a:prstGeom>
+          <a:solidFill>
+            <a:srgbClr val="143058"/>
+          </a:solidFill>
+          <a:ln>
+            <a:solidFill>
+              <a:srgbClr val="D64343"/>
+            </a:solidFill>
+          </a:ln>
+        </p:spPr>
+        <p:style>
+          <a:lnRef idx="1">
+            <a:schemeClr val="accent1"/>
+          </a:lnRef>
+          <a:fillRef idx="3">
+            <a:schemeClr val="accent1"/>
+          </a:fillRef>
+          <a:effectRef idx="2">
+            <a:schemeClr val="accent1"/>
+          </a:effectRef>
+          <a:fontRef idx="minor">
+            <a:schemeClr val="lt1"/>
+          </a:fontRef>
+        </p:style>
+        <p:txBody>
+          <a:bodyPr rtlCol="0" anchor="ctr"/>
+          <a:lstStyle/>
+          <a:p>
+            <a:pPr algn="ctr"/>
+          </a:p>
+        </p:txBody>
+      </p:sp>
+      <p:sp>
+        <p:nvSpPr>
+          <p:cNvPr id="7" name="TextBox 6"/>
+          <p:cNvSpPr txBox="1"/>
+          <p:nvPr/>
+        </p:nvSpPr>
+        <p:spPr>
+          <a:xfrm>
+            <a:off x="8549640" y="1828800"/>
+            <a:ext cx="3017520" cy="365760"/>
+          </a:xfrm>
+          <a:prstGeom prst="rect">
+            <a:avLst/>
+          </a:prstGeom>
+          <a:noFill/>
+        </p:spPr>
+        <p:txBody>
+          <a:bodyPr wrap="square" anchor="t">
+            <a:spAutoFit/>
+          </a:bodyPr>
+          <a:lstStyle/>
+          <a:p>
+            <a:pPr algn="ctr">
+              <a:defRPr sz="2000" b="1">
+                <a:solidFill>
+                  <a:srgbClr val="D64343"/>
+                </a:solidFill>
+                <a:latin typeface="Aptos"/>
+              </a:defRPr>
+            </a:pPr>
+            <a:r>
+              <a:t>MEASURED</a:t>
+            </a:r>
+          </a:p>
+        </p:txBody>
+      </p:sp>
+      <p:sp>
+        <p:nvSpPr>
+          <p:cNvPr id="8" name="TextBox 7"/>
+          <p:cNvSpPr txBox="1"/>
+          <p:nvPr/>
+        </p:nvSpPr>
+        <p:spPr>
+          <a:xfrm>
+            <a:off x="8641080" y="2542032"/>
+            <a:ext cx="2834639" cy="3246120"/>
+          </a:xfrm>
+          <a:prstGeom prst="rect">
+            <a:avLst/>
+          </a:prstGeom>
+          <a:noFill/>
+        </p:spPr>
+        <p:txBody>
+          <a:bodyPr wrap="square" anchor="t">
+            <a:spAutoFit/>
+          </a:bodyPr>
+          <a:lstStyle/>
+          <a:p>
+            <a:pPr algn="ctr">
+              <a:defRPr sz="1500" b="0">
+                <a:solidFill>
+                  <a:srgbClr val="F0F4F8"/>
+                </a:solidFill>
+                <a:latin typeface="Aptos"/>
+              </a:defRPr>
+            </a:pPr>
+            <a:r>
+              <a:t>Predict the attribute from our own features</a:t>
+            </a:r>
+            <a:br/>
+            <a:br/>
+            <a:r>
+              <a:t>With missingness: gender AUC 1.00 — the leak, quantified</a:t>
+            </a:r>
+            <a:br/>
+            <a:br/>
+            <a:r>
+              <a:t>Shipped set: gender 0.78, race 0.71</a:t>
+            </a:r>
+            <a:br/>
+            <a:br/>
+            <a:r>
+              <a:t>Exclusion is not removal</a:t>
+            </a:r>
+          </a:p>
+        </p:txBody>
+      </p:sp>
+      <p:sp>
+        <p:nvSpPr>
+          <p:cNvPr id="9" name="TextBox 8"/>
+          <p:cNvSpPr txBox="1"/>
+          <p:nvPr/>
+        </p:nvSpPr>
+        <p:spPr>
+          <a:xfrm>
+            <a:off x="731520" y="6199632"/>
+            <a:ext cx="10698480" cy="365760"/>
+          </a:xfrm>
+          <a:prstGeom prst="rect">
+            <a:avLst/>
+          </a:prstGeom>
+          <a:noFill/>
+        </p:spPr>
+        <p:txBody>
+          <a:bodyPr wrap="square" anchor="t">
+            <a:spAutoFit/>
+          </a:bodyPr>
+          <a:lstStyle/>
+          <a:p>
+            <a:pPr algn="ctr">
+              <a:defRPr sz="1100" b="1">
+                <a:solidFill>
+                  <a:srgbClr val="FB8500"/>
+                </a:solidFill>
+                <a:latin typeface="Aptos"/>
+              </a:defRPr>
+            </a:pPr>
+            <a:r>
+              <a:t>Proxies are gun charges, mental-health/substance conditions, violent arrests, age — the substance of the assessment, not incidental fields.</a:t>
+            </a:r>
+          </a:p>
+        </p:txBody>
+      </p:sp>
+    </p:spTree>
+  </p:cSld>
+  <p:clrMapOvr>
+    <a:masterClrMapping/>
+  </p:clrMapOvr>
+</p:sld>
+</file>
+
+<file path=ppt/slides/slide23.xml><?xml version="1.0" encoding="utf-8"?>
+<p:sld xmlns:a="http://schemas.openxmlformats.org/drawingml/2006/main" xmlns:p="http://schemas.openxmlformats.org/presentationml/2006/main" xmlns:r="http://schemas.openxmlformats.org/officeDocument/2006/relationships">
+  <p:cSld>
+    <p:bg>
+      <p:bgPr>
+        <a:solidFill>
+          <a:srgbClr val="0A1F44"/>
+        </a:solidFill>
+        <a:effectLst/>
+      </p:bgPr>
+    </p:bg>
+    <p:spTree>
+      <p:nvGrpSpPr>
+        <p:cNvPr id="1" name=""/>
+        <p:cNvGrpSpPr/>
+        <p:nvPr/>
+      </p:nvGrpSpPr>
+      <p:grpSpPr/>
+      <p:sp>
+        <p:nvSpPr>
+          <p:cNvPr id="2" name="TextBox 1"/>
+          <p:cNvSpPr txBox="1"/>
+          <p:nvPr/>
+        </p:nvSpPr>
+        <p:spPr>
+          <a:xfrm>
+            <a:off x="594360" y="256032"/>
+            <a:ext cx="10972800" cy="274320"/>
+          </a:xfrm>
+          <a:prstGeom prst="rect">
+            <a:avLst/>
+          </a:prstGeom>
+          <a:noFill/>
+        </p:spPr>
+        <p:txBody>
+          <a:bodyPr wrap="square" anchor="t">
+            <a:spAutoFit/>
+          </a:bodyPr>
+          <a:lstStyle/>
+          <a:p>
+            <a:pPr algn="l">
+              <a:defRPr sz="1000" b="1">
+                <a:solidFill>
+                  <a:srgbClr val="FB8500"/>
+                </a:solidFill>
+                <a:latin typeface="Aptos"/>
+              </a:defRPr>
+            </a:pPr>
+            <a:r>
+              <a:t>A9 · DECISION STABILITY</a:t>
+            </a:r>
+          </a:p>
+        </p:txBody>
+      </p:sp>
+      <p:sp>
+        <p:nvSpPr>
+          <p:cNvPr id="3" name="TextBox 2"/>
+          <p:cNvSpPr txBox="1"/>
+          <p:nvPr/>
+        </p:nvSpPr>
+        <p:spPr>
+          <a:xfrm>
+            <a:off x="594360" y="621792"/>
+            <a:ext cx="10972800" cy="594360"/>
+          </a:xfrm>
+          <a:prstGeom prst="rect">
+            <a:avLst/>
+          </a:prstGeom>
+          <a:noFill/>
+        </p:spPr>
+        <p:txBody>
+          <a:bodyPr wrap="square" anchor="t">
+            <a:spAutoFit/>
+          </a:bodyPr>
+          <a:lstStyle/>
+          <a:p>
+            <a:pPr algn="l">
+              <a:defRPr sz="2600" b="1">
+                <a:solidFill>
+                  <a:srgbClr val="FFFFFF"/>
+                </a:solidFill>
+                <a:latin typeface="Aptos"/>
+              </a:defRPr>
+            </a:pPr>
+            <a:r>
+              <a:t>Would this person's offer survive a different sample?</a:t>
+            </a:r>
+          </a:p>
+        </p:txBody>
+      </p:sp>
+      <p:sp>
+        <p:nvSpPr>
+          <p:cNvPr id="4" name="Rectangle 3"/>
+          <p:cNvSpPr/>
+          <p:nvPr/>
+        </p:nvSpPr>
+        <p:spPr>
+          <a:xfrm>
+            <a:off x="594360" y="1298448"/>
+            <a:ext cx="1005840" cy="50292"/>
+          </a:xfrm>
+          <a:prstGeom prst="rect">
+            <a:avLst/>
+          </a:prstGeom>
+          <a:solidFill>
+            <a:srgbClr val="FB8500"/>
+          </a:solidFill>
+          <a:ln>
+            <a:noFill/>
+          </a:ln>
+        </p:spPr>
+        <p:style>
+          <a:lnRef idx="1">
+            <a:schemeClr val="accent1"/>
+          </a:lnRef>
+          <a:fillRef idx="3">
+            <a:schemeClr val="accent1"/>
+          </a:fillRef>
+          <a:effectRef idx="2">
+            <a:schemeClr val="accent1"/>
+          </a:effectRef>
+          <a:fontRef idx="minor">
+            <a:schemeClr val="lt1"/>
+          </a:fontRef>
+        </p:style>
+        <p:txBody>
+          <a:bodyPr rtlCol="0" anchor="ctr"/>
+          <a:lstStyle/>
+          <a:p>
+            <a:pPr algn="ctr"/>
+          </a:p>
+        </p:txBody>
+      </p:sp>
+      <p:pic>
+        <p:nvPicPr>
+          <p:cNvPr id="5" name="Picture 4" descr="individual_stability.png"/>
+          <p:cNvPicPr>
+            <a:picLocks noChangeAspect="1"/>
+          </p:cNvPicPr>
+          <p:nvPr/>
+        </p:nvPicPr>
+        <p:blipFill>
+          <a:blip r:embed="rId2"/>
+          <a:stretch>
+            <a:fillRect/>
+          </a:stretch>
+        </p:blipFill>
+        <p:spPr>
+          <a:xfrm>
+            <a:off x="320040" y="1554480"/>
+            <a:ext cx="11521440" cy="3268678"/>
+          </a:xfrm>
+          <a:prstGeom prst="rect">
+            <a:avLst/>
+          </a:prstGeom>
+        </p:spPr>
+      </p:pic>
+      <p:sp>
+        <p:nvSpPr>
+          <p:cNvPr id="6" name="TextBox 5"/>
+          <p:cNvSpPr txBox="1"/>
+          <p:nvPr/>
+        </p:nvSpPr>
+        <p:spPr>
+          <a:xfrm>
+            <a:off x="731520" y="6144768"/>
+            <a:ext cx="10698480" cy="411480"/>
+          </a:xfrm>
+          <a:prstGeom prst="rect">
+            <a:avLst/>
+          </a:prstGeom>
+          <a:noFill/>
+        </p:spPr>
+        <p:txBody>
+          <a:bodyPr wrap="square" anchor="t">
+            <a:spAutoFit/>
+          </a:bodyPr>
+          <a:lstStyle/>
+          <a:p>
+            <a:pPr algn="ctr">
+              <a:defRPr sz="1100" b="1">
+                <a:solidFill>
+                  <a:srgbClr val="FB8500"/>
+                </a:solidFill>
+                <a:latin typeface="Aptos"/>
+              </a:defRPr>
+            </a:pPr>
+            <a:r>
+              <a:t>14% of decisions flip between refits, and about 34% of those actually prioritised sit at that margin. Abstaining on them raises precision and WIDENS the gender gap: women are concentrated at the margin.</a:t>
+            </a:r>
+          </a:p>
+        </p:txBody>
+      </p:sp>
+    </p:spTree>
+  </p:cSld>
+  <p:clrMapOvr>
+    <a:masterClrMapping/>
+  </p:clrMapOvr>
+</p:sld>
+</file>
+
 <file path=ppt/slides/slide3.xml><?xml version="1.0" encoding="utf-8"?>
 <p:sld xmlns:a="http://schemas.openxmlformats.org/drawingml/2006/main" xmlns:p="http://schemas.openxmlformats.org/presentationml/2006/main" xmlns:r="http://schemas.openxmlformats.org/officeDocument/2006/relationships">
   <p:cSld>
@@ -9082,7 +9618,7 @@
               </a:defRPr>
             </a:pPr>
             <a:r>
-              <a:t>•  Found and fixed a representation leak: missing gang affiliation exactly marked women; mode-fill plus a regression audit now blocks it</a:t>
+              <a:t>•  Found and fixed a representation leak: gang affiliation is missing for every woman and no man, so with missingness indicators gender is recoverable at AUC 1.00 — mode-fill plus a regression audit now blocks it</a:t>
             </a:r>
           </a:p>
           <a:p>

--- a/reports/ISAF_Recidivism_Presentation.pptx
+++ b/reports/ISAF_Recidivism_Presentation.pptx
@@ -8420,7 +8420,7 @@
               </a:defRPr>
             </a:pPr>
             <a:r>
-              <a:t>Full log in JOURNEY.md — every step measured, including the attempts we rejected.</a:t>
+              <a:t>Full log in docs/JOURNEY.md — every step measured, including the attempts we rejected.</a:t>
             </a:r>
           </a:p>
         </p:txBody>

--- a/reports/ISAF_Recidivism_Presentation.pptx
+++ b/reports/ISAF_Recidivism_Presentation.pptx
@@ -127,6 +127,1968 @@
     </a:lvl9pPr>
   </p:defaultTextStyle>
 </p:presentation>
+</file>
+
+<file path=ppt/notesMasters/notesMaster1.xml><?xml version="1.0" encoding="utf-8"?>
+<p:notesMaster xmlns:a="http://schemas.openxmlformats.org/drawingml/2006/main" xmlns:p="http://schemas.openxmlformats.org/presentationml/2006/main" xmlns:r="http://schemas.openxmlformats.org/officeDocument/2006/relationships">
+  <p:cSld>
+    <p:bg>
+      <p:bgRef idx="1001">
+        <a:schemeClr val="bg1"/>
+      </p:bgRef>
+    </p:bg>
+    <p:spTree>
+      <p:nvGrpSpPr>
+        <p:cNvPr id="1" name=""/>
+        <p:cNvGrpSpPr/>
+        <p:nvPr/>
+      </p:nvGrpSpPr>
+      <p:grpSpPr>
+        <a:xfrm>
+          <a:off x="0" y="0"/>
+          <a:ext cx="0" cy="0"/>
+          <a:chOff x="0" y="0"/>
+          <a:chExt cx="0" cy="0"/>
+        </a:xfrm>
+      </p:grpSpPr>
+      <p:sp>
+        <p:nvSpPr>
+          <p:cNvPr id="2" name="Header Placeholder 1"/>
+          <p:cNvSpPr>
+            <a:spLocks noGrp="1"/>
+          </p:cNvSpPr>
+          <p:nvPr>
+            <p:ph type="hdr" sz="quarter"/>
+          </p:nvPr>
+        </p:nvSpPr>
+        <p:spPr>
+          <a:xfrm>
+            <a:off x="0" y="0"/>
+            <a:ext cx="2971800" cy="457200"/>
+          </a:xfrm>
+          <a:prstGeom prst="rect">
+            <a:avLst/>
+          </a:prstGeom>
+        </p:spPr>
+        <p:txBody>
+          <a:bodyPr vert="horz" lIns="91440" tIns="45720" rIns="91440" bIns="45720" rtlCol="0"/>
+          <a:lstStyle>
+            <a:lvl1pPr algn="l">
+              <a:defRPr sz="1200"/>
+            </a:lvl1pPr>
+          </a:lstStyle>
+          <a:p>
+            <a:endParaRPr lang="en-US"/>
+          </a:p>
+        </p:txBody>
+      </p:sp>
+      <p:sp>
+        <p:nvSpPr>
+          <p:cNvPr id="3" name="Date Placeholder 2"/>
+          <p:cNvSpPr>
+            <a:spLocks noGrp="1"/>
+          </p:cNvSpPr>
+          <p:nvPr>
+            <p:ph type="dt" idx="1"/>
+          </p:nvPr>
+        </p:nvSpPr>
+        <p:spPr>
+          <a:xfrm>
+            <a:off x="3884613" y="0"/>
+            <a:ext cx="2971800" cy="457200"/>
+          </a:xfrm>
+          <a:prstGeom prst="rect">
+            <a:avLst/>
+          </a:prstGeom>
+        </p:spPr>
+        <p:txBody>
+          <a:bodyPr vert="horz" lIns="91440" tIns="45720" rIns="91440" bIns="45720" rtlCol="0"/>
+          <a:lstStyle>
+            <a:lvl1pPr algn="r">
+              <a:defRPr sz="1200"/>
+            </a:lvl1pPr>
+          </a:lstStyle>
+          <a:p>
+            <a:fld id="{0F89C1C7-3DCD-1040-A9CF-14679D8B5DDD}" type="datetimeFigureOut">
+              <a:rPr lang="en-US" smtClean="0"/>
+              <a:t>10/17/16</a:t>
+            </a:fld>
+            <a:endParaRPr lang="en-US"/>
+          </a:p>
+        </p:txBody>
+      </p:sp>
+      <p:sp>
+        <p:nvSpPr>
+          <p:cNvPr id="4" name="Slide Image Placeholder 3"/>
+          <p:cNvSpPr>
+            <a:spLocks noGrp="1" noRot="1" noChangeAspect="1"/>
+          </p:cNvSpPr>
+          <p:nvPr>
+            <p:ph type="sldImg" idx="2"/>
+          </p:nvPr>
+        </p:nvSpPr>
+        <p:spPr>
+          <a:xfrm>
+            <a:off x="1143000" y="685800"/>
+            <a:ext cx="4572000" cy="3429000"/>
+          </a:xfrm>
+          <a:prstGeom prst="rect">
+            <a:avLst/>
+          </a:prstGeom>
+          <a:noFill/>
+          <a:ln w="12700">
+            <a:solidFill>
+              <a:prstClr val="black"/>
+            </a:solidFill>
+          </a:ln>
+        </p:spPr>
+        <p:txBody>
+          <a:bodyPr vert="horz" lIns="91440" tIns="45720" rIns="91440" bIns="45720" rtlCol="0" anchor="ctr"/>
+          <a:lstStyle/>
+          <a:p>
+            <a:endParaRPr lang="en-US"/>
+          </a:p>
+        </p:txBody>
+      </p:sp>
+      <p:sp>
+        <p:nvSpPr>
+          <p:cNvPr id="5" name="Notes Placeholder 4"/>
+          <p:cNvSpPr>
+            <a:spLocks noGrp="1"/>
+          </p:cNvSpPr>
+          <p:nvPr>
+            <p:ph type="body" sz="quarter" idx="3"/>
+          </p:nvPr>
+        </p:nvSpPr>
+        <p:spPr>
+          <a:xfrm>
+            <a:off x="685800" y="4343400"/>
+            <a:ext cx="5486400" cy="4114800"/>
+          </a:xfrm>
+          <a:prstGeom prst="rect">
+            <a:avLst/>
+          </a:prstGeom>
+        </p:spPr>
+        <p:txBody>
+          <a:bodyPr vert="horz" lIns="91440" tIns="45720" rIns="91440" bIns="45720" rtlCol="0"/>
+          <a:lstStyle/>
+          <a:p>
+            <a:pPr lvl="0"/>
+            <a:r>
+              <a:rPr lang="en-US" smtClean="0"/>
+              <a:t>Click to edit Master text styles</a:t>
+            </a:r>
+          </a:p>
+          <a:p>
+            <a:pPr lvl="1"/>
+            <a:r>
+              <a:rPr lang="en-US" smtClean="0"/>
+              <a:t>Second level</a:t>
+            </a:r>
+          </a:p>
+          <a:p>
+            <a:pPr lvl="2"/>
+            <a:r>
+              <a:rPr lang="en-US" smtClean="0"/>
+              <a:t>Third level</a:t>
+            </a:r>
+          </a:p>
+          <a:p>
+            <a:pPr lvl="3"/>
+            <a:r>
+              <a:rPr lang="en-US" smtClean="0"/>
+              <a:t>Fourth level</a:t>
+            </a:r>
+          </a:p>
+          <a:p>
+            <a:pPr lvl="4"/>
+            <a:r>
+              <a:rPr lang="en-US" smtClean="0"/>
+              <a:t>Fifth level</a:t>
+            </a:r>
+            <a:endParaRPr lang="en-US"/>
+          </a:p>
+        </p:txBody>
+      </p:sp>
+      <p:sp>
+        <p:nvSpPr>
+          <p:cNvPr id="6" name="Footer Placeholder 5"/>
+          <p:cNvSpPr>
+            <a:spLocks noGrp="1"/>
+          </p:cNvSpPr>
+          <p:nvPr>
+            <p:ph type="ftr" sz="quarter" idx="4"/>
+          </p:nvPr>
+        </p:nvSpPr>
+        <p:spPr>
+          <a:xfrm>
+            <a:off x="0" y="8685213"/>
+            <a:ext cx="2971800" cy="457200"/>
+          </a:xfrm>
+          <a:prstGeom prst="rect">
+            <a:avLst/>
+          </a:prstGeom>
+        </p:spPr>
+        <p:txBody>
+          <a:bodyPr vert="horz" lIns="91440" tIns="45720" rIns="91440" bIns="45720" rtlCol="0" anchor="b"/>
+          <a:lstStyle>
+            <a:lvl1pPr algn="l">
+              <a:defRPr sz="1200"/>
+            </a:lvl1pPr>
+          </a:lstStyle>
+          <a:p>
+            <a:endParaRPr lang="en-US"/>
+          </a:p>
+        </p:txBody>
+      </p:sp>
+      <p:sp>
+        <p:nvSpPr>
+          <p:cNvPr id="7" name="Slide Number Placeholder 6"/>
+          <p:cNvSpPr>
+            <a:spLocks noGrp="1"/>
+          </p:cNvSpPr>
+          <p:nvPr>
+            <p:ph type="sldNum" sz="quarter" idx="5"/>
+          </p:nvPr>
+        </p:nvSpPr>
+        <p:spPr>
+          <a:xfrm>
+            <a:off x="3884613" y="8685213"/>
+            <a:ext cx="2971800" cy="457200"/>
+          </a:xfrm>
+          <a:prstGeom prst="rect">
+            <a:avLst/>
+          </a:prstGeom>
+        </p:spPr>
+        <p:txBody>
+          <a:bodyPr vert="horz" lIns="91440" tIns="45720" rIns="91440" bIns="45720" rtlCol="0" anchor="b"/>
+          <a:lstStyle>
+            <a:lvl1pPr algn="r">
+              <a:defRPr sz="1200"/>
+            </a:lvl1pPr>
+          </a:lstStyle>
+          <a:p>
+            <a:fld id="{BB5E49A5-4136-284D-997B-48E1D791AD67}" type="slidenum">
+              <a:rPr lang="en-US" smtClean="0"/>
+              <a:t>‹#›</a:t>
+            </a:fld>
+            <a:endParaRPr lang="en-US"/>
+          </a:p>
+        </p:txBody>
+      </p:sp>
+    </p:spTree>
+    <p:extLst>
+      <p:ext uri="{BB962C8B-B14F-4D97-AF65-F5344CB8AC3E}">
+        <p14:creationId xmlns:p14="http://schemas.microsoft.com/office/powerpoint/2010/main" val="2623252185"/>
+      </p:ext>
+    </p:extLst>
+  </p:cSld>
+  <p:clrMap bg1="lt1" tx1="dk1" bg2="lt2" tx2="dk2" accent1="accent1" accent2="accent2" accent3="accent3" accent4="accent4" accent5="accent5" accent6="accent6" hlink="hlink" folHlink="folHlink"/>
+  <p:notesStyle>
+    <a:lvl1pPr marL="0" algn="l" defTabSz="457200" rtl="0" eaLnBrk="1" latinLnBrk="0" hangingPunct="1">
+      <a:defRPr sz="1200" kern="1200">
+        <a:solidFill>
+          <a:schemeClr val="tx1"/>
+        </a:solidFill>
+        <a:latin typeface="+mn-lt"/>
+        <a:ea typeface="+mn-ea"/>
+        <a:cs typeface="+mn-cs"/>
+      </a:defRPr>
+    </a:lvl1pPr>
+    <a:lvl2pPr marL="457200" algn="l" defTabSz="457200" rtl="0" eaLnBrk="1" latinLnBrk="0" hangingPunct="1">
+      <a:defRPr sz="1200" kern="1200">
+        <a:solidFill>
+          <a:schemeClr val="tx1"/>
+        </a:solidFill>
+        <a:latin typeface="+mn-lt"/>
+        <a:ea typeface="+mn-ea"/>
+        <a:cs typeface="+mn-cs"/>
+      </a:defRPr>
+    </a:lvl2pPr>
+    <a:lvl3pPr marL="914400" algn="l" defTabSz="457200" rtl="0" eaLnBrk="1" latinLnBrk="0" hangingPunct="1">
+      <a:defRPr sz="1200" kern="1200">
+        <a:solidFill>
+          <a:schemeClr val="tx1"/>
+        </a:solidFill>
+        <a:latin typeface="+mn-lt"/>
+        <a:ea typeface="+mn-ea"/>
+        <a:cs typeface="+mn-cs"/>
+      </a:defRPr>
+    </a:lvl3pPr>
+    <a:lvl4pPr marL="1371600" algn="l" defTabSz="457200" rtl="0" eaLnBrk="1" latinLnBrk="0" hangingPunct="1">
+      <a:defRPr sz="1200" kern="1200">
+        <a:solidFill>
+          <a:schemeClr val="tx1"/>
+        </a:solidFill>
+        <a:latin typeface="+mn-lt"/>
+        <a:ea typeface="+mn-ea"/>
+        <a:cs typeface="+mn-cs"/>
+      </a:defRPr>
+    </a:lvl4pPr>
+    <a:lvl5pPr marL="1828800" algn="l" defTabSz="457200" rtl="0" eaLnBrk="1" latinLnBrk="0" hangingPunct="1">
+      <a:defRPr sz="1200" kern="1200">
+        <a:solidFill>
+          <a:schemeClr val="tx1"/>
+        </a:solidFill>
+        <a:latin typeface="+mn-lt"/>
+        <a:ea typeface="+mn-ea"/>
+        <a:cs typeface="+mn-cs"/>
+      </a:defRPr>
+    </a:lvl5pPr>
+    <a:lvl6pPr marL="2286000" algn="l" defTabSz="457200" rtl="0" eaLnBrk="1" latinLnBrk="0" hangingPunct="1">
+      <a:defRPr sz="1200" kern="1200">
+        <a:solidFill>
+          <a:schemeClr val="tx1"/>
+        </a:solidFill>
+        <a:latin typeface="+mn-lt"/>
+        <a:ea typeface="+mn-ea"/>
+        <a:cs typeface="+mn-cs"/>
+      </a:defRPr>
+    </a:lvl6pPr>
+    <a:lvl7pPr marL="2743200" algn="l" defTabSz="457200" rtl="0" eaLnBrk="1" latinLnBrk="0" hangingPunct="1">
+      <a:defRPr sz="1200" kern="1200">
+        <a:solidFill>
+          <a:schemeClr val="tx1"/>
+        </a:solidFill>
+        <a:latin typeface="+mn-lt"/>
+        <a:ea typeface="+mn-ea"/>
+        <a:cs typeface="+mn-cs"/>
+      </a:defRPr>
+    </a:lvl7pPr>
+    <a:lvl8pPr marL="3200400" algn="l" defTabSz="457200" rtl="0" eaLnBrk="1" latinLnBrk="0" hangingPunct="1">
+      <a:defRPr sz="1200" kern="1200">
+        <a:solidFill>
+          <a:schemeClr val="tx1"/>
+        </a:solidFill>
+        <a:latin typeface="+mn-lt"/>
+        <a:ea typeface="+mn-ea"/>
+        <a:cs typeface="+mn-cs"/>
+      </a:defRPr>
+    </a:lvl8pPr>
+    <a:lvl9pPr marL="3657600" algn="l" defTabSz="457200" rtl="0" eaLnBrk="1" latinLnBrk="0" hangingPunct="1">
+      <a:defRPr sz="1200" kern="1200">
+        <a:solidFill>
+          <a:schemeClr val="tx1"/>
+        </a:solidFill>
+        <a:latin typeface="+mn-lt"/>
+        <a:ea typeface="+mn-ea"/>
+        <a:cs typeface="+mn-cs"/>
+      </a:defRPr>
+    </a:lvl9pPr>
+  </p:notesStyle>
+</p:notesMaster>
+</file>
+
+<file path=ppt/notesSlides/notesSlide1.xml><?xml version="1.0" encoding="utf-8"?>
+<p:notes xmlns:a="http://schemas.openxmlformats.org/drawingml/2006/main" xmlns:p="http://schemas.openxmlformats.org/presentationml/2006/main" xmlns:r="http://schemas.openxmlformats.org/officeDocument/2006/relationships">
+  <p:cSld>
+    <p:spTree>
+      <p:nvGrpSpPr>
+        <p:cNvPr id="1" name=""/>
+        <p:cNvGrpSpPr/>
+        <p:nvPr/>
+      </p:nvGrpSpPr>
+      <p:grpSpPr>
+        <a:xfrm>
+          <a:off x="0" y="0"/>
+          <a:ext cx="0" cy="0"/>
+          <a:chOff x="0" y="0"/>
+          <a:chExt cx="0" cy="0"/>
+        </a:xfrm>
+      </p:grpSpPr>
+      <p:sp>
+        <p:nvSpPr>
+          <p:cNvPr id="2" name="Slide Image Placeholder 1"/>
+          <p:cNvSpPr>
+            <a:spLocks noGrp="1"/>
+          </p:cNvSpPr>
+          <p:nvPr>
+            <p:ph type="sldImg" idx="2"/>
+          </p:nvPr>
+        </p:nvSpPr>
+        <p:spPr/>
+      </p:sp>
+      <p:sp>
+        <p:nvSpPr>
+          <p:cNvPr id="3" name="Notes Placeholder 2"/>
+          <p:cNvSpPr>
+            <a:spLocks noGrp="1"/>
+          </p:cNvSpPr>
+          <p:nvPr>
+            <p:ph type="body" idx="3" sz="quarter"/>
+          </p:nvPr>
+        </p:nvSpPr>
+        <p:spPr/>
+        <p:txBody>
+          <a:bodyPr/>
+          <a:lstStyle/>
+          <a:p>
+            <a:r>
+              <a:t>[0:00 · 30s] Opening.</a:t>
+            </a:r>
+          </a:p>
+          <a:p/>
+          <a:p>
+            <a:r>
+              <a:t>Team 11. Our client is a software vendor selling risk-assessment tools to US</a:t>
+            </a:r>
+          </a:p>
+          <a:p>
+            <a:r>
+              <a:t>community-supervision agencies. The question they brought us: which three-year</a:t>
+            </a:r>
+          </a:p>
+          <a:p>
+            <a:r>
+              <a:t>re-arrest model should they ship?</a:t>
+            </a:r>
+          </a:p>
+          <a:p/>
+          <a:p>
+            <a:r>
+              <a:t>Say the frame once, here: we judged four dimensions — performance,</a:t>
+            </a:r>
+          </a:p>
+          <a:p>
+            <a:r>
+              <a:t>interpretability, stability, fairness — not accuracy. The 0.60 to 0.73 on the</a:t>
+            </a:r>
+          </a:p>
+          <a:p>
+            <a:r>
+              <a:t>right is our models against the score agencies already have on file.</a:t>
+            </a:r>
+          </a:p>
+        </p:txBody>
+      </p:sp>
+      <p:sp>
+        <p:nvSpPr>
+          <p:cNvPr id="4" name="Slide Number Placeholder 3"/>
+          <p:cNvSpPr>
+            <a:spLocks noGrp="1"/>
+          </p:cNvSpPr>
+          <p:nvPr>
+            <p:ph type="sldNum" idx="5" sz="quarter"/>
+          </p:nvPr>
+        </p:nvSpPr>
+        <p:spPr/>
+      </p:sp>
+    </p:spTree>
+  </p:cSld>
+  <p:clrMapOvr>
+    <a:masterClrMapping/>
+  </p:clrMapOvr>
+</p:notes>
+</file>
+
+<file path=ppt/notesSlides/notesSlide10.xml><?xml version="1.0" encoding="utf-8"?>
+<p:notes xmlns:a="http://schemas.openxmlformats.org/drawingml/2006/main" xmlns:p="http://schemas.openxmlformats.org/presentationml/2006/main" xmlns:r="http://schemas.openxmlformats.org/officeDocument/2006/relationships">
+  <p:cSld>
+    <p:spTree>
+      <p:nvGrpSpPr>
+        <p:cNvPr id="1" name=""/>
+        <p:cNvGrpSpPr/>
+        <p:nvPr/>
+      </p:nvGrpSpPr>
+      <p:grpSpPr>
+        <a:xfrm>
+          <a:off x="0" y="0"/>
+          <a:ext cx="0" cy="0"/>
+          <a:chOff x="0" y="0"/>
+          <a:chExt cx="0" cy="0"/>
+        </a:xfrm>
+      </p:grpSpPr>
+      <p:sp>
+        <p:nvSpPr>
+          <p:cNvPr id="2" name="Slide Image Placeholder 1"/>
+          <p:cNvSpPr>
+            <a:spLocks noGrp="1"/>
+          </p:cNvSpPr>
+          <p:nvPr>
+            <p:ph type="sldImg" idx="2"/>
+          </p:nvPr>
+        </p:nvSpPr>
+        <p:spPr/>
+      </p:sp>
+      <p:sp>
+        <p:nvSpPr>
+          <p:cNvPr id="3" name="Notes Placeholder 2"/>
+          <p:cNvSpPr>
+            <a:spLocks noGrp="1"/>
+          </p:cNvSpPr>
+          <p:nvPr>
+            <p:ph type="body" idx="3" sz="quarter"/>
+          </p:nvPr>
+        </p:nvSpPr>
+        <p:spPr/>
+        <p:txBody>
+          <a:bodyPr/>
+          <a:lstStyle/>
+          <a:p>
+            <a:r>
+              <a:t>[10:15 · 1m00s] Did the fix generalise, or did we just fit it?</a:t>
+            </a:r>
+          </a:p>
+          <a:p/>
+          <a:p>
+            <a:r>
+              <a:t>This is the slide that separates us from a project that stops at the p-value.</a:t>
+            </a:r>
+          </a:p>
+          <a:p/>
+          <a:p>
+            <a:r>
+              <a:t>The result on the previous slide chose the variable AND measured the improvement on</a:t>
+            </a:r>
+          </a:p>
+          <a:p>
+            <a:r>
+              <a:t>the same cohort. That is in-sample. It shows a mitigation can be FITTED, not that</a:t>
+            </a:r>
+          </a:p>
+          <a:p>
+            <a:r>
+              <a:t>it works.</a:t>
+            </a:r>
+          </a:p>
+          <a:p/>
+          <a:p>
+            <a:r>
+              <a:t>So we separated them. Five outer folds, entirely inside the training partition. In</a:t>
+            </a:r>
+          </a:p>
+          <a:p>
+            <a:r>
+              <a:t>each fold we rerun the candidate search on that fold's training part, pick from</a:t>
+            </a:r>
+          </a:p>
+          <a:p>
+            <a:r>
+              <a:t>there alone, refit there, and measure on the held-out fold. The evaluation cohort</a:t>
+            </a:r>
+          </a:p>
+          <a:p>
+            <a:r>
+              <a:t>is never touched.</a:t>
+            </a:r>
+          </a:p>
+          <a:p/>
+          <a:p>
+            <a:r>
+              <a:t>Gang affiliation is selected in all five folds, for both models. About 70% of the</a:t>
+            </a:r>
+          </a:p>
+          <a:p>
+            <a:r>
+              <a:t>gap closes out of fold, for roughly one AUC point. The equal-opportunity p-value</a:t>
+            </a:r>
+          </a:p>
+          <a:p>
+            <a:r>
+              <a:t>reaches 0.27, not the in-sample 0.99 — and two of five folds still reject.</a:t>
+            </a:r>
+          </a:p>
+          <a:p/>
+          <a:p>
+            <a:r>
+              <a:t>We report the out-of-fold numbers. The in-sample figure is an upper bound.</a:t>
+            </a:r>
+          </a:p>
+        </p:txBody>
+      </p:sp>
+      <p:sp>
+        <p:nvSpPr>
+          <p:cNvPr id="4" name="Slide Number Placeholder 3"/>
+          <p:cNvSpPr>
+            <a:spLocks noGrp="1"/>
+          </p:cNvSpPr>
+          <p:nvPr>
+            <p:ph type="sldNum" idx="5" sz="quarter"/>
+          </p:nvPr>
+        </p:nvSpPr>
+        <p:spPr/>
+      </p:sp>
+    </p:spTree>
+  </p:cSld>
+  <p:clrMapOvr>
+    <a:masterClrMapping/>
+  </p:clrMapOvr>
+</p:notes>
+</file>
+
+<file path=ppt/notesSlides/notesSlide11.xml><?xml version="1.0" encoding="utf-8"?>
+<p:notes xmlns:a="http://schemas.openxmlformats.org/drawingml/2006/main" xmlns:p="http://schemas.openxmlformats.org/presentationml/2006/main" xmlns:r="http://schemas.openxmlformats.org/officeDocument/2006/relationships">
+  <p:cSld>
+    <p:spTree>
+      <p:nvGrpSpPr>
+        <p:cNvPr id="1" name=""/>
+        <p:cNvGrpSpPr/>
+        <p:nvPr/>
+      </p:nvGrpSpPr>
+      <p:grpSpPr>
+        <a:xfrm>
+          <a:off x="0" y="0"/>
+          <a:ext cx="0" cy="0"/>
+          <a:chOff x="0" y="0"/>
+          <a:chExt cx="0" cy="0"/>
+        </a:xfrm>
+      </p:grpSpPr>
+      <p:sp>
+        <p:nvSpPr>
+          <p:cNvPr id="2" name="Slide Image Placeholder 1"/>
+          <p:cNvSpPr>
+            <a:spLocks noGrp="1"/>
+          </p:cNvSpPr>
+          <p:nvPr>
+            <p:ph type="sldImg" idx="2"/>
+          </p:nvPr>
+        </p:nvSpPr>
+        <p:spPr/>
+      </p:sp>
+      <p:sp>
+        <p:nvSpPr>
+          <p:cNvPr id="3" name="Notes Placeholder 2"/>
+          <p:cNvSpPr>
+            <a:spLocks noGrp="1"/>
+          </p:cNvSpPr>
+          <p:nvPr>
+            <p:ph type="body" idx="3" sz="quarter"/>
+          </p:nvPr>
+        </p:nvSpPr>
+        <p:spPr/>
+        <p:txBody>
+          <a:bodyPr/>
+          <a:lstStyle/>
+          <a:p>
+            <a:r>
+              <a:t>[11:15 · 1m00s] The four dimensions together.</a:t>
+            </a:r>
+          </a:p>
+          <a:p/>
+          <a:p>
+            <a:r>
+              <a:t>Read across the rows, not down the columns.</a:t>
+            </a:r>
+          </a:p>
+          <a:p/>
+          <a:p>
+            <a:r>
+              <a:t>Performance: separated by 0.003 AUC, and the only real calibration difference goes</a:t>
+            </a:r>
+          </a:p>
+          <a:p>
+            <a:r>
+              <a:t>AGAINST the model with the highest AUC.</a:t>
+            </a:r>
+          </a:p>
+          <a:p/>
+          <a:p>
+            <a:r>
+              <a:t>Interpretability: unambiguous, and the gaps are large.</a:t>
+            </a:r>
+          </a:p>
+          <a:p/>
+          <a:p>
+            <a:r>
+              <a:t>Stability: logistic drifts least on all 28 resample pairs.</a:t>
+            </a:r>
+          </a:p>
+          <a:p/>
+          <a:p>
+            <a:r>
+              <a:t>Fairness: the differences BETWEEN models are smaller than they look. The gender and</a:t>
+            </a:r>
+          </a:p>
+          <a:p>
+            <a:r>
+              <a:t>age gaps are shared by all three.</a:t>
+            </a:r>
+          </a:p>
+          <a:p/>
+          <a:p>
+            <a:r>
+              <a:t>That is the shape of the decision: accuracy does not discriminate here.</a:t>
+            </a:r>
+          </a:p>
+        </p:txBody>
+      </p:sp>
+      <p:sp>
+        <p:nvSpPr>
+          <p:cNvPr id="4" name="Slide Number Placeholder 3"/>
+          <p:cNvSpPr>
+            <a:spLocks noGrp="1"/>
+          </p:cNvSpPr>
+          <p:nvPr>
+            <p:ph type="sldNum" idx="5" sz="quarter"/>
+          </p:nvPr>
+        </p:nvSpPr>
+        <p:spPr/>
+      </p:sp>
+    </p:spTree>
+  </p:cSld>
+  <p:clrMapOvr>
+    <a:masterClrMapping/>
+  </p:clrMapOvr>
+</p:notes>
+</file>
+
+<file path=ppt/notesSlides/notesSlide12.xml><?xml version="1.0" encoding="utf-8"?>
+<p:notes xmlns:a="http://schemas.openxmlformats.org/drawingml/2006/main" xmlns:p="http://schemas.openxmlformats.org/presentationml/2006/main" xmlns:r="http://schemas.openxmlformats.org/officeDocument/2006/relationships">
+  <p:cSld>
+    <p:spTree>
+      <p:nvGrpSpPr>
+        <p:cNvPr id="1" name=""/>
+        <p:cNvGrpSpPr/>
+        <p:nvPr/>
+      </p:nvGrpSpPr>
+      <p:grpSpPr>
+        <a:xfrm>
+          <a:off x="0" y="0"/>
+          <a:ext cx="0" cy="0"/>
+          <a:chOff x="0" y="0"/>
+          <a:chExt cx="0" cy="0"/>
+        </a:xfrm>
+      </p:grpSpPr>
+      <p:sp>
+        <p:nvSpPr>
+          <p:cNvPr id="2" name="Slide Image Placeholder 1"/>
+          <p:cNvSpPr>
+            <a:spLocks noGrp="1"/>
+          </p:cNvSpPr>
+          <p:nvPr>
+            <p:ph type="sldImg" idx="2"/>
+          </p:nvPr>
+        </p:nvSpPr>
+        <p:spPr/>
+      </p:sp>
+      <p:sp>
+        <p:nvSpPr>
+          <p:cNvPr id="3" name="Notes Placeholder 2"/>
+          <p:cNvSpPr>
+            <a:spLocks noGrp="1"/>
+          </p:cNvSpPr>
+          <p:nvPr>
+            <p:ph type="body" idx="3" sz="quarter"/>
+          </p:nvPr>
+        </p:nvSpPr>
+        <p:spPr/>
+        <p:txBody>
+          <a:bodyPr/>
+          <a:lstStyle/>
+          <a:p>
+            <a:r>
+              <a:t>[12:15 · 1m00s] FINDING THREE. The recommendation, with its counter-case.</a:t>
+            </a:r>
+          </a:p>
+          <a:p/>
+          <a:p>
+            <a:r>
+              <a:t>Logistic regression for the shadow pilot. XGBoost as challenger, running in</a:t>
+            </a:r>
+          </a:p>
+          <a:p>
+            <a:r>
+              <a:t>parallel on the same cohort.</a:t>
+            </a:r>
+          </a:p>
+          <a:p/>
+          <a:p>
+            <a:r>
+              <a:t>Be explicit about what we give up: XGBoost is ahead on AUC and Brier. Those are</a:t>
+            </a:r>
+          </a:p>
+          <a:p>
+            <a:r>
+              <a:t>real, significant differences.</a:t>
+            </a:r>
+          </a:p>
+          <a:p/>
+          <a:p>
+            <a:r>
+              <a:t>They do not reach the decision. At the deployed rule the two models offer support</a:t>
+            </a:r>
+          </a:p>
+          <a:p>
+            <a:r>
+              <a:t>to 85% of the SAME people — 254 of 7,807 differ — and the difference in captured</a:t>
+            </a:r>
+          </a:p>
+          <a:p>
+            <a:r>
+              <a:t>re-arrests has an interval spanning zero.</a:t>
+            </a:r>
+          </a:p>
+          <a:p/>
+          <a:p>
+            <a:r>
+              <a:t>State what we do NOT claim, because a juror will test it: logistic is not fairer</a:t>
+            </a:r>
+          </a:p>
+          <a:p>
+            <a:r>
+              <a:t>and not better calibrated. On both, the two are statistically tied. We chose it</a:t>
+            </a:r>
+          </a:p>
+          <a:p>
+            <a:r>
+              <a:t>for refit stability and for coefficients you can read without a second tool.</a:t>
+            </a:r>
+          </a:p>
+          <a:p/>
+          <a:p>
+            <a:r>
+              <a:t>And what would reverse it: if the client quotes probabilities numerically to</a:t>
+            </a:r>
+          </a:p>
+          <a:p>
+            <a:r>
+              <a:t>supervisees, calibration starts to dominate. If their capacity is large enough that</a:t>
+            </a:r>
+          </a:p>
+          <a:p>
+            <a:r>
+              <a:t>twelve extra offers matters. That is why the challenger runs in parallel.</a:t>
+            </a:r>
+          </a:p>
+        </p:txBody>
+      </p:sp>
+      <p:sp>
+        <p:nvSpPr>
+          <p:cNvPr id="4" name="Slide Number Placeholder 3"/>
+          <p:cNvSpPr>
+            <a:spLocks noGrp="1"/>
+          </p:cNvSpPr>
+          <p:nvPr>
+            <p:ph type="sldNum" idx="5" sz="quarter"/>
+          </p:nvPr>
+        </p:nvSpPr>
+        <p:spPr/>
+      </p:sp>
+    </p:spTree>
+  </p:cSld>
+  <p:clrMapOvr>
+    <a:masterClrMapping/>
+  </p:clrMapOvr>
+</p:notes>
+</file>
+
+<file path=ppt/notesSlides/notesSlide13.xml><?xml version="1.0" encoding="utf-8"?>
+<p:notes xmlns:a="http://schemas.openxmlformats.org/drawingml/2006/main" xmlns:p="http://schemas.openxmlformats.org/presentationml/2006/main" xmlns:r="http://schemas.openxmlformats.org/officeDocument/2006/relationships">
+  <p:cSld>
+    <p:spTree>
+      <p:nvGrpSpPr>
+        <p:cNvPr id="1" name=""/>
+        <p:cNvGrpSpPr/>
+        <p:nvPr/>
+      </p:nvGrpSpPr>
+      <p:grpSpPr>
+        <a:xfrm>
+          <a:off x="0" y="0"/>
+          <a:ext cx="0" cy="0"/>
+          <a:chOff x="0" y="0"/>
+          <a:chExt cx="0" cy="0"/>
+        </a:xfrm>
+      </p:grpSpPr>
+      <p:sp>
+        <p:nvSpPr>
+          <p:cNvPr id="2" name="Slide Image Placeholder 1"/>
+          <p:cNvSpPr>
+            <a:spLocks noGrp="1"/>
+          </p:cNvSpPr>
+          <p:nvPr>
+            <p:ph type="sldImg" idx="2"/>
+          </p:nvPr>
+        </p:nvSpPr>
+        <p:spPr/>
+      </p:sp>
+      <p:sp>
+        <p:nvSpPr>
+          <p:cNvPr id="3" name="Notes Placeholder 2"/>
+          <p:cNvSpPr>
+            <a:spLocks noGrp="1"/>
+          </p:cNvSpPr>
+          <p:nvPr>
+            <p:ph type="body" idx="3" sz="quarter"/>
+          </p:nvPr>
+        </p:nvSpPr>
+        <p:spPr/>
+        <p:txBody>
+          <a:bodyPr/>
+          <a:lstStyle/>
+          <a:p>
+            <a:r>
+              <a:t>[13:15 · 45s] The app, and close.</a:t>
+            </a:r>
+          </a:p>
+          <a:p/>
+          <a:p>
+            <a:r>
+              <a:t>The application makes every trade-off testable: score one person with all three</a:t>
+            </a:r>
+          </a:p>
+          <a:p>
+            <a:r>
+              <a:t>models, see the explanation, audit by race, gender and age at the deployed point,</a:t>
+            </a:r>
+          </a:p>
+          <a:p>
+            <a:r>
+              <a:t>and edit the cost assumptions.</a:t>
+            </a:r>
+          </a:p>
+          <a:p/>
+          <a:p>
+            <a:r>
+              <a:t>One thing to demo if there is time: pick a person and show the refit vote count.</a:t>
+            </a:r>
+          </a:p>
+          <a:p>
+            <a:r>
+              <a:t>About one decision in seven flips across refits, and a third of the people we</a:t>
+            </a:r>
+          </a:p>
+          <a:p>
+            <a:r>
+              <a:t>prioritise sit at that margin. The app shows that rather than hiding it behind a</a:t>
+            </a:r>
+          </a:p>
+          <a:p>
+            <a:r>
+              <a:t>point estimate.</a:t>
+            </a:r>
+          </a:p>
+          <a:p/>
+          <a:p>
+            <a:r>
+              <a:t>Close on the frame: we are not trading accuracy for interpretability. The accuracy</a:t>
+            </a:r>
+          </a:p>
+          <a:p>
+            <a:r>
+              <a:t>difference does not change who gets help.</a:t>
+            </a:r>
+          </a:p>
+          <a:p/>
+          <a:p>
+            <a:r>
+              <a:t>[APPENDIX CUES — jump to these on the matching question]</a:t>
+            </a:r>
+          </a:p>
+          <a:p>
+            <a:r>
+              <a:t>A1 learning curve · A2 economics and sensitivity · A3 interpretability methods</a:t>
+            </a:r>
+          </a:p>
+          <a:p>
+            <a:r>
+              <a:t>A4 why SHAP, permutation importance and XPER disagree · A5 LIME fidelity</a:t>
+            </a:r>
+          </a:p>
+          <a:p>
+            <a:r>
+              <a:t>A6 stability detail · A7 what we tried and rejected · A8 proxy recovery</a:t>
+            </a:r>
+          </a:p>
+          <a:p>
+            <a:r>
+              <a:t>A9 per-person stability and the abstention finding</a:t>
+            </a:r>
+          </a:p>
+        </p:txBody>
+      </p:sp>
+      <p:sp>
+        <p:nvSpPr>
+          <p:cNvPr id="4" name="Slide Number Placeholder 3"/>
+          <p:cNvSpPr>
+            <a:spLocks noGrp="1"/>
+          </p:cNvSpPr>
+          <p:nvPr>
+            <p:ph type="sldNum" idx="5" sz="quarter"/>
+          </p:nvPr>
+        </p:nvSpPr>
+        <p:spPr/>
+      </p:sp>
+    </p:spTree>
+  </p:cSld>
+  <p:clrMapOvr>
+    <a:masterClrMapping/>
+  </p:clrMapOvr>
+</p:notes>
+</file>
+
+<file path=ppt/notesSlides/notesSlide2.xml><?xml version="1.0" encoding="utf-8"?>
+<p:notes xmlns:a="http://schemas.openxmlformats.org/drawingml/2006/main" xmlns:p="http://schemas.openxmlformats.org/presentationml/2006/main" xmlns:r="http://schemas.openxmlformats.org/officeDocument/2006/relationships">
+  <p:cSld>
+    <p:spTree>
+      <p:nvGrpSpPr>
+        <p:cNvPr id="1" name=""/>
+        <p:cNvGrpSpPr/>
+        <p:nvPr/>
+      </p:nvGrpSpPr>
+      <p:grpSpPr>
+        <a:xfrm>
+          <a:off x="0" y="0"/>
+          <a:ext cx="0" cy="0"/>
+          <a:chOff x="0" y="0"/>
+          <a:chExt cx="0" cy="0"/>
+        </a:xfrm>
+      </p:grpSpPr>
+      <p:sp>
+        <p:nvSpPr>
+          <p:cNvPr id="2" name="Slide Image Placeholder 1"/>
+          <p:cNvSpPr>
+            <a:spLocks noGrp="1"/>
+          </p:cNvSpPr>
+          <p:nvPr>
+            <p:ph type="sldImg" idx="2"/>
+          </p:nvPr>
+        </p:nvSpPr>
+        <p:spPr/>
+      </p:sp>
+      <p:sp>
+        <p:nvSpPr>
+          <p:cNvPr id="3" name="Notes Placeholder 2"/>
+          <p:cNvSpPr>
+            <a:spLocks noGrp="1"/>
+          </p:cNvSpPr>
+          <p:nvPr>
+            <p:ph type="body" idx="3" sz="quarter"/>
+          </p:nvPr>
+        </p:nvSpPr>
+        <p:spPr/>
+        <p:txBody>
+          <a:bodyPr/>
+          <a:lstStyle/>
+          <a:p>
+            <a:r>
+              <a:t>[0:30 · 45s] The decision being sold.</a:t>
+            </a:r>
+          </a:p>
+          <a:p/>
+          <a:p>
+            <a:r>
+              <a:t>The score prioritises VOLUNTARY re-entry support at the start of parole:</a:t>
+            </a:r>
+          </a:p>
+          <a:p>
+            <a:r>
+              <a:t>employment, housing, treatment. Never sanctions, never detention, never</a:t>
+            </a:r>
+          </a:p>
+          <a:p>
+            <a:r>
+              <a:t>surveillance.</a:t>
+            </a:r>
+          </a:p>
+          <a:p/>
+          <a:p>
+            <a:r>
+              <a:t>Land the ethical scoping here, because everything later depends on it. Our model</a:t>
+            </a:r>
+          </a:p>
+          <a:p>
+            <a:r>
+              <a:t>is wrong often — at the top 20%, about one in six people offered support are not</a:t>
+            </a:r>
+          </a:p>
+          <a:p>
+            <a:r>
+              <a:t>re-arrested. For OFFERING HELP that is an acceptable cost. For punishment it</a:t>
+            </a:r>
+          </a:p>
+          <a:p>
+            <a:r>
+              <a:t>would not be. If a juror later challenges the error rate, this is the answer.</a:t>
+            </a:r>
+          </a:p>
+        </p:txBody>
+      </p:sp>
+      <p:sp>
+        <p:nvSpPr>
+          <p:cNvPr id="4" name="Slide Number Placeholder 3"/>
+          <p:cNvSpPr>
+            <a:spLocks noGrp="1"/>
+          </p:cNvSpPr>
+          <p:nvPr>
+            <p:ph type="sldNum" idx="5" sz="quarter"/>
+          </p:nvPr>
+        </p:nvSpPr>
+        <p:spPr/>
+      </p:sp>
+    </p:spTree>
+  </p:cSld>
+  <p:clrMapOvr>
+    <a:masterClrMapping/>
+  </p:clrMapOvr>
+</p:notes>
+</file>
+
+<file path=ppt/notesSlides/notesSlide3.xml><?xml version="1.0" encoding="utf-8"?>
+<p:notes xmlns:a="http://schemas.openxmlformats.org/drawingml/2006/main" xmlns:p="http://schemas.openxmlformats.org/presentationml/2006/main" xmlns:r="http://schemas.openxmlformats.org/officeDocument/2006/relationships">
+  <p:cSld>
+    <p:spTree>
+      <p:nvGrpSpPr>
+        <p:cNvPr id="1" name=""/>
+        <p:cNvGrpSpPr/>
+        <p:nvPr/>
+      </p:nvGrpSpPr>
+      <p:grpSpPr>
+        <a:xfrm>
+          <a:off x="0" y="0"/>
+          <a:ext cx="0" cy="0"/>
+          <a:chOff x="0" y="0"/>
+          <a:chExt cx="0" cy="0"/>
+        </a:xfrm>
+      </p:grpSpPr>
+      <p:sp>
+        <p:nvSpPr>
+          <p:cNvPr id="2" name="Slide Image Placeholder 1"/>
+          <p:cNvSpPr>
+            <a:spLocks noGrp="1"/>
+          </p:cNvSpPr>
+          <p:nvPr>
+            <p:ph type="sldImg" idx="2"/>
+          </p:nvPr>
+        </p:nvSpPr>
+        <p:spPr/>
+      </p:sp>
+      <p:sp>
+        <p:nvSpPr>
+          <p:cNvPr id="3" name="Notes Placeholder 2"/>
+          <p:cNvSpPr>
+            <a:spLocks noGrp="1"/>
+          </p:cNvSpPr>
+          <p:nvPr>
+            <p:ph type="body" idx="3" sz="quarter"/>
+          </p:nvPr>
+        </p:nvSpPr>
+        <p:spPr/>
+        <p:txBody>
+          <a:bodyPr/>
+          <a:lstStyle/>
+          <a:p>
+            <a:r>
+              <a:t>[1:15 · 1m30s] Data design, and the leak.</a:t>
+            </a:r>
+          </a:p>
+          <a:p/>
+          <a:p>
+            <a:r>
+              <a:t>NIJ's own split — we did not make a new one. 18,028 train, 7,807 evaluation,</a:t>
+            </a:r>
+          </a:p>
+          <a:p>
+            <a:r>
+              <a:t>29 fields available at supervision start.</a:t>
+            </a:r>
+          </a:p>
+          <a:p/>
+          <a:p>
+            <a:r>
+              <a:t>Two things to say plainly rather than bury:</a:t>
+            </a:r>
+          </a:p>
+          <a:p/>
+          <a:p>
+            <a:r>
+              <a:t>First, the evaluation set is NOT an untouched holdout. It is excluded from</a:t>
+            </a:r>
+          </a:p>
+          <a:p>
+            <a:r>
+              <a:t>fitting, but our development decisions inspected it. Our comparisons are</a:t>
+            </a:r>
+          </a:p>
+          <a:p>
+            <a:r>
+              <a:t>exploratory. Say it before anyone asks.</a:t>
+            </a:r>
+          </a:p>
+          <a:p/>
+          <a:p>
+            <a:r>
+              <a:t>Second, the leak — this is our strongest slide. Gang affiliation is missing for</a:t>
+            </a:r>
+          </a:p>
+          <a:p>
+            <a:r>
+              <a:t>every woman and no man. The missingness pattern IS gender. TabICL encodes NaN as</a:t>
+            </a:r>
+          </a:p>
+          <a:p>
+            <a:r>
+              <a:t>a category, so it could read the attribute we thought we had excluded. We measured</a:t>
+            </a:r>
+          </a:p>
+          <a:p>
+            <a:r>
+              <a:t>the cost: with missingness indicators, gender is recoverable at AUC 1.00.</a:t>
+            </a:r>
+          </a:p>
+          <a:p>
+            <a:r>
+              <a:t>Perfectly. We fixed it with mode-filling and a regression test.</a:t>
+            </a:r>
+          </a:p>
+        </p:txBody>
+      </p:sp>
+      <p:sp>
+        <p:nvSpPr>
+          <p:cNvPr id="4" name="Slide Number Placeholder 3"/>
+          <p:cNvSpPr>
+            <a:spLocks noGrp="1"/>
+          </p:cNvSpPr>
+          <p:nvPr>
+            <p:ph type="sldNum" idx="5" sz="quarter"/>
+          </p:nvPr>
+        </p:nvSpPr>
+        <p:spPr/>
+      </p:sp>
+    </p:spTree>
+  </p:cSld>
+  <p:clrMapOvr>
+    <a:masterClrMapping/>
+  </p:clrMapOvr>
+</p:notes>
+</file>
+
+<file path=ppt/notesSlides/notesSlide4.xml><?xml version="1.0" encoding="utf-8"?>
+<p:notes xmlns:a="http://schemas.openxmlformats.org/drawingml/2006/main" xmlns:p="http://schemas.openxmlformats.org/presentationml/2006/main" xmlns:r="http://schemas.openxmlformats.org/officeDocument/2006/relationships">
+  <p:cSld>
+    <p:spTree>
+      <p:nvGrpSpPr>
+        <p:cNvPr id="1" name=""/>
+        <p:cNvGrpSpPr/>
+        <p:nvPr/>
+      </p:nvGrpSpPr>
+      <p:grpSpPr>
+        <a:xfrm>
+          <a:off x="0" y="0"/>
+          <a:ext cx="0" cy="0"/>
+          <a:chOff x="0" y="0"/>
+          <a:chExt cx="0" cy="0"/>
+        </a:xfrm>
+      </p:grpSpPr>
+      <p:sp>
+        <p:nvSpPr>
+          <p:cNvPr id="2" name="Slide Image Placeholder 1"/>
+          <p:cNvSpPr>
+            <a:spLocks noGrp="1"/>
+          </p:cNvSpPr>
+          <p:nvPr>
+            <p:ph type="sldImg" idx="2"/>
+          </p:nvPr>
+        </p:nvSpPr>
+        <p:spPr/>
+      </p:sp>
+      <p:sp>
+        <p:nvSpPr>
+          <p:cNvPr id="3" name="Notes Placeholder 2"/>
+          <p:cNvSpPr>
+            <a:spLocks noGrp="1"/>
+          </p:cNvSpPr>
+          <p:nvPr>
+            <p:ph type="body" idx="3" sz="quarter"/>
+          </p:nvPr>
+        </p:nvSpPr>
+        <p:spPr/>
+        <p:txBody>
+          <a:bodyPr/>
+          <a:lstStyle/>
+          <a:p>
+            <a:r>
+              <a:t>[2:45 · 1m00s] Three model families.</a:t>
+            </a:r>
+          </a:p>
+          <a:p/>
+          <a:p>
+            <a:r>
+              <a:t>White-box, machine learning, foundation model — as the brief requires. Same 29</a:t>
+            </a:r>
+          </a:p>
+          <a:p>
+            <a:r>
+              <a:t>fields, same held-out people, same metrics.</a:t>
+            </a:r>
+          </a:p>
+          <a:p/>
+          <a:p>
+            <a:r>
+              <a:t>Logistic is CV-tuned L1. XGBoost ordinal-encodes ordered counts, hyperparameters</a:t>
+            </a:r>
+          </a:p>
+          <a:p>
+            <a:r>
+              <a:t>from a 5-fold CV random search that is committed as code, not asserted. TabICL is</a:t>
+            </a:r>
+          </a:p>
+          <a:p>
+            <a:r>
+              <a:t>a 16-member GPU ensemble.</a:t>
+            </a:r>
+          </a:p>
+          <a:p/>
+          <a:p>
+            <a:r>
+              <a:t>Flag the one that matters for later: TabICL has NO native attribution path. That</a:t>
+            </a:r>
+          </a:p>
+          <a:p>
+            <a:r>
+              <a:t>is a deployment cost, and it comes back on the recommendation slide.</a:t>
+            </a:r>
+          </a:p>
+        </p:txBody>
+      </p:sp>
+      <p:sp>
+        <p:nvSpPr>
+          <p:cNvPr id="4" name="Slide Number Placeholder 3"/>
+          <p:cNvSpPr>
+            <a:spLocks noGrp="1"/>
+          </p:cNvSpPr>
+          <p:nvPr>
+            <p:ph type="sldNum" idx="5" sz="quarter"/>
+          </p:nvPr>
+        </p:nvSpPr>
+        <p:spPr/>
+      </p:sp>
+    </p:spTree>
+  </p:cSld>
+  <p:clrMapOvr>
+    <a:masterClrMapping/>
+  </p:clrMapOvr>
+</p:notes>
+</file>
+
+<file path=ppt/notesSlides/notesSlide5.xml><?xml version="1.0" encoding="utf-8"?>
+<p:notes xmlns:a="http://schemas.openxmlformats.org/drawingml/2006/main" xmlns:p="http://schemas.openxmlformats.org/presentationml/2006/main" xmlns:r="http://schemas.openxmlformats.org/officeDocument/2006/relationships">
+  <p:cSld>
+    <p:spTree>
+      <p:nvGrpSpPr>
+        <p:cNvPr id="1" name=""/>
+        <p:cNvGrpSpPr/>
+        <p:nvPr/>
+      </p:nvGrpSpPr>
+      <p:grpSpPr>
+        <a:xfrm>
+          <a:off x="0" y="0"/>
+          <a:ext cx="0" cy="0"/>
+          <a:chOff x="0" y="0"/>
+          <a:chExt cx="0" cy="0"/>
+        </a:xfrm>
+      </p:grpSpPr>
+      <p:sp>
+        <p:nvSpPr>
+          <p:cNvPr id="2" name="Slide Image Placeholder 1"/>
+          <p:cNvSpPr>
+            <a:spLocks noGrp="1"/>
+          </p:cNvSpPr>
+          <p:nvPr>
+            <p:ph type="sldImg" idx="2"/>
+          </p:nvPr>
+        </p:nvSpPr>
+        <p:spPr/>
+      </p:sp>
+      <p:sp>
+        <p:nvSpPr>
+          <p:cNvPr id="3" name="Notes Placeholder 2"/>
+          <p:cNvSpPr>
+            <a:spLocks noGrp="1"/>
+          </p:cNvSpPr>
+          <p:nvPr>
+            <p:ph type="body" idx="3" sz="quarter"/>
+          </p:nvPr>
+        </p:nvSpPr>
+        <p:spPr/>
+        <p:txBody>
+          <a:bodyPr/>
+          <a:lstStyle/>
+          <a:p>
+            <a:r>
+              <a:t>[3:45 · 1m00s] The client's real question.</a:t>
+            </a:r>
+          </a:p>
+          <a:p/>
+          <a:p>
+            <a:r>
+              <a:t>Not "which of your three models" — that is our question. Theirs is: is any of this</a:t>
+            </a:r>
+          </a:p>
+          <a:p>
+            <a:r>
+              <a:t>better than what we already run?</a:t>
+            </a:r>
+          </a:p>
+          <a:p/>
+          <a:p>
+            <a:r>
+              <a:t>This dataset contains Georgia's recorded supervision score, which we use as one</a:t>
+            </a:r>
+          </a:p>
+          <a:p>
+            <a:r>
+              <a:t>input. On its own it reaches 0.60 AUC. Our models reach 0.73. At 20% capacity that</a:t>
+            </a:r>
+          </a:p>
+          <a:p>
+            <a:r>
+              <a:t>roughly doubles the net value of the scenario.</a:t>
+            </a:r>
+          </a:p>
+          <a:p/>
+          <a:p>
+            <a:r>
+              <a:t>Give the caveat in the same breath: this is a HISTORICAL recorded score. It does</a:t>
+            </a:r>
+          </a:p>
+          <a:p>
+            <a:r>
+              <a:t>not tell us how today's commercial products perform. And the dollars are a</a:t>
+            </a:r>
+          </a:p>
+          <a:p>
+            <a:r>
+              <a:t>scenario — effectiveness is assumed, not measured.</a:t>
+            </a:r>
+          </a:p>
+        </p:txBody>
+      </p:sp>
+      <p:sp>
+        <p:nvSpPr>
+          <p:cNvPr id="4" name="Slide Number Placeholder 3"/>
+          <p:cNvSpPr>
+            <a:spLocks noGrp="1"/>
+          </p:cNvSpPr>
+          <p:nvPr>
+            <p:ph type="sldNum" idx="5" sz="quarter"/>
+          </p:nvPr>
+        </p:nvSpPr>
+        <p:spPr/>
+      </p:sp>
+    </p:spTree>
+  </p:cSld>
+  <p:clrMapOvr>
+    <a:masterClrMapping/>
+  </p:clrMapOvr>
+</p:notes>
+</file>
+
+<file path=ppt/notesSlides/notesSlide6.xml><?xml version="1.0" encoding="utf-8"?>
+<p:notes xmlns:a="http://schemas.openxmlformats.org/drawingml/2006/main" xmlns:p="http://schemas.openxmlformats.org/presentationml/2006/main" xmlns:r="http://schemas.openxmlformats.org/officeDocument/2006/relationships">
+  <p:cSld>
+    <p:spTree>
+      <p:nvGrpSpPr>
+        <p:cNvPr id="1" name=""/>
+        <p:cNvGrpSpPr/>
+        <p:nvPr/>
+      </p:nvGrpSpPr>
+      <p:grpSpPr>
+        <a:xfrm>
+          <a:off x="0" y="0"/>
+          <a:ext cx="0" cy="0"/>
+          <a:chOff x="0" y="0"/>
+          <a:chExt cx="0" cy="0"/>
+        </a:xfrm>
+      </p:grpSpPr>
+      <p:sp>
+        <p:nvSpPr>
+          <p:cNvPr id="2" name="Slide Image Placeholder 1"/>
+          <p:cNvSpPr>
+            <a:spLocks noGrp="1"/>
+          </p:cNvSpPr>
+          <p:nvPr>
+            <p:ph type="sldImg" idx="2"/>
+          </p:nvPr>
+        </p:nvSpPr>
+        <p:spPr/>
+      </p:sp>
+      <p:sp>
+        <p:nvSpPr>
+          <p:cNvPr id="3" name="Notes Placeholder 2"/>
+          <p:cNvSpPr>
+            <a:spLocks noGrp="1"/>
+          </p:cNvSpPr>
+          <p:nvPr>
+            <p:ph type="body" idx="3" sz="quarter"/>
+          </p:nvPr>
+        </p:nvSpPr>
+        <p:spPr/>
+        <p:txBody>
+          <a:bodyPr/>
+          <a:lstStyle/>
+          <a:p>
+            <a:r>
+              <a:t>[4:45 · 1m30s] FINDING ONE. Performance cannot pick the model.</a:t>
+            </a:r>
+          </a:p>
+          <a:p/>
+          <a:p>
+            <a:r>
+              <a:t>All three are within 0.003 AUC. XGBoost beats logistic by +0.0025 with a paired</a:t>
+            </a:r>
+          </a:p>
+          <a:p>
+            <a:r>
+              <a:t>interval excluding zero — real, but tiny.</a:t>
+            </a:r>
+          </a:p>
+          <a:p/>
+          <a:p>
+            <a:r>
+              <a:t>Two methodological points worth making, because they show the work:</a:t>
+            </a:r>
+          </a:p>
+          <a:p/>
+          <a:p>
+            <a:r>
+              <a:t>We use PAIRED bootstrap differences. Comparing two separate intervals for overlap</a:t>
+            </a:r>
+          </a:p>
+          <a:p>
+            <a:r>
+              <a:t>is weaker and commonly misread.</a:t>
+            </a:r>
+          </a:p>
+          <a:p/>
+          <a:p>
+            <a:r>
+              <a:t>ECE differences are not significant, and the ECE ranking is not even stable across</a:t>
+            </a:r>
+          </a:p>
+          <a:p>
+            <a:r>
+              <a:t>binning choices. We tested calibration bin-free instead: logistic and XGBoost are</a:t>
+            </a:r>
+          </a:p>
+          <a:p>
+            <a:r>
+              <a:t>both indistinguishable from perfect calibration. TabICL is the exception — slope</a:t>
+            </a:r>
+          </a:p>
+          <a:p>
+            <a:r>
+              <a:t>0.913, significantly below 1. Its probabilities are too extreme.</a:t>
+            </a:r>
+          </a:p>
+          <a:p/>
+          <a:p>
+            <a:r>
+              <a:t>So: performance does not discriminate. Interpretability, stability and fairness do.</a:t>
+            </a:r>
+          </a:p>
+        </p:txBody>
+      </p:sp>
+      <p:sp>
+        <p:nvSpPr>
+          <p:cNvPr id="4" name="Slide Number Placeholder 3"/>
+          <p:cNvSpPr>
+            <a:spLocks noGrp="1"/>
+          </p:cNvSpPr>
+          <p:nvPr>
+            <p:ph type="sldNum" idx="5" sz="quarter"/>
+          </p:nvPr>
+        </p:nvSpPr>
+        <p:spPr/>
+      </p:sp>
+    </p:spTree>
+  </p:cSld>
+  <p:clrMapOvr>
+    <a:masterClrMapping/>
+  </p:clrMapOvr>
+</p:notes>
+</file>
+
+<file path=ppt/notesSlides/notesSlide7.xml><?xml version="1.0" encoding="utf-8"?>
+<p:notes xmlns:a="http://schemas.openxmlformats.org/drawingml/2006/main" xmlns:p="http://schemas.openxmlformats.org/presentationml/2006/main" xmlns:r="http://schemas.openxmlformats.org/officeDocument/2006/relationships">
+  <p:cSld>
+    <p:spTree>
+      <p:nvGrpSpPr>
+        <p:cNvPr id="1" name=""/>
+        <p:cNvGrpSpPr/>
+        <p:nvPr/>
+      </p:nvGrpSpPr>
+      <p:grpSpPr>
+        <a:xfrm>
+          <a:off x="0" y="0"/>
+          <a:ext cx="0" cy="0"/>
+          <a:chOff x="0" y="0"/>
+          <a:chExt cx="0" cy="0"/>
+        </a:xfrm>
+      </p:grpSpPr>
+      <p:sp>
+        <p:nvSpPr>
+          <p:cNvPr id="2" name="Slide Image Placeholder 1"/>
+          <p:cNvSpPr>
+            <a:spLocks noGrp="1"/>
+          </p:cNvSpPr>
+          <p:nvPr>
+            <p:ph type="sldImg" idx="2"/>
+          </p:nvPr>
+        </p:nvSpPr>
+        <p:spPr/>
+      </p:sp>
+      <p:sp>
+        <p:nvSpPr>
+          <p:cNvPr id="3" name="Notes Placeholder 2"/>
+          <p:cNvSpPr>
+            <a:spLocks noGrp="1"/>
+          </p:cNvSpPr>
+          <p:nvPr>
+            <p:ph type="body" idx="3" sz="quarter"/>
+          </p:nvPr>
+        </p:nvSpPr>
+        <p:spPr/>
+        <p:txBody>
+          <a:bodyPr/>
+          <a:lstStyle/>
+          <a:p>
+            <a:r>
+              <a:t>[6:15 · 2m00s] FINDING TWO. Unequal access to support.</a:t>
+            </a:r>
+          </a:p>
+          <a:p/>
+          <a:p>
+            <a:r>
+              <a:t>Slow down here. This is the centre of the talk.</a:t>
+            </a:r>
+          </a:p>
+          <a:p/>
+          <a:p>
+            <a:r>
+              <a:t>First the framing: selection means being OFFERED support. So the harm is a missed</a:t>
+            </a:r>
+          </a:p>
+          <a:p>
+            <a:r>
+              <a:t>offer, and FNR — equal opportunity — is our primary metric, not FPR.</a:t>
+            </a:r>
+          </a:p>
+          <a:p/>
+          <a:p>
+            <a:r>
+              <a:t>Second, the operating point. We audit at the top-20% rule the product actually</a:t>
+            </a:r>
+          </a:p>
+          <a:p>
+            <a:r>
+              <a:t>ships, not at threshold 0.5. At 0.5 the tool would flag 68% of people. That is not</a:t>
+            </a:r>
+          </a:p>
+          <a:p>
+            <a:r>
+              <a:t>a threshold this product ever applies, and auditing there inflates every gap.</a:t>
+            </a:r>
+          </a:p>
+          <a:p/>
+          <a:p>
+            <a:r>
+              <a:t>The results:</a:t>
+            </a:r>
+          </a:p>
+          <a:p>
+            <a:r>
+              <a:t>— Race: equivalent within ±5 points for all three models by TOST. No race test</a:t>
+            </a:r>
+          </a:p>
+          <a:p>
+            <a:r>
+              <a:t>  survives Holm correction across our 54 tests. Small, and unconfirmed.</a:t>
+            </a:r>
+          </a:p>
+          <a:p>
+            <a:r>
+              <a:t>— Gender: women who ARE re-arrested miss support 10 to 12 points more often.</a:t>
+            </a:r>
+          </a:p>
+          <a:p>
+            <a:r>
+              <a:t>  Significant for every model.</a:t>
+            </a:r>
+          </a:p>
+          <a:p>
+            <a:r>
+              <a:t>— Age: the largest disparity, 23 to 25 points. About 97% of re-arrested people</a:t>
+            </a:r>
+          </a:p>
+          <a:p>
+            <a:r>
+              <a:t>  aged 48+ are never selected. It persists even with the age field held fixed,</a:t>
+            </a:r>
+          </a:p>
+          <a:p>
+            <a:r>
+              <a:t>  because prior record carries age.</a:t>
+            </a:r>
+          </a:p>
+          <a:p/>
+          <a:p>
+            <a:r>
+              <a:t>Say the honest line: not significant does NOT mean fair. That is why we test</a:t>
+            </a:r>
+          </a:p>
+          <a:p>
+            <a:r>
+              <a:t>equivalence, not just difference.</a:t>
+            </a:r>
+          </a:p>
+        </p:txBody>
+      </p:sp>
+      <p:sp>
+        <p:nvSpPr>
+          <p:cNvPr id="4" name="Slide Number Placeholder 3"/>
+          <p:cNvSpPr>
+            <a:spLocks noGrp="1"/>
+          </p:cNvSpPr>
+          <p:nvPr>
+            <p:ph type="sldNum" idx="5" sz="quarter"/>
+          </p:nvPr>
+        </p:nvSpPr>
+        <p:spPr/>
+      </p:sp>
+    </p:spTree>
+  </p:cSld>
+  <p:clrMapOvr>
+    <a:masterClrMapping/>
+  </p:clrMapOvr>
+</p:notes>
+</file>
+
+<file path=ppt/notesSlides/notesSlide8.xml><?xml version="1.0" encoding="utf-8"?>
+<p:notes xmlns:a="http://schemas.openxmlformats.org/drawingml/2006/main" xmlns:p="http://schemas.openxmlformats.org/presentationml/2006/main" xmlns:r="http://schemas.openxmlformats.org/officeDocument/2006/relationships">
+  <p:cSld>
+    <p:spTree>
+      <p:nvGrpSpPr>
+        <p:cNvPr id="1" name=""/>
+        <p:cNvGrpSpPr/>
+        <p:nvPr/>
+      </p:nvGrpSpPr>
+      <p:grpSpPr>
+        <a:xfrm>
+          <a:off x="0" y="0"/>
+          <a:ext cx="0" cy="0"/>
+          <a:chOff x="0" y="0"/>
+          <a:chExt cx="0" cy="0"/>
+        </a:xfrm>
+      </p:grpSpPr>
+      <p:sp>
+        <p:nvSpPr>
+          <p:cNvPr id="2" name="Slide Image Placeholder 1"/>
+          <p:cNvSpPr>
+            <a:spLocks noGrp="1"/>
+          </p:cNvSpPr>
+          <p:nvPr>
+            <p:ph type="sldImg" idx="2"/>
+          </p:nvPr>
+        </p:nvSpPr>
+        <p:spPr/>
+      </p:sp>
+      <p:sp>
+        <p:nvSpPr>
+          <p:cNvPr id="3" name="Notes Placeholder 2"/>
+          <p:cNvSpPr>
+            <a:spLocks noGrp="1"/>
+          </p:cNvSpPr>
+          <p:nvPr>
+            <p:ph type="body" idx="3" sz="quarter"/>
+          </p:nvPr>
+        </p:nvSpPr>
+        <p:spPr/>
+        <p:txBody>
+          <a:bodyPr/>
+          <a:lstStyle/>
+          <a:p>
+            <a:r>
+              <a:t>[8:15 · 1m00s] The impossibility result, both sides.</a:t>
+            </a:r>
+          </a:p>
+          <a:p/>
+          <a:p>
+            <a:r>
+              <a:t>Our data demonstrates both halves of the theorem within one project.</a:t>
+            </a:r>
+          </a:p>
+          <a:p/>
+          <a:p>
+            <a:r>
+              <a:t>Race: base rates 0.582 and 0.564 — nearly equal. The theorem does not bind, so</a:t>
+            </a:r>
+          </a:p>
+          <a:p>
+            <a:r>
+              <a:t>those gaps are a property of our models and are fixable.</a:t>
+            </a:r>
+          </a:p>
+          <a:p/>
+          <a:p>
+            <a:r>
+              <a:t>Gender: 0.591 against 0.454, fourteen points apart. Calibration and equal error</a:t>
+            </a:r>
+          </a:p>
+          <a:p>
+            <a:r>
+              <a:t>rates CANNOT both hold. We have to choose.</a:t>
+            </a:r>
+          </a:p>
+          <a:p/>
+          <a:p>
+            <a:r>
+              <a:t>The mechanism is visible in our numbers: every model over-predicts women — mean</a:t>
+            </a:r>
+          </a:p>
+          <a:p>
+            <a:r>
+              <a:t>score 0.52 against an observed 0.454 — yet women are selected less at the top 20%.</a:t>
+            </a:r>
+          </a:p>
+          <a:p/>
+          <a:p>
+            <a:r>
+              <a:t>And for THIS use, the direction matters. In a support programme over-prediction</a:t>
+            </a:r>
+          </a:p>
+          <a:p>
+            <a:r>
+              <a:t>works in women's favour. Recalibrating by gender would select even fewer women and</a:t>
+            </a:r>
+          </a:p>
+          <a:p>
+            <a:r>
+              <a:t>widen the gap. The harm here is the missed offer, not the miscalibration.</a:t>
+            </a:r>
+          </a:p>
+        </p:txBody>
+      </p:sp>
+      <p:sp>
+        <p:nvSpPr>
+          <p:cNvPr id="4" name="Slide Number Placeholder 3"/>
+          <p:cNvSpPr>
+            <a:spLocks noGrp="1"/>
+          </p:cNvSpPr>
+          <p:nvPr>
+            <p:ph type="sldNum" idx="5" sz="quarter"/>
+          </p:nvPr>
+        </p:nvSpPr>
+        <p:spPr/>
+      </p:sp>
+    </p:spTree>
+  </p:cSld>
+  <p:clrMapOvr>
+    <a:masterClrMapping/>
+  </p:clrMapOvr>
+</p:notes>
+</file>
+
+<file path=ppt/notesSlides/notesSlide9.xml><?xml version="1.0" encoding="utf-8"?>
+<p:notes xmlns:a="http://schemas.openxmlformats.org/drawingml/2006/main" xmlns:p="http://schemas.openxmlformats.org/presentationml/2006/main" xmlns:r="http://schemas.openxmlformats.org/officeDocument/2006/relationships">
+  <p:cSld>
+    <p:spTree>
+      <p:nvGrpSpPr>
+        <p:cNvPr id="1" name=""/>
+        <p:cNvGrpSpPr/>
+        <p:nvPr/>
+      </p:nvGrpSpPr>
+      <p:grpSpPr>
+        <a:xfrm>
+          <a:off x="0" y="0"/>
+          <a:ext cx="0" cy="0"/>
+          <a:chOff x="0" y="0"/>
+          <a:chExt cx="0" cy="0"/>
+        </a:xfrm>
+      </p:grpSpPr>
+      <p:sp>
+        <p:nvSpPr>
+          <p:cNvPr id="2" name="Slide Image Placeholder 1"/>
+          <p:cNvSpPr>
+            <a:spLocks noGrp="1"/>
+          </p:cNvSpPr>
+          <p:nvPr>
+            <p:ph type="sldImg" idx="2"/>
+          </p:nvPr>
+        </p:nvSpPr>
+        <p:spPr/>
+      </p:sp>
+      <p:sp>
+        <p:nvSpPr>
+          <p:cNvPr id="3" name="Notes Placeholder 2"/>
+          <p:cNvSpPr>
+            <a:spLocks noGrp="1"/>
+          </p:cNvSpPr>
+          <p:nvPr>
+            <p:ph type="body" idx="3" sz="quarter"/>
+          </p:nvPr>
+        </p:nvSpPr>
+        <p:spPr/>
+        <p:txBody>
+          <a:bodyPr/>
+          <a:lstStyle/>
+          <a:p>
+            <a:r>
+              <a:t>[9:15 · 1m00s] Where the gender gap comes from.</a:t>
+            </a:r>
+          </a:p>
+          <a:p/>
+          <a:p>
+            <a:r>
+              <a:t>We did not stop at measuring. The course sequence is test, identify the variable,</a:t>
+            </a:r>
+          </a:p>
+          <a:p>
+            <a:r>
+              <a:t>mitigate — and fairness partial dependence names the candidate.</a:t>
+            </a:r>
+          </a:p>
+          <a:p/>
+          <a:p>
+            <a:r>
+              <a:t>Gang affiliation. Cramér's V of 1.0 with gender on the raw field, because it is</a:t>
+            </a:r>
+          </a:p>
+          <a:p>
+            <a:r>
+              <a:t>never recorded for women. It is a measurement artefact about record-keeping, not a</a:t>
+            </a:r>
+          </a:p>
+          <a:p>
+            <a:r>
+              <a:t>behavioural signal about women.</a:t>
+            </a:r>
+          </a:p>
+          <a:p/>
+          <a:p>
+            <a:r>
+              <a:t>Dropping it and re-estimating shrinks the gender FNR gap from -0.10 to about zero</a:t>
+            </a:r>
+          </a:p>
+          <a:p>
+            <a:r>
+              <a:t>for logistic — partly by raising men's FNR, so say that too — at roughly 0.014 AUC</a:t>
+            </a:r>
+          </a:p>
+          <a:p>
+            <a:r>
+              <a:t>and 27 to 41 fewer captured re-arrests. Statistical parity is still rejected.</a:t>
+            </a:r>
+          </a:p>
+        </p:txBody>
+      </p:sp>
+      <p:sp>
+        <p:nvSpPr>
+          <p:cNvPr id="4" name="Slide Number Placeholder 3"/>
+          <p:cNvSpPr>
+            <a:spLocks noGrp="1"/>
+          </p:cNvSpPr>
+          <p:nvPr>
+            <p:ph type="sldNum" idx="5" sz="quarter"/>
+          </p:nvPr>
+        </p:nvSpPr>
+        <p:spPr/>
+      </p:sp>
+    </p:spTree>
+  </p:cSld>
+  <p:clrMapOvr>
+    <a:masterClrMapping/>
+  </p:clrMapOvr>
+</p:notes>
 </file>
 
 <file path=ppt/slideLayouts/slideLayout1.xml><?xml version="1.0" encoding="utf-8"?>
@@ -13591,4 +15553,324 @@
   </a:objectDefaults>
   <a:extraClrSchemeLst/>
 </a:theme>
+</file>
+
+<file path=ppt/theme/theme2.xml><?xml version="1.0" encoding="utf-8"?>
+<a:theme xmlns:a="http://schemas.openxmlformats.org/drawingml/2006/main" name="Office Theme">
+  <a:themeElements>
+    <a:clrScheme name="Office">
+      <a:dk1>
+        <a:sysClr val="windowText" lastClr="000000"/>
+      </a:dk1>
+      <a:lt1>
+        <a:sysClr val="window" lastClr="FFFFFF"/>
+      </a:lt1>
+      <a:dk2>
+        <a:srgbClr val="1F497D"/>
+      </a:dk2>
+      <a:lt2>
+        <a:srgbClr val="EEECE1"/>
+      </a:lt2>
+      <a:accent1>
+        <a:srgbClr val="4F81BD"/>
+      </a:accent1>
+      <a:accent2>
+        <a:srgbClr val="C0504D"/>
+      </a:accent2>
+      <a:accent3>
+        <a:srgbClr val="9BBB59"/>
+      </a:accent3>
+      <a:accent4>
+        <a:srgbClr val="8064A2"/>
+      </a:accent4>
+      <a:accent5>
+        <a:srgbClr val="4BACC6"/>
+      </a:accent5>
+      <a:accent6>
+        <a:srgbClr val="F79646"/>
+      </a:accent6>
+      <a:hlink>
+        <a:srgbClr val="0000FF"/>
+      </a:hlink>
+      <a:folHlink>
+        <a:srgbClr val="800080"/>
+      </a:folHlink>
+    </a:clrScheme>
+    <a:fontScheme name="Office">
+      <a:majorFont>
+        <a:latin typeface="Calibri"/>
+        <a:ea typeface=""/>
+        <a:cs typeface=""/>
+        <a:font script="Jpan" typeface="ＭＳ Ｐゴシック"/>
+        <a:font script="Hang" typeface="맑은 고딕"/>
+        <a:font script="Hans" typeface="宋体"/>
+        <a:font script="Hant" typeface="新細明體"/>
+        <a:font script="Arab" typeface="Times New Roman"/>
+        <a:font script="Hebr" typeface="Times New Roman"/>
+        <a:font script="Thai" typeface="Angsana New"/>
+        <a:font script="Ethi" typeface="Nyala"/>
+        <a:font script="Beng" typeface="Vrinda"/>
+        <a:font script="Gujr" typeface="Shruti"/>
+        <a:font script="Khmr" typeface="MoolBoran"/>
+        <a:font script="Knda" typeface="Tunga"/>
+        <a:font script="Guru" typeface="Raavi"/>
+        <a:font script="Cans" typeface="Euphemia"/>
+        <a:font script="Cher" typeface="Plantagenet Cherokee"/>
+        <a:font script="Yiii" typeface="Microsoft Yi Baiti"/>
+        <a:font script="Tibt" typeface="Microsoft Himalaya"/>
+        <a:font script="Thaa" typeface="MV Boli"/>
+        <a:font script="Deva" typeface="Mangal"/>
+        <a:font script="Telu" typeface="Gautami"/>
+        <a:font script="Taml" typeface="Latha"/>
+        <a:font script="Syrc" typeface="Estrangelo Edessa"/>
+        <a:font script="Orya" typeface="Kalinga"/>
+        <a:font script="Mlym" typeface="Kartika"/>
+        <a:font script="Laoo" typeface="DokChampa"/>
+        <a:font script="Sinh" typeface="Iskoola Pota"/>
+        <a:font script="Mong" typeface="Mongolian Baiti"/>
+        <a:font script="Viet" typeface="Times New Roman"/>
+        <a:font script="Uigh" typeface="Microsoft Uighur"/>
+        <a:font script="Geor" typeface="Sylfaen"/>
+      </a:majorFont>
+      <a:minorFont>
+        <a:latin typeface="Calibri"/>
+        <a:ea typeface=""/>
+        <a:cs typeface=""/>
+        <a:font script="Jpan" typeface="ＭＳ Ｐゴシック"/>
+        <a:font script="Hang" typeface="맑은 고딕"/>
+        <a:font script="Hans" typeface="宋体"/>
+        <a:font script="Hant" typeface="新細明體"/>
+        <a:font script="Arab" typeface="Arial"/>
+        <a:font script="Hebr" typeface="Arial"/>
+        <a:font script="Thai" typeface="Cordia New"/>
+        <a:font script="Ethi" typeface="Nyala"/>
+        <a:font script="Beng" typeface="Vrinda"/>
+        <a:font script="Gujr" typeface="Shruti"/>
+        <a:font script="Khmr" typeface="DaunPenh"/>
+        <a:font script="Knda" typeface="Tunga"/>
+        <a:font script="Guru" typeface="Raavi"/>
+        <a:font script="Cans" typeface="Euphemia"/>
+        <a:font script="Cher" typeface="Plantagenet Cherokee"/>
+        <a:font script="Yiii" typeface="Microsoft Yi Baiti"/>
+        <a:font script="Tibt" typeface="Microsoft Himalaya"/>
+        <a:font script="Thaa" typeface="MV Boli"/>
+        <a:font script="Deva" typeface="Mangal"/>
+        <a:font script="Telu" typeface="Gautami"/>
+        <a:font script="Taml" typeface="Latha"/>
+        <a:font script="Syrc" typeface="Estrangelo Edessa"/>
+        <a:font script="Orya" typeface="Kalinga"/>
+        <a:font script="Mlym" typeface="Kartika"/>
+        <a:font script="Laoo" typeface="DokChampa"/>
+        <a:font script="Sinh" typeface="Iskoola Pota"/>
+        <a:font script="Mong" typeface="Mongolian Baiti"/>
+        <a:font script="Viet" typeface="Arial"/>
+        <a:font script="Uigh" typeface="Microsoft Uighur"/>
+        <a:font script="Geor" typeface="Sylfaen"/>
+      </a:minorFont>
+    </a:fontScheme>
+    <a:fmtScheme name="Office">
+      <a:fillStyleLst>
+        <a:solidFill>
+          <a:schemeClr val="phClr"/>
+        </a:solidFill>
+        <a:gradFill rotWithShape="1">
+          <a:gsLst>
+            <a:gs pos="0">
+              <a:schemeClr val="phClr">
+                <a:tint val="50000"/>
+                <a:satMod val="300000"/>
+              </a:schemeClr>
+            </a:gs>
+            <a:gs pos="35000">
+              <a:schemeClr val="phClr">
+                <a:tint val="37000"/>
+                <a:satMod val="300000"/>
+              </a:schemeClr>
+            </a:gs>
+            <a:gs pos="100000">
+              <a:schemeClr val="phClr">
+                <a:tint val="15000"/>
+                <a:satMod val="350000"/>
+              </a:schemeClr>
+            </a:gs>
+          </a:gsLst>
+          <a:lin ang="16200000" scaled="1"/>
+        </a:gradFill>
+        <a:gradFill rotWithShape="1">
+          <a:gsLst>
+            <a:gs pos="0">
+              <a:schemeClr val="phClr">
+                <a:tint val="100000"/>
+                <a:shade val="100000"/>
+                <a:satMod val="130000"/>
+              </a:schemeClr>
+            </a:gs>
+            <a:gs pos="100000">
+              <a:schemeClr val="phClr">
+                <a:tint val="50000"/>
+                <a:shade val="100000"/>
+                <a:satMod val="350000"/>
+              </a:schemeClr>
+            </a:gs>
+          </a:gsLst>
+          <a:lin ang="16200000" scaled="0"/>
+        </a:gradFill>
+      </a:fillStyleLst>
+      <a:lnStyleLst>
+        <a:ln w="9525" cap="flat" cmpd="sng" algn="ctr">
+          <a:solidFill>
+            <a:schemeClr val="phClr">
+              <a:shade val="95000"/>
+              <a:satMod val="105000"/>
+            </a:schemeClr>
+          </a:solidFill>
+          <a:prstDash val="solid"/>
+        </a:ln>
+        <a:ln w="25400" cap="flat" cmpd="sng" algn="ctr">
+          <a:solidFill>
+            <a:schemeClr val="phClr"/>
+          </a:solidFill>
+          <a:prstDash val="solid"/>
+        </a:ln>
+        <a:ln w="38100" cap="flat" cmpd="sng" algn="ctr">
+          <a:solidFill>
+            <a:schemeClr val="phClr"/>
+          </a:solidFill>
+          <a:prstDash val="solid"/>
+        </a:ln>
+      </a:lnStyleLst>
+      <a:effectStyleLst>
+        <a:effectStyle>
+          <a:effectLst>
+            <a:outerShdw blurRad="40000" dist="20000" dir="5400000" rotWithShape="0">
+              <a:srgbClr val="000000">
+                <a:alpha val="38000"/>
+              </a:srgbClr>
+            </a:outerShdw>
+          </a:effectLst>
+        </a:effectStyle>
+        <a:effectStyle>
+          <a:effectLst>
+            <a:outerShdw blurRad="40000" dist="23000" dir="5400000" rotWithShape="0">
+              <a:srgbClr val="000000">
+                <a:alpha val="35000"/>
+              </a:srgbClr>
+            </a:outerShdw>
+          </a:effectLst>
+        </a:effectStyle>
+        <a:effectStyle>
+          <a:effectLst>
+            <a:outerShdw blurRad="40000" dist="23000" dir="5400000" rotWithShape="0">
+              <a:srgbClr val="000000">
+                <a:alpha val="35000"/>
+              </a:srgbClr>
+            </a:outerShdw>
+          </a:effectLst>
+          <a:scene3d>
+            <a:camera prst="orthographicFront">
+              <a:rot lat="0" lon="0" rev="0"/>
+            </a:camera>
+            <a:lightRig rig="threePt" dir="t">
+              <a:rot lat="0" lon="0" rev="1200000"/>
+            </a:lightRig>
+          </a:scene3d>
+          <a:sp3d>
+            <a:bevelT w="63500" h="25400"/>
+          </a:sp3d>
+        </a:effectStyle>
+      </a:effectStyleLst>
+      <a:bgFillStyleLst>
+        <a:solidFill>
+          <a:schemeClr val="phClr"/>
+        </a:solidFill>
+        <a:gradFill rotWithShape="1">
+          <a:gsLst>
+            <a:gs pos="0">
+              <a:schemeClr val="phClr">
+                <a:tint val="40000"/>
+                <a:satMod val="350000"/>
+              </a:schemeClr>
+            </a:gs>
+            <a:gs pos="40000">
+              <a:schemeClr val="phClr">
+                <a:tint val="45000"/>
+                <a:shade val="99000"/>
+                <a:satMod val="350000"/>
+              </a:schemeClr>
+            </a:gs>
+            <a:gs pos="100000">
+              <a:schemeClr val="phClr">
+                <a:shade val="20000"/>
+                <a:satMod val="255000"/>
+              </a:schemeClr>
+            </a:gs>
+          </a:gsLst>
+          <a:path path="circle">
+            <a:fillToRect l="50000" t="-80000" r="50000" b="180000"/>
+          </a:path>
+        </a:gradFill>
+        <a:gradFill rotWithShape="1">
+          <a:gsLst>
+            <a:gs pos="0">
+              <a:schemeClr val="phClr">
+                <a:tint val="80000"/>
+                <a:satMod val="300000"/>
+              </a:schemeClr>
+            </a:gs>
+            <a:gs pos="100000">
+              <a:schemeClr val="phClr">
+                <a:shade val="30000"/>
+                <a:satMod val="200000"/>
+              </a:schemeClr>
+            </a:gs>
+          </a:gsLst>
+          <a:path path="circle">
+            <a:fillToRect l="50000" t="50000" r="50000" b="50000"/>
+          </a:path>
+        </a:gradFill>
+      </a:bgFillStyleLst>
+    </a:fmtScheme>
+  </a:themeElements>
+  <a:objectDefaults>
+    <a:spDef>
+      <a:spPr/>
+      <a:bodyPr/>
+      <a:lstStyle/>
+      <a:style>
+        <a:lnRef idx="1">
+          <a:schemeClr val="accent1"/>
+        </a:lnRef>
+        <a:fillRef idx="3">
+          <a:schemeClr val="accent1"/>
+        </a:fillRef>
+        <a:effectRef idx="2">
+          <a:schemeClr val="accent1"/>
+        </a:effectRef>
+        <a:fontRef idx="minor">
+          <a:schemeClr val="lt1"/>
+        </a:fontRef>
+      </a:style>
+    </a:spDef>
+    <a:lnDef>
+      <a:spPr/>
+      <a:bodyPr/>
+      <a:lstStyle/>
+      <a:style>
+        <a:lnRef idx="2">
+          <a:schemeClr val="accent1"/>
+        </a:lnRef>
+        <a:fillRef idx="0">
+          <a:schemeClr val="accent1"/>
+        </a:fillRef>
+        <a:effectRef idx="1">
+          <a:schemeClr val="accent1"/>
+        </a:effectRef>
+        <a:fontRef idx="minor">
+          <a:schemeClr val="tx1"/>
+        </a:fontRef>
+      </a:style>
+    </a:lnDef>
+  </a:objectDefaults>
+  <a:extraClrSchemeLst/>
+</a:theme>
 </file>
--- a/reports/ISAF_Recidivism_Presentation.pptx
+++ b/reports/ISAF_Recidivism_Presentation.pptx
@@ -626,72 +626,62 @@
           <a:lstStyle/>
           <a:p>
             <a:r>
-              <a:t>[10:15 · 1m00s] Did the fix generalise, or did we just fit it?</a:t>
+              <a:t>[9:00 · 45s] The impossibility result, both sides.</a:t>
             </a:r>
           </a:p>
           <a:p/>
           <a:p>
             <a:r>
-              <a:t>This is the slide that separates us from a project that stops at the p-value.</a:t>
+              <a:t>Our data demonstrates both halves of the theorem within one project.</a:t>
             </a:r>
           </a:p>
           <a:p/>
           <a:p>
             <a:r>
-              <a:t>The result on the previous slide chose the variable AND measured the improvement on</a:t>
-            </a:r>
-          </a:p>
-          <a:p>
-            <a:r>
-              <a:t>the same cohort. That is in-sample. It shows a mitigation can be FITTED, not that</a:t>
-            </a:r>
-          </a:p>
-          <a:p>
-            <a:r>
-              <a:t>it works.</a:t>
+              <a:t>Race: base rates 0.582 and 0.564 — nearly equal. The theorem does not bind, so</a:t>
+            </a:r>
+          </a:p>
+          <a:p>
+            <a:r>
+              <a:t>those gaps are a property of our models and are fixable.</a:t>
             </a:r>
           </a:p>
           <a:p/>
           <a:p>
             <a:r>
-              <a:t>So we separated them. Five outer folds, entirely inside the training partition. In</a:t>
-            </a:r>
-          </a:p>
-          <a:p>
-            <a:r>
-              <a:t>each fold we rerun the candidate search on that fold's training part, pick from</a:t>
-            </a:r>
-          </a:p>
-          <a:p>
-            <a:r>
-              <a:t>there alone, refit there, and measure on the held-out fold. The evaluation cohort</a:t>
-            </a:r>
-          </a:p>
-          <a:p>
-            <a:r>
-              <a:t>is never touched.</a:t>
+              <a:t>Gender: 0.591 against 0.454, fourteen points apart. Calibration and equal error</a:t>
+            </a:r>
+          </a:p>
+          <a:p>
+            <a:r>
+              <a:t>rates CANNOT both hold. We have to choose.</a:t>
             </a:r>
           </a:p>
           <a:p/>
           <a:p>
             <a:r>
-              <a:t>Gang affiliation is selected in all five folds, for both models. About 70% of the</a:t>
-            </a:r>
-          </a:p>
-          <a:p>
-            <a:r>
-              <a:t>gap closes out of fold, for roughly one AUC point. The equal-opportunity p-value</a:t>
-            </a:r>
-          </a:p>
-          <a:p>
-            <a:r>
-              <a:t>reaches 0.27, not the in-sample 0.99 — and two of five folds still reject.</a:t>
+              <a:t>The mechanism is visible in our numbers: every model over-predicts women — mean</a:t>
+            </a:r>
+          </a:p>
+          <a:p>
+            <a:r>
+              <a:t>score 0.52 against an observed 0.454 — yet women are selected less at the top 20%.</a:t>
             </a:r>
           </a:p>
           <a:p/>
           <a:p>
             <a:r>
-              <a:t>We report the out-of-fold numbers. The in-sample figure is an upper bound.</a:t>
+              <a:t>And for THIS use, the direction matters. In a support programme over-prediction</a:t>
+            </a:r>
+          </a:p>
+          <a:p>
+            <a:r>
+              <a:t>works in women's favour. Recalibrating by gender would select even fewer women and</a:t>
+            </a:r>
+          </a:p>
+          <a:p>
+            <a:r>
+              <a:t>widen the gap. The harm here is the missed offer, not the miscalibration.</a:t>
             </a:r>
           </a:p>
         </p:txBody>
@@ -761,53 +751,50 @@
           <a:lstStyle/>
           <a:p>
             <a:r>
-              <a:t>[11:15 · 1m00s] The four dimensions together.</a:t>
+              <a:t>[9:45 · 1m00s] Where the gender gap comes from.</a:t>
             </a:r>
           </a:p>
           <a:p/>
           <a:p>
             <a:r>
-              <a:t>Read across the rows, not down the columns.</a:t>
+              <a:t>We did not stop at measuring. The course sequence is test, identify the variable,</a:t>
+            </a:r>
+          </a:p>
+          <a:p>
+            <a:r>
+              <a:t>mitigate — and fairness partial dependence names the candidate.</a:t>
             </a:r>
           </a:p>
           <a:p/>
           <a:p>
             <a:r>
-              <a:t>Performance: separated by 0.003 AUC, and the only real calibration difference goes</a:t>
-            </a:r>
-          </a:p>
-          <a:p>
-            <a:r>
-              <a:t>AGAINST the model with the highest AUC.</a:t>
+              <a:t>Gang affiliation. Cramér's V of 1.0 with gender on the raw field, because it is</a:t>
+            </a:r>
+          </a:p>
+          <a:p>
+            <a:r>
+              <a:t>never recorded for women. It is a measurement artefact about record-keeping, not a</a:t>
+            </a:r>
+          </a:p>
+          <a:p>
+            <a:r>
+              <a:t>behavioural signal about women.</a:t>
             </a:r>
           </a:p>
           <a:p/>
           <a:p>
             <a:r>
-              <a:t>Interpretability: unambiguous, and the gaps are large.</a:t>
-            </a:r>
-          </a:p>
-          <a:p/>
-          <a:p>
-            <a:r>
-              <a:t>Stability: logistic drifts least on all 28 resample pairs.</a:t>
-            </a:r>
-          </a:p>
-          <a:p/>
-          <a:p>
-            <a:r>
-              <a:t>Fairness: the differences BETWEEN models are smaller than they look. The gender and</a:t>
-            </a:r>
-          </a:p>
-          <a:p>
-            <a:r>
-              <a:t>age gaps are shared by all three.</a:t>
-            </a:r>
-          </a:p>
-          <a:p/>
-          <a:p>
-            <a:r>
-              <a:t>That is the shape of the decision: accuracy does not discriminate here.</a:t>
+              <a:t>Dropping it and re-estimating shrinks the gender FNR gap from -0.10 to about zero</a:t>
+            </a:r>
+          </a:p>
+          <a:p>
+            <a:r>
+              <a:t>for logistic — partly by raising men's FNR, so say that too — at roughly 0.014 AUC</a:t>
+            </a:r>
+          </a:p>
+          <a:p>
+            <a:r>
+              <a:t>and 27 to 41 fewer captured re-arrests. Statistical parity is still rejected.</a:t>
             </a:r>
           </a:p>
         </p:txBody>
@@ -877,77 +864,72 @@
           <a:lstStyle/>
           <a:p>
             <a:r>
-              <a:t>[12:15 · 1m00s] FINDING THREE. The recommendation, with its counter-case.</a:t>
+              <a:t>[10:45 · 1m00s] Did the fix generalise, or did we just fit it?</a:t>
             </a:r>
           </a:p>
           <a:p/>
           <a:p>
             <a:r>
-              <a:t>Logistic regression for the shadow pilot. XGBoost as challenger, running in</a:t>
-            </a:r>
-          </a:p>
-          <a:p>
-            <a:r>
-              <a:t>parallel on the same cohort.</a:t>
+              <a:t>This is the slide that separates us from a project that stops at the p-value.</a:t>
             </a:r>
           </a:p>
           <a:p/>
           <a:p>
             <a:r>
-              <a:t>Be explicit about what we give up: XGBoost is ahead on AUC and Brier. Those are</a:t>
-            </a:r>
-          </a:p>
-          <a:p>
-            <a:r>
-              <a:t>real, significant differences.</a:t>
+              <a:t>The result on the previous slide chose the variable AND measured the improvement on</a:t>
+            </a:r>
+          </a:p>
+          <a:p>
+            <a:r>
+              <a:t>the same cohort. That is in-sample. It shows a mitigation can be FITTED, not that</a:t>
+            </a:r>
+          </a:p>
+          <a:p>
+            <a:r>
+              <a:t>it works.</a:t>
             </a:r>
           </a:p>
           <a:p/>
           <a:p>
             <a:r>
-              <a:t>They do not reach the decision. At the deployed rule the two models offer support</a:t>
-            </a:r>
-          </a:p>
-          <a:p>
-            <a:r>
-              <a:t>to 85% of the SAME people — 254 of 7,807 differ — and the difference in captured</a:t>
-            </a:r>
-          </a:p>
-          <a:p>
-            <a:r>
-              <a:t>re-arrests has an interval spanning zero.</a:t>
+              <a:t>So we separated them. Five outer folds, entirely inside the training partition. In</a:t>
+            </a:r>
+          </a:p>
+          <a:p>
+            <a:r>
+              <a:t>each fold we rerun the candidate search on that fold's training part, pick from</a:t>
+            </a:r>
+          </a:p>
+          <a:p>
+            <a:r>
+              <a:t>there alone, refit there, and measure on the held-out fold. The evaluation cohort</a:t>
+            </a:r>
+          </a:p>
+          <a:p>
+            <a:r>
+              <a:t>is never touched.</a:t>
             </a:r>
           </a:p>
           <a:p/>
           <a:p>
             <a:r>
-              <a:t>State what we do NOT claim, because a juror will test it: logistic is not fairer</a:t>
-            </a:r>
-          </a:p>
-          <a:p>
-            <a:r>
-              <a:t>and not better calibrated. On both, the two are statistically tied. We chose it</a:t>
-            </a:r>
-          </a:p>
-          <a:p>
-            <a:r>
-              <a:t>for refit stability and for coefficients you can read without a second tool.</a:t>
+              <a:t>Gang affiliation is selected in all five folds, for both models. About 70% of the</a:t>
+            </a:r>
+          </a:p>
+          <a:p>
+            <a:r>
+              <a:t>gap closes out of fold, for roughly one AUC point. The equal-opportunity p-value</a:t>
+            </a:r>
+          </a:p>
+          <a:p>
+            <a:r>
+              <a:t>reaches 0.27, not the in-sample 0.99 — and two of five folds still reject.</a:t>
             </a:r>
           </a:p>
           <a:p/>
           <a:p>
             <a:r>
-              <a:t>And what would reverse it: if the client quotes probabilities numerically to</a:t>
-            </a:r>
-          </a:p>
-          <a:p>
-            <a:r>
-              <a:t>supervisees, calibration starts to dominate. If their capacity is large enough that</a:t>
-            </a:r>
-          </a:p>
-          <a:p>
-            <a:r>
-              <a:t>twelve extra offers matters. That is why the challenger runs in parallel.</a:t>
+              <a:t>We report the out-of-fold numbers. The in-sample figure is an upper bound.</a:t>
             </a:r>
           </a:p>
         </p:txBody>
@@ -1017,12 +999,268 @@
           <a:lstStyle/>
           <a:p>
             <a:r>
-              <a:t>[13:15 · 45s] The app, and close.</a:t>
+              <a:t>[11:45 · 45s] The four dimensions together.</a:t>
             </a:r>
           </a:p>
           <a:p/>
           <a:p>
             <a:r>
+              <a:t>Read across the rows, not down the columns.</a:t>
+            </a:r>
+          </a:p>
+          <a:p/>
+          <a:p>
+            <a:r>
+              <a:t>Performance: separated by 0.003 AUC, and the only real calibration difference goes</a:t>
+            </a:r>
+          </a:p>
+          <a:p>
+            <a:r>
+              <a:t>AGAINST the model with the highest AUC.</a:t>
+            </a:r>
+          </a:p>
+          <a:p/>
+          <a:p>
+            <a:r>
+              <a:t>Interpretability: unambiguous, and the gaps are large.</a:t>
+            </a:r>
+          </a:p>
+          <a:p/>
+          <a:p>
+            <a:r>
+              <a:t>Stability: logistic drifts least on all 28 resample pairs.</a:t>
+            </a:r>
+          </a:p>
+          <a:p/>
+          <a:p>
+            <a:r>
+              <a:t>Fairness: the differences BETWEEN models are smaller than they look. The gender and</a:t>
+            </a:r>
+          </a:p>
+          <a:p>
+            <a:r>
+              <a:t>age gaps are shared by all three.</a:t>
+            </a:r>
+          </a:p>
+          <a:p/>
+          <a:p>
+            <a:r>
+              <a:t>That is the shape of the decision: accuracy does not discriminate here.</a:t>
+            </a:r>
+          </a:p>
+        </p:txBody>
+      </p:sp>
+      <p:sp>
+        <p:nvSpPr>
+          <p:cNvPr id="4" name="Slide Number Placeholder 3"/>
+          <p:cNvSpPr>
+            <a:spLocks noGrp="1"/>
+          </p:cNvSpPr>
+          <p:nvPr>
+            <p:ph type="sldNum" idx="5" sz="quarter"/>
+          </p:nvPr>
+        </p:nvSpPr>
+        <p:spPr/>
+      </p:sp>
+    </p:spTree>
+  </p:cSld>
+  <p:clrMapOvr>
+    <a:masterClrMapping/>
+  </p:clrMapOvr>
+</p:notes>
+</file>
+
+<file path=ppt/notesSlides/notesSlide14.xml><?xml version="1.0" encoding="utf-8"?>
+<p:notes xmlns:a="http://schemas.openxmlformats.org/drawingml/2006/main" xmlns:p="http://schemas.openxmlformats.org/presentationml/2006/main" xmlns:r="http://schemas.openxmlformats.org/officeDocument/2006/relationships">
+  <p:cSld>
+    <p:spTree>
+      <p:nvGrpSpPr>
+        <p:cNvPr id="1" name=""/>
+        <p:cNvGrpSpPr/>
+        <p:nvPr/>
+      </p:nvGrpSpPr>
+      <p:grpSpPr>
+        <a:xfrm>
+          <a:off x="0" y="0"/>
+          <a:ext cx="0" cy="0"/>
+          <a:chOff x="0" y="0"/>
+          <a:chExt cx="0" cy="0"/>
+        </a:xfrm>
+      </p:grpSpPr>
+      <p:sp>
+        <p:nvSpPr>
+          <p:cNvPr id="2" name="Slide Image Placeholder 1"/>
+          <p:cNvSpPr>
+            <a:spLocks noGrp="1"/>
+          </p:cNvSpPr>
+          <p:nvPr>
+            <p:ph type="sldImg" idx="2"/>
+          </p:nvPr>
+        </p:nvSpPr>
+        <p:spPr/>
+      </p:sp>
+      <p:sp>
+        <p:nvSpPr>
+          <p:cNvPr id="3" name="Notes Placeholder 2"/>
+          <p:cNvSpPr>
+            <a:spLocks noGrp="1"/>
+          </p:cNvSpPr>
+          <p:nvPr>
+            <p:ph type="body" idx="3" sz="quarter"/>
+          </p:nvPr>
+        </p:nvSpPr>
+        <p:spPr/>
+        <p:txBody>
+          <a:bodyPr/>
+          <a:lstStyle/>
+          <a:p>
+            <a:r>
+              <a:t>[12:30 · 1m00s] FINDING THREE. The recommendation, with its counter-case.</a:t>
+            </a:r>
+          </a:p>
+          <a:p/>
+          <a:p>
+            <a:r>
+              <a:t>Logistic regression for the shadow pilot. XGBoost as challenger, running in</a:t>
+            </a:r>
+          </a:p>
+          <a:p>
+            <a:r>
+              <a:t>parallel on the same cohort.</a:t>
+            </a:r>
+          </a:p>
+          <a:p/>
+          <a:p>
+            <a:r>
+              <a:t>Be explicit about what we give up: XGBoost is ahead on AUC and Brier. Those are</a:t>
+            </a:r>
+          </a:p>
+          <a:p>
+            <a:r>
+              <a:t>real, significant differences.</a:t>
+            </a:r>
+          </a:p>
+          <a:p/>
+          <a:p>
+            <a:r>
+              <a:t>They do not reach the decision. At the deployed rule the two models offer support</a:t>
+            </a:r>
+          </a:p>
+          <a:p>
+            <a:r>
+              <a:t>to 85% of the SAME people — 254 of 7,807 differ — and the difference in captured</a:t>
+            </a:r>
+          </a:p>
+          <a:p>
+            <a:r>
+              <a:t>re-arrests has an interval spanning zero.</a:t>
+            </a:r>
+          </a:p>
+          <a:p/>
+          <a:p>
+            <a:r>
+              <a:t>State what we do NOT claim, because a juror will test it: logistic is not fairer</a:t>
+            </a:r>
+          </a:p>
+          <a:p>
+            <a:r>
+              <a:t>and not better calibrated. On both, the two are statistically tied. We chose it</a:t>
+            </a:r>
+          </a:p>
+          <a:p>
+            <a:r>
+              <a:t>for refit stability and for coefficients you can read without a second tool.</a:t>
+            </a:r>
+          </a:p>
+          <a:p/>
+          <a:p>
+            <a:r>
+              <a:t>And what would reverse it: if the client quotes probabilities numerically to</a:t>
+            </a:r>
+          </a:p>
+          <a:p>
+            <a:r>
+              <a:t>supervisees, calibration starts to dominate. If their capacity is large enough that</a:t>
+            </a:r>
+          </a:p>
+          <a:p>
+            <a:r>
+              <a:t>twelve extra offers matters. That is why the challenger runs in parallel.</a:t>
+            </a:r>
+          </a:p>
+        </p:txBody>
+      </p:sp>
+      <p:sp>
+        <p:nvSpPr>
+          <p:cNvPr id="4" name="Slide Number Placeholder 3"/>
+          <p:cNvSpPr>
+            <a:spLocks noGrp="1"/>
+          </p:cNvSpPr>
+          <p:nvPr>
+            <p:ph type="sldNum" idx="5" sz="quarter"/>
+          </p:nvPr>
+        </p:nvSpPr>
+        <p:spPr/>
+      </p:sp>
+    </p:spTree>
+  </p:cSld>
+  <p:clrMapOvr>
+    <a:masterClrMapping/>
+  </p:clrMapOvr>
+</p:notes>
+</file>
+
+<file path=ppt/notesSlides/notesSlide15.xml><?xml version="1.0" encoding="utf-8"?>
+<p:notes xmlns:a="http://schemas.openxmlformats.org/drawingml/2006/main" xmlns:p="http://schemas.openxmlformats.org/presentationml/2006/main" xmlns:r="http://schemas.openxmlformats.org/officeDocument/2006/relationships">
+  <p:cSld>
+    <p:spTree>
+      <p:nvGrpSpPr>
+        <p:cNvPr id="1" name=""/>
+        <p:cNvGrpSpPr/>
+        <p:nvPr/>
+      </p:nvGrpSpPr>
+      <p:grpSpPr>
+        <a:xfrm>
+          <a:off x="0" y="0"/>
+          <a:ext cx="0" cy="0"/>
+          <a:chOff x="0" y="0"/>
+          <a:chExt cx="0" cy="0"/>
+        </a:xfrm>
+      </p:grpSpPr>
+      <p:sp>
+        <p:nvSpPr>
+          <p:cNvPr id="2" name="Slide Image Placeholder 1"/>
+          <p:cNvSpPr>
+            <a:spLocks noGrp="1"/>
+          </p:cNvSpPr>
+          <p:nvPr>
+            <p:ph type="sldImg" idx="2"/>
+          </p:nvPr>
+        </p:nvSpPr>
+        <p:spPr/>
+      </p:sp>
+      <p:sp>
+        <p:nvSpPr>
+          <p:cNvPr id="3" name="Notes Placeholder 2"/>
+          <p:cNvSpPr>
+            <a:spLocks noGrp="1"/>
+          </p:cNvSpPr>
+          <p:nvPr>
+            <p:ph type="body" idx="3" sz="quarter"/>
+          </p:nvPr>
+        </p:nvSpPr>
+        <p:spPr/>
+        <p:txBody>
+          <a:bodyPr/>
+          <a:lstStyle/>
+          <a:p>
+            <a:r>
+              <a:t>[13:30 · 30s] The app, and close.</a:t>
+            </a:r>
+          </a:p>
+          <a:p/>
+          <a:p>
+            <a:r>
               <a:t>The application makes every trade-off testable: score one person with all three</a:t>
             </a:r>
           </a:p>
@@ -1076,22 +1314,22 @@
           </a:p>
           <a:p>
             <a:r>
-              <a:t>A1 learning curve · A2 economics and sensitivity · A3 interpretability methods</a:t>
-            </a:r>
-          </a:p>
-          <a:p>
-            <a:r>
-              <a:t>A4 why SHAP, permutation importance and XPER disagree · A5 LIME fidelity</a:t>
-            </a:r>
-          </a:p>
-          <a:p>
-            <a:r>
-              <a:t>A6 stability detail · A7 what we tried and rejected · A8 proxy recovery</a:t>
-            </a:r>
-          </a:p>
-          <a:p>
-            <a:r>
-              <a:t>A9 per-person stability and the abstention finding</a:t>
+              <a:t>A1 learning curve · A2 economics and sensitivity</a:t>
+            </a:r>
+          </a:p>
+          <a:p>
+            <a:r>
+              <a:t>A3 why SHAP, permutation importance and XPER disagree · A4 LIME fidelity</a:t>
+            </a:r>
+          </a:p>
+          <a:p>
+            <a:r>
+              <a:t>A5 what we tried and rejected · A6 proxy recovery</a:t>
+            </a:r>
+          </a:p>
+          <a:p>
+            <a:r>
+              <a:t>A7 per-person stability and the abstention finding</a:t>
             </a:r>
           </a:p>
         </p:txBody>
@@ -1268,7 +1506,7 @@
           <a:lstStyle/>
           <a:p>
             <a:r>
-              <a:t>[1:15 · 1m30s] Data design, and the leak.</a:t>
+              <a:t>[1:15 · 1m15s] Data design, and the leak.</a:t>
             </a:r>
           </a:p>
           <a:p/>
@@ -1397,7 +1635,7 @@
           <a:lstStyle/>
           <a:p>
             <a:r>
-              <a:t>[2:45 · 1m00s] Three model families.</a:t>
+              <a:t>[2:30 · 45s] Three model families.</a:t>
             </a:r>
           </a:p>
           <a:p/>
@@ -1505,7 +1743,7 @@
           <a:lstStyle/>
           <a:p>
             <a:r>
-              <a:t>[3:45 · 1m00s] The client's real question.</a:t>
+              <a:t>[3:15 · 1m00s] The client's real question.</a:t>
             </a:r>
           </a:p>
           <a:p/>
@@ -1618,7 +1856,7 @@
           <a:lstStyle/>
           <a:p>
             <a:r>
-              <a:t>[4:45 · 1m30s] FINDING ONE. Performance cannot pick the model.</a:t>
+              <a:t>[4:15 · 1m15s] FINDING ONE. Performance cannot pick the model.</a:t>
             </a:r>
           </a:p>
           <a:p/>
@@ -1743,92 +1981,75 @@
           <a:lstStyle/>
           <a:p>
             <a:r>
-              <a:t>[6:15 · 2m00s] FINDING TWO. Unequal access to support.</a:t>
+              <a:t>[5:30 · 1m00s] Interpretability: can we explain a decision to the person it affects?</a:t>
             </a:r>
           </a:p>
           <a:p/>
           <a:p>
             <a:r>
-              <a:t>Slow down here. This is the centre of the talk.</a:t>
+              <a:t>The brief asks for two things: explain individual predictions, and the main</a:t>
+            </a:r>
+          </a:p>
+          <a:p>
+            <a:r>
+              <a:t>drivers of the model. Left: one person, explained by logistic and by XGBoost.</a:t>
+            </a:r>
+          </a:p>
+          <a:p>
+            <a:r>
+              <a:t>Red raises risk, green lowers it.</a:t>
             </a:r>
           </a:p>
           <a:p/>
           <a:p>
             <a:r>
-              <a:t>First the framing: selection means being OFFERED support. So the harm is a missed</a:t>
-            </a:r>
-          </a:p>
-          <a:p>
-            <a:r>
-              <a:t>offer, and FNR — equal opportunity — is our primary metric, not FPR.</a:t>
+              <a:t>Then the three routes, because they differ in kind, not degree:</a:t>
+            </a:r>
+          </a:p>
+          <a:p>
+            <a:r>
+              <a:t>Logistic: the coefficients ARE the explanation, plus marginal effects in</a:t>
+            </a:r>
+          </a:p>
+          <a:p>
+            <a:r>
+              <a:t>probability points. No second tool.</a:t>
+            </a:r>
+          </a:p>
+          <a:p>
+            <a:r>
+              <a:t>XGBoost: needs SHAP. A depth-3 surrogate tree only reproduces part of it, so a</a:t>
+            </a:r>
+          </a:p>
+          <a:p>
+            <a:r>
+              <a:t>"simple summary" of XGBoost would mislead.</a:t>
+            </a:r>
+          </a:p>
+          <a:p>
+            <a:r>
+              <a:t>TabICL: no native attribution at all. Only model-agnostic PDP/ICE. That is a</a:t>
+            </a:r>
+          </a:p>
+          <a:p>
+            <a:r>
+              <a:t>deployment cost, and it comes back on the recommendation.</a:t>
             </a:r>
           </a:p>
           <a:p/>
           <a:p>
             <a:r>
-              <a:t>Second, the operating point. We audit at the top-20% rule the product actually</a:t>
-            </a:r>
-          </a:p>
-          <a:p>
-            <a:r>
-              <a:t>ships, not at threshold 0.5. At 0.5 the tool would flag 68% of people. That is not</a:t>
-            </a:r>
-          </a:p>
-          <a:p>
-            <a:r>
-              <a:t>a threshold this product ever applies, and auditing there inflates every gap.</a:t>
-            </a:r>
-          </a:p>
-          <a:p/>
-          <a:p>
-            <a:r>
-              <a:t>The results:</a:t>
-            </a:r>
-          </a:p>
-          <a:p>
-            <a:r>
-              <a:t>— Race: equivalent within ±5 points for all three models by TOST. No race test</a:t>
-            </a:r>
-          </a:p>
-          <a:p>
-            <a:r>
-              <a:t>  survives Holm correction across our 54 tests. Small, and unconfirmed.</a:t>
-            </a:r>
-          </a:p>
-          <a:p>
-            <a:r>
-              <a:t>— Gender: women who ARE re-arrested miss support 10 to 12 points more often.</a:t>
-            </a:r>
-          </a:p>
-          <a:p>
-            <a:r>
-              <a:t>  Significant for every model.</a:t>
-            </a:r>
-          </a:p>
-          <a:p>
-            <a:r>
-              <a:t>— Age: the largest disparity, 23 to 25 points. About 97% of re-arrested people</a:t>
-            </a:r>
-          </a:p>
-          <a:p>
-            <a:r>
-              <a:t>  aged 48+ are never selected. It persists even with the age field held fixed,</a:t>
-            </a:r>
-          </a:p>
-          <a:p>
-            <a:r>
-              <a:t>  because prior record carries age.</a:t>
-            </a:r>
-          </a:p>
-          <a:p/>
-          <a:p>
-            <a:r>
-              <a:t>Say the honest line: not significant does NOT mean fair. That is why we test</a:t>
-            </a:r>
-          </a:p>
-          <a:p>
-            <a:r>
-              <a:t>equivalence, not just difference.</a:t>
+              <a:t>Honest line: SHAP, permutation importance and XPER agree on WHICH variables drive</a:t>
+            </a:r>
+          </a:p>
+          <a:p>
+            <a:r>
+              <a:t>the model, not on their order. Quote the set, not the rank. Appendix A3 and A4</a:t>
+            </a:r>
+          </a:p>
+          <a:p>
+            <a:r>
+              <a:t>have the disagreement and the LIME fidelity check.</a:t>
             </a:r>
           </a:p>
         </p:txBody>
@@ -1898,62 +2119,61 @@
           <a:lstStyle/>
           <a:p>
             <a:r>
-              <a:t>[8:15 · 1m00s] The impossibility result, both sides.</a:t>
+              <a:t>[6:30 · 45s] Stability: would a different sample give the same model?</a:t>
             </a:r>
           </a:p>
           <a:p/>
           <a:p>
             <a:r>
-              <a:t>Our data demonstrates both halves of the theorem within one project.</a:t>
+              <a:t>The course definition: two samples from the same population should give roughly</a:t>
+            </a:r>
+          </a:p>
+          <a:p>
+            <a:r>
+              <a:t>the same model. We refit every model on the same eight bootstrap resamples and</a:t>
+            </a:r>
+          </a:p>
+          <a:p>
+            <a:r>
+              <a:t>compare all 28 pairs.</a:t>
             </a:r>
           </a:p>
           <a:p/>
           <a:p>
             <a:r>
-              <a:t>Race: base rates 0.582 and 0.564 — nearly equal. The theorem does not bind, so</a:t>
-            </a:r>
-          </a:p>
-          <a:p>
-            <a:r>
-              <a:t>those gaps are a property of our models and are fixable.</a:t>
+              <a:t>Logistic drifts least on every one of the 28 pairs, and its selected top 20%</a:t>
+            </a:r>
+          </a:p>
+          <a:p>
+            <a:r>
+              <a:t>changes least. This is one of the two reasons we recommend it.</a:t>
             </a:r>
           </a:p>
           <a:p/>
           <a:p>
             <a:r>
-              <a:t>Gender: 0.591 against 0.454, fourteen points apart. Calibration and equal error</a:t>
-            </a:r>
-          </a:p>
-          <a:p>
-            <a:r>
-              <a:t>rates CANNOT both hold. We have to choose.</a:t>
+              <a:t>Then one person at a time: about one decision in seven flips between refits.</a:t>
+            </a:r>
+          </a:p>
+          <a:p>
+            <a:r>
+              <a:t>Appendix A7 shows why sending those borderline cases to a human would widen the</a:t>
+            </a:r>
+          </a:p>
+          <a:p>
+            <a:r>
+              <a:t>gender gap.</a:t>
             </a:r>
           </a:p>
           <a:p/>
           <a:p>
             <a:r>
-              <a:t>The mechanism is visible in our numbers: every model over-predicts women — mean</a:t>
-            </a:r>
-          </a:p>
-          <a:p>
-            <a:r>
-              <a:t>score 0.52 against an observed 0.454 — yet women are selected less at the top 20%.</a:t>
-            </a:r>
-          </a:p>
-          <a:p/>
-          <a:p>
-            <a:r>
-              <a:t>And for THIS use, the direction matters. In a support programme over-prediction</a:t>
-            </a:r>
-          </a:p>
-          <a:p>
-            <a:r>
-              <a:t>works in women's favour. Recalibrating by gender would select even fewer women and</a:t>
-            </a:r>
-          </a:p>
-          <a:p>
-            <a:r>
-              <a:t>widen the gap. The harm here is the missed offer, not the miscalibration.</a:t>
+              <a:t>Caveat if asked: Jaccard is intersection over union, not the share of people who</a:t>
+            </a:r>
+          </a:p>
+          <a:p>
+            <a:r>
+              <a:t>switch, and refit sensitivity is not validation on a new cohort.</a:t>
             </a:r>
           </a:p>
         </p:txBody>
@@ -2023,50 +2243,92 @@
           <a:lstStyle/>
           <a:p>
             <a:r>
-              <a:t>[9:15 · 1m00s] Where the gender gap comes from.</a:t>
+              <a:t>[7:15 · 1m45s] FINDING TWO. Unequal access to support.</a:t>
             </a:r>
           </a:p>
           <a:p/>
           <a:p>
             <a:r>
-              <a:t>We did not stop at measuring. The course sequence is test, identify the variable,</a:t>
-            </a:r>
-          </a:p>
-          <a:p>
-            <a:r>
-              <a:t>mitigate — and fairness partial dependence names the candidate.</a:t>
+              <a:t>Slow down here. This is the centre of the talk.</a:t>
             </a:r>
           </a:p>
           <a:p/>
           <a:p>
             <a:r>
-              <a:t>Gang affiliation. Cramér's V of 1.0 with gender on the raw field, because it is</a:t>
-            </a:r>
-          </a:p>
-          <a:p>
-            <a:r>
-              <a:t>never recorded for women. It is a measurement artefact about record-keeping, not a</a:t>
-            </a:r>
-          </a:p>
-          <a:p>
-            <a:r>
-              <a:t>behavioural signal about women.</a:t>
+              <a:t>First the framing: selection means being OFFERED support. So the harm is a missed</a:t>
+            </a:r>
+          </a:p>
+          <a:p>
+            <a:r>
+              <a:t>offer, and FNR — equal opportunity — is our primary metric, not FPR.</a:t>
             </a:r>
           </a:p>
           <a:p/>
           <a:p>
             <a:r>
-              <a:t>Dropping it and re-estimating shrinks the gender FNR gap from -0.10 to about zero</a:t>
-            </a:r>
-          </a:p>
-          <a:p>
-            <a:r>
-              <a:t>for logistic — partly by raising men's FNR, so say that too — at roughly 0.014 AUC</a:t>
-            </a:r>
-          </a:p>
-          <a:p>
-            <a:r>
-              <a:t>and 27 to 41 fewer captured re-arrests. Statistical parity is still rejected.</a:t>
+              <a:t>Second, the operating point. We audit at the top-20% rule the product actually</a:t>
+            </a:r>
+          </a:p>
+          <a:p>
+            <a:r>
+              <a:t>ships, not at threshold 0.5. At 0.5 the tool would flag 68% of people. That is not</a:t>
+            </a:r>
+          </a:p>
+          <a:p>
+            <a:r>
+              <a:t>a threshold this product ever applies, and auditing there inflates every gap.</a:t>
+            </a:r>
+          </a:p>
+          <a:p/>
+          <a:p>
+            <a:r>
+              <a:t>The results:</a:t>
+            </a:r>
+          </a:p>
+          <a:p>
+            <a:r>
+              <a:t>— Race: equivalent within ±5 points for all three models by TOST. No race test</a:t>
+            </a:r>
+          </a:p>
+          <a:p>
+            <a:r>
+              <a:t>  survives Holm correction across our 54 tests. Small, and unconfirmed.</a:t>
+            </a:r>
+          </a:p>
+          <a:p>
+            <a:r>
+              <a:t>— Gender: women who ARE re-arrested miss support 10 to 12 points more often.</a:t>
+            </a:r>
+          </a:p>
+          <a:p>
+            <a:r>
+              <a:t>  Significant for every model.</a:t>
+            </a:r>
+          </a:p>
+          <a:p>
+            <a:r>
+              <a:t>— Age: the largest disparity, 23 to 25 points. About 97% of re-arrested people</a:t>
+            </a:r>
+          </a:p>
+          <a:p>
+            <a:r>
+              <a:t>  aged 48+ are never selected. It persists even with the age field held fixed,</a:t>
+            </a:r>
+          </a:p>
+          <a:p>
+            <a:r>
+              <a:t>  because prior record carries age.</a:t>
+            </a:r>
+          </a:p>
+          <a:p/>
+          <a:p>
+            <a:r>
+              <a:t>Say the honest line: not significant does NOT mean fair. That is why we test</a:t>
+            </a:r>
+          </a:p>
+          <a:p>
+            <a:r>
+              <a:t>equivalence, not just difference.</a:t>
             </a:r>
           </a:p>
         </p:txBody>
@@ -5412,7 +5674,7 @@
               </a:defRPr>
             </a:pPr>
             <a:r>
-              <a:t>09 · MITIGATION, VALIDATED</a:t>
+              <a:t>09 · FAIRNESS, SHARPENED</a:t>
             </a:r>
           </a:p>
         </p:txBody>
@@ -5448,7 +5710,7 @@
               </a:defRPr>
             </a:pPr>
             <a:r>
-              <a:t>Selecting and testing the fix on different data</a:t>
+              <a:t>Fairness: probability scores and allocation rules</a:t>
             </a:r>
           </a:p>
         </p:txBody>
@@ -5505,133 +5767,6 @@
         <p:spPr>
           <a:xfrm>
             <a:off x="640080" y="1691640"/>
-            <a:ext cx="5257800" cy="4297680"/>
-          </a:xfrm>
-          <a:prstGeom prst="roundRect">
-            <a:avLst/>
-          </a:prstGeom>
-          <a:solidFill>
-            <a:srgbClr val="143058"/>
-          </a:solidFill>
-          <a:ln>
-            <a:solidFill>
-              <a:srgbClr val="828FA0"/>
-            </a:solidFill>
-          </a:ln>
-        </p:spPr>
-        <p:style>
-          <a:lnRef idx="1">
-            <a:schemeClr val="accent1"/>
-          </a:lnRef>
-          <a:fillRef idx="3">
-            <a:schemeClr val="accent1"/>
-          </a:fillRef>
-          <a:effectRef idx="2">
-            <a:schemeClr val="accent1"/>
-          </a:effectRef>
-          <a:fontRef idx="minor">
-            <a:schemeClr val="lt1"/>
-          </a:fontRef>
-        </p:style>
-        <p:txBody>
-          <a:bodyPr rtlCol="0" anchor="ctr"/>
-          <a:lstStyle/>
-          <a:p>
-            <a:pPr algn="ctr"/>
-          </a:p>
-        </p:txBody>
-      </p:sp>
-      <p:sp>
-        <p:nvSpPr>
-          <p:cNvPr id="6" name="TextBox 5"/>
-          <p:cNvSpPr txBox="1"/>
-          <p:nvPr/>
-        </p:nvSpPr>
-        <p:spPr>
-          <a:xfrm>
-            <a:off x="868680" y="1965960"/>
-            <a:ext cx="4800600" cy="365760"/>
-          </a:xfrm>
-          <a:prstGeom prst="rect">
-            <a:avLst/>
-          </a:prstGeom>
-          <a:noFill/>
-        </p:spPr>
-        <p:txBody>
-          <a:bodyPr wrap="square" anchor="t">
-            <a:spAutoFit/>
-          </a:bodyPr>
-          <a:lstStyle/>
-          <a:p>
-            <a:pPr algn="ctr">
-              <a:defRPr sz="2000" b="1">
-                <a:solidFill>
-                  <a:srgbClr val="828FA0"/>
-                </a:solidFill>
-                <a:latin typeface="Aptos"/>
-              </a:defRPr>
-            </a:pPr>
-            <a:r>
-              <a:t>IN-SAMPLE</a:t>
-            </a:r>
-          </a:p>
-        </p:txBody>
-      </p:sp>
-      <p:sp>
-        <p:nvSpPr>
-          <p:cNvPr id="7" name="TextBox 6"/>
-          <p:cNvSpPr txBox="1"/>
-          <p:nvPr/>
-        </p:nvSpPr>
-        <p:spPr>
-          <a:xfrm>
-            <a:off x="960119" y="2679192"/>
-            <a:ext cx="4617720" cy="3063240"/>
-          </a:xfrm>
-          <a:prstGeom prst="rect">
-            <a:avLst/>
-          </a:prstGeom>
-          <a:noFill/>
-        </p:spPr>
-        <p:txBody>
-          <a:bodyPr wrap="square" anchor="t">
-            <a:spAutoFit/>
-          </a:bodyPr>
-          <a:lstStyle/>
-          <a:p>
-            <a:pPr algn="ctr">
-              <a:defRPr sz="1500" b="0">
-                <a:solidFill>
-                  <a:srgbClr val="F0F4F8"/>
-                </a:solidFill>
-                <a:latin typeface="Aptos"/>
-              </a:defRPr>
-            </a:pPr>
-            <a:r>
-              <a:t>Candidate chosen AND scored on the same cohort</a:t>
-            </a:r>
-            <a:br/>
-            <a:br/>
-            <a:r>
-              <a:t>Equal-opportunity p 0.000 → 1.00</a:t>
-            </a:r>
-            <a:br/>
-            <a:br/>
-            <a:r>
-              <a:t>An upper bound, not evidence of generalisation</a:t>
-            </a:r>
-          </a:p>
-        </p:txBody>
-      </p:sp>
-      <p:sp>
-        <p:nvSpPr>
-          <p:cNvPr id="8" name="Rounded Rectangle 7"/>
-          <p:cNvSpPr/>
-          <p:nvPr/>
-        </p:nvSpPr>
-        <p:spPr>
-          <a:xfrm>
-            <a:off x="6263640" y="1691640"/>
             <a:ext cx="5257800" cy="4297680"/>
           </a:xfrm>
           <a:prstGeom prst="roundRect">
@@ -5670,6 +5805,133 @@
       </p:sp>
       <p:sp>
         <p:nvSpPr>
+          <p:cNvPr id="6" name="TextBox 5"/>
+          <p:cNvSpPr txBox="1"/>
+          <p:nvPr/>
+        </p:nvSpPr>
+        <p:spPr>
+          <a:xfrm>
+            <a:off x="868680" y="1965960"/>
+            <a:ext cx="4800600" cy="365760"/>
+          </a:xfrm>
+          <a:prstGeom prst="rect">
+            <a:avLst/>
+          </a:prstGeom>
+          <a:noFill/>
+        </p:spPr>
+        <p:txBody>
+          <a:bodyPr wrap="square" anchor="t">
+            <a:spAutoFit/>
+          </a:bodyPr>
+          <a:lstStyle/>
+          <a:p>
+            <a:pPr algn="ctr">
+              <a:defRPr sz="2000" b="1">
+                <a:solidFill>
+                  <a:srgbClr val="00B4B4"/>
+                </a:solidFill>
+                <a:latin typeface="Aptos"/>
+              </a:defRPr>
+            </a:pPr>
+            <a:r>
+              <a:t>SCORE CALIBRATION</a:t>
+            </a:r>
+          </a:p>
+        </p:txBody>
+      </p:sp>
+      <p:sp>
+        <p:nvSpPr>
+          <p:cNvPr id="7" name="TextBox 6"/>
+          <p:cNvSpPr txBox="1"/>
+          <p:nvPr/>
+        </p:nvSpPr>
+        <p:spPr>
+          <a:xfrm>
+            <a:off x="960119" y="2679192"/>
+            <a:ext cx="4617720" cy="3063240"/>
+          </a:xfrm>
+          <a:prstGeom prst="rect">
+            <a:avLst/>
+          </a:prstGeom>
+          <a:noFill/>
+        </p:spPr>
+        <p:txBody>
+          <a:bodyPr wrap="square" anchor="t">
+            <a:spAutoFit/>
+          </a:bodyPr>
+          <a:lstStyle/>
+          <a:p>
+            <a:pPr algn="ctr">
+              <a:defRPr sz="1500" b="0">
+                <a:solidFill>
+                  <a:srgbClr val="F0F4F8"/>
+                </a:solidFill>
+                <a:latin typeface="Aptos"/>
+              </a:defRPr>
+            </a:pPr>
+            <a:r>
+              <a:t>Women are over-predicted by every model: mean score 0.52 vs observed 0.45</a:t>
+            </a:r>
+            <a:br/>
+            <a:br/>
+            <a:r>
+              <a:t>Yet they are selected less at the top 20%</a:t>
+            </a:r>
+            <a:br/>
+            <a:br/>
+            <a:r>
+              <a:t>For support, over-prediction helps women: recalibrating would widen the FNR gap</a:t>
+            </a:r>
+          </a:p>
+        </p:txBody>
+      </p:sp>
+      <p:sp>
+        <p:nvSpPr>
+          <p:cNvPr id="8" name="Rounded Rectangle 7"/>
+          <p:cNvSpPr/>
+          <p:nvPr/>
+        </p:nvSpPr>
+        <p:spPr>
+          <a:xfrm>
+            <a:off x="6263640" y="1691640"/>
+            <a:ext cx="5257800" cy="4297680"/>
+          </a:xfrm>
+          <a:prstGeom prst="roundRect">
+            <a:avLst/>
+          </a:prstGeom>
+          <a:solidFill>
+            <a:srgbClr val="143058"/>
+          </a:solidFill>
+          <a:ln>
+            <a:solidFill>
+              <a:srgbClr val="D64343"/>
+            </a:solidFill>
+          </a:ln>
+        </p:spPr>
+        <p:style>
+          <a:lnRef idx="1">
+            <a:schemeClr val="accent1"/>
+          </a:lnRef>
+          <a:fillRef idx="3">
+            <a:schemeClr val="accent1"/>
+          </a:fillRef>
+          <a:effectRef idx="2">
+            <a:schemeClr val="accent1"/>
+          </a:effectRef>
+          <a:fontRef idx="minor">
+            <a:schemeClr val="lt1"/>
+          </a:fontRef>
+        </p:style>
+        <p:txBody>
+          <a:bodyPr rtlCol="0" anchor="ctr"/>
+          <a:lstStyle/>
+          <a:p>
+            <a:pPr algn="ctr"/>
+          </a:p>
+        </p:txBody>
+      </p:sp>
+      <p:sp>
+        <p:nvSpPr>
           <p:cNvPr id="9" name="TextBox 8"/>
           <p:cNvSpPr txBox="1"/>
           <p:nvPr/>
@@ -5693,13 +5955,13 @@
             <a:pPr algn="ctr">
               <a:defRPr sz="2000" b="1">
                 <a:solidFill>
-                  <a:srgbClr val="00B4B4"/>
-                </a:solidFill>
-                <a:latin typeface="Aptos"/>
-              </a:defRPr>
-            </a:pPr>
-            <a:r>
-              <a:t>OUT-OF-FOLD</a:t>
+                  <a:srgbClr val="D64343"/>
+                </a:solidFill>
+                <a:latin typeface="Aptos"/>
+              </a:defRPr>
+            </a:pPr>
+            <a:r>
+              <a:t>ALLOCATION ERRORS</a:t>
             </a:r>
           </a:p>
         </p:txBody>
@@ -5735,17 +5997,17 @@
               </a:defRPr>
             </a:pPr>
             <a:r>
-              <a:t>Candidate re-selected inside each training fold, scored on held-out folds</a:t>
+              <a:t>FPR, TPR and selection rates depend on policy</a:t>
             </a:r>
             <a:br/>
             <a:br/>
             <a:r>
-              <a:t>Same variable selected in 100% of folds</a:t>
+              <a:t>Changing thresholds leaves probabilities unchanged</a:t>
             </a:r>
             <a:br/>
             <a:br/>
             <a:r>
-              <a:t>Gender FNR gap -0.122 → -0.035  ·  AUC -0.010</a:t>
+              <a:t>Our threshold frontier uses evaluation labels: illustrative, not validated</a:t>
             </a:r>
           </a:p>
         </p:txBody>
@@ -5753,42 +6015,6 @@
       <p:sp>
         <p:nvSpPr>
           <p:cNvPr id="11" name="TextBox 10"/>
-          <p:cNvSpPr txBox="1"/>
-          <p:nvPr/>
-        </p:nvSpPr>
-        <p:spPr>
-          <a:xfrm>
-            <a:off x="914400" y="6236208"/>
-            <a:ext cx="10058400" cy="274320"/>
-          </a:xfrm>
-          <a:prstGeom prst="rect">
-            <a:avLst/>
-          </a:prstGeom>
-          <a:noFill/>
-        </p:spPr>
-        <p:txBody>
-          <a:bodyPr wrap="square" anchor="t">
-            <a:spAutoFit/>
-          </a:bodyPr>
-          <a:lstStyle/>
-          <a:p>
-            <a:pPr algn="ctr">
-              <a:defRPr sz="1100" b="1">
-                <a:solidFill>
-                  <a:srgbClr val="FB8500"/>
-                </a:solidFill>
-                <a:latin typeface="Aptos"/>
-              </a:defRPr>
-            </a:pPr>
-            <a:r>
-              <a:t>The evaluation cohort is never touched. About 70% of the gap closes out of fold, for roughly one AUC point.</a:t>
-            </a:r>
-          </a:p>
-        </p:txBody>
-      </p:sp>
-      <p:sp>
-        <p:nvSpPr>
-          <p:cNvPr id="12" name="TextBox 11"/>
           <p:cNvSpPr txBox="1"/>
           <p:nvPr/>
         </p:nvSpPr>
@@ -5824,7 +6050,7 @@
       </p:sp>
       <p:sp>
         <p:nvSpPr>
-          <p:cNvPr id="13" name="TextBox 12"/>
+          <p:cNvPr id="12" name="TextBox 11"/>
           <p:cNvSpPr txBox="1"/>
           <p:nvPr/>
         </p:nvSpPr>
@@ -5915,7 +6141,7 @@
               </a:defRPr>
             </a:pPr>
             <a:r>
-              <a:t>10 · TRADE-OFFS ACROSS FOUR DIMENSIONS</a:t>
+              <a:t>10 · FAIRNESS INTERPRETABILITY (FPDP)</a:t>
             </a:r>
           </a:p>
         </p:txBody>
@@ -5951,7 +6177,7 @@
               </a:defRPr>
             </a:pPr>
             <a:r>
-              <a:t>Which model should the client deploy?</a:t>
+              <a:t>Where does the gender gap come from?</a:t>
             </a:r>
           </a:p>
         </p:txBody>
@@ -6001,7 +6227,7 @@
       </p:sp>
       <p:pic>
         <p:nvPicPr>
-          <p:cNvPr id="5" name="Picture 4" descr="tradeoff_matrix.png"/>
+          <p:cNvPr id="5" name="Picture 4" descr="fpdp_gender.png"/>
           <p:cNvPicPr>
             <a:picLocks noChangeAspect="1"/>
           </p:cNvPicPr>
@@ -6015,8 +6241,8 @@
         </p:blipFill>
         <p:spPr>
           <a:xfrm>
-            <a:off x="2881094" y="1481328"/>
-            <a:ext cx="6399331" cy="4782312"/>
+            <a:off x="320040" y="1508760"/>
+            <a:ext cx="7680960" cy="4743933"/>
           </a:xfrm>
           <a:prstGeom prst="rect">
             <a:avLst/>
@@ -6025,7 +6251,175 @@
       </p:pic>
       <p:sp>
         <p:nvSpPr>
-          <p:cNvPr id="6" name="TextBox 5"/>
+          <p:cNvPr id="6" name="Rounded Rectangle 5"/>
+          <p:cNvSpPr/>
+          <p:nvPr/>
+        </p:nvSpPr>
+        <p:spPr>
+          <a:xfrm>
+            <a:off x="8229600" y="1508760"/>
+            <a:ext cx="3611880" cy="4572000"/>
+          </a:xfrm>
+          <a:prstGeom prst="roundRect">
+            <a:avLst/>
+          </a:prstGeom>
+          <a:solidFill>
+            <a:srgbClr val="143058"/>
+          </a:solidFill>
+          <a:ln>
+            <a:solidFill>
+              <a:srgbClr val="D64343"/>
+            </a:solidFill>
+          </a:ln>
+        </p:spPr>
+        <p:style>
+          <a:lnRef idx="1">
+            <a:schemeClr val="accent1"/>
+          </a:lnRef>
+          <a:fillRef idx="3">
+            <a:schemeClr val="accent1"/>
+          </a:fillRef>
+          <a:effectRef idx="2">
+            <a:schemeClr val="accent1"/>
+          </a:effectRef>
+          <a:fontRef idx="minor">
+            <a:schemeClr val="lt1"/>
+          </a:fontRef>
+        </p:style>
+        <p:txBody>
+          <a:bodyPr rtlCol="0" anchor="ctr"/>
+          <a:lstStyle/>
+          <a:p>
+            <a:pPr algn="ctr"/>
+          </a:p>
+        </p:txBody>
+      </p:sp>
+      <p:sp>
+        <p:nvSpPr>
+          <p:cNvPr id="7" name="TextBox 6"/>
+          <p:cNvSpPr txBox="1"/>
+          <p:nvPr/>
+        </p:nvSpPr>
+        <p:spPr>
+          <a:xfrm>
+            <a:off x="8458200" y="1783080"/>
+            <a:ext cx="3154680" cy="365760"/>
+          </a:xfrm>
+          <a:prstGeom prst="rect">
+            <a:avLst/>
+          </a:prstGeom>
+          <a:noFill/>
+        </p:spPr>
+        <p:txBody>
+          <a:bodyPr wrap="square" anchor="t">
+            <a:spAutoFit/>
+          </a:bodyPr>
+          <a:lstStyle/>
+          <a:p>
+            <a:pPr algn="ctr">
+              <a:defRPr sz="2000" b="1">
+                <a:solidFill>
+                  <a:srgbClr val="D64343"/>
+                </a:solidFill>
+                <a:latin typeface="Aptos"/>
+              </a:defRPr>
+            </a:pPr>
+            <a:r>
+              <a:t>CANDIDATE: GANG</a:t>
+            </a:r>
+          </a:p>
+        </p:txBody>
+      </p:sp>
+      <p:sp>
+        <p:nvSpPr>
+          <p:cNvPr id="8" name="TextBox 7"/>
+          <p:cNvSpPr txBox="1"/>
+          <p:nvPr/>
+        </p:nvSpPr>
+        <p:spPr>
+          <a:xfrm>
+            <a:off x="8549640" y="2496312"/>
+            <a:ext cx="2971800" cy="3337560"/>
+          </a:xfrm>
+          <a:prstGeom prst="rect">
+            <a:avLst/>
+          </a:prstGeom>
+          <a:noFill/>
+        </p:spPr>
+        <p:txBody>
+          <a:bodyPr wrap="square" anchor="t">
+            <a:spAutoFit/>
+          </a:bodyPr>
+          <a:lstStyle/>
+          <a:p>
+            <a:pPr algn="ctr">
+              <a:defRPr sz="1500" b="0">
+                <a:solidFill>
+                  <a:srgbClr val="F0F4F8"/>
+                </a:solidFill>
+                <a:latin typeface="Aptos"/>
+              </a:defRPr>
+            </a:pPr>
+            <a:r>
+              <a:t>Never recorded for women; imputed as "No"</a:t>
+            </a:r>
+            <a:br/>
+            <a:br/>
+            <a:r>
+              <a:t>Drop + re-estimate (logistic): FNR gap -0.096 → +0.000</a:t>
+            </a:r>
+            <a:br/>
+            <a:br/>
+            <a:r>
+              <a:t>Women FNR 0.80 → 0.72; men 0.70 → 0.72</a:t>
+            </a:r>
+            <a:br/>
+            <a:br/>
+            <a:r>
+              <a:t>AUC −0.014; 27 fewer re-arrests captured</a:t>
+            </a:r>
+          </a:p>
+        </p:txBody>
+      </p:sp>
+      <p:sp>
+        <p:nvSpPr>
+          <p:cNvPr id="9" name="TextBox 8"/>
+          <p:cNvSpPr txBox="1"/>
+          <p:nvPr/>
+        </p:nvSpPr>
+        <p:spPr>
+          <a:xfrm>
+            <a:off x="914400" y="6236208"/>
+            <a:ext cx="10058400" cy="274320"/>
+          </a:xfrm>
+          <a:prstGeom prst="rect">
+            <a:avLst/>
+          </a:prstGeom>
+          <a:noFill/>
+        </p:spPr>
+        <p:txBody>
+          <a:bodyPr wrap="square" anchor="t">
+            <a:spAutoFit/>
+          </a:bodyPr>
+          <a:lstStyle/>
+          <a:p>
+            <a:pPr algn="ctr">
+              <a:defRPr sz="1100" b="1">
+                <a:solidFill>
+                  <a:srgbClr val="FB8500"/>
+                </a:solidFill>
+                <a:latin typeface="Aptos"/>
+              </a:defRPr>
+            </a:pPr>
+            <a:r>
+              <a:t>Logistic FPDP is flat under a top-20% rule (a constant shifts every score equally), so it measures removing the feature, not a value.</a:t>
+            </a:r>
+          </a:p>
+        </p:txBody>
+      </p:sp>
+      <p:sp>
+        <p:nvSpPr>
+          <p:cNvPr id="10" name="TextBox 9"/>
           <p:cNvSpPr txBox="1"/>
           <p:nvPr/>
         </p:nvSpPr>
@@ -6061,7 +6455,7 @@
       </p:sp>
       <p:sp>
         <p:nvSpPr>
-          <p:cNvPr id="7" name="TextBox 6"/>
+          <p:cNvPr id="11" name="TextBox 10"/>
           <p:cNvSpPr txBox="1"/>
           <p:nvPr/>
         </p:nvSpPr>
@@ -6152,7 +6546,7 @@
               </a:defRPr>
             </a:pPr>
             <a:r>
-              <a:t>11 · RECOMMENDATION</a:t>
+              <a:t>11 · MITIGATION, VALIDATED</a:t>
             </a:r>
           </a:p>
         </p:txBody>
@@ -6188,7 +6582,7 @@
               </a:defRPr>
             </a:pPr>
             <a:r>
-              <a:t>Pilot logistic regression; run XGBoost as the challenger</a:t>
+              <a:t>Selecting and testing the fix on different data</a:t>
             </a:r>
           </a:p>
         </p:txBody>
@@ -6244,8 +6638,135 @@
         </p:nvSpPr>
         <p:spPr>
           <a:xfrm>
-            <a:off x="640080" y="1645920"/>
-            <a:ext cx="3520440" cy="4251960"/>
+            <a:off x="640080" y="1691640"/>
+            <a:ext cx="5257800" cy="4297680"/>
+          </a:xfrm>
+          <a:prstGeom prst="roundRect">
+            <a:avLst/>
+          </a:prstGeom>
+          <a:solidFill>
+            <a:srgbClr val="143058"/>
+          </a:solidFill>
+          <a:ln>
+            <a:solidFill>
+              <a:srgbClr val="828FA0"/>
+            </a:solidFill>
+          </a:ln>
+        </p:spPr>
+        <p:style>
+          <a:lnRef idx="1">
+            <a:schemeClr val="accent1"/>
+          </a:lnRef>
+          <a:fillRef idx="3">
+            <a:schemeClr val="accent1"/>
+          </a:fillRef>
+          <a:effectRef idx="2">
+            <a:schemeClr val="accent1"/>
+          </a:effectRef>
+          <a:fontRef idx="minor">
+            <a:schemeClr val="lt1"/>
+          </a:fontRef>
+        </p:style>
+        <p:txBody>
+          <a:bodyPr rtlCol="0" anchor="ctr"/>
+          <a:lstStyle/>
+          <a:p>
+            <a:pPr algn="ctr"/>
+          </a:p>
+        </p:txBody>
+      </p:sp>
+      <p:sp>
+        <p:nvSpPr>
+          <p:cNvPr id="6" name="TextBox 5"/>
+          <p:cNvSpPr txBox="1"/>
+          <p:nvPr/>
+        </p:nvSpPr>
+        <p:spPr>
+          <a:xfrm>
+            <a:off x="868680" y="1965960"/>
+            <a:ext cx="4800600" cy="365760"/>
+          </a:xfrm>
+          <a:prstGeom prst="rect">
+            <a:avLst/>
+          </a:prstGeom>
+          <a:noFill/>
+        </p:spPr>
+        <p:txBody>
+          <a:bodyPr wrap="square" anchor="t">
+            <a:spAutoFit/>
+          </a:bodyPr>
+          <a:lstStyle/>
+          <a:p>
+            <a:pPr algn="ctr">
+              <a:defRPr sz="2000" b="1">
+                <a:solidFill>
+                  <a:srgbClr val="828FA0"/>
+                </a:solidFill>
+                <a:latin typeface="Aptos"/>
+              </a:defRPr>
+            </a:pPr>
+            <a:r>
+              <a:t>IN-SAMPLE</a:t>
+            </a:r>
+          </a:p>
+        </p:txBody>
+      </p:sp>
+      <p:sp>
+        <p:nvSpPr>
+          <p:cNvPr id="7" name="TextBox 6"/>
+          <p:cNvSpPr txBox="1"/>
+          <p:nvPr/>
+        </p:nvSpPr>
+        <p:spPr>
+          <a:xfrm>
+            <a:off x="960119" y="2679192"/>
+            <a:ext cx="4617720" cy="3063240"/>
+          </a:xfrm>
+          <a:prstGeom prst="rect">
+            <a:avLst/>
+          </a:prstGeom>
+          <a:noFill/>
+        </p:spPr>
+        <p:txBody>
+          <a:bodyPr wrap="square" anchor="t">
+            <a:spAutoFit/>
+          </a:bodyPr>
+          <a:lstStyle/>
+          <a:p>
+            <a:pPr algn="ctr">
+              <a:defRPr sz="1500" b="0">
+                <a:solidFill>
+                  <a:srgbClr val="F0F4F8"/>
+                </a:solidFill>
+                <a:latin typeface="Aptos"/>
+              </a:defRPr>
+            </a:pPr>
+            <a:r>
+              <a:t>Candidate chosen AND scored on the same cohort</a:t>
+            </a:r>
+            <a:br/>
+            <a:br/>
+            <a:r>
+              <a:t>Equal-opportunity p 0.000 → 1.00</a:t>
+            </a:r>
+            <a:br/>
+            <a:br/>
+            <a:r>
+              <a:t>An upper bound, not evidence of generalisation</a:t>
+            </a:r>
+          </a:p>
+        </p:txBody>
+      </p:sp>
+      <p:sp>
+        <p:nvSpPr>
+          <p:cNvPr id="8" name="Rounded Rectangle 7"/>
+          <p:cNvSpPr/>
+          <p:nvPr/>
+        </p:nvSpPr>
+        <p:spPr>
+          <a:xfrm>
+            <a:off x="6263640" y="1691640"/>
+            <a:ext cx="5257800" cy="4297680"/>
           </a:xfrm>
           <a:prstGeom prst="roundRect">
             <a:avLst/>
@@ -6283,14 +6804,14 @@
       </p:sp>
       <p:sp>
         <p:nvSpPr>
-          <p:cNvPr id="6" name="TextBox 5"/>
-          <p:cNvSpPr txBox="1"/>
-          <p:nvPr/>
-        </p:nvSpPr>
-        <p:spPr>
-          <a:xfrm>
-            <a:off x="868680" y="1920240"/>
-            <a:ext cx="3063240" cy="365760"/>
+          <p:cNvPr id="9" name="TextBox 8"/>
+          <p:cNvSpPr txBox="1"/>
+          <p:nvPr/>
+        </p:nvSpPr>
+        <p:spPr>
+          <a:xfrm>
+            <a:off x="6492240" y="1965960"/>
+            <a:ext cx="4800600" cy="365760"/>
           </a:xfrm>
           <a:prstGeom prst="rect">
             <a:avLst/>
@@ -6312,21 +6833,21 @@
               </a:defRPr>
             </a:pPr>
             <a:r>
-              <a:t>WHY LOGISTIC</a:t>
-            </a:r>
-          </a:p>
-        </p:txBody>
-      </p:sp>
-      <p:sp>
-        <p:nvSpPr>
-          <p:cNvPr id="7" name="TextBox 6"/>
-          <p:cNvSpPr txBox="1"/>
-          <p:nvPr/>
-        </p:nvSpPr>
-        <p:spPr>
-          <a:xfrm>
-            <a:off x="960119" y="2633472"/>
-            <a:ext cx="2880360" cy="3017520"/>
+              <a:t>OUT-OF-FOLD</a:t>
+            </a:r>
+          </a:p>
+        </p:txBody>
+      </p:sp>
+      <p:sp>
+        <p:nvSpPr>
+          <p:cNvPr id="10" name="TextBox 9"/>
+          <p:cNvSpPr txBox="1"/>
+          <p:nvPr/>
+        </p:nvSpPr>
+        <p:spPr>
+          <a:xfrm>
+            <a:off x="6583679" y="2679192"/>
+            <a:ext cx="4617720" cy="3063240"/>
           </a:xfrm>
           <a:prstGeom prst="rect">
             <a:avLst/>
@@ -6348,300 +6869,31 @@
               </a:defRPr>
             </a:pPr>
             <a:r>
-              <a:t>Native, coefficient-level explanations — no second tool</a:t>
+              <a:t>Candidate re-selected inside each training fold, scored on held-out folds</a:t>
             </a:r>
             <a:br/>
             <a:br/>
             <a:r>
-              <a:t>Lower refit drift on all 28 pairs (0.0322 vs 0.0351)</a:t>
+              <a:t>Same variable selected in 100% of folds</a:t>
             </a:r>
             <a:br/>
             <a:br/>
             <a:r>
-              <a:t>More stable selected set (J 0.772 vs 0.747)</a:t>
-            </a:r>
-            <a:br/>
-            <a:br/>
-            <a:r>
-              <a:t>~9× faster</a:t>
-            </a:r>
-          </a:p>
-        </p:txBody>
-      </p:sp>
-      <p:sp>
-        <p:nvSpPr>
-          <p:cNvPr id="8" name="Rounded Rectangle 7"/>
-          <p:cNvSpPr/>
-          <p:nvPr/>
-        </p:nvSpPr>
-        <p:spPr>
-          <a:xfrm>
-            <a:off x="4343400" y="1645920"/>
-            <a:ext cx="3520440" cy="4251960"/>
-          </a:xfrm>
-          <a:prstGeom prst="roundRect">
-            <a:avLst/>
-          </a:prstGeom>
-          <a:solidFill>
-            <a:srgbClr val="143058"/>
-          </a:solidFill>
-          <a:ln>
-            <a:solidFill>
-              <a:srgbClr val="D64343"/>
-            </a:solidFill>
-          </a:ln>
-        </p:spPr>
-        <p:style>
-          <a:lnRef idx="1">
-            <a:schemeClr val="accent1"/>
-          </a:lnRef>
-          <a:fillRef idx="3">
-            <a:schemeClr val="accent1"/>
-          </a:fillRef>
-          <a:effectRef idx="2">
-            <a:schemeClr val="accent1"/>
-          </a:effectRef>
-          <a:fontRef idx="minor">
-            <a:schemeClr val="lt1"/>
-          </a:fontRef>
-        </p:style>
-        <p:txBody>
-          <a:bodyPr rtlCol="0" anchor="ctr"/>
-          <a:lstStyle/>
-          <a:p>
-            <a:pPr algn="ctr"/>
-          </a:p>
-        </p:txBody>
-      </p:sp>
-      <p:sp>
-        <p:nvSpPr>
-          <p:cNvPr id="9" name="TextBox 8"/>
-          <p:cNvSpPr txBox="1"/>
-          <p:nvPr/>
-        </p:nvSpPr>
-        <p:spPr>
-          <a:xfrm>
-            <a:off x="4572000" y="1920240"/>
-            <a:ext cx="3063240" cy="365760"/>
-          </a:xfrm>
-          <a:prstGeom prst="rect">
-            <a:avLst/>
-          </a:prstGeom>
-          <a:noFill/>
-        </p:spPr>
-        <p:txBody>
-          <a:bodyPr wrap="square" anchor="t">
-            <a:spAutoFit/>
-          </a:bodyPr>
-          <a:lstStyle/>
-          <a:p>
-            <a:pPr algn="ctr">
-              <a:defRPr sz="2000" b="1">
-                <a:solidFill>
-                  <a:srgbClr val="D64343"/>
-                </a:solidFill>
-                <a:latin typeface="Aptos"/>
-              </a:defRPr>
-            </a:pPr>
-            <a:r>
-              <a:t>WHAT WE GIVE UP</a:t>
-            </a:r>
-          </a:p>
-        </p:txBody>
-      </p:sp>
-      <p:sp>
-        <p:nvSpPr>
-          <p:cNvPr id="10" name="TextBox 9"/>
-          <p:cNvSpPr txBox="1"/>
-          <p:nvPr/>
-        </p:nvSpPr>
-        <p:spPr>
-          <a:xfrm>
-            <a:off x="4663440" y="2633472"/>
-            <a:ext cx="2880360" cy="3017520"/>
-          </a:xfrm>
-          <a:prstGeom prst="rect">
-            <a:avLst/>
-          </a:prstGeom>
-          <a:noFill/>
-        </p:spPr>
-        <p:txBody>
-          <a:bodyPr wrap="square" anchor="t">
-            <a:spAutoFit/>
-          </a:bodyPr>
-          <a:lstStyle/>
-          <a:p>
-            <a:pPr algn="ctr">
-              <a:defRPr sz="1500" b="0">
-                <a:solidFill>
-                  <a:srgbClr val="F0F4F8"/>
-                </a:solidFill>
-                <a:latin typeface="Aptos"/>
-              </a:defRPr>
-            </a:pPr>
-            <a:r>
-              <a:t>XGBoost AUC edge +0.0025 and Brier −0.0010</a:t>
-            </a:r>
-            <a:br/>
-            <a:br/>
-            <a:r>
-              <a:t>Calibration is a tie, not a loss: both indistinguishable from perfect</a:t>
-            </a:r>
-            <a:br/>
-            <a:br/>
-            <a:r>
-              <a:t>Captured re-arrests: interval 29 to 0 includes 0</a:t>
-            </a:r>
-            <a:br/>
-            <a:br/>
-            <a:r>
-              <a:t>Significant, but not at the operating point</a:t>
-            </a:r>
-          </a:p>
-        </p:txBody>
-      </p:sp>
-      <p:sp>
-        <p:nvSpPr>
-          <p:cNvPr id="11" name="Rounded Rectangle 10"/>
-          <p:cNvSpPr/>
-          <p:nvPr/>
-        </p:nvSpPr>
-        <p:spPr>
-          <a:xfrm>
-            <a:off x="8046720" y="1645920"/>
-            <a:ext cx="3520440" cy="4251960"/>
-          </a:xfrm>
-          <a:prstGeom prst="roundRect">
-            <a:avLst/>
-          </a:prstGeom>
-          <a:solidFill>
-            <a:srgbClr val="143058"/>
-          </a:solidFill>
-          <a:ln>
-            <a:solidFill>
-              <a:srgbClr val="7B2CBF"/>
-            </a:solidFill>
-          </a:ln>
-        </p:spPr>
-        <p:style>
-          <a:lnRef idx="1">
-            <a:schemeClr val="accent1"/>
-          </a:lnRef>
-          <a:fillRef idx="3">
-            <a:schemeClr val="accent1"/>
-          </a:fillRef>
-          <a:effectRef idx="2">
-            <a:schemeClr val="accent1"/>
-          </a:effectRef>
-          <a:fontRef idx="minor">
-            <a:schemeClr val="lt1"/>
-          </a:fontRef>
-        </p:style>
-        <p:txBody>
-          <a:bodyPr rtlCol="0" anchor="ctr"/>
-          <a:lstStyle/>
-          <a:p>
-            <a:pPr algn="ctr"/>
-          </a:p>
-        </p:txBody>
-      </p:sp>
-      <p:sp>
-        <p:nvSpPr>
-          <p:cNvPr id="12" name="TextBox 11"/>
-          <p:cNvSpPr txBox="1"/>
-          <p:nvPr/>
-        </p:nvSpPr>
-        <p:spPr>
-          <a:xfrm>
-            <a:off x="8275320" y="1920240"/>
-            <a:ext cx="3063240" cy="365760"/>
-          </a:xfrm>
-          <a:prstGeom prst="rect">
-            <a:avLst/>
-          </a:prstGeom>
-          <a:noFill/>
-        </p:spPr>
-        <p:txBody>
-          <a:bodyPr wrap="square" anchor="t">
-            <a:spAutoFit/>
-          </a:bodyPr>
-          <a:lstStyle/>
-          <a:p>
-            <a:pPr algn="ctr">
-              <a:defRPr sz="2000" b="1">
-                <a:solidFill>
-                  <a:srgbClr val="7B2CBF"/>
-                </a:solidFill>
-                <a:latin typeface="Aptos"/>
-              </a:defRPr>
-            </a:pPr>
-            <a:r>
-              <a:t>WHAT REVERSES IT</a:t>
-            </a:r>
-          </a:p>
-        </p:txBody>
-      </p:sp>
-      <p:sp>
-        <p:nvSpPr>
-          <p:cNvPr id="13" name="TextBox 12"/>
-          <p:cNvSpPr txBox="1"/>
-          <p:nvPr/>
-        </p:nvSpPr>
-        <p:spPr>
-          <a:xfrm>
-            <a:off x="8366760" y="2633472"/>
-            <a:ext cx="2880360" cy="3017520"/>
-          </a:xfrm>
-          <a:prstGeom prst="rect">
-            <a:avLst/>
-          </a:prstGeom>
-          <a:noFill/>
-        </p:spPr>
-        <p:txBody>
-          <a:bodyPr wrap="square" anchor="t">
-            <a:spAutoFit/>
-          </a:bodyPr>
-          <a:lstStyle/>
-          <a:p>
-            <a:pPr algn="ctr">
-              <a:defRPr sz="1500" b="0">
-                <a:solidFill>
-                  <a:srgbClr val="F0F4F8"/>
-                </a:solidFill>
-                <a:latin typeface="Aptos"/>
-              </a:defRPr>
-            </a:pPr>
-            <a:r>
-              <a:t>The score is quoted numerically to supervisees</a:t>
-            </a:r>
-            <a:br/>
-            <a:br/>
-            <a:r>
-              <a:t>Capacity large enough that +12 offers matters</a:t>
-            </a:r>
-            <a:br/>
-            <a:br/>
-            <a:r>
-              <a:t>A feature set that widens the margin</a:t>
-            </a:r>
-            <a:br/>
-            <a:br/>
-            <a:r>
-              <a:t>Then: promote the challenger</a:t>
-            </a:r>
-          </a:p>
-        </p:txBody>
-      </p:sp>
-      <p:sp>
-        <p:nvSpPr>
-          <p:cNvPr id="14" name="TextBox 13"/>
-          <p:cNvSpPr txBox="1"/>
-          <p:nvPr/>
-        </p:nvSpPr>
-        <p:spPr>
-          <a:xfrm>
-            <a:off x="731520" y="6172200"/>
-            <a:ext cx="10698480" cy="365760"/>
+              <a:t>Gender FNR gap -0.122 → -0.035  ·  AUC -0.010</a:t>
+            </a:r>
+          </a:p>
+        </p:txBody>
+      </p:sp>
+      <p:sp>
+        <p:nvSpPr>
+          <p:cNvPr id="11" name="TextBox 10"/>
+          <p:cNvSpPr txBox="1"/>
+          <p:nvPr/>
+        </p:nvSpPr>
+        <p:spPr>
+          <a:xfrm>
+            <a:off x="914400" y="6236208"/>
+            <a:ext cx="10058400" cy="274320"/>
           </a:xfrm>
           <a:prstGeom prst="rect">
             <a:avLst/>
@@ -6663,14 +6915,14 @@
               </a:defRPr>
             </a:pPr>
             <a:r>
-              <a:t>Both models select 85% of the same people at the top-20% rule. Fairness and calibration differences between them are not significant.</a:t>
-            </a:r>
-          </a:p>
-        </p:txBody>
-      </p:sp>
-      <p:sp>
-        <p:nvSpPr>
-          <p:cNvPr id="15" name="TextBox 14"/>
+              <a:t>The evaluation cohort is never touched. About 70% of the gap closes out of fold, for roughly one AUC point.</a:t>
+            </a:r>
+          </a:p>
+        </p:txBody>
+      </p:sp>
+      <p:sp>
+        <p:nvSpPr>
+          <p:cNvPr id="12" name="TextBox 11"/>
           <p:cNvSpPr txBox="1"/>
           <p:nvPr/>
         </p:nvSpPr>
@@ -6706,7 +6958,7 @@
       </p:sp>
       <p:sp>
         <p:nvSpPr>
-          <p:cNvPr id="16" name="TextBox 15"/>
+          <p:cNvPr id="13" name="TextBox 12"/>
           <p:cNvSpPr txBox="1"/>
           <p:nvPr/>
         </p:nvSpPr>
@@ -6797,7 +7049,7 @@
               </a:defRPr>
             </a:pPr>
             <a:r>
-              <a:t>12 · CLIENT EXPERIENCE</a:t>
+              <a:t>12 · TRADE-OFFS ACROSS FOUR DIMENSIONS</a:t>
             </a:r>
           </a:p>
         </p:txBody>
@@ -6833,7 +7085,7 @@
               </a:defRPr>
             </a:pPr>
             <a:r>
-              <a:t>The application makes every trade-off testable</a:t>
+              <a:t>Which model should the client deploy?</a:t>
             </a:r>
           </a:p>
         </p:txBody>
@@ -6881,513 +7133,33 @@
           </a:p>
         </p:txBody>
       </p:sp>
-      <p:sp>
-        <p:nvSpPr>
-          <p:cNvPr id="5" name="Rounded Rectangle 4"/>
-          <p:cNvSpPr/>
-          <p:nvPr/>
-        </p:nvSpPr>
-        <p:spPr>
-          <a:xfrm>
-            <a:off x="685800" y="1600200"/>
-            <a:ext cx="5212080" cy="1572768"/>
-          </a:xfrm>
-          <a:prstGeom prst="roundRect">
-            <a:avLst/>
-          </a:prstGeom>
-          <a:solidFill>
-            <a:srgbClr val="143058"/>
-          </a:solidFill>
-          <a:ln>
-            <a:solidFill>
-              <a:srgbClr val="FB8500"/>
-            </a:solidFill>
-          </a:ln>
-        </p:spPr>
-        <p:style>
-          <a:lnRef idx="1">
-            <a:schemeClr val="accent1"/>
-          </a:lnRef>
-          <a:fillRef idx="3">
-            <a:schemeClr val="accent1"/>
-          </a:fillRef>
-          <a:effectRef idx="2">
-            <a:schemeClr val="accent1"/>
-          </a:effectRef>
-          <a:fontRef idx="minor">
-            <a:schemeClr val="lt1"/>
-          </a:fontRef>
-        </p:style>
-        <p:txBody>
-          <a:bodyPr rtlCol="0" anchor="ctr"/>
-          <a:lstStyle/>
-          <a:p>
-            <a:pPr algn="ctr"/>
-          </a:p>
-        </p:txBody>
-      </p:sp>
+      <p:pic>
+        <p:nvPicPr>
+          <p:cNvPr id="5" name="Picture 4" descr="tradeoff_matrix.png"/>
+          <p:cNvPicPr>
+            <a:picLocks noChangeAspect="1"/>
+          </p:cNvPicPr>
+          <p:nvPr/>
+        </p:nvPicPr>
+        <p:blipFill>
+          <a:blip r:embed="rId2"/>
+          <a:stretch>
+            <a:fillRect/>
+          </a:stretch>
+        </p:blipFill>
+        <p:spPr>
+          <a:xfrm>
+            <a:off x="2881094" y="1481328"/>
+            <a:ext cx="6399331" cy="4782312"/>
+          </a:xfrm>
+          <a:prstGeom prst="rect">
+            <a:avLst/>
+          </a:prstGeom>
+        </p:spPr>
+      </p:pic>
       <p:sp>
         <p:nvSpPr>
           <p:cNvPr id="6" name="TextBox 5"/>
-          <p:cNvSpPr txBox="1"/>
-          <p:nvPr/>
-        </p:nvSpPr>
-        <p:spPr>
-          <a:xfrm>
-            <a:off x="914400" y="1874519"/>
-            <a:ext cx="4754880" cy="365760"/>
-          </a:xfrm>
-          <a:prstGeom prst="rect">
-            <a:avLst/>
-          </a:prstGeom>
-          <a:noFill/>
-        </p:spPr>
-        <p:txBody>
-          <a:bodyPr wrap="square" anchor="t">
-            <a:spAutoFit/>
-          </a:bodyPr>
-          <a:lstStyle/>
-          <a:p>
-            <a:pPr algn="ctr">
-              <a:defRPr sz="2000" b="1">
-                <a:solidFill>
-                  <a:srgbClr val="FB8500"/>
-                </a:solidFill>
-                <a:latin typeface="Aptos"/>
-              </a:defRPr>
-            </a:pPr>
-            <a:r>
-              <a:t>ASSESS</a:t>
-            </a:r>
-          </a:p>
-        </p:txBody>
-      </p:sp>
-      <p:sp>
-        <p:nvSpPr>
-          <p:cNvPr id="7" name="TextBox 6"/>
-          <p:cNvSpPr txBox="1"/>
-          <p:nvPr/>
-        </p:nvSpPr>
-        <p:spPr>
-          <a:xfrm>
-            <a:off x="1005840" y="2587752"/>
-            <a:ext cx="4572000" cy="338327"/>
-          </a:xfrm>
-          <a:prstGeom prst="rect">
-            <a:avLst/>
-          </a:prstGeom>
-          <a:noFill/>
-        </p:spPr>
-        <p:txBody>
-          <a:bodyPr wrap="square" anchor="t">
-            <a:spAutoFit/>
-          </a:bodyPr>
-          <a:lstStyle/>
-          <a:p>
-            <a:pPr algn="ctr">
-              <a:defRPr sz="1500" b="0">
-                <a:solidFill>
-                  <a:srgbClr val="F0F4F8"/>
-                </a:solidFill>
-                <a:latin typeface="Aptos"/>
-              </a:defRPr>
-            </a:pPr>
-            <a:r>
-              <a:t>Score one person, all 3 models + SHAP</a:t>
-            </a:r>
-          </a:p>
-        </p:txBody>
-      </p:sp>
-      <p:sp>
-        <p:nvSpPr>
-          <p:cNvPr id="8" name="Rounded Rectangle 7"/>
-          <p:cNvSpPr/>
-          <p:nvPr/>
-        </p:nvSpPr>
-        <p:spPr>
-          <a:xfrm>
-            <a:off x="6263640" y="1600200"/>
-            <a:ext cx="5212080" cy="1572768"/>
-          </a:xfrm>
-          <a:prstGeom prst="roundRect">
-            <a:avLst/>
-          </a:prstGeom>
-          <a:solidFill>
-            <a:srgbClr val="143058"/>
-          </a:solidFill>
-          <a:ln>
-            <a:solidFill>
-              <a:srgbClr val="7B2CBF"/>
-            </a:solidFill>
-          </a:ln>
-        </p:spPr>
-        <p:style>
-          <a:lnRef idx="1">
-            <a:schemeClr val="accent1"/>
-          </a:lnRef>
-          <a:fillRef idx="3">
-            <a:schemeClr val="accent1"/>
-          </a:fillRef>
-          <a:effectRef idx="2">
-            <a:schemeClr val="accent1"/>
-          </a:effectRef>
-          <a:fontRef idx="minor">
-            <a:schemeClr val="lt1"/>
-          </a:fontRef>
-        </p:style>
-        <p:txBody>
-          <a:bodyPr rtlCol="0" anchor="ctr"/>
-          <a:lstStyle/>
-          <a:p>
-            <a:pPr algn="ctr"/>
-          </a:p>
-        </p:txBody>
-      </p:sp>
-      <p:sp>
-        <p:nvSpPr>
-          <p:cNvPr id="9" name="TextBox 8"/>
-          <p:cNvSpPr txBox="1"/>
-          <p:nvPr/>
-        </p:nvSpPr>
-        <p:spPr>
-          <a:xfrm>
-            <a:off x="6492240" y="1874519"/>
-            <a:ext cx="4754880" cy="365760"/>
-          </a:xfrm>
-          <a:prstGeom prst="rect">
-            <a:avLst/>
-          </a:prstGeom>
-          <a:noFill/>
-        </p:spPr>
-        <p:txBody>
-          <a:bodyPr wrap="square" anchor="t">
-            <a:spAutoFit/>
-          </a:bodyPr>
-          <a:lstStyle/>
-          <a:p>
-            <a:pPr algn="ctr">
-              <a:defRPr sz="2000" b="1">
-                <a:solidFill>
-                  <a:srgbClr val="7B2CBF"/>
-                </a:solidFill>
-                <a:latin typeface="Aptos"/>
-              </a:defRPr>
-            </a:pPr>
-            <a:r>
-              <a:t>AUDIT</a:t>
-            </a:r>
-          </a:p>
-        </p:txBody>
-      </p:sp>
-      <p:sp>
-        <p:nvSpPr>
-          <p:cNvPr id="10" name="TextBox 9"/>
-          <p:cNvSpPr txBox="1"/>
-          <p:nvPr/>
-        </p:nvSpPr>
-        <p:spPr>
-          <a:xfrm>
-            <a:off x="6583679" y="2587752"/>
-            <a:ext cx="4572000" cy="338327"/>
-          </a:xfrm>
-          <a:prstGeom prst="rect">
-            <a:avLst/>
-          </a:prstGeom>
-          <a:noFill/>
-        </p:spPr>
-        <p:txBody>
-          <a:bodyPr wrap="square" anchor="t">
-            <a:spAutoFit/>
-          </a:bodyPr>
-          <a:lstStyle/>
-          <a:p>
-            <a:pPr algn="ctr">
-              <a:defRPr sz="1500" b="0">
-                <a:solidFill>
-                  <a:srgbClr val="F0F4F8"/>
-                </a:solidFill>
-                <a:latin typeface="Aptos"/>
-              </a:defRPr>
-            </a:pPr>
-            <a:r>
-              <a:t>Race, gender, age at the deployed point + FPDP</a:t>
-            </a:r>
-          </a:p>
-        </p:txBody>
-      </p:sp>
-      <p:sp>
-        <p:nvSpPr>
-          <p:cNvPr id="11" name="Rounded Rectangle 10"/>
-          <p:cNvSpPr/>
-          <p:nvPr/>
-        </p:nvSpPr>
-        <p:spPr>
-          <a:xfrm>
-            <a:off x="685800" y="3474720"/>
-            <a:ext cx="5212080" cy="1572768"/>
-          </a:xfrm>
-          <a:prstGeom prst="roundRect">
-            <a:avLst/>
-          </a:prstGeom>
-          <a:solidFill>
-            <a:srgbClr val="143058"/>
-          </a:solidFill>
-          <a:ln>
-            <a:solidFill>
-              <a:srgbClr val="FB8500"/>
-            </a:solidFill>
-          </a:ln>
-        </p:spPr>
-        <p:style>
-          <a:lnRef idx="1">
-            <a:schemeClr val="accent1"/>
-          </a:lnRef>
-          <a:fillRef idx="3">
-            <a:schemeClr val="accent1"/>
-          </a:fillRef>
-          <a:effectRef idx="2">
-            <a:schemeClr val="accent1"/>
-          </a:effectRef>
-          <a:fontRef idx="minor">
-            <a:schemeClr val="lt1"/>
-          </a:fontRef>
-        </p:style>
-        <p:txBody>
-          <a:bodyPr rtlCol="0" anchor="ctr"/>
-          <a:lstStyle/>
-          <a:p>
-            <a:pPr algn="ctr"/>
-          </a:p>
-        </p:txBody>
-      </p:sp>
-      <p:sp>
-        <p:nvSpPr>
-          <p:cNvPr id="12" name="TextBox 11"/>
-          <p:cNvSpPr txBox="1"/>
-          <p:nvPr/>
-        </p:nvSpPr>
-        <p:spPr>
-          <a:xfrm>
-            <a:off x="914400" y="3749039"/>
-            <a:ext cx="4754880" cy="365760"/>
-          </a:xfrm>
-          <a:prstGeom prst="rect">
-            <a:avLst/>
-          </a:prstGeom>
-          <a:noFill/>
-        </p:spPr>
-        <p:txBody>
-          <a:bodyPr wrap="square" anchor="t">
-            <a:spAutoFit/>
-          </a:bodyPr>
-          <a:lstStyle/>
-          <a:p>
-            <a:pPr algn="ctr">
-              <a:defRPr sz="2000" b="1">
-                <a:solidFill>
-                  <a:srgbClr val="FB8500"/>
-                </a:solidFill>
-                <a:latin typeface="Aptos"/>
-              </a:defRPr>
-            </a:pPr>
-            <a:r>
-              <a:t>COMPARE</a:t>
-            </a:r>
-          </a:p>
-        </p:txBody>
-      </p:sp>
-      <p:sp>
-        <p:nvSpPr>
-          <p:cNvPr id="13" name="TextBox 12"/>
-          <p:cNvSpPr txBox="1"/>
-          <p:nvPr/>
-        </p:nvSpPr>
-        <p:spPr>
-          <a:xfrm>
-            <a:off x="1005840" y="4462272"/>
-            <a:ext cx="4572000" cy="338327"/>
-          </a:xfrm>
-          <a:prstGeom prst="rect">
-            <a:avLst/>
-          </a:prstGeom>
-          <a:noFill/>
-        </p:spPr>
-        <p:txBody>
-          <a:bodyPr wrap="square" anchor="t">
-            <a:spAutoFit/>
-          </a:bodyPr>
-          <a:lstStyle/>
-          <a:p>
-            <a:pPr algn="ctr">
-              <a:defRPr sz="1500" b="0">
-                <a:solidFill>
-                  <a:srgbClr val="F0F4F8"/>
-                </a:solidFill>
-                <a:latin typeface="Aptos"/>
-              </a:defRPr>
-            </a:pPr>
-            <a:r>
-              <a:t>Incumbent, learning curve, matrix</a:t>
-            </a:r>
-          </a:p>
-        </p:txBody>
-      </p:sp>
-      <p:sp>
-        <p:nvSpPr>
-          <p:cNvPr id="14" name="Rounded Rectangle 13"/>
-          <p:cNvSpPr/>
-          <p:nvPr/>
-        </p:nvSpPr>
-        <p:spPr>
-          <a:xfrm>
-            <a:off x="6263640" y="3474720"/>
-            <a:ext cx="5212080" cy="1572768"/>
-          </a:xfrm>
-          <a:prstGeom prst="roundRect">
-            <a:avLst/>
-          </a:prstGeom>
-          <a:solidFill>
-            <a:srgbClr val="143058"/>
-          </a:solidFill>
-          <a:ln>
-            <a:solidFill>
-              <a:srgbClr val="7B2CBF"/>
-            </a:solidFill>
-          </a:ln>
-        </p:spPr>
-        <p:style>
-          <a:lnRef idx="1">
-            <a:schemeClr val="accent1"/>
-          </a:lnRef>
-          <a:fillRef idx="3">
-            <a:schemeClr val="accent1"/>
-          </a:fillRef>
-          <a:effectRef idx="2">
-            <a:schemeClr val="accent1"/>
-          </a:effectRef>
-          <a:fontRef idx="minor">
-            <a:schemeClr val="lt1"/>
-          </a:fontRef>
-        </p:style>
-        <p:txBody>
-          <a:bodyPr rtlCol="0" anchor="ctr"/>
-          <a:lstStyle/>
-          <a:p>
-            <a:pPr algn="ctr"/>
-          </a:p>
-        </p:txBody>
-      </p:sp>
-      <p:sp>
-        <p:nvSpPr>
-          <p:cNvPr id="15" name="TextBox 14"/>
-          <p:cNvSpPr txBox="1"/>
-          <p:nvPr/>
-        </p:nvSpPr>
-        <p:spPr>
-          <a:xfrm>
-            <a:off x="6492240" y="3749039"/>
-            <a:ext cx="4754880" cy="365760"/>
-          </a:xfrm>
-          <a:prstGeom prst="rect">
-            <a:avLst/>
-          </a:prstGeom>
-          <a:noFill/>
-        </p:spPr>
-        <p:txBody>
-          <a:bodyPr wrap="square" anchor="t">
-            <a:spAutoFit/>
-          </a:bodyPr>
-          <a:lstStyle/>
-          <a:p>
-            <a:pPr algn="ctr">
-              <a:defRPr sz="2000" b="1">
-                <a:solidFill>
-                  <a:srgbClr val="7B2CBF"/>
-                </a:solidFill>
-                <a:latin typeface="Aptos"/>
-              </a:defRPr>
-            </a:pPr>
-            <a:r>
-              <a:t>SIMULATE</a:t>
-            </a:r>
-          </a:p>
-        </p:txBody>
-      </p:sp>
-      <p:sp>
-        <p:nvSpPr>
-          <p:cNvPr id="16" name="TextBox 15"/>
-          <p:cNvSpPr txBox="1"/>
-          <p:nvPr/>
-        </p:nvSpPr>
-        <p:spPr>
-          <a:xfrm>
-            <a:off x="6583679" y="4462272"/>
-            <a:ext cx="4572000" cy="338327"/>
-          </a:xfrm>
-          <a:prstGeom prst="rect">
-            <a:avLst/>
-          </a:prstGeom>
-          <a:noFill/>
-        </p:spPr>
-        <p:txBody>
-          <a:bodyPr wrap="square" anchor="t">
-            <a:spAutoFit/>
-          </a:bodyPr>
-          <a:lstStyle/>
-          <a:p>
-            <a:pPr algn="ctr">
-              <a:defRPr sz="1500" b="0">
-                <a:solidFill>
-                  <a:srgbClr val="F0F4F8"/>
-                </a:solidFill>
-                <a:latin typeface="Aptos"/>
-              </a:defRPr>
-            </a:pPr>
-            <a:r>
-              <a:t>Costs, capacity, sensitivity</a:t>
-            </a:r>
-          </a:p>
-        </p:txBody>
-      </p:sp>
-      <p:sp>
-        <p:nvSpPr>
-          <p:cNvPr id="17" name="TextBox 16"/>
-          <p:cNvSpPr txBox="1"/>
-          <p:nvPr/>
-        </p:nvSpPr>
-        <p:spPr>
-          <a:xfrm>
-            <a:off x="4023360" y="5715000"/>
-            <a:ext cx="4114800" cy="365760"/>
-          </a:xfrm>
-          <a:prstGeom prst="rect">
-            <a:avLst/>
-          </a:prstGeom>
-          <a:noFill/>
-        </p:spPr>
-        <p:txBody>
-          <a:bodyPr wrap="square" anchor="t">
-            <a:spAutoFit/>
-          </a:bodyPr>
-          <a:lstStyle/>
-          <a:p>
-            <a:pPr algn="ctr">
-              <a:defRPr sz="1700" b="1">
-                <a:solidFill>
-                  <a:srgbClr val="F0F4F8"/>
-                </a:solidFill>
-                <a:latin typeface="Consolas"/>
-              </a:defRPr>
-            </a:pPr>
-            <a:r>
-              <a:t>streamlit run app.py</a:t>
-            </a:r>
-          </a:p>
-        </p:txBody>
-      </p:sp>
-      <p:sp>
-        <p:nvSpPr>
-          <p:cNvPr id="18" name="TextBox 17"/>
           <p:cNvSpPr txBox="1"/>
           <p:nvPr/>
         </p:nvSpPr>
@@ -7423,7 +7195,7 @@
       </p:sp>
       <p:sp>
         <p:nvSpPr>
-          <p:cNvPr id="19" name="TextBox 18"/>
+          <p:cNvPr id="7" name="TextBox 6"/>
           <p:cNvSpPr txBox="1"/>
           <p:nvPr/>
         </p:nvSpPr>
@@ -7491,8 +7263,8 @@
         </p:nvSpPr>
         <p:spPr>
           <a:xfrm>
-            <a:off x="658368" y="2377440"/>
-            <a:ext cx="7315200" cy="457200"/>
+            <a:off x="594360" y="256032"/>
+            <a:ext cx="10972800" cy="274320"/>
           </a:xfrm>
           <a:prstGeom prst="rect">
             <a:avLst/>
@@ -7506,7 +7278,7 @@
           <a:lstStyle/>
           <a:p>
             <a:pPr algn="l">
-              <a:defRPr sz="1400" b="1">
+              <a:defRPr sz="1000" b="1">
                 <a:solidFill>
                   <a:srgbClr val="FB8500"/>
                 </a:solidFill>
@@ -7514,7 +7286,7 @@
               </a:defRPr>
             </a:pPr>
             <a:r>
-              <a:t>APPENDIX</a:t>
+              <a:t>13 · RECOMMENDATION</a:t>
             </a:r>
           </a:p>
         </p:txBody>
@@ -7527,8 +7299,8 @@
         </p:nvSpPr>
         <p:spPr>
           <a:xfrm>
-            <a:off x="658368" y="2880360"/>
-            <a:ext cx="8229600" cy="1371600"/>
+            <a:off x="594360" y="621792"/>
+            <a:ext cx="10972800" cy="594360"/>
           </a:xfrm>
           <a:prstGeom prst="rect">
             <a:avLst/>
@@ -7542,7 +7314,7 @@
           <a:lstStyle/>
           <a:p>
             <a:pPr algn="l">
-              <a:defRPr sz="3400" b="1">
+              <a:defRPr sz="2600" b="1">
                 <a:solidFill>
                   <a:srgbClr val="FFFFFF"/>
                 </a:solidFill>
@@ -7550,25 +7322,496 @@
               </a:defRPr>
             </a:pPr>
             <a:r>
-              <a:t>Supporting evidence</a:t>
+              <a:t>Pilot logistic regression; run XGBoost as the challenger</a:t>
+            </a:r>
+          </a:p>
+        </p:txBody>
+      </p:sp>
+      <p:sp>
+        <p:nvSpPr>
+          <p:cNvPr id="4" name="Rectangle 3"/>
+          <p:cNvSpPr/>
+          <p:nvPr/>
+        </p:nvSpPr>
+        <p:spPr>
+          <a:xfrm>
+            <a:off x="594360" y="1298448"/>
+            <a:ext cx="1005840" cy="50292"/>
+          </a:xfrm>
+          <a:prstGeom prst="rect">
+            <a:avLst/>
+          </a:prstGeom>
+          <a:solidFill>
+            <a:srgbClr val="FB8500"/>
+          </a:solidFill>
+          <a:ln>
+            <a:noFill/>
+          </a:ln>
+        </p:spPr>
+        <p:style>
+          <a:lnRef idx="1">
+            <a:schemeClr val="accent1"/>
+          </a:lnRef>
+          <a:fillRef idx="3">
+            <a:schemeClr val="accent1"/>
+          </a:fillRef>
+          <a:effectRef idx="2">
+            <a:schemeClr val="accent1"/>
+          </a:effectRef>
+          <a:fontRef idx="minor">
+            <a:schemeClr val="lt1"/>
+          </a:fontRef>
+        </p:style>
+        <p:txBody>
+          <a:bodyPr rtlCol="0" anchor="ctr"/>
+          <a:lstStyle/>
+          <a:p>
+            <a:pPr algn="ctr"/>
+          </a:p>
+        </p:txBody>
+      </p:sp>
+      <p:sp>
+        <p:nvSpPr>
+          <p:cNvPr id="5" name="Rounded Rectangle 4"/>
+          <p:cNvSpPr/>
+          <p:nvPr/>
+        </p:nvSpPr>
+        <p:spPr>
+          <a:xfrm>
+            <a:off x="640080" y="1645920"/>
+            <a:ext cx="3520440" cy="4251960"/>
+          </a:xfrm>
+          <a:prstGeom prst="roundRect">
+            <a:avLst/>
+          </a:prstGeom>
+          <a:solidFill>
+            <a:srgbClr val="143058"/>
+          </a:solidFill>
+          <a:ln>
+            <a:solidFill>
+              <a:srgbClr val="00B4B4"/>
+            </a:solidFill>
+          </a:ln>
+        </p:spPr>
+        <p:style>
+          <a:lnRef idx="1">
+            <a:schemeClr val="accent1"/>
+          </a:lnRef>
+          <a:fillRef idx="3">
+            <a:schemeClr val="accent1"/>
+          </a:fillRef>
+          <a:effectRef idx="2">
+            <a:schemeClr val="accent1"/>
+          </a:effectRef>
+          <a:fontRef idx="minor">
+            <a:schemeClr val="lt1"/>
+          </a:fontRef>
+        </p:style>
+        <p:txBody>
+          <a:bodyPr rtlCol="0" anchor="ctr"/>
+          <a:lstStyle/>
+          <a:p>
+            <a:pPr algn="ctr"/>
+          </a:p>
+        </p:txBody>
+      </p:sp>
+      <p:sp>
+        <p:nvSpPr>
+          <p:cNvPr id="6" name="TextBox 5"/>
+          <p:cNvSpPr txBox="1"/>
+          <p:nvPr/>
+        </p:nvSpPr>
+        <p:spPr>
+          <a:xfrm>
+            <a:off x="868680" y="1920240"/>
+            <a:ext cx="3063240" cy="365760"/>
+          </a:xfrm>
+          <a:prstGeom prst="rect">
+            <a:avLst/>
+          </a:prstGeom>
+          <a:noFill/>
+        </p:spPr>
+        <p:txBody>
+          <a:bodyPr wrap="square" anchor="t">
+            <a:spAutoFit/>
+          </a:bodyPr>
+          <a:lstStyle/>
+          <a:p>
+            <a:pPr algn="ctr">
+              <a:defRPr sz="2000" b="1">
+                <a:solidFill>
+                  <a:srgbClr val="00B4B4"/>
+                </a:solidFill>
+                <a:latin typeface="Aptos"/>
+              </a:defRPr>
+            </a:pPr>
+            <a:r>
+              <a:t>WHY LOGISTIC</a:t>
+            </a:r>
+          </a:p>
+        </p:txBody>
+      </p:sp>
+      <p:sp>
+        <p:nvSpPr>
+          <p:cNvPr id="7" name="TextBox 6"/>
+          <p:cNvSpPr txBox="1"/>
+          <p:nvPr/>
+        </p:nvSpPr>
+        <p:spPr>
+          <a:xfrm>
+            <a:off x="960119" y="2633472"/>
+            <a:ext cx="2880360" cy="3017520"/>
+          </a:xfrm>
+          <a:prstGeom prst="rect">
+            <a:avLst/>
+          </a:prstGeom>
+          <a:noFill/>
+        </p:spPr>
+        <p:txBody>
+          <a:bodyPr wrap="square" anchor="t">
+            <a:spAutoFit/>
+          </a:bodyPr>
+          <a:lstStyle/>
+          <a:p>
+            <a:pPr algn="ctr">
+              <a:defRPr sz="1500" b="0">
+                <a:solidFill>
+                  <a:srgbClr val="F0F4F8"/>
+                </a:solidFill>
+                <a:latin typeface="Aptos"/>
+              </a:defRPr>
+            </a:pPr>
+            <a:r>
+              <a:t>Native, coefficient-level explanations — no second tool</a:t>
             </a:r>
             <a:br/>
-            <a:r>
-              <a:t>for questions</a:t>
-            </a:r>
-          </a:p>
-        </p:txBody>
-      </p:sp>
-      <p:sp>
-        <p:nvSpPr>
-          <p:cNvPr id="4" name="TextBox 3"/>
-          <p:cNvSpPr txBox="1"/>
-          <p:nvPr/>
-        </p:nvSpPr>
-        <p:spPr>
-          <a:xfrm>
-            <a:off x="694944" y="4526280"/>
-            <a:ext cx="8686800" cy="822960"/>
+            <a:br/>
+            <a:r>
+              <a:t>Lower refit drift on all 28 pairs (0.0322 vs 0.0351)</a:t>
+            </a:r>
+            <a:br/>
+            <a:br/>
+            <a:r>
+              <a:t>More stable selected set (J 0.772 vs 0.747)</a:t>
+            </a:r>
+            <a:br/>
+            <a:br/>
+            <a:r>
+              <a:t>~9× faster</a:t>
+            </a:r>
+          </a:p>
+        </p:txBody>
+      </p:sp>
+      <p:sp>
+        <p:nvSpPr>
+          <p:cNvPr id="8" name="Rounded Rectangle 7"/>
+          <p:cNvSpPr/>
+          <p:nvPr/>
+        </p:nvSpPr>
+        <p:spPr>
+          <a:xfrm>
+            <a:off x="4343400" y="1645920"/>
+            <a:ext cx="3520440" cy="4251960"/>
+          </a:xfrm>
+          <a:prstGeom prst="roundRect">
+            <a:avLst/>
+          </a:prstGeom>
+          <a:solidFill>
+            <a:srgbClr val="143058"/>
+          </a:solidFill>
+          <a:ln>
+            <a:solidFill>
+              <a:srgbClr val="D64343"/>
+            </a:solidFill>
+          </a:ln>
+        </p:spPr>
+        <p:style>
+          <a:lnRef idx="1">
+            <a:schemeClr val="accent1"/>
+          </a:lnRef>
+          <a:fillRef idx="3">
+            <a:schemeClr val="accent1"/>
+          </a:fillRef>
+          <a:effectRef idx="2">
+            <a:schemeClr val="accent1"/>
+          </a:effectRef>
+          <a:fontRef idx="minor">
+            <a:schemeClr val="lt1"/>
+          </a:fontRef>
+        </p:style>
+        <p:txBody>
+          <a:bodyPr rtlCol="0" anchor="ctr"/>
+          <a:lstStyle/>
+          <a:p>
+            <a:pPr algn="ctr"/>
+          </a:p>
+        </p:txBody>
+      </p:sp>
+      <p:sp>
+        <p:nvSpPr>
+          <p:cNvPr id="9" name="TextBox 8"/>
+          <p:cNvSpPr txBox="1"/>
+          <p:nvPr/>
+        </p:nvSpPr>
+        <p:spPr>
+          <a:xfrm>
+            <a:off x="4572000" y="1920240"/>
+            <a:ext cx="3063240" cy="365760"/>
+          </a:xfrm>
+          <a:prstGeom prst="rect">
+            <a:avLst/>
+          </a:prstGeom>
+          <a:noFill/>
+        </p:spPr>
+        <p:txBody>
+          <a:bodyPr wrap="square" anchor="t">
+            <a:spAutoFit/>
+          </a:bodyPr>
+          <a:lstStyle/>
+          <a:p>
+            <a:pPr algn="ctr">
+              <a:defRPr sz="2000" b="1">
+                <a:solidFill>
+                  <a:srgbClr val="D64343"/>
+                </a:solidFill>
+                <a:latin typeface="Aptos"/>
+              </a:defRPr>
+            </a:pPr>
+            <a:r>
+              <a:t>WHAT WE GIVE UP</a:t>
+            </a:r>
+          </a:p>
+        </p:txBody>
+      </p:sp>
+      <p:sp>
+        <p:nvSpPr>
+          <p:cNvPr id="10" name="TextBox 9"/>
+          <p:cNvSpPr txBox="1"/>
+          <p:nvPr/>
+        </p:nvSpPr>
+        <p:spPr>
+          <a:xfrm>
+            <a:off x="4663440" y="2633472"/>
+            <a:ext cx="2880360" cy="3017520"/>
+          </a:xfrm>
+          <a:prstGeom prst="rect">
+            <a:avLst/>
+          </a:prstGeom>
+          <a:noFill/>
+        </p:spPr>
+        <p:txBody>
+          <a:bodyPr wrap="square" anchor="t">
+            <a:spAutoFit/>
+          </a:bodyPr>
+          <a:lstStyle/>
+          <a:p>
+            <a:pPr algn="ctr">
+              <a:defRPr sz="1500" b="0">
+                <a:solidFill>
+                  <a:srgbClr val="F0F4F8"/>
+                </a:solidFill>
+                <a:latin typeface="Aptos"/>
+              </a:defRPr>
+            </a:pPr>
+            <a:r>
+              <a:t>XGBoost AUC edge +0.0025 and Brier −0.0010</a:t>
+            </a:r>
+            <a:br/>
+            <a:br/>
+            <a:r>
+              <a:t>Calibration is a tie, not a loss: both indistinguishable from perfect</a:t>
+            </a:r>
+            <a:br/>
+            <a:br/>
+            <a:r>
+              <a:t>Captured re-arrests: interval 29 to 0 includes 0</a:t>
+            </a:r>
+            <a:br/>
+            <a:br/>
+            <a:r>
+              <a:t>Significant, but not at the operating point</a:t>
+            </a:r>
+          </a:p>
+        </p:txBody>
+      </p:sp>
+      <p:sp>
+        <p:nvSpPr>
+          <p:cNvPr id="11" name="Rounded Rectangle 10"/>
+          <p:cNvSpPr/>
+          <p:nvPr/>
+        </p:nvSpPr>
+        <p:spPr>
+          <a:xfrm>
+            <a:off x="8046720" y="1645920"/>
+            <a:ext cx="3520440" cy="4251960"/>
+          </a:xfrm>
+          <a:prstGeom prst="roundRect">
+            <a:avLst/>
+          </a:prstGeom>
+          <a:solidFill>
+            <a:srgbClr val="143058"/>
+          </a:solidFill>
+          <a:ln>
+            <a:solidFill>
+              <a:srgbClr val="7B2CBF"/>
+            </a:solidFill>
+          </a:ln>
+        </p:spPr>
+        <p:style>
+          <a:lnRef idx="1">
+            <a:schemeClr val="accent1"/>
+          </a:lnRef>
+          <a:fillRef idx="3">
+            <a:schemeClr val="accent1"/>
+          </a:fillRef>
+          <a:effectRef idx="2">
+            <a:schemeClr val="accent1"/>
+          </a:effectRef>
+          <a:fontRef idx="minor">
+            <a:schemeClr val="lt1"/>
+          </a:fontRef>
+        </p:style>
+        <p:txBody>
+          <a:bodyPr rtlCol="0" anchor="ctr"/>
+          <a:lstStyle/>
+          <a:p>
+            <a:pPr algn="ctr"/>
+          </a:p>
+        </p:txBody>
+      </p:sp>
+      <p:sp>
+        <p:nvSpPr>
+          <p:cNvPr id="12" name="TextBox 11"/>
+          <p:cNvSpPr txBox="1"/>
+          <p:nvPr/>
+        </p:nvSpPr>
+        <p:spPr>
+          <a:xfrm>
+            <a:off x="8275320" y="1920240"/>
+            <a:ext cx="3063240" cy="365760"/>
+          </a:xfrm>
+          <a:prstGeom prst="rect">
+            <a:avLst/>
+          </a:prstGeom>
+          <a:noFill/>
+        </p:spPr>
+        <p:txBody>
+          <a:bodyPr wrap="square" anchor="t">
+            <a:spAutoFit/>
+          </a:bodyPr>
+          <a:lstStyle/>
+          <a:p>
+            <a:pPr algn="ctr">
+              <a:defRPr sz="2000" b="1">
+                <a:solidFill>
+                  <a:srgbClr val="7B2CBF"/>
+                </a:solidFill>
+                <a:latin typeface="Aptos"/>
+              </a:defRPr>
+            </a:pPr>
+            <a:r>
+              <a:t>WHAT REVERSES IT</a:t>
+            </a:r>
+          </a:p>
+        </p:txBody>
+      </p:sp>
+      <p:sp>
+        <p:nvSpPr>
+          <p:cNvPr id="13" name="TextBox 12"/>
+          <p:cNvSpPr txBox="1"/>
+          <p:nvPr/>
+        </p:nvSpPr>
+        <p:spPr>
+          <a:xfrm>
+            <a:off x="8366760" y="2633472"/>
+            <a:ext cx="2880360" cy="3017520"/>
+          </a:xfrm>
+          <a:prstGeom prst="rect">
+            <a:avLst/>
+          </a:prstGeom>
+          <a:noFill/>
+        </p:spPr>
+        <p:txBody>
+          <a:bodyPr wrap="square" anchor="t">
+            <a:spAutoFit/>
+          </a:bodyPr>
+          <a:lstStyle/>
+          <a:p>
+            <a:pPr algn="ctr">
+              <a:defRPr sz="1500" b="0">
+                <a:solidFill>
+                  <a:srgbClr val="F0F4F8"/>
+                </a:solidFill>
+                <a:latin typeface="Aptos"/>
+              </a:defRPr>
+            </a:pPr>
+            <a:r>
+              <a:t>The score is quoted numerically to supervisees</a:t>
+            </a:r>
+            <a:br/>
+            <a:br/>
+            <a:r>
+              <a:t>Capacity large enough that +12 offers matters</a:t>
+            </a:r>
+            <a:br/>
+            <a:br/>
+            <a:r>
+              <a:t>A feature set that widens the margin</a:t>
+            </a:r>
+            <a:br/>
+            <a:br/>
+            <a:r>
+              <a:t>Then: promote the challenger</a:t>
+            </a:r>
+          </a:p>
+        </p:txBody>
+      </p:sp>
+      <p:sp>
+        <p:nvSpPr>
+          <p:cNvPr id="14" name="TextBox 13"/>
+          <p:cNvSpPr txBox="1"/>
+          <p:nvPr/>
+        </p:nvSpPr>
+        <p:spPr>
+          <a:xfrm>
+            <a:off x="731520" y="6172200"/>
+            <a:ext cx="10698480" cy="365760"/>
+          </a:xfrm>
+          <a:prstGeom prst="rect">
+            <a:avLst/>
+          </a:prstGeom>
+          <a:noFill/>
+        </p:spPr>
+        <p:txBody>
+          <a:bodyPr wrap="square" anchor="t">
+            <a:spAutoFit/>
+          </a:bodyPr>
+          <a:lstStyle/>
+          <a:p>
+            <a:pPr algn="ctr">
+              <a:defRPr sz="1100" b="1">
+                <a:solidFill>
+                  <a:srgbClr val="FB8500"/>
+                </a:solidFill>
+                <a:latin typeface="Aptos"/>
+              </a:defRPr>
+            </a:pPr>
+            <a:r>
+              <a:t>Both models select 85% of the same people at the top-20% rule. Fairness and calibration differences between them are not significant.</a:t>
+            </a:r>
+          </a:p>
+        </p:txBody>
+      </p:sp>
+      <p:sp>
+        <p:nvSpPr>
+          <p:cNvPr id="15" name="TextBox 14"/>
+          <p:cNvSpPr txBox="1"/>
+          <p:nvPr/>
+        </p:nvSpPr>
+        <p:spPr>
+          <a:xfrm>
+            <a:off x="594360" y="6510528"/>
+            <a:ext cx="3657600" cy="164592"/>
           </a:xfrm>
           <a:prstGeom prst="rect">
             <a:avLst/>
@@ -7582,15 +7825,51 @@
           <a:lstStyle/>
           <a:p>
             <a:pPr algn="l">
-              <a:defRPr sz="1500" b="0">
-                <a:solidFill>
-                  <a:srgbClr val="F0F4F8"/>
-                </a:solidFill>
-                <a:latin typeface="Aptos"/>
-              </a:defRPr>
-            </a:pPr>
-            <a:r>
-              <a:t>Learning curve · economic sensitivity · interpretability methods · explanation disagreement · LIME fidelity · stability · process log</a:t>
+              <a:defRPr sz="800" b="0">
+                <a:solidFill>
+                  <a:srgbClr val="828FA0"/>
+                </a:solidFill>
+                <a:latin typeface="Aptos"/>
+              </a:defRPr>
+            </a:pPr>
+            <a:r>
+              <a:t>HEC Paris · ISAF · 2026</a:t>
+            </a:r>
+          </a:p>
+        </p:txBody>
+      </p:sp>
+      <p:sp>
+        <p:nvSpPr>
+          <p:cNvPr id="16" name="TextBox 15"/>
+          <p:cNvSpPr txBox="1"/>
+          <p:nvPr/>
+        </p:nvSpPr>
+        <p:spPr>
+          <a:xfrm>
+            <a:off x="11109960" y="6492240"/>
+            <a:ext cx="411480" cy="164592"/>
+          </a:xfrm>
+          <a:prstGeom prst="rect">
+            <a:avLst/>
+          </a:prstGeom>
+          <a:noFill/>
+        </p:spPr>
+        <p:txBody>
+          <a:bodyPr wrap="square" anchor="t">
+            <a:spAutoFit/>
+          </a:bodyPr>
+          <a:lstStyle/>
+          <a:p>
+            <a:pPr algn="r">
+              <a:defRPr sz="800" b="0">
+                <a:solidFill>
+                  <a:srgbClr val="828FA0"/>
+                </a:solidFill>
+                <a:latin typeface="Aptos"/>
+              </a:defRPr>
+            </a:pPr>
+            <a:r>
+              <a:t>14</a:t>
             </a:r>
           </a:p>
         </p:txBody>
@@ -7652,7 +7931,7 @@
               </a:defRPr>
             </a:pPr>
             <a:r>
-              <a:t>A1 · LEARNING CURVE</a:t>
+              <a:t>14 · CLIENT EXPERIENCE</a:t>
             </a:r>
           </a:p>
         </p:txBody>
@@ -7688,7 +7967,7 @@
               </a:defRPr>
             </a:pPr>
             <a:r>
-              <a:t>Which model for which agency size?</a:t>
+              <a:t>The application makes every trade-off testable</a:t>
             </a:r>
           </a:p>
         </p:txBody>
@@ -7736,30 +8015,51 @@
           </a:p>
         </p:txBody>
       </p:sp>
-      <p:pic>
-        <p:nvPicPr>
-          <p:cNvPr id="5" name="Picture 4" descr="learning_curve.png"/>
-          <p:cNvPicPr>
-            <a:picLocks noChangeAspect="1"/>
-          </p:cNvPicPr>
-          <p:nvPr/>
-        </p:nvPicPr>
-        <p:blipFill>
-          <a:blip r:embed="rId2"/>
-          <a:stretch>
-            <a:fillRect/>
-          </a:stretch>
-        </p:blipFill>
-        <p:spPr>
-          <a:xfrm>
-            <a:off x="731520" y="1645920"/>
-            <a:ext cx="10698480" cy="4022802"/>
-          </a:xfrm>
-          <a:prstGeom prst="rect">
-            <a:avLst/>
-          </a:prstGeom>
-        </p:spPr>
-      </p:pic>
+      <p:sp>
+        <p:nvSpPr>
+          <p:cNvPr id="5" name="Rounded Rectangle 4"/>
+          <p:cNvSpPr/>
+          <p:nvPr/>
+        </p:nvSpPr>
+        <p:spPr>
+          <a:xfrm>
+            <a:off x="685800" y="1600200"/>
+            <a:ext cx="5212080" cy="1572768"/>
+          </a:xfrm>
+          <a:prstGeom prst="roundRect">
+            <a:avLst/>
+          </a:prstGeom>
+          <a:solidFill>
+            <a:srgbClr val="143058"/>
+          </a:solidFill>
+          <a:ln>
+            <a:solidFill>
+              <a:srgbClr val="FB8500"/>
+            </a:solidFill>
+          </a:ln>
+        </p:spPr>
+        <p:style>
+          <a:lnRef idx="1">
+            <a:schemeClr val="accent1"/>
+          </a:lnRef>
+          <a:fillRef idx="3">
+            <a:schemeClr val="accent1"/>
+          </a:fillRef>
+          <a:effectRef idx="2">
+            <a:schemeClr val="accent1"/>
+          </a:effectRef>
+          <a:fontRef idx="minor">
+            <a:schemeClr val="lt1"/>
+          </a:fontRef>
+        </p:style>
+        <p:txBody>
+          <a:bodyPr rtlCol="0" anchor="ctr"/>
+          <a:lstStyle/>
+          <a:p>
+            <a:pPr algn="ctr"/>
+          </a:p>
+        </p:txBody>
+      </p:sp>
       <p:sp>
         <p:nvSpPr>
           <p:cNvPr id="6" name="TextBox 5"/>
@@ -7768,8 +8068,8 @@
         </p:nvSpPr>
         <p:spPr>
           <a:xfrm>
-            <a:off x="914400" y="6126480"/>
-            <a:ext cx="10058400" cy="457200"/>
+            <a:off x="914400" y="1874519"/>
+            <a:ext cx="4754880" cy="365760"/>
           </a:xfrm>
           <a:prstGeom prst="rect">
             <a:avLst/>
@@ -7783,7 +8083,7 @@
           <a:lstStyle/>
           <a:p>
             <a:pPr algn="ctr">
-              <a:defRPr sz="1300" b="1">
+              <a:defRPr sz="2000" b="1">
                 <a:solidFill>
                   <a:srgbClr val="FB8500"/>
                 </a:solidFill>
@@ -7791,7 +8091,502 @@
               </a:defRPr>
             </a:pPr>
             <a:r>
-              <a:t>Subsamples of one Georgia cohort test sample-size sensitivity; they do not validate transfer to other agencies.</a:t>
+              <a:t>ASSESS</a:t>
+            </a:r>
+          </a:p>
+        </p:txBody>
+      </p:sp>
+      <p:sp>
+        <p:nvSpPr>
+          <p:cNvPr id="7" name="TextBox 6"/>
+          <p:cNvSpPr txBox="1"/>
+          <p:nvPr/>
+        </p:nvSpPr>
+        <p:spPr>
+          <a:xfrm>
+            <a:off x="1005840" y="2587752"/>
+            <a:ext cx="4572000" cy="338327"/>
+          </a:xfrm>
+          <a:prstGeom prst="rect">
+            <a:avLst/>
+          </a:prstGeom>
+          <a:noFill/>
+        </p:spPr>
+        <p:txBody>
+          <a:bodyPr wrap="square" anchor="t">
+            <a:spAutoFit/>
+          </a:bodyPr>
+          <a:lstStyle/>
+          <a:p>
+            <a:pPr algn="ctr">
+              <a:defRPr sz="1500" b="0">
+                <a:solidFill>
+                  <a:srgbClr val="F0F4F8"/>
+                </a:solidFill>
+                <a:latin typeface="Aptos"/>
+              </a:defRPr>
+            </a:pPr>
+            <a:r>
+              <a:t>Score one person, all 3 models + SHAP</a:t>
+            </a:r>
+          </a:p>
+        </p:txBody>
+      </p:sp>
+      <p:sp>
+        <p:nvSpPr>
+          <p:cNvPr id="8" name="Rounded Rectangle 7"/>
+          <p:cNvSpPr/>
+          <p:nvPr/>
+        </p:nvSpPr>
+        <p:spPr>
+          <a:xfrm>
+            <a:off x="6263640" y="1600200"/>
+            <a:ext cx="5212080" cy="1572768"/>
+          </a:xfrm>
+          <a:prstGeom prst="roundRect">
+            <a:avLst/>
+          </a:prstGeom>
+          <a:solidFill>
+            <a:srgbClr val="143058"/>
+          </a:solidFill>
+          <a:ln>
+            <a:solidFill>
+              <a:srgbClr val="7B2CBF"/>
+            </a:solidFill>
+          </a:ln>
+        </p:spPr>
+        <p:style>
+          <a:lnRef idx="1">
+            <a:schemeClr val="accent1"/>
+          </a:lnRef>
+          <a:fillRef idx="3">
+            <a:schemeClr val="accent1"/>
+          </a:fillRef>
+          <a:effectRef idx="2">
+            <a:schemeClr val="accent1"/>
+          </a:effectRef>
+          <a:fontRef idx="minor">
+            <a:schemeClr val="lt1"/>
+          </a:fontRef>
+        </p:style>
+        <p:txBody>
+          <a:bodyPr rtlCol="0" anchor="ctr"/>
+          <a:lstStyle/>
+          <a:p>
+            <a:pPr algn="ctr"/>
+          </a:p>
+        </p:txBody>
+      </p:sp>
+      <p:sp>
+        <p:nvSpPr>
+          <p:cNvPr id="9" name="TextBox 8"/>
+          <p:cNvSpPr txBox="1"/>
+          <p:nvPr/>
+        </p:nvSpPr>
+        <p:spPr>
+          <a:xfrm>
+            <a:off x="6492240" y="1874519"/>
+            <a:ext cx="4754880" cy="365760"/>
+          </a:xfrm>
+          <a:prstGeom prst="rect">
+            <a:avLst/>
+          </a:prstGeom>
+          <a:noFill/>
+        </p:spPr>
+        <p:txBody>
+          <a:bodyPr wrap="square" anchor="t">
+            <a:spAutoFit/>
+          </a:bodyPr>
+          <a:lstStyle/>
+          <a:p>
+            <a:pPr algn="ctr">
+              <a:defRPr sz="2000" b="1">
+                <a:solidFill>
+                  <a:srgbClr val="7B2CBF"/>
+                </a:solidFill>
+                <a:latin typeface="Aptos"/>
+              </a:defRPr>
+            </a:pPr>
+            <a:r>
+              <a:t>AUDIT</a:t>
+            </a:r>
+          </a:p>
+        </p:txBody>
+      </p:sp>
+      <p:sp>
+        <p:nvSpPr>
+          <p:cNvPr id="10" name="TextBox 9"/>
+          <p:cNvSpPr txBox="1"/>
+          <p:nvPr/>
+        </p:nvSpPr>
+        <p:spPr>
+          <a:xfrm>
+            <a:off x="6583679" y="2587752"/>
+            <a:ext cx="4572000" cy="338327"/>
+          </a:xfrm>
+          <a:prstGeom prst="rect">
+            <a:avLst/>
+          </a:prstGeom>
+          <a:noFill/>
+        </p:spPr>
+        <p:txBody>
+          <a:bodyPr wrap="square" anchor="t">
+            <a:spAutoFit/>
+          </a:bodyPr>
+          <a:lstStyle/>
+          <a:p>
+            <a:pPr algn="ctr">
+              <a:defRPr sz="1500" b="0">
+                <a:solidFill>
+                  <a:srgbClr val="F0F4F8"/>
+                </a:solidFill>
+                <a:latin typeface="Aptos"/>
+              </a:defRPr>
+            </a:pPr>
+            <a:r>
+              <a:t>Race, gender, age at the deployed point + FPDP</a:t>
+            </a:r>
+          </a:p>
+        </p:txBody>
+      </p:sp>
+      <p:sp>
+        <p:nvSpPr>
+          <p:cNvPr id="11" name="Rounded Rectangle 10"/>
+          <p:cNvSpPr/>
+          <p:nvPr/>
+        </p:nvSpPr>
+        <p:spPr>
+          <a:xfrm>
+            <a:off x="685800" y="3474720"/>
+            <a:ext cx="5212080" cy="1572768"/>
+          </a:xfrm>
+          <a:prstGeom prst="roundRect">
+            <a:avLst/>
+          </a:prstGeom>
+          <a:solidFill>
+            <a:srgbClr val="143058"/>
+          </a:solidFill>
+          <a:ln>
+            <a:solidFill>
+              <a:srgbClr val="FB8500"/>
+            </a:solidFill>
+          </a:ln>
+        </p:spPr>
+        <p:style>
+          <a:lnRef idx="1">
+            <a:schemeClr val="accent1"/>
+          </a:lnRef>
+          <a:fillRef idx="3">
+            <a:schemeClr val="accent1"/>
+          </a:fillRef>
+          <a:effectRef idx="2">
+            <a:schemeClr val="accent1"/>
+          </a:effectRef>
+          <a:fontRef idx="minor">
+            <a:schemeClr val="lt1"/>
+          </a:fontRef>
+        </p:style>
+        <p:txBody>
+          <a:bodyPr rtlCol="0" anchor="ctr"/>
+          <a:lstStyle/>
+          <a:p>
+            <a:pPr algn="ctr"/>
+          </a:p>
+        </p:txBody>
+      </p:sp>
+      <p:sp>
+        <p:nvSpPr>
+          <p:cNvPr id="12" name="TextBox 11"/>
+          <p:cNvSpPr txBox="1"/>
+          <p:nvPr/>
+        </p:nvSpPr>
+        <p:spPr>
+          <a:xfrm>
+            <a:off x="914400" y="3749039"/>
+            <a:ext cx="4754880" cy="365760"/>
+          </a:xfrm>
+          <a:prstGeom prst="rect">
+            <a:avLst/>
+          </a:prstGeom>
+          <a:noFill/>
+        </p:spPr>
+        <p:txBody>
+          <a:bodyPr wrap="square" anchor="t">
+            <a:spAutoFit/>
+          </a:bodyPr>
+          <a:lstStyle/>
+          <a:p>
+            <a:pPr algn="ctr">
+              <a:defRPr sz="2000" b="1">
+                <a:solidFill>
+                  <a:srgbClr val="FB8500"/>
+                </a:solidFill>
+                <a:latin typeface="Aptos"/>
+              </a:defRPr>
+            </a:pPr>
+            <a:r>
+              <a:t>COMPARE</a:t>
+            </a:r>
+          </a:p>
+        </p:txBody>
+      </p:sp>
+      <p:sp>
+        <p:nvSpPr>
+          <p:cNvPr id="13" name="TextBox 12"/>
+          <p:cNvSpPr txBox="1"/>
+          <p:nvPr/>
+        </p:nvSpPr>
+        <p:spPr>
+          <a:xfrm>
+            <a:off x="1005840" y="4462272"/>
+            <a:ext cx="4572000" cy="338327"/>
+          </a:xfrm>
+          <a:prstGeom prst="rect">
+            <a:avLst/>
+          </a:prstGeom>
+          <a:noFill/>
+        </p:spPr>
+        <p:txBody>
+          <a:bodyPr wrap="square" anchor="t">
+            <a:spAutoFit/>
+          </a:bodyPr>
+          <a:lstStyle/>
+          <a:p>
+            <a:pPr algn="ctr">
+              <a:defRPr sz="1500" b="0">
+                <a:solidFill>
+                  <a:srgbClr val="F0F4F8"/>
+                </a:solidFill>
+                <a:latin typeface="Aptos"/>
+              </a:defRPr>
+            </a:pPr>
+            <a:r>
+              <a:t>Incumbent, learning curve, matrix</a:t>
+            </a:r>
+          </a:p>
+        </p:txBody>
+      </p:sp>
+      <p:sp>
+        <p:nvSpPr>
+          <p:cNvPr id="14" name="Rounded Rectangle 13"/>
+          <p:cNvSpPr/>
+          <p:nvPr/>
+        </p:nvSpPr>
+        <p:spPr>
+          <a:xfrm>
+            <a:off x="6263640" y="3474720"/>
+            <a:ext cx="5212080" cy="1572768"/>
+          </a:xfrm>
+          <a:prstGeom prst="roundRect">
+            <a:avLst/>
+          </a:prstGeom>
+          <a:solidFill>
+            <a:srgbClr val="143058"/>
+          </a:solidFill>
+          <a:ln>
+            <a:solidFill>
+              <a:srgbClr val="7B2CBF"/>
+            </a:solidFill>
+          </a:ln>
+        </p:spPr>
+        <p:style>
+          <a:lnRef idx="1">
+            <a:schemeClr val="accent1"/>
+          </a:lnRef>
+          <a:fillRef idx="3">
+            <a:schemeClr val="accent1"/>
+          </a:fillRef>
+          <a:effectRef idx="2">
+            <a:schemeClr val="accent1"/>
+          </a:effectRef>
+          <a:fontRef idx="minor">
+            <a:schemeClr val="lt1"/>
+          </a:fontRef>
+        </p:style>
+        <p:txBody>
+          <a:bodyPr rtlCol="0" anchor="ctr"/>
+          <a:lstStyle/>
+          <a:p>
+            <a:pPr algn="ctr"/>
+          </a:p>
+        </p:txBody>
+      </p:sp>
+      <p:sp>
+        <p:nvSpPr>
+          <p:cNvPr id="15" name="TextBox 14"/>
+          <p:cNvSpPr txBox="1"/>
+          <p:nvPr/>
+        </p:nvSpPr>
+        <p:spPr>
+          <a:xfrm>
+            <a:off x="6492240" y="3749039"/>
+            <a:ext cx="4754880" cy="365760"/>
+          </a:xfrm>
+          <a:prstGeom prst="rect">
+            <a:avLst/>
+          </a:prstGeom>
+          <a:noFill/>
+        </p:spPr>
+        <p:txBody>
+          <a:bodyPr wrap="square" anchor="t">
+            <a:spAutoFit/>
+          </a:bodyPr>
+          <a:lstStyle/>
+          <a:p>
+            <a:pPr algn="ctr">
+              <a:defRPr sz="2000" b="1">
+                <a:solidFill>
+                  <a:srgbClr val="7B2CBF"/>
+                </a:solidFill>
+                <a:latin typeface="Aptos"/>
+              </a:defRPr>
+            </a:pPr>
+            <a:r>
+              <a:t>SIMULATE</a:t>
+            </a:r>
+          </a:p>
+        </p:txBody>
+      </p:sp>
+      <p:sp>
+        <p:nvSpPr>
+          <p:cNvPr id="16" name="TextBox 15"/>
+          <p:cNvSpPr txBox="1"/>
+          <p:nvPr/>
+        </p:nvSpPr>
+        <p:spPr>
+          <a:xfrm>
+            <a:off x="6583679" y="4462272"/>
+            <a:ext cx="4572000" cy="338327"/>
+          </a:xfrm>
+          <a:prstGeom prst="rect">
+            <a:avLst/>
+          </a:prstGeom>
+          <a:noFill/>
+        </p:spPr>
+        <p:txBody>
+          <a:bodyPr wrap="square" anchor="t">
+            <a:spAutoFit/>
+          </a:bodyPr>
+          <a:lstStyle/>
+          <a:p>
+            <a:pPr algn="ctr">
+              <a:defRPr sz="1500" b="0">
+                <a:solidFill>
+                  <a:srgbClr val="F0F4F8"/>
+                </a:solidFill>
+                <a:latin typeface="Aptos"/>
+              </a:defRPr>
+            </a:pPr>
+            <a:r>
+              <a:t>Costs, capacity, sensitivity</a:t>
+            </a:r>
+          </a:p>
+        </p:txBody>
+      </p:sp>
+      <p:sp>
+        <p:nvSpPr>
+          <p:cNvPr id="17" name="TextBox 16"/>
+          <p:cNvSpPr txBox="1"/>
+          <p:nvPr/>
+        </p:nvSpPr>
+        <p:spPr>
+          <a:xfrm>
+            <a:off x="4023360" y="5715000"/>
+            <a:ext cx="4114800" cy="365760"/>
+          </a:xfrm>
+          <a:prstGeom prst="rect">
+            <a:avLst/>
+          </a:prstGeom>
+          <a:noFill/>
+        </p:spPr>
+        <p:txBody>
+          <a:bodyPr wrap="square" anchor="t">
+            <a:spAutoFit/>
+          </a:bodyPr>
+          <a:lstStyle/>
+          <a:p>
+            <a:pPr algn="ctr">
+              <a:defRPr sz="1700" b="1">
+                <a:solidFill>
+                  <a:srgbClr val="F0F4F8"/>
+                </a:solidFill>
+                <a:latin typeface="Consolas"/>
+              </a:defRPr>
+            </a:pPr>
+            <a:r>
+              <a:t>streamlit run app.py</a:t>
+            </a:r>
+          </a:p>
+        </p:txBody>
+      </p:sp>
+      <p:sp>
+        <p:nvSpPr>
+          <p:cNvPr id="18" name="TextBox 17"/>
+          <p:cNvSpPr txBox="1"/>
+          <p:nvPr/>
+        </p:nvSpPr>
+        <p:spPr>
+          <a:xfrm>
+            <a:off x="594360" y="6510528"/>
+            <a:ext cx="3657600" cy="164592"/>
+          </a:xfrm>
+          <a:prstGeom prst="rect">
+            <a:avLst/>
+          </a:prstGeom>
+          <a:noFill/>
+        </p:spPr>
+        <p:txBody>
+          <a:bodyPr wrap="square" anchor="t">
+            <a:spAutoFit/>
+          </a:bodyPr>
+          <a:lstStyle/>
+          <a:p>
+            <a:pPr algn="l">
+              <a:defRPr sz="800" b="0">
+                <a:solidFill>
+                  <a:srgbClr val="828FA0"/>
+                </a:solidFill>
+                <a:latin typeface="Aptos"/>
+              </a:defRPr>
+            </a:pPr>
+            <a:r>
+              <a:t>HEC Paris · ISAF · 2026</a:t>
+            </a:r>
+          </a:p>
+        </p:txBody>
+      </p:sp>
+      <p:sp>
+        <p:nvSpPr>
+          <p:cNvPr id="19" name="TextBox 18"/>
+          <p:cNvSpPr txBox="1"/>
+          <p:nvPr/>
+        </p:nvSpPr>
+        <p:spPr>
+          <a:xfrm>
+            <a:off x="11109960" y="6492240"/>
+            <a:ext cx="411480" cy="164592"/>
+          </a:xfrm>
+          <a:prstGeom prst="rect">
+            <a:avLst/>
+          </a:prstGeom>
+          <a:noFill/>
+        </p:spPr>
+        <p:txBody>
+          <a:bodyPr wrap="square" anchor="t">
+            <a:spAutoFit/>
+          </a:bodyPr>
+          <a:lstStyle/>
+          <a:p>
+            <a:pPr algn="r">
+              <a:defRPr sz="800" b="0">
+                <a:solidFill>
+                  <a:srgbClr val="828FA0"/>
+                </a:solidFill>
+                <a:latin typeface="Aptos"/>
+              </a:defRPr>
+            </a:pPr>
+            <a:r>
+              <a:t>15</a:t>
             </a:r>
           </a:p>
         </p:txBody>
@@ -7830,8 +8625,8 @@
         </p:nvSpPr>
         <p:spPr>
           <a:xfrm>
-            <a:off x="594360" y="256032"/>
-            <a:ext cx="10972800" cy="274320"/>
+            <a:off x="658368" y="2377440"/>
+            <a:ext cx="7315200" cy="457200"/>
           </a:xfrm>
           <a:prstGeom prst="rect">
             <a:avLst/>
@@ -7845,7 +8640,7 @@
           <a:lstStyle/>
           <a:p>
             <a:pPr algn="l">
-              <a:defRPr sz="1000" b="1">
+              <a:defRPr sz="1400" b="1">
                 <a:solidFill>
                   <a:srgbClr val="FB8500"/>
                 </a:solidFill>
@@ -7853,7 +8648,7 @@
               </a:defRPr>
             </a:pPr>
             <a:r>
-              <a:t>A2 · ECONOMIC PERFORMANCE</a:t>
+              <a:t>APPENDIX</a:t>
             </a:r>
           </a:p>
         </p:txBody>
@@ -7866,8 +8661,8 @@
         </p:nvSpPr>
         <p:spPr>
           <a:xfrm>
-            <a:off x="594360" y="621792"/>
-            <a:ext cx="10972800" cy="594360"/>
+            <a:off x="658368" y="2880360"/>
+            <a:ext cx="8229600" cy="1371600"/>
           </a:xfrm>
           <a:prstGeom prst="rect">
             <a:avLst/>
@@ -7881,7 +8676,7 @@
           <a:lstStyle/>
           <a:p>
             <a:pPr algn="l">
-              <a:defRPr sz="2600" b="1">
+              <a:defRPr sz="3400" b="1">
                 <a:solidFill>
                   <a:srgbClr val="FFFFFF"/>
                 </a:solidFill>
@@ -7889,312 +8684,39 @@
               </a:defRPr>
             </a:pPr>
             <a:r>
-              <a:t>Model value is a scenario, stress-tested</a:t>
-            </a:r>
-          </a:p>
-        </p:txBody>
-      </p:sp>
-      <p:sp>
-        <p:nvSpPr>
-          <p:cNvPr id="4" name="Rectangle 3"/>
-          <p:cNvSpPr/>
-          <p:nvPr/>
-        </p:nvSpPr>
-        <p:spPr>
-          <a:xfrm>
-            <a:off x="594360" y="1298448"/>
-            <a:ext cx="1005840" cy="50292"/>
-          </a:xfrm>
-          <a:prstGeom prst="rect">
-            <a:avLst/>
-          </a:prstGeom>
-          <a:solidFill>
-            <a:srgbClr val="FB8500"/>
-          </a:solidFill>
-          <a:ln>
-            <a:noFill/>
-          </a:ln>
-        </p:spPr>
-        <p:style>
-          <a:lnRef idx="1">
-            <a:schemeClr val="accent1"/>
-          </a:lnRef>
-          <a:fillRef idx="3">
-            <a:schemeClr val="accent1"/>
-          </a:fillRef>
-          <a:effectRef idx="2">
-            <a:schemeClr val="accent1"/>
-          </a:effectRef>
-          <a:fontRef idx="minor">
-            <a:schemeClr val="lt1"/>
-          </a:fontRef>
-        </p:style>
-        <p:txBody>
-          <a:bodyPr rtlCol="0" anchor="ctr"/>
-          <a:lstStyle/>
-          <a:p>
-            <a:pPr algn="ctr"/>
-          </a:p>
-        </p:txBody>
-      </p:sp>
-      <p:sp>
-        <p:nvSpPr>
-          <p:cNvPr id="5" name="Rounded Rectangle 4"/>
-          <p:cNvSpPr/>
-          <p:nvPr/>
-        </p:nvSpPr>
-        <p:spPr>
-          <a:xfrm>
-            <a:off x="731520" y="1737360"/>
-            <a:ext cx="2423160" cy="1261872"/>
-          </a:xfrm>
-          <a:prstGeom prst="roundRect">
-            <a:avLst/>
-          </a:prstGeom>
-          <a:solidFill>
-            <a:srgbClr val="143058"/>
-          </a:solidFill>
-          <a:ln>
-            <a:solidFill>
-              <a:srgbClr val="FB8500"/>
-            </a:solidFill>
-          </a:ln>
-        </p:spPr>
-        <p:style>
-          <a:lnRef idx="1">
-            <a:schemeClr val="accent1"/>
-          </a:lnRef>
-          <a:fillRef idx="3">
-            <a:schemeClr val="accent1"/>
-          </a:fillRef>
-          <a:effectRef idx="2">
-            <a:schemeClr val="accent1"/>
-          </a:effectRef>
-          <a:fontRef idx="minor">
-            <a:schemeClr val="lt1"/>
-          </a:fontRef>
-        </p:style>
-        <p:txBody>
-          <a:bodyPr rtlCol="0" anchor="ctr"/>
-          <a:lstStyle/>
-          <a:p>
-            <a:pPr algn="ctr"/>
-          </a:p>
-        </p:txBody>
-      </p:sp>
-      <p:sp>
-        <p:nvSpPr>
-          <p:cNvPr id="6" name="TextBox 5"/>
-          <p:cNvSpPr txBox="1"/>
-          <p:nvPr/>
-        </p:nvSpPr>
-        <p:spPr>
-          <a:xfrm>
-            <a:off x="841248" y="1874519"/>
-            <a:ext cx="2194560" cy="438912"/>
-          </a:xfrm>
-          <a:prstGeom prst="rect">
-            <a:avLst/>
-          </a:prstGeom>
-          <a:noFill/>
-        </p:spPr>
-        <p:txBody>
-          <a:bodyPr wrap="square" anchor="t">
-            <a:spAutoFit/>
-          </a:bodyPr>
-          <a:lstStyle/>
-          <a:p>
-            <a:pPr algn="ctr">
-              <a:defRPr sz="2400" b="1">
-                <a:solidFill>
-                  <a:srgbClr val="FB8500"/>
-                </a:solidFill>
-                <a:latin typeface="Aptos"/>
-              </a:defRPr>
-            </a:pPr>
-            <a:r>
-              <a:t>20%</a:t>
-            </a:r>
-          </a:p>
-        </p:txBody>
-      </p:sp>
-      <p:sp>
-        <p:nvSpPr>
-          <p:cNvPr id="7" name="TextBox 6"/>
-          <p:cNvSpPr txBox="1"/>
-          <p:nvPr/>
-        </p:nvSpPr>
-        <p:spPr>
-          <a:xfrm>
-            <a:off x="841248" y="2395728"/>
-            <a:ext cx="2194560" cy="274320"/>
-          </a:xfrm>
-          <a:prstGeom prst="rect">
-            <a:avLst/>
-          </a:prstGeom>
-          <a:noFill/>
-        </p:spPr>
-        <p:txBody>
-          <a:bodyPr wrap="square" anchor="t">
-            <a:spAutoFit/>
-          </a:bodyPr>
-          <a:lstStyle/>
-          <a:p>
-            <a:pPr algn="ctr">
-              <a:defRPr sz="1100" b="1">
-                <a:solidFill>
-                  <a:srgbClr val="FFFFFF"/>
-                </a:solidFill>
-                <a:latin typeface="Aptos"/>
-              </a:defRPr>
-            </a:pPr>
-            <a:r>
-              <a:t>SERVICE CAPACITY</a:t>
-            </a:r>
-          </a:p>
-        </p:txBody>
-      </p:sp>
-      <p:sp>
-        <p:nvSpPr>
-          <p:cNvPr id="8" name="Rounded Rectangle 7"/>
-          <p:cNvSpPr/>
-          <p:nvPr/>
-        </p:nvSpPr>
-        <p:spPr>
-          <a:xfrm>
-            <a:off x="3429000" y="1737360"/>
-            <a:ext cx="2423160" cy="1261872"/>
-          </a:xfrm>
-          <a:prstGeom prst="roundRect">
-            <a:avLst/>
-          </a:prstGeom>
-          <a:solidFill>
-            <a:srgbClr val="143058"/>
-          </a:solidFill>
-          <a:ln>
-            <a:solidFill>
-              <a:srgbClr val="00B4B4"/>
-            </a:solidFill>
-          </a:ln>
-        </p:spPr>
-        <p:style>
-          <a:lnRef idx="1">
-            <a:schemeClr val="accent1"/>
-          </a:lnRef>
-          <a:fillRef idx="3">
-            <a:schemeClr val="accent1"/>
-          </a:fillRef>
-          <a:effectRef idx="2">
-            <a:schemeClr val="accent1"/>
-          </a:effectRef>
-          <a:fontRef idx="minor">
-            <a:schemeClr val="lt1"/>
-          </a:fontRef>
-        </p:style>
-        <p:txBody>
-          <a:bodyPr rtlCol="0" anchor="ctr"/>
-          <a:lstStyle/>
-          <a:p>
-            <a:pPr algn="ctr"/>
-          </a:p>
-        </p:txBody>
-      </p:sp>
-      <p:sp>
-        <p:nvSpPr>
-          <p:cNvPr id="9" name="TextBox 8"/>
-          <p:cNvSpPr txBox="1"/>
-          <p:nvPr/>
-        </p:nvSpPr>
-        <p:spPr>
-          <a:xfrm>
-            <a:off x="3538728" y="1874519"/>
-            <a:ext cx="2194560" cy="438912"/>
-          </a:xfrm>
-          <a:prstGeom prst="rect">
-            <a:avLst/>
-          </a:prstGeom>
-          <a:noFill/>
-        </p:spPr>
-        <p:txBody>
-          <a:bodyPr wrap="square" anchor="t">
-            <a:spAutoFit/>
-          </a:bodyPr>
-          <a:lstStyle/>
-          <a:p>
-            <a:pPr algn="ctr">
-              <a:defRPr sz="2400" b="1">
-                <a:solidFill>
-                  <a:srgbClr val="00B4B4"/>
-                </a:solidFill>
-                <a:latin typeface="Aptos"/>
-              </a:defRPr>
-            </a:pPr>
-            <a:r>
-              <a:t>$5.04M</a:t>
-            </a:r>
-          </a:p>
-        </p:txBody>
-      </p:sp>
-      <p:sp>
-        <p:nvSpPr>
-          <p:cNvPr id="10" name="TextBox 9"/>
-          <p:cNvSpPr txBox="1"/>
-          <p:nvPr/>
-        </p:nvSpPr>
-        <p:spPr>
-          <a:xfrm>
-            <a:off x="3538728" y="2395728"/>
-            <a:ext cx="2194560" cy="274320"/>
-          </a:xfrm>
-          <a:prstGeom prst="rect">
-            <a:avLst/>
-          </a:prstGeom>
-          <a:noFill/>
-        </p:spPr>
-        <p:txBody>
-          <a:bodyPr wrap="square" anchor="t">
-            <a:spAutoFit/>
-          </a:bodyPr>
-          <a:lstStyle/>
-          <a:p>
-            <a:pPr algn="ctr">
-              <a:defRPr sz="1100" b="1">
-                <a:solidFill>
-                  <a:srgbClr val="FFFFFF"/>
-                </a:solidFill>
-                <a:latin typeface="Aptos"/>
-              </a:defRPr>
-            </a:pPr>
-            <a:r>
-              <a:t>LOGISTIC NET</a:t>
-            </a:r>
-          </a:p>
-        </p:txBody>
-      </p:sp>
-      <p:sp>
-        <p:nvSpPr>
-          <p:cNvPr id="11" name="TextBox 10"/>
-          <p:cNvSpPr txBox="1"/>
-          <p:nvPr/>
-        </p:nvSpPr>
-        <p:spPr>
-          <a:xfrm>
-            <a:off x="3538728" y="2706624"/>
-            <a:ext cx="2194560" cy="164592"/>
-          </a:xfrm>
-          <a:prstGeom prst="rect">
-            <a:avLst/>
-          </a:prstGeom>
-          <a:noFill/>
-        </p:spPr>
-        <p:txBody>
-          <a:bodyPr wrap="square" anchor="t">
-            <a:spAutoFit/>
-          </a:bodyPr>
-          <a:lstStyle/>
-          <a:p>
-            <a:pPr algn="ctr">
-              <a:defRPr sz="800" b="0">
+              <a:t>Supporting evidence</a:t>
+            </a:r>
+            <a:br/>
+            <a:r>
+              <a:t>for questions</a:t>
+            </a:r>
+          </a:p>
+        </p:txBody>
+      </p:sp>
+      <p:sp>
+        <p:nvSpPr>
+          <p:cNvPr id="4" name="TextBox 3"/>
+          <p:cNvSpPr txBox="1"/>
+          <p:nvPr/>
+        </p:nvSpPr>
+        <p:spPr>
+          <a:xfrm>
+            <a:off x="694944" y="4526280"/>
+            <a:ext cx="8686800" cy="822960"/>
+          </a:xfrm>
+          <a:prstGeom prst="rect">
+            <a:avLst/>
+          </a:prstGeom>
+          <a:noFill/>
+        </p:spPr>
+        <p:txBody>
+          <a:bodyPr wrap="square" anchor="t">
+            <a:spAutoFit/>
+          </a:bodyPr>
+          <a:lstStyle/>
+          <a:p>
+            <a:pPr algn="l">
+              <a:defRPr sz="1500" b="0">
                 <a:solidFill>
                   <a:srgbClr val="F0F4F8"/>
                 </a:solidFill>
@@ -8202,312 +8724,7 @@
               </a:defRPr>
             </a:pPr>
             <a:r>
-              <a:t>XGBoost $5.17M</a:t>
-            </a:r>
-          </a:p>
-        </p:txBody>
-      </p:sp>
-      <p:sp>
-        <p:nvSpPr>
-          <p:cNvPr id="12" name="Rounded Rectangle 11"/>
-          <p:cNvSpPr/>
-          <p:nvPr/>
-        </p:nvSpPr>
-        <p:spPr>
-          <a:xfrm>
-            <a:off x="6126480" y="1737360"/>
-            <a:ext cx="2423160" cy="1261872"/>
-          </a:xfrm>
-          <a:prstGeom prst="roundRect">
-            <a:avLst/>
-          </a:prstGeom>
-          <a:solidFill>
-            <a:srgbClr val="143058"/>
-          </a:solidFill>
-          <a:ln>
-            <a:solidFill>
-              <a:srgbClr val="D64343"/>
-            </a:solidFill>
-          </a:ln>
-        </p:spPr>
-        <p:style>
-          <a:lnRef idx="1">
-            <a:schemeClr val="accent1"/>
-          </a:lnRef>
-          <a:fillRef idx="3">
-            <a:schemeClr val="accent1"/>
-          </a:fillRef>
-          <a:effectRef idx="2">
-            <a:schemeClr val="accent1"/>
-          </a:effectRef>
-          <a:fontRef idx="minor">
-            <a:schemeClr val="lt1"/>
-          </a:fontRef>
-        </p:style>
-        <p:txBody>
-          <a:bodyPr rtlCol="0" anchor="ctr"/>
-          <a:lstStyle/>
-          <a:p>
-            <a:pPr algn="ctr"/>
-          </a:p>
-        </p:txBody>
-      </p:sp>
-      <p:sp>
-        <p:nvSpPr>
-          <p:cNvPr id="13" name="TextBox 12"/>
-          <p:cNvSpPr txBox="1"/>
-          <p:nvPr/>
-        </p:nvSpPr>
-        <p:spPr>
-          <a:xfrm>
-            <a:off x="6236208" y="1874519"/>
-            <a:ext cx="2194560" cy="438912"/>
-          </a:xfrm>
-          <a:prstGeom prst="rect">
-            <a:avLst/>
-          </a:prstGeom>
-          <a:noFill/>
-        </p:spPr>
-        <p:txBody>
-          <a:bodyPr wrap="square" anchor="t">
-            <a:spAutoFit/>
-          </a:bodyPr>
-          <a:lstStyle/>
-          <a:p>
-            <a:pPr algn="ctr">
-              <a:defRPr sz="2400" b="1">
-                <a:solidFill>
-                  <a:srgbClr val="D64343"/>
-                </a:solidFill>
-                <a:latin typeface="Aptos"/>
-              </a:defRPr>
-            </a:pPr>
-            <a:r>
-              <a:t>$2.73M</a:t>
-            </a:r>
-          </a:p>
-        </p:txBody>
-      </p:sp>
-      <p:sp>
-        <p:nvSpPr>
-          <p:cNvPr id="14" name="TextBox 13"/>
-          <p:cNvSpPr txBox="1"/>
-          <p:nvPr/>
-        </p:nvSpPr>
-        <p:spPr>
-          <a:xfrm>
-            <a:off x="6236208" y="2395728"/>
-            <a:ext cx="2194560" cy="274320"/>
-          </a:xfrm>
-          <a:prstGeom prst="rect">
-            <a:avLst/>
-          </a:prstGeom>
-          <a:noFill/>
-        </p:spPr>
-        <p:txBody>
-          <a:bodyPr wrap="square" anchor="t">
-            <a:spAutoFit/>
-          </a:bodyPr>
-          <a:lstStyle/>
-          <a:p>
-            <a:pPr algn="ctr">
-              <a:defRPr sz="1100" b="1">
-                <a:solidFill>
-                  <a:srgbClr val="FFFFFF"/>
-                </a:solidFill>
-                <a:latin typeface="Aptos"/>
-              </a:defRPr>
-            </a:pPr>
-            <a:r>
-              <a:t>INCUMBENT NET</a:t>
-            </a:r>
-          </a:p>
-        </p:txBody>
-      </p:sp>
-      <p:sp>
-        <p:nvSpPr>
-          <p:cNvPr id="15" name="Rounded Rectangle 14"/>
-          <p:cNvSpPr/>
-          <p:nvPr/>
-        </p:nvSpPr>
-        <p:spPr>
-          <a:xfrm>
-            <a:off x="8823960" y="1737360"/>
-            <a:ext cx="2423160" cy="1261872"/>
-          </a:xfrm>
-          <a:prstGeom prst="roundRect">
-            <a:avLst/>
-          </a:prstGeom>
-          <a:solidFill>
-            <a:srgbClr val="143058"/>
-          </a:solidFill>
-          <a:ln>
-            <a:solidFill>
-              <a:srgbClr val="828FA0"/>
-            </a:solidFill>
-          </a:ln>
-        </p:spPr>
-        <p:style>
-          <a:lnRef idx="1">
-            <a:schemeClr val="accent1"/>
-          </a:lnRef>
-          <a:fillRef idx="3">
-            <a:schemeClr val="accent1"/>
-          </a:fillRef>
-          <a:effectRef idx="2">
-            <a:schemeClr val="accent1"/>
-          </a:effectRef>
-          <a:fontRef idx="minor">
-            <a:schemeClr val="lt1"/>
-          </a:fontRef>
-        </p:style>
-        <p:txBody>
-          <a:bodyPr rtlCol="0" anchor="ctr"/>
-          <a:lstStyle/>
-          <a:p>
-            <a:pPr algn="ctr"/>
-          </a:p>
-        </p:txBody>
-      </p:sp>
-      <p:sp>
-        <p:nvSpPr>
-          <p:cNvPr id="16" name="TextBox 15"/>
-          <p:cNvSpPr txBox="1"/>
-          <p:nvPr/>
-        </p:nvSpPr>
-        <p:spPr>
-          <a:xfrm>
-            <a:off x="8933688" y="1874519"/>
-            <a:ext cx="2194560" cy="438912"/>
-          </a:xfrm>
-          <a:prstGeom prst="rect">
-            <a:avLst/>
-          </a:prstGeom>
-          <a:noFill/>
-        </p:spPr>
-        <p:txBody>
-          <a:bodyPr wrap="square" anchor="t">
-            <a:spAutoFit/>
-          </a:bodyPr>
-          <a:lstStyle/>
-          <a:p>
-            <a:pPr algn="ctr">
-              <a:defRPr sz="2400" b="1">
-                <a:solidFill>
-                  <a:srgbClr val="828FA0"/>
-                </a:solidFill>
-                <a:latin typeface="Aptos"/>
-              </a:defRPr>
-            </a:pPr>
-            <a:r>
-              <a:t>$1.46M</a:t>
-            </a:r>
-          </a:p>
-        </p:txBody>
-      </p:sp>
-      <p:sp>
-        <p:nvSpPr>
-          <p:cNvPr id="17" name="TextBox 16"/>
-          <p:cNvSpPr txBox="1"/>
-          <p:nvPr/>
-        </p:nvSpPr>
-        <p:spPr>
-          <a:xfrm>
-            <a:off x="8933688" y="2395728"/>
-            <a:ext cx="2194560" cy="274320"/>
-          </a:xfrm>
-          <a:prstGeom prst="rect">
-            <a:avLst/>
-          </a:prstGeom>
-          <a:noFill/>
-        </p:spPr>
-        <p:txBody>
-          <a:bodyPr wrap="square" anchor="t">
-            <a:spAutoFit/>
-          </a:bodyPr>
-          <a:lstStyle/>
-          <a:p>
-            <a:pPr algn="ctr">
-              <a:defRPr sz="1100" b="1">
-                <a:solidFill>
-                  <a:srgbClr val="FFFFFF"/>
-                </a:solidFill>
-                <a:latin typeface="Aptos"/>
-              </a:defRPr>
-            </a:pPr>
-            <a:r>
-              <a:t>RANDOM NET</a:t>
-            </a:r>
-          </a:p>
-        </p:txBody>
-      </p:sp>
-      <p:sp>
-        <p:nvSpPr>
-          <p:cNvPr id="18" name="TextBox 17"/>
-          <p:cNvSpPr txBox="1"/>
-          <p:nvPr/>
-        </p:nvSpPr>
-        <p:spPr>
-          <a:xfrm>
-            <a:off x="731520" y="3401568"/>
-            <a:ext cx="10698480" cy="4389120"/>
-          </a:xfrm>
-          <a:prstGeom prst="rect">
-            <a:avLst/>
-          </a:prstGeom>
-          <a:noFill/>
-        </p:spPr>
-        <p:txBody>
-          <a:bodyPr wrap="square">
-            <a:spAutoFit/>
-          </a:bodyPr>
-          <a:lstStyle/>
-          <a:p>
-            <a:pPr>
-              <a:spcAft>
-                <a:spcPts val="1200"/>
-              </a:spcAft>
-              <a:defRPr sz="2000">
-                <a:solidFill>
-                  <a:srgbClr val="FFFFFF"/>
-                </a:solidFill>
-                <a:latin typeface="Aptos"/>
-              </a:defRPr>
-            </a:pPr>
-            <a:r>
-              <a:t>•  $5,000 support cost · $50,000 event cost · 20% assumed effectiveness — all editable in the app</a:t>
-            </a:r>
-          </a:p>
-          <a:p>
-            <a:pPr>
-              <a:spcAft>
-                <a:spcPts val="1200"/>
-              </a:spcAft>
-              <a:defRPr sz="2000">
-                <a:solidFill>
-                  <a:srgbClr val="FFFFFF"/>
-                </a:solidFill>
-                <a:latin typeface="Aptos"/>
-              </a:defRPr>
-            </a:pPr>
-            <a:r>
-              <a:t>•  Models beat the incumbent at every capacity from 5% to 50% (sensitivity sweep)</a:t>
-            </a:r>
-          </a:p>
-          <a:p>
-            <a:pPr>
-              <a:spcAft>
-                <a:spcPts val="1200"/>
-              </a:spcAft>
-              <a:defRPr sz="2000">
-                <a:solidFill>
-                  <a:srgbClr val="FFFFFF"/>
-                </a:solidFill>
-                <a:latin typeface="Aptos"/>
-              </a:defRPr>
-            </a:pPr>
-            <a:r>
-              <a:t>•  A randomized or quasi-experimental pilot must estimate real intervention impact</a:t>
+              <a:t>Learning curve · economic sensitivity · explanation disagreement · LIME fidelity · process log · proxy recovery · decision stability</a:t>
             </a:r>
           </a:p>
         </p:txBody>
@@ -8569,7 +8786,7 @@
               </a:defRPr>
             </a:pPr>
             <a:r>
-              <a:t>A3 · INTERPRETABILITY</a:t>
+              <a:t>A1 · LEARNING CURVE</a:t>
             </a:r>
           </a:p>
         </p:txBody>
@@ -8605,7 +8822,7 @@
               </a:defRPr>
             </a:pPr>
             <a:r>
-              <a:t>Prediction explanations and their limits</a:t>
+              <a:t>Which model for which agency size?</a:t>
             </a:r>
           </a:p>
         </p:txBody>
@@ -8655,7 +8872,7 @@
       </p:sp>
       <p:pic>
         <p:nvPicPr>
-          <p:cNvPr id="5" name="Picture 4" descr="shap_individual.png"/>
+          <p:cNvPr id="5" name="Picture 4" descr="learning_curve.png"/>
           <p:cNvPicPr>
             <a:picLocks noChangeAspect="1"/>
           </p:cNvPicPr>
@@ -8669,8 +8886,8 @@
         </p:blipFill>
         <p:spPr>
           <a:xfrm>
-            <a:off x="365760" y="1554480"/>
-            <a:ext cx="7589520" cy="2869645"/>
+            <a:off x="731520" y="1645920"/>
+            <a:ext cx="10698480" cy="4022802"/>
           </a:xfrm>
           <a:prstGeom prst="rect">
             <a:avLst/>
@@ -8679,59 +8896,14 @@
       </p:pic>
       <p:sp>
         <p:nvSpPr>
-          <p:cNvPr id="6" name="Rounded Rectangle 5"/>
-          <p:cNvSpPr/>
-          <p:nvPr/>
-        </p:nvSpPr>
-        <p:spPr>
-          <a:xfrm>
-            <a:off x="8229600" y="1554480"/>
-            <a:ext cx="3566160" cy="4480560"/>
-          </a:xfrm>
-          <a:prstGeom prst="roundRect">
-            <a:avLst/>
-          </a:prstGeom>
-          <a:solidFill>
-            <a:srgbClr val="143058"/>
-          </a:solidFill>
-          <a:ln>
-            <a:solidFill>
-              <a:srgbClr val="7B2CBF"/>
-            </a:solidFill>
-          </a:ln>
-        </p:spPr>
-        <p:style>
-          <a:lnRef idx="1">
-            <a:schemeClr val="accent1"/>
-          </a:lnRef>
-          <a:fillRef idx="3">
-            <a:schemeClr val="accent1"/>
-          </a:fillRef>
-          <a:effectRef idx="2">
-            <a:schemeClr val="accent1"/>
-          </a:effectRef>
-          <a:fontRef idx="minor">
-            <a:schemeClr val="lt1"/>
-          </a:fontRef>
-        </p:style>
-        <p:txBody>
-          <a:bodyPr rtlCol="0" anchor="ctr"/>
-          <a:lstStyle/>
-          <a:p>
-            <a:pPr algn="ctr"/>
-          </a:p>
-        </p:txBody>
-      </p:sp>
-      <p:sp>
-        <p:nvSpPr>
-          <p:cNvPr id="7" name="TextBox 6"/>
-          <p:cNvSpPr txBox="1"/>
-          <p:nvPr/>
-        </p:nvSpPr>
-        <p:spPr>
-          <a:xfrm>
-            <a:off x="8458200" y="1828800"/>
-            <a:ext cx="3108960" cy="365760"/>
+          <p:cNvPr id="6" name="TextBox 5"/>
+          <p:cNvSpPr txBox="1"/>
+          <p:nvPr/>
+        </p:nvSpPr>
+        <p:spPr>
+          <a:xfrm>
+            <a:off x="914400" y="6126480"/>
+            <a:ext cx="10058400" cy="457200"/>
           </a:xfrm>
           <a:prstGeom prst="rect">
             <a:avLst/>
@@ -8745,102 +8917,15 @@
           <a:lstStyle/>
           <a:p>
             <a:pPr algn="ctr">
-              <a:defRPr sz="2000" b="1">
-                <a:solidFill>
-                  <a:srgbClr val="7B2CBF"/>
-                </a:solidFill>
-                <a:latin typeface="Aptos"/>
-              </a:defRPr>
-            </a:pPr>
-            <a:r>
-              <a:t>METHODS</a:t>
-            </a:r>
-          </a:p>
-        </p:txBody>
-      </p:sp>
-      <p:sp>
-        <p:nvSpPr>
-          <p:cNvPr id="8" name="TextBox 7"/>
-          <p:cNvSpPr txBox="1"/>
-          <p:nvPr/>
-        </p:nvSpPr>
-        <p:spPr>
-          <a:xfrm>
-            <a:off x="8549640" y="2542032"/>
-            <a:ext cx="2926080" cy="3246120"/>
-          </a:xfrm>
-          <a:prstGeom prst="rect">
-            <a:avLst/>
-          </a:prstGeom>
-          <a:noFill/>
-        </p:spPr>
-        <p:txBody>
-          <a:bodyPr wrap="square" anchor="t">
-            <a:spAutoFit/>
-          </a:bodyPr>
-          <a:lstStyle/>
-          <a:p>
-            <a:pPr algn="ctr">
-              <a:defRPr sz="1500" b="0">
-                <a:solidFill>
-                  <a:srgbClr val="F0F4F8"/>
-                </a:solidFill>
-                <a:latin typeface="Aptos"/>
-              </a:defRPr>
-            </a:pPr>
-            <a:r>
-              <a:t>SHAP + LIME (local)</a:t>
-            </a:r>
-            <a:br/>
-            <a:br/>
-            <a:r>
-              <a:t>XPER on AUC (Pérignon)</a:t>
-            </a:r>
-            <a:br/>
-            <a:br/>
-            <a:r>
-              <a:t>Global surrogate: imperfect fidelity</a:t>
-            </a:r>
-            <a:br/>
-            <a:br/>
-            <a:r>
-              <a:t>PDP/ICE for all three</a:t>
-            </a:r>
-          </a:p>
-        </p:txBody>
-      </p:sp>
-      <p:sp>
-        <p:nvSpPr>
-          <p:cNvPr id="9" name="TextBox 8"/>
-          <p:cNvSpPr txBox="1"/>
-          <p:nvPr/>
-        </p:nvSpPr>
-        <p:spPr>
-          <a:xfrm>
-            <a:off x="914400" y="6172200"/>
-            <a:ext cx="10058400" cy="274320"/>
-          </a:xfrm>
-          <a:prstGeom prst="rect">
-            <a:avLst/>
-          </a:prstGeom>
-          <a:noFill/>
-        </p:spPr>
-        <p:txBody>
-          <a:bodyPr wrap="square" anchor="t">
-            <a:spAutoFit/>
-          </a:bodyPr>
-          <a:lstStyle/>
-          <a:p>
-            <a:pPr algn="ctr">
-              <a:defRPr sz="1100" b="1">
-                <a:solidFill>
-                  <a:srgbClr val="D64343"/>
-                </a:solidFill>
-                <a:latin typeface="Aptos"/>
-              </a:defRPr>
-            </a:pPr>
-            <a:r>
-              <a:t>TabICLv2 has no native explanation path — a real deployment cost, covered only by model-agnostic PDP/ICE.</a:t>
+              <a:defRPr sz="1300" b="1">
+                <a:solidFill>
+                  <a:srgbClr val="FB8500"/>
+                </a:solidFill>
+                <a:latin typeface="Aptos"/>
+              </a:defRPr>
+            </a:pPr>
+            <a:r>
+              <a:t>Subsamples of one Georgia cohort test sample-size sensitivity; they do not validate transfer to other agencies.</a:t>
             </a:r>
           </a:p>
         </p:txBody>
@@ -8902,7 +8987,7 @@
               </a:defRPr>
             </a:pPr>
             <a:r>
-              <a:t>A4 · EXPLANATION DISAGREEMENT</a:t>
+              <a:t>A2 · ECONOMIC PERFORMANCE</a:t>
             </a:r>
           </a:p>
         </p:txBody>
@@ -8938,7 +9023,7 @@
               </a:defRPr>
             </a:pPr>
             <a:r>
-              <a:t>SHAP, permutation importance and XPER rank differently</a:t>
+              <a:t>Model value is a scenario, stress-tested</a:t>
             </a:r>
           </a:p>
         </p:txBody>
@@ -8986,40 +9071,16 @@
           </a:p>
         </p:txBody>
       </p:sp>
-      <p:pic>
-        <p:nvPicPr>
-          <p:cNvPr id="5" name="Picture 4" descr="explanation_agreement.png"/>
-          <p:cNvPicPr>
-            <a:picLocks noChangeAspect="1"/>
-          </p:cNvPicPr>
-          <p:nvPr/>
-        </p:nvPicPr>
-        <p:blipFill>
-          <a:blip r:embed="rId2"/>
-          <a:stretch>
-            <a:fillRect/>
-          </a:stretch>
-        </p:blipFill>
-        <p:spPr>
-          <a:xfrm>
-            <a:off x="457200" y="1554480"/>
-            <a:ext cx="7680960" cy="3846513"/>
-          </a:xfrm>
-          <a:prstGeom prst="rect">
-            <a:avLst/>
-          </a:prstGeom>
-        </p:spPr>
-      </p:pic>
-      <p:sp>
-        <p:nvSpPr>
-          <p:cNvPr id="6" name="Rounded Rectangle 5"/>
+      <p:sp>
+        <p:nvSpPr>
+          <p:cNvPr id="5" name="Rounded Rectangle 4"/>
           <p:cNvSpPr/>
           <p:nvPr/>
         </p:nvSpPr>
         <p:spPr>
           <a:xfrm>
-            <a:off x="8321040" y="1554480"/>
-            <a:ext cx="3474720" cy="4480560"/>
+            <a:off x="731520" y="1737360"/>
+            <a:ext cx="2423160" cy="1261872"/>
           </a:xfrm>
           <a:prstGeom prst="roundRect">
             <a:avLst/>
@@ -9029,7 +9090,7 @@
           </a:solidFill>
           <a:ln>
             <a:solidFill>
-              <a:srgbClr val="7B2CBF"/>
+              <a:srgbClr val="FB8500"/>
             </a:solidFill>
           </a:ln>
         </p:spPr>
@@ -9057,101 +9118,50 @@
       </p:sp>
       <p:sp>
         <p:nvSpPr>
+          <p:cNvPr id="6" name="TextBox 5"/>
+          <p:cNvSpPr txBox="1"/>
+          <p:nvPr/>
+        </p:nvSpPr>
+        <p:spPr>
+          <a:xfrm>
+            <a:off x="841248" y="1874519"/>
+            <a:ext cx="2194560" cy="438912"/>
+          </a:xfrm>
+          <a:prstGeom prst="rect">
+            <a:avLst/>
+          </a:prstGeom>
+          <a:noFill/>
+        </p:spPr>
+        <p:txBody>
+          <a:bodyPr wrap="square" anchor="t">
+            <a:spAutoFit/>
+          </a:bodyPr>
+          <a:lstStyle/>
+          <a:p>
+            <a:pPr algn="ctr">
+              <a:defRPr sz="2400" b="1">
+                <a:solidFill>
+                  <a:srgbClr val="FB8500"/>
+                </a:solidFill>
+                <a:latin typeface="Aptos"/>
+              </a:defRPr>
+            </a:pPr>
+            <a:r>
+              <a:t>20%</a:t>
+            </a:r>
+          </a:p>
+        </p:txBody>
+      </p:sp>
+      <p:sp>
+        <p:nvSpPr>
           <p:cNvPr id="7" name="TextBox 6"/>
           <p:cNvSpPr txBox="1"/>
           <p:nvPr/>
         </p:nvSpPr>
         <p:spPr>
           <a:xfrm>
-            <a:off x="8549640" y="1828800"/>
-            <a:ext cx="3017520" cy="365760"/>
-          </a:xfrm>
-          <a:prstGeom prst="rect">
-            <a:avLst/>
-          </a:prstGeom>
-          <a:noFill/>
-        </p:spPr>
-        <p:txBody>
-          <a:bodyPr wrap="square" anchor="t">
-            <a:spAutoFit/>
-          </a:bodyPr>
-          <a:lstStyle/>
-          <a:p>
-            <a:pPr algn="ctr">
-              <a:defRPr sz="2000" b="1">
-                <a:solidFill>
-                  <a:srgbClr val="7B2CBF"/>
-                </a:solidFill>
-                <a:latin typeface="Aptos"/>
-              </a:defRPr>
-            </a:pPr>
-            <a:r>
-              <a:t>WHY</a:t>
-            </a:r>
-          </a:p>
-        </p:txBody>
-      </p:sp>
-      <p:sp>
-        <p:nvSpPr>
-          <p:cNvPr id="8" name="TextBox 7"/>
-          <p:cNvSpPr txBox="1"/>
-          <p:nvPr/>
-        </p:nvSpPr>
-        <p:spPr>
-          <a:xfrm>
-            <a:off x="8641080" y="2542032"/>
-            <a:ext cx="2834639" cy="3246120"/>
-          </a:xfrm>
-          <a:prstGeom prst="rect">
-            <a:avLst/>
-          </a:prstGeom>
-          <a:noFill/>
-        </p:spPr>
-        <p:txBody>
-          <a:bodyPr wrap="square" anchor="t">
-            <a:spAutoFit/>
-          </a:bodyPr>
-          <a:lstStyle/>
-          <a:p>
-            <a:pPr algn="ctr">
-              <a:defRPr sz="1500" b="0">
-                <a:solidFill>
-                  <a:srgbClr val="F0F4F8"/>
-                </a:solidFill>
-                <a:latin typeface="Aptos"/>
-              </a:defRPr>
-            </a:pPr>
-            <a:r>
-              <a:t>SHAP explains the prediction</a:t>
-            </a:r>
-            <a:br/>
-            <a:br/>
-            <a:r>
-              <a:t>Permutation importance explains loss</a:t>
-            </a:r>
-            <a:br/>
-            <a:br/>
-            <a:r>
-              <a:t>XPER decomposes AUC</a:t>
-            </a:r>
-            <a:br/>
-            <a:br/>
-            <a:r>
-              <a:t>Different questions, so different rankings</a:t>
-            </a:r>
-          </a:p>
-        </p:txBody>
-      </p:sp>
-      <p:sp>
-        <p:nvSpPr>
-          <p:cNvPr id="9" name="TextBox 8"/>
-          <p:cNvSpPr txBox="1"/>
-          <p:nvPr/>
-        </p:nvSpPr>
-        <p:spPr>
-          <a:xfrm>
-            <a:off x="914400" y="6172200"/>
-            <a:ext cx="10058400" cy="274320"/>
+            <a:off x="841248" y="2395728"/>
+            <a:ext cx="2194560" cy="274320"/>
           </a:xfrm>
           <a:prstGeom prst="rect">
             <a:avLst/>
@@ -9167,13 +9177,471 @@
             <a:pPr algn="ctr">
               <a:defRPr sz="1100" b="1">
                 <a:solidFill>
-                  <a:srgbClr val="FB8500"/>
-                </a:solidFill>
-                <a:latin typeface="Aptos"/>
-              </a:defRPr>
-            </a:pPr>
-            <a:r>
-              <a:t>Top-10 sets largely coincide; ordering is method-dependent. Quote the set, not the rank.</a:t>
+                  <a:srgbClr val="FFFFFF"/>
+                </a:solidFill>
+                <a:latin typeface="Aptos"/>
+              </a:defRPr>
+            </a:pPr>
+            <a:r>
+              <a:t>SERVICE CAPACITY</a:t>
+            </a:r>
+          </a:p>
+        </p:txBody>
+      </p:sp>
+      <p:sp>
+        <p:nvSpPr>
+          <p:cNvPr id="8" name="Rounded Rectangle 7"/>
+          <p:cNvSpPr/>
+          <p:nvPr/>
+        </p:nvSpPr>
+        <p:spPr>
+          <a:xfrm>
+            <a:off x="3429000" y="1737360"/>
+            <a:ext cx="2423160" cy="1261872"/>
+          </a:xfrm>
+          <a:prstGeom prst="roundRect">
+            <a:avLst/>
+          </a:prstGeom>
+          <a:solidFill>
+            <a:srgbClr val="143058"/>
+          </a:solidFill>
+          <a:ln>
+            <a:solidFill>
+              <a:srgbClr val="00B4B4"/>
+            </a:solidFill>
+          </a:ln>
+        </p:spPr>
+        <p:style>
+          <a:lnRef idx="1">
+            <a:schemeClr val="accent1"/>
+          </a:lnRef>
+          <a:fillRef idx="3">
+            <a:schemeClr val="accent1"/>
+          </a:fillRef>
+          <a:effectRef idx="2">
+            <a:schemeClr val="accent1"/>
+          </a:effectRef>
+          <a:fontRef idx="minor">
+            <a:schemeClr val="lt1"/>
+          </a:fontRef>
+        </p:style>
+        <p:txBody>
+          <a:bodyPr rtlCol="0" anchor="ctr"/>
+          <a:lstStyle/>
+          <a:p>
+            <a:pPr algn="ctr"/>
+          </a:p>
+        </p:txBody>
+      </p:sp>
+      <p:sp>
+        <p:nvSpPr>
+          <p:cNvPr id="9" name="TextBox 8"/>
+          <p:cNvSpPr txBox="1"/>
+          <p:nvPr/>
+        </p:nvSpPr>
+        <p:spPr>
+          <a:xfrm>
+            <a:off x="3538728" y="1874519"/>
+            <a:ext cx="2194560" cy="438912"/>
+          </a:xfrm>
+          <a:prstGeom prst="rect">
+            <a:avLst/>
+          </a:prstGeom>
+          <a:noFill/>
+        </p:spPr>
+        <p:txBody>
+          <a:bodyPr wrap="square" anchor="t">
+            <a:spAutoFit/>
+          </a:bodyPr>
+          <a:lstStyle/>
+          <a:p>
+            <a:pPr algn="ctr">
+              <a:defRPr sz="2400" b="1">
+                <a:solidFill>
+                  <a:srgbClr val="00B4B4"/>
+                </a:solidFill>
+                <a:latin typeface="Aptos"/>
+              </a:defRPr>
+            </a:pPr>
+            <a:r>
+              <a:t>$5.04M</a:t>
+            </a:r>
+          </a:p>
+        </p:txBody>
+      </p:sp>
+      <p:sp>
+        <p:nvSpPr>
+          <p:cNvPr id="10" name="TextBox 9"/>
+          <p:cNvSpPr txBox="1"/>
+          <p:nvPr/>
+        </p:nvSpPr>
+        <p:spPr>
+          <a:xfrm>
+            <a:off x="3538728" y="2395728"/>
+            <a:ext cx="2194560" cy="274320"/>
+          </a:xfrm>
+          <a:prstGeom prst="rect">
+            <a:avLst/>
+          </a:prstGeom>
+          <a:noFill/>
+        </p:spPr>
+        <p:txBody>
+          <a:bodyPr wrap="square" anchor="t">
+            <a:spAutoFit/>
+          </a:bodyPr>
+          <a:lstStyle/>
+          <a:p>
+            <a:pPr algn="ctr">
+              <a:defRPr sz="1100" b="1">
+                <a:solidFill>
+                  <a:srgbClr val="FFFFFF"/>
+                </a:solidFill>
+                <a:latin typeface="Aptos"/>
+              </a:defRPr>
+            </a:pPr>
+            <a:r>
+              <a:t>LOGISTIC NET</a:t>
+            </a:r>
+          </a:p>
+        </p:txBody>
+      </p:sp>
+      <p:sp>
+        <p:nvSpPr>
+          <p:cNvPr id="11" name="TextBox 10"/>
+          <p:cNvSpPr txBox="1"/>
+          <p:nvPr/>
+        </p:nvSpPr>
+        <p:spPr>
+          <a:xfrm>
+            <a:off x="3538728" y="2706624"/>
+            <a:ext cx="2194560" cy="164592"/>
+          </a:xfrm>
+          <a:prstGeom prst="rect">
+            <a:avLst/>
+          </a:prstGeom>
+          <a:noFill/>
+        </p:spPr>
+        <p:txBody>
+          <a:bodyPr wrap="square" anchor="t">
+            <a:spAutoFit/>
+          </a:bodyPr>
+          <a:lstStyle/>
+          <a:p>
+            <a:pPr algn="ctr">
+              <a:defRPr sz="800" b="0">
+                <a:solidFill>
+                  <a:srgbClr val="F0F4F8"/>
+                </a:solidFill>
+                <a:latin typeface="Aptos"/>
+              </a:defRPr>
+            </a:pPr>
+            <a:r>
+              <a:t>XGBoost $5.17M</a:t>
+            </a:r>
+          </a:p>
+        </p:txBody>
+      </p:sp>
+      <p:sp>
+        <p:nvSpPr>
+          <p:cNvPr id="12" name="Rounded Rectangle 11"/>
+          <p:cNvSpPr/>
+          <p:nvPr/>
+        </p:nvSpPr>
+        <p:spPr>
+          <a:xfrm>
+            <a:off x="6126480" y="1737360"/>
+            <a:ext cx="2423160" cy="1261872"/>
+          </a:xfrm>
+          <a:prstGeom prst="roundRect">
+            <a:avLst/>
+          </a:prstGeom>
+          <a:solidFill>
+            <a:srgbClr val="143058"/>
+          </a:solidFill>
+          <a:ln>
+            <a:solidFill>
+              <a:srgbClr val="D64343"/>
+            </a:solidFill>
+          </a:ln>
+        </p:spPr>
+        <p:style>
+          <a:lnRef idx="1">
+            <a:schemeClr val="accent1"/>
+          </a:lnRef>
+          <a:fillRef idx="3">
+            <a:schemeClr val="accent1"/>
+          </a:fillRef>
+          <a:effectRef idx="2">
+            <a:schemeClr val="accent1"/>
+          </a:effectRef>
+          <a:fontRef idx="minor">
+            <a:schemeClr val="lt1"/>
+          </a:fontRef>
+        </p:style>
+        <p:txBody>
+          <a:bodyPr rtlCol="0" anchor="ctr"/>
+          <a:lstStyle/>
+          <a:p>
+            <a:pPr algn="ctr"/>
+          </a:p>
+        </p:txBody>
+      </p:sp>
+      <p:sp>
+        <p:nvSpPr>
+          <p:cNvPr id="13" name="TextBox 12"/>
+          <p:cNvSpPr txBox="1"/>
+          <p:nvPr/>
+        </p:nvSpPr>
+        <p:spPr>
+          <a:xfrm>
+            <a:off x="6236208" y="1874519"/>
+            <a:ext cx="2194560" cy="438912"/>
+          </a:xfrm>
+          <a:prstGeom prst="rect">
+            <a:avLst/>
+          </a:prstGeom>
+          <a:noFill/>
+        </p:spPr>
+        <p:txBody>
+          <a:bodyPr wrap="square" anchor="t">
+            <a:spAutoFit/>
+          </a:bodyPr>
+          <a:lstStyle/>
+          <a:p>
+            <a:pPr algn="ctr">
+              <a:defRPr sz="2400" b="1">
+                <a:solidFill>
+                  <a:srgbClr val="D64343"/>
+                </a:solidFill>
+                <a:latin typeface="Aptos"/>
+              </a:defRPr>
+            </a:pPr>
+            <a:r>
+              <a:t>$2.73M</a:t>
+            </a:r>
+          </a:p>
+        </p:txBody>
+      </p:sp>
+      <p:sp>
+        <p:nvSpPr>
+          <p:cNvPr id="14" name="TextBox 13"/>
+          <p:cNvSpPr txBox="1"/>
+          <p:nvPr/>
+        </p:nvSpPr>
+        <p:spPr>
+          <a:xfrm>
+            <a:off x="6236208" y="2395728"/>
+            <a:ext cx="2194560" cy="274320"/>
+          </a:xfrm>
+          <a:prstGeom prst="rect">
+            <a:avLst/>
+          </a:prstGeom>
+          <a:noFill/>
+        </p:spPr>
+        <p:txBody>
+          <a:bodyPr wrap="square" anchor="t">
+            <a:spAutoFit/>
+          </a:bodyPr>
+          <a:lstStyle/>
+          <a:p>
+            <a:pPr algn="ctr">
+              <a:defRPr sz="1100" b="1">
+                <a:solidFill>
+                  <a:srgbClr val="FFFFFF"/>
+                </a:solidFill>
+                <a:latin typeface="Aptos"/>
+              </a:defRPr>
+            </a:pPr>
+            <a:r>
+              <a:t>INCUMBENT NET</a:t>
+            </a:r>
+          </a:p>
+        </p:txBody>
+      </p:sp>
+      <p:sp>
+        <p:nvSpPr>
+          <p:cNvPr id="15" name="Rounded Rectangle 14"/>
+          <p:cNvSpPr/>
+          <p:nvPr/>
+        </p:nvSpPr>
+        <p:spPr>
+          <a:xfrm>
+            <a:off x="8823960" y="1737360"/>
+            <a:ext cx="2423160" cy="1261872"/>
+          </a:xfrm>
+          <a:prstGeom prst="roundRect">
+            <a:avLst/>
+          </a:prstGeom>
+          <a:solidFill>
+            <a:srgbClr val="143058"/>
+          </a:solidFill>
+          <a:ln>
+            <a:solidFill>
+              <a:srgbClr val="828FA0"/>
+            </a:solidFill>
+          </a:ln>
+        </p:spPr>
+        <p:style>
+          <a:lnRef idx="1">
+            <a:schemeClr val="accent1"/>
+          </a:lnRef>
+          <a:fillRef idx="3">
+            <a:schemeClr val="accent1"/>
+          </a:fillRef>
+          <a:effectRef idx="2">
+            <a:schemeClr val="accent1"/>
+          </a:effectRef>
+          <a:fontRef idx="minor">
+            <a:schemeClr val="lt1"/>
+          </a:fontRef>
+        </p:style>
+        <p:txBody>
+          <a:bodyPr rtlCol="0" anchor="ctr"/>
+          <a:lstStyle/>
+          <a:p>
+            <a:pPr algn="ctr"/>
+          </a:p>
+        </p:txBody>
+      </p:sp>
+      <p:sp>
+        <p:nvSpPr>
+          <p:cNvPr id="16" name="TextBox 15"/>
+          <p:cNvSpPr txBox="1"/>
+          <p:nvPr/>
+        </p:nvSpPr>
+        <p:spPr>
+          <a:xfrm>
+            <a:off x="8933688" y="1874519"/>
+            <a:ext cx="2194560" cy="438912"/>
+          </a:xfrm>
+          <a:prstGeom prst="rect">
+            <a:avLst/>
+          </a:prstGeom>
+          <a:noFill/>
+        </p:spPr>
+        <p:txBody>
+          <a:bodyPr wrap="square" anchor="t">
+            <a:spAutoFit/>
+          </a:bodyPr>
+          <a:lstStyle/>
+          <a:p>
+            <a:pPr algn="ctr">
+              <a:defRPr sz="2400" b="1">
+                <a:solidFill>
+                  <a:srgbClr val="828FA0"/>
+                </a:solidFill>
+                <a:latin typeface="Aptos"/>
+              </a:defRPr>
+            </a:pPr>
+            <a:r>
+              <a:t>$1.46M</a:t>
+            </a:r>
+          </a:p>
+        </p:txBody>
+      </p:sp>
+      <p:sp>
+        <p:nvSpPr>
+          <p:cNvPr id="17" name="TextBox 16"/>
+          <p:cNvSpPr txBox="1"/>
+          <p:nvPr/>
+        </p:nvSpPr>
+        <p:spPr>
+          <a:xfrm>
+            <a:off x="8933688" y="2395728"/>
+            <a:ext cx="2194560" cy="274320"/>
+          </a:xfrm>
+          <a:prstGeom prst="rect">
+            <a:avLst/>
+          </a:prstGeom>
+          <a:noFill/>
+        </p:spPr>
+        <p:txBody>
+          <a:bodyPr wrap="square" anchor="t">
+            <a:spAutoFit/>
+          </a:bodyPr>
+          <a:lstStyle/>
+          <a:p>
+            <a:pPr algn="ctr">
+              <a:defRPr sz="1100" b="1">
+                <a:solidFill>
+                  <a:srgbClr val="FFFFFF"/>
+                </a:solidFill>
+                <a:latin typeface="Aptos"/>
+              </a:defRPr>
+            </a:pPr>
+            <a:r>
+              <a:t>RANDOM NET</a:t>
+            </a:r>
+          </a:p>
+        </p:txBody>
+      </p:sp>
+      <p:sp>
+        <p:nvSpPr>
+          <p:cNvPr id="18" name="TextBox 17"/>
+          <p:cNvSpPr txBox="1"/>
+          <p:nvPr/>
+        </p:nvSpPr>
+        <p:spPr>
+          <a:xfrm>
+            <a:off x="731520" y="3401568"/>
+            <a:ext cx="10698480" cy="4389120"/>
+          </a:xfrm>
+          <a:prstGeom prst="rect">
+            <a:avLst/>
+          </a:prstGeom>
+          <a:noFill/>
+        </p:spPr>
+        <p:txBody>
+          <a:bodyPr wrap="square">
+            <a:spAutoFit/>
+          </a:bodyPr>
+          <a:lstStyle/>
+          <a:p>
+            <a:pPr>
+              <a:spcAft>
+                <a:spcPts val="1200"/>
+              </a:spcAft>
+              <a:defRPr sz="2000">
+                <a:solidFill>
+                  <a:srgbClr val="FFFFFF"/>
+                </a:solidFill>
+                <a:latin typeface="Aptos"/>
+              </a:defRPr>
+            </a:pPr>
+            <a:r>
+              <a:t>•  $5,000 support cost · $50,000 event cost · 20% assumed effectiveness — all editable in the app</a:t>
+            </a:r>
+          </a:p>
+          <a:p>
+            <a:pPr>
+              <a:spcAft>
+                <a:spcPts val="1200"/>
+              </a:spcAft>
+              <a:defRPr sz="2000">
+                <a:solidFill>
+                  <a:srgbClr val="FFFFFF"/>
+                </a:solidFill>
+                <a:latin typeface="Aptos"/>
+              </a:defRPr>
+            </a:pPr>
+            <a:r>
+              <a:t>•  Models beat the incumbent at every capacity from 5% to 50% (sensitivity sweep)</a:t>
+            </a:r>
+          </a:p>
+          <a:p>
+            <a:pPr>
+              <a:spcAft>
+                <a:spcPts val="1200"/>
+              </a:spcAft>
+              <a:defRPr sz="2000">
+                <a:solidFill>
+                  <a:srgbClr val="FFFFFF"/>
+                </a:solidFill>
+                <a:latin typeface="Aptos"/>
+              </a:defRPr>
+            </a:pPr>
+            <a:r>
+              <a:t>•  A randomized or quasi-experimental pilot must estimate real intervention impact</a:t>
             </a:r>
           </a:p>
         </p:txBody>
@@ -9235,7 +9703,7 @@
               </a:defRPr>
             </a:pPr>
             <a:r>
-              <a:t>A5 · LIME FIDELITY</a:t>
+              <a:t>A3 · EXPLANATION DISAGREEMENT</a:t>
             </a:r>
           </a:p>
         </p:txBody>
@@ -9271,7 +9739,7 @@
               </a:defRPr>
             </a:pPr>
             <a:r>
-              <a:t>Is the local explanation faithful?</a:t>
+              <a:t>SHAP, permutation importance and XPER rank differently</a:t>
             </a:r>
           </a:p>
         </p:txBody>
@@ -9321,7 +9789,7 @@
       </p:sp>
       <p:pic>
         <p:nvPicPr>
-          <p:cNvPr id="5" name="Picture 4" descr="lime_individual.png"/>
+          <p:cNvPr id="5" name="Picture 4" descr="explanation_agreement.png"/>
           <p:cNvPicPr>
             <a:picLocks noChangeAspect="1"/>
           </p:cNvPicPr>
@@ -9335,8 +9803,8 @@
         </p:blipFill>
         <p:spPr>
           <a:xfrm>
-            <a:off x="365760" y="1600200"/>
-            <a:ext cx="11430000" cy="3780622"/>
+            <a:off x="457200" y="1554480"/>
+            <a:ext cx="7680960" cy="3846513"/>
           </a:xfrm>
           <a:prstGeom prst="rect">
             <a:avLst/>
@@ -9345,14 +9813,146 @@
       </p:pic>
       <p:sp>
         <p:nvSpPr>
-          <p:cNvPr id="6" name="TextBox 5"/>
+          <p:cNvPr id="6" name="Rounded Rectangle 5"/>
+          <p:cNvSpPr/>
+          <p:nvPr/>
+        </p:nvSpPr>
+        <p:spPr>
+          <a:xfrm>
+            <a:off x="8321040" y="1554480"/>
+            <a:ext cx="3474720" cy="4480560"/>
+          </a:xfrm>
+          <a:prstGeom prst="roundRect">
+            <a:avLst/>
+          </a:prstGeom>
+          <a:solidFill>
+            <a:srgbClr val="143058"/>
+          </a:solidFill>
+          <a:ln>
+            <a:solidFill>
+              <a:srgbClr val="7B2CBF"/>
+            </a:solidFill>
+          </a:ln>
+        </p:spPr>
+        <p:style>
+          <a:lnRef idx="1">
+            <a:schemeClr val="accent1"/>
+          </a:lnRef>
+          <a:fillRef idx="3">
+            <a:schemeClr val="accent1"/>
+          </a:fillRef>
+          <a:effectRef idx="2">
+            <a:schemeClr val="accent1"/>
+          </a:effectRef>
+          <a:fontRef idx="minor">
+            <a:schemeClr val="lt1"/>
+          </a:fontRef>
+        </p:style>
+        <p:txBody>
+          <a:bodyPr rtlCol="0" anchor="ctr"/>
+          <a:lstStyle/>
+          <a:p>
+            <a:pPr algn="ctr"/>
+          </a:p>
+        </p:txBody>
+      </p:sp>
+      <p:sp>
+        <p:nvSpPr>
+          <p:cNvPr id="7" name="TextBox 6"/>
+          <p:cNvSpPr txBox="1"/>
+          <p:nvPr/>
+        </p:nvSpPr>
+        <p:spPr>
+          <a:xfrm>
+            <a:off x="8549640" y="1828800"/>
+            <a:ext cx="3017520" cy="365760"/>
+          </a:xfrm>
+          <a:prstGeom prst="rect">
+            <a:avLst/>
+          </a:prstGeom>
+          <a:noFill/>
+        </p:spPr>
+        <p:txBody>
+          <a:bodyPr wrap="square" anchor="t">
+            <a:spAutoFit/>
+          </a:bodyPr>
+          <a:lstStyle/>
+          <a:p>
+            <a:pPr algn="ctr">
+              <a:defRPr sz="2000" b="1">
+                <a:solidFill>
+                  <a:srgbClr val="7B2CBF"/>
+                </a:solidFill>
+                <a:latin typeface="Aptos"/>
+              </a:defRPr>
+            </a:pPr>
+            <a:r>
+              <a:t>WHY</a:t>
+            </a:r>
+          </a:p>
+        </p:txBody>
+      </p:sp>
+      <p:sp>
+        <p:nvSpPr>
+          <p:cNvPr id="8" name="TextBox 7"/>
+          <p:cNvSpPr txBox="1"/>
+          <p:nvPr/>
+        </p:nvSpPr>
+        <p:spPr>
+          <a:xfrm>
+            <a:off x="8641080" y="2542032"/>
+            <a:ext cx="2834639" cy="3246120"/>
+          </a:xfrm>
+          <a:prstGeom prst="rect">
+            <a:avLst/>
+          </a:prstGeom>
+          <a:noFill/>
+        </p:spPr>
+        <p:txBody>
+          <a:bodyPr wrap="square" anchor="t">
+            <a:spAutoFit/>
+          </a:bodyPr>
+          <a:lstStyle/>
+          <a:p>
+            <a:pPr algn="ctr">
+              <a:defRPr sz="1500" b="0">
+                <a:solidFill>
+                  <a:srgbClr val="F0F4F8"/>
+                </a:solidFill>
+                <a:latin typeface="Aptos"/>
+              </a:defRPr>
+            </a:pPr>
+            <a:r>
+              <a:t>SHAP explains the prediction</a:t>
+            </a:r>
+            <a:br/>
+            <a:br/>
+            <a:r>
+              <a:t>Permutation importance explains loss</a:t>
+            </a:r>
+            <a:br/>
+            <a:br/>
+            <a:r>
+              <a:t>XPER decomposes AUC</a:t>
+            </a:r>
+            <a:br/>
+            <a:br/>
+            <a:r>
+              <a:t>Different questions, so different rankings</a:t>
+            </a:r>
+          </a:p>
+        </p:txBody>
+      </p:sp>
+      <p:sp>
+        <p:nvSpPr>
+          <p:cNvPr id="9" name="TextBox 8"/>
           <p:cNvSpPr txBox="1"/>
           <p:nvPr/>
         </p:nvSpPr>
         <p:spPr>
           <a:xfrm>
             <a:off x="914400" y="6172200"/>
-            <a:ext cx="10058400" cy="365760"/>
+            <a:ext cx="10058400" cy="274320"/>
           </a:xfrm>
           <a:prstGeom prst="rect">
             <a:avLst/>
@@ -9366,7 +9966,7 @@
           <a:lstStyle/>
           <a:p>
             <a:pPr algn="ctr">
-              <a:defRPr sz="1200" b="1">
+              <a:defRPr sz="1100" b="1">
                 <a:solidFill>
                   <a:srgbClr val="FB8500"/>
                 </a:solidFill>
@@ -9374,7 +9974,7 @@
               </a:defRPr>
             </a:pPr>
             <a:r>
-              <a:t>Category-aware perturbation raised local fidelity from R² 0.25 to ≈0.41. Three fixed cases × three seeds; every condition keeps its sign.</a:t>
+              <a:t>Top-10 sets largely coincide; ordering is method-dependent. Quote the set, not the rank.</a:t>
             </a:r>
           </a:p>
         </p:txBody>
@@ -9736,7 +10336,7 @@
               </a:defRPr>
             </a:pPr>
             <a:r>
-              <a:t>A6 · STABILITY</a:t>
+              <a:t>A4 · LIME FIDELITY</a:t>
             </a:r>
           </a:p>
         </p:txBody>
@@ -9772,7 +10372,7 @@
               </a:defRPr>
             </a:pPr>
             <a:r>
-              <a:t>Structural stability across refits on resampled data</a:t>
+              <a:t>Is the local explanation faithful?</a:t>
             </a:r>
           </a:p>
         </p:txBody>
@@ -9822,7 +10422,7 @@
       </p:sp>
       <p:pic>
         <p:nvPicPr>
-          <p:cNvPr id="5" name="Picture 4" descr="structural_stability.png"/>
+          <p:cNvPr id="5" name="Picture 4" descr="lime_individual.png"/>
           <p:cNvPicPr>
             <a:picLocks noChangeAspect="1"/>
           </p:cNvPicPr>
@@ -9836,8 +10436,8 @@
         </p:blipFill>
         <p:spPr>
           <a:xfrm>
-            <a:off x="457200" y="1600200"/>
-            <a:ext cx="7589520" cy="1992276"/>
+            <a:off x="365760" y="1600200"/>
+            <a:ext cx="11430000" cy="3780622"/>
           </a:xfrm>
           <a:prstGeom prst="rect">
             <a:avLst/>
@@ -9846,313 +10446,7 @@
       </p:pic>
       <p:sp>
         <p:nvSpPr>
-          <p:cNvPr id="6" name="Rounded Rectangle 5"/>
-          <p:cNvSpPr/>
-          <p:nvPr/>
-        </p:nvSpPr>
-        <p:spPr>
-          <a:xfrm>
-            <a:off x="8549640" y="1737360"/>
-            <a:ext cx="2423160" cy="1261872"/>
-          </a:xfrm>
-          <a:prstGeom prst="roundRect">
-            <a:avLst/>
-          </a:prstGeom>
-          <a:solidFill>
-            <a:srgbClr val="143058"/>
-          </a:solidFill>
-          <a:ln>
-            <a:solidFill>
-              <a:srgbClr val="FB8500"/>
-            </a:solidFill>
-          </a:ln>
-        </p:spPr>
-        <p:style>
-          <a:lnRef idx="1">
-            <a:schemeClr val="accent1"/>
-          </a:lnRef>
-          <a:fillRef idx="3">
-            <a:schemeClr val="accent1"/>
-          </a:fillRef>
-          <a:effectRef idx="2">
-            <a:schemeClr val="accent1"/>
-          </a:effectRef>
-          <a:fontRef idx="minor">
-            <a:schemeClr val="lt1"/>
-          </a:fontRef>
-        </p:style>
-        <p:txBody>
-          <a:bodyPr rtlCol="0" anchor="ctr"/>
-          <a:lstStyle/>
-          <a:p>
-            <a:pPr algn="ctr"/>
-          </a:p>
-        </p:txBody>
-      </p:sp>
-      <p:sp>
-        <p:nvSpPr>
-          <p:cNvPr id="7" name="TextBox 6"/>
-          <p:cNvSpPr txBox="1"/>
-          <p:nvPr/>
-        </p:nvSpPr>
-        <p:spPr>
-          <a:xfrm>
-            <a:off x="8659367" y="1874519"/>
-            <a:ext cx="2194560" cy="438912"/>
-          </a:xfrm>
-          <a:prstGeom prst="rect">
-            <a:avLst/>
-          </a:prstGeom>
-          <a:noFill/>
-        </p:spPr>
-        <p:txBody>
-          <a:bodyPr wrap="square" anchor="t">
-            <a:spAutoFit/>
-          </a:bodyPr>
-          <a:lstStyle/>
-          <a:p>
-            <a:pPr algn="ctr">
-              <a:defRPr sz="2400" b="1">
-                <a:solidFill>
-                  <a:srgbClr val="FB8500"/>
-                </a:solidFill>
-                <a:latin typeface="Aptos"/>
-              </a:defRPr>
-            </a:pPr>
-            <a:r>
-              <a:t>0.032</a:t>
-            </a:r>
-          </a:p>
-        </p:txBody>
-      </p:sp>
-      <p:sp>
-        <p:nvSpPr>
-          <p:cNvPr id="8" name="TextBox 7"/>
-          <p:cNvSpPr txBox="1"/>
-          <p:nvPr/>
-        </p:nvSpPr>
-        <p:spPr>
-          <a:xfrm>
-            <a:off x="8659367" y="2395728"/>
-            <a:ext cx="2194560" cy="274320"/>
-          </a:xfrm>
-          <a:prstGeom prst="rect">
-            <a:avLst/>
-          </a:prstGeom>
-          <a:noFill/>
-        </p:spPr>
-        <p:txBody>
-          <a:bodyPr wrap="square" anchor="t">
-            <a:spAutoFit/>
-          </a:bodyPr>
-          <a:lstStyle/>
-          <a:p>
-            <a:pPr algn="ctr">
-              <a:defRPr sz="1100" b="1">
-                <a:solidFill>
-                  <a:srgbClr val="FFFFFF"/>
-                </a:solidFill>
-                <a:latin typeface="Aptos"/>
-              </a:defRPr>
-            </a:pPr>
-            <a:r>
-              <a:t>SCORE DRIFT · LOGISTIC</a:t>
-            </a:r>
-          </a:p>
-        </p:txBody>
-      </p:sp>
-      <p:sp>
-        <p:nvSpPr>
-          <p:cNvPr id="9" name="TextBox 8"/>
-          <p:cNvSpPr txBox="1"/>
-          <p:nvPr/>
-        </p:nvSpPr>
-        <p:spPr>
-          <a:xfrm>
-            <a:off x="8659367" y="2706624"/>
-            <a:ext cx="2194560" cy="164592"/>
-          </a:xfrm>
-          <a:prstGeom prst="rect">
-            <a:avLst/>
-          </a:prstGeom>
-          <a:noFill/>
-        </p:spPr>
-        <p:txBody>
-          <a:bodyPr wrap="square" anchor="t">
-            <a:spAutoFit/>
-          </a:bodyPr>
-          <a:lstStyle/>
-          <a:p>
-            <a:pPr algn="ctr">
-              <a:defRPr sz="800" b="0">
-                <a:solidFill>
-                  <a:srgbClr val="F0F4F8"/>
-                </a:solidFill>
-                <a:latin typeface="Aptos"/>
-              </a:defRPr>
-            </a:pPr>
-            <a:r>
-              <a:t>lowest · XGB 0.035 · TabICL 0.035</a:t>
-            </a:r>
-          </a:p>
-        </p:txBody>
-      </p:sp>
-      <p:sp>
-        <p:nvSpPr>
-          <p:cNvPr id="10" name="Rounded Rectangle 9"/>
-          <p:cNvSpPr/>
-          <p:nvPr/>
-        </p:nvSpPr>
-        <p:spPr>
-          <a:xfrm>
-            <a:off x="8549640" y="3200400"/>
-            <a:ext cx="2423160" cy="1261872"/>
-          </a:xfrm>
-          <a:prstGeom prst="roundRect">
-            <a:avLst/>
-          </a:prstGeom>
-          <a:solidFill>
-            <a:srgbClr val="143058"/>
-          </a:solidFill>
-          <a:ln>
-            <a:solidFill>
-              <a:srgbClr val="00B4B4"/>
-            </a:solidFill>
-          </a:ln>
-        </p:spPr>
-        <p:style>
-          <a:lnRef idx="1">
-            <a:schemeClr val="accent1"/>
-          </a:lnRef>
-          <a:fillRef idx="3">
-            <a:schemeClr val="accent1"/>
-          </a:fillRef>
-          <a:effectRef idx="2">
-            <a:schemeClr val="accent1"/>
-          </a:effectRef>
-          <a:fontRef idx="minor">
-            <a:schemeClr val="lt1"/>
-          </a:fontRef>
-        </p:style>
-        <p:txBody>
-          <a:bodyPr rtlCol="0" anchor="ctr"/>
-          <a:lstStyle/>
-          <a:p>
-            <a:pPr algn="ctr"/>
-          </a:p>
-        </p:txBody>
-      </p:sp>
-      <p:sp>
-        <p:nvSpPr>
-          <p:cNvPr id="11" name="TextBox 10"/>
-          <p:cNvSpPr txBox="1"/>
-          <p:nvPr/>
-        </p:nvSpPr>
-        <p:spPr>
-          <a:xfrm>
-            <a:off x="8659367" y="3337560"/>
-            <a:ext cx="2194560" cy="438912"/>
-          </a:xfrm>
-          <a:prstGeom prst="rect">
-            <a:avLst/>
-          </a:prstGeom>
-          <a:noFill/>
-        </p:spPr>
-        <p:txBody>
-          <a:bodyPr wrap="square" anchor="t">
-            <a:spAutoFit/>
-          </a:bodyPr>
-          <a:lstStyle/>
-          <a:p>
-            <a:pPr algn="ctr">
-              <a:defRPr sz="2400" b="1">
-                <a:solidFill>
-                  <a:srgbClr val="00B4B4"/>
-                </a:solidFill>
-                <a:latin typeface="Aptos"/>
-              </a:defRPr>
-            </a:pPr>
-            <a:r>
-              <a:t>75%–78%</a:t>
-            </a:r>
-          </a:p>
-        </p:txBody>
-      </p:sp>
-      <p:sp>
-        <p:nvSpPr>
-          <p:cNvPr id="12" name="TextBox 11"/>
-          <p:cNvSpPr txBox="1"/>
-          <p:nvPr/>
-        </p:nvSpPr>
-        <p:spPr>
-          <a:xfrm>
-            <a:off x="8659367" y="3858768"/>
-            <a:ext cx="2194560" cy="274320"/>
-          </a:xfrm>
-          <a:prstGeom prst="rect">
-            <a:avLst/>
-          </a:prstGeom>
-          <a:noFill/>
-        </p:spPr>
-        <p:txBody>
-          <a:bodyPr wrap="square" anchor="t">
-            <a:spAutoFit/>
-          </a:bodyPr>
-          <a:lstStyle/>
-          <a:p>
-            <a:pPr algn="ctr">
-              <a:defRPr sz="1100" b="1">
-                <a:solidFill>
-                  <a:srgbClr val="FFFFFF"/>
-                </a:solidFill>
-                <a:latin typeface="Aptos"/>
-              </a:defRPr>
-            </a:pPr>
-            <a:r>
-              <a:t>TOP-20% JACCARD</a:t>
-            </a:r>
-          </a:p>
-        </p:txBody>
-      </p:sp>
-      <p:sp>
-        <p:nvSpPr>
-          <p:cNvPr id="13" name="TextBox 12"/>
-          <p:cNvSpPr txBox="1"/>
-          <p:nvPr/>
-        </p:nvSpPr>
-        <p:spPr>
-          <a:xfrm>
-            <a:off x="8659367" y="4169664"/>
-            <a:ext cx="2194560" cy="164592"/>
-          </a:xfrm>
-          <a:prstGeom prst="rect">
-            <a:avLst/>
-          </a:prstGeom>
-          <a:noFill/>
-        </p:spPr>
-        <p:txBody>
-          <a:bodyPr wrap="square" anchor="t">
-            <a:spAutoFit/>
-          </a:bodyPr>
-          <a:lstStyle/>
-          <a:p>
-            <a:pPr algn="ctr">
-              <a:defRPr sz="800" b="0">
-                <a:solidFill>
-                  <a:srgbClr val="F0F4F8"/>
-                </a:solidFill>
-                <a:latin typeface="Aptos"/>
-              </a:defRPr>
-            </a:pPr>
-            <a:r>
-              <a:t>logit 0.772 · XGB 0.747 · TabICL 0.776</a:t>
-            </a:r>
-          </a:p>
-        </p:txBody>
-      </p:sp>
-      <p:sp>
-        <p:nvSpPr>
-          <p:cNvPr id="14" name="TextBox 13"/>
+          <p:cNvPr id="6" name="TextBox 5"/>
           <p:cNvSpPr txBox="1"/>
           <p:nvPr/>
         </p:nvSpPr>
@@ -10173,15 +10467,15 @@
           <a:lstStyle/>
           <a:p>
             <a:pPr algn="ctr">
-              <a:defRPr sz="1100" b="1">
-                <a:solidFill>
-                  <a:srgbClr val="828FA0"/>
-                </a:solidFill>
-                <a:latin typeface="Aptos"/>
-              </a:defRPr>
-            </a:pPr>
-            <a:r>
-              <a:t>Jaccard is intersection / union, not the share of people switching. Refit sensitivity is not temporal validation.</a:t>
+              <a:defRPr sz="1200" b="1">
+                <a:solidFill>
+                  <a:srgbClr val="FB8500"/>
+                </a:solidFill>
+                <a:latin typeface="Aptos"/>
+              </a:defRPr>
+            </a:pPr>
+            <a:r>
+              <a:t>Category-aware perturbation raised local fidelity from R² 0.25 to ≈0.41. Three fixed cases × three seeds; every condition keeps its sign.</a:t>
             </a:r>
           </a:p>
         </p:txBody>
@@ -10243,7 +10537,7 @@
               </a:defRPr>
             </a:pPr>
             <a:r>
-              <a:t>A7 · PROCESS</a:t>
+              <a:t>A5 · PROCESS</a:t>
             </a:r>
           </a:p>
         </p:txBody>
@@ -10444,7 +10738,7 @@
               </a:defRPr>
             </a:pPr>
             <a:r>
-              <a:t>A8 · PROXY RECOVERY</a:t>
+              <a:t>A6 · PROXY RECOVERY</a:t>
             </a:r>
           </a:p>
         </p:txBody>
@@ -10777,7 +11071,7 @@
               </a:defRPr>
             </a:pPr>
             <a:r>
-              <a:t>A9 · DECISION STABILITY</a:t>
+              <a:t>A7 · DECISION STABILITY</a:t>
             </a:r>
           </a:p>
         </p:txBody>
@@ -13680,7 +13974,7 @@
               </a:defRPr>
             </a:pPr>
             <a:r>
-              <a:t>06 · SUBGROUP AUDIT</a:t>
+              <a:t>06 · INTERPRETABILITY</a:t>
             </a:r>
           </a:p>
         </p:txBody>
@@ -13716,7 +14010,7 @@
               </a:defRPr>
             </a:pPr>
             <a:r>
-              <a:t>Fairness at the proposed allocation rule</a:t>
+              <a:t>Can each model explain a decision?</a:t>
             </a:r>
           </a:p>
         </p:txBody>
@@ -13766,7 +14060,7 @@
       </p:sp>
       <p:pic>
         <p:nvPicPr>
-          <p:cNvPr id="5" name="Picture 4" descr="fairness_support_access.png"/>
+          <p:cNvPr id="5" name="Picture 4" descr="shap_individual.png"/>
           <p:cNvPicPr>
             <a:picLocks noChangeAspect="1"/>
           </p:cNvPicPr>
@@ -13781,7 +14075,7 @@
         <p:spPr>
           <a:xfrm>
             <a:off x="365760" y="1554480"/>
-            <a:ext cx="7772400" cy="4216673"/>
+            <a:ext cx="7589520" cy="2869645"/>
           </a:xfrm>
           <a:prstGeom prst="rect">
             <a:avLst/>
@@ -13796,8 +14090,8 @@
         </p:nvSpPr>
         <p:spPr>
           <a:xfrm>
-            <a:off x="8549640" y="1737360"/>
-            <a:ext cx="2423160" cy="1261872"/>
+            <a:off x="8229600" y="1554480"/>
+            <a:ext cx="3566160" cy="4480560"/>
           </a:xfrm>
           <a:prstGeom prst="roundRect">
             <a:avLst/>
@@ -13807,7 +14101,7 @@
           </a:solidFill>
           <a:ln>
             <a:solidFill>
-              <a:srgbClr val="D64343"/>
+              <a:srgbClr val="7B2CBF"/>
             </a:solidFill>
           </a:ln>
         </p:spPr>
@@ -13841,8 +14135,8 @@
         </p:nvSpPr>
         <p:spPr>
           <a:xfrm>
-            <a:off x="8659367" y="1874519"/>
-            <a:ext cx="2194560" cy="438912"/>
+            <a:off x="8458200" y="1828800"/>
+            <a:ext cx="3108960" cy="365760"/>
           </a:xfrm>
           <a:prstGeom prst="rect">
             <a:avLst/>
@@ -13856,15 +14150,15 @@
           <a:lstStyle/>
           <a:p>
             <a:pPr algn="ctr">
-              <a:defRPr sz="2400" b="1">
-                <a:solidFill>
-                  <a:srgbClr val="D64343"/>
-                </a:solidFill>
-                <a:latin typeface="Aptos"/>
-              </a:defRPr>
-            </a:pPr>
-            <a:r>
-              <a:t>-0.10 to -0.12</a:t>
+              <a:defRPr sz="2000" b="1">
+                <a:solidFill>
+                  <a:srgbClr val="7B2CBF"/>
+                </a:solidFill>
+                <a:latin typeface="Aptos"/>
+              </a:defRPr>
+            </a:pPr>
+            <a:r>
+              <a:t>THREE ROUTES</a:t>
             </a:r>
           </a:p>
         </p:txBody>
@@ -13877,8 +14171,66 @@
         </p:nvSpPr>
         <p:spPr>
           <a:xfrm>
-            <a:off x="8659367" y="2395728"/>
-            <a:ext cx="2194560" cy="274320"/>
+            <a:off x="8549640" y="2542032"/>
+            <a:ext cx="2926080" cy="3246120"/>
+          </a:xfrm>
+          <a:prstGeom prst="rect">
+            <a:avLst/>
+          </a:prstGeom>
+          <a:noFill/>
+        </p:spPr>
+        <p:txBody>
+          <a:bodyPr wrap="square" anchor="t">
+            <a:spAutoFit/>
+          </a:bodyPr>
+          <a:lstStyle/>
+          <a:p>
+            <a:pPr algn="ctr">
+              <a:defRPr sz="1500" b="0">
+                <a:solidFill>
+                  <a:srgbClr val="F0F4F8"/>
+                </a:solidFill>
+                <a:latin typeface="Aptos"/>
+              </a:defRPr>
+            </a:pPr>
+            <a:r>
+              <a:t>LOGISTIC</a:t>
+            </a:r>
+            <a:br/>
+            <a:r>
+              <a:t>Coefficients and marginal effects, read directly</a:t>
+            </a:r>
+            <a:br/>
+            <a:br/>
+            <a:r>
+              <a:t>XGBOOST</a:t>
+            </a:r>
+            <a:br/>
+            <a:r>
+              <a:t>Needs SHAP; a depth-3 surrogate tree reproduces only R² = 0.61</a:t>
+            </a:r>
+            <a:br/>
+            <a:br/>
+            <a:r>
+              <a:t>TABICLv2</a:t>
+            </a:r>
+            <a:br/>
+            <a:r>
+              <a:t>No native attribution: PDP/ICE only</a:t>
+            </a:r>
+          </a:p>
+        </p:txBody>
+      </p:sp>
+      <p:sp>
+        <p:nvSpPr>
+          <p:cNvPr id="9" name="TextBox 8"/>
+          <p:cNvSpPr txBox="1"/>
+          <p:nvPr/>
+        </p:nvSpPr>
+        <p:spPr>
+          <a:xfrm>
+            <a:off x="914400" y="6236208"/>
+            <a:ext cx="10058400" cy="274320"/>
           </a:xfrm>
           <a:prstGeom prst="rect">
             <a:avLst/>
@@ -13894,398 +14246,20 @@
             <a:pPr algn="ctr">
               <a:defRPr sz="1100" b="1">
                 <a:solidFill>
-                  <a:srgbClr val="FFFFFF"/>
-                </a:solidFill>
-                <a:latin typeface="Aptos"/>
-              </a:defRPr>
-            </a:pPr>
-            <a:r>
-              <a:t>GENDER FNR GAP (M − F)</a:t>
-            </a:r>
-          </a:p>
-        </p:txBody>
-      </p:sp>
-      <p:sp>
-        <p:nvSpPr>
-          <p:cNvPr id="9" name="TextBox 8"/>
-          <p:cNvSpPr txBox="1"/>
-          <p:nvPr/>
-        </p:nvSpPr>
-        <p:spPr>
-          <a:xfrm>
-            <a:off x="8659367" y="2706624"/>
-            <a:ext cx="2194560" cy="164592"/>
-          </a:xfrm>
-          <a:prstGeom prst="rect">
-            <a:avLst/>
-          </a:prstGeom>
-          <a:noFill/>
-        </p:spPr>
-        <p:txBody>
-          <a:bodyPr wrap="square" anchor="t">
-            <a:spAutoFit/>
-          </a:bodyPr>
-          <a:lstStyle/>
-          <a:p>
-            <a:pPr algn="ctr">
-              <a:defRPr sz="800" b="0">
-                <a:solidFill>
-                  <a:srgbClr val="F0F4F8"/>
-                </a:solidFill>
-                <a:latin typeface="Aptos"/>
-              </a:defRPr>
-            </a:pPr>
-            <a:r>
-              <a:t>women miss support more · all significant</a:t>
-            </a:r>
-          </a:p>
-        </p:txBody>
-      </p:sp>
-      <p:sp>
-        <p:nvSpPr>
-          <p:cNvPr id="10" name="Rounded Rectangle 9"/>
-          <p:cNvSpPr/>
-          <p:nvPr/>
-        </p:nvSpPr>
-        <p:spPr>
-          <a:xfrm>
-            <a:off x="8549640" y="3200400"/>
-            <a:ext cx="2423160" cy="1261872"/>
-          </a:xfrm>
-          <a:prstGeom prst="roundRect">
-            <a:avLst/>
-          </a:prstGeom>
-          <a:solidFill>
-            <a:srgbClr val="143058"/>
-          </a:solidFill>
-          <a:ln>
-            <a:solidFill>
-              <a:srgbClr val="00B4B4"/>
-            </a:solidFill>
-          </a:ln>
-        </p:spPr>
-        <p:style>
-          <a:lnRef idx="1">
-            <a:schemeClr val="accent1"/>
-          </a:lnRef>
-          <a:fillRef idx="3">
-            <a:schemeClr val="accent1"/>
-          </a:fillRef>
-          <a:effectRef idx="2">
-            <a:schemeClr val="accent1"/>
-          </a:effectRef>
-          <a:fontRef idx="minor">
-            <a:schemeClr val="lt1"/>
-          </a:fontRef>
-        </p:style>
-        <p:txBody>
-          <a:bodyPr rtlCol="0" anchor="ctr"/>
-          <a:lstStyle/>
-          <a:p>
-            <a:pPr algn="ctr"/>
-          </a:p>
-        </p:txBody>
-      </p:sp>
-      <p:sp>
-        <p:nvSpPr>
-          <p:cNvPr id="11" name="TextBox 10"/>
-          <p:cNvSpPr txBox="1"/>
-          <p:nvPr/>
-        </p:nvSpPr>
-        <p:spPr>
-          <a:xfrm>
-            <a:off x="8659367" y="3337560"/>
-            <a:ext cx="2194560" cy="438912"/>
-          </a:xfrm>
-          <a:prstGeom prst="rect">
-            <a:avLst/>
-          </a:prstGeom>
-          <a:noFill/>
-        </p:spPr>
-        <p:txBody>
-          <a:bodyPr wrap="square" anchor="t">
-            <a:spAutoFit/>
-          </a:bodyPr>
-          <a:lstStyle/>
-          <a:p>
-            <a:pPr algn="ctr">
-              <a:defRPr sz="2400" b="1">
-                <a:solidFill>
-                  <a:srgbClr val="00B4B4"/>
-                </a:solidFill>
-                <a:latin typeface="Aptos"/>
-              </a:defRPr>
-            </a:pPr>
-            <a:r>
-              <a:t>3 / 3 models</a:t>
-            </a:r>
-          </a:p>
-        </p:txBody>
-      </p:sp>
-      <p:sp>
-        <p:nvSpPr>
-          <p:cNvPr id="12" name="TextBox 11"/>
-          <p:cNvSpPr txBox="1"/>
-          <p:nvPr/>
-        </p:nvSpPr>
-        <p:spPr>
-          <a:xfrm>
-            <a:off x="8659367" y="3858768"/>
-            <a:ext cx="2194560" cy="274320"/>
-          </a:xfrm>
-          <a:prstGeom prst="rect">
-            <a:avLst/>
-          </a:prstGeom>
-          <a:noFill/>
-        </p:spPr>
-        <p:txBody>
-          <a:bodyPr wrap="square" anchor="t">
-            <a:spAutoFit/>
-          </a:bodyPr>
-          <a:lstStyle/>
-          <a:p>
-            <a:pPr algn="ctr">
-              <a:defRPr sz="1100" b="1">
-                <a:solidFill>
-                  <a:srgbClr val="FFFFFF"/>
-                </a:solidFill>
-                <a:latin typeface="Aptos"/>
-              </a:defRPr>
-            </a:pPr>
-            <a:r>
-              <a:t>RACE: EQUIVALENT ±5 PTS</a:t>
-            </a:r>
-          </a:p>
-        </p:txBody>
-      </p:sp>
-      <p:sp>
-        <p:nvSpPr>
-          <p:cNvPr id="13" name="TextBox 12"/>
-          <p:cNvSpPr txBox="1"/>
-          <p:nvPr/>
-        </p:nvSpPr>
-        <p:spPr>
-          <a:xfrm>
-            <a:off x="8659367" y="4169664"/>
-            <a:ext cx="2194560" cy="164592"/>
-          </a:xfrm>
-          <a:prstGeom prst="rect">
-            <a:avLst/>
-          </a:prstGeom>
-          <a:noFill/>
-        </p:spPr>
-        <p:txBody>
-          <a:bodyPr wrap="square" anchor="t">
-            <a:spAutoFit/>
-          </a:bodyPr>
-          <a:lstStyle/>
-          <a:p>
-            <a:pPr algn="ctr">
-              <a:defRPr sz="800" b="0">
-                <a:solidFill>
-                  <a:srgbClr val="F0F4F8"/>
-                </a:solidFill>
-                <a:latin typeface="Aptos"/>
-              </a:defRPr>
-            </a:pPr>
-            <a:r>
-              <a:t>TOST on errors · AUC Black 0.72 vs White 0.75</a:t>
-            </a:r>
-          </a:p>
-        </p:txBody>
-      </p:sp>
-      <p:sp>
-        <p:nvSpPr>
-          <p:cNvPr id="14" name="Rounded Rectangle 13"/>
-          <p:cNvSpPr/>
-          <p:nvPr/>
-        </p:nvSpPr>
-        <p:spPr>
-          <a:xfrm>
-            <a:off x="8549640" y="4663440"/>
-            <a:ext cx="2423160" cy="1261872"/>
-          </a:xfrm>
-          <a:prstGeom prst="roundRect">
-            <a:avLst/>
-          </a:prstGeom>
-          <a:solidFill>
-            <a:srgbClr val="143058"/>
-          </a:solidFill>
-          <a:ln>
-            <a:solidFill>
-              <a:srgbClr val="FB8500"/>
-            </a:solidFill>
-          </a:ln>
-        </p:spPr>
-        <p:style>
-          <a:lnRef idx="1">
-            <a:schemeClr val="accent1"/>
-          </a:lnRef>
-          <a:fillRef idx="3">
-            <a:schemeClr val="accent1"/>
-          </a:fillRef>
-          <a:effectRef idx="2">
-            <a:schemeClr val="accent1"/>
-          </a:effectRef>
-          <a:fontRef idx="minor">
-            <a:schemeClr val="lt1"/>
-          </a:fontRef>
-        </p:style>
-        <p:txBody>
-          <a:bodyPr rtlCol="0" anchor="ctr"/>
-          <a:lstStyle/>
-          <a:p>
-            <a:pPr algn="ctr"/>
-          </a:p>
-        </p:txBody>
-      </p:sp>
-      <p:sp>
-        <p:nvSpPr>
-          <p:cNvPr id="15" name="TextBox 14"/>
-          <p:cNvSpPr txBox="1"/>
-          <p:nvPr/>
-        </p:nvSpPr>
-        <p:spPr>
-          <a:xfrm>
-            <a:off x="8659367" y="4800600"/>
-            <a:ext cx="2194560" cy="438912"/>
-          </a:xfrm>
-          <a:prstGeom prst="rect">
-            <a:avLst/>
-          </a:prstGeom>
-          <a:noFill/>
-        </p:spPr>
-        <p:txBody>
-          <a:bodyPr wrap="square" anchor="t">
-            <a:spAutoFit/>
-          </a:bodyPr>
-          <a:lstStyle/>
-          <a:p>
-            <a:pPr algn="ctr">
-              <a:defRPr sz="2400" b="1">
-                <a:solidFill>
                   <a:srgbClr val="FB8500"/>
                 </a:solidFill>
                 <a:latin typeface="Aptos"/>
               </a:defRPr>
             </a:pPr>
             <a:r>
-              <a:t>-0.23 to -0.24</a:t>
-            </a:r>
-          </a:p>
-        </p:txBody>
-      </p:sp>
-      <p:sp>
-        <p:nvSpPr>
-          <p:cNvPr id="16" name="TextBox 15"/>
-          <p:cNvSpPr txBox="1"/>
-          <p:nvPr/>
-        </p:nvSpPr>
-        <p:spPr>
-          <a:xfrm>
-            <a:off x="8659367" y="5321807"/>
-            <a:ext cx="2194560" cy="274320"/>
-          </a:xfrm>
-          <a:prstGeom prst="rect">
-            <a:avLst/>
-          </a:prstGeom>
-          <a:noFill/>
-        </p:spPr>
-        <p:txBody>
-          <a:bodyPr wrap="square" anchor="t">
-            <a:spAutoFit/>
-          </a:bodyPr>
-          <a:lstStyle/>
-          <a:p>
-            <a:pPr algn="ctr">
-              <a:defRPr sz="1100" b="1">
-                <a:solidFill>
-                  <a:srgbClr val="FFFFFF"/>
-                </a:solidFill>
-                <a:latin typeface="Aptos"/>
-              </a:defRPr>
-            </a:pPr>
-            <a:r>
-              <a:t>AGE FNR GAP (&lt;33 − 33+)</a:t>
-            </a:r>
-          </a:p>
-        </p:txBody>
-      </p:sp>
-      <p:sp>
-        <p:nvSpPr>
-          <p:cNvPr id="17" name="TextBox 16"/>
-          <p:cNvSpPr txBox="1"/>
-          <p:nvPr/>
-        </p:nvSpPr>
-        <p:spPr>
-          <a:xfrm>
-            <a:off x="8659367" y="5632704"/>
-            <a:ext cx="2194560" cy="164592"/>
-          </a:xfrm>
-          <a:prstGeom prst="rect">
-            <a:avLst/>
-          </a:prstGeom>
-          <a:noFill/>
-        </p:spPr>
-        <p:txBody>
-          <a:bodyPr wrap="square" anchor="t">
-            <a:spAutoFit/>
-          </a:bodyPr>
-          <a:lstStyle/>
-          <a:p>
-            <a:pPr algn="ctr">
-              <a:defRPr sz="800" b="0">
-                <a:solidFill>
-                  <a:srgbClr val="F0F4F8"/>
-                </a:solidFill>
-                <a:latin typeface="Aptos"/>
-              </a:defRPr>
-            </a:pPr>
-            <a:r>
-              <a:t>persists with age fixed: carried by prior record</a:t>
-            </a:r>
-          </a:p>
-        </p:txBody>
-      </p:sp>
-      <p:sp>
-        <p:nvSpPr>
-          <p:cNvPr id="18" name="TextBox 17"/>
-          <p:cNvSpPr txBox="1"/>
-          <p:nvPr/>
-        </p:nvSpPr>
-        <p:spPr>
-          <a:xfrm>
-            <a:off x="914400" y="6217920"/>
-            <a:ext cx="10058400" cy="274320"/>
-          </a:xfrm>
-          <a:prstGeom prst="rect">
-            <a:avLst/>
-          </a:prstGeom>
-          <a:noFill/>
-        </p:spPr>
-        <p:txBody>
-          <a:bodyPr wrap="square" anchor="t">
-            <a:spAutoFit/>
-          </a:bodyPr>
-          <a:lstStyle/>
-          <a:p>
-            <a:pPr algn="ctr">
-              <a:defRPr sz="1100" b="1">
-                <a:solidFill>
-                  <a:srgbClr val="FB8500"/>
-                </a:solidFill>
-                <a:latin typeface="Aptos"/>
-              </a:defRPr>
-            </a:pPr>
-            <a:r>
-              <a:t>Selection = support offered, so the harm is a missed offer: FNR is primary. Not significant ≠ fair; we test equivalence.</a:t>
-            </a:r>
-          </a:p>
-        </p:txBody>
-      </p:sp>
-      <p:sp>
-        <p:nvSpPr>
-          <p:cNvPr id="19" name="TextBox 18"/>
+              <a:t>SHAP, permutation importance and XPER agree on the drivers (Spearman 0.53–0.81), not on their order: quote the set, not the rank.</a:t>
+            </a:r>
+          </a:p>
+        </p:txBody>
+      </p:sp>
+      <p:sp>
+        <p:nvSpPr>
+          <p:cNvPr id="10" name="TextBox 9"/>
           <p:cNvSpPr txBox="1"/>
           <p:nvPr/>
         </p:nvSpPr>
@@ -14321,7 +14295,7 @@
       </p:sp>
       <p:sp>
         <p:nvSpPr>
-          <p:cNvPr id="20" name="TextBox 19"/>
+          <p:cNvPr id="11" name="TextBox 10"/>
           <p:cNvSpPr txBox="1"/>
           <p:nvPr/>
         </p:nvSpPr>
@@ -14412,7 +14386,7 @@
               </a:defRPr>
             </a:pPr>
             <a:r>
-              <a:t>07 · FAIRNESS, SHARPENED</a:t>
+              <a:t>07 · STABILITY</a:t>
             </a:r>
           </a:p>
         </p:txBody>
@@ -14448,7 +14422,7 @@
               </a:defRPr>
             </a:pPr>
             <a:r>
-              <a:t>Fairness: probability scores and allocation rules</a:t>
+              <a:t>Would a different sample give the same model?</a:t>
             </a:r>
           </a:p>
         </p:txBody>
@@ -14496,16 +14470,193 @@
           </a:p>
         </p:txBody>
       </p:sp>
-      <p:sp>
-        <p:nvSpPr>
-          <p:cNvPr id="5" name="Rounded Rectangle 4"/>
+      <p:pic>
+        <p:nvPicPr>
+          <p:cNvPr id="5" name="Picture 4" descr="structural_stability.png"/>
+          <p:cNvPicPr>
+            <a:picLocks noChangeAspect="1"/>
+          </p:cNvPicPr>
+          <p:nvPr/>
+        </p:nvPicPr>
+        <p:blipFill>
+          <a:blip r:embed="rId2"/>
+          <a:stretch>
+            <a:fillRect/>
+          </a:stretch>
+        </p:blipFill>
+        <p:spPr>
+          <a:xfrm>
+            <a:off x="457200" y="1600200"/>
+            <a:ext cx="7589520" cy="1992276"/>
+          </a:xfrm>
+          <a:prstGeom prst="rect">
+            <a:avLst/>
+          </a:prstGeom>
+        </p:spPr>
+      </p:pic>
+      <p:sp>
+        <p:nvSpPr>
+          <p:cNvPr id="6" name="Rounded Rectangle 5"/>
           <p:cNvSpPr/>
           <p:nvPr/>
         </p:nvSpPr>
         <p:spPr>
           <a:xfrm>
-            <a:off x="640080" y="1691640"/>
-            <a:ext cx="5257800" cy="4297680"/>
+            <a:off x="8549640" y="1737360"/>
+            <a:ext cx="2423160" cy="1261872"/>
+          </a:xfrm>
+          <a:prstGeom prst="roundRect">
+            <a:avLst/>
+          </a:prstGeom>
+          <a:solidFill>
+            <a:srgbClr val="143058"/>
+          </a:solidFill>
+          <a:ln>
+            <a:solidFill>
+              <a:srgbClr val="FB8500"/>
+            </a:solidFill>
+          </a:ln>
+        </p:spPr>
+        <p:style>
+          <a:lnRef idx="1">
+            <a:schemeClr val="accent1"/>
+          </a:lnRef>
+          <a:fillRef idx="3">
+            <a:schemeClr val="accent1"/>
+          </a:fillRef>
+          <a:effectRef idx="2">
+            <a:schemeClr val="accent1"/>
+          </a:effectRef>
+          <a:fontRef idx="minor">
+            <a:schemeClr val="lt1"/>
+          </a:fontRef>
+        </p:style>
+        <p:txBody>
+          <a:bodyPr rtlCol="0" anchor="ctr"/>
+          <a:lstStyle/>
+          <a:p>
+            <a:pPr algn="ctr"/>
+          </a:p>
+        </p:txBody>
+      </p:sp>
+      <p:sp>
+        <p:nvSpPr>
+          <p:cNvPr id="7" name="TextBox 6"/>
+          <p:cNvSpPr txBox="1"/>
+          <p:nvPr/>
+        </p:nvSpPr>
+        <p:spPr>
+          <a:xfrm>
+            <a:off x="8659367" y="1874519"/>
+            <a:ext cx="2194560" cy="438912"/>
+          </a:xfrm>
+          <a:prstGeom prst="rect">
+            <a:avLst/>
+          </a:prstGeom>
+          <a:noFill/>
+        </p:spPr>
+        <p:txBody>
+          <a:bodyPr wrap="square" anchor="t">
+            <a:spAutoFit/>
+          </a:bodyPr>
+          <a:lstStyle/>
+          <a:p>
+            <a:pPr algn="ctr">
+              <a:defRPr sz="2400" b="1">
+                <a:solidFill>
+                  <a:srgbClr val="FB8500"/>
+                </a:solidFill>
+                <a:latin typeface="Aptos"/>
+              </a:defRPr>
+            </a:pPr>
+            <a:r>
+              <a:t>0.032</a:t>
+            </a:r>
+          </a:p>
+        </p:txBody>
+      </p:sp>
+      <p:sp>
+        <p:nvSpPr>
+          <p:cNvPr id="8" name="TextBox 7"/>
+          <p:cNvSpPr txBox="1"/>
+          <p:nvPr/>
+        </p:nvSpPr>
+        <p:spPr>
+          <a:xfrm>
+            <a:off x="8659367" y="2395728"/>
+            <a:ext cx="2194560" cy="274320"/>
+          </a:xfrm>
+          <a:prstGeom prst="rect">
+            <a:avLst/>
+          </a:prstGeom>
+          <a:noFill/>
+        </p:spPr>
+        <p:txBody>
+          <a:bodyPr wrap="square" anchor="t">
+            <a:spAutoFit/>
+          </a:bodyPr>
+          <a:lstStyle/>
+          <a:p>
+            <a:pPr algn="ctr">
+              <a:defRPr sz="1100" b="1">
+                <a:solidFill>
+                  <a:srgbClr val="FFFFFF"/>
+                </a:solidFill>
+                <a:latin typeface="Aptos"/>
+              </a:defRPr>
+            </a:pPr>
+            <a:r>
+              <a:t>SCORE DRIFT · LOGISTIC</a:t>
+            </a:r>
+          </a:p>
+        </p:txBody>
+      </p:sp>
+      <p:sp>
+        <p:nvSpPr>
+          <p:cNvPr id="9" name="TextBox 8"/>
+          <p:cNvSpPr txBox="1"/>
+          <p:nvPr/>
+        </p:nvSpPr>
+        <p:spPr>
+          <a:xfrm>
+            <a:off x="8659367" y="2706624"/>
+            <a:ext cx="2194560" cy="164592"/>
+          </a:xfrm>
+          <a:prstGeom prst="rect">
+            <a:avLst/>
+          </a:prstGeom>
+          <a:noFill/>
+        </p:spPr>
+        <p:txBody>
+          <a:bodyPr wrap="square" anchor="t">
+            <a:spAutoFit/>
+          </a:bodyPr>
+          <a:lstStyle/>
+          <a:p>
+            <a:pPr algn="ctr">
+              <a:defRPr sz="800" b="0">
+                <a:solidFill>
+                  <a:srgbClr val="F0F4F8"/>
+                </a:solidFill>
+                <a:latin typeface="Aptos"/>
+              </a:defRPr>
+            </a:pPr>
+            <a:r>
+              <a:t>lowest on all 28 pairs · XGB 0.035 · TabICL 0.035</a:t>
+            </a:r>
+          </a:p>
+        </p:txBody>
+      </p:sp>
+      <p:sp>
+        <p:nvSpPr>
+          <p:cNvPr id="10" name="Rounded Rectangle 9"/>
+          <p:cNvSpPr/>
+          <p:nvPr/>
+        </p:nvSpPr>
+        <p:spPr>
+          <a:xfrm>
+            <a:off x="8549640" y="3200400"/>
+            <a:ext cx="2423160" cy="1261872"/>
           </a:xfrm>
           <a:prstGeom prst="roundRect">
             <a:avLst/>
@@ -14543,14 +14694,14 @@
       </p:sp>
       <p:sp>
         <p:nvSpPr>
-          <p:cNvPr id="6" name="TextBox 5"/>
-          <p:cNvSpPr txBox="1"/>
-          <p:nvPr/>
-        </p:nvSpPr>
-        <p:spPr>
-          <a:xfrm>
-            <a:off x="868680" y="1965960"/>
-            <a:ext cx="4800600" cy="365760"/>
+          <p:cNvPr id="11" name="TextBox 10"/>
+          <p:cNvSpPr txBox="1"/>
+          <p:nvPr/>
+        </p:nvSpPr>
+        <p:spPr>
+          <a:xfrm>
+            <a:off x="8659367" y="3337560"/>
+            <a:ext cx="2194560" cy="438912"/>
           </a:xfrm>
           <a:prstGeom prst="rect">
             <a:avLst/>
@@ -14564,7 +14715,7 @@
           <a:lstStyle/>
           <a:p>
             <a:pPr algn="ctr">
-              <a:defRPr sz="2000" b="1">
+              <a:defRPr sz="2400" b="1">
                 <a:solidFill>
                   <a:srgbClr val="00B4B4"/>
                 </a:solidFill>
@@ -14572,21 +14723,21 @@
               </a:defRPr>
             </a:pPr>
             <a:r>
-              <a:t>SCORE CALIBRATION</a:t>
-            </a:r>
-          </a:p>
-        </p:txBody>
-      </p:sp>
-      <p:sp>
-        <p:nvSpPr>
-          <p:cNvPr id="7" name="TextBox 6"/>
-          <p:cNvSpPr txBox="1"/>
-          <p:nvPr/>
-        </p:nvSpPr>
-        <p:spPr>
-          <a:xfrm>
-            <a:off x="960119" y="2679192"/>
-            <a:ext cx="4617720" cy="3063240"/>
+              <a:t>75%–78%</a:t>
+            </a:r>
+          </a:p>
+        </p:txBody>
+      </p:sp>
+      <p:sp>
+        <p:nvSpPr>
+          <p:cNvPr id="12" name="TextBox 11"/>
+          <p:cNvSpPr txBox="1"/>
+          <p:nvPr/>
+        </p:nvSpPr>
+        <p:spPr>
+          <a:xfrm>
+            <a:off x="8659367" y="3858768"/>
+            <a:ext cx="2194560" cy="274320"/>
           </a:xfrm>
           <a:prstGeom prst="rect">
             <a:avLst/>
@@ -14600,7 +14751,43 @@
           <a:lstStyle/>
           <a:p>
             <a:pPr algn="ctr">
-              <a:defRPr sz="1500" b="0">
+              <a:defRPr sz="1100" b="1">
+                <a:solidFill>
+                  <a:srgbClr val="FFFFFF"/>
+                </a:solidFill>
+                <a:latin typeface="Aptos"/>
+              </a:defRPr>
+            </a:pPr>
+            <a:r>
+              <a:t>TOP-20% JACCARD</a:t>
+            </a:r>
+          </a:p>
+        </p:txBody>
+      </p:sp>
+      <p:sp>
+        <p:nvSpPr>
+          <p:cNvPr id="13" name="TextBox 12"/>
+          <p:cNvSpPr txBox="1"/>
+          <p:nvPr/>
+        </p:nvSpPr>
+        <p:spPr>
+          <a:xfrm>
+            <a:off x="8659367" y="4169664"/>
+            <a:ext cx="2194560" cy="164592"/>
+          </a:xfrm>
+          <a:prstGeom prst="rect">
+            <a:avLst/>
+          </a:prstGeom>
+          <a:noFill/>
+        </p:spPr>
+        <p:txBody>
+          <a:bodyPr wrap="square" anchor="t">
+            <a:spAutoFit/>
+          </a:bodyPr>
+          <a:lstStyle/>
+          <a:p>
+            <a:pPr algn="ctr">
+              <a:defRPr sz="800" b="0">
                 <a:solidFill>
                   <a:srgbClr val="F0F4F8"/>
                 </a:solidFill>
@@ -14608,31 +14795,21 @@
               </a:defRPr>
             </a:pPr>
             <a:r>
-              <a:t>Women are over-predicted by every model: mean score 0.52 vs observed 0.45</a:t>
-            </a:r>
-            <a:br/>
-            <a:br/>
-            <a:r>
-              <a:t>Yet they are selected less at the top 20%</a:t>
-            </a:r>
-            <a:br/>
-            <a:br/>
-            <a:r>
-              <a:t>For support, over-prediction helps women: recalibrating would widen the FNR gap</a:t>
-            </a:r>
-          </a:p>
-        </p:txBody>
-      </p:sp>
-      <p:sp>
-        <p:nvSpPr>
-          <p:cNvPr id="8" name="Rounded Rectangle 7"/>
+              <a:t>logit 0.772 · XGB 0.747 · TabICL 0.776</a:t>
+            </a:r>
+          </a:p>
+        </p:txBody>
+      </p:sp>
+      <p:sp>
+        <p:nvSpPr>
+          <p:cNvPr id="14" name="Rounded Rectangle 13"/>
           <p:cNvSpPr/>
           <p:nvPr/>
         </p:nvSpPr>
         <p:spPr>
           <a:xfrm>
-            <a:off x="6263640" y="1691640"/>
-            <a:ext cx="5257800" cy="4297680"/>
+            <a:off x="8549640" y="4663440"/>
+            <a:ext cx="2423160" cy="1261872"/>
           </a:xfrm>
           <a:prstGeom prst="roundRect">
             <a:avLst/>
@@ -14670,14 +14847,14 @@
       </p:sp>
       <p:sp>
         <p:nvSpPr>
-          <p:cNvPr id="9" name="TextBox 8"/>
-          <p:cNvSpPr txBox="1"/>
-          <p:nvPr/>
-        </p:nvSpPr>
-        <p:spPr>
-          <a:xfrm>
-            <a:off x="6492240" y="1965960"/>
-            <a:ext cx="4800600" cy="365760"/>
+          <p:cNvPr id="15" name="TextBox 14"/>
+          <p:cNvSpPr txBox="1"/>
+          <p:nvPr/>
+        </p:nvSpPr>
+        <p:spPr>
+          <a:xfrm>
+            <a:off x="8659367" y="4800600"/>
+            <a:ext cx="2194560" cy="438912"/>
           </a:xfrm>
           <a:prstGeom prst="rect">
             <a:avLst/>
@@ -14691,7 +14868,7 @@
           <a:lstStyle/>
           <a:p>
             <a:pPr algn="ctr">
-              <a:defRPr sz="2000" b="1">
+              <a:defRPr sz="2400" b="1">
                 <a:solidFill>
                   <a:srgbClr val="D64343"/>
                 </a:solidFill>
@@ -14699,21 +14876,21 @@
               </a:defRPr>
             </a:pPr>
             <a:r>
-              <a:t>ALLOCATION ERRORS</a:t>
-            </a:r>
-          </a:p>
-        </p:txBody>
-      </p:sp>
-      <p:sp>
-        <p:nvSpPr>
-          <p:cNvPr id="10" name="TextBox 9"/>
-          <p:cNvSpPr txBox="1"/>
-          <p:nvPr/>
-        </p:nvSpPr>
-        <p:spPr>
-          <a:xfrm>
-            <a:off x="6583679" y="2679192"/>
-            <a:ext cx="4617720" cy="3063240"/>
+              <a:t>14%</a:t>
+            </a:r>
+          </a:p>
+        </p:txBody>
+      </p:sp>
+      <p:sp>
+        <p:nvSpPr>
+          <p:cNvPr id="16" name="TextBox 15"/>
+          <p:cNvSpPr txBox="1"/>
+          <p:nvPr/>
+        </p:nvSpPr>
+        <p:spPr>
+          <a:xfrm>
+            <a:off x="8659367" y="5321807"/>
+            <a:ext cx="2194560" cy="274320"/>
           </a:xfrm>
           <a:prstGeom prst="rect">
             <a:avLst/>
@@ -14727,7 +14904,43 @@
           <a:lstStyle/>
           <a:p>
             <a:pPr algn="ctr">
-              <a:defRPr sz="1500" b="0">
+              <a:defRPr sz="1100" b="1">
+                <a:solidFill>
+                  <a:srgbClr val="FFFFFF"/>
+                </a:solidFill>
+                <a:latin typeface="Aptos"/>
+              </a:defRPr>
+            </a:pPr>
+            <a:r>
+              <a:t>DECISIONS THAT FLIP</a:t>
+            </a:r>
+          </a:p>
+        </p:txBody>
+      </p:sp>
+      <p:sp>
+        <p:nvSpPr>
+          <p:cNvPr id="17" name="TextBox 16"/>
+          <p:cNvSpPr txBox="1"/>
+          <p:nvPr/>
+        </p:nvSpPr>
+        <p:spPr>
+          <a:xfrm>
+            <a:off x="8659367" y="5632704"/>
+            <a:ext cx="2194560" cy="164592"/>
+          </a:xfrm>
+          <a:prstGeom prst="rect">
+            <a:avLst/>
+          </a:prstGeom>
+          <a:noFill/>
+        </p:spPr>
+        <p:txBody>
+          <a:bodyPr wrap="square" anchor="t">
+            <a:spAutoFit/>
+          </a:bodyPr>
+          <a:lstStyle/>
+          <a:p>
+            <a:pPr algn="ctr">
+              <a:defRPr sz="800" b="0">
                 <a:solidFill>
                   <a:srgbClr val="F0F4F8"/>
                 </a:solidFill>
@@ -14735,24 +14948,50 @@
               </a:defRPr>
             </a:pPr>
             <a:r>
-              <a:t>FPR, TPR and selection rates depend on policy</a:t>
-            </a:r>
-            <a:br/>
-            <a:br/>
-            <a:r>
-              <a:t>Changing thresholds leaves probabilities unchanged</a:t>
-            </a:r>
-            <a:br/>
-            <a:br/>
-            <a:r>
-              <a:t>Our threshold frontier uses evaluation labels: illustrative, not validated</a:t>
-            </a:r>
-          </a:p>
-        </p:txBody>
-      </p:sp>
-      <p:sp>
-        <p:nvSpPr>
-          <p:cNvPr id="11" name="TextBox 10"/>
+              <a:t>per person, across 8 refits (appendix A7)</a:t>
+            </a:r>
+          </a:p>
+        </p:txBody>
+      </p:sp>
+      <p:sp>
+        <p:nvSpPr>
+          <p:cNvPr id="18" name="TextBox 17"/>
+          <p:cNvSpPr txBox="1"/>
+          <p:nvPr/>
+        </p:nvSpPr>
+        <p:spPr>
+          <a:xfrm>
+            <a:off x="914400" y="6236208"/>
+            <a:ext cx="10058400" cy="274320"/>
+          </a:xfrm>
+          <a:prstGeom prst="rect">
+            <a:avLst/>
+          </a:prstGeom>
+          <a:noFill/>
+        </p:spPr>
+        <p:txBody>
+          <a:bodyPr wrap="square" anchor="t">
+            <a:spAutoFit/>
+          </a:bodyPr>
+          <a:lstStyle/>
+          <a:p>
+            <a:pPr algn="ctr">
+              <a:defRPr sz="1100" b="1">
+                <a:solidFill>
+                  <a:srgbClr val="828FA0"/>
+                </a:solidFill>
+                <a:latin typeface="Aptos"/>
+              </a:defRPr>
+            </a:pPr>
+            <a:r>
+              <a:t>Eight bootstrap refits per model, same resamples for all three. Jaccard is intersection / union, not the share switching.</a:t>
+            </a:r>
+          </a:p>
+        </p:txBody>
+      </p:sp>
+      <p:sp>
+        <p:nvSpPr>
+          <p:cNvPr id="19" name="TextBox 18"/>
           <p:cNvSpPr txBox="1"/>
           <p:nvPr/>
         </p:nvSpPr>
@@ -14788,7 +15027,7 @@
       </p:sp>
       <p:sp>
         <p:nvSpPr>
-          <p:cNvPr id="12" name="TextBox 11"/>
+          <p:cNvPr id="20" name="TextBox 19"/>
           <p:cNvSpPr txBox="1"/>
           <p:nvPr/>
         </p:nvSpPr>
@@ -14879,7 +15118,7 @@
               </a:defRPr>
             </a:pPr>
             <a:r>
-              <a:t>08 · FAIRNESS INTERPRETABILITY (FPDP)</a:t>
+              <a:t>08 · SUBGROUP AUDIT</a:t>
             </a:r>
           </a:p>
         </p:txBody>
@@ -14915,7 +15154,7 @@
               </a:defRPr>
             </a:pPr>
             <a:r>
-              <a:t>Where does the gender gap come from?</a:t>
+              <a:t>Fairness at the proposed allocation rule</a:t>
             </a:r>
           </a:p>
         </p:txBody>
@@ -14965,7 +15204,7 @@
       </p:sp>
       <p:pic>
         <p:nvPicPr>
-          <p:cNvPr id="5" name="Picture 4" descr="fpdp_gender.png"/>
+          <p:cNvPr id="5" name="Picture 4" descr="fairness_support_access.png"/>
           <p:cNvPicPr>
             <a:picLocks noChangeAspect="1"/>
           </p:cNvPicPr>
@@ -14979,8 +15218,8 @@
         </p:blipFill>
         <p:spPr>
           <a:xfrm>
-            <a:off x="320040" y="1508760"/>
-            <a:ext cx="7680960" cy="4743933"/>
+            <a:off x="365760" y="1554480"/>
+            <a:ext cx="7772400" cy="4216673"/>
           </a:xfrm>
           <a:prstGeom prst="rect">
             <a:avLst/>
@@ -14995,8 +15234,8 @@
         </p:nvSpPr>
         <p:spPr>
           <a:xfrm>
-            <a:off x="8229600" y="1508760"/>
-            <a:ext cx="3611880" cy="4572000"/>
+            <a:off x="8549640" y="1737360"/>
+            <a:ext cx="2423160" cy="1261872"/>
           </a:xfrm>
           <a:prstGeom prst="roundRect">
             <a:avLst/>
@@ -15040,8 +15279,8 @@
         </p:nvSpPr>
         <p:spPr>
           <a:xfrm>
-            <a:off x="8458200" y="1783080"/>
-            <a:ext cx="3154680" cy="365760"/>
+            <a:off x="8659367" y="1874519"/>
+            <a:ext cx="2194560" cy="438912"/>
           </a:xfrm>
           <a:prstGeom prst="rect">
             <a:avLst/>
@@ -15055,7 +15294,7 @@
           <a:lstStyle/>
           <a:p>
             <a:pPr algn="ctr">
-              <a:defRPr sz="2000" b="1">
+              <a:defRPr sz="2400" b="1">
                 <a:solidFill>
                   <a:srgbClr val="D64343"/>
                 </a:solidFill>
@@ -15063,7 +15302,7 @@
               </a:defRPr>
             </a:pPr>
             <a:r>
-              <a:t>CANDIDATE: GANG</a:t>
+              <a:t>-0.10 to -0.12</a:t>
             </a:r>
           </a:p>
         </p:txBody>
@@ -15076,59 +15315,8 @@
         </p:nvSpPr>
         <p:spPr>
           <a:xfrm>
-            <a:off x="8549640" y="2496312"/>
-            <a:ext cx="2971800" cy="3337560"/>
-          </a:xfrm>
-          <a:prstGeom prst="rect">
-            <a:avLst/>
-          </a:prstGeom>
-          <a:noFill/>
-        </p:spPr>
-        <p:txBody>
-          <a:bodyPr wrap="square" anchor="t">
-            <a:spAutoFit/>
-          </a:bodyPr>
-          <a:lstStyle/>
-          <a:p>
-            <a:pPr algn="ctr">
-              <a:defRPr sz="1500" b="0">
-                <a:solidFill>
-                  <a:srgbClr val="F0F4F8"/>
-                </a:solidFill>
-                <a:latin typeface="Aptos"/>
-              </a:defRPr>
-            </a:pPr>
-            <a:r>
-              <a:t>Never recorded for women; imputed as "No"</a:t>
-            </a:r>
-            <a:br/>
-            <a:br/>
-            <a:r>
-              <a:t>Drop + re-estimate (logistic): FNR gap -0.096 → +0.000</a:t>
-            </a:r>
-            <a:br/>
-            <a:br/>
-            <a:r>
-              <a:t>Women FNR 0.80 → 0.72; men 0.70 → 0.72</a:t>
-            </a:r>
-            <a:br/>
-            <a:br/>
-            <a:r>
-              <a:t>AUC −0.014; 27 fewer re-arrests captured</a:t>
-            </a:r>
-          </a:p>
-        </p:txBody>
-      </p:sp>
-      <p:sp>
-        <p:nvSpPr>
-          <p:cNvPr id="9" name="TextBox 8"/>
-          <p:cNvSpPr txBox="1"/>
-          <p:nvPr/>
-        </p:nvSpPr>
-        <p:spPr>
-          <a:xfrm>
-            <a:off x="914400" y="6236208"/>
-            <a:ext cx="10058400" cy="274320"/>
+            <a:off x="8659367" y="2395728"/>
+            <a:ext cx="2194560" cy="274320"/>
           </a:xfrm>
           <a:prstGeom prst="rect">
             <a:avLst/>
@@ -15144,20 +15332,398 @@
             <a:pPr algn="ctr">
               <a:defRPr sz="1100" b="1">
                 <a:solidFill>
+                  <a:srgbClr val="FFFFFF"/>
+                </a:solidFill>
+                <a:latin typeface="Aptos"/>
+              </a:defRPr>
+            </a:pPr>
+            <a:r>
+              <a:t>GENDER FNR GAP (M − F)</a:t>
+            </a:r>
+          </a:p>
+        </p:txBody>
+      </p:sp>
+      <p:sp>
+        <p:nvSpPr>
+          <p:cNvPr id="9" name="TextBox 8"/>
+          <p:cNvSpPr txBox="1"/>
+          <p:nvPr/>
+        </p:nvSpPr>
+        <p:spPr>
+          <a:xfrm>
+            <a:off x="8659367" y="2706624"/>
+            <a:ext cx="2194560" cy="164592"/>
+          </a:xfrm>
+          <a:prstGeom prst="rect">
+            <a:avLst/>
+          </a:prstGeom>
+          <a:noFill/>
+        </p:spPr>
+        <p:txBody>
+          <a:bodyPr wrap="square" anchor="t">
+            <a:spAutoFit/>
+          </a:bodyPr>
+          <a:lstStyle/>
+          <a:p>
+            <a:pPr algn="ctr">
+              <a:defRPr sz="800" b="0">
+                <a:solidFill>
+                  <a:srgbClr val="F0F4F8"/>
+                </a:solidFill>
+                <a:latin typeface="Aptos"/>
+              </a:defRPr>
+            </a:pPr>
+            <a:r>
+              <a:t>women miss support more · all significant</a:t>
+            </a:r>
+          </a:p>
+        </p:txBody>
+      </p:sp>
+      <p:sp>
+        <p:nvSpPr>
+          <p:cNvPr id="10" name="Rounded Rectangle 9"/>
+          <p:cNvSpPr/>
+          <p:nvPr/>
+        </p:nvSpPr>
+        <p:spPr>
+          <a:xfrm>
+            <a:off x="8549640" y="3200400"/>
+            <a:ext cx="2423160" cy="1261872"/>
+          </a:xfrm>
+          <a:prstGeom prst="roundRect">
+            <a:avLst/>
+          </a:prstGeom>
+          <a:solidFill>
+            <a:srgbClr val="143058"/>
+          </a:solidFill>
+          <a:ln>
+            <a:solidFill>
+              <a:srgbClr val="00B4B4"/>
+            </a:solidFill>
+          </a:ln>
+        </p:spPr>
+        <p:style>
+          <a:lnRef idx="1">
+            <a:schemeClr val="accent1"/>
+          </a:lnRef>
+          <a:fillRef idx="3">
+            <a:schemeClr val="accent1"/>
+          </a:fillRef>
+          <a:effectRef idx="2">
+            <a:schemeClr val="accent1"/>
+          </a:effectRef>
+          <a:fontRef idx="minor">
+            <a:schemeClr val="lt1"/>
+          </a:fontRef>
+        </p:style>
+        <p:txBody>
+          <a:bodyPr rtlCol="0" anchor="ctr"/>
+          <a:lstStyle/>
+          <a:p>
+            <a:pPr algn="ctr"/>
+          </a:p>
+        </p:txBody>
+      </p:sp>
+      <p:sp>
+        <p:nvSpPr>
+          <p:cNvPr id="11" name="TextBox 10"/>
+          <p:cNvSpPr txBox="1"/>
+          <p:nvPr/>
+        </p:nvSpPr>
+        <p:spPr>
+          <a:xfrm>
+            <a:off x="8659367" y="3337560"/>
+            <a:ext cx="2194560" cy="438912"/>
+          </a:xfrm>
+          <a:prstGeom prst="rect">
+            <a:avLst/>
+          </a:prstGeom>
+          <a:noFill/>
+        </p:spPr>
+        <p:txBody>
+          <a:bodyPr wrap="square" anchor="t">
+            <a:spAutoFit/>
+          </a:bodyPr>
+          <a:lstStyle/>
+          <a:p>
+            <a:pPr algn="ctr">
+              <a:defRPr sz="2400" b="1">
+                <a:solidFill>
+                  <a:srgbClr val="00B4B4"/>
+                </a:solidFill>
+                <a:latin typeface="Aptos"/>
+              </a:defRPr>
+            </a:pPr>
+            <a:r>
+              <a:t>3 / 3 models</a:t>
+            </a:r>
+          </a:p>
+        </p:txBody>
+      </p:sp>
+      <p:sp>
+        <p:nvSpPr>
+          <p:cNvPr id="12" name="TextBox 11"/>
+          <p:cNvSpPr txBox="1"/>
+          <p:nvPr/>
+        </p:nvSpPr>
+        <p:spPr>
+          <a:xfrm>
+            <a:off x="8659367" y="3858768"/>
+            <a:ext cx="2194560" cy="274320"/>
+          </a:xfrm>
+          <a:prstGeom prst="rect">
+            <a:avLst/>
+          </a:prstGeom>
+          <a:noFill/>
+        </p:spPr>
+        <p:txBody>
+          <a:bodyPr wrap="square" anchor="t">
+            <a:spAutoFit/>
+          </a:bodyPr>
+          <a:lstStyle/>
+          <a:p>
+            <a:pPr algn="ctr">
+              <a:defRPr sz="1100" b="1">
+                <a:solidFill>
+                  <a:srgbClr val="FFFFFF"/>
+                </a:solidFill>
+                <a:latin typeface="Aptos"/>
+              </a:defRPr>
+            </a:pPr>
+            <a:r>
+              <a:t>RACE: EQUIVALENT ±5 PTS</a:t>
+            </a:r>
+          </a:p>
+        </p:txBody>
+      </p:sp>
+      <p:sp>
+        <p:nvSpPr>
+          <p:cNvPr id="13" name="TextBox 12"/>
+          <p:cNvSpPr txBox="1"/>
+          <p:nvPr/>
+        </p:nvSpPr>
+        <p:spPr>
+          <a:xfrm>
+            <a:off x="8659367" y="4169664"/>
+            <a:ext cx="2194560" cy="164592"/>
+          </a:xfrm>
+          <a:prstGeom prst="rect">
+            <a:avLst/>
+          </a:prstGeom>
+          <a:noFill/>
+        </p:spPr>
+        <p:txBody>
+          <a:bodyPr wrap="square" anchor="t">
+            <a:spAutoFit/>
+          </a:bodyPr>
+          <a:lstStyle/>
+          <a:p>
+            <a:pPr algn="ctr">
+              <a:defRPr sz="800" b="0">
+                <a:solidFill>
+                  <a:srgbClr val="F0F4F8"/>
+                </a:solidFill>
+                <a:latin typeface="Aptos"/>
+              </a:defRPr>
+            </a:pPr>
+            <a:r>
+              <a:t>TOST on errors · AUC Black 0.72 vs White 0.75</a:t>
+            </a:r>
+          </a:p>
+        </p:txBody>
+      </p:sp>
+      <p:sp>
+        <p:nvSpPr>
+          <p:cNvPr id="14" name="Rounded Rectangle 13"/>
+          <p:cNvSpPr/>
+          <p:nvPr/>
+        </p:nvSpPr>
+        <p:spPr>
+          <a:xfrm>
+            <a:off x="8549640" y="4663440"/>
+            <a:ext cx="2423160" cy="1261872"/>
+          </a:xfrm>
+          <a:prstGeom prst="roundRect">
+            <a:avLst/>
+          </a:prstGeom>
+          <a:solidFill>
+            <a:srgbClr val="143058"/>
+          </a:solidFill>
+          <a:ln>
+            <a:solidFill>
+              <a:srgbClr val="FB8500"/>
+            </a:solidFill>
+          </a:ln>
+        </p:spPr>
+        <p:style>
+          <a:lnRef idx="1">
+            <a:schemeClr val="accent1"/>
+          </a:lnRef>
+          <a:fillRef idx="3">
+            <a:schemeClr val="accent1"/>
+          </a:fillRef>
+          <a:effectRef idx="2">
+            <a:schemeClr val="accent1"/>
+          </a:effectRef>
+          <a:fontRef idx="minor">
+            <a:schemeClr val="lt1"/>
+          </a:fontRef>
+        </p:style>
+        <p:txBody>
+          <a:bodyPr rtlCol="0" anchor="ctr"/>
+          <a:lstStyle/>
+          <a:p>
+            <a:pPr algn="ctr"/>
+          </a:p>
+        </p:txBody>
+      </p:sp>
+      <p:sp>
+        <p:nvSpPr>
+          <p:cNvPr id="15" name="TextBox 14"/>
+          <p:cNvSpPr txBox="1"/>
+          <p:nvPr/>
+        </p:nvSpPr>
+        <p:spPr>
+          <a:xfrm>
+            <a:off x="8659367" y="4800600"/>
+            <a:ext cx="2194560" cy="438912"/>
+          </a:xfrm>
+          <a:prstGeom prst="rect">
+            <a:avLst/>
+          </a:prstGeom>
+          <a:noFill/>
+        </p:spPr>
+        <p:txBody>
+          <a:bodyPr wrap="square" anchor="t">
+            <a:spAutoFit/>
+          </a:bodyPr>
+          <a:lstStyle/>
+          <a:p>
+            <a:pPr algn="ctr">
+              <a:defRPr sz="2400" b="1">
+                <a:solidFill>
                   <a:srgbClr val="FB8500"/>
                 </a:solidFill>
                 <a:latin typeface="Aptos"/>
               </a:defRPr>
             </a:pPr>
             <a:r>
-              <a:t>Logistic FPDP is flat under a top-20% rule (a constant shifts every score equally), so it measures removing the feature, not a value.</a:t>
-            </a:r>
-          </a:p>
-        </p:txBody>
-      </p:sp>
-      <p:sp>
-        <p:nvSpPr>
-          <p:cNvPr id="10" name="TextBox 9"/>
+              <a:t>-0.23 to -0.24</a:t>
+            </a:r>
+          </a:p>
+        </p:txBody>
+      </p:sp>
+      <p:sp>
+        <p:nvSpPr>
+          <p:cNvPr id="16" name="TextBox 15"/>
+          <p:cNvSpPr txBox="1"/>
+          <p:nvPr/>
+        </p:nvSpPr>
+        <p:spPr>
+          <a:xfrm>
+            <a:off x="8659367" y="5321807"/>
+            <a:ext cx="2194560" cy="274320"/>
+          </a:xfrm>
+          <a:prstGeom prst="rect">
+            <a:avLst/>
+          </a:prstGeom>
+          <a:noFill/>
+        </p:spPr>
+        <p:txBody>
+          <a:bodyPr wrap="square" anchor="t">
+            <a:spAutoFit/>
+          </a:bodyPr>
+          <a:lstStyle/>
+          <a:p>
+            <a:pPr algn="ctr">
+              <a:defRPr sz="1100" b="1">
+                <a:solidFill>
+                  <a:srgbClr val="FFFFFF"/>
+                </a:solidFill>
+                <a:latin typeface="Aptos"/>
+              </a:defRPr>
+            </a:pPr>
+            <a:r>
+              <a:t>AGE FNR GAP (&lt;33 − 33+)</a:t>
+            </a:r>
+          </a:p>
+        </p:txBody>
+      </p:sp>
+      <p:sp>
+        <p:nvSpPr>
+          <p:cNvPr id="17" name="TextBox 16"/>
+          <p:cNvSpPr txBox="1"/>
+          <p:nvPr/>
+        </p:nvSpPr>
+        <p:spPr>
+          <a:xfrm>
+            <a:off x="8659367" y="5632704"/>
+            <a:ext cx="2194560" cy="164592"/>
+          </a:xfrm>
+          <a:prstGeom prst="rect">
+            <a:avLst/>
+          </a:prstGeom>
+          <a:noFill/>
+        </p:spPr>
+        <p:txBody>
+          <a:bodyPr wrap="square" anchor="t">
+            <a:spAutoFit/>
+          </a:bodyPr>
+          <a:lstStyle/>
+          <a:p>
+            <a:pPr algn="ctr">
+              <a:defRPr sz="800" b="0">
+                <a:solidFill>
+                  <a:srgbClr val="F0F4F8"/>
+                </a:solidFill>
+                <a:latin typeface="Aptos"/>
+              </a:defRPr>
+            </a:pPr>
+            <a:r>
+              <a:t>persists with age fixed: carried by prior record</a:t>
+            </a:r>
+          </a:p>
+        </p:txBody>
+      </p:sp>
+      <p:sp>
+        <p:nvSpPr>
+          <p:cNvPr id="18" name="TextBox 17"/>
+          <p:cNvSpPr txBox="1"/>
+          <p:nvPr/>
+        </p:nvSpPr>
+        <p:spPr>
+          <a:xfrm>
+            <a:off x="914400" y="6217920"/>
+            <a:ext cx="10058400" cy="274320"/>
+          </a:xfrm>
+          <a:prstGeom prst="rect">
+            <a:avLst/>
+          </a:prstGeom>
+          <a:noFill/>
+        </p:spPr>
+        <p:txBody>
+          <a:bodyPr wrap="square" anchor="t">
+            <a:spAutoFit/>
+          </a:bodyPr>
+          <a:lstStyle/>
+          <a:p>
+            <a:pPr algn="ctr">
+              <a:defRPr sz="1100" b="1">
+                <a:solidFill>
+                  <a:srgbClr val="FB8500"/>
+                </a:solidFill>
+                <a:latin typeface="Aptos"/>
+              </a:defRPr>
+            </a:pPr>
+            <a:r>
+              <a:t>Selection = support offered, so the harm is a missed offer: FNR is primary. Not significant ≠ fair; we test equivalence.</a:t>
+            </a:r>
+          </a:p>
+        </p:txBody>
+      </p:sp>
+      <p:sp>
+        <p:nvSpPr>
+          <p:cNvPr id="19" name="TextBox 18"/>
           <p:cNvSpPr txBox="1"/>
           <p:nvPr/>
         </p:nvSpPr>
@@ -15193,7 +15759,7 @@
       </p:sp>
       <p:sp>
         <p:nvSpPr>
-          <p:cNvPr id="11" name="TextBox 10"/>
+          <p:cNvPr id="20" name="TextBox 19"/>
           <p:cNvSpPr txBox="1"/>
           <p:nvPr/>
         </p:nvSpPr>

--- a/reports/ISAF_Recidivism_Presentation.pptx
+++ b/reports/ISAF_Recidivism_Presentation.pptx
@@ -10638,7 +10638,7 @@
         <p:spPr>
           <a:xfrm>
             <a:off x="502920" y="1600200"/>
-            <a:ext cx="11155680" cy="4030062"/>
+            <a:ext cx="11155680" cy="4043934"/>
           </a:xfrm>
           <a:prstGeom prst="rect">
             <a:avLst/>
